--- a/submissions/kaisennhu/07_答辩PPT/答辩介绍.pptx
+++ b/submissions/kaisennhu/07_答辩PPT/答辩介绍.pptx
@@ -16,7 +16,6 @@
     <p:sldId id="264" r:id="rId16"/>
     <p:sldId id="265" r:id="rId17"/>
     <p:sldId id="266" r:id="rId18"/>
-    <p:sldId id="267" r:id="rId19"/>
   </p:sldIdLst>
   <p:sldSz cx="12192000" cy="6858000" type="screen4x3"/>
   <p:notesSz cx="6858000" cy="9144000"/>
@@ -583,7 +582,7 @@
           <a:lstStyle/>
           <a:p>
             <a:r>
-              <a:t>这页专门回答调度算法开销，不把优化后的模拟J当成本机加速。所有数字来自主线验证报告和资源开销CSV。回调覆盖两个策略函数，正式策略本身没有计时器，测试使用外层计时器。逐例三轮取中位数后求和得到1.153s与0.831s；进程总时间同时包含框架执行、数据结构和JSON输入输出，故回调更慢而总程序更快并不矛盾。峰值取所有公开例正式轮的最大值，策略堆与RSS是不同范围。预热、编译和独立validator另计；共享主机噪声与硬件会影响实测值。不从总程序时间独立推断某一算法模块加速。扩展655条策略堆峰值13.06MiB；极端碎片探针1.58GiB，和公开集口径分开。</a:t>
+              <a:t>三张柱形图各自使用同一零点和比例，不能横向比较不同量纲的柱长。39条全Trace合计，前台指schedule_decisions内全部operation，排除promotion_decisions及框架自动命中H2D。两方案收到的未命中请求集合不同，这是完整方案比较，不是相同miss集合的模块消融。前台物理读分别41400624128B和35332572160B；GiB为2^30B。调用费按engine逐操作公式重算，和提升费、命中费相加严格等于官方CPU+NPU总费。DIRECT/AGGREGATE/FALLBACK操作分别105767/65366/6047→69417/12045/306。物理读合并与缓存有交互，不把14.66%单独归因给DP。总J为3581641→2273874，下降36.51%；自动分采用官方权重，所以总J百分比与评分不是一个口径。最小read_direct_high例中物理读均10MiB、CPU费40960→320、J64212→1483，可直接解释调用减少。39条启用策略的输出哈希与既有报告完全一致。</a:t>
             </a:r>
           </a:p>
         </p:txBody>
@@ -653,76 +652,6 @@
           <a:lstStyle/>
           <a:p>
             <a:r>
-              <a:t>三张柱形图各自使用同一零点和比例，不能横向比较不同量纲的柱长。39条全Trace合计，前台指schedule_decisions内全部operation，排除promotion_decisions及框架自动命中H2D。两方案收到的未命中请求集合不同，这是完整方案比较，不是相同miss集合的模块消融。前台物理读分别41400624128B和35332572160B；GiB为2^30B。调用费按engine逐操作公式重算，和提升费、命中费相加严格等于官方CPU+NPU总费。DIRECT/AGGREGATE/FALLBACK操作分别105767/65366/6047→69417/12045/306。物理读合并与缓存有交互，不把14.66%单独归因给DP。总J为3581641→2273874，下降36.51%；自动分采用官方权重，所以总J百分比与评分不是一个口径。最小read_direct_high例中物理读均10MiB、CPU费40960→320、J64212→1483，可直接解释调用减少。39条启用策略的输出哈希与既有报告完全一致。</a:t>
-            </a:r>
-          </a:p>
-        </p:txBody>
-      </p:sp>
-      <p:sp>
-        <p:nvSpPr>
-          <p:cNvPr id="4" name="Slide Number Placeholder 3"/>
-          <p:cNvSpPr>
-            <a:spLocks noGrp="1"/>
-          </p:cNvSpPr>
-          <p:nvPr>
-            <p:ph type="sldNum" idx="5" sz="quarter"/>
-          </p:nvPr>
-        </p:nvSpPr>
-        <p:spPr/>
-      </p:sp>
-    </p:spTree>
-  </p:cSld>
-  <p:clrMapOvr>
-    <a:masterClrMapping/>
-  </p:clrMapOvr>
-</p:notes>
-</file>
-
-<file path=ppt/notesSlides/notesSlide12.xml><?xml version="1.0" encoding="utf-8"?>
-<p:notes xmlns:a="http://schemas.openxmlformats.org/drawingml/2006/main" xmlns:p="http://schemas.openxmlformats.org/presentationml/2006/main" xmlns:r="http://schemas.openxmlformats.org/officeDocument/2006/relationships">
-  <p:cSld>
-    <p:spTree>
-      <p:nvGrpSpPr>
-        <p:cNvPr id="1" name=""/>
-        <p:cNvGrpSpPr/>
-        <p:nvPr/>
-      </p:nvGrpSpPr>
-      <p:grpSpPr>
-        <a:xfrm>
-          <a:off x="0" y="0"/>
-          <a:ext cx="0" cy="0"/>
-          <a:chOff x="0" y="0"/>
-          <a:chExt cx="0" cy="0"/>
-        </a:xfrm>
-      </p:grpSpPr>
-      <p:sp>
-        <p:nvSpPr>
-          <p:cNvPr id="2" name="Slide Image Placeholder 1"/>
-          <p:cNvSpPr>
-            <a:spLocks noGrp="1"/>
-          </p:cNvSpPr>
-          <p:nvPr>
-            <p:ph type="sldImg" idx="2"/>
-          </p:nvPr>
-        </p:nvSpPr>
-        <p:spPr/>
-      </p:sp>
-      <p:sp>
-        <p:nvSpPr>
-          <p:cNvPr id="3" name="Notes Placeholder 2"/>
-          <p:cNvSpPr>
-            <a:spLocks noGrp="1"/>
-          </p:cNvSpPr>
-          <p:nvPr>
-            <p:ph type="body" idx="3" sz="quarter"/>
-          </p:nvPr>
-        </p:nvSpPr>
-        <p:spPr/>
-        <p:txBody>
-          <a:bodyPr/>
-          <a:lstStyle/>
-          <a:p>
-            <a:r>
               <a:t>真实请求命中率=cache_hits/198542个请求，不使用engine的promote_hit_rate：该字段实际是promote_success/promote_count，只代表成功入池率。命中字节从未进入schedule_decisions的请求长度求和，和官方cache_hits计数交叉核验；它是缓存服务的逻辑字节，不能直接当成节省的物理SSD字节。提升搬运字节3.615GiB→0.305GiB，调用费722994→24676；命中复制仍付费81662→16806。缓存净收益对双方各自前台策略做关闭PROMOTE对照；保留其他参数及前台代码，计入缓存改变资源竞争、命中和后续选路的联动，是完整Trace净效应而非单次命中的价格。baseline关闭/启用总J3686550/3581641，净贡献104909；本方案2344079/2273874，净贡献70205。启用缓存相对关闭缓存：双方均6例正收益；贪心17例负收益，本方案2例负收益，其余持平。不能据绝对贡献较小声称缓存模块独立胜过贪心：更便宜的前台减少了可被缓存替代的成本。总J节省1307767可按官方计费恒等式拆为前台调用费408197、提升调用费698318、命中调用费64856、模拟时间费136396，费用拆分不是独立因果消融。39×双方×开关=156次运行均通过官方validator；单次测确定性成本，不产生新的墙钟速度结论。所有原启用版本输出哈希与已有三轮记录一致。扩展退化和极端碎片1.58GiB边界仍见验证报告。</a:t>
             </a:r>
           </a:p>
@@ -1003,7 +932,7 @@
           <a:lstStyle/>
           <a:p>
             <a:r>
-              <a:t>本页4次点击，左侧代码与右侧数据成组同步出现。1输入：SSD区间[0,512)、[512,1024)、[1024,1536)，目标分别对齐，不必彼此连续。2从i=0枚举终点j及AllPaths，每条边先过合法性过滤；表格展示整组的3条合法路径。3更新dp、prev、paths；前缀dp[1]和dp[2]也来自此前合法边。i=1和i=2的最佳延伸都为7.406，不能改写dp[3]=5.406。4回溯输出。数值为实际主线快速区间DP观测值，保留3位小数；计数搜索在此例也保留一个DIRECT组。E=5.406不等于最终J=6。演示是预先核验的原生PPT动画，不在放映时执行C++。输入与输出使用材料中的相邻对齐小读示例；临时观察版只增加日志，已与原始预编译程序和官方validator核对决策、事件、指标一致。简写把源码j+1统一记成半开区间终点j。</a:t>
+              <a:t>本页五次点击按执行顺序展开同一输入的代码和数值：1初始化，2联合枚举与组估价，3更新前缀和前驱，4细化 DP，5回溯与官方结果。代码为半开区间伪代码，源码把终点写成j+1。三个源区间[0,512)、[512,1024)、[1024,1536)，目标同卡且分别对齐，不必彼此连续。每条边表示一组片段加一条路径，两阶段均联合选边界和路径。快速DP先以3个片段/3个卡上请求估计qs=qc=3；本例time_cost_per_us=1、池空压力系数为1。读工作1536/(21504×2%×2^20)×10^6=3.40597970145μs；D2D按20×qc MiB/s估计，所以qc=3时复制24.4140625μs；H2D估计7.15255737305μs。三路径调用费分别2、5、12，故表中E是5.40597970145、32.8200422015、22.5585370745。显示值保留3位小数，不应当作实际J。dp[1]=3.135326567、dp[2]=4.270653134；两组的最优累计估价7.40597970145高于整组5.40597970145。细化 DP是同一分组问题增加组数维度：D[h][j]为前j段恰好h组的最低估价，固定cnt后重估带宽，最终看D[cnt][n]。其作用是控制搜索开销，同时缓解组数与并发互相依赖。系统保守空闲、规模及预算允许才运行；qs=active_ssd+cnt，复制并发按快速方案的卡号/类型比例估计，不等于统一取cnt。此例快速方案全DIRECT，细化阶段候选复制qc=1，所以整组AGGREGATE会重算为81.6481672015；不能继续使用快速表内32.820。本例按代码实际尝试顺序cnt=1、3、2，最低E分别5.40597970145、9.40597970145、7.40597970145，页面按组数升序展示。回溯后检验所有NDS请求槽位与两类缓冲池总量，按通过候选中的最低估价选计划，无通过候选则保留快速方案。条件、状态上限和200万预算详见算法文档及复杂度页。这不是精确全Trace最优，DP不规划未来、不决定PROMOTE，也不模拟执行中的队列和流水。最终一个DIRECT传输覆盖三个请求，官方实际Trace时间ceil(3.40597970145)=4μs、CPU=2、NPU=0、J=6；三个分别DIRECT则T=4μs、调用费6、J=10。该例已重新记录所有候选和细化DP终值，输出与原示例逐字节一致，并通过官方validator。</a:t>
             </a:r>
           </a:p>
         </p:txBody>
@@ -1073,7 +1002,7 @@
           <a:lstStyle/>
           <a:p>
             <a:r>
-              <a:t>n是排序后的片段数。公式中的E仍是工作量估价；左下两个J来自外部官方回放，不在策略内模拟。系统保守空闲要求无活动传输、排队IOCB、在途提升、占槽IOCB及旧未完成请求。入口还要求≤1024请求、≤2048iov、≤16384片段、初始操作≤2048，状态上限131072。n≤24时cnt全枚举，否则取公开q桶边界、几何序列、尺寸桶及最佳cnt邻域。D2D和H2D按卡区分，复制并发不是一律加cnt。全部NDS所有者按不同IOCB检查槽位，HBM/DDR缓冲分别检查总量。只是检查每个cnt最低估价的回溯结果，可能漏掉同cnt其他可行划分。复杂度表述按候选转移计，候选维护、索引和目标映射另有开销；不等于整程序内存或时间恒定。</a:t>
+              <a:t>四道条件与末尾数值例子各一次点击。缓存键按卡号、SSD起点、完整长度。命中通过缺少arrivals_登记辨认；已准入且无新的真实miss也不重复提升。复用还有字节距离不能超过池容量的检查。频率0&lt;gap&lt;TTL；新鲜度age&lt;TTL且age≤max(1微秒,gap+2jitter)，1微秒下限与TTL严格小于关系均按代码保留。gain扣除命中H2D费用，并按本卡份额、是否能被到达空隙吸收调整时间项。提升投入包含80固定费、来源传输和调用费，选较便宜来源。教学例取R=30、D=10、H=12、C=12、a=1、时间权重w=0、c_t=1，所以gain=10；每次可记预算52，第二次104不够112.5、第三次156足够。已有及在途占用计入需替换字节。这是算式假设不是实测Trace。credit是投入节制，不等于预测未来必命中的次数。</a:t>
             </a:r>
           </a:p>
         </p:txBody>
@@ -1143,7 +1072,7 @@
           <a:lstStyle/>
           <a:p>
             <a:r>
-              <a:t>四道条件与末尾数值例子各一次点击。缓存键按卡号、SSD起点、完整长度。命中通过缺少arrivals_登记辨认；已准入且无新的真实miss也不重复提升。复用还有字节距离不能超过池容量的检查。频率0&lt;gap&lt;TTL；新鲜度age&lt;TTL且age≤max(1微秒,gap+2jitter)，1微秒下限与TTL严格小于关系均按代码保留。gain扣除命中H2D费用，并按本卡份额、是否能被到达空隙吸收调整时间项。提升投入包含80固定费、来源传输和调用费，选较便宜来源。教学例取R=30、D=10、H=12、C=12、a=1、时间权重w=0、c_t=1，所以gain=10；每次可记预算52，第二次104不够112.5、第三次156足够。已有及在途占用计入需替换字节。这是算式假设不是实测Trace。credit是投入节制，不等于预测未来必命中的次数。</a:t>
+              <a:t>IovIndex、Piece和DP是当前批规划结构。Work在on_submit最终选定后，按组内各请求的有效字节分摊读、复制工作与调用费，并带上本卡有效字节占比card_share；完成时消费。History跨请求维护。promotions_记录在途提升状态，pending_keys_用于查重。这里不是把候选试算都记账，只记录真实提交计划。缓存同键可以复制到这张卡的另一个目标地址。大输入的索引、Work、返回JSON等仍可能增长，细化搜索预算不代表总内存恒定。</a:t>
             </a:r>
           </a:p>
         </p:txBody>
@@ -1213,7 +1142,7 @@
           <a:lstStyle/>
           <a:p>
             <a:r>
-              <a:t>IovIndex、Piece和DP是当前批规划结构。Work在on_submit最终选定后，按组内各请求的有效字节分摊读、复制工作与调用费，并带上本卡有效字节占比card_share；完成时消费。History跨请求维护。promotions_记录在途提升状态，pending_keys_用于查重。这里不是把候选试算都记账，只记录真实提交计划。缓存同键可以复制到这张卡的另一个目标地址。大输入的索引、Work、返回JSON等仍可能增长，计数搜索预算不代表总内存恒定。</a:t>
+              <a:t>Vmax为单个请求最多iov数，L为最终片段与目标iov的有效交集数。快速DP每个起点至多扩展W个片段，每组比较三条路径；维护std::set的所有者集合带log W因子，因此仅这一核心的保守界为O(nW log(W+1))。固定cnt时DP状态至多cnt*n，每状态看至多3W条边；若无采样和预算约束，全枚举cnt=1..n的核心转移上界可达O(n^3 W)。实现使用采样，单次状态上限131072、合法边上限262144，估价和转移每批共享2000000预算。状态/边预检查以及回溯后的所有者和缓冲检查另计。复制估价按卡维护映射，也有集合访问成本。后台若有R个在途提升和A个活动传输，同步约O(R log(R+1))，还扫描A项、查history和未完成请求map；不逐次扫描全部缓存。history_queue最多131072条更新记录，未完成Work及输入输出不受这一常数限制。这里按模块分析，没有把整个策略概括为O(nW)。</a:t>
             </a:r>
           </a:p>
         </p:txBody>
@@ -1283,7 +1212,7 @@
           <a:lstStyle/>
           <a:p>
             <a:r>
-              <a:t>Vmax为单个请求最多iov数，L为最终片段与目标iov的有效交集数。快速DP每个起点至多扩展W个片段，每组比较三条路径；维护std::set的所有者集合带log W因子，因此仅这一核心的保守界为O(nW log(W+1))。固定cnt时DP状态至多cnt*n，每状态看至多3W条边；若无采样和预算约束，全枚举cnt=1..n的核心转移上界可达O(n^3 W)。实现使用采样，单次状态上限131072、合法边上限262144，估价和转移每批共享2000000预算。状态/边预检查以及回溯后的所有者和缓冲检查另计。复制估价按卡维护映射，也有集合访问成本。后台若有R个在途提升和A个活动传输，同步约O(R log(R+1))，还扫描A项、查history和未完成请求map；不逐次扫描全部缓存。history_queue最多131072条更新记录，未完成Work及输入输出不受这一常数限制。这里按模块分析，没有把整个策略概括为O(nW)。</a:t>
+              <a:t>这页专门回答调度算法开销，不把优化后的模拟J当成本机加速。所有数字来自主线验证报告和资源开销CSV。回调覆盖两个策略函数，正式策略本身没有计时器，测试使用外层计时器。逐例三轮取中位数后求和得到1.153s与0.831s；进程总时间同时包含框架执行、数据结构和JSON输入输出，故回调更慢而总程序更快并不矛盾。峰值取所有公开例正式轮的最大值，策略堆与RSS是不同范围。预热、编译和独立validator另计；共享主机噪声与硬件会影响实测值。不从总程序时间独立推断某一算法模块加速。扩展655条策略堆峰值13.06MiB；极端碎片探针1.58GiB，和公开集口径分开。</a:t>
             </a:r>
           </a:p>
         </p:txBody>
@@ -4601,7 +4530,7 @@
       <p:grpSpPr/>
       <p:sp>
         <p:nvSpPr>
-          <p:cNvPr id="2" name="调度算法开销 · 实测时间与空间"/>
+          <p:cNvPr id="2" name="性能对比 · 前台指标"/>
           <p:cNvSpPr txBox="1"/>
           <p:nvPr/>
         </p:nvSpPr>
@@ -4638,14 +4567,14 @@
                 <a:latin typeface="Microsoft YaHei"/>
                 <a:ea typeface="Microsoft YaHei"/>
               </a:rPr>
-              <a:t>调度算法开销 · 实测时间与空间</a:t>
-            </a:r>
-          </a:p>
-        </p:txBody>
-      </p:sp>
-      <p:sp>
-        <p:nvSpPr>
-          <p:cNvPr id="3" name="调度计算多花多少时间，整个程序占用多少资源"/>
+              <a:t>性能对比 · 前台指标</a:t>
+            </a:r>
+          </a:p>
+        </p:txBody>
+      </p:sp>
+      <p:sp>
+        <p:nvSpPr>
+          <p:cNvPr id="3" name="前台：操作数减少 53.85%，调用费减少 66.82%"/>
           <p:cNvSpPr txBox="1"/>
           <p:nvPr/>
         </p:nvSpPr>
@@ -4682,14 +4611,14 @@
                 <a:latin typeface="Microsoft YaHei"/>
                 <a:ea typeface="Microsoft YaHei"/>
               </a:rPr>
-              <a:t>调度计算多花多少时间，整个程序占用多少资源</a:t>
-            </a:r>
-          </a:p>
-        </p:txBody>
-      </p:sp>
-      <p:sp>
-        <p:nvSpPr>
-          <p:cNvPr id="4" name="39 条公开输入：同一计量入口，每例预热一次，交替测三轮；时间取逐例中位数再求和。"/>
+              <a:t>前台：操作数减少 53.85%，调用费减少 66.82%</a:t>
+            </a:r>
+          </a:p>
+        </p:txBody>
+      </p:sp>
+      <p:sp>
+        <p:nvSpPr>
+          <p:cNvPr id="4" name="39 条公开输入；仅统计前台 operation，排除 PROMOTE 和框架命中复制。每组柱形从零起算。"/>
           <p:cNvSpPr txBox="1"/>
           <p:nvPr/>
         </p:nvSpPr>
@@ -4726,7 +4655,7 @@
                 <a:latin typeface="Microsoft YaHei"/>
                 <a:ea typeface="Microsoft YaHei"/>
               </a:rPr>
-              <a:t>39 条公开输入：同一计量入口，每例预热一次，交替测三轮；时间取逐例中位数再求和。</a:t>
+              <a:t>39 条公开输入；仅统计前台 operation，排除 PROMOTE 和框架命中复制。每组柱形从零起算。</a:t>
             </a:r>
           </a:p>
         </p:txBody>
@@ -4857,20 +4786,108 @@
       </p:sp>
       <p:sp>
         <p:nvSpPr>
-          <p:cNvPr id="8" name="Rectangle 7"/>
+          <p:cNvPr id="8" name="读操作数"/>
+          <p:cNvSpPr txBox="1"/>
+          <p:nvPr/>
+        </p:nvSpPr>
+        <p:spPr>
+          <a:xfrm>
+            <a:off x="609600" y="2124075"/>
+            <a:ext cx="3352800" cy="314325"/>
+          </a:xfrm>
+          <a:prstGeom prst="rect">
+            <a:avLst/>
+          </a:prstGeom>
+          <a:noFill/>
+          <a:effectLst/>
+        </p:spPr>
+        <p:txBody>
+          <a:bodyPr wrap="square" lIns="0" rIns="0" tIns="0" bIns="0">
+            <a:spAutoFit/>
+          </a:bodyPr>
+          <a:lstStyle/>
+          <a:p>
+            <a:pPr algn="l">
+              <a:lnSpc>
+                <a:spcPct val="112000"/>
+              </a:lnSpc>
+              <a:spcAft>
+                <a:spcPts val="500"/>
+              </a:spcAft>
+            </a:pPr>
+            <a:r>
+              <a:rPr sz="1950" b="1" lang="zh-CN">
+                <a:solidFill>
+                  <a:srgbClr val="285EA8"/>
+                </a:solidFill>
+                <a:latin typeface="Microsoft YaHei"/>
+                <a:ea typeface="Microsoft YaHei"/>
+              </a:rPr>
+              <a:t>读操作数</a:t>
+            </a:r>
+          </a:p>
+        </p:txBody>
+      </p:sp>
+      <p:sp>
+        <p:nvSpPr>
+          <p:cNvPr id="9" name="官方贪心  177,180 次"/>
+          <p:cNvSpPr txBox="1"/>
+          <p:nvPr/>
+        </p:nvSpPr>
+        <p:spPr>
+          <a:xfrm>
+            <a:off x="609600" y="2571750"/>
+            <a:ext cx="3352800" cy="276225"/>
+          </a:xfrm>
+          <a:prstGeom prst="rect">
+            <a:avLst/>
+          </a:prstGeom>
+          <a:noFill/>
+          <a:effectLst/>
+        </p:spPr>
+        <p:txBody>
+          <a:bodyPr wrap="square" lIns="0" rIns="0" tIns="0" bIns="0">
+            <a:spAutoFit/>
+          </a:bodyPr>
+          <a:lstStyle/>
+          <a:p>
+            <a:pPr algn="l">
+              <a:lnSpc>
+                <a:spcPct val="112000"/>
+              </a:lnSpc>
+              <a:spcAft>
+                <a:spcPts val="500"/>
+              </a:spcAft>
+            </a:pPr>
+            <a:r>
+              <a:rPr sz="1575" b="0" lang="zh-CN">
+                <a:solidFill>
+                  <a:srgbClr val="657184"/>
+                </a:solidFill>
+                <a:latin typeface="Microsoft YaHei"/>
+                <a:ea typeface="Microsoft YaHei"/>
+              </a:rPr>
+              <a:t>官方贪心  177,180 次</a:t>
+            </a:r>
+          </a:p>
+        </p:txBody>
+      </p:sp>
+      <p:sp>
+        <p:nvSpPr>
+          <p:cNvPr id="10" name="Rectangle 9"/>
           <p:cNvSpPr/>
           <p:nvPr/>
         </p:nvSpPr>
         <p:spPr>
           <a:xfrm>
-            <a:off x="609600" y="2152650"/>
-            <a:ext cx="3276600" cy="409575"/>
+            <a:off x="609600" y="2905125"/>
+            <a:ext cx="3238500" cy="180975"/>
           </a:xfrm>
           <a:prstGeom prst="rect">
             <a:avLst/>
           </a:prstGeom>
           <a:solidFill>
-            <a:srgbClr val="EDF3FA"/>
+            <a:srgbClr val="C8D2DF"/>
           </a:solidFill>
           <a:ln>
             <a:noFill/>
@@ -4901,14 +4918,14 @@
       </p:sp>
       <p:sp>
         <p:nvSpPr>
-          <p:cNvPr id="9" name="指标"/>
+          <p:cNvPr id="11" name="本方案  81,768 次"/>
           <p:cNvSpPr txBox="1"/>
           <p:nvPr/>
         </p:nvSpPr>
         <p:spPr>
           <a:xfrm>
-            <a:off x="742950" y="2228850"/>
-            <a:ext cx="3009900" cy="285750"/>
+            <a:off x="609600" y="3228975"/>
+            <a:ext cx="3352800" cy="276225"/>
           </a:xfrm>
           <a:prstGeom prst="rect">
             <a:avLst/>
@@ -4931,34 +4948,34 @@
               </a:spcAft>
             </a:pPr>
             <a:r>
-              <a:rPr sz="1725" b="1" lang="zh-CN">
+              <a:rPr sz="1650" b="1" lang="zh-CN">
                 <a:solidFill>
                   <a:srgbClr val="285EA8"/>
                 </a:solidFill>
                 <a:latin typeface="Microsoft YaHei"/>
                 <a:ea typeface="Microsoft YaHei"/>
               </a:rPr>
-              <a:t>指标</a:t>
-            </a:r>
-          </a:p>
-        </p:txBody>
-      </p:sp>
-      <p:sp>
-        <p:nvSpPr>
-          <p:cNvPr id="10" name="Rectangle 9"/>
+              <a:t>本方案  81,768 次</a:t>
+            </a:r>
+          </a:p>
+        </p:txBody>
+      </p:sp>
+      <p:sp>
+        <p:nvSpPr>
+          <p:cNvPr id="12" name="Rectangle 11"/>
           <p:cNvSpPr/>
           <p:nvPr/>
         </p:nvSpPr>
         <p:spPr>
           <a:xfrm>
-            <a:off x="3886200" y="2152650"/>
-            <a:ext cx="1962150" cy="409575"/>
+            <a:off x="609600" y="3562350"/>
+            <a:ext cx="1494557" cy="180975"/>
           </a:xfrm>
           <a:prstGeom prst="rect">
             <a:avLst/>
           </a:prstGeom>
           <a:solidFill>
-            <a:srgbClr val="EDF3FA"/>
+            <a:srgbClr val="285EA8"/>
           </a:solidFill>
           <a:ln>
             <a:noFill/>
@@ -4989,14 +5006,14 @@
       </p:sp>
       <p:sp>
         <p:nvSpPr>
-          <p:cNvPr id="11" name="官方贪心"/>
+          <p:cNvPr id="13" name="减少 53.85%"/>
           <p:cNvSpPr txBox="1"/>
           <p:nvPr/>
         </p:nvSpPr>
         <p:spPr>
           <a:xfrm>
-            <a:off x="4019549" y="2228850"/>
-            <a:ext cx="1695450" cy="285750"/>
+            <a:off x="609600" y="3905249"/>
+            <a:ext cx="3352800" cy="295275"/>
           </a:xfrm>
           <a:prstGeom prst="rect">
             <a:avLst/>
@@ -5019,34 +5036,122 @@
               </a:spcAft>
             </a:pPr>
             <a:r>
-              <a:rPr sz="1725" b="1" lang="zh-CN">
+              <a:rPr sz="1875" b="1" lang="zh-CN">
                 <a:solidFill>
                   <a:srgbClr val="285EA8"/>
                 </a:solidFill>
                 <a:latin typeface="Microsoft YaHei"/>
                 <a:ea typeface="Microsoft YaHei"/>
               </a:rPr>
-              <a:t>官方贪心</a:t>
-            </a:r>
-          </a:p>
-        </p:txBody>
-      </p:sp>
-      <p:sp>
-        <p:nvSpPr>
-          <p:cNvPr id="12" name="Rectangle 11"/>
+              <a:t>减少 53.85%</a:t>
+            </a:r>
+          </a:p>
+        </p:txBody>
+      </p:sp>
+      <p:sp>
+        <p:nvSpPr>
+          <p:cNvPr id="14" name="物理 SSD 读取量"/>
+          <p:cNvSpPr txBox="1"/>
+          <p:nvPr/>
+        </p:nvSpPr>
+        <p:spPr>
+          <a:xfrm>
+            <a:off x="4343400" y="2124075"/>
+            <a:ext cx="3352800" cy="314325"/>
+          </a:xfrm>
+          <a:prstGeom prst="rect">
+            <a:avLst/>
+          </a:prstGeom>
+          <a:noFill/>
+          <a:effectLst/>
+        </p:spPr>
+        <p:txBody>
+          <a:bodyPr wrap="square" lIns="0" rIns="0" tIns="0" bIns="0">
+            <a:spAutoFit/>
+          </a:bodyPr>
+          <a:lstStyle/>
+          <a:p>
+            <a:pPr algn="l">
+              <a:lnSpc>
+                <a:spcPct val="112000"/>
+              </a:lnSpc>
+              <a:spcAft>
+                <a:spcPts val="500"/>
+              </a:spcAft>
+            </a:pPr>
+            <a:r>
+              <a:rPr sz="1950" b="1" lang="zh-CN">
+                <a:solidFill>
+                  <a:srgbClr val="285EA8"/>
+                </a:solidFill>
+                <a:latin typeface="Microsoft YaHei"/>
+                <a:ea typeface="Microsoft YaHei"/>
+              </a:rPr>
+              <a:t>物理 SSD 读取量</a:t>
+            </a:r>
+          </a:p>
+        </p:txBody>
+      </p:sp>
+      <p:sp>
+        <p:nvSpPr>
+          <p:cNvPr id="15" name="官方贪心  38.56 GiB"/>
+          <p:cNvSpPr txBox="1"/>
+          <p:nvPr/>
+        </p:nvSpPr>
+        <p:spPr>
+          <a:xfrm>
+            <a:off x="4343400" y="2571750"/>
+            <a:ext cx="3352800" cy="276225"/>
+          </a:xfrm>
+          <a:prstGeom prst="rect">
+            <a:avLst/>
+          </a:prstGeom>
+          <a:noFill/>
+          <a:effectLst/>
+        </p:spPr>
+        <p:txBody>
+          <a:bodyPr wrap="square" lIns="0" rIns="0" tIns="0" bIns="0">
+            <a:spAutoFit/>
+          </a:bodyPr>
+          <a:lstStyle/>
+          <a:p>
+            <a:pPr algn="l">
+              <a:lnSpc>
+                <a:spcPct val="112000"/>
+              </a:lnSpc>
+              <a:spcAft>
+                <a:spcPts val="500"/>
+              </a:spcAft>
+            </a:pPr>
+            <a:r>
+              <a:rPr sz="1575" b="0" lang="zh-CN">
+                <a:solidFill>
+                  <a:srgbClr val="657184"/>
+                </a:solidFill>
+                <a:latin typeface="Microsoft YaHei"/>
+                <a:ea typeface="Microsoft YaHei"/>
+              </a:rPr>
+              <a:t>官方贪心  38.56 GiB</a:t>
+            </a:r>
+          </a:p>
+        </p:txBody>
+      </p:sp>
+      <p:sp>
+        <p:nvSpPr>
+          <p:cNvPr id="16" name="Rectangle 15"/>
           <p:cNvSpPr/>
           <p:nvPr/>
         </p:nvSpPr>
         <p:spPr>
           <a:xfrm>
-            <a:off x="5848350" y="2152650"/>
-            <a:ext cx="2057400" cy="409575"/>
+            <a:off x="4343400" y="2905125"/>
+            <a:ext cx="3238500" cy="180975"/>
           </a:xfrm>
           <a:prstGeom prst="rect">
             <a:avLst/>
           </a:prstGeom>
           <a:solidFill>
-            <a:srgbClr val="EDF3FA"/>
+            <a:srgbClr val="C8D2DF"/>
           </a:solidFill>
           <a:ln>
             <a:noFill/>
@@ -5077,14 +5182,14 @@
       </p:sp>
       <p:sp>
         <p:nvSpPr>
-          <p:cNvPr id="13" name="本方案"/>
+          <p:cNvPr id="17" name="本方案  32.91 GiB"/>
           <p:cNvSpPr txBox="1"/>
           <p:nvPr/>
         </p:nvSpPr>
         <p:spPr>
           <a:xfrm>
-            <a:off x="5981700" y="2228850"/>
-            <a:ext cx="1790700" cy="285750"/>
+            <a:off x="4343400" y="3228975"/>
+            <a:ext cx="3352800" cy="276225"/>
           </a:xfrm>
           <a:prstGeom prst="rect">
             <a:avLst/>
@@ -5107,34 +5212,34 @@
               </a:spcAft>
             </a:pPr>
             <a:r>
-              <a:rPr sz="1725" b="1" lang="zh-CN">
+              <a:rPr sz="1650" b="1" lang="zh-CN">
                 <a:solidFill>
                   <a:srgbClr val="285EA8"/>
                 </a:solidFill>
                 <a:latin typeface="Microsoft YaHei"/>
                 <a:ea typeface="Microsoft YaHei"/>
               </a:rPr>
-              <a:t>本方案</a:t>
-            </a:r>
-          </a:p>
-        </p:txBody>
-      </p:sp>
-      <p:sp>
-        <p:nvSpPr>
-          <p:cNvPr id="14" name="Rectangle 13"/>
+              <a:t>本方案  32.91 GiB</a:t>
+            </a:r>
+          </a:p>
+        </p:txBody>
+      </p:sp>
+      <p:sp>
+        <p:nvSpPr>
+          <p:cNvPr id="18" name="Rectangle 17"/>
           <p:cNvSpPr/>
           <p:nvPr/>
         </p:nvSpPr>
         <p:spPr>
           <a:xfrm>
-            <a:off x="7905750" y="2152650"/>
-            <a:ext cx="3676649" cy="409575"/>
+            <a:off x="4343400" y="3562350"/>
+            <a:ext cx="2763835" cy="180975"/>
           </a:xfrm>
           <a:prstGeom prst="rect">
             <a:avLst/>
           </a:prstGeom>
           <a:solidFill>
-            <a:srgbClr val="EDF3FA"/>
+            <a:srgbClr val="285EA8"/>
           </a:solidFill>
           <a:ln>
             <a:noFill/>
@@ -5165,14 +5270,14 @@
       </p:sp>
       <p:sp>
         <p:nvSpPr>
-          <p:cNvPr id="15" name="怎样理解"/>
+          <p:cNvPr id="19" name="减少 14.66%"/>
           <p:cNvSpPr txBox="1"/>
           <p:nvPr/>
         </p:nvSpPr>
         <p:spPr>
           <a:xfrm>
-            <a:off x="8039099" y="2228850"/>
-            <a:ext cx="3409950" cy="285750"/>
+            <a:off x="4343400" y="3905249"/>
+            <a:ext cx="3352800" cy="295275"/>
           </a:xfrm>
           <a:prstGeom prst="rect">
             <a:avLst/>
@@ -5195,28 +5300,28 @@
               </a:spcAft>
             </a:pPr>
             <a:r>
-              <a:rPr sz="1725" b="1" lang="zh-CN">
+              <a:rPr sz="1875" b="1" lang="zh-CN">
                 <a:solidFill>
                   <a:srgbClr val="285EA8"/>
                 </a:solidFill>
                 <a:latin typeface="Microsoft YaHei"/>
                 <a:ea typeface="Microsoft YaHei"/>
               </a:rPr>
-              <a:t>怎样理解</a:t>
-            </a:r>
-          </a:p>
-        </p:txBody>
-      </p:sp>
-      <p:sp>
-        <p:nvSpPr>
-          <p:cNvPr id="16" name="策略回调时间"/>
+              <a:t>减少 14.66%</a:t>
+            </a:r>
+          </a:p>
+        </p:txBody>
+      </p:sp>
+      <p:sp>
+        <p:nvSpPr>
+          <p:cNvPr id="20" name="CPU + NPU 调用费"/>
           <p:cNvSpPr txBox="1"/>
           <p:nvPr/>
         </p:nvSpPr>
         <p:spPr>
           <a:xfrm>
-            <a:off x="742950" y="2800350"/>
-            <a:ext cx="3009900" cy="323850"/>
+            <a:off x="8077200" y="2124075"/>
+            <a:ext cx="3505200" cy="314325"/>
           </a:xfrm>
           <a:prstGeom prst="rect">
             <a:avLst/>
@@ -5239,28 +5344,28 @@
               </a:spcAft>
             </a:pPr>
             <a:r>
-              <a:rPr sz="1650" b="0" lang="zh-CN">
-                <a:solidFill>
-                  <a:srgbClr val="1F2937"/>
-                </a:solidFill>
-                <a:latin typeface="Microsoft YaHei"/>
-                <a:ea typeface="Microsoft YaHei"/>
-              </a:rPr>
-              <a:t>策略回调时间</a:t>
-            </a:r>
-          </a:p>
-        </p:txBody>
-      </p:sp>
-      <p:sp>
-        <p:nvSpPr>
-          <p:cNvPr id="17" name="0.831s"/>
+              <a:rPr sz="1950" b="1" lang="zh-CN">
+                <a:solidFill>
+                  <a:srgbClr val="285EA8"/>
+                </a:solidFill>
+                <a:latin typeface="Microsoft YaHei"/>
+                <a:ea typeface="Microsoft YaHei"/>
+              </a:rPr>
+              <a:t>CPU + NPU 调用费</a:t>
+            </a:r>
+          </a:p>
+        </p:txBody>
+      </p:sp>
+      <p:sp>
+        <p:nvSpPr>
+          <p:cNvPr id="21" name="官方贪心  610,928"/>
           <p:cNvSpPr txBox="1"/>
           <p:nvPr/>
         </p:nvSpPr>
         <p:spPr>
           <a:xfrm>
-            <a:off x="4019549" y="2800350"/>
-            <a:ext cx="1695450" cy="323850"/>
+            <a:off x="8077200" y="2571750"/>
+            <a:ext cx="3505200" cy="276225"/>
           </a:xfrm>
           <a:prstGeom prst="rect">
             <a:avLst/>
@@ -5283,28 +5388,72 @@
               </a:spcAft>
             </a:pPr>
             <a:r>
-              <a:rPr sz="1650" b="0" lang="zh-CN">
-                <a:solidFill>
-                  <a:srgbClr val="1F2937"/>
-                </a:solidFill>
-                <a:latin typeface="Microsoft YaHei"/>
-                <a:ea typeface="Microsoft YaHei"/>
-              </a:rPr>
-              <a:t>0.831s</a:t>
-            </a:r>
-          </a:p>
-        </p:txBody>
-      </p:sp>
-      <p:sp>
-        <p:nvSpPr>
-          <p:cNvPr id="18" name="1.153s"/>
+              <a:rPr sz="1575" b="0" lang="zh-CN">
+                <a:solidFill>
+                  <a:srgbClr val="657184"/>
+                </a:solidFill>
+                <a:latin typeface="Microsoft YaHei"/>
+                <a:ea typeface="Microsoft YaHei"/>
+              </a:rPr>
+              <a:t>官方贪心  610,928</a:t>
+            </a:r>
+          </a:p>
+        </p:txBody>
+      </p:sp>
+      <p:sp>
+        <p:nvSpPr>
+          <p:cNvPr id="22" name="Rectangle 21"/>
+          <p:cNvSpPr/>
+          <p:nvPr/>
+        </p:nvSpPr>
+        <p:spPr>
+          <a:xfrm>
+            <a:off x="8077200" y="2905125"/>
+            <a:ext cx="3390900" cy="180975"/>
+          </a:xfrm>
+          <a:prstGeom prst="rect">
+            <a:avLst/>
+          </a:prstGeom>
+          <a:solidFill>
+            <a:srgbClr val="C8D2DF"/>
+          </a:solidFill>
+          <a:ln>
+            <a:noFill/>
+          </a:ln>
+          <a:effectLst/>
+        </p:spPr>
+        <p:style>
+          <a:lnRef idx="1">
+            <a:schemeClr val="accent1"/>
+          </a:lnRef>
+          <a:fillRef idx="3">
+            <a:schemeClr val="accent1"/>
+          </a:fillRef>
+          <a:effectRef idx="0">
+            <a:schemeClr val="accent1"/>
+          </a:effectRef>
+          <a:fontRef idx="minor">
+            <a:schemeClr val="lt1"/>
+          </a:fontRef>
+        </p:style>
+        <p:txBody>
+          <a:bodyPr rtlCol="0" anchor="ctr"/>
+          <a:lstStyle/>
+          <a:p>
+            <a:pPr algn="ctr"/>
+          </a:p>
+        </p:txBody>
+      </p:sp>
+      <p:sp>
+        <p:nvSpPr>
+          <p:cNvPr id="23" name="本方案  202,731"/>
           <p:cNvSpPr txBox="1"/>
           <p:nvPr/>
         </p:nvSpPr>
         <p:spPr>
           <a:xfrm>
-            <a:off x="5981700" y="2800350"/>
-            <a:ext cx="1790700" cy="323850"/>
+            <a:off x="8077200" y="3228975"/>
+            <a:ext cx="3505200" cy="276225"/>
           </a:xfrm>
           <a:prstGeom prst="rect">
             <a:avLst/>
@@ -5334,21 +5483,65 @@
                 <a:latin typeface="Microsoft YaHei"/>
                 <a:ea typeface="Microsoft YaHei"/>
               </a:rPr>
-              <a:t>1.153s</a:t>
-            </a:r>
-          </a:p>
-        </p:txBody>
-      </p:sp>
-      <p:sp>
-        <p:nvSpPr>
-          <p:cNvPr id="19" name="增加 0.322s，约 +38.7%"/>
+              <a:t>本方案  202,731</a:t>
+            </a:r>
+          </a:p>
+        </p:txBody>
+      </p:sp>
+      <p:sp>
+        <p:nvSpPr>
+          <p:cNvPr id="24" name="Rectangle 23"/>
+          <p:cNvSpPr/>
+          <p:nvPr/>
+        </p:nvSpPr>
+        <p:spPr>
+          <a:xfrm>
+            <a:off x="8077200" y="3562350"/>
+            <a:ext cx="1125239" cy="180975"/>
+          </a:xfrm>
+          <a:prstGeom prst="rect">
+            <a:avLst/>
+          </a:prstGeom>
+          <a:solidFill>
+            <a:srgbClr val="285EA8"/>
+          </a:solidFill>
+          <a:ln>
+            <a:noFill/>
+          </a:ln>
+          <a:effectLst/>
+        </p:spPr>
+        <p:style>
+          <a:lnRef idx="1">
+            <a:schemeClr val="accent1"/>
+          </a:lnRef>
+          <a:fillRef idx="3">
+            <a:schemeClr val="accent1"/>
+          </a:fillRef>
+          <a:effectRef idx="0">
+            <a:schemeClr val="accent1"/>
+          </a:effectRef>
+          <a:fontRef idx="minor">
+            <a:schemeClr val="lt1"/>
+          </a:fontRef>
+        </p:style>
+        <p:txBody>
+          <a:bodyPr rtlCol="0" anchor="ctr"/>
+          <a:lstStyle/>
+          <a:p>
+            <a:pPr algn="ctr"/>
+          </a:p>
+        </p:txBody>
+      </p:sp>
+      <p:sp>
+        <p:nvSpPr>
+          <p:cNvPr id="25" name="减少 66.82%"/>
           <p:cNvSpPr txBox="1"/>
           <p:nvPr/>
         </p:nvSpPr>
         <p:spPr>
           <a:xfrm>
-            <a:off x="8039099" y="2800350"/>
-            <a:ext cx="3409950" cy="323850"/>
+            <a:off x="8077200" y="3905249"/>
+            <a:ext cx="3505200" cy="295275"/>
           </a:xfrm>
           <a:prstGeom prst="rect">
             <a:avLst/>
@@ -5371,27 +5564,27 @@
               </a:spcAft>
             </a:pPr>
             <a:r>
-              <a:rPr sz="1650" b="0" lang="zh-CN">
-                <a:solidFill>
-                  <a:srgbClr val="1F2937"/>
-                </a:solidFill>
-                <a:latin typeface="Microsoft YaHei"/>
-                <a:ea typeface="Microsoft YaHei"/>
-              </a:rPr>
-              <a:t>增加 0.322s，约 +38.7%</a:t>
+              <a:rPr sz="1875" b="1" lang="zh-CN">
+                <a:solidFill>
+                  <a:srgbClr val="285EA8"/>
+                </a:solidFill>
+                <a:latin typeface="Microsoft YaHei"/>
+                <a:ea typeface="Microsoft YaHei"/>
+              </a:rPr>
+              <a:t>减少 66.82%</a:t>
             </a:r>
           </a:p>
         </p:txBody>
       </p:sp>
       <p:cxnSp>
         <p:nvCxnSpPr>
-          <p:cNvPr id="20" name="Connector 19"/>
+          <p:cNvPr id="26" name="Connector 25"/>
           <p:cNvCxnSpPr/>
           <p:nvPr/>
         </p:nvCxnSpPr>
         <p:spPr>
           <a:xfrm>
-            <a:off x="609600" y="3209925"/>
+            <a:off x="609600" y="4410075"/>
             <a:ext cx="10972800" cy="0"/>
           </a:xfrm>
           <a:prstGeom prst="line">
@@ -5421,14 +5614,14 @@
       </p:cxnSp>
       <p:sp>
         <p:nvSpPr>
-          <p:cNvPr id="21" name="程序总耗时（墙钟）"/>
+          <p:cNvPr id="27" name="联合分组减少 operation， 少付重复的操作固定费。"/>
           <p:cNvSpPr txBox="1"/>
           <p:nvPr/>
         </p:nvSpPr>
         <p:spPr>
           <a:xfrm>
-            <a:off x="742950" y="3352800"/>
-            <a:ext cx="3009900" cy="323850"/>
+            <a:off x="609600" y="4600575"/>
+            <a:ext cx="3352800" cy="600075"/>
           </a:xfrm>
           <a:prstGeom prst="rect">
             <a:avLst/>
@@ -5451,28 +5644,48 @@
               </a:spcAft>
             </a:pPr>
             <a:r>
-              <a:rPr sz="1650" b="0" lang="zh-CN">
+              <a:rPr sz="1725" b="0" lang="zh-CN">
                 <a:solidFill>
                   <a:srgbClr val="1F2937"/>
                 </a:solidFill>
                 <a:latin typeface="Microsoft YaHei"/>
                 <a:ea typeface="Microsoft YaHei"/>
               </a:rPr>
-              <a:t>程序总耗时（墙钟）</a:t>
-            </a:r>
-          </a:p>
-        </p:txBody>
-      </p:sp>
-      <p:sp>
-        <p:nvSpPr>
-          <p:cNvPr id="22" name="10.969s"/>
+              <a:t>联合分组减少 operation，</a:t>
+            </a:r>
+          </a:p>
+          <a:p>
+            <a:pPr algn="l">
+              <a:lnSpc>
+                <a:spcPct val="112000"/>
+              </a:lnSpc>
+              <a:spcAft>
+                <a:spcPts val="500"/>
+              </a:spcAft>
+            </a:pPr>
+            <a:r>
+              <a:rPr sz="1725" b="0" lang="zh-CN">
+                <a:solidFill>
+                  <a:srgbClr val="1F2937"/>
+                </a:solidFill>
+                <a:latin typeface="Microsoft YaHei"/>
+                <a:ea typeface="Microsoft YaHei"/>
+              </a:rPr>
+              <a:t>少付重复的操作固定费。</a:t>
+            </a:r>
+          </a:p>
+        </p:txBody>
+      </p:sp>
+      <p:sp>
+        <p:nvSpPr>
+          <p:cNvPr id="28" name="合并重叠请求可共享物理读； 缓存也会改变前台请求集合。"/>
           <p:cNvSpPr txBox="1"/>
           <p:nvPr/>
         </p:nvSpPr>
         <p:spPr>
           <a:xfrm>
-            <a:off x="4019549" y="3352800"/>
-            <a:ext cx="1695450" cy="323850"/>
+            <a:off x="4343400" y="4600575"/>
+            <a:ext cx="3352800" cy="600075"/>
           </a:xfrm>
           <a:prstGeom prst="rect">
             <a:avLst/>
@@ -5495,28 +5708,48 @@
               </a:spcAft>
             </a:pPr>
             <a:r>
-              <a:rPr sz="1650" b="0" lang="zh-CN">
+              <a:rPr sz="1725" b="0" lang="zh-CN">
                 <a:solidFill>
                   <a:srgbClr val="1F2937"/>
                 </a:solidFill>
                 <a:latin typeface="Microsoft YaHei"/>
                 <a:ea typeface="Microsoft YaHei"/>
               </a:rPr>
-              <a:t>10.969s</a:t>
-            </a:r>
-          </a:p>
-        </p:txBody>
-      </p:sp>
-      <p:sp>
-        <p:nvSpPr>
-          <p:cNvPr id="23" name="9.393s"/>
+              <a:t>合并重叠请求可共享物理读；</a:t>
+            </a:r>
+          </a:p>
+          <a:p>
+            <a:pPr algn="l">
+              <a:lnSpc>
+                <a:spcPct val="112000"/>
+              </a:lnSpc>
+              <a:spcAft>
+                <a:spcPts val="500"/>
+              </a:spcAft>
+            </a:pPr>
+            <a:r>
+              <a:rPr sz="1725" b="0" lang="zh-CN">
+                <a:solidFill>
+                  <a:srgbClr val="1F2937"/>
+                </a:solidFill>
+                <a:latin typeface="Microsoft YaHei"/>
+                <a:ea typeface="Microsoft YaHei"/>
+              </a:rPr>
+              <a:t>缓存也会改变前台请求集合。</a:t>
+            </a:r>
+          </a:p>
+        </p:txBody>
+      </p:sp>
+      <p:sp>
+        <p:nvSpPr>
+          <p:cNvPr id="29" name="边界与路径一起估价， 减少操作及昂贵路径的调用。"/>
           <p:cNvSpPr txBox="1"/>
           <p:nvPr/>
         </p:nvSpPr>
         <p:spPr>
           <a:xfrm>
-            <a:off x="5981700" y="3352800"/>
-            <a:ext cx="1790700" cy="323850"/>
+            <a:off x="8077200" y="4600575"/>
+            <a:ext cx="3505200" cy="600075"/>
           </a:xfrm>
           <a:prstGeom prst="rect">
             <a:avLst/>
@@ -5539,28 +5772,48 @@
               </a:spcAft>
             </a:pPr>
             <a:r>
-              <a:rPr sz="1650" b="1" lang="zh-CN">
-                <a:solidFill>
-                  <a:srgbClr val="285EA8"/>
-                </a:solidFill>
-                <a:latin typeface="Microsoft YaHei"/>
-                <a:ea typeface="Microsoft YaHei"/>
-              </a:rPr>
-              <a:t>9.393s</a:t>
-            </a:r>
-          </a:p>
-        </p:txBody>
-      </p:sp>
-      <p:sp>
-        <p:nvSpPr>
-          <p:cNvPr id="24" name="包含框架与读写，约 −14.4%"/>
+              <a:rPr sz="1725" b="0" lang="zh-CN">
+                <a:solidFill>
+                  <a:srgbClr val="1F2937"/>
+                </a:solidFill>
+                <a:latin typeface="Microsoft YaHei"/>
+                <a:ea typeface="Microsoft YaHei"/>
+              </a:rPr>
+              <a:t>边界与路径一起估价，</a:t>
+            </a:r>
+          </a:p>
+          <a:p>
+            <a:pPr algn="l">
+              <a:lnSpc>
+                <a:spcPct val="112000"/>
+              </a:lnSpc>
+              <a:spcAft>
+                <a:spcPts val="500"/>
+              </a:spcAft>
+            </a:pPr>
+            <a:r>
+              <a:rPr sz="1725" b="0" lang="zh-CN">
+                <a:solidFill>
+                  <a:srgbClr val="1F2937"/>
+                </a:solidFill>
+                <a:latin typeface="Microsoft YaHei"/>
+                <a:ea typeface="Microsoft YaHei"/>
+              </a:rPr>
+              <a:t>减少操作及昂贵路径的调用。</a:t>
+            </a:r>
+          </a:p>
+        </p:txBody>
+      </p:sp>
+      <p:sp>
+        <p:nvSpPr>
+          <p:cNvPr id="30" name="整体：自动分 67.1981 → 88.4555 / 90；39 条总 J 下降 36.51%，35 胜 / 4 平 / 0 负。"/>
           <p:cNvSpPr txBox="1"/>
           <p:nvPr/>
         </p:nvSpPr>
         <p:spPr>
           <a:xfrm>
-            <a:off x="8039099" y="3352800"/>
-            <a:ext cx="3409950" cy="323850"/>
+            <a:off x="609600" y="5381625"/>
+            <a:ext cx="10972800" cy="323850"/>
           </a:xfrm>
           <a:prstGeom prst="rect">
             <a:avLst/>
@@ -5583,64 +5836,28 @@
               </a:spcAft>
             </a:pPr>
             <a:r>
-              <a:rPr sz="1650" b="0" lang="zh-CN">
-                <a:solidFill>
-                  <a:srgbClr val="1F2937"/>
-                </a:solidFill>
-                <a:latin typeface="Microsoft YaHei"/>
-                <a:ea typeface="Microsoft YaHei"/>
-              </a:rPr>
-              <a:t>包含框架与读写，约 −14.4%</a:t>
-            </a:r>
-          </a:p>
-        </p:txBody>
-      </p:sp>
-      <p:cxnSp>
-        <p:nvCxnSpPr>
-          <p:cNvPr id="25" name="Connector 24"/>
-          <p:cNvCxnSpPr/>
-          <p:nvPr/>
-        </p:nvCxnSpPr>
-        <p:spPr>
-          <a:xfrm>
-            <a:off x="609600" y="3762374"/>
-            <a:ext cx="10972800" cy="0"/>
-          </a:xfrm>
-          <a:prstGeom prst="line">
-            <a:avLst/>
-          </a:prstGeom>
-          <a:ln w="12700">
-            <a:solidFill>
-              <a:srgbClr val="DCE2E9"/>
-            </a:solidFill>
-          </a:ln>
-          <a:effectLst/>
-        </p:spPr>
-        <p:style>
-          <a:lnRef idx="2">
-            <a:schemeClr val="accent1"/>
-          </a:lnRef>
-          <a:fillRef idx="0">
-            <a:schemeClr val="accent1"/>
-          </a:fillRef>
-          <a:effectRef idx="0">
-            <a:schemeClr val="accent1"/>
-          </a:effectRef>
-          <a:fontRef idx="minor">
-            <a:schemeClr val="tx1"/>
-          </a:fontRef>
-        </p:style>
-      </p:cxnSp>
-      <p:sp>
-        <p:nvSpPr>
-          <p:cNvPr id="26" name="策略堆峰值"/>
+              <a:rPr sz="1800" b="1" lang="zh-CN">
+                <a:solidFill>
+                  <a:srgbClr val="285EA8"/>
+                </a:solidFill>
+                <a:latin typeface="Microsoft YaHei"/>
+                <a:ea typeface="Microsoft YaHei"/>
+              </a:rPr>
+              <a:t>整体：自动分 67.1981 → 88.4555 / 90；39 条总 J 下降 36.51%，35 胜 / 4 平 / 0 负。</a:t>
+            </a:r>
+          </a:p>
+        </p:txBody>
+      </p:sp>
+      <p:sp>
+        <p:nvSpPr>
+          <p:cNvPr id="31" name="验证：655 条 × 3 轮合法且一致，173 项检查通过。以上是整套方案对照，不能独立归因给单一模块。"/>
           <p:cNvSpPr txBox="1"/>
           <p:nvPr/>
         </p:nvSpPr>
         <p:spPr>
           <a:xfrm>
-            <a:off x="742950" y="3905249"/>
-            <a:ext cx="3009900" cy="323850"/>
+            <a:off x="609600" y="5838825"/>
+            <a:ext cx="10972800" cy="266700"/>
           </a:xfrm>
           <a:prstGeom prst="rect">
             <a:avLst/>
@@ -5663,502 +5880,14 @@
               </a:spcAft>
             </a:pPr>
             <a:r>
-              <a:rPr sz="1650" b="0" lang="zh-CN">
-                <a:solidFill>
-                  <a:srgbClr val="1F2937"/>
-                </a:solidFill>
-                <a:latin typeface="Microsoft YaHei"/>
-                <a:ea typeface="Microsoft YaHei"/>
-              </a:rPr>
-              <a:t>策略堆峰值</a:t>
-            </a:r>
-          </a:p>
-        </p:txBody>
-      </p:sp>
-      <p:sp>
-        <p:nvSpPr>
-          <p:cNvPr id="27" name="12.90MiB"/>
-          <p:cNvSpPr txBox="1"/>
-          <p:nvPr/>
-        </p:nvSpPr>
-        <p:spPr>
-          <a:xfrm>
-            <a:off x="4019549" y="3905249"/>
-            <a:ext cx="1695450" cy="323850"/>
-          </a:xfrm>
-          <a:prstGeom prst="rect">
-            <a:avLst/>
-          </a:prstGeom>
-          <a:noFill/>
-          <a:effectLst/>
-        </p:spPr>
-        <p:txBody>
-          <a:bodyPr wrap="square" lIns="0" rIns="0" tIns="0" bIns="0">
-            <a:spAutoFit/>
-          </a:bodyPr>
-          <a:lstStyle/>
-          <a:p>
-            <a:pPr algn="l">
-              <a:lnSpc>
-                <a:spcPct val="112000"/>
-              </a:lnSpc>
-              <a:spcAft>
-                <a:spcPts val="500"/>
-              </a:spcAft>
-            </a:pPr>
-            <a:r>
-              <a:rPr sz="1650" b="0" lang="zh-CN">
-                <a:solidFill>
-                  <a:srgbClr val="1F2937"/>
-                </a:solidFill>
-                <a:latin typeface="Microsoft YaHei"/>
-                <a:ea typeface="Microsoft YaHei"/>
-              </a:rPr>
-              <a:t>12.90MiB</a:t>
-            </a:r>
-          </a:p>
-        </p:txBody>
-      </p:sp>
-      <p:sp>
-        <p:nvSpPr>
-          <p:cNvPr id="28" name="12.34MiB"/>
-          <p:cNvSpPr txBox="1"/>
-          <p:nvPr/>
-        </p:nvSpPr>
-        <p:spPr>
-          <a:xfrm>
-            <a:off x="5981700" y="3905249"/>
-            <a:ext cx="1790700" cy="323850"/>
-          </a:xfrm>
-          <a:prstGeom prst="rect">
-            <a:avLst/>
-          </a:prstGeom>
-          <a:noFill/>
-          <a:effectLst/>
-        </p:spPr>
-        <p:txBody>
-          <a:bodyPr wrap="square" lIns="0" rIns="0" tIns="0" bIns="0">
-            <a:spAutoFit/>
-          </a:bodyPr>
-          <a:lstStyle/>
-          <a:p>
-            <a:pPr algn="l">
-              <a:lnSpc>
-                <a:spcPct val="112000"/>
-              </a:lnSpc>
-              <a:spcAft>
-                <a:spcPts val="500"/>
-              </a:spcAft>
-            </a:pPr>
-            <a:r>
-              <a:rPr sz="1650" b="1" lang="zh-CN">
-                <a:solidFill>
-                  <a:srgbClr val="285EA8"/>
-                </a:solidFill>
-                <a:latin typeface="Microsoft YaHei"/>
-                <a:ea typeface="Microsoft YaHei"/>
-              </a:rPr>
-              <a:t>12.34MiB</a:t>
-            </a:r>
-          </a:p>
-        </p:txBody>
-      </p:sp>
-      <p:sp>
-        <p:nvSpPr>
-          <p:cNvPr id="29" name="仅统计策略堆分配"/>
-          <p:cNvSpPr txBox="1"/>
-          <p:nvPr/>
-        </p:nvSpPr>
-        <p:spPr>
-          <a:xfrm>
-            <a:off x="8039099" y="3905249"/>
-            <a:ext cx="3409950" cy="323850"/>
-          </a:xfrm>
-          <a:prstGeom prst="rect">
-            <a:avLst/>
-          </a:prstGeom>
-          <a:noFill/>
-          <a:effectLst/>
-        </p:spPr>
-        <p:txBody>
-          <a:bodyPr wrap="square" lIns="0" rIns="0" tIns="0" bIns="0">
-            <a:spAutoFit/>
-          </a:bodyPr>
-          <a:lstStyle/>
-          <a:p>
-            <a:pPr algn="l">
-              <a:lnSpc>
-                <a:spcPct val="112000"/>
-              </a:lnSpc>
-              <a:spcAft>
-                <a:spcPts val="500"/>
-              </a:spcAft>
-            </a:pPr>
-            <a:r>
-              <a:rPr sz="1650" b="0" lang="zh-CN">
-                <a:solidFill>
-                  <a:srgbClr val="1F2937"/>
-                </a:solidFill>
-                <a:latin typeface="Microsoft YaHei"/>
-                <a:ea typeface="Microsoft YaHei"/>
-              </a:rPr>
-              <a:t>仅统计策略堆分配</a:t>
-            </a:r>
-          </a:p>
-        </p:txBody>
-      </p:sp>
-      <p:cxnSp>
-        <p:nvCxnSpPr>
-          <p:cNvPr id="30" name="Connector 29"/>
-          <p:cNvCxnSpPr/>
-          <p:nvPr/>
-        </p:nvCxnSpPr>
-        <p:spPr>
-          <a:xfrm>
-            <a:off x="609600" y="4314825"/>
-            <a:ext cx="10972800" cy="0"/>
-          </a:xfrm>
-          <a:prstGeom prst="line">
-            <a:avLst/>
-          </a:prstGeom>
-          <a:ln w="12700">
-            <a:solidFill>
-              <a:srgbClr val="DCE2E9"/>
-            </a:solidFill>
-          </a:ln>
-          <a:effectLst/>
-        </p:spPr>
-        <p:style>
-          <a:lnRef idx="2">
-            <a:schemeClr val="accent1"/>
-          </a:lnRef>
-          <a:fillRef idx="0">
-            <a:schemeClr val="accent1"/>
-          </a:fillRef>
-          <a:effectRef idx="0">
-            <a:schemeClr val="accent1"/>
-          </a:effectRef>
-          <a:fontRef idx="minor">
-            <a:schemeClr val="tx1"/>
-          </a:fontRef>
-        </p:style>
-      </p:cxnSp>
-      <p:sp>
-        <p:nvSpPr>
-          <p:cNvPr id="31" name="进程峰值内存（RSS）"/>
-          <p:cNvSpPr txBox="1"/>
-          <p:nvPr/>
-        </p:nvSpPr>
-        <p:spPr>
-          <a:xfrm>
-            <a:off x="742950" y="4457700"/>
-            <a:ext cx="3009900" cy="323850"/>
-          </a:xfrm>
-          <a:prstGeom prst="rect">
-            <a:avLst/>
-          </a:prstGeom>
-          <a:noFill/>
-          <a:effectLst/>
-        </p:spPr>
-        <p:txBody>
-          <a:bodyPr wrap="square" lIns="0" rIns="0" tIns="0" bIns="0">
-            <a:spAutoFit/>
-          </a:bodyPr>
-          <a:lstStyle/>
-          <a:p>
-            <a:pPr algn="l">
-              <a:lnSpc>
-                <a:spcPct val="112000"/>
-              </a:lnSpc>
-              <a:spcAft>
-                <a:spcPts val="500"/>
-              </a:spcAft>
-            </a:pPr>
-            <a:r>
-              <a:rPr sz="1650" b="0" lang="zh-CN">
-                <a:solidFill>
-                  <a:srgbClr val="1F2937"/>
-                </a:solidFill>
-                <a:latin typeface="Microsoft YaHei"/>
-                <a:ea typeface="Microsoft YaHei"/>
-              </a:rPr>
-              <a:t>进程峰值内存（RSS）</a:t>
-            </a:r>
-          </a:p>
-        </p:txBody>
-      </p:sp>
-      <p:sp>
-        <p:nvSpPr>
-          <p:cNvPr id="32" name="393.78MiB"/>
-          <p:cNvSpPr txBox="1"/>
-          <p:nvPr/>
-        </p:nvSpPr>
-        <p:spPr>
-          <a:xfrm>
-            <a:off x="4019549" y="4457700"/>
-            <a:ext cx="1695450" cy="323850"/>
-          </a:xfrm>
-          <a:prstGeom prst="rect">
-            <a:avLst/>
-          </a:prstGeom>
-          <a:noFill/>
-          <a:effectLst/>
-        </p:spPr>
-        <p:txBody>
-          <a:bodyPr wrap="square" lIns="0" rIns="0" tIns="0" bIns="0">
-            <a:spAutoFit/>
-          </a:bodyPr>
-          <a:lstStyle/>
-          <a:p>
-            <a:pPr algn="l">
-              <a:lnSpc>
-                <a:spcPct val="112000"/>
-              </a:lnSpc>
-              <a:spcAft>
-                <a:spcPts val="500"/>
-              </a:spcAft>
-            </a:pPr>
-            <a:r>
-              <a:rPr sz="1650" b="0" lang="zh-CN">
-                <a:solidFill>
-                  <a:srgbClr val="1F2937"/>
-                </a:solidFill>
-                <a:latin typeface="Microsoft YaHei"/>
-                <a:ea typeface="Microsoft YaHei"/>
-              </a:rPr>
-              <a:t>393.78MiB</a:t>
-            </a:r>
-          </a:p>
-        </p:txBody>
-      </p:sp>
-      <p:sp>
-        <p:nvSpPr>
-          <p:cNvPr id="33" name="262.53MiB"/>
-          <p:cNvSpPr txBox="1"/>
-          <p:nvPr/>
-        </p:nvSpPr>
-        <p:spPr>
-          <a:xfrm>
-            <a:off x="5981700" y="4457700"/>
-            <a:ext cx="1790700" cy="323850"/>
-          </a:xfrm>
-          <a:prstGeom prst="rect">
-            <a:avLst/>
-          </a:prstGeom>
-          <a:noFill/>
-          <a:effectLst/>
-        </p:spPr>
-        <p:txBody>
-          <a:bodyPr wrap="square" lIns="0" rIns="0" tIns="0" bIns="0">
-            <a:spAutoFit/>
-          </a:bodyPr>
-          <a:lstStyle/>
-          <a:p>
-            <a:pPr algn="l">
-              <a:lnSpc>
-                <a:spcPct val="112000"/>
-              </a:lnSpc>
-              <a:spcAft>
-                <a:spcPts val="500"/>
-              </a:spcAft>
-            </a:pPr>
-            <a:r>
-              <a:rPr sz="1650" b="1" lang="zh-CN">
-                <a:solidFill>
-                  <a:srgbClr val="285EA8"/>
-                </a:solidFill>
-                <a:latin typeface="Microsoft YaHei"/>
-                <a:ea typeface="Microsoft YaHei"/>
-              </a:rPr>
-              <a:t>262.53MiB</a:t>
-            </a:r>
-          </a:p>
-        </p:txBody>
-      </p:sp>
-      <p:sp>
-        <p:nvSpPr>
-          <p:cNvPr id="34" name="包含框架、输入输出等进程内存"/>
-          <p:cNvSpPr txBox="1"/>
-          <p:nvPr/>
-        </p:nvSpPr>
-        <p:spPr>
-          <a:xfrm>
-            <a:off x="8039099" y="4457700"/>
-            <a:ext cx="3409950" cy="323850"/>
-          </a:xfrm>
-          <a:prstGeom prst="rect">
-            <a:avLst/>
-          </a:prstGeom>
-          <a:noFill/>
-          <a:effectLst/>
-        </p:spPr>
-        <p:txBody>
-          <a:bodyPr wrap="square" lIns="0" rIns="0" tIns="0" bIns="0">
-            <a:spAutoFit/>
-          </a:bodyPr>
-          <a:lstStyle/>
-          <a:p>
-            <a:pPr algn="l">
-              <a:lnSpc>
-                <a:spcPct val="112000"/>
-              </a:lnSpc>
-              <a:spcAft>
-                <a:spcPts val="500"/>
-              </a:spcAft>
-            </a:pPr>
-            <a:r>
-              <a:rPr sz="1650" b="0" lang="zh-CN">
-                <a:solidFill>
-                  <a:srgbClr val="1F2937"/>
-                </a:solidFill>
-                <a:latin typeface="Microsoft YaHei"/>
-                <a:ea typeface="Microsoft YaHei"/>
-              </a:rPr>
-              <a:t>包含框架、输入输出等进程内存</a:t>
-            </a:r>
-          </a:p>
-        </p:txBody>
-      </p:sp>
-      <p:cxnSp>
-        <p:nvCxnSpPr>
-          <p:cNvPr id="35" name="Connector 34"/>
-          <p:cNvCxnSpPr/>
-          <p:nvPr/>
-        </p:nvCxnSpPr>
-        <p:spPr>
-          <a:xfrm>
-            <a:off x="609600" y="4867275"/>
-            <a:ext cx="10972800" cy="0"/>
-          </a:xfrm>
-          <a:prstGeom prst="line">
-            <a:avLst/>
-          </a:prstGeom>
-          <a:ln w="12700">
-            <a:solidFill>
-              <a:srgbClr val="DCE2E9"/>
-            </a:solidFill>
-          </a:ln>
-          <a:effectLst/>
-        </p:spPr>
-        <p:style>
-          <a:lnRef idx="2">
-            <a:schemeClr val="accent1"/>
-          </a:lnRef>
-          <a:fillRef idx="0">
-            <a:schemeClr val="accent1"/>
-          </a:fillRef>
-          <a:effectRef idx="0">
-            <a:schemeClr val="accent1"/>
-          </a:effectRef>
-          <a:fontRef idx="minor">
-            <a:schemeClr val="tx1"/>
-          </a:fontRef>
-        </p:style>
-      </p:cxnSp>
-      <p:sp>
-        <p:nvSpPr>
-          <p:cNvPr id="36" name="联合规划增加了策略计算开销；程序总耗时更短，并不代表调度计算本身更快。"/>
-          <p:cNvSpPr txBox="1"/>
-          <p:nvPr/>
-        </p:nvSpPr>
-        <p:spPr>
-          <a:xfrm>
-            <a:off x="609600" y="5133975"/>
-            <a:ext cx="10972800" cy="314325"/>
-          </a:xfrm>
-          <a:prstGeom prst="rect">
-            <a:avLst/>
-          </a:prstGeom>
-          <a:noFill/>
-          <a:effectLst/>
-        </p:spPr>
-        <p:txBody>
-          <a:bodyPr wrap="square" lIns="0" rIns="0" tIns="0" bIns="0">
-            <a:spAutoFit/>
-          </a:bodyPr>
-          <a:lstStyle/>
-          <a:p>
-            <a:pPr algn="l">
-              <a:lnSpc>
-                <a:spcPct val="112000"/>
-              </a:lnSpc>
-              <a:spcAft>
-                <a:spcPts val="500"/>
-              </a:spcAft>
-            </a:pPr>
-            <a:r>
-              <a:rPr sz="1875" b="1" lang="zh-CN">
-                <a:solidFill>
-                  <a:srgbClr val="285EA8"/>
-                </a:solidFill>
-                <a:latin typeface="Microsoft YaHei"/>
-                <a:ea typeface="Microsoft YaHei"/>
-              </a:rPr>
-              <a:t>联合规划增加了策略计算开销；程序总耗时更短，并不代表调度计算本身更快。</a:t>
-            </a:r>
-          </a:p>
-        </p:txBody>
-      </p:sp>
-      <p:sp>
-        <p:nvSpPr>
-          <p:cNvPr id="37" name="本机秒数与 J 中的模拟搬运时间分开统计。内存取三轮中的峰值；程序总耗时不含编译、 预热与独立 validator。环境：AMD EPYC 9575F，固定 CPU 8，g++ 13.3 / -O2。"/>
-          <p:cNvSpPr txBox="1"/>
-          <p:nvPr/>
-        </p:nvSpPr>
-        <p:spPr>
-          <a:xfrm>
-            <a:off x="609600" y="5610225"/>
-            <a:ext cx="10972800" cy="523874"/>
-          </a:xfrm>
-          <a:prstGeom prst="rect">
-            <a:avLst/>
-          </a:prstGeom>
-          <a:noFill/>
-          <a:effectLst/>
-        </p:spPr>
-        <p:txBody>
-          <a:bodyPr wrap="square" lIns="0" rIns="0" tIns="0" bIns="0">
-            <a:spAutoFit/>
-          </a:bodyPr>
-          <a:lstStyle/>
-          <a:p>
-            <a:pPr algn="l">
-              <a:lnSpc>
-                <a:spcPct val="112000"/>
-              </a:lnSpc>
-              <a:spcAft>
-                <a:spcPts val="500"/>
-              </a:spcAft>
-            </a:pPr>
-            <a:r>
-              <a:rPr sz="1575" b="0" lang="zh-CN">
+              <a:rPr sz="1500" b="0" lang="zh-CN">
                 <a:solidFill>
                   <a:srgbClr val="657184"/>
                 </a:solidFill>
                 <a:latin typeface="Microsoft YaHei"/>
                 <a:ea typeface="Microsoft YaHei"/>
               </a:rPr>
-              <a:t>本机秒数与 J 中的模拟搬运时间分开统计。内存取三轮中的峰值；程序总耗时不含编译、</a:t>
-            </a:r>
-          </a:p>
-          <a:p>
-            <a:pPr algn="l">
-              <a:lnSpc>
-                <a:spcPct val="112000"/>
-              </a:lnSpc>
-              <a:spcAft>
-                <a:spcPts val="500"/>
-              </a:spcAft>
-            </a:pPr>
-            <a:r>
-              <a:rPr sz="1575" b="0" lang="zh-CN">
-                <a:solidFill>
-                  <a:srgbClr val="657184"/>
-                </a:solidFill>
-                <a:latin typeface="Microsoft YaHei"/>
-                <a:ea typeface="Microsoft YaHei"/>
-              </a:rPr>
-              <a:t>预热与独立 validator。环境：AMD EPYC 9575F，固定 CPU 8，g++ 13.3 / -O2。</a:t>
+              <a:t>验证：655 条 × 3 轮合法且一致，173 项检查通过。以上是整套方案对照，不能独立归因给单一模块。</a:t>
             </a:r>
           </a:p>
         </p:txBody>
@@ -6191,7 +5920,7 @@
       <p:grpSpPr/>
       <p:sp>
         <p:nvSpPr>
-          <p:cNvPr id="2" name="性能对比 · 前台指标"/>
+          <p:cNvPr id="2" name="性能对比 · 后台指标"/>
           <p:cNvSpPr txBox="1"/>
           <p:nvPr/>
         </p:nvSpPr>
@@ -6228,14 +5957,14 @@
                 <a:latin typeface="Microsoft YaHei"/>
                 <a:ea typeface="Microsoft YaHei"/>
               </a:rPr>
-              <a:t>性能对比 · 前台指标</a:t>
-            </a:r>
-          </a:p>
-        </p:txBody>
-      </p:sp>
-      <p:sp>
-        <p:nvSpPr>
-          <p:cNvPr id="3" name="前台：操作数减少 53.85%，调用费减少 66.82%"/>
+              <a:t>性能对比 · 后台指标</a:t>
+            </a:r>
+          </a:p>
+        </p:txBody>
+      </p:sp>
+      <p:sp>
+        <p:nvSpPr>
+          <p:cNvPr id="3" name="后台：显著减少提升投入，保留正的缓存净收益"/>
           <p:cNvSpPr txBox="1"/>
           <p:nvPr/>
         </p:nvSpPr>
@@ -6272,14 +6001,14 @@
                 <a:latin typeface="Microsoft YaHei"/>
                 <a:ea typeface="Microsoft YaHei"/>
               </a:rPr>
-              <a:t>前台：操作数减少 53.85%，调用费减少 66.82%</a:t>
-            </a:r>
-          </a:p>
-        </p:txBody>
-      </p:sp>
-      <p:sp>
-        <p:nvSpPr>
-          <p:cNvPr id="4" name="39 条公开输入；仅统计前台 operation，排除 PROMOTE 和框架命中复制。每组柱形从零起算。"/>
+              <a:t>后台：显著减少提升投入，保留正的缓存净收益</a:t>
+            </a:r>
+          </a:p>
+        </p:txBody>
+      </p:sp>
+      <p:sp>
+        <p:nvSpPr>
+          <p:cNvPr id="4" name="缓存净收益 ΔJ = 各自关闭 PROMOTE 的 J − 启用时的 J；正值表示收益。39 条分别回放后求和。"/>
           <p:cNvSpPr txBox="1"/>
           <p:nvPr/>
         </p:nvSpPr>
@@ -6316,7 +6045,7 @@
                 <a:latin typeface="Microsoft YaHei"/>
                 <a:ea typeface="Microsoft YaHei"/>
               </a:rPr>
-              <a:t>39 条公开输入；仅统计前台 operation，排除 PROMOTE 和框架命中复制。每组柱形从零起算。</a:t>
+              <a:t>缓存净收益 ΔJ = 各自关闭 PROMOTE 的 J − 启用时的 J；正值表示收益。39 条分别回放后求和。</a:t>
             </a:r>
           </a:p>
         </p:txBody>
@@ -6441,1396 +6170,6 @@
                 <a:ea typeface="Microsoft YaHei"/>
               </a:rPr>
               <a:t>10</a:t>
-            </a:r>
-          </a:p>
-        </p:txBody>
-      </p:sp>
-      <p:sp>
-        <p:nvSpPr>
-          <p:cNvPr id="8" name="读操作数"/>
-          <p:cNvSpPr txBox="1"/>
-          <p:nvPr/>
-        </p:nvSpPr>
-        <p:spPr>
-          <a:xfrm>
-            <a:off x="609600" y="2124075"/>
-            <a:ext cx="3352800" cy="314325"/>
-          </a:xfrm>
-          <a:prstGeom prst="rect">
-            <a:avLst/>
-          </a:prstGeom>
-          <a:noFill/>
-          <a:effectLst/>
-        </p:spPr>
-        <p:txBody>
-          <a:bodyPr wrap="square" lIns="0" rIns="0" tIns="0" bIns="0">
-            <a:spAutoFit/>
-          </a:bodyPr>
-          <a:lstStyle/>
-          <a:p>
-            <a:pPr algn="l">
-              <a:lnSpc>
-                <a:spcPct val="112000"/>
-              </a:lnSpc>
-              <a:spcAft>
-                <a:spcPts val="500"/>
-              </a:spcAft>
-            </a:pPr>
-            <a:r>
-              <a:rPr sz="1950" b="1" lang="zh-CN">
-                <a:solidFill>
-                  <a:srgbClr val="285EA8"/>
-                </a:solidFill>
-                <a:latin typeface="Microsoft YaHei"/>
-                <a:ea typeface="Microsoft YaHei"/>
-              </a:rPr>
-              <a:t>读操作数</a:t>
-            </a:r>
-          </a:p>
-        </p:txBody>
-      </p:sp>
-      <p:sp>
-        <p:nvSpPr>
-          <p:cNvPr id="9" name="官方贪心  177,180 次"/>
-          <p:cNvSpPr txBox="1"/>
-          <p:nvPr/>
-        </p:nvSpPr>
-        <p:spPr>
-          <a:xfrm>
-            <a:off x="609600" y="2571750"/>
-            <a:ext cx="3352800" cy="276225"/>
-          </a:xfrm>
-          <a:prstGeom prst="rect">
-            <a:avLst/>
-          </a:prstGeom>
-          <a:noFill/>
-          <a:effectLst/>
-        </p:spPr>
-        <p:txBody>
-          <a:bodyPr wrap="square" lIns="0" rIns="0" tIns="0" bIns="0">
-            <a:spAutoFit/>
-          </a:bodyPr>
-          <a:lstStyle/>
-          <a:p>
-            <a:pPr algn="l">
-              <a:lnSpc>
-                <a:spcPct val="112000"/>
-              </a:lnSpc>
-              <a:spcAft>
-                <a:spcPts val="500"/>
-              </a:spcAft>
-            </a:pPr>
-            <a:r>
-              <a:rPr sz="1575" b="0" lang="zh-CN">
-                <a:solidFill>
-                  <a:srgbClr val="657184"/>
-                </a:solidFill>
-                <a:latin typeface="Microsoft YaHei"/>
-                <a:ea typeface="Microsoft YaHei"/>
-              </a:rPr>
-              <a:t>官方贪心  177,180 次</a:t>
-            </a:r>
-          </a:p>
-        </p:txBody>
-      </p:sp>
-      <p:sp>
-        <p:nvSpPr>
-          <p:cNvPr id="10" name="Rectangle 9"/>
-          <p:cNvSpPr/>
-          <p:nvPr/>
-        </p:nvSpPr>
-        <p:spPr>
-          <a:xfrm>
-            <a:off x="609600" y="2905125"/>
-            <a:ext cx="3238500" cy="180975"/>
-          </a:xfrm>
-          <a:prstGeom prst="rect">
-            <a:avLst/>
-          </a:prstGeom>
-          <a:solidFill>
-            <a:srgbClr val="C8D2DF"/>
-          </a:solidFill>
-          <a:ln>
-            <a:noFill/>
-          </a:ln>
-          <a:effectLst/>
-        </p:spPr>
-        <p:style>
-          <a:lnRef idx="1">
-            <a:schemeClr val="accent1"/>
-          </a:lnRef>
-          <a:fillRef idx="3">
-            <a:schemeClr val="accent1"/>
-          </a:fillRef>
-          <a:effectRef idx="0">
-            <a:schemeClr val="accent1"/>
-          </a:effectRef>
-          <a:fontRef idx="minor">
-            <a:schemeClr val="lt1"/>
-          </a:fontRef>
-        </p:style>
-        <p:txBody>
-          <a:bodyPr rtlCol="0" anchor="ctr"/>
-          <a:lstStyle/>
-          <a:p>
-            <a:pPr algn="ctr"/>
-          </a:p>
-        </p:txBody>
-      </p:sp>
-      <p:sp>
-        <p:nvSpPr>
-          <p:cNvPr id="11" name="本方案  81,768 次"/>
-          <p:cNvSpPr txBox="1"/>
-          <p:nvPr/>
-        </p:nvSpPr>
-        <p:spPr>
-          <a:xfrm>
-            <a:off x="609600" y="3228975"/>
-            <a:ext cx="3352800" cy="276225"/>
-          </a:xfrm>
-          <a:prstGeom prst="rect">
-            <a:avLst/>
-          </a:prstGeom>
-          <a:noFill/>
-          <a:effectLst/>
-        </p:spPr>
-        <p:txBody>
-          <a:bodyPr wrap="square" lIns="0" rIns="0" tIns="0" bIns="0">
-            <a:spAutoFit/>
-          </a:bodyPr>
-          <a:lstStyle/>
-          <a:p>
-            <a:pPr algn="l">
-              <a:lnSpc>
-                <a:spcPct val="112000"/>
-              </a:lnSpc>
-              <a:spcAft>
-                <a:spcPts val="500"/>
-              </a:spcAft>
-            </a:pPr>
-            <a:r>
-              <a:rPr sz="1650" b="1" lang="zh-CN">
-                <a:solidFill>
-                  <a:srgbClr val="285EA8"/>
-                </a:solidFill>
-                <a:latin typeface="Microsoft YaHei"/>
-                <a:ea typeface="Microsoft YaHei"/>
-              </a:rPr>
-              <a:t>本方案  81,768 次</a:t>
-            </a:r>
-          </a:p>
-        </p:txBody>
-      </p:sp>
-      <p:sp>
-        <p:nvSpPr>
-          <p:cNvPr id="12" name="Rectangle 11"/>
-          <p:cNvSpPr/>
-          <p:nvPr/>
-        </p:nvSpPr>
-        <p:spPr>
-          <a:xfrm>
-            <a:off x="609600" y="3562350"/>
-            <a:ext cx="1494557" cy="180975"/>
-          </a:xfrm>
-          <a:prstGeom prst="rect">
-            <a:avLst/>
-          </a:prstGeom>
-          <a:solidFill>
-            <a:srgbClr val="285EA8"/>
-          </a:solidFill>
-          <a:ln>
-            <a:noFill/>
-          </a:ln>
-          <a:effectLst/>
-        </p:spPr>
-        <p:style>
-          <a:lnRef idx="1">
-            <a:schemeClr val="accent1"/>
-          </a:lnRef>
-          <a:fillRef idx="3">
-            <a:schemeClr val="accent1"/>
-          </a:fillRef>
-          <a:effectRef idx="0">
-            <a:schemeClr val="accent1"/>
-          </a:effectRef>
-          <a:fontRef idx="minor">
-            <a:schemeClr val="lt1"/>
-          </a:fontRef>
-        </p:style>
-        <p:txBody>
-          <a:bodyPr rtlCol="0" anchor="ctr"/>
-          <a:lstStyle/>
-          <a:p>
-            <a:pPr algn="ctr"/>
-          </a:p>
-        </p:txBody>
-      </p:sp>
-      <p:sp>
-        <p:nvSpPr>
-          <p:cNvPr id="13" name="减少 53.85%"/>
-          <p:cNvSpPr txBox="1"/>
-          <p:nvPr/>
-        </p:nvSpPr>
-        <p:spPr>
-          <a:xfrm>
-            <a:off x="609600" y="3905249"/>
-            <a:ext cx="3352800" cy="295275"/>
-          </a:xfrm>
-          <a:prstGeom prst="rect">
-            <a:avLst/>
-          </a:prstGeom>
-          <a:noFill/>
-          <a:effectLst/>
-        </p:spPr>
-        <p:txBody>
-          <a:bodyPr wrap="square" lIns="0" rIns="0" tIns="0" bIns="0">
-            <a:spAutoFit/>
-          </a:bodyPr>
-          <a:lstStyle/>
-          <a:p>
-            <a:pPr algn="l">
-              <a:lnSpc>
-                <a:spcPct val="112000"/>
-              </a:lnSpc>
-              <a:spcAft>
-                <a:spcPts val="500"/>
-              </a:spcAft>
-            </a:pPr>
-            <a:r>
-              <a:rPr sz="1875" b="1" lang="zh-CN">
-                <a:solidFill>
-                  <a:srgbClr val="285EA8"/>
-                </a:solidFill>
-                <a:latin typeface="Microsoft YaHei"/>
-                <a:ea typeface="Microsoft YaHei"/>
-              </a:rPr>
-              <a:t>减少 53.85%</a:t>
-            </a:r>
-          </a:p>
-        </p:txBody>
-      </p:sp>
-      <p:sp>
-        <p:nvSpPr>
-          <p:cNvPr id="14" name="物理 SSD 读取量"/>
-          <p:cNvSpPr txBox="1"/>
-          <p:nvPr/>
-        </p:nvSpPr>
-        <p:spPr>
-          <a:xfrm>
-            <a:off x="4343400" y="2124075"/>
-            <a:ext cx="3352800" cy="314325"/>
-          </a:xfrm>
-          <a:prstGeom prst="rect">
-            <a:avLst/>
-          </a:prstGeom>
-          <a:noFill/>
-          <a:effectLst/>
-        </p:spPr>
-        <p:txBody>
-          <a:bodyPr wrap="square" lIns="0" rIns="0" tIns="0" bIns="0">
-            <a:spAutoFit/>
-          </a:bodyPr>
-          <a:lstStyle/>
-          <a:p>
-            <a:pPr algn="l">
-              <a:lnSpc>
-                <a:spcPct val="112000"/>
-              </a:lnSpc>
-              <a:spcAft>
-                <a:spcPts val="500"/>
-              </a:spcAft>
-            </a:pPr>
-            <a:r>
-              <a:rPr sz="1950" b="1" lang="zh-CN">
-                <a:solidFill>
-                  <a:srgbClr val="285EA8"/>
-                </a:solidFill>
-                <a:latin typeface="Microsoft YaHei"/>
-                <a:ea typeface="Microsoft YaHei"/>
-              </a:rPr>
-              <a:t>物理 SSD 读取量</a:t>
-            </a:r>
-          </a:p>
-        </p:txBody>
-      </p:sp>
-      <p:sp>
-        <p:nvSpPr>
-          <p:cNvPr id="15" name="官方贪心  38.56 GiB"/>
-          <p:cNvSpPr txBox="1"/>
-          <p:nvPr/>
-        </p:nvSpPr>
-        <p:spPr>
-          <a:xfrm>
-            <a:off x="4343400" y="2571750"/>
-            <a:ext cx="3352800" cy="276225"/>
-          </a:xfrm>
-          <a:prstGeom prst="rect">
-            <a:avLst/>
-          </a:prstGeom>
-          <a:noFill/>
-          <a:effectLst/>
-        </p:spPr>
-        <p:txBody>
-          <a:bodyPr wrap="square" lIns="0" rIns="0" tIns="0" bIns="0">
-            <a:spAutoFit/>
-          </a:bodyPr>
-          <a:lstStyle/>
-          <a:p>
-            <a:pPr algn="l">
-              <a:lnSpc>
-                <a:spcPct val="112000"/>
-              </a:lnSpc>
-              <a:spcAft>
-                <a:spcPts val="500"/>
-              </a:spcAft>
-            </a:pPr>
-            <a:r>
-              <a:rPr sz="1575" b="0" lang="zh-CN">
-                <a:solidFill>
-                  <a:srgbClr val="657184"/>
-                </a:solidFill>
-                <a:latin typeface="Microsoft YaHei"/>
-                <a:ea typeface="Microsoft YaHei"/>
-              </a:rPr>
-              <a:t>官方贪心  38.56 GiB</a:t>
-            </a:r>
-          </a:p>
-        </p:txBody>
-      </p:sp>
-      <p:sp>
-        <p:nvSpPr>
-          <p:cNvPr id="16" name="Rectangle 15"/>
-          <p:cNvSpPr/>
-          <p:nvPr/>
-        </p:nvSpPr>
-        <p:spPr>
-          <a:xfrm>
-            <a:off x="4343400" y="2905125"/>
-            <a:ext cx="3238500" cy="180975"/>
-          </a:xfrm>
-          <a:prstGeom prst="rect">
-            <a:avLst/>
-          </a:prstGeom>
-          <a:solidFill>
-            <a:srgbClr val="C8D2DF"/>
-          </a:solidFill>
-          <a:ln>
-            <a:noFill/>
-          </a:ln>
-          <a:effectLst/>
-        </p:spPr>
-        <p:style>
-          <a:lnRef idx="1">
-            <a:schemeClr val="accent1"/>
-          </a:lnRef>
-          <a:fillRef idx="3">
-            <a:schemeClr val="accent1"/>
-          </a:fillRef>
-          <a:effectRef idx="0">
-            <a:schemeClr val="accent1"/>
-          </a:effectRef>
-          <a:fontRef idx="minor">
-            <a:schemeClr val="lt1"/>
-          </a:fontRef>
-        </p:style>
-        <p:txBody>
-          <a:bodyPr rtlCol="0" anchor="ctr"/>
-          <a:lstStyle/>
-          <a:p>
-            <a:pPr algn="ctr"/>
-          </a:p>
-        </p:txBody>
-      </p:sp>
-      <p:sp>
-        <p:nvSpPr>
-          <p:cNvPr id="17" name="本方案  32.91 GiB"/>
-          <p:cNvSpPr txBox="1"/>
-          <p:nvPr/>
-        </p:nvSpPr>
-        <p:spPr>
-          <a:xfrm>
-            <a:off x="4343400" y="3228975"/>
-            <a:ext cx="3352800" cy="276225"/>
-          </a:xfrm>
-          <a:prstGeom prst="rect">
-            <a:avLst/>
-          </a:prstGeom>
-          <a:noFill/>
-          <a:effectLst/>
-        </p:spPr>
-        <p:txBody>
-          <a:bodyPr wrap="square" lIns="0" rIns="0" tIns="0" bIns="0">
-            <a:spAutoFit/>
-          </a:bodyPr>
-          <a:lstStyle/>
-          <a:p>
-            <a:pPr algn="l">
-              <a:lnSpc>
-                <a:spcPct val="112000"/>
-              </a:lnSpc>
-              <a:spcAft>
-                <a:spcPts val="500"/>
-              </a:spcAft>
-            </a:pPr>
-            <a:r>
-              <a:rPr sz="1650" b="1" lang="zh-CN">
-                <a:solidFill>
-                  <a:srgbClr val="285EA8"/>
-                </a:solidFill>
-                <a:latin typeface="Microsoft YaHei"/>
-                <a:ea typeface="Microsoft YaHei"/>
-              </a:rPr>
-              <a:t>本方案  32.91 GiB</a:t>
-            </a:r>
-          </a:p>
-        </p:txBody>
-      </p:sp>
-      <p:sp>
-        <p:nvSpPr>
-          <p:cNvPr id="18" name="Rectangle 17"/>
-          <p:cNvSpPr/>
-          <p:nvPr/>
-        </p:nvSpPr>
-        <p:spPr>
-          <a:xfrm>
-            <a:off x="4343400" y="3562350"/>
-            <a:ext cx="2763835" cy="180975"/>
-          </a:xfrm>
-          <a:prstGeom prst="rect">
-            <a:avLst/>
-          </a:prstGeom>
-          <a:solidFill>
-            <a:srgbClr val="285EA8"/>
-          </a:solidFill>
-          <a:ln>
-            <a:noFill/>
-          </a:ln>
-          <a:effectLst/>
-        </p:spPr>
-        <p:style>
-          <a:lnRef idx="1">
-            <a:schemeClr val="accent1"/>
-          </a:lnRef>
-          <a:fillRef idx="3">
-            <a:schemeClr val="accent1"/>
-          </a:fillRef>
-          <a:effectRef idx="0">
-            <a:schemeClr val="accent1"/>
-          </a:effectRef>
-          <a:fontRef idx="minor">
-            <a:schemeClr val="lt1"/>
-          </a:fontRef>
-        </p:style>
-        <p:txBody>
-          <a:bodyPr rtlCol="0" anchor="ctr"/>
-          <a:lstStyle/>
-          <a:p>
-            <a:pPr algn="ctr"/>
-          </a:p>
-        </p:txBody>
-      </p:sp>
-      <p:sp>
-        <p:nvSpPr>
-          <p:cNvPr id="19" name="减少 14.66%"/>
-          <p:cNvSpPr txBox="1"/>
-          <p:nvPr/>
-        </p:nvSpPr>
-        <p:spPr>
-          <a:xfrm>
-            <a:off x="4343400" y="3905249"/>
-            <a:ext cx="3352800" cy="295275"/>
-          </a:xfrm>
-          <a:prstGeom prst="rect">
-            <a:avLst/>
-          </a:prstGeom>
-          <a:noFill/>
-          <a:effectLst/>
-        </p:spPr>
-        <p:txBody>
-          <a:bodyPr wrap="square" lIns="0" rIns="0" tIns="0" bIns="0">
-            <a:spAutoFit/>
-          </a:bodyPr>
-          <a:lstStyle/>
-          <a:p>
-            <a:pPr algn="l">
-              <a:lnSpc>
-                <a:spcPct val="112000"/>
-              </a:lnSpc>
-              <a:spcAft>
-                <a:spcPts val="500"/>
-              </a:spcAft>
-            </a:pPr>
-            <a:r>
-              <a:rPr sz="1875" b="1" lang="zh-CN">
-                <a:solidFill>
-                  <a:srgbClr val="285EA8"/>
-                </a:solidFill>
-                <a:latin typeface="Microsoft YaHei"/>
-                <a:ea typeface="Microsoft YaHei"/>
-              </a:rPr>
-              <a:t>减少 14.66%</a:t>
-            </a:r>
-          </a:p>
-        </p:txBody>
-      </p:sp>
-      <p:sp>
-        <p:nvSpPr>
-          <p:cNvPr id="20" name="CPU + NPU 调用费"/>
-          <p:cNvSpPr txBox="1"/>
-          <p:nvPr/>
-        </p:nvSpPr>
-        <p:spPr>
-          <a:xfrm>
-            <a:off x="8077200" y="2124075"/>
-            <a:ext cx="3505200" cy="314325"/>
-          </a:xfrm>
-          <a:prstGeom prst="rect">
-            <a:avLst/>
-          </a:prstGeom>
-          <a:noFill/>
-          <a:effectLst/>
-        </p:spPr>
-        <p:txBody>
-          <a:bodyPr wrap="square" lIns="0" rIns="0" tIns="0" bIns="0">
-            <a:spAutoFit/>
-          </a:bodyPr>
-          <a:lstStyle/>
-          <a:p>
-            <a:pPr algn="l">
-              <a:lnSpc>
-                <a:spcPct val="112000"/>
-              </a:lnSpc>
-              <a:spcAft>
-                <a:spcPts val="500"/>
-              </a:spcAft>
-            </a:pPr>
-            <a:r>
-              <a:rPr sz="1950" b="1" lang="zh-CN">
-                <a:solidFill>
-                  <a:srgbClr val="285EA8"/>
-                </a:solidFill>
-                <a:latin typeface="Microsoft YaHei"/>
-                <a:ea typeface="Microsoft YaHei"/>
-              </a:rPr>
-              <a:t>CPU + NPU 调用费</a:t>
-            </a:r>
-          </a:p>
-        </p:txBody>
-      </p:sp>
-      <p:sp>
-        <p:nvSpPr>
-          <p:cNvPr id="21" name="官方贪心  610,928"/>
-          <p:cNvSpPr txBox="1"/>
-          <p:nvPr/>
-        </p:nvSpPr>
-        <p:spPr>
-          <a:xfrm>
-            <a:off x="8077200" y="2571750"/>
-            <a:ext cx="3505200" cy="276225"/>
-          </a:xfrm>
-          <a:prstGeom prst="rect">
-            <a:avLst/>
-          </a:prstGeom>
-          <a:noFill/>
-          <a:effectLst/>
-        </p:spPr>
-        <p:txBody>
-          <a:bodyPr wrap="square" lIns="0" rIns="0" tIns="0" bIns="0">
-            <a:spAutoFit/>
-          </a:bodyPr>
-          <a:lstStyle/>
-          <a:p>
-            <a:pPr algn="l">
-              <a:lnSpc>
-                <a:spcPct val="112000"/>
-              </a:lnSpc>
-              <a:spcAft>
-                <a:spcPts val="500"/>
-              </a:spcAft>
-            </a:pPr>
-            <a:r>
-              <a:rPr sz="1575" b="0" lang="zh-CN">
-                <a:solidFill>
-                  <a:srgbClr val="657184"/>
-                </a:solidFill>
-                <a:latin typeface="Microsoft YaHei"/>
-                <a:ea typeface="Microsoft YaHei"/>
-              </a:rPr>
-              <a:t>官方贪心  610,928</a:t>
-            </a:r>
-          </a:p>
-        </p:txBody>
-      </p:sp>
-      <p:sp>
-        <p:nvSpPr>
-          <p:cNvPr id="22" name="Rectangle 21"/>
-          <p:cNvSpPr/>
-          <p:nvPr/>
-        </p:nvSpPr>
-        <p:spPr>
-          <a:xfrm>
-            <a:off x="8077200" y="2905125"/>
-            <a:ext cx="3390900" cy="180975"/>
-          </a:xfrm>
-          <a:prstGeom prst="rect">
-            <a:avLst/>
-          </a:prstGeom>
-          <a:solidFill>
-            <a:srgbClr val="C8D2DF"/>
-          </a:solidFill>
-          <a:ln>
-            <a:noFill/>
-          </a:ln>
-          <a:effectLst/>
-        </p:spPr>
-        <p:style>
-          <a:lnRef idx="1">
-            <a:schemeClr val="accent1"/>
-          </a:lnRef>
-          <a:fillRef idx="3">
-            <a:schemeClr val="accent1"/>
-          </a:fillRef>
-          <a:effectRef idx="0">
-            <a:schemeClr val="accent1"/>
-          </a:effectRef>
-          <a:fontRef idx="minor">
-            <a:schemeClr val="lt1"/>
-          </a:fontRef>
-        </p:style>
-        <p:txBody>
-          <a:bodyPr rtlCol="0" anchor="ctr"/>
-          <a:lstStyle/>
-          <a:p>
-            <a:pPr algn="ctr"/>
-          </a:p>
-        </p:txBody>
-      </p:sp>
-      <p:sp>
-        <p:nvSpPr>
-          <p:cNvPr id="23" name="本方案  202,731"/>
-          <p:cNvSpPr txBox="1"/>
-          <p:nvPr/>
-        </p:nvSpPr>
-        <p:spPr>
-          <a:xfrm>
-            <a:off x="8077200" y="3228975"/>
-            <a:ext cx="3505200" cy="276225"/>
-          </a:xfrm>
-          <a:prstGeom prst="rect">
-            <a:avLst/>
-          </a:prstGeom>
-          <a:noFill/>
-          <a:effectLst/>
-        </p:spPr>
-        <p:txBody>
-          <a:bodyPr wrap="square" lIns="0" rIns="0" tIns="0" bIns="0">
-            <a:spAutoFit/>
-          </a:bodyPr>
-          <a:lstStyle/>
-          <a:p>
-            <a:pPr algn="l">
-              <a:lnSpc>
-                <a:spcPct val="112000"/>
-              </a:lnSpc>
-              <a:spcAft>
-                <a:spcPts val="500"/>
-              </a:spcAft>
-            </a:pPr>
-            <a:r>
-              <a:rPr sz="1650" b="1" lang="zh-CN">
-                <a:solidFill>
-                  <a:srgbClr val="285EA8"/>
-                </a:solidFill>
-                <a:latin typeface="Microsoft YaHei"/>
-                <a:ea typeface="Microsoft YaHei"/>
-              </a:rPr>
-              <a:t>本方案  202,731</a:t>
-            </a:r>
-          </a:p>
-        </p:txBody>
-      </p:sp>
-      <p:sp>
-        <p:nvSpPr>
-          <p:cNvPr id="24" name="Rectangle 23"/>
-          <p:cNvSpPr/>
-          <p:nvPr/>
-        </p:nvSpPr>
-        <p:spPr>
-          <a:xfrm>
-            <a:off x="8077200" y="3562350"/>
-            <a:ext cx="1125239" cy="180975"/>
-          </a:xfrm>
-          <a:prstGeom prst="rect">
-            <a:avLst/>
-          </a:prstGeom>
-          <a:solidFill>
-            <a:srgbClr val="285EA8"/>
-          </a:solidFill>
-          <a:ln>
-            <a:noFill/>
-          </a:ln>
-          <a:effectLst/>
-        </p:spPr>
-        <p:style>
-          <a:lnRef idx="1">
-            <a:schemeClr val="accent1"/>
-          </a:lnRef>
-          <a:fillRef idx="3">
-            <a:schemeClr val="accent1"/>
-          </a:fillRef>
-          <a:effectRef idx="0">
-            <a:schemeClr val="accent1"/>
-          </a:effectRef>
-          <a:fontRef idx="minor">
-            <a:schemeClr val="lt1"/>
-          </a:fontRef>
-        </p:style>
-        <p:txBody>
-          <a:bodyPr rtlCol="0" anchor="ctr"/>
-          <a:lstStyle/>
-          <a:p>
-            <a:pPr algn="ctr"/>
-          </a:p>
-        </p:txBody>
-      </p:sp>
-      <p:sp>
-        <p:nvSpPr>
-          <p:cNvPr id="25" name="减少 66.82%"/>
-          <p:cNvSpPr txBox="1"/>
-          <p:nvPr/>
-        </p:nvSpPr>
-        <p:spPr>
-          <a:xfrm>
-            <a:off x="8077200" y="3905249"/>
-            <a:ext cx="3505200" cy="295275"/>
-          </a:xfrm>
-          <a:prstGeom prst="rect">
-            <a:avLst/>
-          </a:prstGeom>
-          <a:noFill/>
-          <a:effectLst/>
-        </p:spPr>
-        <p:txBody>
-          <a:bodyPr wrap="square" lIns="0" rIns="0" tIns="0" bIns="0">
-            <a:spAutoFit/>
-          </a:bodyPr>
-          <a:lstStyle/>
-          <a:p>
-            <a:pPr algn="l">
-              <a:lnSpc>
-                <a:spcPct val="112000"/>
-              </a:lnSpc>
-              <a:spcAft>
-                <a:spcPts val="500"/>
-              </a:spcAft>
-            </a:pPr>
-            <a:r>
-              <a:rPr sz="1875" b="1" lang="zh-CN">
-                <a:solidFill>
-                  <a:srgbClr val="285EA8"/>
-                </a:solidFill>
-                <a:latin typeface="Microsoft YaHei"/>
-                <a:ea typeface="Microsoft YaHei"/>
-              </a:rPr>
-              <a:t>减少 66.82%</a:t>
-            </a:r>
-          </a:p>
-        </p:txBody>
-      </p:sp>
-      <p:cxnSp>
-        <p:nvCxnSpPr>
-          <p:cNvPr id="26" name="Connector 25"/>
-          <p:cNvCxnSpPr/>
-          <p:nvPr/>
-        </p:nvCxnSpPr>
-        <p:spPr>
-          <a:xfrm>
-            <a:off x="609600" y="4410075"/>
-            <a:ext cx="10972800" cy="0"/>
-          </a:xfrm>
-          <a:prstGeom prst="line">
-            <a:avLst/>
-          </a:prstGeom>
-          <a:ln w="12700">
-            <a:solidFill>
-              <a:srgbClr val="DCE2E9"/>
-            </a:solidFill>
-          </a:ln>
-          <a:effectLst/>
-        </p:spPr>
-        <p:style>
-          <a:lnRef idx="2">
-            <a:schemeClr val="accent1"/>
-          </a:lnRef>
-          <a:fillRef idx="0">
-            <a:schemeClr val="accent1"/>
-          </a:fillRef>
-          <a:effectRef idx="0">
-            <a:schemeClr val="accent1"/>
-          </a:effectRef>
-          <a:fontRef idx="minor">
-            <a:schemeClr val="tx1"/>
-          </a:fontRef>
-        </p:style>
-      </p:cxnSp>
-      <p:sp>
-        <p:nvSpPr>
-          <p:cNvPr id="27" name="联合分组减少 operation， 少付重复的操作固定费。"/>
-          <p:cNvSpPr txBox="1"/>
-          <p:nvPr/>
-        </p:nvSpPr>
-        <p:spPr>
-          <a:xfrm>
-            <a:off x="609600" y="4600575"/>
-            <a:ext cx="3352800" cy="600075"/>
-          </a:xfrm>
-          <a:prstGeom prst="rect">
-            <a:avLst/>
-          </a:prstGeom>
-          <a:noFill/>
-          <a:effectLst/>
-        </p:spPr>
-        <p:txBody>
-          <a:bodyPr wrap="square" lIns="0" rIns="0" tIns="0" bIns="0">
-            <a:spAutoFit/>
-          </a:bodyPr>
-          <a:lstStyle/>
-          <a:p>
-            <a:pPr algn="l">
-              <a:lnSpc>
-                <a:spcPct val="112000"/>
-              </a:lnSpc>
-              <a:spcAft>
-                <a:spcPts val="500"/>
-              </a:spcAft>
-            </a:pPr>
-            <a:r>
-              <a:rPr sz="1725" b="0" lang="zh-CN">
-                <a:solidFill>
-                  <a:srgbClr val="1F2937"/>
-                </a:solidFill>
-                <a:latin typeface="Microsoft YaHei"/>
-                <a:ea typeface="Microsoft YaHei"/>
-              </a:rPr>
-              <a:t>联合分组减少 operation，</a:t>
-            </a:r>
-          </a:p>
-          <a:p>
-            <a:pPr algn="l">
-              <a:lnSpc>
-                <a:spcPct val="112000"/>
-              </a:lnSpc>
-              <a:spcAft>
-                <a:spcPts val="500"/>
-              </a:spcAft>
-            </a:pPr>
-            <a:r>
-              <a:rPr sz="1725" b="0" lang="zh-CN">
-                <a:solidFill>
-                  <a:srgbClr val="1F2937"/>
-                </a:solidFill>
-                <a:latin typeface="Microsoft YaHei"/>
-                <a:ea typeface="Microsoft YaHei"/>
-              </a:rPr>
-              <a:t>少付重复的操作固定费。</a:t>
-            </a:r>
-          </a:p>
-        </p:txBody>
-      </p:sp>
-      <p:sp>
-        <p:nvSpPr>
-          <p:cNvPr id="28" name="合并重叠请求可共享物理读； 缓存也会改变前台请求集合。"/>
-          <p:cNvSpPr txBox="1"/>
-          <p:nvPr/>
-        </p:nvSpPr>
-        <p:spPr>
-          <a:xfrm>
-            <a:off x="4343400" y="4600575"/>
-            <a:ext cx="3352800" cy="600075"/>
-          </a:xfrm>
-          <a:prstGeom prst="rect">
-            <a:avLst/>
-          </a:prstGeom>
-          <a:noFill/>
-          <a:effectLst/>
-        </p:spPr>
-        <p:txBody>
-          <a:bodyPr wrap="square" lIns="0" rIns="0" tIns="0" bIns="0">
-            <a:spAutoFit/>
-          </a:bodyPr>
-          <a:lstStyle/>
-          <a:p>
-            <a:pPr algn="l">
-              <a:lnSpc>
-                <a:spcPct val="112000"/>
-              </a:lnSpc>
-              <a:spcAft>
-                <a:spcPts val="500"/>
-              </a:spcAft>
-            </a:pPr>
-            <a:r>
-              <a:rPr sz="1725" b="0" lang="zh-CN">
-                <a:solidFill>
-                  <a:srgbClr val="1F2937"/>
-                </a:solidFill>
-                <a:latin typeface="Microsoft YaHei"/>
-                <a:ea typeface="Microsoft YaHei"/>
-              </a:rPr>
-              <a:t>合并重叠请求可共享物理读；</a:t>
-            </a:r>
-          </a:p>
-          <a:p>
-            <a:pPr algn="l">
-              <a:lnSpc>
-                <a:spcPct val="112000"/>
-              </a:lnSpc>
-              <a:spcAft>
-                <a:spcPts val="500"/>
-              </a:spcAft>
-            </a:pPr>
-            <a:r>
-              <a:rPr sz="1725" b="0" lang="zh-CN">
-                <a:solidFill>
-                  <a:srgbClr val="1F2937"/>
-                </a:solidFill>
-                <a:latin typeface="Microsoft YaHei"/>
-                <a:ea typeface="Microsoft YaHei"/>
-              </a:rPr>
-              <a:t>缓存也会改变前台请求集合。</a:t>
-            </a:r>
-          </a:p>
-        </p:txBody>
-      </p:sp>
-      <p:sp>
-        <p:nvSpPr>
-          <p:cNvPr id="29" name="边界与路径一起估价， 减少操作及昂贵路径的调用。"/>
-          <p:cNvSpPr txBox="1"/>
-          <p:nvPr/>
-        </p:nvSpPr>
-        <p:spPr>
-          <a:xfrm>
-            <a:off x="8077200" y="4600575"/>
-            <a:ext cx="3505200" cy="600075"/>
-          </a:xfrm>
-          <a:prstGeom prst="rect">
-            <a:avLst/>
-          </a:prstGeom>
-          <a:noFill/>
-          <a:effectLst/>
-        </p:spPr>
-        <p:txBody>
-          <a:bodyPr wrap="square" lIns="0" rIns="0" tIns="0" bIns="0">
-            <a:spAutoFit/>
-          </a:bodyPr>
-          <a:lstStyle/>
-          <a:p>
-            <a:pPr algn="l">
-              <a:lnSpc>
-                <a:spcPct val="112000"/>
-              </a:lnSpc>
-              <a:spcAft>
-                <a:spcPts val="500"/>
-              </a:spcAft>
-            </a:pPr>
-            <a:r>
-              <a:rPr sz="1725" b="0" lang="zh-CN">
-                <a:solidFill>
-                  <a:srgbClr val="1F2937"/>
-                </a:solidFill>
-                <a:latin typeface="Microsoft YaHei"/>
-                <a:ea typeface="Microsoft YaHei"/>
-              </a:rPr>
-              <a:t>边界与路径一起估价，</a:t>
-            </a:r>
-          </a:p>
-          <a:p>
-            <a:pPr algn="l">
-              <a:lnSpc>
-                <a:spcPct val="112000"/>
-              </a:lnSpc>
-              <a:spcAft>
-                <a:spcPts val="500"/>
-              </a:spcAft>
-            </a:pPr>
-            <a:r>
-              <a:rPr sz="1725" b="0" lang="zh-CN">
-                <a:solidFill>
-                  <a:srgbClr val="1F2937"/>
-                </a:solidFill>
-                <a:latin typeface="Microsoft YaHei"/>
-                <a:ea typeface="Microsoft YaHei"/>
-              </a:rPr>
-              <a:t>减少操作及昂贵路径的调用。</a:t>
-            </a:r>
-          </a:p>
-        </p:txBody>
-      </p:sp>
-      <p:sp>
-        <p:nvSpPr>
-          <p:cNvPr id="30" name="整体：自动分 67.1981 → 88.4555 / 90；39 条总 J 下降 36.51%，35 胜 / 4 平 / 0 负。"/>
-          <p:cNvSpPr txBox="1"/>
-          <p:nvPr/>
-        </p:nvSpPr>
-        <p:spPr>
-          <a:xfrm>
-            <a:off x="609600" y="5381625"/>
-            <a:ext cx="10972800" cy="323850"/>
-          </a:xfrm>
-          <a:prstGeom prst="rect">
-            <a:avLst/>
-          </a:prstGeom>
-          <a:noFill/>
-          <a:effectLst/>
-        </p:spPr>
-        <p:txBody>
-          <a:bodyPr wrap="square" lIns="0" rIns="0" tIns="0" bIns="0">
-            <a:spAutoFit/>
-          </a:bodyPr>
-          <a:lstStyle/>
-          <a:p>
-            <a:pPr algn="l">
-              <a:lnSpc>
-                <a:spcPct val="112000"/>
-              </a:lnSpc>
-              <a:spcAft>
-                <a:spcPts val="500"/>
-              </a:spcAft>
-            </a:pPr>
-            <a:r>
-              <a:rPr sz="1800" b="1" lang="zh-CN">
-                <a:solidFill>
-                  <a:srgbClr val="285EA8"/>
-                </a:solidFill>
-                <a:latin typeface="Microsoft YaHei"/>
-                <a:ea typeface="Microsoft YaHei"/>
-              </a:rPr>
-              <a:t>整体：自动分 67.1981 → 88.4555 / 90；39 条总 J 下降 36.51%，35 胜 / 4 平 / 0 负。</a:t>
-            </a:r>
-          </a:p>
-        </p:txBody>
-      </p:sp>
-      <p:sp>
-        <p:nvSpPr>
-          <p:cNvPr id="31" name="验证：655 条 × 3 轮合法且一致，173 项检查通过。以上是整套方案对照，不能独立归因给单一模块。"/>
-          <p:cNvSpPr txBox="1"/>
-          <p:nvPr/>
-        </p:nvSpPr>
-        <p:spPr>
-          <a:xfrm>
-            <a:off x="609600" y="5838825"/>
-            <a:ext cx="10972800" cy="266700"/>
-          </a:xfrm>
-          <a:prstGeom prst="rect">
-            <a:avLst/>
-          </a:prstGeom>
-          <a:noFill/>
-          <a:effectLst/>
-        </p:spPr>
-        <p:txBody>
-          <a:bodyPr wrap="square" lIns="0" rIns="0" tIns="0" bIns="0">
-            <a:spAutoFit/>
-          </a:bodyPr>
-          <a:lstStyle/>
-          <a:p>
-            <a:pPr algn="l">
-              <a:lnSpc>
-                <a:spcPct val="112000"/>
-              </a:lnSpc>
-              <a:spcAft>
-                <a:spcPts val="500"/>
-              </a:spcAft>
-            </a:pPr>
-            <a:r>
-              <a:rPr sz="1500" b="0" lang="zh-CN">
-                <a:solidFill>
-                  <a:srgbClr val="657184"/>
-                </a:solidFill>
-                <a:latin typeface="Microsoft YaHei"/>
-                <a:ea typeface="Microsoft YaHei"/>
-              </a:rPr>
-              <a:t>验证：655 条 × 3 轮合法且一致，173 项检查通过。以上是整套方案对照，不能独立归因给单一模块。</a:t>
-            </a:r>
-          </a:p>
-        </p:txBody>
-      </p:sp>
-    </p:spTree>
-  </p:cSld>
-  <p:clrMapOvr>
-    <a:masterClrMapping/>
-  </p:clrMapOvr>
-</p:sld>
-</file>
-
-<file path=ppt/slides/slide12.xml><?xml version="1.0" encoding="utf-8"?>
-<p:sld xmlns:a="http://schemas.openxmlformats.org/drawingml/2006/main" xmlns:p="http://schemas.openxmlformats.org/presentationml/2006/main" xmlns:r="http://schemas.openxmlformats.org/officeDocument/2006/relationships">
-  <p:cSld>
-    <p:bg>
-      <p:bgPr>
-        <a:solidFill>
-          <a:srgbClr val="FFFFFF"/>
-        </a:solidFill>
-        <a:effectLst/>
-      </p:bgPr>
-    </p:bg>
-    <p:spTree>
-      <p:nvGrpSpPr>
-        <p:cNvPr id="1" name=""/>
-        <p:cNvGrpSpPr/>
-        <p:nvPr/>
-      </p:nvGrpSpPr>
-      <p:grpSpPr/>
-      <p:sp>
-        <p:nvSpPr>
-          <p:cNvPr id="2" name="性能对比 · 后台指标"/>
-          <p:cNvSpPr txBox="1"/>
-          <p:nvPr/>
-        </p:nvSpPr>
-        <p:spPr>
-          <a:xfrm>
-            <a:off x="609600" y="333375"/>
-            <a:ext cx="10572750" cy="238125"/>
-          </a:xfrm>
-          <a:prstGeom prst="rect">
-            <a:avLst/>
-          </a:prstGeom>
-          <a:noFill/>
-          <a:effectLst/>
-        </p:spPr>
-        <p:txBody>
-          <a:bodyPr wrap="square" lIns="0" rIns="0" tIns="0" bIns="0">
-            <a:spAutoFit/>
-          </a:bodyPr>
-          <a:lstStyle/>
-          <a:p>
-            <a:pPr algn="l">
-              <a:lnSpc>
-                <a:spcPct val="112000"/>
-              </a:lnSpc>
-              <a:spcAft>
-                <a:spcPts val="500"/>
-              </a:spcAft>
-            </a:pPr>
-            <a:r>
-              <a:rPr sz="1200" b="1" lang="zh-CN">
-                <a:solidFill>
-                  <a:srgbClr val="285EA8"/>
-                </a:solidFill>
-                <a:latin typeface="Microsoft YaHei"/>
-                <a:ea typeface="Microsoft YaHei"/>
-              </a:rPr>
-              <a:t>性能对比 · 后台指标</a:t>
-            </a:r>
-          </a:p>
-        </p:txBody>
-      </p:sp>
-      <p:sp>
-        <p:nvSpPr>
-          <p:cNvPr id="3" name="后台：显著减少提升投入，保留正的缓存净收益"/>
-          <p:cNvSpPr txBox="1"/>
-          <p:nvPr/>
-        </p:nvSpPr>
-        <p:spPr>
-          <a:xfrm>
-            <a:off x="609600" y="752475"/>
-            <a:ext cx="10972800" cy="609600"/>
-          </a:xfrm>
-          <a:prstGeom prst="rect">
-            <a:avLst/>
-          </a:prstGeom>
-          <a:noFill/>
-          <a:effectLst/>
-        </p:spPr>
-        <p:txBody>
-          <a:bodyPr wrap="square" lIns="0" rIns="0" tIns="0" bIns="0">
-            <a:spAutoFit/>
-          </a:bodyPr>
-          <a:lstStyle/>
-          <a:p>
-            <a:pPr algn="l">
-              <a:lnSpc>
-                <a:spcPct val="112000"/>
-              </a:lnSpc>
-              <a:spcAft>
-                <a:spcPts val="500"/>
-              </a:spcAft>
-            </a:pPr>
-            <a:r>
-              <a:rPr sz="3075" b="1" lang="zh-CN">
-                <a:solidFill>
-                  <a:srgbClr val="1F2937"/>
-                </a:solidFill>
-                <a:latin typeface="Microsoft YaHei"/>
-                <a:ea typeface="Microsoft YaHei"/>
-              </a:rPr>
-              <a:t>后台：显著减少提升投入，保留正的缓存净收益</a:t>
-            </a:r>
-          </a:p>
-        </p:txBody>
-      </p:sp>
-      <p:sp>
-        <p:nvSpPr>
-          <p:cNvPr id="4" name="缓存净收益 ΔJ = 各自关闭 PROMOTE 的 J − 启用时的 J；正值表示收益。39 条分别回放后求和。"/>
-          <p:cNvSpPr txBox="1"/>
-          <p:nvPr/>
-        </p:nvSpPr>
-        <p:spPr>
-          <a:xfrm>
-            <a:off x="609600" y="1428750"/>
-            <a:ext cx="10972800" cy="552450"/>
-          </a:xfrm>
-          <a:prstGeom prst="rect">
-            <a:avLst/>
-          </a:prstGeom>
-          <a:noFill/>
-          <a:effectLst/>
-        </p:spPr>
-        <p:txBody>
-          <a:bodyPr wrap="square" lIns="0" rIns="0" tIns="0" bIns="0">
-            <a:spAutoFit/>
-          </a:bodyPr>
-          <a:lstStyle/>
-          <a:p>
-            <a:pPr algn="l">
-              <a:lnSpc>
-                <a:spcPct val="112000"/>
-              </a:lnSpc>
-              <a:spcAft>
-                <a:spcPts val="500"/>
-              </a:spcAft>
-            </a:pPr>
-            <a:r>
-              <a:rPr sz="1725" b="0" lang="zh-CN">
-                <a:solidFill>
-                  <a:srgbClr val="657184"/>
-                </a:solidFill>
-                <a:latin typeface="Microsoft YaHei"/>
-                <a:ea typeface="Microsoft YaHei"/>
-              </a:rPr>
-              <a:t>缓存净收益 ΔJ = 各自关闭 PROMOTE 的 J − 启用时的 J；正值表示收益。39 条分别回放后求和。</a:t>
-            </a:r>
-          </a:p>
-        </p:txBody>
-      </p:sp>
-      <p:cxnSp>
-        <p:nvCxnSpPr>
-          <p:cNvPr id="5" name="Connector 4"/>
-          <p:cNvCxnSpPr/>
-          <p:nvPr/>
-        </p:nvCxnSpPr>
-        <p:spPr>
-          <a:xfrm>
-            <a:off x="609600" y="6286500"/>
-            <a:ext cx="10972800" cy="0"/>
-          </a:xfrm>
-          <a:prstGeom prst="line">
-            <a:avLst/>
-          </a:prstGeom>
-          <a:ln w="12700">
-            <a:solidFill>
-              <a:srgbClr val="DCE2E9"/>
-            </a:solidFill>
-          </a:ln>
-          <a:effectLst/>
-        </p:spPr>
-        <p:style>
-          <a:lnRef idx="2">
-            <a:schemeClr val="accent1"/>
-          </a:lnRef>
-          <a:fillRef idx="0">
-            <a:schemeClr val="accent1"/>
-          </a:fillRef>
-          <a:effectRef idx="0">
-            <a:schemeClr val="accent1"/>
-          </a:effectRef>
-          <a:fontRef idx="minor">
-            <a:schemeClr val="tx1"/>
-          </a:fontRef>
-        </p:style>
-      </p:cxnSp>
-      <p:sp>
-        <p:nvSpPr>
-          <p:cNvPr id="6" name="NDS 多路径 IO 调度"/>
-          <p:cNvSpPr txBox="1"/>
-          <p:nvPr/>
-        </p:nvSpPr>
-        <p:spPr>
-          <a:xfrm>
-            <a:off x="609600" y="6438900"/>
-            <a:ext cx="8096249" cy="171450"/>
-          </a:xfrm>
-          <a:prstGeom prst="rect">
-            <a:avLst/>
-          </a:prstGeom>
-          <a:noFill/>
-          <a:effectLst/>
-        </p:spPr>
-        <p:txBody>
-          <a:bodyPr wrap="square" lIns="0" rIns="0" tIns="0" bIns="0">
-            <a:spAutoFit/>
-          </a:bodyPr>
-          <a:lstStyle/>
-          <a:p>
-            <a:pPr algn="l">
-              <a:lnSpc>
-                <a:spcPct val="112000"/>
-              </a:lnSpc>
-              <a:spcAft>
-                <a:spcPts val="500"/>
-              </a:spcAft>
-            </a:pPr>
-            <a:r>
-              <a:rPr sz="975" b="0" lang="zh-CN">
-                <a:solidFill>
-                  <a:srgbClr val="657184"/>
-                </a:solidFill>
-                <a:latin typeface="Microsoft YaHei"/>
-                <a:ea typeface="Microsoft YaHei"/>
-              </a:rPr>
-              <a:t>NDS 多路径 IO 调度</a:t>
-            </a:r>
-          </a:p>
-        </p:txBody>
-      </p:sp>
-      <p:sp>
-        <p:nvSpPr>
-          <p:cNvPr id="7" name="11"/>
-          <p:cNvSpPr txBox="1"/>
-          <p:nvPr/>
-        </p:nvSpPr>
-        <p:spPr>
-          <a:xfrm>
-            <a:off x="11239500" y="6419850"/>
-            <a:ext cx="342900" cy="190500"/>
-          </a:xfrm>
-          <a:prstGeom prst="rect">
-            <a:avLst/>
-          </a:prstGeom>
-          <a:noFill/>
-          <a:effectLst/>
-        </p:spPr>
-        <p:txBody>
-          <a:bodyPr wrap="square" lIns="0" rIns="0" tIns="0" bIns="0">
-            <a:spAutoFit/>
-          </a:bodyPr>
-          <a:lstStyle/>
-          <a:p>
-            <a:pPr algn="r">
-              <a:lnSpc>
-                <a:spcPct val="112000"/>
-              </a:lnSpc>
-              <a:spcAft>
-                <a:spcPts val="500"/>
-              </a:spcAft>
-            </a:pPr>
-            <a:r>
-              <a:rPr sz="975" b="0" lang="zh-CN">
-                <a:solidFill>
-                  <a:srgbClr val="657184"/>
-                </a:solidFill>
-                <a:latin typeface="Microsoft YaHei"/>
-                <a:ea typeface="Microsoft YaHei"/>
-              </a:rPr>
-              <a:t>11</a:t>
             </a:r>
           </a:p>
         </p:txBody>
@@ -12193,7 +10532,7 @@
       <p:grpSpPr/>
       <p:sp>
         <p:nvSpPr>
-          <p:cNvPr id="2" name="代码可视化演示 · 联合 DP"/>
+          <p:cNvPr id="2" name="前台联合 DP · 代码可视化"/>
           <p:cNvSpPr txBox="1"/>
           <p:nvPr/>
         </p:nvSpPr>
@@ -12230,14 +10569,14 @@
                 <a:latin typeface="Microsoft YaHei"/>
                 <a:ea typeface="Microsoft YaHei"/>
               </a:rPr>
-              <a:t>代码可视化演示 · 联合 DP</a:t>
-            </a:r>
-          </a:p>
-        </p:txBody>
-      </p:sp>
-      <p:sp>
-        <p:nvSpPr>
-          <p:cNvPr id="3" name="同一次转移，同时比较分组边界和路径"/>
+              <a:t>前台联合 DP · 代码可视化</a:t>
+            </a:r>
+          </a:p>
+        </p:txBody>
+      </p:sp>
+      <p:sp>
+        <p:nvSpPr>
+          <p:cNvPr id="3" name="先用快速 DP 规划，满足条件再用细化 DP"/>
           <p:cNvSpPr txBox="1"/>
           <p:nvPr/>
         </p:nvSpPr>
@@ -12274,14 +10613,14 @@
                 <a:latin typeface="Microsoft YaHei"/>
                 <a:ea typeface="Microsoft YaHei"/>
               </a:rPr>
-              <a:t>同一次转移，同时比较分组边界和路径</a:t>
-            </a:r>
-          </a:p>
-        </p:txBody>
-      </p:sp>
-      <p:sp>
-        <p:nvSpPr>
-          <p:cNvPr id="4" name="三个相邻 512B 请求、同卡且源与目标都对齐；按点击依次展开代码、估价和输出。"/>
+              <a:t>先用快速 DP 规划，满足条件再用细化 DP</a:t>
+            </a:r>
+          </a:p>
+        </p:txBody>
+      </p:sp>
+      <p:sp>
+        <p:nvSpPr>
+          <p:cNvPr id="4" name="范围：仅本批未命中请求；每个起点最多向后看 128 片段，过滤同卡、相邻、对齐及资源约束。"/>
           <p:cNvSpPr txBox="1"/>
           <p:nvPr/>
         </p:nvSpPr>
@@ -12318,7 +10657,7 @@
                 <a:latin typeface="Microsoft YaHei"/>
                 <a:ea typeface="Microsoft YaHei"/>
               </a:rPr>
-              <a:t>三个相邻 512B 请求、同卡且源与目标都对齐；按点击依次展开代码、估价和输出。</a:t>
+              <a:t>范围：仅本批未命中请求；每个起点最多向后看 128 片段，过滤同卡、相邻、对齐及资源约束。</a:t>
             </a:r>
           </a:p>
         </p:txBody>
@@ -12449,28 +10788,28 @@
       </p:sp>
       <p:grpSp>
         <p:nvGrpSpPr>
-          <p:cNvPr id="8" name="演示1：输入片段与初始状态"/>
+          <p:cNvPr id="8" name="步骤1：三个对齐片段与初始状态"/>
           <p:cNvGrpSpPr/>
           <p:nvPr/>
         </p:nvGrpSpPr>
         <p:grpSpPr>
           <a:xfrm>
-            <a:off x="609600" y="2047875"/>
+            <a:off x="609600" y="2009774"/>
             <a:ext cx="10972799" cy="419100"/>
-            <a:chOff x="609600" y="2047875"/>
+            <a:chOff x="609600" y="2009774"/>
             <a:chExt cx="10972799" cy="419100"/>
           </a:xfrm>
         </p:grpSpPr>
         <p:sp>
           <p:nvSpPr>
-            <p:cNvPr id="9" name="排序后的 Piece"/>
+            <p:cNvPr id="9" name="同卡、相邻、对齐"/>
             <p:cNvSpPr txBox="1"/>
             <p:nvPr/>
           </p:nvSpPr>
           <p:spPr>
             <a:xfrm>
-              <a:off x="609600" y="2114550"/>
-              <a:ext cx="1762125" cy="295275"/>
+              <a:off x="609600" y="2076450"/>
+              <a:ext cx="1743075" cy="295275"/>
             </a:xfrm>
             <a:prstGeom prst="rect">
               <a:avLst/>
@@ -12493,14 +10832,14 @@
                 </a:spcAft>
               </a:pPr>
               <a:r>
-                <a:rPr sz="1725" b="1" lang="zh-CN">
+                <a:rPr sz="1650" b="1" lang="zh-CN">
                   <a:solidFill>
                     <a:srgbClr val="1F2937"/>
                   </a:solidFill>
                   <a:latin typeface="Microsoft YaHei"/>
                   <a:ea typeface="Microsoft YaHei"/>
                 </a:rPr>
-                <a:t>排序后的 Piece</a:t>
+                <a:t>同卡、相邻、对齐</a:t>
               </a:r>
             </a:p>
           </p:txBody>
@@ -12513,7 +10852,7 @@
           </p:nvSpPr>
           <p:spPr>
             <a:xfrm>
-              <a:off x="2438400" y="2047875"/>
+              <a:off x="2438400" y="2009774"/>
               <a:ext cx="1571625" cy="419100"/>
             </a:xfrm>
             <a:prstGeom prst="rect">
@@ -12559,7 +10898,7 @@
           </p:nvSpPr>
           <p:spPr>
             <a:xfrm>
-              <a:off x="2514600" y="2133600"/>
+              <a:off x="2514600" y="2095499"/>
               <a:ext cx="1419225" cy="276225"/>
             </a:xfrm>
             <a:prstGeom prst="rect">
@@ -12603,7 +10942,7 @@
           </p:nvSpPr>
           <p:spPr>
             <a:xfrm>
-              <a:off x="4162424" y="2047875"/>
+              <a:off x="4162424" y="2009774"/>
               <a:ext cx="1571625" cy="419100"/>
             </a:xfrm>
             <a:prstGeom prst="rect">
@@ -12649,7 +10988,7 @@
           </p:nvSpPr>
           <p:spPr>
             <a:xfrm>
-              <a:off x="4238625" y="2133600"/>
+              <a:off x="4238625" y="2095499"/>
               <a:ext cx="1419225" cy="276225"/>
             </a:xfrm>
             <a:prstGeom prst="rect">
@@ -12693,7 +11032,7 @@
           </p:nvSpPr>
           <p:spPr>
             <a:xfrm>
-              <a:off x="5886450" y="2047875"/>
+              <a:off x="5886450" y="2009774"/>
               <a:ext cx="1571625" cy="419100"/>
             </a:xfrm>
             <a:prstGeom prst="rect">
@@ -12739,7 +11078,7 @@
           </p:nvSpPr>
           <p:spPr>
             <a:xfrm>
-              <a:off x="5962650" y="2133600"/>
+              <a:off x="5962650" y="2095499"/>
               <a:ext cx="1419225" cy="276225"/>
             </a:xfrm>
             <a:prstGeom prst="rect">
@@ -12783,7 +11122,7 @@
           </p:nvSpPr>
           <p:spPr>
             <a:xfrm>
-              <a:off x="7981949" y="2133600"/>
+              <a:off x="7981949" y="2095499"/>
               <a:ext cx="3600450" cy="285750"/>
             </a:xfrm>
             <a:prstGeom prst="rect">
@@ -12822,14 +11161,14 @@
       </p:grpSp>
       <p:sp>
         <p:nvSpPr>
-          <p:cNvPr id="17" name="dp[j] = 前 j 个片段的最低累计估价"/>
+          <p:cNvPr id="17" name="dp[j]：前 j 个片段的最低累计估价"/>
           <p:cNvSpPr txBox="1"/>
           <p:nvPr/>
         </p:nvSpPr>
         <p:spPr>
           <a:xfrm>
-            <a:off x="609600" y="2657475"/>
-            <a:ext cx="4953000" cy="276225"/>
+            <a:off x="609600" y="2581275"/>
+            <a:ext cx="4953000" cy="285750"/>
           </a:xfrm>
           <a:prstGeom prst="rect">
             <a:avLst/>
@@ -12852,14 +11191,14 @@
               </a:spcAft>
             </a:pPr>
             <a:r>
-              <a:rPr sz="1575" b="1" lang="zh-CN">
+              <a:rPr sz="1650" b="1" lang="zh-CN">
                 <a:solidFill>
                   <a:srgbClr val="657184"/>
                 </a:solidFill>
                 <a:latin typeface="Microsoft YaHei"/>
                 <a:ea typeface="Microsoft YaHei"/>
               </a:rPr>
-              <a:t>dp[j] = 前 j 个片段的最低累计估价</a:t>
+              <a:t>dp[j]：前 j 个片段的最低累计估价</a:t>
             </a:r>
           </a:p>
         </p:txBody>
@@ -12872,8 +11211,8 @@
         </p:nvSpPr>
         <p:spPr>
           <a:xfrm>
-            <a:off x="609600" y="3009900"/>
-            <a:ext cx="4953000" cy="2133600"/>
+            <a:off x="609600" y="2952750"/>
+            <a:ext cx="4953000" cy="1790700"/>
           </a:xfrm>
           <a:prstGeom prst="rect">
             <a:avLst/>
@@ -12910,28 +11249,28 @@
       </p:sp>
       <p:grpSp>
         <p:nvGrpSpPr>
-          <p:cNvPr id="19" name="演示2：枚举组终点和路径，计算组估价"/>
+          <p:cNvPr id="19" name="步骤2：快速阶段枚举合法分组和路径"/>
           <p:cNvGrpSpPr/>
           <p:nvPr/>
         </p:nvGrpSpPr>
         <p:grpSpPr>
           <a:xfrm>
-            <a:off x="781050" y="2657475"/>
-            <a:ext cx="10801350" cy="1571625"/>
-            <a:chOff x="781050" y="2657475"/>
-            <a:chExt cx="10801350" cy="1571625"/>
+            <a:off x="781050" y="2581275"/>
+            <a:ext cx="10801350" cy="1600200"/>
+            <a:chOff x="781050" y="2581275"/>
+            <a:chExt cx="10801350" cy="1600200"/>
           </a:xfrm>
         </p:grpSpPr>
         <p:sp>
           <p:nvSpPr>
-            <p:cNvPr id="20" name="for (i = 0; i &lt; n; ++i)   for (j : 合法的分组终点)     for (path : AllPaths) {"/>
+            <p:cNvPr id="20" name="for (合法的 [i,j), path) {   v = dp[i] + estimate(...);"/>
             <p:cNvSpPr txBox="1"/>
             <p:nvPr/>
           </p:nvSpPr>
           <p:spPr>
             <a:xfrm>
-              <a:off x="781050" y="3124200"/>
-              <a:ext cx="4667250" cy="962024"/>
+              <a:off x="781050" y="3067050"/>
+              <a:ext cx="4686300" cy="619125"/>
             </a:xfrm>
             <a:prstGeom prst="rect">
               <a:avLst/>
@@ -12961,7 +11300,7 @@
                   <a:latin typeface="Microsoft YaHei"/>
                   <a:ea typeface="Microsoft YaHei"/>
                 </a:rPr>
-                <a:t>for (i = 0; i &lt; n; ++i)</a:t>
+                <a:t>for (合法的 [i,j), path) {</a:t>
               </a:r>
             </a:p>
             <a:p>
@@ -12981,40 +11320,20 @@
                   <a:latin typeface="Microsoft YaHei"/>
                   <a:ea typeface="Microsoft YaHei"/>
                 </a:rPr>
-                <a:t>  for (j : 合法的分组终点)</a:t>
-              </a:r>
-            </a:p>
-            <a:p>
-              <a:pPr algn="l">
-                <a:lnSpc>
-                  <a:spcPct val="112000"/>
-                </a:lnSpc>
-                <a:spcAft>
-                  <a:spcPts val="500"/>
-                </a:spcAft>
-              </a:pPr>
-              <a:r>
-                <a:rPr sz="1575" b="1" lang="zh-CN">
-                  <a:solidFill>
-                    <a:srgbClr val="285EA8"/>
-                  </a:solidFill>
-                  <a:latin typeface="Microsoft YaHei"/>
-                  <a:ea typeface="Microsoft YaHei"/>
-                </a:rPr>
-                <a:t>    for (path : AllPaths) {</a:t>
+                <a:t>  v = dp[i] + estimate(...);</a:t>
               </a:r>
             </a:p>
           </p:txBody>
         </p:sp>
         <p:sp>
           <p:nvSpPr>
-            <p:cNvPr id="21" name="先看 i = 0, j = 3：三个片段合成一组"/>
+            <p:cNvPr id="21" name="快速阶段：SSD / 复制并发均估为 3，空池"/>
             <p:cNvSpPr txBox="1"/>
             <p:nvPr/>
           </p:nvSpPr>
           <p:spPr>
             <a:xfrm>
-              <a:off x="5924550" y="2657475"/>
+              <a:off x="5924550" y="2581275"/>
               <a:ext cx="5657850" cy="285750"/>
             </a:xfrm>
             <a:prstGeom prst="rect">
@@ -13038,14 +11357,14 @@
                 </a:spcAft>
               </a:pPr>
               <a:r>
-                <a:rPr sz="1725" b="1" lang="zh-CN">
+                <a:rPr sz="1575" b="1" lang="zh-CN">
                   <a:solidFill>
                     <a:srgbClr val="1F2937"/>
                   </a:solidFill>
                   <a:latin typeface="Microsoft YaHei"/>
                   <a:ea typeface="Microsoft YaHei"/>
                 </a:rPr>
-                <a:t>先看 i = 0, j = 3：三个片段合成一组</a:t>
+                <a:t>快速阶段：SSD / 复制并发均估为 3，空池</a:t>
               </a:r>
             </a:p>
           </p:txBody>
@@ -13058,8 +11377,8 @@
           </p:nvSpPr>
           <p:spPr>
             <a:xfrm>
-              <a:off x="5924550" y="3038475"/>
-              <a:ext cx="2295525" cy="314325"/>
+              <a:off x="5924550" y="2952750"/>
+              <a:ext cx="5657850" cy="314325"/>
             </a:xfrm>
             <a:prstGeom prst="rect">
               <a:avLst/>
@@ -13102,8 +11421,8 @@
           </p:nvSpPr>
           <p:spPr>
             <a:xfrm>
-              <a:off x="6019800" y="3076575"/>
-              <a:ext cx="2124075" cy="257175"/>
+              <a:off x="6038850" y="3000375"/>
+              <a:ext cx="1685925" cy="238125"/>
             </a:xfrm>
             <a:prstGeom prst="rect">
               <a:avLst/>
@@ -13140,58 +11459,14 @@
         </p:sp>
         <p:sp>
           <p:nvSpPr>
-            <p:cNvPr id="24" name="Rectangle 23"/>
-            <p:cNvSpPr/>
-            <p:nvPr/>
-          </p:nvSpPr>
-          <p:spPr>
-            <a:xfrm>
-              <a:off x="8220075" y="3038475"/>
-              <a:ext cx="1476375" cy="314325"/>
-            </a:xfrm>
-            <a:prstGeom prst="rect">
-              <a:avLst/>
-            </a:prstGeom>
-            <a:solidFill>
-              <a:srgbClr val="EDF3FA"/>
-            </a:solidFill>
-            <a:ln>
-              <a:noFill/>
-            </a:ln>
-            <a:effectLst/>
-          </p:spPr>
-          <p:style>
-            <a:lnRef idx="1">
-              <a:schemeClr val="accent1"/>
-            </a:lnRef>
-            <a:fillRef idx="3">
-              <a:schemeClr val="accent1"/>
-            </a:fillRef>
-            <a:effectRef idx="0">
-              <a:schemeClr val="accent1"/>
-            </a:effectRef>
-            <a:fontRef idx="minor">
-              <a:schemeClr val="lt1"/>
-            </a:fontRef>
-          </p:style>
-          <p:txBody>
-            <a:bodyPr rtlCol="0" anchor="ctr"/>
-            <a:lstStyle/>
-            <a:p>
-              <a:pPr algn="ctr"/>
-            </a:p>
-          </p:txBody>
-        </p:sp>
-        <p:sp>
-          <p:nvSpPr>
-            <p:cNvPr id="25" name="E：本组估价"/>
+            <p:cNvPr id="24" name="读μs + 复制μs + 调用费 = E"/>
             <p:cNvSpPr txBox="1"/>
             <p:nvPr/>
           </p:nvSpPr>
           <p:spPr>
             <a:xfrm>
-              <a:off x="8315325" y="3076575"/>
-              <a:ext cx="1304925" cy="257175"/>
+              <a:off x="7848600" y="3000375"/>
+              <a:ext cx="3609975" cy="238125"/>
             </a:xfrm>
             <a:prstGeom prst="rect">
               <a:avLst/>
@@ -13221,109 +11496,21 @@
                   <a:latin typeface="Microsoft YaHei"/>
                   <a:ea typeface="Microsoft YaHei"/>
                 </a:rPr>
-                <a:t>E：本组估价</a:t>
+                <a:t>读μs + 复制μs + 调用费 = E</a:t>
               </a:r>
             </a:p>
           </p:txBody>
         </p:sp>
         <p:sp>
           <p:nvSpPr>
-            <p:cNvPr id="26" name="Rectangle 25"/>
-            <p:cNvSpPr/>
-            <p:nvPr/>
-          </p:nvSpPr>
-          <p:spPr>
-            <a:xfrm>
-              <a:off x="9696450" y="3038475"/>
-              <a:ext cx="1885950" cy="314325"/>
-            </a:xfrm>
-            <a:prstGeom prst="rect">
-              <a:avLst/>
-            </a:prstGeom>
-            <a:solidFill>
-              <a:srgbClr val="EDF3FA"/>
-            </a:solidFill>
-            <a:ln>
-              <a:noFill/>
-            </a:ln>
-            <a:effectLst/>
-          </p:spPr>
-          <p:style>
-            <a:lnRef idx="1">
-              <a:schemeClr val="accent1"/>
-            </a:lnRef>
-            <a:fillRef idx="3">
-              <a:schemeClr val="accent1"/>
-            </a:fillRef>
-            <a:effectRef idx="0">
-              <a:schemeClr val="accent1"/>
-            </a:effectRef>
-            <a:fontRef idx="minor">
-              <a:schemeClr val="lt1"/>
-            </a:fontRef>
-          </p:style>
-          <p:txBody>
-            <a:bodyPr rtlCol="0" anchor="ctr"/>
-            <a:lstStyle/>
-            <a:p>
-              <a:pPr algn="ctr"/>
-            </a:p>
-          </p:txBody>
-        </p:sp>
-        <p:sp>
-          <p:nvSpPr>
-            <p:cNvPr id="27" name="物理读 / 复制"/>
+            <p:cNvPr id="25" name="DIRECT"/>
             <p:cNvSpPr txBox="1"/>
             <p:nvPr/>
           </p:nvSpPr>
           <p:spPr>
             <a:xfrm>
-              <a:off x="9791700" y="3076575"/>
-              <a:ext cx="1714500" cy="257175"/>
-            </a:xfrm>
-            <a:prstGeom prst="rect">
-              <a:avLst/>
-            </a:prstGeom>
-            <a:noFill/>
-            <a:effectLst/>
-          </p:spPr>
-          <p:txBody>
-            <a:bodyPr wrap="square" lIns="0" rIns="0" tIns="0" bIns="0">
-              <a:spAutoFit/>
-            </a:bodyPr>
-            <a:lstStyle/>
-            <a:p>
-              <a:pPr algn="l">
-                <a:lnSpc>
-                  <a:spcPct val="112000"/>
-                </a:lnSpc>
-                <a:spcAft>
-                  <a:spcPts val="500"/>
-                </a:spcAft>
-              </a:pPr>
-              <a:r>
-                <a:rPr sz="1425" b="1" lang="zh-CN">
-                  <a:solidFill>
-                    <a:srgbClr val="285EA8"/>
-                  </a:solidFill>
-                  <a:latin typeface="Microsoft YaHei"/>
-                  <a:ea typeface="Microsoft YaHei"/>
-                </a:rPr>
-                <a:t>物理读 / 复制</a:t>
-              </a:r>
-            </a:p>
-          </p:txBody>
-        </p:sp>
-        <p:sp>
-          <p:nvSpPr>
-            <p:cNvPr id="28" name="DIRECT"/>
-            <p:cNvSpPr txBox="1"/>
-            <p:nvPr/>
-          </p:nvSpPr>
-          <p:spPr>
-            <a:xfrm>
-              <a:off x="6019800" y="3419475"/>
-              <a:ext cx="2105025" cy="257175"/>
+              <a:off x="6038850" y="3343275"/>
+              <a:ext cx="1714500" cy="266700"/>
             </a:xfrm>
             <a:prstGeom prst="rect">
               <a:avLst/>
@@ -13360,14 +11547,14 @@
         </p:sp>
         <p:sp>
           <p:nvSpPr>
-            <p:cNvPr id="29" name="5.406"/>
+            <p:cNvPr id="26" name="3.406 + 0 + 2 = 5.406"/>
             <p:cNvSpPr txBox="1"/>
             <p:nvPr/>
           </p:nvSpPr>
           <p:spPr>
             <a:xfrm>
-              <a:off x="8315325" y="3419475"/>
-              <a:ext cx="1285875" cy="257175"/>
+              <a:off x="7848600" y="3343275"/>
+              <a:ext cx="3619500" cy="266700"/>
             </a:xfrm>
             <a:prstGeom prst="rect">
               <a:avLst/>
@@ -13397,65 +11584,21 @@
                   <a:latin typeface="Microsoft YaHei"/>
                   <a:ea typeface="Microsoft YaHei"/>
                 </a:rPr>
-                <a:t>5.406</a:t>
+                <a:t>3.406 + 0 + 2 = 5.406</a:t>
               </a:r>
             </a:p>
           </p:txBody>
         </p:sp>
         <p:sp>
           <p:nvSpPr>
-            <p:cNvPr id="30" name="1536B / 0"/>
+            <p:cNvPr id="27" name="AGGREGATE"/>
             <p:cNvSpPr txBox="1"/>
             <p:nvPr/>
           </p:nvSpPr>
           <p:spPr>
             <a:xfrm>
-              <a:off x="9791700" y="3419475"/>
-              <a:ext cx="1733550" cy="257175"/>
-            </a:xfrm>
-            <a:prstGeom prst="rect">
-              <a:avLst/>
-            </a:prstGeom>
-            <a:noFill/>
-            <a:effectLst/>
-          </p:spPr>
-          <p:txBody>
-            <a:bodyPr wrap="square" lIns="0" rIns="0" tIns="0" bIns="0">
-              <a:spAutoFit/>
-            </a:bodyPr>
-            <a:lstStyle/>
-            <a:p>
-              <a:pPr algn="l">
-                <a:lnSpc>
-                  <a:spcPct val="112000"/>
-                </a:lnSpc>
-                <a:spcAft>
-                  <a:spcPts val="500"/>
-                </a:spcAft>
-              </a:pPr>
-              <a:r>
-                <a:rPr sz="1425" b="0" lang="zh-CN">
-                  <a:solidFill>
-                    <a:srgbClr val="1F2937"/>
-                  </a:solidFill>
-                  <a:latin typeface="Microsoft YaHei"/>
-                  <a:ea typeface="Microsoft YaHei"/>
-                </a:rPr>
-                <a:t>1536B / 0</a:t>
-              </a:r>
-            </a:p>
-          </p:txBody>
-        </p:sp>
-        <p:sp>
-          <p:nvSpPr>
-            <p:cNvPr id="31" name="AGGREGATE"/>
-            <p:cNvSpPr txBox="1"/>
-            <p:nvPr/>
-          </p:nvSpPr>
-          <p:spPr>
-            <a:xfrm>
-              <a:off x="6019800" y="3695700"/>
-              <a:ext cx="2105025" cy="257175"/>
+              <a:off x="6038850" y="3629025"/>
+              <a:ext cx="1714500" cy="266700"/>
             </a:xfrm>
             <a:prstGeom prst="rect">
               <a:avLst/>
@@ -13492,14 +11635,14 @@
         </p:sp>
         <p:sp>
           <p:nvSpPr>
-            <p:cNvPr id="32" name="32.820"/>
+            <p:cNvPr id="28" name="3.406 + 24.414 + 5 = 32.820"/>
             <p:cNvSpPr txBox="1"/>
             <p:nvPr/>
           </p:nvSpPr>
           <p:spPr>
             <a:xfrm>
-              <a:off x="8315325" y="3695700"/>
-              <a:ext cx="1285875" cy="257175"/>
+              <a:off x="7848600" y="3629025"/>
+              <a:ext cx="3619500" cy="266700"/>
             </a:xfrm>
             <a:prstGeom prst="rect">
               <a:avLst/>
@@ -13529,65 +11672,21 @@
                   <a:latin typeface="Microsoft YaHei"/>
                   <a:ea typeface="Microsoft YaHei"/>
                 </a:rPr>
-                <a:t>32.820</a:t>
+                <a:t>3.406 + 24.414 + 5 = 32.820</a:t>
               </a:r>
             </a:p>
           </p:txBody>
         </p:sp>
         <p:sp>
           <p:nvSpPr>
-            <p:cNvPr id="33" name="1536B / 1536B"/>
+            <p:cNvPr id="29" name="FALLBACK"/>
             <p:cNvSpPr txBox="1"/>
             <p:nvPr/>
           </p:nvSpPr>
           <p:spPr>
             <a:xfrm>
-              <a:off x="9791700" y="3695700"/>
-              <a:ext cx="1733550" cy="257175"/>
-            </a:xfrm>
-            <a:prstGeom prst="rect">
-              <a:avLst/>
-            </a:prstGeom>
-            <a:noFill/>
-            <a:effectLst/>
-          </p:spPr>
-          <p:txBody>
-            <a:bodyPr wrap="square" lIns="0" rIns="0" tIns="0" bIns="0">
-              <a:spAutoFit/>
-            </a:bodyPr>
-            <a:lstStyle/>
-            <a:p>
-              <a:pPr algn="l">
-                <a:lnSpc>
-                  <a:spcPct val="112000"/>
-                </a:lnSpc>
-                <a:spcAft>
-                  <a:spcPts val="500"/>
-                </a:spcAft>
-              </a:pPr>
-              <a:r>
-                <a:rPr sz="1425" b="0" lang="zh-CN">
-                  <a:solidFill>
-                    <a:srgbClr val="1F2937"/>
-                  </a:solidFill>
-                  <a:latin typeface="Microsoft YaHei"/>
-                  <a:ea typeface="Microsoft YaHei"/>
-                </a:rPr>
-                <a:t>1536B / 1536B</a:t>
-              </a:r>
-            </a:p>
-          </p:txBody>
-        </p:sp>
-        <p:sp>
-          <p:nvSpPr>
-            <p:cNvPr id="34" name="FALLBACK"/>
-            <p:cNvSpPr txBox="1"/>
-            <p:nvPr/>
-          </p:nvSpPr>
-          <p:spPr>
-            <a:xfrm>
-              <a:off x="6019800" y="3971925"/>
-              <a:ext cx="2105025" cy="257175"/>
+              <a:off x="6038850" y="3914775"/>
+              <a:ext cx="1714500" cy="266700"/>
             </a:xfrm>
             <a:prstGeom prst="rect">
               <a:avLst/>
@@ -13624,14 +11723,14 @@
         </p:sp>
         <p:sp>
           <p:nvSpPr>
-            <p:cNvPr id="35" name="22.559"/>
+            <p:cNvPr id="30" name="3.406 + 7.153 + 12 = 22.559"/>
             <p:cNvSpPr txBox="1"/>
             <p:nvPr/>
           </p:nvSpPr>
           <p:spPr>
             <a:xfrm>
-              <a:off x="8315325" y="3971925"/>
-              <a:ext cx="1285875" cy="257175"/>
+              <a:off x="7848600" y="3914775"/>
+              <a:ext cx="3619500" cy="266700"/>
             </a:xfrm>
             <a:prstGeom prst="rect">
               <a:avLst/>
@@ -13661,21 +11760,36 @@
                   <a:latin typeface="Microsoft YaHei"/>
                   <a:ea typeface="Microsoft YaHei"/>
                 </a:rPr>
-                <a:t>22.559</a:t>
+                <a:t>3.406 + 7.153 + 12 = 22.559</a:t>
               </a:r>
             </a:p>
           </p:txBody>
         </p:sp>
+      </p:grpSp>
+      <p:grpSp>
+        <p:nvGrpSpPr>
+          <p:cNvPr id="31" name="步骤3：更新累计估价并记录边界和路径"/>
+          <p:cNvGrpSpPr/>
+          <p:nvPr/>
+        </p:nvGrpSpPr>
+        <p:grpSpPr>
+          <a:xfrm>
+            <a:off x="781050" y="3648075"/>
+            <a:ext cx="10801350" cy="1152525"/>
+            <a:chOff x="781050" y="3648075"/>
+            <a:chExt cx="10801350" cy="1152525"/>
+          </a:xfrm>
+        </p:grpSpPr>
         <p:sp>
           <p:nvSpPr>
-            <p:cNvPr id="36" name="1536B / 1536B"/>
+            <p:cNvPr id="32" name="  if (v &lt; dp[j]) {     dp[j]=v; prev[j]=i; paths[j]=path;   } }"/>
             <p:cNvSpPr txBox="1"/>
             <p:nvPr/>
           </p:nvSpPr>
           <p:spPr>
             <a:xfrm>
-              <a:off x="9791700" y="3971925"/>
-              <a:ext cx="1733550" cy="257175"/>
+              <a:off x="781050" y="3648075"/>
+              <a:ext cx="4686300" cy="1028700"/>
             </a:xfrm>
             <a:prstGeom prst="rect">
               <a:avLst/>
@@ -13698,43 +11812,88 @@
                 </a:spcAft>
               </a:pPr>
               <a:r>
-                <a:rPr sz="1425" b="0" lang="zh-CN">
+                <a:rPr sz="1425" b="1" lang="zh-CN">
                   <a:solidFill>
-                    <a:srgbClr val="1F2937"/>
+                    <a:srgbClr val="24756D"/>
                   </a:solidFill>
                   <a:latin typeface="Microsoft YaHei"/>
                   <a:ea typeface="Microsoft YaHei"/>
                 </a:rPr>
-                <a:t>1536B / 1536B</a:t>
+                <a:t>  if (v &lt; dp[j]) {</a:t>
+              </a:r>
+            </a:p>
+            <a:p>
+              <a:pPr algn="l">
+                <a:lnSpc>
+                  <a:spcPct val="112000"/>
+                </a:lnSpc>
+                <a:spcAft>
+                  <a:spcPts val="500"/>
+                </a:spcAft>
+              </a:pPr>
+              <a:r>
+                <a:rPr sz="1425" b="1" lang="zh-CN">
+                  <a:solidFill>
+                    <a:srgbClr val="24756D"/>
+                  </a:solidFill>
+                  <a:latin typeface="Microsoft YaHei"/>
+                  <a:ea typeface="Microsoft YaHei"/>
+                </a:rPr>
+                <a:t>    dp[j]=v; prev[j]=i; paths[j]=path;</a:t>
+              </a:r>
+            </a:p>
+            <a:p>
+              <a:pPr algn="l">
+                <a:lnSpc>
+                  <a:spcPct val="112000"/>
+                </a:lnSpc>
+                <a:spcAft>
+                  <a:spcPts val="500"/>
+                </a:spcAft>
+              </a:pPr>
+              <a:r>
+                <a:rPr sz="1425" b="1" lang="zh-CN">
+                  <a:solidFill>
+                    <a:srgbClr val="24756D"/>
+                  </a:solidFill>
+                  <a:latin typeface="Microsoft YaHei"/>
+                  <a:ea typeface="Microsoft YaHei"/>
+                </a:rPr>
+                <a:t>  }</a:t>
+              </a:r>
+            </a:p>
+            <a:p>
+              <a:pPr algn="l">
+                <a:lnSpc>
+                  <a:spcPct val="112000"/>
+                </a:lnSpc>
+                <a:spcAft>
+                  <a:spcPts val="500"/>
+                </a:spcAft>
+              </a:pPr>
+              <a:r>
+                <a:rPr sz="1425" b="1" lang="zh-CN">
+                  <a:solidFill>
+                    <a:srgbClr val="24756D"/>
+                  </a:solidFill>
+                  <a:latin typeface="Microsoft YaHei"/>
+                  <a:ea typeface="Microsoft YaHei"/>
+                </a:rPr>
+                <a:t>}</a:t>
               </a:r>
             </a:p>
           </p:txBody>
         </p:sp>
-      </p:grpSp>
-      <p:grpSp>
-        <p:nvGrpSpPr>
-          <p:cNvPr id="37" name="演示3：更新前缀最优值和前驱"/>
-          <p:cNvGrpSpPr/>
-          <p:nvPr/>
-        </p:nvGrpSpPr>
-        <p:grpSpPr>
-          <a:xfrm>
-            <a:off x="781050" y="4057650"/>
-            <a:ext cx="10801350" cy="1104899"/>
-            <a:chOff x="781050" y="4057650"/>
-            <a:chExt cx="10801350" cy="1104899"/>
-          </a:xfrm>
-        </p:grpSpPr>
         <p:sp>
           <p:nvSpPr>
-            <p:cNvPr id="38" name="      v = dp[i] + estimate(...);       if (v &lt; dp[j]) {         dp[j]=v; prev[j]=i; paths[j]=path;  "/>
+            <p:cNvPr id="33" name="dp[1]=3.135；dp[2]=4.271；dp[3]=5.406"/>
             <p:cNvSpPr txBox="1"/>
             <p:nvPr/>
           </p:nvSpPr>
           <p:spPr>
             <a:xfrm>
-              <a:off x="781050" y="4057650"/>
-              <a:ext cx="4667250" cy="1038225"/>
+              <a:off x="5924550" y="4286250"/>
+              <a:ext cx="5657850" cy="238125"/>
             </a:xfrm>
             <a:prstGeom prst="rect">
               <a:avLst/>
@@ -13757,88 +11916,28 @@
                 </a:spcAft>
               </a:pPr>
               <a:r>
-                <a:rPr sz="1387" b="1" lang="zh-CN">
+                <a:rPr sz="1575" b="1" lang="zh-CN">
                   <a:solidFill>
-                    <a:srgbClr val="24756D"/>
+                    <a:srgbClr val="285EA8"/>
                   </a:solidFill>
                   <a:latin typeface="Microsoft YaHei"/>
                   <a:ea typeface="Microsoft YaHei"/>
                 </a:rPr>
-                <a:t>      v = dp[i] + estimate(...);</a:t>
-              </a:r>
-            </a:p>
-            <a:p>
-              <a:pPr algn="l">
-                <a:lnSpc>
-                  <a:spcPct val="112000"/>
-                </a:lnSpc>
-                <a:spcAft>
-                  <a:spcPts val="500"/>
-                </a:spcAft>
-              </a:pPr>
-              <a:r>
-                <a:rPr sz="1387" b="1" lang="zh-CN">
-                  <a:solidFill>
-                    <a:srgbClr val="24756D"/>
-                  </a:solidFill>
-                  <a:latin typeface="Microsoft YaHei"/>
-                  <a:ea typeface="Microsoft YaHei"/>
-                </a:rPr>
-                <a:t>      if (v &lt; dp[j]) {</a:t>
-              </a:r>
-            </a:p>
-            <a:p>
-              <a:pPr algn="l">
-                <a:lnSpc>
-                  <a:spcPct val="112000"/>
-                </a:lnSpc>
-                <a:spcAft>
-                  <a:spcPts val="500"/>
-                </a:spcAft>
-              </a:pPr>
-              <a:r>
-                <a:rPr sz="1387" b="1" lang="zh-CN">
-                  <a:solidFill>
-                    <a:srgbClr val="24756D"/>
-                  </a:solidFill>
-                  <a:latin typeface="Microsoft YaHei"/>
-                  <a:ea typeface="Microsoft YaHei"/>
-                </a:rPr>
-                <a:t>        dp[j]=v; prev[j]=i; paths[j]=path;</a:t>
-              </a:r>
-            </a:p>
-            <a:p>
-              <a:pPr algn="l">
-                <a:lnSpc>
-                  <a:spcPct val="112000"/>
-                </a:lnSpc>
-                <a:spcAft>
-                  <a:spcPts val="500"/>
-                </a:spcAft>
-              </a:pPr>
-              <a:r>
-                <a:rPr sz="1387" b="1" lang="zh-CN">
-                  <a:solidFill>
-                    <a:srgbClr val="24756D"/>
-                  </a:solidFill>
-                  <a:latin typeface="Microsoft YaHei"/>
-                  <a:ea typeface="Microsoft YaHei"/>
-                </a:rPr>
-                <a:t>      } }</a:t>
+                <a:t>dp[1]=3.135；dp[2]=4.271；dp[3]=5.406</a:t>
               </a:r>
             </a:p>
           </p:txBody>
         </p:sp>
         <p:sp>
           <p:nvSpPr>
-            <p:cNvPr id="39" name="前缀最优：dp[1]=3.135，dp[2]=4.271"/>
+            <p:cNvPr id="34" name="快速 DP 输出：[P0,P1,P2] → DIRECT，E=5.406。"/>
             <p:cNvSpPr txBox="1"/>
             <p:nvPr/>
           </p:nvSpPr>
           <p:spPr>
             <a:xfrm>
-              <a:off x="5924550" y="4352925"/>
-              <a:ext cx="5657850" cy="276225"/>
+              <a:off x="5924550" y="4572000"/>
+              <a:ext cx="5657850" cy="228600"/>
             </a:xfrm>
             <a:prstGeom prst="rect">
               <a:avLst/>
@@ -13861,78 +11960,14 @@
                 </a:spcAft>
               </a:pPr>
               <a:r>
-                <a:rPr sz="1650" b="0" lang="zh-CN">
+                <a:rPr sz="1500" b="0" lang="zh-CN">
                   <a:solidFill>
                     <a:srgbClr val="1F2937"/>
                   </a:solidFill>
                   <a:latin typeface="Microsoft YaHei"/>
                   <a:ea typeface="Microsoft YaHei"/>
                 </a:rPr>
-                <a:t>前缀最优：dp[1]=3.135，dp[2]=4.271</a:t>
-              </a:r>
-            </a:p>
-          </p:txBody>
-        </p:sp>
-        <p:sp>
-          <p:nvSpPr>
-            <p:cNvPr id="40" name="dp[3] = min(5.406, 3.135+4.271, 4.271+3.135)            = 5.406；记录 prev[3]=0，path=DIRECT"/>
-            <p:cNvSpPr txBox="1"/>
-            <p:nvPr/>
-          </p:nvSpPr>
-          <p:spPr>
-            <a:xfrm>
-              <a:off x="5924550" y="4695825"/>
-              <a:ext cx="5657850" cy="466724"/>
-            </a:xfrm>
-            <a:prstGeom prst="rect">
-              <a:avLst/>
-            </a:prstGeom>
-            <a:noFill/>
-            <a:effectLst/>
-          </p:spPr>
-          <p:txBody>
-            <a:bodyPr wrap="square" lIns="0" rIns="0" tIns="0" bIns="0">
-              <a:spAutoFit/>
-            </a:bodyPr>
-            <a:lstStyle/>
-            <a:p>
-              <a:pPr algn="l">
-                <a:lnSpc>
-                  <a:spcPct val="112000"/>
-                </a:lnSpc>
-                <a:spcAft>
-                  <a:spcPts val="500"/>
-                </a:spcAft>
-              </a:pPr>
-              <a:r>
-                <a:rPr sz="1500" b="1" lang="zh-CN">
-                  <a:solidFill>
-                    <a:srgbClr val="285EA8"/>
-                  </a:solidFill>
-                  <a:latin typeface="Microsoft YaHei"/>
-                  <a:ea typeface="Microsoft YaHei"/>
-                </a:rPr>
-                <a:t>dp[3] = min(5.406, 3.135+4.271, 4.271+3.135)</a:t>
-              </a:r>
-            </a:p>
-            <a:p>
-              <a:pPr algn="l">
-                <a:lnSpc>
-                  <a:spcPct val="112000"/>
-                </a:lnSpc>
-                <a:spcAft>
-                  <a:spcPts val="500"/>
-                </a:spcAft>
-              </a:pPr>
-              <a:r>
-                <a:rPr sz="1500" b="1" lang="zh-CN">
-                  <a:solidFill>
-                    <a:srgbClr val="285EA8"/>
-                  </a:solidFill>
-                  <a:latin typeface="Microsoft YaHei"/>
-                  <a:ea typeface="Microsoft YaHei"/>
-                </a:rPr>
-                <a:t>           = 5.406；记录 prev[3]=0，path=DIRECT</a:t>
+                <a:t>快速 DP 输出：[P0,P1,P2] → DIRECT，E=5.406。</a:t>
               </a:r>
             </a:p>
           </p:txBody>
@@ -13940,34 +11975,34 @@
       </p:grpSp>
       <p:grpSp>
         <p:nvGrpSpPr>
-          <p:cNvPr id="41" name="演示4：回溯和真实传输结果"/>
+          <p:cNvPr id="35" name="步骤4：有条件地按细化 DP"/>
           <p:cNvGrpSpPr/>
           <p:nvPr/>
         </p:nvGrpSpPr>
         <p:grpSpPr>
           <a:xfrm>
-            <a:off x="609600" y="5295900"/>
-            <a:ext cx="10972800" cy="723900"/>
-            <a:chOff x="609600" y="5295900"/>
-            <a:chExt cx="10972800" cy="723900"/>
+            <a:off x="609600" y="4943475"/>
+            <a:ext cx="10972800" cy="657225"/>
+            <a:chOff x="609600" y="4943475"/>
+            <a:chExt cx="10972800" cy="657225"/>
           </a:xfrm>
         </p:grpSpPr>
         <p:sp>
           <p:nvSpPr>
-            <p:cNvPr id="42" name="Rectangle 41"/>
+            <p:cNvPr id="36" name="Rectangle 35"/>
             <p:cNvSpPr/>
             <p:nvPr/>
           </p:nvSpPr>
           <p:spPr>
             <a:xfrm>
-              <a:off x="609600" y="5295900"/>
-              <a:ext cx="10972800" cy="723900"/>
+              <a:off x="609600" y="4943475"/>
+              <a:ext cx="10972800" cy="657225"/>
             </a:xfrm>
             <a:prstGeom prst="rect">
               <a:avLst/>
             </a:prstGeom>
             <a:solidFill>
-              <a:srgbClr val="EDF3FA"/>
+              <a:srgbClr val="EEF6F3"/>
             </a:solidFill>
             <a:ln>
               <a:noFill/>
@@ -13998,14 +12033,14 @@
         </p:sp>
         <p:sp>
           <p:nvSpPr>
-            <p:cNvPr id="43" name="回溯 3 → 0  ⇒  1 个 operation、1 条 1536B DIRECT、3 份请求映射"/>
+            <p:cNvPr id="37" name="细化 DP：空闲且规模、预算允许时，采样候选组数 cnt、重估并发，检查总槽位与池容量。"/>
             <p:cNvSpPr txBox="1"/>
             <p:nvPr/>
           </p:nvSpPr>
           <p:spPr>
             <a:xfrm>
-              <a:off x="781050" y="5391150"/>
-              <a:ext cx="10458450" cy="285750"/>
+              <a:off x="781050" y="5029200"/>
+              <a:ext cx="10629900" cy="276225"/>
             </a:xfrm>
             <a:prstGeom prst="rect">
               <a:avLst/>
@@ -14028,28 +12063,28 @@
                 </a:spcAft>
               </a:pPr>
               <a:r>
-                <a:rPr sz="1875" b="1" lang="zh-CN">
+                <a:rPr sz="1725" b="1" lang="zh-CN">
                   <a:solidFill>
-                    <a:srgbClr val="285EA8"/>
+                    <a:srgbClr val="24756D"/>
                   </a:solidFill>
                   <a:latin typeface="Microsoft YaHei"/>
                   <a:ea typeface="Microsoft YaHei"/>
                 </a:rPr>
-                <a:t>回溯 3 → 0  ⇒  1 个 operation、1 条 1536B DIRECT、3 份请求映射</a:t>
+                <a:t>细化 DP：空闲且规模、预算允许时，采样候选组数 cnt、重估并发，检查总槽位与池容量。</a:t>
               </a:r>
             </a:p>
           </p:txBody>
         </p:sp>
         <p:sp>
           <p:nvSpPr>
-            <p:cNvPr id="44" name="官方回放：T=4μs、CPU=2、NPU=0，J=6（分别读取 J=10）；本例无重复访问，不提升。"/>
+            <p:cNvPr id="38" name="1/2/3 组的最优 E=5.406/7.406/9.406 → 仍输出 1 组 DIRECT；AGG 重估 32.820 → 81.648。"/>
             <p:cNvSpPr txBox="1"/>
             <p:nvPr/>
           </p:nvSpPr>
           <p:spPr>
             <a:xfrm>
-              <a:off x="781050" y="5762625"/>
-              <a:ext cx="10458450" cy="238125"/>
+              <a:off x="781050" y="5362575"/>
+              <a:ext cx="10629900" cy="228600"/>
             </a:xfrm>
             <a:prstGeom prst="rect">
               <a:avLst/>
@@ -14072,14 +12107,73 @@
                 </a:spcAft>
               </a:pPr>
               <a:r>
-                <a:rPr sz="1575" b="0" lang="zh-CN">
+                <a:rPr sz="1500" b="0" lang="zh-CN">
                   <a:solidFill>
                     <a:srgbClr val="1F2937"/>
                   </a:solidFill>
                   <a:latin typeface="Microsoft YaHei"/>
                   <a:ea typeface="Microsoft YaHei"/>
                 </a:rPr>
-                <a:t>官方回放：T=4μs、CPU=2、NPU=0，J=6（分别读取 J=10）；本例无重复访问，不提升。</a:t>
+                <a:t>1/2/3 组的最优 E=5.406/7.406/9.406 → 仍输出 1 组 DIRECT；AGG 重估 32.820 → 81.648。</a:t>
+              </a:r>
+            </a:p>
+          </p:txBody>
+        </p:sp>
+      </p:grpSp>
+      <p:grpSp>
+        <p:nvGrpSpPr>
+          <p:cNvPr id="39" name="步骤5：回溯输出与官方实际成本"/>
+          <p:cNvGrpSpPr/>
+          <p:nvPr/>
+        </p:nvGrpSpPr>
+        <p:grpSpPr>
+          <a:xfrm>
+            <a:off x="609600" y="5810250"/>
+            <a:ext cx="10972800" cy="295275"/>
+            <a:chOff x="609600" y="5810250"/>
+            <a:chExt cx="10972800" cy="295275"/>
+          </a:xfrm>
+        </p:grpSpPr>
+        <p:sp>
+          <p:nvSpPr>
+            <p:cNvPr id="40" name="最终：1 组 DIRECT 读 1536B；实际 T=4μs（向上取整），调用费=2，J=1×4+2=6。"/>
+            <p:cNvSpPr txBox="1"/>
+            <p:nvPr/>
+          </p:nvSpPr>
+          <p:spPr>
+            <a:xfrm>
+              <a:off x="609600" y="5810250"/>
+              <a:ext cx="10972800" cy="295275"/>
+            </a:xfrm>
+            <a:prstGeom prst="rect">
+              <a:avLst/>
+            </a:prstGeom>
+            <a:noFill/>
+            <a:effectLst/>
+          </p:spPr>
+          <p:txBody>
+            <a:bodyPr wrap="square" lIns="0" rIns="0" tIns="0" bIns="0">
+              <a:spAutoFit/>
+            </a:bodyPr>
+            <a:lstStyle/>
+            <a:p>
+              <a:pPr algn="l">
+                <a:lnSpc>
+                  <a:spcPct val="112000"/>
+                </a:lnSpc>
+                <a:spcAft>
+                  <a:spcPts val="500"/>
+                </a:spcAft>
+              </a:pPr>
+              <a:r>
+                <a:rPr sz="1800" b="1" lang="zh-CN">
+                  <a:solidFill>
+                    <a:srgbClr val="285EA8"/>
+                  </a:solidFill>
+                  <a:latin typeface="Microsoft YaHei"/>
+                  <a:ea typeface="Microsoft YaHei"/>
+                </a:rPr>
+                <a:t>最终：1 组 DIRECT 读 1536B；实际 T=4μs（向上取整），调用费=2，J=1×4+2=6。</a:t>
               </a:r>
             </a:p>
           </p:txBody>
@@ -14230,7 +12324,7 @@
                                           </p:stCondLst>
                                         </p:cTn>
                                         <p:tgtEl>
-                                          <p:spTgt spid="37"/>
+                                          <p:spTgt spid="31"/>
                                         </p:tgtEl>
                                         <p:attrNameLst>
                                           <p:attrName>style.visibility</p:attrName>
@@ -14244,7 +12338,7 @@
                                       <p:cBhvr>
                                         <p:cTn id="17" dur="280"/>
                                         <p:tgtEl>
-                                          <p:spTgt spid="37"/>
+                                          <p:spTgt spid="31"/>
                                         </p:tgtEl>
                                       </p:cBhvr>
                                     </p:animEffect>
@@ -14283,7 +12377,7 @@
                                           </p:stCondLst>
                                         </p:cTn>
                                         <p:tgtEl>
-                                          <p:spTgt spid="41"/>
+                                          <p:spTgt spid="35"/>
                                         </p:tgtEl>
                                         <p:attrNameLst>
                                           <p:attrName>style.visibility</p:attrName>
@@ -14297,7 +12391,60 @@
                                       <p:cBhvr>
                                         <p:cTn id="22" dur="280"/>
                                         <p:tgtEl>
-                                          <p:spTgt spid="41"/>
+                                          <p:spTgt spid="35"/>
+                                        </p:tgtEl>
+                                      </p:cBhvr>
+                                    </p:animEffect>
+                                  </p:childTnLst>
+                                </p:cTn>
+                              </p:par>
+                            </p:childTnLst>
+                          </p:cTn>
+                        </p:par>
+                      </p:childTnLst>
+                    </p:cTn>
+                  </p:par>
+                  <p:par>
+                    <p:cTn id="23" fill="hold">
+                      <p:stCondLst>
+                        <p:cond delay="indefinite"/>
+                      </p:stCondLst>
+                      <p:childTnLst>
+                        <p:par>
+                          <p:cTn id="24" fill="hold">
+                            <p:stCondLst>
+                              <p:cond delay="0"/>
+                            </p:stCondLst>
+                            <p:childTnLst>
+                              <p:par>
+                                <p:cTn id="25" presetID="10" presetClass="entr" presetSubtype="0" fill="hold" nodeType="clickEffect">
+                                  <p:stCondLst>
+                                    <p:cond delay="0"/>
+                                  </p:stCondLst>
+                                  <p:childTnLst>
+                                    <p:set>
+                                      <p:cBhvr>
+                                        <p:cTn id="26" dur="1" fill="hold">
+                                          <p:stCondLst>
+                                            <p:cond delay="0"/>
+                                          </p:stCondLst>
+                                        </p:cTn>
+                                        <p:tgtEl>
+                                          <p:spTgt spid="39"/>
+                                        </p:tgtEl>
+                                        <p:attrNameLst>
+                                          <p:attrName>style.visibility</p:attrName>
+                                        </p:attrNameLst>
+                                      </p:cBhvr>
+                                      <p:to>
+                                        <p:strVal val="visible"/>
+                                      </p:to>
+                                    </p:set>
+                                    <p:animEffect transition="in" filter="fade">
+                                      <p:cBhvr>
+                                        <p:cTn id="27" dur="280"/>
+                                        <p:tgtEl>
+                                          <p:spTgt spid="39"/>
                                         </p:tgtEl>
                                       </p:cBhvr>
                                     </p:animEffect>
@@ -14355,7 +12502,7 @@
       <p:grpSpPr/>
       <p:sp>
         <p:nvSpPr>
-          <p:cNvPr id="2" name="前台 · 计数 DP 与搜索边界"/>
+          <p:cNvPr id="2" name="后台 · on_iocb_complete"/>
           <p:cNvSpPr txBox="1"/>
           <p:nvPr/>
         </p:nvSpPr>
@@ -14392,14 +12539,14 @@
                 <a:latin typeface="Microsoft YaHei"/>
                 <a:ea typeface="Microsoft YaHei"/>
               </a:rPr>
-              <a:t>前台 · 计数 DP 与搜索边界</a:t>
-            </a:r>
-          </a:p>
-        </p:txBody>
-      </p:sp>
-      <p:sp>
-        <p:nvSpPr>
-          <p:cNvPr id="3" name="组数改变并发估计：再比较“恰好 cnt 组”的计划"/>
+              <a:t>后台 · on_iocb_complete</a:t>
+            </a:r>
+          </a:p>
+        </p:txBody>
+      </p:sp>
+      <p:sp>
+        <p:nvSpPr>
+          <p:cNvPr id="3" name="本次读取完成后，再决定是否为未来复用付费"/>
           <p:cNvSpPr txBox="1"/>
           <p:nvPr/>
         </p:nvSpPr>
@@ -14436,14 +12583,14 @@
                 <a:latin typeface="Microsoft YaHei"/>
                 <a:ea typeface="Microsoft YaHei"/>
               </a:rPr>
-              <a:t>组数改变并发估计：再比较“恰好 cnt 组”的计划</a:t>
-            </a:r>
-          </a:p>
-        </p:txBody>
-      </p:sp>
-      <p:sp>
-        <p:nvSpPr>
-          <p:cNvPr id="4" name="cnt 是候选计划的 SSD 命令数；当前每组一读，不能把它当成全程不变的真实并发。"/>
+              <a:t>本次读取完成后，再决定是否为未来复用付费</a:t>
+            </a:r>
+          </a:p>
+        </p:txBody>
+      </p:sp>
+      <p:sp>
+        <p:nvSpPr>
+          <p:cNvPr id="4" name="依次检查四道条件；任一未通过就返回 nullopt，本次读取已成功完成。"/>
           <p:cNvSpPr txBox="1"/>
           <p:nvPr/>
         </p:nvSpPr>
@@ -14480,7 +12627,7 @@
                 <a:latin typeface="Microsoft YaHei"/>
                 <a:ea typeface="Microsoft YaHei"/>
               </a:rPr>
-              <a:t>cnt 是候选计划的 SSD 命令数；当前每组一读，不能把它当成全程不变的真实并发。</a:t>
+              <a:t>依次检查四道条件；任一未通过就返回 nullopt，本次读取已成功完成。</a:t>
             </a:r>
           </a:p>
         </p:txBody>
@@ -14605,1000 +12752,6 @@
                 <a:ea typeface="Microsoft YaHei"/>
               </a:rPr>
               <a:t>5</a:t>
-            </a:r>
-          </a:p>
-        </p:txBody>
-      </p:sp>
-      <p:sp>
-        <p:nvSpPr>
-          <p:cNvPr id="8" name="Rectangle 7"/>
-          <p:cNvSpPr/>
-          <p:nvPr/>
-        </p:nvSpPr>
-        <p:spPr>
-          <a:xfrm>
-            <a:off x="609600" y="2105025"/>
-            <a:ext cx="10972800" cy="857250"/>
-          </a:xfrm>
-          <a:prstGeom prst="rect">
-            <a:avLst/>
-          </a:prstGeom>
-          <a:solidFill>
-            <a:srgbClr val="EDF3FA"/>
-          </a:solidFill>
-          <a:ln>
-            <a:noFill/>
-          </a:ln>
-          <a:effectLst/>
-        </p:spPr>
-        <p:style>
-          <a:lnRef idx="1">
-            <a:schemeClr val="accent1"/>
-          </a:lnRef>
-          <a:fillRef idx="3">
-            <a:schemeClr val="accent1"/>
-          </a:fillRef>
-          <a:effectRef idx="0">
-            <a:schemeClr val="accent1"/>
-          </a:effectRef>
-          <a:fontRef idx="minor">
-            <a:schemeClr val="lt1"/>
-          </a:fontRef>
-        </p:style>
-        <p:txBody>
-          <a:bodyPr rtlCol="0" anchor="ctr"/>
-          <a:lstStyle/>
-          <a:p>
-            <a:pPr algn="ctr"/>
-          </a:p>
-        </p:txBody>
-      </p:sp>
-      <p:sp>
-        <p:nvSpPr>
-          <p:cNvPr id="9" name="D[h][j] = min { D[h−1][i] + E(片段 [i, j), 路径, cnt) }"/>
-          <p:cNvSpPr txBox="1"/>
-          <p:nvPr/>
-        </p:nvSpPr>
-        <p:spPr>
-          <a:xfrm>
-            <a:off x="800100" y="2247900"/>
-            <a:ext cx="10591800" cy="333375"/>
-          </a:xfrm>
-          <a:prstGeom prst="rect">
-            <a:avLst/>
-          </a:prstGeom>
-          <a:noFill/>
-          <a:effectLst/>
-        </p:spPr>
-        <p:txBody>
-          <a:bodyPr wrap="square" lIns="0" rIns="0" tIns="0" bIns="0">
-            <a:spAutoFit/>
-          </a:bodyPr>
-          <a:lstStyle/>
-          <a:p>
-            <a:pPr algn="l">
-              <a:lnSpc>
-                <a:spcPct val="112000"/>
-              </a:lnSpc>
-              <a:spcAft>
-                <a:spcPts val="500"/>
-              </a:spcAft>
-            </a:pPr>
-            <a:r>
-              <a:rPr sz="2175" b="1" lang="zh-CN">
-                <a:solidFill>
-                  <a:srgbClr val="285EA8"/>
-                </a:solidFill>
-                <a:latin typeface="Microsoft YaHei"/>
-                <a:ea typeface="Microsoft YaHei"/>
-              </a:rPr>
-              <a:t>D[h][j] = min { D[h−1][i] + E(片段 [i, j), 路径, cnt) }</a:t>
-            </a:r>
-          </a:p>
-        </p:txBody>
-      </p:sp>
-      <p:sp>
-        <p:nvSpPr>
-          <p:cNvPr id="10" name="h = 已分组数，j = 已覆盖片段数；固定 cnt 后求 D[cnt][n]，再回溯分组与路径。"/>
-          <p:cNvSpPr txBox="1"/>
-          <p:nvPr/>
-        </p:nvSpPr>
-        <p:spPr>
-          <a:xfrm>
-            <a:off x="800100" y="2657475"/>
-            <a:ext cx="10591800" cy="247649"/>
-          </a:xfrm>
-          <a:prstGeom prst="rect">
-            <a:avLst/>
-          </a:prstGeom>
-          <a:noFill/>
-          <a:effectLst/>
-        </p:spPr>
-        <p:txBody>
-          <a:bodyPr wrap="square" lIns="0" rIns="0" tIns="0" bIns="0">
-            <a:spAutoFit/>
-          </a:bodyPr>
-          <a:lstStyle/>
-          <a:p>
-            <a:pPr algn="l">
-              <a:lnSpc>
-                <a:spcPct val="112000"/>
-              </a:lnSpc>
-              <a:spcAft>
-                <a:spcPts val="500"/>
-              </a:spcAft>
-            </a:pPr>
-            <a:r>
-              <a:rPr sz="1575" b="0" lang="zh-CN">
-                <a:solidFill>
-                  <a:srgbClr val="1F2937"/>
-                </a:solidFill>
-                <a:latin typeface="Microsoft YaHei"/>
-                <a:ea typeface="Microsoft YaHei"/>
-              </a:rPr>
-              <a:t>h = 已分组数，j = 已覆盖片段数；固定 cnt 后求 D[cnt][n]，再回溯分组与路径。</a:t>
-            </a:r>
-          </a:p>
-        </p:txBody>
-      </p:sp>
-      <p:sp>
-        <p:nvSpPr>
-          <p:cNvPr id="11" name="为什么要重估并发"/>
-          <p:cNvSpPr txBox="1"/>
-          <p:nvPr/>
-        </p:nvSpPr>
-        <p:spPr>
-          <a:xfrm>
-            <a:off x="609600" y="3209925"/>
-            <a:ext cx="5238750" cy="304800"/>
-          </a:xfrm>
-          <a:prstGeom prst="rect">
-            <a:avLst/>
-          </a:prstGeom>
-          <a:noFill/>
-          <a:effectLst/>
-        </p:spPr>
-        <p:txBody>
-          <a:bodyPr wrap="square" lIns="0" rIns="0" tIns="0" bIns="0">
-            <a:spAutoFit/>
-          </a:bodyPr>
-          <a:lstStyle/>
-          <a:p>
-            <a:pPr algn="l">
-              <a:lnSpc>
-                <a:spcPct val="112000"/>
-              </a:lnSpc>
-              <a:spcAft>
-                <a:spcPts val="500"/>
-              </a:spcAft>
-            </a:pPr>
-            <a:r>
-              <a:rPr sz="1950" b="1" lang="zh-CN">
-                <a:solidFill>
-                  <a:srgbClr val="285EA8"/>
-                </a:solidFill>
-                <a:latin typeface="Microsoft YaHei"/>
-                <a:ea typeface="Microsoft YaHei"/>
-              </a:rPr>
-              <a:t>为什么要重估并发</a:t>
-            </a:r>
-          </a:p>
-        </p:txBody>
-      </p:sp>
-      <p:sp>
-        <p:nvSpPr>
-          <p:cNvPr id="12" name="SSD：活动数 + cnt。复制：按卡号和类型 分别估计，沿用快速候选的组数比例并限流。 组数变少，复制带宽可能下降。"/>
-          <p:cNvSpPr txBox="1"/>
-          <p:nvPr/>
-        </p:nvSpPr>
-        <p:spPr>
-          <a:xfrm>
-            <a:off x="609600" y="3648075"/>
-            <a:ext cx="5238750" cy="819150"/>
-          </a:xfrm>
-          <a:prstGeom prst="rect">
-            <a:avLst/>
-          </a:prstGeom>
-          <a:noFill/>
-          <a:effectLst/>
-        </p:spPr>
-        <p:txBody>
-          <a:bodyPr wrap="square" lIns="0" rIns="0" tIns="0" bIns="0">
-            <a:spAutoFit/>
-          </a:bodyPr>
-          <a:lstStyle/>
-          <a:p>
-            <a:pPr algn="l">
-              <a:lnSpc>
-                <a:spcPct val="112000"/>
-              </a:lnSpc>
-              <a:spcAft>
-                <a:spcPts val="500"/>
-              </a:spcAft>
-            </a:pPr>
-            <a:r>
-              <a:rPr sz="1725" b="0" lang="zh-CN">
-                <a:solidFill>
-                  <a:srgbClr val="1F2937"/>
-                </a:solidFill>
-                <a:latin typeface="Microsoft YaHei"/>
-                <a:ea typeface="Microsoft YaHei"/>
-              </a:rPr>
-              <a:t>SSD：活动数 + cnt。复制：按卡号和类型</a:t>
-            </a:r>
-          </a:p>
-          <a:p>
-            <a:pPr algn="l">
-              <a:lnSpc>
-                <a:spcPct val="112000"/>
-              </a:lnSpc>
-              <a:spcAft>
-                <a:spcPts val="500"/>
-              </a:spcAft>
-            </a:pPr>
-            <a:r>
-              <a:rPr sz="1725" b="0" lang="zh-CN">
-                <a:solidFill>
-                  <a:srgbClr val="1F2937"/>
-                </a:solidFill>
-                <a:latin typeface="Microsoft YaHei"/>
-                <a:ea typeface="Microsoft YaHei"/>
-              </a:rPr>
-              <a:t>分别估计，沿用快速候选的组数比例并限流。</a:t>
-            </a:r>
-          </a:p>
-          <a:p>
-            <a:pPr algn="l">
-              <a:lnSpc>
-                <a:spcPct val="112000"/>
-              </a:lnSpc>
-              <a:spcAft>
-                <a:spcPts val="500"/>
-              </a:spcAft>
-            </a:pPr>
-            <a:r>
-              <a:rPr sz="1725" b="0" lang="zh-CN">
-                <a:solidFill>
-                  <a:srgbClr val="1F2937"/>
-                </a:solidFill>
-                <a:latin typeface="Microsoft YaHei"/>
-                <a:ea typeface="Microsoft YaHei"/>
-              </a:rPr>
-              <a:t>组数变少，复制带宽可能下降。</a:t>
-            </a:r>
-          </a:p>
-        </p:txBody>
-      </p:sp>
-      <p:sp>
-        <p:nvSpPr>
-          <p:cNvPr id="13" name="实测：三个相邻 4KiB，目标不对齐"/>
-          <p:cNvSpPr txBox="1"/>
-          <p:nvPr/>
-        </p:nvSpPr>
-        <p:spPr>
-          <a:xfrm>
-            <a:off x="609600" y="4648200"/>
-            <a:ext cx="5238750" cy="257175"/>
-          </a:xfrm>
-          <a:prstGeom prst="rect">
-            <a:avLst/>
-          </a:prstGeom>
-          <a:noFill/>
-          <a:effectLst/>
-        </p:spPr>
-        <p:txBody>
-          <a:bodyPr wrap="square" lIns="0" rIns="0" tIns="0" bIns="0">
-            <a:spAutoFit/>
-          </a:bodyPr>
-          <a:lstStyle/>
-          <a:p>
-            <a:pPr algn="l">
-              <a:lnSpc>
-                <a:spcPct val="112000"/>
-              </a:lnSpc>
-              <a:spcAft>
-                <a:spcPts val="500"/>
-              </a:spcAft>
-            </a:pPr>
-            <a:r>
-              <a:rPr sz="1650" b="1" lang="zh-CN">
-                <a:solidFill>
-                  <a:srgbClr val="1F2937"/>
-                </a:solidFill>
-                <a:latin typeface="Microsoft YaHei"/>
-                <a:ea typeface="Microsoft YaHei"/>
-              </a:rPr>
-              <a:t>实测：三个相邻 4KiB，目标不对齐</a:t>
-            </a:r>
-          </a:p>
-        </p:txBody>
-      </p:sp>
-      <p:sp>
-        <p:nvSpPr>
-          <p:cNvPr id="14" name="合并 1 组 AGGREGATE"/>
-          <p:cNvSpPr txBox="1"/>
-          <p:nvPr/>
-        </p:nvSpPr>
-        <p:spPr>
-          <a:xfrm>
-            <a:off x="609600" y="5067300"/>
-            <a:ext cx="2857500" cy="285750"/>
-          </a:xfrm>
-          <a:prstGeom prst="rect">
-            <a:avLst/>
-          </a:prstGeom>
-          <a:noFill/>
-          <a:effectLst/>
-        </p:spPr>
-        <p:txBody>
-          <a:bodyPr wrap="square" lIns="0" rIns="0" tIns="0" bIns="0">
-            <a:spAutoFit/>
-          </a:bodyPr>
-          <a:lstStyle/>
-          <a:p>
-            <a:pPr algn="l">
-              <a:lnSpc>
-                <a:spcPct val="112000"/>
-              </a:lnSpc>
-              <a:spcAft>
-                <a:spcPts val="500"/>
-              </a:spcAft>
-            </a:pPr>
-            <a:r>
-              <a:rPr sz="1650" b="0" lang="zh-CN">
-                <a:solidFill>
-                  <a:srgbClr val="1F2937"/>
-                </a:solidFill>
-                <a:latin typeface="Microsoft YaHei"/>
-                <a:ea typeface="Microsoft YaHei"/>
-              </a:rPr>
-              <a:t>合并 1 组 AGGREGATE</a:t>
-            </a:r>
-          </a:p>
-        </p:txBody>
-      </p:sp>
-      <p:sp>
-        <p:nvSpPr>
-          <p:cNvPr id="15" name="93μs + 5 = 98"/>
-          <p:cNvSpPr txBox="1"/>
-          <p:nvPr/>
-        </p:nvSpPr>
-        <p:spPr>
-          <a:xfrm>
-            <a:off x="3562350" y="5067300"/>
-            <a:ext cx="2286000" cy="285750"/>
-          </a:xfrm>
-          <a:prstGeom prst="rect">
-            <a:avLst/>
-          </a:prstGeom>
-          <a:noFill/>
-          <a:effectLst/>
-        </p:spPr>
-        <p:txBody>
-          <a:bodyPr wrap="square" lIns="0" rIns="0" tIns="0" bIns="0">
-            <a:spAutoFit/>
-          </a:bodyPr>
-          <a:lstStyle/>
-          <a:p>
-            <a:pPr algn="l">
-              <a:lnSpc>
-                <a:spcPct val="112000"/>
-              </a:lnSpc>
-              <a:spcAft>
-                <a:spcPts val="500"/>
-              </a:spcAft>
-            </a:pPr>
-            <a:r>
-              <a:rPr sz="1725" b="1" lang="zh-CN">
-                <a:solidFill>
-                  <a:srgbClr val="285EA8"/>
-                </a:solidFill>
-                <a:latin typeface="Microsoft YaHei"/>
-                <a:ea typeface="Microsoft YaHei"/>
-              </a:rPr>
-              <a:t>93μs + 5 = 98</a:t>
-            </a:r>
-          </a:p>
-        </p:txBody>
-      </p:sp>
-      <p:sp>
-        <p:nvSpPr>
-          <p:cNvPr id="16" name="分成 3 组 AGGREGATE"/>
-          <p:cNvSpPr txBox="1"/>
-          <p:nvPr/>
-        </p:nvSpPr>
-        <p:spPr>
-          <a:xfrm>
-            <a:off x="609600" y="5467350"/>
-            <a:ext cx="2857500" cy="285750"/>
-          </a:xfrm>
-          <a:prstGeom prst="rect">
-            <a:avLst/>
-          </a:prstGeom>
-          <a:noFill/>
-          <a:effectLst/>
-        </p:spPr>
-        <p:txBody>
-          <a:bodyPr wrap="square" lIns="0" rIns="0" tIns="0" bIns="0">
-            <a:spAutoFit/>
-          </a:bodyPr>
-          <a:lstStyle/>
-          <a:p>
-            <a:pPr algn="l">
-              <a:lnSpc>
-                <a:spcPct val="112000"/>
-              </a:lnSpc>
-              <a:spcAft>
-                <a:spcPts val="500"/>
-              </a:spcAft>
-            </a:pPr>
-            <a:r>
-              <a:rPr sz="1650" b="0" lang="zh-CN">
-                <a:solidFill>
-                  <a:srgbClr val="1F2937"/>
-                </a:solidFill>
-                <a:latin typeface="Microsoft YaHei"/>
-                <a:ea typeface="Microsoft YaHei"/>
-              </a:rPr>
-              <a:t>分成 3 组 AGGREGATE</a:t>
-            </a:r>
-          </a:p>
-        </p:txBody>
-      </p:sp>
-      <p:sp>
-        <p:nvSpPr>
-          <p:cNvPr id="17" name="33μs + 15 = 48"/>
-          <p:cNvSpPr txBox="1"/>
-          <p:nvPr/>
-        </p:nvSpPr>
-        <p:spPr>
-          <a:xfrm>
-            <a:off x="3562350" y="5467350"/>
-            <a:ext cx="2286000" cy="285750"/>
-          </a:xfrm>
-          <a:prstGeom prst="rect">
-            <a:avLst/>
-          </a:prstGeom>
-          <a:noFill/>
-          <a:effectLst/>
-        </p:spPr>
-        <p:txBody>
-          <a:bodyPr wrap="square" lIns="0" rIns="0" tIns="0" bIns="0">
-            <a:spAutoFit/>
-          </a:bodyPr>
-          <a:lstStyle/>
-          <a:p>
-            <a:pPr algn="l">
-              <a:lnSpc>
-                <a:spcPct val="112000"/>
-              </a:lnSpc>
-              <a:spcAft>
-                <a:spcPts val="500"/>
-              </a:spcAft>
-            </a:pPr>
-            <a:r>
-              <a:rPr sz="1725" b="1" lang="zh-CN">
-                <a:solidFill>
-                  <a:srgbClr val="285EA8"/>
-                </a:solidFill>
-                <a:latin typeface="Microsoft YaHei"/>
-                <a:ea typeface="Microsoft YaHei"/>
-              </a:rPr>
-              <a:t>33μs + 15 = 48</a:t>
-            </a:r>
-          </a:p>
-        </p:txBody>
-      </p:sp>
-      <p:sp>
-        <p:nvSpPr>
-          <p:cNvPr id="18" name="什么时候运行、怎样控制规模"/>
-          <p:cNvSpPr txBox="1"/>
-          <p:nvPr/>
-        </p:nvSpPr>
-        <p:spPr>
-          <a:xfrm>
-            <a:off x="6324600" y="3209925"/>
-            <a:ext cx="5257800" cy="304800"/>
-          </a:xfrm>
-          <a:prstGeom prst="rect">
-            <a:avLst/>
-          </a:prstGeom>
-          <a:noFill/>
-          <a:effectLst/>
-        </p:spPr>
-        <p:txBody>
-          <a:bodyPr wrap="square" lIns="0" rIns="0" tIns="0" bIns="0">
-            <a:spAutoFit/>
-          </a:bodyPr>
-          <a:lstStyle/>
-          <a:p>
-            <a:pPr algn="l">
-              <a:lnSpc>
-                <a:spcPct val="112000"/>
-              </a:lnSpc>
-              <a:spcAft>
-                <a:spcPts val="500"/>
-              </a:spcAft>
-            </a:pPr>
-            <a:r>
-              <a:rPr sz="1950" b="1" lang="zh-CN">
-                <a:solidFill>
-                  <a:srgbClr val="24756D"/>
-                </a:solidFill>
-                <a:latin typeface="Microsoft YaHei"/>
-                <a:ea typeface="Microsoft YaHei"/>
-              </a:rPr>
-              <a:t>什么时候运行、怎样控制规模</a:t>
-            </a:r>
-          </a:p>
-        </p:txBody>
-      </p:sp>
-      <p:sp>
-        <p:nvSpPr>
-          <p:cNvPr id="19" name="系统保守空闲、规模和预算允许时运行。 采样 cnt：小规模全取；大规模取性能桶、 几何序列、尺寸拐点，再局部细化。 回溯后检查槽位和两类临时池能否同时容纳。 无候选通过时，保留快速区间 DP。"/>
-          <p:cNvSpPr txBox="1"/>
-          <p:nvPr/>
-        </p:nvSpPr>
-        <p:spPr>
-          <a:xfrm>
-            <a:off x="6324600" y="3648075"/>
-            <a:ext cx="5257800" cy="1600200"/>
-          </a:xfrm>
-          <a:prstGeom prst="rect">
-            <a:avLst/>
-          </a:prstGeom>
-          <a:noFill/>
-          <a:effectLst/>
-        </p:spPr>
-        <p:txBody>
-          <a:bodyPr wrap="square" lIns="0" rIns="0" tIns="0" bIns="0">
-            <a:spAutoFit/>
-          </a:bodyPr>
-          <a:lstStyle/>
-          <a:p>
-            <a:pPr algn="l">
-              <a:lnSpc>
-                <a:spcPct val="112000"/>
-              </a:lnSpc>
-              <a:spcAft>
-                <a:spcPts val="500"/>
-              </a:spcAft>
-            </a:pPr>
-            <a:r>
-              <a:rPr sz="1725" b="0" lang="zh-CN">
-                <a:solidFill>
-                  <a:srgbClr val="1F2937"/>
-                </a:solidFill>
-                <a:latin typeface="Microsoft YaHei"/>
-                <a:ea typeface="Microsoft YaHei"/>
-              </a:rPr>
-              <a:t>系统保守空闲、规模和预算允许时运行。</a:t>
-            </a:r>
-          </a:p>
-          <a:p>
-            <a:pPr algn="l">
-              <a:lnSpc>
-                <a:spcPct val="112000"/>
-              </a:lnSpc>
-              <a:spcAft>
-                <a:spcPts val="500"/>
-              </a:spcAft>
-            </a:pPr>
-            <a:r>
-              <a:rPr sz="1725" b="0" lang="zh-CN">
-                <a:solidFill>
-                  <a:srgbClr val="1F2937"/>
-                </a:solidFill>
-                <a:latin typeface="Microsoft YaHei"/>
-                <a:ea typeface="Microsoft YaHei"/>
-              </a:rPr>
-              <a:t>采样 cnt：小规模全取；大规模取性能桶、</a:t>
-            </a:r>
-          </a:p>
-          <a:p>
-            <a:pPr algn="l">
-              <a:lnSpc>
-                <a:spcPct val="112000"/>
-              </a:lnSpc>
-              <a:spcAft>
-                <a:spcPts val="500"/>
-              </a:spcAft>
-            </a:pPr>
-            <a:r>
-              <a:rPr sz="1725" b="0" lang="zh-CN">
-                <a:solidFill>
-                  <a:srgbClr val="1F2937"/>
-                </a:solidFill>
-                <a:latin typeface="Microsoft YaHei"/>
-                <a:ea typeface="Microsoft YaHei"/>
-              </a:rPr>
-              <a:t>几何序列、尺寸拐点，再局部细化。</a:t>
-            </a:r>
-          </a:p>
-          <a:p>
-            <a:pPr algn="l">
-              <a:lnSpc>
-                <a:spcPct val="112000"/>
-              </a:lnSpc>
-              <a:spcAft>
-                <a:spcPts val="500"/>
-              </a:spcAft>
-            </a:pPr>
-            <a:r>
-              <a:rPr sz="1725" b="0" lang="zh-CN">
-                <a:solidFill>
-                  <a:srgbClr val="1F2937"/>
-                </a:solidFill>
-                <a:latin typeface="Microsoft YaHei"/>
-                <a:ea typeface="Microsoft YaHei"/>
-              </a:rPr>
-              <a:t>回溯后检查槽位和两类临时池能否同时容纳。</a:t>
-            </a:r>
-          </a:p>
-          <a:p>
-            <a:pPr algn="l">
-              <a:lnSpc>
-                <a:spcPct val="112000"/>
-              </a:lnSpc>
-              <a:spcAft>
-                <a:spcPts val="500"/>
-              </a:spcAft>
-            </a:pPr>
-            <a:r>
-              <a:rPr sz="1725" b="0" lang="zh-CN">
-                <a:solidFill>
-                  <a:srgbClr val="1F2937"/>
-                </a:solidFill>
-                <a:latin typeface="Microsoft YaHei"/>
-                <a:ea typeface="Microsoft YaHei"/>
-              </a:rPr>
-              <a:t>无候选通过时，保留快速区间 DP。</a:t>
-            </a:r>
-          </a:p>
-        </p:txBody>
-      </p:sp>
-      <p:sp>
-        <p:nvSpPr>
-          <p:cNvPr id="20" name="转移数：快速 O(n×128)；固定 cnt 为 O(cnt×n×128)。 计数搜索共享 200 万工作预算；不保证全局最优。"/>
-          <p:cNvSpPr txBox="1"/>
-          <p:nvPr/>
-        </p:nvSpPr>
-        <p:spPr>
-          <a:xfrm>
-            <a:off x="6324600" y="5467350"/>
-            <a:ext cx="5257800" cy="523874"/>
-          </a:xfrm>
-          <a:prstGeom prst="rect">
-            <a:avLst/>
-          </a:prstGeom>
-          <a:noFill/>
-          <a:effectLst/>
-        </p:spPr>
-        <p:txBody>
-          <a:bodyPr wrap="square" lIns="0" rIns="0" tIns="0" bIns="0">
-            <a:spAutoFit/>
-          </a:bodyPr>
-          <a:lstStyle/>
-          <a:p>
-            <a:pPr algn="l">
-              <a:lnSpc>
-                <a:spcPct val="112000"/>
-              </a:lnSpc>
-              <a:spcAft>
-                <a:spcPts val="500"/>
-              </a:spcAft>
-            </a:pPr>
-            <a:r>
-              <a:rPr sz="1500" b="0" lang="zh-CN">
-                <a:solidFill>
-                  <a:srgbClr val="657184"/>
-                </a:solidFill>
-                <a:latin typeface="Microsoft YaHei"/>
-                <a:ea typeface="Microsoft YaHei"/>
-              </a:rPr>
-              <a:t>转移数：快速 O(n×128)；固定 cnt 为 O(cnt×n×128)。</a:t>
-            </a:r>
-          </a:p>
-          <a:p>
-            <a:pPr algn="l">
-              <a:lnSpc>
-                <a:spcPct val="112000"/>
-              </a:lnSpc>
-              <a:spcAft>
-                <a:spcPts val="500"/>
-              </a:spcAft>
-            </a:pPr>
-            <a:r>
-              <a:rPr sz="1500" b="0" lang="zh-CN">
-                <a:solidFill>
-                  <a:srgbClr val="657184"/>
-                </a:solidFill>
-                <a:latin typeface="Microsoft YaHei"/>
-                <a:ea typeface="Microsoft YaHei"/>
-              </a:rPr>
-              <a:t>计数搜索共享 200 万工作预算；不保证全局最优。</a:t>
-            </a:r>
-          </a:p>
-        </p:txBody>
-      </p:sp>
-    </p:spTree>
-  </p:cSld>
-  <p:clrMapOvr>
-    <a:masterClrMapping/>
-  </p:clrMapOvr>
-</p:sld>
-</file>
-
-<file path=ppt/slides/slide7.xml><?xml version="1.0" encoding="utf-8"?>
-<p:sld xmlns:a="http://schemas.openxmlformats.org/drawingml/2006/main" xmlns:p="http://schemas.openxmlformats.org/presentationml/2006/main" xmlns:r="http://schemas.openxmlformats.org/officeDocument/2006/relationships">
-  <p:cSld>
-    <p:bg>
-      <p:bgPr>
-        <a:solidFill>
-          <a:srgbClr val="FFFFFF"/>
-        </a:solidFill>
-        <a:effectLst/>
-      </p:bgPr>
-    </p:bg>
-    <p:spTree>
-      <p:nvGrpSpPr>
-        <p:cNvPr id="1" name=""/>
-        <p:cNvGrpSpPr/>
-        <p:nvPr/>
-      </p:nvGrpSpPr>
-      <p:grpSpPr/>
-      <p:sp>
-        <p:nvSpPr>
-          <p:cNvPr id="2" name="后台 · on_iocb_complete"/>
-          <p:cNvSpPr txBox="1"/>
-          <p:nvPr/>
-        </p:nvSpPr>
-        <p:spPr>
-          <a:xfrm>
-            <a:off x="609600" y="333375"/>
-            <a:ext cx="10572750" cy="238125"/>
-          </a:xfrm>
-          <a:prstGeom prst="rect">
-            <a:avLst/>
-          </a:prstGeom>
-          <a:noFill/>
-          <a:effectLst/>
-        </p:spPr>
-        <p:txBody>
-          <a:bodyPr wrap="square" lIns="0" rIns="0" tIns="0" bIns="0">
-            <a:spAutoFit/>
-          </a:bodyPr>
-          <a:lstStyle/>
-          <a:p>
-            <a:pPr algn="l">
-              <a:lnSpc>
-                <a:spcPct val="112000"/>
-              </a:lnSpc>
-              <a:spcAft>
-                <a:spcPts val="500"/>
-              </a:spcAft>
-            </a:pPr>
-            <a:r>
-              <a:rPr sz="1200" b="1" lang="zh-CN">
-                <a:solidFill>
-                  <a:srgbClr val="285EA8"/>
-                </a:solidFill>
-                <a:latin typeface="Microsoft YaHei"/>
-                <a:ea typeface="Microsoft YaHei"/>
-              </a:rPr>
-              <a:t>后台 · on_iocb_complete</a:t>
-            </a:r>
-          </a:p>
-        </p:txBody>
-      </p:sp>
-      <p:sp>
-        <p:nvSpPr>
-          <p:cNvPr id="3" name="本次读取完成后，再决定是否为未来复用付费"/>
-          <p:cNvSpPr txBox="1"/>
-          <p:nvPr/>
-        </p:nvSpPr>
-        <p:spPr>
-          <a:xfrm>
-            <a:off x="609600" y="752475"/>
-            <a:ext cx="10972800" cy="609600"/>
-          </a:xfrm>
-          <a:prstGeom prst="rect">
-            <a:avLst/>
-          </a:prstGeom>
-          <a:noFill/>
-          <a:effectLst/>
-        </p:spPr>
-        <p:txBody>
-          <a:bodyPr wrap="square" lIns="0" rIns="0" tIns="0" bIns="0">
-            <a:spAutoFit/>
-          </a:bodyPr>
-          <a:lstStyle/>
-          <a:p>
-            <a:pPr algn="l">
-              <a:lnSpc>
-                <a:spcPct val="112000"/>
-              </a:lnSpc>
-              <a:spcAft>
-                <a:spcPts val="500"/>
-              </a:spcAft>
-            </a:pPr>
-            <a:r>
-              <a:rPr sz="3075" b="1" lang="zh-CN">
-                <a:solidFill>
-                  <a:srgbClr val="1F2937"/>
-                </a:solidFill>
-                <a:latin typeface="Microsoft YaHei"/>
-                <a:ea typeface="Microsoft YaHei"/>
-              </a:rPr>
-              <a:t>本次读取完成后，再决定是否为未来复用付费</a:t>
-            </a:r>
-          </a:p>
-        </p:txBody>
-      </p:sp>
-      <p:sp>
-        <p:nvSpPr>
-          <p:cNvPr id="4" name="依次检查四道条件；任一未通过就返回 nullopt，本次读取已成功完成。"/>
-          <p:cNvSpPr txBox="1"/>
-          <p:nvPr/>
-        </p:nvSpPr>
-        <p:spPr>
-          <a:xfrm>
-            <a:off x="609600" y="1428750"/>
-            <a:ext cx="10972800" cy="552450"/>
-          </a:xfrm>
-          <a:prstGeom prst="rect">
-            <a:avLst/>
-          </a:prstGeom>
-          <a:noFill/>
-          <a:effectLst/>
-        </p:spPr>
-        <p:txBody>
-          <a:bodyPr wrap="square" lIns="0" rIns="0" tIns="0" bIns="0">
-            <a:spAutoFit/>
-          </a:bodyPr>
-          <a:lstStyle/>
-          <a:p>
-            <a:pPr algn="l">
-              <a:lnSpc>
-                <a:spcPct val="112000"/>
-              </a:lnSpc>
-              <a:spcAft>
-                <a:spcPts val="500"/>
-              </a:spcAft>
-            </a:pPr>
-            <a:r>
-              <a:rPr sz="1725" b="0" lang="zh-CN">
-                <a:solidFill>
-                  <a:srgbClr val="657184"/>
-                </a:solidFill>
-                <a:latin typeface="Microsoft YaHei"/>
-                <a:ea typeface="Microsoft YaHei"/>
-              </a:rPr>
-              <a:t>依次检查四道条件；任一未通过就返回 nullopt，本次读取已成功完成。</a:t>
-            </a:r>
-          </a:p>
-        </p:txBody>
-      </p:sp>
-      <p:cxnSp>
-        <p:nvCxnSpPr>
-          <p:cNvPr id="5" name="Connector 4"/>
-          <p:cNvCxnSpPr/>
-          <p:nvPr/>
-        </p:nvCxnSpPr>
-        <p:spPr>
-          <a:xfrm>
-            <a:off x="609600" y="6286500"/>
-            <a:ext cx="10972800" cy="0"/>
-          </a:xfrm>
-          <a:prstGeom prst="line">
-            <a:avLst/>
-          </a:prstGeom>
-          <a:ln w="12700">
-            <a:solidFill>
-              <a:srgbClr val="DCE2E9"/>
-            </a:solidFill>
-          </a:ln>
-          <a:effectLst/>
-        </p:spPr>
-        <p:style>
-          <a:lnRef idx="2">
-            <a:schemeClr val="accent1"/>
-          </a:lnRef>
-          <a:fillRef idx="0">
-            <a:schemeClr val="accent1"/>
-          </a:fillRef>
-          <a:effectRef idx="0">
-            <a:schemeClr val="accent1"/>
-          </a:effectRef>
-          <a:fontRef idx="minor">
-            <a:schemeClr val="tx1"/>
-          </a:fontRef>
-        </p:style>
-      </p:cxnSp>
-      <p:sp>
-        <p:nvSpPr>
-          <p:cNvPr id="6" name="NDS 多路径 IO 调度"/>
-          <p:cNvSpPr txBox="1"/>
-          <p:nvPr/>
-        </p:nvSpPr>
-        <p:spPr>
-          <a:xfrm>
-            <a:off x="609600" y="6438900"/>
-            <a:ext cx="8096249" cy="171450"/>
-          </a:xfrm>
-          <a:prstGeom prst="rect">
-            <a:avLst/>
-          </a:prstGeom>
-          <a:noFill/>
-          <a:effectLst/>
-        </p:spPr>
-        <p:txBody>
-          <a:bodyPr wrap="square" lIns="0" rIns="0" tIns="0" bIns="0">
-            <a:spAutoFit/>
-          </a:bodyPr>
-          <a:lstStyle/>
-          <a:p>
-            <a:pPr algn="l">
-              <a:lnSpc>
-                <a:spcPct val="112000"/>
-              </a:lnSpc>
-              <a:spcAft>
-                <a:spcPts val="500"/>
-              </a:spcAft>
-            </a:pPr>
-            <a:r>
-              <a:rPr sz="975" b="0" lang="zh-CN">
-                <a:solidFill>
-                  <a:srgbClr val="657184"/>
-                </a:solidFill>
-                <a:latin typeface="Microsoft YaHei"/>
-                <a:ea typeface="Microsoft YaHei"/>
-              </a:rPr>
-              <a:t>NDS 多路径 IO 调度</a:t>
-            </a:r>
-          </a:p>
-        </p:txBody>
-      </p:sp>
-      <p:sp>
-        <p:nvSpPr>
-          <p:cNvPr id="7" name="6"/>
-          <p:cNvSpPr txBox="1"/>
-          <p:nvPr/>
-        </p:nvSpPr>
-        <p:spPr>
-          <a:xfrm>
-            <a:off x="11239500" y="6419850"/>
-            <a:ext cx="342900" cy="190500"/>
-          </a:xfrm>
-          <a:prstGeom prst="rect">
-            <a:avLst/>
-          </a:prstGeom>
-          <a:noFill/>
-          <a:effectLst/>
-        </p:spPr>
-        <p:txBody>
-          <a:bodyPr wrap="square" lIns="0" rIns="0" tIns="0" bIns="0">
-            <a:spAutoFit/>
-          </a:bodyPr>
-          <a:lstStyle/>
-          <a:p>
-            <a:pPr algn="r">
-              <a:lnSpc>
-                <a:spcPct val="112000"/>
-              </a:lnSpc>
-              <a:spcAft>
-                <a:spcPts val="500"/>
-              </a:spcAft>
-            </a:pPr>
-            <a:r>
-              <a:rPr sz="975" b="0" lang="zh-CN">
-                <a:solidFill>
-                  <a:srgbClr val="657184"/>
-                </a:solidFill>
-                <a:latin typeface="Microsoft YaHei"/>
-                <a:ea typeface="Microsoft YaHei"/>
-              </a:rPr>
-              <a:t>6</a:t>
             </a:r>
           </a:p>
         </p:txBody>
@@ -17192,6 +14345,1648 @@
 </p:sld>
 </file>
 
+<file path=ppt/slides/slide7.xml><?xml version="1.0" encoding="utf-8"?>
+<p:sld xmlns:a="http://schemas.openxmlformats.org/drawingml/2006/main" xmlns:p="http://schemas.openxmlformats.org/presentationml/2006/main" xmlns:r="http://schemas.openxmlformats.org/officeDocument/2006/relationships">
+  <p:cSld>
+    <p:bg>
+      <p:bgPr>
+        <a:solidFill>
+          <a:srgbClr val="FFFFFF"/>
+        </a:solidFill>
+        <a:effectLst/>
+      </p:bgPr>
+    </p:bg>
+    <p:spTree>
+      <p:nvGrpSpPr>
+        <p:cNvPr id="1" name=""/>
+        <p:cNvGrpSpPr/>
+        <p:nvPr/>
+      </p:nvGrpSpPr>
+      <p:grpSpPr/>
+      <p:sp>
+        <p:nvSpPr>
+          <p:cNvPr id="2" name="实现组织 · 数据结构"/>
+          <p:cNvSpPr txBox="1"/>
+          <p:nvPr/>
+        </p:nvSpPr>
+        <p:spPr>
+          <a:xfrm>
+            <a:off x="609600" y="333375"/>
+            <a:ext cx="10572750" cy="238125"/>
+          </a:xfrm>
+          <a:prstGeom prst="rect">
+            <a:avLst/>
+          </a:prstGeom>
+          <a:noFill/>
+          <a:effectLst/>
+        </p:spPr>
+        <p:txBody>
+          <a:bodyPr wrap="square" lIns="0" rIns="0" tIns="0" bIns="0">
+            <a:spAutoFit/>
+          </a:bodyPr>
+          <a:lstStyle/>
+          <a:p>
+            <a:pPr algn="l">
+              <a:lnSpc>
+                <a:spcPct val="112000"/>
+              </a:lnSpc>
+              <a:spcAft>
+                <a:spcPts val="500"/>
+              </a:spcAft>
+            </a:pPr>
+            <a:r>
+              <a:rPr sz="1200" b="1" lang="zh-CN">
+                <a:solidFill>
+                  <a:srgbClr val="285EA8"/>
+                </a:solidFill>
+                <a:latin typeface="Microsoft YaHei"/>
+                <a:ea typeface="Microsoft YaHei"/>
+              </a:rPr>
+              <a:t>实现组织 · 数据结构</a:t>
+            </a:r>
+          </a:p>
+        </p:txBody>
+      </p:sp>
+      <p:sp>
+        <p:nvSpPr>
+          <p:cNvPr id="3" name="前台保存实际工作，后台据此判断缓存能替代什么"/>
+          <p:cNvSpPr txBox="1"/>
+          <p:nvPr/>
+        </p:nvSpPr>
+        <p:spPr>
+          <a:xfrm>
+            <a:off x="609600" y="752475"/>
+            <a:ext cx="10972800" cy="609600"/>
+          </a:xfrm>
+          <a:prstGeom prst="rect">
+            <a:avLst/>
+          </a:prstGeom>
+          <a:noFill/>
+          <a:effectLst/>
+        </p:spPr>
+        <p:txBody>
+          <a:bodyPr wrap="square" lIns="0" rIns="0" tIns="0" bIns="0">
+            <a:spAutoFit/>
+          </a:bodyPr>
+          <a:lstStyle/>
+          <a:p>
+            <a:pPr algn="l">
+              <a:lnSpc>
+                <a:spcPct val="112000"/>
+              </a:lnSpc>
+              <a:spcAft>
+                <a:spcPts val="500"/>
+              </a:spcAft>
+            </a:pPr>
+            <a:r>
+              <a:rPr sz="3075" b="1" lang="zh-CN">
+                <a:solidFill>
+                  <a:srgbClr val="1F2937"/>
+                </a:solidFill>
+                <a:latin typeface="Microsoft YaHei"/>
+                <a:ea typeface="Microsoft YaHei"/>
+              </a:rPr>
+              <a:t>前台保存实际工作，后台据此判断缓存能替代什么</a:t>
+            </a:r>
+          </a:p>
+        </p:txBody>
+      </p:sp>
+      <p:sp>
+        <p:nvSpPr>
+          <p:cNvPr id="4" name="关键策略集中在 solution.cpp；批内结构规划当前请求，跨回调结构追踪成本和复用。"/>
+          <p:cNvSpPr txBox="1"/>
+          <p:nvPr/>
+        </p:nvSpPr>
+        <p:spPr>
+          <a:xfrm>
+            <a:off x="609600" y="1428750"/>
+            <a:ext cx="10972800" cy="552450"/>
+          </a:xfrm>
+          <a:prstGeom prst="rect">
+            <a:avLst/>
+          </a:prstGeom>
+          <a:noFill/>
+          <a:effectLst/>
+        </p:spPr>
+        <p:txBody>
+          <a:bodyPr wrap="square" lIns="0" rIns="0" tIns="0" bIns="0">
+            <a:spAutoFit/>
+          </a:bodyPr>
+          <a:lstStyle/>
+          <a:p>
+            <a:pPr algn="l">
+              <a:lnSpc>
+                <a:spcPct val="112000"/>
+              </a:lnSpc>
+              <a:spcAft>
+                <a:spcPts val="500"/>
+              </a:spcAft>
+            </a:pPr>
+            <a:r>
+              <a:rPr sz="1725" b="0" lang="zh-CN">
+                <a:solidFill>
+                  <a:srgbClr val="657184"/>
+                </a:solidFill>
+                <a:latin typeface="Microsoft YaHei"/>
+                <a:ea typeface="Microsoft YaHei"/>
+              </a:rPr>
+              <a:t>关键策略集中在 solution.cpp；批内结构规划当前请求，跨回调结构追踪成本和复用。</a:t>
+            </a:r>
+          </a:p>
+        </p:txBody>
+      </p:sp>
+      <p:cxnSp>
+        <p:nvCxnSpPr>
+          <p:cNvPr id="5" name="Connector 4"/>
+          <p:cNvCxnSpPr/>
+          <p:nvPr/>
+        </p:nvCxnSpPr>
+        <p:spPr>
+          <a:xfrm>
+            <a:off x="609600" y="6286500"/>
+            <a:ext cx="10972800" cy="0"/>
+          </a:xfrm>
+          <a:prstGeom prst="line">
+            <a:avLst/>
+          </a:prstGeom>
+          <a:ln w="12700">
+            <a:solidFill>
+              <a:srgbClr val="DCE2E9"/>
+            </a:solidFill>
+          </a:ln>
+          <a:effectLst/>
+        </p:spPr>
+        <p:style>
+          <a:lnRef idx="2">
+            <a:schemeClr val="accent1"/>
+          </a:lnRef>
+          <a:fillRef idx="0">
+            <a:schemeClr val="accent1"/>
+          </a:fillRef>
+          <a:effectRef idx="0">
+            <a:schemeClr val="accent1"/>
+          </a:effectRef>
+          <a:fontRef idx="minor">
+            <a:schemeClr val="tx1"/>
+          </a:fontRef>
+        </p:style>
+      </p:cxnSp>
+      <p:sp>
+        <p:nvSpPr>
+          <p:cNvPr id="6" name="NDS 多路径 IO 调度"/>
+          <p:cNvSpPr txBox="1"/>
+          <p:nvPr/>
+        </p:nvSpPr>
+        <p:spPr>
+          <a:xfrm>
+            <a:off x="609600" y="6438900"/>
+            <a:ext cx="8096249" cy="171450"/>
+          </a:xfrm>
+          <a:prstGeom prst="rect">
+            <a:avLst/>
+          </a:prstGeom>
+          <a:noFill/>
+          <a:effectLst/>
+        </p:spPr>
+        <p:txBody>
+          <a:bodyPr wrap="square" lIns="0" rIns="0" tIns="0" bIns="0">
+            <a:spAutoFit/>
+          </a:bodyPr>
+          <a:lstStyle/>
+          <a:p>
+            <a:pPr algn="l">
+              <a:lnSpc>
+                <a:spcPct val="112000"/>
+              </a:lnSpc>
+              <a:spcAft>
+                <a:spcPts val="500"/>
+              </a:spcAft>
+            </a:pPr>
+            <a:r>
+              <a:rPr sz="975" b="0" lang="zh-CN">
+                <a:solidFill>
+                  <a:srgbClr val="657184"/>
+                </a:solidFill>
+                <a:latin typeface="Microsoft YaHei"/>
+                <a:ea typeface="Microsoft YaHei"/>
+              </a:rPr>
+              <a:t>NDS 多路径 IO 调度</a:t>
+            </a:r>
+          </a:p>
+        </p:txBody>
+      </p:sp>
+      <p:sp>
+        <p:nvSpPr>
+          <p:cNvPr id="7" name="6"/>
+          <p:cNvSpPr txBox="1"/>
+          <p:nvPr/>
+        </p:nvSpPr>
+        <p:spPr>
+          <a:xfrm>
+            <a:off x="11239500" y="6419850"/>
+            <a:ext cx="342900" cy="190500"/>
+          </a:xfrm>
+          <a:prstGeom prst="rect">
+            <a:avLst/>
+          </a:prstGeom>
+          <a:noFill/>
+          <a:effectLst/>
+        </p:spPr>
+        <p:txBody>
+          <a:bodyPr wrap="square" lIns="0" rIns="0" tIns="0" bIns="0">
+            <a:spAutoFit/>
+          </a:bodyPr>
+          <a:lstStyle/>
+          <a:p>
+            <a:pPr algn="r">
+              <a:lnSpc>
+                <a:spcPct val="112000"/>
+              </a:lnSpc>
+              <a:spcAft>
+                <a:spcPts val="500"/>
+              </a:spcAft>
+            </a:pPr>
+            <a:r>
+              <a:rPr sz="975" b="0" lang="zh-CN">
+                <a:solidFill>
+                  <a:srgbClr val="657184"/>
+                </a:solidFill>
+                <a:latin typeface="Microsoft YaHei"/>
+                <a:ea typeface="Microsoft YaHei"/>
+              </a:rPr>
+              <a:t>6</a:t>
+            </a:r>
+          </a:p>
+        </p:txBody>
+      </p:sp>
+      <p:sp>
+        <p:nvSpPr>
+          <p:cNvPr id="8" name="Rectangle 7"/>
+          <p:cNvSpPr/>
+          <p:nvPr/>
+        </p:nvSpPr>
+        <p:spPr>
+          <a:xfrm>
+            <a:off x="609600" y="2114550"/>
+            <a:ext cx="1895474" cy="400050"/>
+          </a:xfrm>
+          <a:prstGeom prst="rect">
+            <a:avLst/>
+          </a:prstGeom>
+          <a:solidFill>
+            <a:srgbClr val="EDF3FA"/>
+          </a:solidFill>
+          <a:ln>
+            <a:noFill/>
+          </a:ln>
+          <a:effectLst/>
+        </p:spPr>
+        <p:style>
+          <a:lnRef idx="1">
+            <a:schemeClr val="accent1"/>
+          </a:lnRef>
+          <a:fillRef idx="3">
+            <a:schemeClr val="accent1"/>
+          </a:fillRef>
+          <a:effectRef idx="0">
+            <a:schemeClr val="accent1"/>
+          </a:effectRef>
+          <a:fontRef idx="minor">
+            <a:schemeClr val="lt1"/>
+          </a:fontRef>
+        </p:style>
+        <p:txBody>
+          <a:bodyPr rtlCol="0" anchor="ctr"/>
+          <a:lstStyle/>
+          <a:p>
+            <a:pPr algn="ctr"/>
+          </a:p>
+        </p:txBody>
+      </p:sp>
+      <p:sp>
+        <p:nvSpPr>
+          <p:cNvPr id="9" name="结构"/>
+          <p:cNvSpPr txBox="1"/>
+          <p:nvPr/>
+        </p:nvSpPr>
+        <p:spPr>
+          <a:xfrm>
+            <a:off x="742950" y="2190750"/>
+            <a:ext cx="1628775" cy="285750"/>
+          </a:xfrm>
+          <a:prstGeom prst="rect">
+            <a:avLst/>
+          </a:prstGeom>
+          <a:noFill/>
+          <a:effectLst/>
+        </p:spPr>
+        <p:txBody>
+          <a:bodyPr wrap="square" lIns="0" rIns="0" tIns="0" bIns="0">
+            <a:spAutoFit/>
+          </a:bodyPr>
+          <a:lstStyle/>
+          <a:p>
+            <a:pPr algn="l">
+              <a:lnSpc>
+                <a:spcPct val="112000"/>
+              </a:lnSpc>
+              <a:spcAft>
+                <a:spcPts val="500"/>
+              </a:spcAft>
+            </a:pPr>
+            <a:r>
+              <a:rPr sz="1725" b="1" lang="zh-CN">
+                <a:solidFill>
+                  <a:srgbClr val="285EA8"/>
+                </a:solidFill>
+                <a:latin typeface="Microsoft YaHei"/>
+                <a:ea typeface="Microsoft YaHei"/>
+              </a:rPr>
+              <a:t>结构</a:t>
+            </a:r>
+          </a:p>
+        </p:txBody>
+      </p:sp>
+      <p:sp>
+        <p:nvSpPr>
+          <p:cNvPr id="10" name="Rectangle 9"/>
+          <p:cNvSpPr/>
+          <p:nvPr/>
+        </p:nvSpPr>
+        <p:spPr>
+          <a:xfrm>
+            <a:off x="2505075" y="2114550"/>
+            <a:ext cx="4286250" cy="400050"/>
+          </a:xfrm>
+          <a:prstGeom prst="rect">
+            <a:avLst/>
+          </a:prstGeom>
+          <a:solidFill>
+            <a:srgbClr val="EDF3FA"/>
+          </a:solidFill>
+          <a:ln>
+            <a:noFill/>
+          </a:ln>
+          <a:effectLst/>
+        </p:spPr>
+        <p:style>
+          <a:lnRef idx="1">
+            <a:schemeClr val="accent1"/>
+          </a:lnRef>
+          <a:fillRef idx="3">
+            <a:schemeClr val="accent1"/>
+          </a:fillRef>
+          <a:effectRef idx="0">
+            <a:schemeClr val="accent1"/>
+          </a:effectRef>
+          <a:fontRef idx="minor">
+            <a:schemeClr val="lt1"/>
+          </a:fontRef>
+        </p:style>
+        <p:txBody>
+          <a:bodyPr rtlCol="0" anchor="ctr"/>
+          <a:lstStyle/>
+          <a:p>
+            <a:pPr algn="ctr"/>
+          </a:p>
+        </p:txBody>
+      </p:sp>
+      <p:sp>
+        <p:nvSpPr>
+          <p:cNvPr id="11" name="保存的关键信息"/>
+          <p:cNvSpPr txBox="1"/>
+          <p:nvPr/>
+        </p:nvSpPr>
+        <p:spPr>
+          <a:xfrm>
+            <a:off x="2638425" y="2190750"/>
+            <a:ext cx="4019549" cy="285750"/>
+          </a:xfrm>
+          <a:prstGeom prst="rect">
+            <a:avLst/>
+          </a:prstGeom>
+          <a:noFill/>
+          <a:effectLst/>
+        </p:spPr>
+        <p:txBody>
+          <a:bodyPr wrap="square" lIns="0" rIns="0" tIns="0" bIns="0">
+            <a:spAutoFit/>
+          </a:bodyPr>
+          <a:lstStyle/>
+          <a:p>
+            <a:pPr algn="l">
+              <a:lnSpc>
+                <a:spcPct val="112000"/>
+              </a:lnSpc>
+              <a:spcAft>
+                <a:spcPts val="500"/>
+              </a:spcAft>
+            </a:pPr>
+            <a:r>
+              <a:rPr sz="1725" b="1" lang="zh-CN">
+                <a:solidFill>
+                  <a:srgbClr val="285EA8"/>
+                </a:solidFill>
+                <a:latin typeface="Microsoft YaHei"/>
+                <a:ea typeface="Microsoft YaHei"/>
+              </a:rPr>
+              <a:t>保存的关键信息</a:t>
+            </a:r>
+          </a:p>
+        </p:txBody>
+      </p:sp>
+      <p:sp>
+        <p:nvSpPr>
+          <p:cNvPr id="12" name="Rectangle 11"/>
+          <p:cNvSpPr/>
+          <p:nvPr/>
+        </p:nvSpPr>
+        <p:spPr>
+          <a:xfrm>
+            <a:off x="6791325" y="2114550"/>
+            <a:ext cx="4791075" cy="400050"/>
+          </a:xfrm>
+          <a:prstGeom prst="rect">
+            <a:avLst/>
+          </a:prstGeom>
+          <a:solidFill>
+            <a:srgbClr val="EDF3FA"/>
+          </a:solidFill>
+          <a:ln>
+            <a:noFill/>
+          </a:ln>
+          <a:effectLst/>
+        </p:spPr>
+        <p:style>
+          <a:lnRef idx="1">
+            <a:schemeClr val="accent1"/>
+          </a:lnRef>
+          <a:fillRef idx="3">
+            <a:schemeClr val="accent1"/>
+          </a:fillRef>
+          <a:effectRef idx="0">
+            <a:schemeClr val="accent1"/>
+          </a:effectRef>
+          <a:fontRef idx="minor">
+            <a:schemeClr val="lt1"/>
+          </a:fontRef>
+        </p:style>
+        <p:txBody>
+          <a:bodyPr rtlCol="0" anchor="ctr"/>
+          <a:lstStyle/>
+          <a:p>
+            <a:pPr algn="ctr"/>
+          </a:p>
+        </p:txBody>
+      </p:sp>
+      <p:sp>
+        <p:nvSpPr>
+          <p:cNvPr id="13" name="在哪里使用"/>
+          <p:cNvSpPr txBox="1"/>
+          <p:nvPr/>
+        </p:nvSpPr>
+        <p:spPr>
+          <a:xfrm>
+            <a:off x="6924675" y="2190750"/>
+            <a:ext cx="4524375" cy="285750"/>
+          </a:xfrm>
+          <a:prstGeom prst="rect">
+            <a:avLst/>
+          </a:prstGeom>
+          <a:noFill/>
+          <a:effectLst/>
+        </p:spPr>
+        <p:txBody>
+          <a:bodyPr wrap="square" lIns="0" rIns="0" tIns="0" bIns="0">
+            <a:spAutoFit/>
+          </a:bodyPr>
+          <a:lstStyle/>
+          <a:p>
+            <a:pPr algn="l">
+              <a:lnSpc>
+                <a:spcPct val="112000"/>
+              </a:lnSpc>
+              <a:spcAft>
+                <a:spcPts val="500"/>
+              </a:spcAft>
+            </a:pPr>
+            <a:r>
+              <a:rPr sz="1725" b="1" lang="zh-CN">
+                <a:solidFill>
+                  <a:srgbClr val="285EA8"/>
+                </a:solidFill>
+                <a:latin typeface="Microsoft YaHei"/>
+                <a:ea typeface="Microsoft YaHei"/>
+              </a:rPr>
+              <a:t>在哪里使用</a:t>
+            </a:r>
+          </a:p>
+        </p:txBody>
+      </p:sp>
+      <p:sp>
+        <p:nvSpPr>
+          <p:cNvPr id="14" name="IovIndex"/>
+          <p:cNvSpPr txBox="1"/>
+          <p:nvPr/>
+        </p:nvSpPr>
+        <p:spPr>
+          <a:xfrm>
+            <a:off x="742950" y="2657475"/>
+            <a:ext cx="1628775" cy="295275"/>
+          </a:xfrm>
+          <a:prstGeom prst="rect">
+            <a:avLst/>
+          </a:prstGeom>
+          <a:noFill/>
+          <a:effectLst/>
+        </p:spPr>
+        <p:txBody>
+          <a:bodyPr wrap="square" lIns="0" rIns="0" tIns="0" bIns="0">
+            <a:spAutoFit/>
+          </a:bodyPr>
+          <a:lstStyle/>
+          <a:p>
+            <a:pPr algn="l">
+              <a:lnSpc>
+                <a:spcPct val="112000"/>
+              </a:lnSpc>
+              <a:spcAft>
+                <a:spcPts val="500"/>
+              </a:spcAft>
+            </a:pPr>
+            <a:r>
+              <a:rPr sz="1575" b="1" lang="zh-CN">
+                <a:solidFill>
+                  <a:srgbClr val="1F2937"/>
+                </a:solidFill>
+                <a:latin typeface="Microsoft YaHei"/>
+                <a:ea typeface="Microsoft YaHei"/>
+              </a:rPr>
+              <a:t>IovIndex</a:t>
+            </a:r>
+          </a:p>
+        </p:txBody>
+      </p:sp>
+      <p:sp>
+        <p:nvSpPr>
+          <p:cNvPr id="15" name="ends：目标 iov 的累计终点"/>
+          <p:cNvSpPr txBox="1"/>
+          <p:nvPr/>
+        </p:nvSpPr>
+        <p:spPr>
+          <a:xfrm>
+            <a:off x="2638425" y="2657475"/>
+            <a:ext cx="4019549" cy="295275"/>
+          </a:xfrm>
+          <a:prstGeom prst="rect">
+            <a:avLst/>
+          </a:prstGeom>
+          <a:noFill/>
+          <a:effectLst/>
+        </p:spPr>
+        <p:txBody>
+          <a:bodyPr wrap="square" lIns="0" rIns="0" tIns="0" bIns="0">
+            <a:spAutoFit/>
+          </a:bodyPr>
+          <a:lstStyle/>
+          <a:p>
+            <a:pPr algn="l">
+              <a:lnSpc>
+                <a:spcPct val="112000"/>
+              </a:lnSpc>
+              <a:spcAft>
+                <a:spcPts val="500"/>
+              </a:spcAft>
+            </a:pPr>
+            <a:r>
+              <a:rPr sz="1575" b="0" lang="zh-CN">
+                <a:solidFill>
+                  <a:srgbClr val="1F2937"/>
+                </a:solidFill>
+                <a:latin typeface="Microsoft YaHei"/>
+                <a:ea typeface="Microsoft YaHei"/>
+              </a:rPr>
+              <a:t>ends：目标 iov 的累计终点</a:t>
+            </a:r>
+          </a:p>
+        </p:txBody>
+      </p:sp>
+      <p:sp>
+        <p:nvSpPr>
+          <p:cNvPr id="16" name="按请求内偏移二分定位目标；生成 vectors"/>
+          <p:cNvSpPr txBox="1"/>
+          <p:nvPr/>
+        </p:nvSpPr>
+        <p:spPr>
+          <a:xfrm>
+            <a:off x="6924675" y="2657475"/>
+            <a:ext cx="4524375" cy="295275"/>
+          </a:xfrm>
+          <a:prstGeom prst="rect">
+            <a:avLst/>
+          </a:prstGeom>
+          <a:noFill/>
+          <a:effectLst/>
+        </p:spPr>
+        <p:txBody>
+          <a:bodyPr wrap="square" lIns="0" rIns="0" tIns="0" bIns="0">
+            <a:spAutoFit/>
+          </a:bodyPr>
+          <a:lstStyle/>
+          <a:p>
+            <a:pPr algn="l">
+              <a:lnSpc>
+                <a:spcPct val="112000"/>
+              </a:lnSpc>
+              <a:spcAft>
+                <a:spcPts val="500"/>
+              </a:spcAft>
+            </a:pPr>
+            <a:r>
+              <a:rPr sz="1575" b="0" lang="zh-CN">
+                <a:solidFill>
+                  <a:srgbClr val="1F2937"/>
+                </a:solidFill>
+                <a:latin typeface="Microsoft YaHei"/>
+                <a:ea typeface="Microsoft YaHei"/>
+              </a:rPr>
+              <a:t>按请求内偏移二分定位目标；生成 vectors</a:t>
+            </a:r>
+          </a:p>
+        </p:txBody>
+      </p:sp>
+      <p:cxnSp>
+        <p:nvCxnSpPr>
+          <p:cNvPr id="17" name="Connector 16"/>
+          <p:cNvCxnSpPr/>
+          <p:nvPr/>
+        </p:nvCxnSpPr>
+        <p:spPr>
+          <a:xfrm>
+            <a:off x="609600" y="3009900"/>
+            <a:ext cx="10972800" cy="0"/>
+          </a:xfrm>
+          <a:prstGeom prst="line">
+            <a:avLst/>
+          </a:prstGeom>
+          <a:ln w="12700">
+            <a:solidFill>
+              <a:srgbClr val="DCE2E9"/>
+            </a:solidFill>
+          </a:ln>
+          <a:effectLst/>
+        </p:spPr>
+        <p:style>
+          <a:lnRef idx="2">
+            <a:schemeClr val="accent1"/>
+          </a:lnRef>
+          <a:fillRef idx="0">
+            <a:schemeClr val="accent1"/>
+          </a:fillRef>
+          <a:effectRef idx="0">
+            <a:schemeClr val="accent1"/>
+          </a:effectRef>
+          <a:fontRef idx="minor">
+            <a:schemeClr val="tx1"/>
+          </a:fontRef>
+        </p:style>
+      </p:cxnSp>
+      <p:sp>
+        <p:nvSpPr>
+          <p:cNvPr id="18" name="Piece"/>
+          <p:cNvSpPr txBox="1"/>
+          <p:nvPr/>
+        </p:nvSpPr>
+        <p:spPr>
+          <a:xfrm>
+            <a:off x="742950" y="3114675"/>
+            <a:ext cx="1628775" cy="295275"/>
+          </a:xfrm>
+          <a:prstGeom prst="rect">
+            <a:avLst/>
+          </a:prstGeom>
+          <a:noFill/>
+          <a:effectLst/>
+        </p:spPr>
+        <p:txBody>
+          <a:bodyPr wrap="square" lIns="0" rIns="0" tIns="0" bIns="0">
+            <a:spAutoFit/>
+          </a:bodyPr>
+          <a:lstStyle/>
+          <a:p>
+            <a:pPr algn="l">
+              <a:lnSpc>
+                <a:spcPct val="112000"/>
+              </a:lnSpc>
+              <a:spcAft>
+                <a:spcPts val="500"/>
+              </a:spcAft>
+            </a:pPr>
+            <a:r>
+              <a:rPr sz="1575" b="1" lang="zh-CN">
+                <a:solidFill>
+                  <a:srgbClr val="1F2937"/>
+                </a:solidFill>
+                <a:latin typeface="Microsoft YaHei"/>
+                <a:ea typeface="Microsoft YaHei"/>
+              </a:rPr>
+              <a:t>Piece</a:t>
+            </a:r>
+          </a:p>
+        </p:txBody>
+      </p:sp>
+      <p:sp>
+        <p:nvSpPr>
+          <p:cNvPr id="19" name="io、offset、length、aligned、whole"/>
+          <p:cNvSpPr txBox="1"/>
+          <p:nvPr/>
+        </p:nvSpPr>
+        <p:spPr>
+          <a:xfrm>
+            <a:off x="2638425" y="3114675"/>
+            <a:ext cx="4019549" cy="295275"/>
+          </a:xfrm>
+          <a:prstGeom prst="rect">
+            <a:avLst/>
+          </a:prstGeom>
+          <a:noFill/>
+          <a:effectLst/>
+        </p:spPr>
+        <p:txBody>
+          <a:bodyPr wrap="square" lIns="0" rIns="0" tIns="0" bIns="0">
+            <a:spAutoFit/>
+          </a:bodyPr>
+          <a:lstStyle/>
+          <a:p>
+            <a:pPr algn="l">
+              <a:lnSpc>
+                <a:spcPct val="112000"/>
+              </a:lnSpc>
+              <a:spcAft>
+                <a:spcPts val="500"/>
+              </a:spcAft>
+            </a:pPr>
+            <a:r>
+              <a:rPr sz="1575" b="0" lang="zh-CN">
+                <a:solidFill>
+                  <a:srgbClr val="1F2937"/>
+                </a:solidFill>
+                <a:latin typeface="Microsoft YaHei"/>
+                <a:ea typeface="Microsoft YaHei"/>
+              </a:rPr>
+              <a:t>io、offset、length、aligned、whole</a:t>
+            </a:r>
+          </a:p>
+        </p:txBody>
+      </p:sp>
+      <p:sp>
+        <p:nvSpPr>
+          <p:cNvPr id="20" name="先切合法片段，再排序并枚举候选组"/>
+          <p:cNvSpPr txBox="1"/>
+          <p:nvPr/>
+        </p:nvSpPr>
+        <p:spPr>
+          <a:xfrm>
+            <a:off x="6924675" y="3114675"/>
+            <a:ext cx="4524375" cy="295275"/>
+          </a:xfrm>
+          <a:prstGeom prst="rect">
+            <a:avLst/>
+          </a:prstGeom>
+          <a:noFill/>
+          <a:effectLst/>
+        </p:spPr>
+        <p:txBody>
+          <a:bodyPr wrap="square" lIns="0" rIns="0" tIns="0" bIns="0">
+            <a:spAutoFit/>
+          </a:bodyPr>
+          <a:lstStyle/>
+          <a:p>
+            <a:pPr algn="l">
+              <a:lnSpc>
+                <a:spcPct val="112000"/>
+              </a:lnSpc>
+              <a:spcAft>
+                <a:spcPts val="500"/>
+              </a:spcAft>
+            </a:pPr>
+            <a:r>
+              <a:rPr sz="1575" b="0" lang="zh-CN">
+                <a:solidFill>
+                  <a:srgbClr val="1F2937"/>
+                </a:solidFill>
+                <a:latin typeface="Microsoft YaHei"/>
+                <a:ea typeface="Microsoft YaHei"/>
+              </a:rPr>
+              <a:t>先切合法片段，再排序并枚举候选组</a:t>
+            </a:r>
+          </a:p>
+        </p:txBody>
+      </p:sp>
+      <p:cxnSp>
+        <p:nvCxnSpPr>
+          <p:cNvPr id="21" name="Connector 20"/>
+          <p:cNvCxnSpPr/>
+          <p:nvPr/>
+        </p:nvCxnSpPr>
+        <p:spPr>
+          <a:xfrm>
+            <a:off x="609600" y="3467100"/>
+            <a:ext cx="10972800" cy="0"/>
+          </a:xfrm>
+          <a:prstGeom prst="line">
+            <a:avLst/>
+          </a:prstGeom>
+          <a:ln w="12700">
+            <a:solidFill>
+              <a:srgbClr val="DCE2E9"/>
+            </a:solidFill>
+          </a:ln>
+          <a:effectLst/>
+        </p:spPr>
+        <p:style>
+          <a:lnRef idx="2">
+            <a:schemeClr val="accent1"/>
+          </a:lnRef>
+          <a:fillRef idx="0">
+            <a:schemeClr val="accent1"/>
+          </a:fillRef>
+          <a:effectRef idx="0">
+            <a:schemeClr val="accent1"/>
+          </a:effectRef>
+          <a:fontRef idx="minor">
+            <a:schemeClr val="tx1"/>
+          </a:fontRef>
+        </p:style>
+      </p:cxnSp>
+      <p:sp>
+        <p:nvSpPr>
+          <p:cNvPr id="22" name="DP 状态"/>
+          <p:cNvSpPr txBox="1"/>
+          <p:nvPr/>
+        </p:nvSpPr>
+        <p:spPr>
+          <a:xfrm>
+            <a:off x="742950" y="3571875"/>
+            <a:ext cx="1628775" cy="295275"/>
+          </a:xfrm>
+          <a:prstGeom prst="rect">
+            <a:avLst/>
+          </a:prstGeom>
+          <a:noFill/>
+          <a:effectLst/>
+        </p:spPr>
+        <p:txBody>
+          <a:bodyPr wrap="square" lIns="0" rIns="0" tIns="0" bIns="0">
+            <a:spAutoFit/>
+          </a:bodyPr>
+          <a:lstStyle/>
+          <a:p>
+            <a:pPr algn="l">
+              <a:lnSpc>
+                <a:spcPct val="112000"/>
+              </a:lnSpc>
+              <a:spcAft>
+                <a:spcPts val="500"/>
+              </a:spcAft>
+            </a:pPr>
+            <a:r>
+              <a:rPr sz="1575" b="1" lang="zh-CN">
+                <a:solidFill>
+                  <a:srgbClr val="1F2937"/>
+                </a:solidFill>
+                <a:latin typeface="Microsoft YaHei"/>
+                <a:ea typeface="Microsoft YaHei"/>
+              </a:rPr>
+              <a:t>DP 状态</a:t>
+            </a:r>
+          </a:p>
+        </p:txBody>
+      </p:sp>
+      <p:sp>
+        <p:nvSpPr>
+          <p:cNvPr id="23" name="dp / prev / paths：估价、前驱、路径"/>
+          <p:cNvSpPr txBox="1"/>
+          <p:nvPr/>
+        </p:nvSpPr>
+        <p:spPr>
+          <a:xfrm>
+            <a:off x="2638425" y="3571875"/>
+            <a:ext cx="4019549" cy="295275"/>
+          </a:xfrm>
+          <a:prstGeom prst="rect">
+            <a:avLst/>
+          </a:prstGeom>
+          <a:noFill/>
+          <a:effectLst/>
+        </p:spPr>
+        <p:txBody>
+          <a:bodyPr wrap="square" lIns="0" rIns="0" tIns="0" bIns="0">
+            <a:spAutoFit/>
+          </a:bodyPr>
+          <a:lstStyle/>
+          <a:p>
+            <a:pPr algn="l">
+              <a:lnSpc>
+                <a:spcPct val="112000"/>
+              </a:lnSpc>
+              <a:spcAft>
+                <a:spcPts val="500"/>
+              </a:spcAft>
+            </a:pPr>
+            <a:r>
+              <a:rPr sz="1575" b="0" lang="zh-CN">
+                <a:solidFill>
+                  <a:srgbClr val="1F2937"/>
+                </a:solidFill>
+                <a:latin typeface="Microsoft YaHei"/>
+                <a:ea typeface="Microsoft YaHei"/>
+              </a:rPr>
+              <a:t>dp / prev / paths：估价、前驱、路径</a:t>
+            </a:r>
+          </a:p>
+        </p:txBody>
+      </p:sp>
+      <p:sp>
+        <p:nvSpPr>
+          <p:cNvPr id="24" name="更优时更新；回溯还原 operation"/>
+          <p:cNvSpPr txBox="1"/>
+          <p:nvPr/>
+        </p:nvSpPr>
+        <p:spPr>
+          <a:xfrm>
+            <a:off x="6924675" y="3571875"/>
+            <a:ext cx="4524375" cy="295275"/>
+          </a:xfrm>
+          <a:prstGeom prst="rect">
+            <a:avLst/>
+          </a:prstGeom>
+          <a:noFill/>
+          <a:effectLst/>
+        </p:spPr>
+        <p:txBody>
+          <a:bodyPr wrap="square" lIns="0" rIns="0" tIns="0" bIns="0">
+            <a:spAutoFit/>
+          </a:bodyPr>
+          <a:lstStyle/>
+          <a:p>
+            <a:pPr algn="l">
+              <a:lnSpc>
+                <a:spcPct val="112000"/>
+              </a:lnSpc>
+              <a:spcAft>
+                <a:spcPts val="500"/>
+              </a:spcAft>
+            </a:pPr>
+            <a:r>
+              <a:rPr sz="1575" b="0" lang="zh-CN">
+                <a:solidFill>
+                  <a:srgbClr val="1F2937"/>
+                </a:solidFill>
+                <a:latin typeface="Microsoft YaHei"/>
+                <a:ea typeface="Microsoft YaHei"/>
+              </a:rPr>
+              <a:t>更优时更新；回溯还原 operation</a:t>
+            </a:r>
+          </a:p>
+        </p:txBody>
+      </p:sp>
+      <p:cxnSp>
+        <p:nvCxnSpPr>
+          <p:cNvPr id="25" name="Connector 24"/>
+          <p:cNvCxnSpPr/>
+          <p:nvPr/>
+        </p:nvCxnSpPr>
+        <p:spPr>
+          <a:xfrm>
+            <a:off x="609600" y="3924300"/>
+            <a:ext cx="10972800" cy="0"/>
+          </a:xfrm>
+          <a:prstGeom prst="line">
+            <a:avLst/>
+          </a:prstGeom>
+          <a:ln w="12700">
+            <a:solidFill>
+              <a:srgbClr val="DCE2E9"/>
+            </a:solidFill>
+          </a:ln>
+          <a:effectLst/>
+        </p:spPr>
+        <p:style>
+          <a:lnRef idx="2">
+            <a:schemeClr val="accent1"/>
+          </a:lnRef>
+          <a:fillRef idx="0">
+            <a:schemeClr val="accent1"/>
+          </a:fillRef>
+          <a:effectRef idx="0">
+            <a:schemeClr val="accent1"/>
+          </a:effectRef>
+          <a:fontRef idx="minor">
+            <a:schemeClr val="tx1"/>
+          </a:fontRef>
+        </p:style>
+      </p:cxnSp>
+      <p:sp>
+        <p:nvSpPr>
+          <p:cNvPr id="26" name="Work"/>
+          <p:cNvSpPr txBox="1"/>
+          <p:nvPr/>
+        </p:nvSpPr>
+        <p:spPr>
+          <a:xfrm>
+            <a:off x="742950" y="4029075"/>
+            <a:ext cx="1628775" cy="295275"/>
+          </a:xfrm>
+          <a:prstGeom prst="rect">
+            <a:avLst/>
+          </a:prstGeom>
+          <a:noFill/>
+          <a:effectLst/>
+        </p:spPr>
+        <p:txBody>
+          <a:bodyPr wrap="square" lIns="0" rIns="0" tIns="0" bIns="0">
+            <a:spAutoFit/>
+          </a:bodyPr>
+          <a:lstStyle/>
+          <a:p>
+            <a:pPr algn="l">
+              <a:lnSpc>
+                <a:spcPct val="112000"/>
+              </a:lnSpc>
+              <a:spcAft>
+                <a:spcPts val="500"/>
+              </a:spcAft>
+            </a:pPr>
+            <a:r>
+              <a:rPr sz="1575" b="1" lang="zh-CN">
+                <a:solidFill>
+                  <a:srgbClr val="24756D"/>
+                </a:solidFill>
+                <a:latin typeface="Microsoft YaHei"/>
+                <a:ea typeface="Microsoft YaHei"/>
+              </a:rPr>
+              <a:t>Work</a:t>
+            </a:r>
+          </a:p>
+        </p:txBody>
+      </p:sp>
+      <p:sp>
+        <p:nvSpPr>
+          <p:cNvPr id="27" name="读 / 复制工作、调用费、本卡字节占比"/>
+          <p:cNvSpPr txBox="1"/>
+          <p:nvPr/>
+        </p:nvSpPr>
+        <p:spPr>
+          <a:xfrm>
+            <a:off x="2638425" y="4029075"/>
+            <a:ext cx="4019549" cy="295275"/>
+          </a:xfrm>
+          <a:prstGeom prst="rect">
+            <a:avLst/>
+          </a:prstGeom>
+          <a:noFill/>
+          <a:effectLst/>
+        </p:spPr>
+        <p:txBody>
+          <a:bodyPr wrap="square" lIns="0" rIns="0" tIns="0" bIns="0">
+            <a:spAutoFit/>
+          </a:bodyPr>
+          <a:lstStyle/>
+          <a:p>
+            <a:pPr algn="l">
+              <a:lnSpc>
+                <a:spcPct val="112000"/>
+              </a:lnSpc>
+              <a:spcAft>
+                <a:spcPts val="500"/>
+              </a:spcAft>
+            </a:pPr>
+            <a:r>
+              <a:rPr sz="1575" b="0" lang="zh-CN">
+                <a:solidFill>
+                  <a:srgbClr val="1F2937"/>
+                </a:solidFill>
+                <a:latin typeface="Microsoft YaHei"/>
+                <a:ea typeface="Microsoft YaHei"/>
+              </a:rPr>
+              <a:t>读 / 复制工作、调用费、本卡字节占比</a:t>
+            </a:r>
+          </a:p>
+        </p:txBody>
+      </p:sp>
+      <p:sp>
+        <p:nvSpPr>
+          <p:cNvPr id="28" name="只记最终计划；完成时估算可替代成本"/>
+          <p:cNvSpPr txBox="1"/>
+          <p:nvPr/>
+        </p:nvSpPr>
+        <p:spPr>
+          <a:xfrm>
+            <a:off x="6924675" y="4029075"/>
+            <a:ext cx="4524375" cy="295275"/>
+          </a:xfrm>
+          <a:prstGeom prst="rect">
+            <a:avLst/>
+          </a:prstGeom>
+          <a:noFill/>
+          <a:effectLst/>
+        </p:spPr>
+        <p:txBody>
+          <a:bodyPr wrap="square" lIns="0" rIns="0" tIns="0" bIns="0">
+            <a:spAutoFit/>
+          </a:bodyPr>
+          <a:lstStyle/>
+          <a:p>
+            <a:pPr algn="l">
+              <a:lnSpc>
+                <a:spcPct val="112000"/>
+              </a:lnSpc>
+              <a:spcAft>
+                <a:spcPts val="500"/>
+              </a:spcAft>
+            </a:pPr>
+            <a:r>
+              <a:rPr sz="1575" b="0" lang="zh-CN">
+                <a:solidFill>
+                  <a:srgbClr val="1F2937"/>
+                </a:solidFill>
+                <a:latin typeface="Microsoft YaHei"/>
+                <a:ea typeface="Microsoft YaHei"/>
+              </a:rPr>
+              <a:t>只记最终计划；完成时估算可替代成本</a:t>
+            </a:r>
+          </a:p>
+        </p:txBody>
+      </p:sp>
+      <p:cxnSp>
+        <p:nvCxnSpPr>
+          <p:cNvPr id="29" name="Connector 28"/>
+          <p:cNvCxnSpPr/>
+          <p:nvPr/>
+        </p:nvCxnSpPr>
+        <p:spPr>
+          <a:xfrm>
+            <a:off x="609600" y="4381500"/>
+            <a:ext cx="10972800" cy="0"/>
+          </a:xfrm>
+          <a:prstGeom prst="line">
+            <a:avLst/>
+          </a:prstGeom>
+          <a:ln w="12700">
+            <a:solidFill>
+              <a:srgbClr val="DCE2E9"/>
+            </a:solidFill>
+          </a:ln>
+          <a:effectLst/>
+        </p:spPr>
+        <p:style>
+          <a:lnRef idx="2">
+            <a:schemeClr val="accent1"/>
+          </a:lnRef>
+          <a:fillRef idx="0">
+            <a:schemeClr val="accent1"/>
+          </a:fillRef>
+          <a:effectRef idx="0">
+            <a:schemeClr val="accent1"/>
+          </a:effectRef>
+          <a:fontRef idx="minor">
+            <a:schemeClr val="tx1"/>
+          </a:fontRef>
+        </p:style>
+      </p:cxnSp>
+      <p:sp>
+        <p:nvSpPr>
+          <p:cNvPr id="30" name="History"/>
+          <p:cNvSpPr txBox="1"/>
+          <p:nvPr/>
+        </p:nvSpPr>
+        <p:spPr>
+          <a:xfrm>
+            <a:off x="742950" y="4486275"/>
+            <a:ext cx="1628775" cy="295275"/>
+          </a:xfrm>
+          <a:prstGeom prst="rect">
+            <a:avLst/>
+          </a:prstGeom>
+          <a:noFill/>
+          <a:effectLst/>
+        </p:spPr>
+        <p:txBody>
+          <a:bodyPr wrap="square" lIns="0" rIns="0" tIns="0" bIns="0">
+            <a:spAutoFit/>
+          </a:bodyPr>
+          <a:lstStyle/>
+          <a:p>
+            <a:pPr algn="l">
+              <a:lnSpc>
+                <a:spcPct val="112000"/>
+              </a:lnSpc>
+              <a:spcAft>
+                <a:spcPts val="500"/>
+              </a:spcAft>
+            </a:pPr>
+            <a:r>
+              <a:rPr sz="1575" b="1" lang="zh-CN">
+                <a:solidFill>
+                  <a:srgbClr val="24756D"/>
+                </a:solidFill>
+                <a:latin typeface="Microsoft YaHei"/>
+                <a:ea typeface="Microsoft YaHei"/>
+              </a:rPr>
+              <a:t>History</a:t>
+            </a:r>
+          </a:p>
+        </p:txBody>
+      </p:sp>
+      <p:sp>
+        <p:nvSpPr>
+          <p:cNvPr id="31" name="gap / jitter / last_arrival / credit"/>
+          <p:cNvSpPr txBox="1"/>
+          <p:nvPr/>
+        </p:nvSpPr>
+        <p:spPr>
+          <a:xfrm>
+            <a:off x="2638425" y="4486275"/>
+            <a:ext cx="4019549" cy="295275"/>
+          </a:xfrm>
+          <a:prstGeom prst="rect">
+            <a:avLst/>
+          </a:prstGeom>
+          <a:noFill/>
+          <a:effectLst/>
+        </p:spPr>
+        <p:txBody>
+          <a:bodyPr wrap="square" lIns="0" rIns="0" tIns="0" bIns="0">
+            <a:spAutoFit/>
+          </a:bodyPr>
+          <a:lstStyle/>
+          <a:p>
+            <a:pPr algn="l">
+              <a:lnSpc>
+                <a:spcPct val="112000"/>
+              </a:lnSpc>
+              <a:spcAft>
+                <a:spcPts val="500"/>
+              </a:spcAft>
+            </a:pPr>
+            <a:r>
+              <a:rPr sz="1575" b="0" lang="zh-CN">
+                <a:solidFill>
+                  <a:srgbClr val="1F2937"/>
+                </a:solidFill>
+                <a:latin typeface="Microsoft YaHei"/>
+                <a:ea typeface="Microsoft YaHei"/>
+              </a:rPr>
+              <a:t>gap / jitter / last_arrival / credit</a:t>
+            </a:r>
+          </a:p>
+        </p:txBody>
+      </p:sp>
+      <p:sp>
+        <p:nvSpPr>
+          <p:cNvPr id="32" name="维护复用节奏、新鲜度和准入预算"/>
+          <p:cNvSpPr txBox="1"/>
+          <p:nvPr/>
+        </p:nvSpPr>
+        <p:spPr>
+          <a:xfrm>
+            <a:off x="6924675" y="4486275"/>
+            <a:ext cx="4524375" cy="295275"/>
+          </a:xfrm>
+          <a:prstGeom prst="rect">
+            <a:avLst/>
+          </a:prstGeom>
+          <a:noFill/>
+          <a:effectLst/>
+        </p:spPr>
+        <p:txBody>
+          <a:bodyPr wrap="square" lIns="0" rIns="0" tIns="0" bIns="0">
+            <a:spAutoFit/>
+          </a:bodyPr>
+          <a:lstStyle/>
+          <a:p>
+            <a:pPr algn="l">
+              <a:lnSpc>
+                <a:spcPct val="112000"/>
+              </a:lnSpc>
+              <a:spcAft>
+                <a:spcPts val="500"/>
+              </a:spcAft>
+            </a:pPr>
+            <a:r>
+              <a:rPr sz="1575" b="0" lang="zh-CN">
+                <a:solidFill>
+                  <a:srgbClr val="1F2937"/>
+                </a:solidFill>
+                <a:latin typeface="Microsoft YaHei"/>
+                <a:ea typeface="Microsoft YaHei"/>
+              </a:rPr>
+              <a:t>维护复用节奏、新鲜度和准入预算</a:t>
+            </a:r>
+          </a:p>
+        </p:txBody>
+      </p:sp>
+      <p:cxnSp>
+        <p:nvCxnSpPr>
+          <p:cNvPr id="33" name="Connector 32"/>
+          <p:cNvCxnSpPr/>
+          <p:nvPr/>
+        </p:nvCxnSpPr>
+        <p:spPr>
+          <a:xfrm>
+            <a:off x="609600" y="4838700"/>
+            <a:ext cx="10972800" cy="0"/>
+          </a:xfrm>
+          <a:prstGeom prst="line">
+            <a:avLst/>
+          </a:prstGeom>
+          <a:ln w="12700">
+            <a:solidFill>
+              <a:srgbClr val="DCE2E9"/>
+            </a:solidFill>
+          </a:ln>
+          <a:effectLst/>
+        </p:spPr>
+        <p:style>
+          <a:lnRef idx="2">
+            <a:schemeClr val="accent1"/>
+          </a:lnRef>
+          <a:fillRef idx="0">
+            <a:schemeClr val="accent1"/>
+          </a:fillRef>
+          <a:effectRef idx="0">
+            <a:schemeClr val="accent1"/>
+          </a:effectRef>
+          <a:fontRef idx="minor">
+            <a:schemeClr val="tx1"/>
+          </a:fontRef>
+        </p:style>
+      </p:cxnSp>
+      <p:sp>
+        <p:nvSpPr>
+          <p:cNvPr id="34" name="promotions_"/>
+          <p:cNvSpPr txBox="1"/>
+          <p:nvPr/>
+        </p:nvSpPr>
+        <p:spPr>
+          <a:xfrm>
+            <a:off x="742950" y="4943475"/>
+            <a:ext cx="1628775" cy="295275"/>
+          </a:xfrm>
+          <a:prstGeom prst="rect">
+            <a:avLst/>
+          </a:prstGeom>
+          <a:noFill/>
+          <a:effectLst/>
+        </p:spPr>
+        <p:txBody>
+          <a:bodyPr wrap="square" lIns="0" rIns="0" tIns="0" bIns="0">
+            <a:spAutoFit/>
+          </a:bodyPr>
+          <a:lstStyle/>
+          <a:p>
+            <a:pPr algn="l">
+              <a:lnSpc>
+                <a:spcPct val="112000"/>
+              </a:lnSpc>
+              <a:spcAft>
+                <a:spcPts val="500"/>
+              </a:spcAft>
+            </a:pPr>
+            <a:r>
+              <a:rPr sz="1575" b="1" lang="zh-CN">
+                <a:solidFill>
+                  <a:srgbClr val="24756D"/>
+                </a:solidFill>
+                <a:latin typeface="Microsoft YaHei"/>
+                <a:ea typeface="Microsoft YaHei"/>
+              </a:rPr>
+              <a:t>promotions_</a:t>
+            </a:r>
+          </a:p>
+        </p:txBody>
+      </p:sp>
+      <p:sp>
+        <p:nvSpPr>
+          <p:cNvPr id="35" name="在途提升及 pending_keys_ 去重集合"/>
+          <p:cNvSpPr txBox="1"/>
+          <p:nvPr/>
+        </p:nvSpPr>
+        <p:spPr>
+          <a:xfrm>
+            <a:off x="2638425" y="4943475"/>
+            <a:ext cx="4019549" cy="295275"/>
+          </a:xfrm>
+          <a:prstGeom prst="rect">
+            <a:avLst/>
+          </a:prstGeom>
+          <a:noFill/>
+          <a:effectLst/>
+        </p:spPr>
+        <p:txBody>
+          <a:bodyPr wrap="square" lIns="0" rIns="0" tIns="0" bIns="0">
+            <a:spAutoFit/>
+          </a:bodyPr>
+          <a:lstStyle/>
+          <a:p>
+            <a:pPr algn="l">
+              <a:lnSpc>
+                <a:spcPct val="112000"/>
+              </a:lnSpc>
+              <a:spcAft>
+                <a:spcPts val="500"/>
+              </a:spcAft>
+            </a:pPr>
+            <a:r>
+              <a:rPr sz="1575" b="0" lang="zh-CN">
+                <a:solidFill>
+                  <a:srgbClr val="1F2937"/>
+                </a:solidFill>
+                <a:latin typeface="Microsoft YaHei"/>
+                <a:ea typeface="Microsoft YaHei"/>
+              </a:rPr>
+              <a:t>在途提升及 pending_keys_ 去重集合</a:t>
+            </a:r>
+          </a:p>
+        </p:txBody>
+      </p:sp>
+      <p:sp>
+        <p:nvSpPr>
+          <p:cNvPr id="36" name="sync_promotions() 清理；避免同键重复投入"/>
+          <p:cNvSpPr txBox="1"/>
+          <p:nvPr/>
+        </p:nvSpPr>
+        <p:spPr>
+          <a:xfrm>
+            <a:off x="6924675" y="4943475"/>
+            <a:ext cx="4524375" cy="295275"/>
+          </a:xfrm>
+          <a:prstGeom prst="rect">
+            <a:avLst/>
+          </a:prstGeom>
+          <a:noFill/>
+          <a:effectLst/>
+        </p:spPr>
+        <p:txBody>
+          <a:bodyPr wrap="square" lIns="0" rIns="0" tIns="0" bIns="0">
+            <a:spAutoFit/>
+          </a:bodyPr>
+          <a:lstStyle/>
+          <a:p>
+            <a:pPr algn="l">
+              <a:lnSpc>
+                <a:spcPct val="112000"/>
+              </a:lnSpc>
+              <a:spcAft>
+                <a:spcPts val="500"/>
+              </a:spcAft>
+            </a:pPr>
+            <a:r>
+              <a:rPr sz="1575" b="0" lang="zh-CN">
+                <a:solidFill>
+                  <a:srgbClr val="1F2937"/>
+                </a:solidFill>
+                <a:latin typeface="Microsoft YaHei"/>
+                <a:ea typeface="Microsoft YaHei"/>
+              </a:rPr>
+              <a:t>sync_promotions() 清理；避免同键重复投入</a:t>
+            </a:r>
+          </a:p>
+        </p:txBody>
+      </p:sp>
+      <p:cxnSp>
+        <p:nvCxnSpPr>
+          <p:cNvPr id="37" name="Connector 36"/>
+          <p:cNvCxnSpPr/>
+          <p:nvPr/>
+        </p:nvCxnSpPr>
+        <p:spPr>
+          <a:xfrm>
+            <a:off x="609600" y="5295900"/>
+            <a:ext cx="10972800" cy="0"/>
+          </a:xfrm>
+          <a:prstGeom prst="line">
+            <a:avLst/>
+          </a:prstGeom>
+          <a:ln w="12700">
+            <a:solidFill>
+              <a:srgbClr val="DCE2E9"/>
+            </a:solidFill>
+          </a:ln>
+          <a:effectLst/>
+        </p:spPr>
+        <p:style>
+          <a:lnRef idx="2">
+            <a:schemeClr val="accent1"/>
+          </a:lnRef>
+          <a:fillRef idx="0">
+            <a:schemeClr val="accent1"/>
+          </a:fillRef>
+          <a:effectRef idx="0">
+            <a:schemeClr val="accent1"/>
+          </a:effectRef>
+          <a:fontRef idx="minor">
+            <a:schemeClr val="tx1"/>
+          </a:fontRef>
+        </p:style>
+      </p:cxnSp>
+      <p:sp>
+        <p:nvSpPr>
+          <p:cNvPr id="38" name="Rectangle 37"/>
+          <p:cNvSpPr/>
+          <p:nvPr/>
+        </p:nvSpPr>
+        <p:spPr>
+          <a:xfrm>
+            <a:off x="609600" y="5543550"/>
+            <a:ext cx="10972800" cy="457200"/>
+          </a:xfrm>
+          <a:prstGeom prst="rect">
+            <a:avLst/>
+          </a:prstGeom>
+          <a:solidFill>
+            <a:srgbClr val="EEF6F3"/>
+          </a:solidFill>
+          <a:ln>
+            <a:noFill/>
+          </a:ln>
+          <a:effectLst/>
+        </p:spPr>
+        <p:style>
+          <a:lnRef idx="1">
+            <a:schemeClr val="accent1"/>
+          </a:lnRef>
+          <a:fillRef idx="3">
+            <a:schemeClr val="accent1"/>
+          </a:fillRef>
+          <a:effectRef idx="0">
+            <a:schemeClr val="accent1"/>
+          </a:effectRef>
+          <a:fontRef idx="minor">
+            <a:schemeClr val="lt1"/>
+          </a:fontRef>
+        </p:style>
+        <p:txBody>
+          <a:bodyPr rtlCol="0" anchor="ctr"/>
+          <a:lstStyle/>
+          <a:p>
+            <a:pPr algn="ctr"/>
+          </a:p>
+        </p:txBody>
+      </p:sp>
+      <p:sp>
+        <p:nvSpPr>
+          <p:cNvPr id="39" name="缓存键 = 卡号 + SSD 起点 + 完整长度；目标 HBM 地址不在键中，不同卡使用不同键。"/>
+          <p:cNvSpPr txBox="1"/>
+          <p:nvPr/>
+        </p:nvSpPr>
+        <p:spPr>
+          <a:xfrm>
+            <a:off x="781050" y="5648325"/>
+            <a:ext cx="10629900" cy="276225"/>
+          </a:xfrm>
+          <a:prstGeom prst="rect">
+            <a:avLst/>
+          </a:prstGeom>
+          <a:noFill/>
+          <a:effectLst/>
+        </p:spPr>
+        <p:txBody>
+          <a:bodyPr wrap="square" lIns="0" rIns="0" tIns="0" bIns="0">
+            <a:spAutoFit/>
+          </a:bodyPr>
+          <a:lstStyle/>
+          <a:p>
+            <a:pPr algn="l">
+              <a:lnSpc>
+                <a:spcPct val="112000"/>
+              </a:lnSpc>
+              <a:spcAft>
+                <a:spcPts val="500"/>
+              </a:spcAft>
+            </a:pPr>
+            <a:r>
+              <a:rPr sz="1800" b="1" lang="zh-CN">
+                <a:solidFill>
+                  <a:srgbClr val="24756D"/>
+                </a:solidFill>
+                <a:latin typeface="Microsoft YaHei"/>
+                <a:ea typeface="Microsoft YaHei"/>
+              </a:rPr>
+              <a:t>缓存键 = 卡号 + SSD 起点 + 完整长度；目标 HBM 地址不在键中，不同卡使用不同键。</a:t>
+            </a:r>
+          </a:p>
+        </p:txBody>
+      </p:sp>
+    </p:spTree>
+  </p:cSld>
+  <p:clrMapOvr>
+    <a:masterClrMapping/>
+  </p:clrMapOvr>
+</p:sld>
+</file>
+
 <file path=ppt/slides/slide8.xml><?xml version="1.0" encoding="utf-8"?>
 <p:sld xmlns:a="http://schemas.openxmlformats.org/drawingml/2006/main" xmlns:p="http://schemas.openxmlformats.org/presentationml/2006/main" xmlns:r="http://schemas.openxmlformats.org/officeDocument/2006/relationships">
   <p:cSld>
@@ -17212,7 +16007,7 @@
       <p:grpSpPr/>
       <p:sp>
         <p:nvSpPr>
-          <p:cNvPr id="2" name="实现组织 · 数据结构"/>
+          <p:cNvPr id="2" name="算法复杂度 · 规划时间与内存"/>
           <p:cNvSpPr txBox="1"/>
           <p:nvPr/>
         </p:nvSpPr>
@@ -17249,14 +16044,14 @@
                 <a:latin typeface="Microsoft YaHei"/>
                 <a:ea typeface="Microsoft YaHei"/>
               </a:rPr>
-              <a:t>实现组织 · 数据结构</a:t>
-            </a:r>
-          </a:p>
-        </p:txBody>
-      </p:sp>
-      <p:sp>
-        <p:nvSpPr>
-          <p:cNvPr id="3" name="前台保存实际工作，后台据此判断缓存能替代什么"/>
+              <a:t>算法复杂度 · 规划时间与内存</a:t>
+            </a:r>
+          </a:p>
+        </p:txBody>
+      </p:sp>
+      <p:sp>
+        <p:nvSpPr>
+          <p:cNvPr id="3" name="用窗口、采样和预算控制搜索，输入输出开销仍随规模增长"/>
           <p:cNvSpPr txBox="1"/>
           <p:nvPr/>
         </p:nvSpPr>
@@ -17293,14 +16088,14 @@
                 <a:latin typeface="Microsoft YaHei"/>
                 <a:ea typeface="Microsoft YaHei"/>
               </a:rPr>
-              <a:t>前台保存实际工作，后台据此判断缓存能替代什么</a:t>
-            </a:r>
-          </a:p>
-        </p:txBody>
-      </p:sp>
-      <p:sp>
-        <p:nvSpPr>
-          <p:cNvPr id="4" name="关键策略集中在 solution.cpp；批内结构规划当前请求，跨回调结构追踪成本和复用。"/>
+              <a:t>用窗口、采样和预算控制搜索，输入输出开销仍随规模增长</a:t>
+            </a:r>
+          </a:p>
+        </p:txBody>
+      </p:sp>
+      <p:sp>
+        <p:nvSpPr>
+          <p:cNvPr id="4" name="n = 片段数，W = 窗口（最多128），cnt = 组数；V / Vmax = 总 / 单请求最多 iov 数。"/>
           <p:cNvSpPr txBox="1"/>
           <p:nvPr/>
         </p:nvSpPr>
@@ -17337,7 +16132,7 @@
                 <a:latin typeface="Microsoft YaHei"/>
                 <a:ea typeface="Microsoft YaHei"/>
               </a:rPr>
-              <a:t>关键策略集中在 solution.cpp；批内结构规划当前请求，跨回调结构追踪成本和复用。</a:t>
+              <a:t>n = 片段数，W = 窗口（最多128），cnt = 组数；V / Vmax = 总 / 单请求最多 iov 数。</a:t>
             </a:r>
           </a:p>
         </p:txBody>
@@ -17475,7 +16270,7 @@
         <p:spPr>
           <a:xfrm>
             <a:off x="609600" y="2114550"/>
-            <a:ext cx="1895474" cy="400050"/>
+            <a:ext cx="2266950" cy="409575"/>
           </a:xfrm>
           <a:prstGeom prst="rect">
             <a:avLst/>
@@ -17512,14 +16307,14 @@
       </p:sp>
       <p:sp>
         <p:nvSpPr>
-          <p:cNvPr id="9" name="结构"/>
+          <p:cNvPr id="9" name="阶段"/>
           <p:cNvSpPr txBox="1"/>
           <p:nvPr/>
         </p:nvSpPr>
         <p:spPr>
           <a:xfrm>
             <a:off x="742950" y="2190750"/>
-            <a:ext cx="1628775" cy="285750"/>
+            <a:ext cx="2000250" cy="285750"/>
           </a:xfrm>
           <a:prstGeom prst="rect">
             <a:avLst/>
@@ -17549,7 +16344,7 @@
                 <a:latin typeface="Microsoft YaHei"/>
                 <a:ea typeface="Microsoft YaHei"/>
               </a:rPr>
-              <a:t>结构</a:t>
+              <a:t>阶段</a:t>
             </a:r>
           </a:p>
         </p:txBody>
@@ -17562,8 +16357,8 @@
         </p:nvSpPr>
         <p:spPr>
           <a:xfrm>
-            <a:off x="2505075" y="2114550"/>
-            <a:ext cx="4286250" cy="400050"/>
+            <a:off x="2876550" y="2114550"/>
+            <a:ext cx="4333875" cy="409575"/>
           </a:xfrm>
           <a:prstGeom prst="rect">
             <a:avLst/>
@@ -17600,14 +16395,14 @@
       </p:sp>
       <p:sp>
         <p:nvSpPr>
-          <p:cNvPr id="11" name="保存的关键信息"/>
+          <p:cNvPr id="11" name="时间复杂度"/>
           <p:cNvSpPr txBox="1"/>
           <p:nvPr/>
         </p:nvSpPr>
         <p:spPr>
           <a:xfrm>
-            <a:off x="2638425" y="2190750"/>
-            <a:ext cx="4019549" cy="285750"/>
+            <a:off x="3009900" y="2190750"/>
+            <a:ext cx="4067175" cy="285750"/>
           </a:xfrm>
           <a:prstGeom prst="rect">
             <a:avLst/>
@@ -17637,7 +16432,7 @@
                 <a:latin typeface="Microsoft YaHei"/>
                 <a:ea typeface="Microsoft YaHei"/>
               </a:rPr>
-              <a:t>保存的关键信息</a:t>
+              <a:t>时间复杂度</a:t>
             </a:r>
           </a:p>
         </p:txBody>
@@ -17650,8 +16445,8 @@
         </p:nvSpPr>
         <p:spPr>
           <a:xfrm>
-            <a:off x="6791325" y="2114550"/>
-            <a:ext cx="4791075" cy="400050"/>
+            <a:off x="7210425" y="2114550"/>
+            <a:ext cx="4371975" cy="409575"/>
           </a:xfrm>
           <a:prstGeom prst="rect">
             <a:avLst/>
@@ -17688,14 +16483,14 @@
       </p:sp>
       <p:sp>
         <p:nvSpPr>
-          <p:cNvPr id="13" name="在哪里使用"/>
+          <p:cNvPr id="13" name="空间复杂度"/>
           <p:cNvSpPr txBox="1"/>
           <p:nvPr/>
         </p:nvSpPr>
         <p:spPr>
           <a:xfrm>
-            <a:off x="6924675" y="2190750"/>
-            <a:ext cx="4524375" cy="285750"/>
+            <a:off x="7343775" y="2190750"/>
+            <a:ext cx="4105274" cy="285750"/>
           </a:xfrm>
           <a:prstGeom prst="rect">
             <a:avLst/>
@@ -17725,21 +16520,21 @@
                 <a:latin typeface="Microsoft YaHei"/>
                 <a:ea typeface="Microsoft YaHei"/>
               </a:rPr>
-              <a:t>在哪里使用</a:t>
-            </a:r>
-          </a:p>
-        </p:txBody>
-      </p:sp>
-      <p:sp>
-        <p:nvSpPr>
-          <p:cNvPr id="14" name="IovIndex"/>
+              <a:t>空间复杂度</a:t>
+            </a:r>
+          </a:p>
+        </p:txBody>
+      </p:sp>
+      <p:sp>
+        <p:nvSpPr>
+          <p:cNvPr id="14" name="索引与排序"/>
           <p:cNvSpPr txBox="1"/>
           <p:nvPr/>
         </p:nvSpPr>
         <p:spPr>
           <a:xfrm>
-            <a:off x="742950" y="2657475"/>
-            <a:ext cx="1628775" cy="295275"/>
+            <a:off x="742950" y="2724150"/>
+            <a:ext cx="2000250" cy="304800"/>
           </a:xfrm>
           <a:prstGeom prst="rect">
             <a:avLst/>
@@ -17762,28 +16557,28 @@
               </a:spcAft>
             </a:pPr>
             <a:r>
-              <a:rPr sz="1575" b="1" lang="zh-CN">
+              <a:rPr sz="1500" b="1" lang="zh-CN">
                 <a:solidFill>
                   <a:srgbClr val="1F2937"/>
                 </a:solidFill>
                 <a:latin typeface="Microsoft YaHei"/>
                 <a:ea typeface="Microsoft YaHei"/>
               </a:rPr>
-              <a:t>IovIndex</a:t>
-            </a:r>
-          </a:p>
-        </p:txBody>
-      </p:sp>
-      <p:sp>
-        <p:nvSpPr>
-          <p:cNvPr id="15" name="ends：目标 iov 的累计终点"/>
+              <a:t>索引与排序</a:t>
+            </a:r>
+          </a:p>
+        </p:txBody>
+      </p:sp>
+      <p:sp>
+        <p:nvSpPr>
+          <p:cNvPr id="15" name="建索引 O(V)，片段排序 O(n log n)"/>
           <p:cNvSpPr txBox="1"/>
           <p:nvPr/>
         </p:nvSpPr>
         <p:spPr>
           <a:xfrm>
-            <a:off x="2638425" y="2657475"/>
-            <a:ext cx="4019549" cy="295275"/>
+            <a:off x="3009900" y="2724150"/>
+            <a:ext cx="4067175" cy="304800"/>
           </a:xfrm>
           <a:prstGeom prst="rect">
             <a:avLst/>
@@ -17806,28 +16601,28 @@
               </a:spcAft>
             </a:pPr>
             <a:r>
-              <a:rPr sz="1575" b="0" lang="zh-CN">
+              <a:rPr sz="1500" b="0" lang="zh-CN">
                 <a:solidFill>
                   <a:srgbClr val="1F2937"/>
                 </a:solidFill>
                 <a:latin typeface="Microsoft YaHei"/>
                 <a:ea typeface="Microsoft YaHei"/>
               </a:rPr>
-              <a:t>ends：目标 iov 的累计终点</a:t>
-            </a:r>
-          </a:p>
-        </p:txBody>
-      </p:sp>
-      <p:sp>
-        <p:nvSpPr>
-          <p:cNvPr id="16" name="按请求内偏移二分定位目标；生成 vectors"/>
+              <a:t>建索引 O(V)，片段排序 O(n log n)</a:t>
+            </a:r>
+          </a:p>
+        </p:txBody>
+      </p:sp>
+      <p:sp>
+        <p:nvSpPr>
+          <p:cNvPr id="16" name="索引和片段 O(V+n)"/>
           <p:cNvSpPr txBox="1"/>
           <p:nvPr/>
         </p:nvSpPr>
         <p:spPr>
           <a:xfrm>
-            <a:off x="6924675" y="2657475"/>
-            <a:ext cx="4524375" cy="295275"/>
+            <a:off x="7343775" y="2724150"/>
+            <a:ext cx="4105274" cy="304800"/>
           </a:xfrm>
           <a:prstGeom prst="rect">
             <a:avLst/>
@@ -17850,14 +16645,14 @@
               </a:spcAft>
             </a:pPr>
             <a:r>
-              <a:rPr sz="1575" b="0" lang="zh-CN">
+              <a:rPr sz="1500" b="0" lang="zh-CN">
                 <a:solidFill>
                   <a:srgbClr val="1F2937"/>
                 </a:solidFill>
                 <a:latin typeface="Microsoft YaHei"/>
                 <a:ea typeface="Microsoft YaHei"/>
               </a:rPr>
-              <a:t>按请求内偏移二分定位目标；生成 vectors</a:t>
+              <a:t>索引和片段 O(V+n)</a:t>
             </a:r>
           </a:p>
         </p:txBody>
@@ -17870,7 +16665,7 @@
         </p:nvCxnSpPr>
         <p:spPr>
           <a:xfrm>
-            <a:off x="609600" y="3009900"/>
+            <a:off x="609600" y="3067050"/>
             <a:ext cx="10972800" cy="0"/>
           </a:xfrm>
           <a:prstGeom prst="line">
@@ -17900,14 +16695,14 @@
       </p:cxnSp>
       <p:sp>
         <p:nvSpPr>
-          <p:cNvPr id="18" name="Piece"/>
+          <p:cNvPr id="18" name="快速区间 DP"/>
           <p:cNvSpPr txBox="1"/>
           <p:nvPr/>
         </p:nvSpPr>
         <p:spPr>
           <a:xfrm>
-            <a:off x="742950" y="3114675"/>
-            <a:ext cx="1628775" cy="295275"/>
+            <a:off x="742950" y="3181350"/>
+            <a:ext cx="2000250" cy="304800"/>
           </a:xfrm>
           <a:prstGeom prst="rect">
             <a:avLst/>
@@ -17930,28 +16725,28 @@
               </a:spcAft>
             </a:pPr>
             <a:r>
-              <a:rPr sz="1575" b="1" lang="zh-CN">
+              <a:rPr sz="1500" b="1" lang="zh-CN">
                 <a:solidFill>
                   <a:srgbClr val="1F2937"/>
                 </a:solidFill>
                 <a:latin typeface="Microsoft YaHei"/>
                 <a:ea typeface="Microsoft YaHei"/>
               </a:rPr>
-              <a:t>Piece</a:t>
-            </a:r>
-          </a:p>
-        </p:txBody>
-      </p:sp>
-      <p:sp>
-        <p:nvSpPr>
-          <p:cNvPr id="19" name="io、offset、length、aligned、whole"/>
+              <a:t>快速区间 DP</a:t>
+            </a:r>
+          </a:p>
+        </p:txBody>
+      </p:sp>
+      <p:sp>
+        <p:nvSpPr>
+          <p:cNvPr id="19" name="O(nW log(W+1))：含所有者集合维护"/>
           <p:cNvSpPr txBox="1"/>
           <p:nvPr/>
         </p:nvSpPr>
         <p:spPr>
           <a:xfrm>
-            <a:off x="2638425" y="3114675"/>
-            <a:ext cx="4019549" cy="295275"/>
+            <a:off x="3009900" y="3181350"/>
+            <a:ext cx="4067175" cy="304800"/>
           </a:xfrm>
           <a:prstGeom prst="rect">
             <a:avLst/>
@@ -17974,28 +16769,28 @@
               </a:spcAft>
             </a:pPr>
             <a:r>
-              <a:rPr sz="1575" b="0" lang="zh-CN">
+              <a:rPr sz="1500" b="0" lang="zh-CN">
                 <a:solidFill>
                   <a:srgbClr val="1F2937"/>
                 </a:solidFill>
                 <a:latin typeface="Microsoft YaHei"/>
                 <a:ea typeface="Microsoft YaHei"/>
               </a:rPr>
-              <a:t>io、offset、length、aligned、whole</a:t>
-            </a:r>
-          </a:p>
-        </p:txBody>
-      </p:sp>
-      <p:sp>
-        <p:nvSpPr>
-          <p:cNvPr id="20" name="先切合法片段，再排序并枚举候选组"/>
+              <a:t>O(nW log(W+1))：含所有者集合维护</a:t>
+            </a:r>
+          </a:p>
+        </p:txBody>
+      </p:sp>
+      <p:sp>
+        <p:nvSpPr>
+          <p:cNvPr id="20" name="dp / prev / paths 为 O(n)"/>
           <p:cNvSpPr txBox="1"/>
           <p:nvPr/>
         </p:nvSpPr>
         <p:spPr>
           <a:xfrm>
-            <a:off x="6924675" y="3114675"/>
-            <a:ext cx="4524375" cy="295275"/>
+            <a:off x="7343775" y="3181350"/>
+            <a:ext cx="4105274" cy="304800"/>
           </a:xfrm>
           <a:prstGeom prst="rect">
             <a:avLst/>
@@ -18018,14 +16813,14 @@
               </a:spcAft>
             </a:pPr>
             <a:r>
-              <a:rPr sz="1575" b="0" lang="zh-CN">
+              <a:rPr sz="1500" b="0" lang="zh-CN">
                 <a:solidFill>
                   <a:srgbClr val="1F2937"/>
                 </a:solidFill>
                 <a:latin typeface="Microsoft YaHei"/>
                 <a:ea typeface="Microsoft YaHei"/>
               </a:rPr>
-              <a:t>先切合法片段，再排序并枚举候选组</a:t>
+              <a:t>dp / prev / paths 为 O(n)</a:t>
             </a:r>
           </a:p>
         </p:txBody>
@@ -18038,7 +16833,7 @@
         </p:nvCxnSpPr>
         <p:spPr>
           <a:xfrm>
-            <a:off x="609600" y="3467100"/>
+            <a:off x="609600" y="3524250"/>
             <a:ext cx="10972800" cy="0"/>
           </a:xfrm>
           <a:prstGeom prst="line">
@@ -18068,14 +16863,14 @@
       </p:cxnSp>
       <p:sp>
         <p:nvSpPr>
-          <p:cNvPr id="22" name="DP 状态"/>
+          <p:cNvPr id="22" name="细化 DP（固定 cnt）"/>
           <p:cNvSpPr txBox="1"/>
           <p:nvPr/>
         </p:nvSpPr>
         <p:spPr>
           <a:xfrm>
-            <a:off x="742950" y="3571875"/>
-            <a:ext cx="1628775" cy="295275"/>
+            <a:off x="742950" y="3638550"/>
+            <a:ext cx="2000250" cy="304800"/>
           </a:xfrm>
           <a:prstGeom prst="rect">
             <a:avLst/>
@@ -18098,28 +16893,28 @@
               </a:spcAft>
             </a:pPr>
             <a:r>
-              <a:rPr sz="1575" b="1" lang="zh-CN">
+              <a:rPr sz="1500" b="1" lang="zh-CN">
                 <a:solidFill>
                   <a:srgbClr val="1F2937"/>
                 </a:solidFill>
                 <a:latin typeface="Microsoft YaHei"/>
                 <a:ea typeface="Microsoft YaHei"/>
               </a:rPr>
-              <a:t>DP 状态</a:t>
-            </a:r>
-          </a:p>
-        </p:txBody>
-      </p:sp>
-      <p:sp>
-        <p:nvSpPr>
-          <p:cNvPr id="23" name="dp / prev / paths：估价、前驱、路径"/>
+              <a:t>细化 DP（固定 cnt）</a:t>
+            </a:r>
+          </a:p>
+        </p:txBody>
+      </p:sp>
+      <p:sp>
+        <p:nvSpPr>
+          <p:cNvPr id="23" name="最坏 O(cnt × n × W)"/>
           <p:cNvSpPr txBox="1"/>
           <p:nvPr/>
         </p:nvSpPr>
         <p:spPr>
           <a:xfrm>
-            <a:off x="2638425" y="3571875"/>
-            <a:ext cx="4019549" cy="295275"/>
+            <a:off x="3009900" y="3638550"/>
+            <a:ext cx="4067175" cy="304800"/>
           </a:xfrm>
           <a:prstGeom prst="rect">
             <a:avLst/>
@@ -18142,28 +16937,28 @@
               </a:spcAft>
             </a:pPr>
             <a:r>
-              <a:rPr sz="1575" b="0" lang="zh-CN">
+              <a:rPr sz="1500" b="0" lang="zh-CN">
                 <a:solidFill>
                   <a:srgbClr val="1F2937"/>
                 </a:solidFill>
                 <a:latin typeface="Microsoft YaHei"/>
                 <a:ea typeface="Microsoft YaHei"/>
               </a:rPr>
-              <a:t>dp / prev / paths：估价、前驱、路径</a:t>
-            </a:r>
-          </a:p>
-        </p:txBody>
-      </p:sp>
-      <p:sp>
-        <p:nvSpPr>
-          <p:cNvPr id="24" name="更优时更新；回溯还原 operation"/>
+              <a:t>最坏 O(cnt × n × W)</a:t>
+            </a:r>
+          </a:p>
+        </p:txBody>
+      </p:sp>
+      <p:sp>
+        <p:nvSpPr>
+          <p:cNvPr id="24" name="状态 O(cnt × n)，合法边 O(nW)"/>
           <p:cNvSpPr txBox="1"/>
           <p:nvPr/>
         </p:nvSpPr>
         <p:spPr>
           <a:xfrm>
-            <a:off x="6924675" y="3571875"/>
-            <a:ext cx="4524375" cy="295275"/>
+            <a:off x="7343775" y="3638550"/>
+            <a:ext cx="4105274" cy="304800"/>
           </a:xfrm>
           <a:prstGeom prst="rect">
             <a:avLst/>
@@ -18186,14 +16981,14 @@
               </a:spcAft>
             </a:pPr>
             <a:r>
-              <a:rPr sz="1575" b="0" lang="zh-CN">
+              <a:rPr sz="1500" b="0" lang="zh-CN">
                 <a:solidFill>
                   <a:srgbClr val="1F2937"/>
                 </a:solidFill>
                 <a:latin typeface="Microsoft YaHei"/>
                 <a:ea typeface="Microsoft YaHei"/>
               </a:rPr>
-              <a:t>更优时更新；回溯还原 operation</a:t>
+              <a:t>状态 O(cnt × n)，合法边 O(nW)</a:t>
             </a:r>
           </a:p>
         </p:txBody>
@@ -18206,7 +17001,7 @@
         </p:nvCxnSpPr>
         <p:spPr>
           <a:xfrm>
-            <a:off x="609600" y="3924300"/>
+            <a:off x="609600" y="3981450"/>
             <a:ext cx="10972800" cy="0"/>
           </a:xfrm>
           <a:prstGeom prst="line">
@@ -18236,14 +17031,14 @@
       </p:cxnSp>
       <p:sp>
         <p:nvSpPr>
-          <p:cNvPr id="26" name="Work"/>
+          <p:cNvPr id="26" name="映射与输出"/>
           <p:cNvSpPr txBox="1"/>
           <p:nvPr/>
         </p:nvSpPr>
         <p:spPr>
           <a:xfrm>
-            <a:off x="742950" y="4029075"/>
-            <a:ext cx="1628775" cy="295275"/>
+            <a:off x="742950" y="4095750"/>
+            <a:ext cx="2000250" cy="304800"/>
           </a:xfrm>
           <a:prstGeom prst="rect">
             <a:avLst/>
@@ -18266,28 +17061,28 @@
               </a:spcAft>
             </a:pPr>
             <a:r>
-              <a:rPr sz="1575" b="1" lang="zh-CN">
-                <a:solidFill>
-                  <a:srgbClr val="24756D"/>
-                </a:solidFill>
-                <a:latin typeface="Microsoft YaHei"/>
-                <a:ea typeface="Microsoft YaHei"/>
-              </a:rPr>
-              <a:t>Work</a:t>
-            </a:r>
-          </a:p>
-        </p:txBody>
-      </p:sp>
-      <p:sp>
-        <p:nvSpPr>
-          <p:cNvPr id="27" name="读 / 复制工作、调用费、本卡字节占比"/>
+              <a:rPr sz="1500" b="1" lang="zh-CN">
+                <a:solidFill>
+                  <a:srgbClr val="1F2937"/>
+                </a:solidFill>
+                <a:latin typeface="Microsoft YaHei"/>
+                <a:ea typeface="Microsoft YaHei"/>
+              </a:rPr>
+              <a:t>映射与输出</a:t>
+            </a:r>
+          </a:p>
+        </p:txBody>
+      </p:sp>
+      <p:sp>
+        <p:nvSpPr>
+          <p:cNvPr id="27" name="约 O(n log Vmax + L)"/>
           <p:cNvSpPr txBox="1"/>
           <p:nvPr/>
         </p:nvSpPr>
         <p:spPr>
           <a:xfrm>
-            <a:off x="2638425" y="4029075"/>
-            <a:ext cx="4019549" cy="295275"/>
+            <a:off x="3009900" y="4095750"/>
+            <a:ext cx="4067175" cy="304800"/>
           </a:xfrm>
           <a:prstGeom prst="rect">
             <a:avLst/>
@@ -18310,28 +17105,28 @@
               </a:spcAft>
             </a:pPr>
             <a:r>
-              <a:rPr sz="1575" b="0" lang="zh-CN">
+              <a:rPr sz="1500" b="0" lang="zh-CN">
                 <a:solidFill>
                   <a:srgbClr val="1F2937"/>
                 </a:solidFill>
                 <a:latin typeface="Microsoft YaHei"/>
                 <a:ea typeface="Microsoft YaHei"/>
               </a:rPr>
-              <a:t>读 / 复制工作、调用费、本卡字节占比</a:t>
-            </a:r>
-          </a:p>
-        </p:txBody>
-      </p:sp>
-      <p:sp>
-        <p:nvSpPr>
-          <p:cNvPr id="28" name="只记最终计划；完成时估算可替代成本"/>
+              <a:t>约 O(n log Vmax + L)</a:t>
+            </a:r>
+          </a:p>
+        </p:txBody>
+      </p:sp>
+      <p:sp>
+        <p:nvSpPr>
+          <p:cNvPr id="28" name="O(L)，L 为片段与目标 iov 的交集数"/>
           <p:cNvSpPr txBox="1"/>
           <p:nvPr/>
         </p:nvSpPr>
         <p:spPr>
           <a:xfrm>
-            <a:off x="6924675" y="4029075"/>
-            <a:ext cx="4524375" cy="295275"/>
+            <a:off x="7343775" y="4095750"/>
+            <a:ext cx="4105274" cy="304800"/>
           </a:xfrm>
           <a:prstGeom prst="rect">
             <a:avLst/>
@@ -18354,14 +17149,14 @@
               </a:spcAft>
             </a:pPr>
             <a:r>
-              <a:rPr sz="1575" b="0" lang="zh-CN">
+              <a:rPr sz="1500" b="0" lang="zh-CN">
                 <a:solidFill>
                   <a:srgbClr val="1F2937"/>
                 </a:solidFill>
                 <a:latin typeface="Microsoft YaHei"/>
                 <a:ea typeface="Microsoft YaHei"/>
               </a:rPr>
-              <a:t>只记最终计划；完成时估算可替代成本</a:t>
+              <a:t>O(L)，L 为片段与目标 iov 的交集数</a:t>
             </a:r>
           </a:p>
         </p:txBody>
@@ -18374,7 +17169,7 @@
         </p:nvCxnSpPr>
         <p:spPr>
           <a:xfrm>
-            <a:off x="609600" y="4381500"/>
+            <a:off x="609600" y="4438650"/>
             <a:ext cx="10972800" cy="0"/>
           </a:xfrm>
           <a:prstGeom prst="line">
@@ -18404,14 +17199,14 @@
       </p:cxnSp>
       <p:sp>
         <p:nvSpPr>
-          <p:cNvPr id="30" name="History"/>
+          <p:cNvPr id="30" name="后台同步 / 扫描"/>
           <p:cNvSpPr txBox="1"/>
           <p:nvPr/>
         </p:nvSpPr>
         <p:spPr>
           <a:xfrm>
-            <a:off x="742950" y="4486275"/>
-            <a:ext cx="1628775" cy="295275"/>
+            <a:off x="742950" y="4552950"/>
+            <a:ext cx="2000250" cy="304800"/>
           </a:xfrm>
           <a:prstGeom prst="rect">
             <a:avLst/>
@@ -18434,28 +17229,28 @@
               </a:spcAft>
             </a:pPr>
             <a:r>
-              <a:rPr sz="1575" b="1" lang="zh-CN">
-                <a:solidFill>
-                  <a:srgbClr val="24756D"/>
-                </a:solidFill>
-                <a:latin typeface="Microsoft YaHei"/>
-                <a:ea typeface="Microsoft YaHei"/>
-              </a:rPr>
-              <a:t>History</a:t>
-            </a:r>
-          </a:p>
-        </p:txBody>
-      </p:sp>
-      <p:sp>
-        <p:nvSpPr>
-          <p:cNvPr id="31" name="gap / jitter / last_arrival / credit"/>
+              <a:rPr sz="1500" b="1" lang="zh-CN">
+                <a:solidFill>
+                  <a:srgbClr val="1F2937"/>
+                </a:solidFill>
+                <a:latin typeface="Microsoft YaHei"/>
+                <a:ea typeface="Microsoft YaHei"/>
+              </a:rPr>
+              <a:t>后台同步 / 扫描</a:t>
+            </a:r>
+          </a:p>
+        </p:txBody>
+      </p:sp>
+      <p:sp>
+        <p:nvSpPr>
+          <p:cNvPr id="31" name="O(R log(R+1)+A)，另有状态查表"/>
           <p:cNvSpPr txBox="1"/>
           <p:nvPr/>
         </p:nvSpPr>
         <p:spPr>
           <a:xfrm>
-            <a:off x="2638425" y="4486275"/>
-            <a:ext cx="4019549" cy="295275"/>
+            <a:off x="3009900" y="4552950"/>
+            <a:ext cx="4067175" cy="304800"/>
           </a:xfrm>
           <a:prstGeom prst="rect">
             <a:avLst/>
@@ -18478,28 +17273,28 @@
               </a:spcAft>
             </a:pPr>
             <a:r>
-              <a:rPr sz="1575" b="0" lang="zh-CN">
+              <a:rPr sz="1500" b="0" lang="zh-CN">
                 <a:solidFill>
                   <a:srgbClr val="1F2937"/>
                 </a:solidFill>
                 <a:latin typeface="Microsoft YaHei"/>
                 <a:ea typeface="Microsoft YaHei"/>
               </a:rPr>
-              <a:t>gap / jitter / last_arrival / credit</a:t>
-            </a:r>
-          </a:p>
-        </p:txBody>
-      </p:sp>
-      <p:sp>
-        <p:nvSpPr>
-          <p:cNvPr id="32" name="维护复用节奏、新鲜度和准入预算"/>
+              <a:t>O(R log(R+1)+A)，另有状态查表</a:t>
+            </a:r>
+          </a:p>
+        </p:txBody>
+      </p:sp>
+      <p:sp>
+        <p:nvSpPr>
+          <p:cNvPr id="32" name="临时 O(R)，持久 O(H+U+R)"/>
           <p:cNvSpPr txBox="1"/>
           <p:nvPr/>
         </p:nvSpPr>
         <p:spPr>
           <a:xfrm>
-            <a:off x="6924675" y="4486275"/>
-            <a:ext cx="4524375" cy="295275"/>
+            <a:off x="7343775" y="4552950"/>
+            <a:ext cx="4105274" cy="304800"/>
           </a:xfrm>
           <a:prstGeom prst="rect">
             <a:avLst/>
@@ -18522,14 +17317,14 @@
               </a:spcAft>
             </a:pPr>
             <a:r>
-              <a:rPr sz="1575" b="0" lang="zh-CN">
+              <a:rPr sz="1500" b="0" lang="zh-CN">
                 <a:solidFill>
                   <a:srgbClr val="1F2937"/>
                 </a:solidFill>
                 <a:latin typeface="Microsoft YaHei"/>
                 <a:ea typeface="Microsoft YaHei"/>
               </a:rPr>
-              <a:t>维护复用节奏、新鲜度和准入预算</a:t>
+              <a:t>临时 O(R)，持久 O(H+U+R)</a:t>
             </a:r>
           </a:p>
         </p:txBody>
@@ -18542,7 +17337,7 @@
         </p:nvCxnSpPr>
         <p:spPr>
           <a:xfrm>
-            <a:off x="609600" y="4838700"/>
+            <a:off x="609600" y="4895850"/>
             <a:ext cx="10972800" cy="0"/>
           </a:xfrm>
           <a:prstGeom prst="line">
@@ -18572,14 +17367,14 @@
       </p:cxnSp>
       <p:sp>
         <p:nvSpPr>
-          <p:cNvPr id="34" name="promotions_"/>
+          <p:cNvPr id="34" name="细化搜索：单次至多 131072 个存储状态；每批共享 200 万次边估价 / 转移预算。"/>
           <p:cNvSpPr txBox="1"/>
           <p:nvPr/>
         </p:nvSpPr>
         <p:spPr>
           <a:xfrm>
-            <a:off x="742950" y="4943475"/>
-            <a:ext cx="1628775" cy="295275"/>
+            <a:off x="609600" y="5067300"/>
+            <a:ext cx="10972800" cy="295275"/>
           </a:xfrm>
           <a:prstGeom prst="rect">
             <a:avLst/>
@@ -18602,28 +17397,28 @@
               </a:spcAft>
             </a:pPr>
             <a:r>
-              <a:rPr sz="1575" b="1" lang="zh-CN">
-                <a:solidFill>
-                  <a:srgbClr val="24756D"/>
-                </a:solidFill>
-                <a:latin typeface="Microsoft YaHei"/>
-                <a:ea typeface="Microsoft YaHei"/>
-              </a:rPr>
-              <a:t>promotions_</a:t>
-            </a:r>
-          </a:p>
-        </p:txBody>
-      </p:sp>
-      <p:sp>
-        <p:nvSpPr>
-          <p:cNvPr id="35" name="在途提升及 pending_keys_ 去重集合"/>
+              <a:rPr sz="1800" b="1" lang="zh-CN">
+                <a:solidFill>
+                  <a:srgbClr val="285EA8"/>
+                </a:solidFill>
+                <a:latin typeface="Microsoft YaHei"/>
+                <a:ea typeface="Microsoft YaHei"/>
+              </a:rPr>
+              <a:t>细化搜索：单次至多 131072 个存储状态；每批共享 200 万次边估价 / 转移预算。</a:t>
+            </a:r>
+          </a:p>
+        </p:txBody>
+      </p:sp>
+      <p:sp>
+        <p:nvSpPr>
+          <p:cNvPr id="35" name="R / A = 在途提升 / 活动传输数；H / U = 历史记录 / 未完成请求数（历史含更新队列）。 预算不覆盖全部预检查、输入与输出开销；输入索引和未完成请求增长时，总内存仍会增长。"/>
           <p:cNvSpPr txBox="1"/>
           <p:nvPr/>
         </p:nvSpPr>
         <p:spPr>
           <a:xfrm>
-            <a:off x="2638425" y="4943475"/>
-            <a:ext cx="4019549" cy="295275"/>
+            <a:off x="609600" y="5534025"/>
+            <a:ext cx="10972800" cy="533400"/>
           </a:xfrm>
           <a:prstGeom prst="rect">
             <a:avLst/>
@@ -18648,38 +17443,14 @@
             <a:r>
               <a:rPr sz="1575" b="0" lang="zh-CN">
                 <a:solidFill>
-                  <a:srgbClr val="1F2937"/>
-                </a:solidFill>
-                <a:latin typeface="Microsoft YaHei"/>
-                <a:ea typeface="Microsoft YaHei"/>
-              </a:rPr>
-              <a:t>在途提升及 pending_keys_ 去重集合</a:t>
-            </a:r>
-          </a:p>
-        </p:txBody>
-      </p:sp>
-      <p:sp>
-        <p:nvSpPr>
-          <p:cNvPr id="36" name="sync_promotions() 清理；避免同键重复投入"/>
-          <p:cNvSpPr txBox="1"/>
-          <p:nvPr/>
-        </p:nvSpPr>
-        <p:spPr>
-          <a:xfrm>
-            <a:off x="6924675" y="4943475"/>
-            <a:ext cx="4524375" cy="295275"/>
-          </a:xfrm>
-          <a:prstGeom prst="rect">
-            <a:avLst/>
-          </a:prstGeom>
-          <a:noFill/>
-          <a:effectLst/>
-        </p:spPr>
-        <p:txBody>
-          <a:bodyPr wrap="square" lIns="0" rIns="0" tIns="0" bIns="0">
-            <a:spAutoFit/>
-          </a:bodyPr>
-          <a:lstStyle/>
+                  <a:srgbClr val="657184"/>
+                </a:solidFill>
+                <a:latin typeface="Microsoft YaHei"/>
+                <a:ea typeface="Microsoft YaHei"/>
+              </a:rPr>
+              <a:t>R / A = 在途提升 / 活动传输数；H / U = 历史记录 / 未完成请求数（历史含更新队列）。</a:t>
+            </a:r>
+          </a:p>
           <a:p>
             <a:pPr algn="l">
               <a:lnSpc>
@@ -18692,136 +17463,12 @@
             <a:r>
               <a:rPr sz="1575" b="0" lang="zh-CN">
                 <a:solidFill>
-                  <a:srgbClr val="1F2937"/>
-                </a:solidFill>
-                <a:latin typeface="Microsoft YaHei"/>
-                <a:ea typeface="Microsoft YaHei"/>
-              </a:rPr>
-              <a:t>sync_promotions() 清理；避免同键重复投入</a:t>
-            </a:r>
-          </a:p>
-        </p:txBody>
-      </p:sp>
-      <p:cxnSp>
-        <p:nvCxnSpPr>
-          <p:cNvPr id="37" name="Connector 36"/>
-          <p:cNvCxnSpPr/>
-          <p:nvPr/>
-        </p:nvCxnSpPr>
-        <p:spPr>
-          <a:xfrm>
-            <a:off x="609600" y="5295900"/>
-            <a:ext cx="10972800" cy="0"/>
-          </a:xfrm>
-          <a:prstGeom prst="line">
-            <a:avLst/>
-          </a:prstGeom>
-          <a:ln w="12700">
-            <a:solidFill>
-              <a:srgbClr val="DCE2E9"/>
-            </a:solidFill>
-          </a:ln>
-          <a:effectLst/>
-        </p:spPr>
-        <p:style>
-          <a:lnRef idx="2">
-            <a:schemeClr val="accent1"/>
-          </a:lnRef>
-          <a:fillRef idx="0">
-            <a:schemeClr val="accent1"/>
-          </a:fillRef>
-          <a:effectRef idx="0">
-            <a:schemeClr val="accent1"/>
-          </a:effectRef>
-          <a:fontRef idx="minor">
-            <a:schemeClr val="tx1"/>
-          </a:fontRef>
-        </p:style>
-      </p:cxnSp>
-      <p:sp>
-        <p:nvSpPr>
-          <p:cNvPr id="38" name="Rectangle 37"/>
-          <p:cNvSpPr/>
-          <p:nvPr/>
-        </p:nvSpPr>
-        <p:spPr>
-          <a:xfrm>
-            <a:off x="609600" y="5543550"/>
-            <a:ext cx="10972800" cy="457200"/>
-          </a:xfrm>
-          <a:prstGeom prst="rect">
-            <a:avLst/>
-          </a:prstGeom>
-          <a:solidFill>
-            <a:srgbClr val="EEF6F3"/>
-          </a:solidFill>
-          <a:ln>
-            <a:noFill/>
-          </a:ln>
-          <a:effectLst/>
-        </p:spPr>
-        <p:style>
-          <a:lnRef idx="1">
-            <a:schemeClr val="accent1"/>
-          </a:lnRef>
-          <a:fillRef idx="3">
-            <a:schemeClr val="accent1"/>
-          </a:fillRef>
-          <a:effectRef idx="0">
-            <a:schemeClr val="accent1"/>
-          </a:effectRef>
-          <a:fontRef idx="minor">
-            <a:schemeClr val="lt1"/>
-          </a:fontRef>
-        </p:style>
-        <p:txBody>
-          <a:bodyPr rtlCol="0" anchor="ctr"/>
-          <a:lstStyle/>
-          <a:p>
-            <a:pPr algn="ctr"/>
-          </a:p>
-        </p:txBody>
-      </p:sp>
-      <p:sp>
-        <p:nvSpPr>
-          <p:cNvPr id="39" name="缓存键 = 卡号 + SSD 起点 + 完整长度；目标 HBM 地址不在键中，不同卡使用不同键。"/>
-          <p:cNvSpPr txBox="1"/>
-          <p:nvPr/>
-        </p:nvSpPr>
-        <p:spPr>
-          <a:xfrm>
-            <a:off x="781050" y="5648325"/>
-            <a:ext cx="10629900" cy="276225"/>
-          </a:xfrm>
-          <a:prstGeom prst="rect">
-            <a:avLst/>
-          </a:prstGeom>
-          <a:noFill/>
-          <a:effectLst/>
-        </p:spPr>
-        <p:txBody>
-          <a:bodyPr wrap="square" lIns="0" rIns="0" tIns="0" bIns="0">
-            <a:spAutoFit/>
-          </a:bodyPr>
-          <a:lstStyle/>
-          <a:p>
-            <a:pPr algn="l">
-              <a:lnSpc>
-                <a:spcPct val="112000"/>
-              </a:lnSpc>
-              <a:spcAft>
-                <a:spcPts val="500"/>
-              </a:spcAft>
-            </a:pPr>
-            <a:r>
-              <a:rPr sz="1800" b="1" lang="zh-CN">
-                <a:solidFill>
-                  <a:srgbClr val="24756D"/>
-                </a:solidFill>
-                <a:latin typeface="Microsoft YaHei"/>
-                <a:ea typeface="Microsoft YaHei"/>
-              </a:rPr>
-              <a:t>缓存键 = 卡号 + SSD 起点 + 完整长度；目标 HBM 地址不在键中，不同卡使用不同键。</a:t>
+                  <a:srgbClr val="657184"/>
+                </a:solidFill>
+                <a:latin typeface="Microsoft YaHei"/>
+                <a:ea typeface="Microsoft YaHei"/>
+              </a:rPr>
+              <a:t>预算不覆盖全部预检查、输入与输出开销；输入索引和未完成请求增长时，总内存仍会增长。</a:t>
             </a:r>
           </a:p>
         </p:txBody>
@@ -18854,7 +17501,7 @@
       <p:grpSpPr/>
       <p:sp>
         <p:nvSpPr>
-          <p:cNvPr id="2" name="算法复杂度 · 规划时间与内存"/>
+          <p:cNvPr id="2" name="调度算法开销 · 实测时间与空间"/>
           <p:cNvSpPr txBox="1"/>
           <p:nvPr/>
         </p:nvSpPr>
@@ -18891,14 +17538,14 @@
                 <a:latin typeface="Microsoft YaHei"/>
                 <a:ea typeface="Microsoft YaHei"/>
               </a:rPr>
-              <a:t>算法复杂度 · 规划时间与内存</a:t>
-            </a:r>
-          </a:p>
-        </p:txBody>
-      </p:sp>
-      <p:sp>
-        <p:nvSpPr>
-          <p:cNvPr id="3" name="用窗口、采样和预算控制搜索，输入输出开销仍随规模增长"/>
+              <a:t>调度算法开销 · 实测时间与空间</a:t>
+            </a:r>
+          </a:p>
+        </p:txBody>
+      </p:sp>
+      <p:sp>
+        <p:nvSpPr>
+          <p:cNvPr id="3" name="调度计算多花多少时间，整个程序占用多少资源"/>
           <p:cNvSpPr txBox="1"/>
           <p:nvPr/>
         </p:nvSpPr>
@@ -18935,14 +17582,14 @@
                 <a:latin typeface="Microsoft YaHei"/>
                 <a:ea typeface="Microsoft YaHei"/>
               </a:rPr>
-              <a:t>用窗口、采样和预算控制搜索，输入输出开销仍随规模增长</a:t>
-            </a:r>
-          </a:p>
-        </p:txBody>
-      </p:sp>
-      <p:sp>
-        <p:nvSpPr>
-          <p:cNvPr id="4" name="n = 片段数，W = 窗口（最多128），cnt = 组数；V / Vmax = 总 / 单请求最多 iov 数。"/>
+              <a:t>调度计算多花多少时间，整个程序占用多少资源</a:t>
+            </a:r>
+          </a:p>
+        </p:txBody>
+      </p:sp>
+      <p:sp>
+        <p:nvSpPr>
+          <p:cNvPr id="4" name="39 条公开输入：同一计量入口，每例预热一次，交替测三轮；时间取逐例中位数再求和。"/>
           <p:cNvSpPr txBox="1"/>
           <p:nvPr/>
         </p:nvSpPr>
@@ -18979,7 +17626,7 @@
                 <a:latin typeface="Microsoft YaHei"/>
                 <a:ea typeface="Microsoft YaHei"/>
               </a:rPr>
-              <a:t>n = 片段数，W = 窗口（最多128），cnt = 组数；V / Vmax = 总 / 单请求最多 iov 数。</a:t>
+              <a:t>39 条公开输入：同一计量入口，每例预热一次，交替测三轮；时间取逐例中位数再求和。</a:t>
             </a:r>
           </a:p>
         </p:txBody>
@@ -19116,8 +17763,8 @@
         </p:nvSpPr>
         <p:spPr>
           <a:xfrm>
-            <a:off x="609600" y="2114550"/>
-            <a:ext cx="2266950" cy="409575"/>
+            <a:off x="609600" y="2152650"/>
+            <a:ext cx="3276600" cy="409575"/>
           </a:xfrm>
           <a:prstGeom prst="rect">
             <a:avLst/>
@@ -19154,14 +17801,14 @@
       </p:sp>
       <p:sp>
         <p:nvSpPr>
-          <p:cNvPr id="9" name="阶段"/>
+          <p:cNvPr id="9" name="指标"/>
           <p:cNvSpPr txBox="1"/>
           <p:nvPr/>
         </p:nvSpPr>
         <p:spPr>
           <a:xfrm>
-            <a:off x="742950" y="2190750"/>
-            <a:ext cx="2000250" cy="285750"/>
+            <a:off x="742950" y="2228850"/>
+            <a:ext cx="3009900" cy="285750"/>
           </a:xfrm>
           <a:prstGeom prst="rect">
             <a:avLst/>
@@ -19191,7 +17838,7 @@
                 <a:latin typeface="Microsoft YaHei"/>
                 <a:ea typeface="Microsoft YaHei"/>
               </a:rPr>
-              <a:t>阶段</a:t>
+              <a:t>指标</a:t>
             </a:r>
           </a:p>
         </p:txBody>
@@ -19204,8 +17851,8 @@
         </p:nvSpPr>
         <p:spPr>
           <a:xfrm>
-            <a:off x="2876550" y="2114550"/>
-            <a:ext cx="4333875" cy="409575"/>
+            <a:off x="3886200" y="2152650"/>
+            <a:ext cx="1962150" cy="409575"/>
           </a:xfrm>
           <a:prstGeom prst="rect">
             <a:avLst/>
@@ -19242,14 +17889,14 @@
       </p:sp>
       <p:sp>
         <p:nvSpPr>
-          <p:cNvPr id="11" name="时间复杂度"/>
+          <p:cNvPr id="11" name="官方贪心"/>
           <p:cNvSpPr txBox="1"/>
           <p:nvPr/>
         </p:nvSpPr>
         <p:spPr>
           <a:xfrm>
-            <a:off x="3009900" y="2190750"/>
-            <a:ext cx="4067175" cy="285750"/>
+            <a:off x="4019549" y="2228850"/>
+            <a:ext cx="1695450" cy="285750"/>
           </a:xfrm>
           <a:prstGeom prst="rect">
             <a:avLst/>
@@ -19279,7 +17926,7 @@
                 <a:latin typeface="Microsoft YaHei"/>
                 <a:ea typeface="Microsoft YaHei"/>
               </a:rPr>
-              <a:t>时间复杂度</a:t>
+              <a:t>官方贪心</a:t>
             </a:r>
           </a:p>
         </p:txBody>
@@ -19292,8 +17939,8 @@
         </p:nvSpPr>
         <p:spPr>
           <a:xfrm>
-            <a:off x="7210425" y="2114550"/>
-            <a:ext cx="4371975" cy="409575"/>
+            <a:off x="5848350" y="2152650"/>
+            <a:ext cx="2057400" cy="409575"/>
           </a:xfrm>
           <a:prstGeom prst="rect">
             <a:avLst/>
@@ -19330,14 +17977,14 @@
       </p:sp>
       <p:sp>
         <p:nvSpPr>
-          <p:cNvPr id="13" name="空间复杂度"/>
+          <p:cNvPr id="13" name="本方案"/>
           <p:cNvSpPr txBox="1"/>
           <p:nvPr/>
         </p:nvSpPr>
         <p:spPr>
           <a:xfrm>
-            <a:off x="7343775" y="2190750"/>
-            <a:ext cx="4105274" cy="285750"/>
+            <a:off x="5981700" y="2228850"/>
+            <a:ext cx="1790700" cy="285750"/>
           </a:xfrm>
           <a:prstGeom prst="rect">
             <a:avLst/>
@@ -19367,21 +18014,65 @@
                 <a:latin typeface="Microsoft YaHei"/>
                 <a:ea typeface="Microsoft YaHei"/>
               </a:rPr>
-              <a:t>空间复杂度</a:t>
-            </a:r>
-          </a:p>
-        </p:txBody>
-      </p:sp>
-      <p:sp>
-        <p:nvSpPr>
-          <p:cNvPr id="14" name="索引与排序"/>
+              <a:t>本方案</a:t>
+            </a:r>
+          </a:p>
+        </p:txBody>
+      </p:sp>
+      <p:sp>
+        <p:nvSpPr>
+          <p:cNvPr id="14" name="Rectangle 13"/>
+          <p:cNvSpPr/>
+          <p:nvPr/>
+        </p:nvSpPr>
+        <p:spPr>
+          <a:xfrm>
+            <a:off x="7905750" y="2152650"/>
+            <a:ext cx="3676649" cy="409575"/>
+          </a:xfrm>
+          <a:prstGeom prst="rect">
+            <a:avLst/>
+          </a:prstGeom>
+          <a:solidFill>
+            <a:srgbClr val="EDF3FA"/>
+          </a:solidFill>
+          <a:ln>
+            <a:noFill/>
+          </a:ln>
+          <a:effectLst/>
+        </p:spPr>
+        <p:style>
+          <a:lnRef idx="1">
+            <a:schemeClr val="accent1"/>
+          </a:lnRef>
+          <a:fillRef idx="3">
+            <a:schemeClr val="accent1"/>
+          </a:fillRef>
+          <a:effectRef idx="0">
+            <a:schemeClr val="accent1"/>
+          </a:effectRef>
+          <a:fontRef idx="minor">
+            <a:schemeClr val="lt1"/>
+          </a:fontRef>
+        </p:style>
+        <p:txBody>
+          <a:bodyPr rtlCol="0" anchor="ctr"/>
+          <a:lstStyle/>
+          <a:p>
+            <a:pPr algn="ctr"/>
+          </a:p>
+        </p:txBody>
+      </p:sp>
+      <p:sp>
+        <p:nvSpPr>
+          <p:cNvPr id="15" name="怎样理解"/>
           <p:cNvSpPr txBox="1"/>
           <p:nvPr/>
         </p:nvSpPr>
         <p:spPr>
           <a:xfrm>
-            <a:off x="742950" y="2724150"/>
-            <a:ext cx="2000250" cy="304800"/>
+            <a:off x="8039099" y="2228850"/>
+            <a:ext cx="3409950" cy="285750"/>
           </a:xfrm>
           <a:prstGeom prst="rect">
             <a:avLst/>
@@ -19404,28 +18095,28 @@
               </a:spcAft>
             </a:pPr>
             <a:r>
-              <a:rPr sz="1500" b="1" lang="zh-CN">
-                <a:solidFill>
-                  <a:srgbClr val="1F2937"/>
-                </a:solidFill>
-                <a:latin typeface="Microsoft YaHei"/>
-                <a:ea typeface="Microsoft YaHei"/>
-              </a:rPr>
-              <a:t>索引与排序</a:t>
-            </a:r>
-          </a:p>
-        </p:txBody>
-      </p:sp>
-      <p:sp>
-        <p:nvSpPr>
-          <p:cNvPr id="15" name="建索引 O(V)，片段排序 O(n log n)"/>
+              <a:rPr sz="1725" b="1" lang="zh-CN">
+                <a:solidFill>
+                  <a:srgbClr val="285EA8"/>
+                </a:solidFill>
+                <a:latin typeface="Microsoft YaHei"/>
+                <a:ea typeface="Microsoft YaHei"/>
+              </a:rPr>
+              <a:t>怎样理解</a:t>
+            </a:r>
+          </a:p>
+        </p:txBody>
+      </p:sp>
+      <p:sp>
+        <p:nvSpPr>
+          <p:cNvPr id="16" name="策略回调时间"/>
           <p:cNvSpPr txBox="1"/>
           <p:nvPr/>
         </p:nvSpPr>
         <p:spPr>
           <a:xfrm>
-            <a:off x="3009900" y="2724150"/>
-            <a:ext cx="4067175" cy="304800"/>
+            <a:off x="742950" y="2800350"/>
+            <a:ext cx="3009900" cy="323850"/>
           </a:xfrm>
           <a:prstGeom prst="rect">
             <a:avLst/>
@@ -19448,28 +18139,28 @@
               </a:spcAft>
             </a:pPr>
             <a:r>
-              <a:rPr sz="1500" b="0" lang="zh-CN">
+              <a:rPr sz="1650" b="0" lang="zh-CN">
                 <a:solidFill>
                   <a:srgbClr val="1F2937"/>
                 </a:solidFill>
                 <a:latin typeface="Microsoft YaHei"/>
                 <a:ea typeface="Microsoft YaHei"/>
               </a:rPr>
-              <a:t>建索引 O(V)，片段排序 O(n log n)</a:t>
-            </a:r>
-          </a:p>
-        </p:txBody>
-      </p:sp>
-      <p:sp>
-        <p:nvSpPr>
-          <p:cNvPr id="16" name="索引和片段 O(V+n)"/>
+              <a:t>策略回调时间</a:t>
+            </a:r>
+          </a:p>
+        </p:txBody>
+      </p:sp>
+      <p:sp>
+        <p:nvSpPr>
+          <p:cNvPr id="17" name="0.831s"/>
           <p:cNvSpPr txBox="1"/>
           <p:nvPr/>
         </p:nvSpPr>
         <p:spPr>
           <a:xfrm>
-            <a:off x="7343775" y="2724150"/>
-            <a:ext cx="4105274" cy="304800"/>
+            <a:off x="4019549" y="2800350"/>
+            <a:ext cx="1695450" cy="323850"/>
           </a:xfrm>
           <a:prstGeom prst="rect">
             <a:avLst/>
@@ -19492,27 +18183,115 @@
               </a:spcAft>
             </a:pPr>
             <a:r>
-              <a:rPr sz="1500" b="0" lang="zh-CN">
+              <a:rPr sz="1650" b="0" lang="zh-CN">
                 <a:solidFill>
                   <a:srgbClr val="1F2937"/>
                 </a:solidFill>
                 <a:latin typeface="Microsoft YaHei"/>
                 <a:ea typeface="Microsoft YaHei"/>
               </a:rPr>
-              <a:t>索引和片段 O(V+n)</a:t>
+              <a:t>0.831s</a:t>
+            </a:r>
+          </a:p>
+        </p:txBody>
+      </p:sp>
+      <p:sp>
+        <p:nvSpPr>
+          <p:cNvPr id="18" name="1.153s"/>
+          <p:cNvSpPr txBox="1"/>
+          <p:nvPr/>
+        </p:nvSpPr>
+        <p:spPr>
+          <a:xfrm>
+            <a:off x="5981700" y="2800350"/>
+            <a:ext cx="1790700" cy="323850"/>
+          </a:xfrm>
+          <a:prstGeom prst="rect">
+            <a:avLst/>
+          </a:prstGeom>
+          <a:noFill/>
+          <a:effectLst/>
+        </p:spPr>
+        <p:txBody>
+          <a:bodyPr wrap="square" lIns="0" rIns="0" tIns="0" bIns="0">
+            <a:spAutoFit/>
+          </a:bodyPr>
+          <a:lstStyle/>
+          <a:p>
+            <a:pPr algn="l">
+              <a:lnSpc>
+                <a:spcPct val="112000"/>
+              </a:lnSpc>
+              <a:spcAft>
+                <a:spcPts val="500"/>
+              </a:spcAft>
+            </a:pPr>
+            <a:r>
+              <a:rPr sz="1650" b="1" lang="zh-CN">
+                <a:solidFill>
+                  <a:srgbClr val="285EA8"/>
+                </a:solidFill>
+                <a:latin typeface="Microsoft YaHei"/>
+                <a:ea typeface="Microsoft YaHei"/>
+              </a:rPr>
+              <a:t>1.153s</a:t>
+            </a:r>
+          </a:p>
+        </p:txBody>
+      </p:sp>
+      <p:sp>
+        <p:nvSpPr>
+          <p:cNvPr id="19" name="增加 0.322s，约 +38.7%"/>
+          <p:cNvSpPr txBox="1"/>
+          <p:nvPr/>
+        </p:nvSpPr>
+        <p:spPr>
+          <a:xfrm>
+            <a:off x="8039099" y="2800350"/>
+            <a:ext cx="3409950" cy="323850"/>
+          </a:xfrm>
+          <a:prstGeom prst="rect">
+            <a:avLst/>
+          </a:prstGeom>
+          <a:noFill/>
+          <a:effectLst/>
+        </p:spPr>
+        <p:txBody>
+          <a:bodyPr wrap="square" lIns="0" rIns="0" tIns="0" bIns="0">
+            <a:spAutoFit/>
+          </a:bodyPr>
+          <a:lstStyle/>
+          <a:p>
+            <a:pPr algn="l">
+              <a:lnSpc>
+                <a:spcPct val="112000"/>
+              </a:lnSpc>
+              <a:spcAft>
+                <a:spcPts val="500"/>
+              </a:spcAft>
+            </a:pPr>
+            <a:r>
+              <a:rPr sz="1650" b="0" lang="zh-CN">
+                <a:solidFill>
+                  <a:srgbClr val="1F2937"/>
+                </a:solidFill>
+                <a:latin typeface="Microsoft YaHei"/>
+                <a:ea typeface="Microsoft YaHei"/>
+              </a:rPr>
+              <a:t>增加 0.322s，约 +38.7%</a:t>
             </a:r>
           </a:p>
         </p:txBody>
       </p:sp>
       <p:cxnSp>
         <p:nvCxnSpPr>
-          <p:cNvPr id="17" name="Connector 16"/>
+          <p:cNvPr id="20" name="Connector 19"/>
           <p:cNvCxnSpPr/>
           <p:nvPr/>
         </p:nvCxnSpPr>
         <p:spPr>
           <a:xfrm>
-            <a:off x="609600" y="3067050"/>
+            <a:off x="609600" y="3209925"/>
             <a:ext cx="10972800" cy="0"/>
           </a:xfrm>
           <a:prstGeom prst="line">
@@ -19542,14 +18321,14 @@
       </p:cxnSp>
       <p:sp>
         <p:nvSpPr>
-          <p:cNvPr id="18" name="快速区间 DP"/>
+          <p:cNvPr id="21" name="程序总耗时（墙钟）"/>
           <p:cNvSpPr txBox="1"/>
           <p:nvPr/>
         </p:nvSpPr>
         <p:spPr>
           <a:xfrm>
-            <a:off x="742950" y="3181350"/>
-            <a:ext cx="2000250" cy="304800"/>
+            <a:off x="742950" y="3352800"/>
+            <a:ext cx="3009900" cy="323850"/>
           </a:xfrm>
           <a:prstGeom prst="rect">
             <a:avLst/>
@@ -19572,28 +18351,28 @@
               </a:spcAft>
             </a:pPr>
             <a:r>
-              <a:rPr sz="1500" b="1" lang="zh-CN">
+              <a:rPr sz="1650" b="0" lang="zh-CN">
                 <a:solidFill>
                   <a:srgbClr val="1F2937"/>
                 </a:solidFill>
                 <a:latin typeface="Microsoft YaHei"/>
                 <a:ea typeface="Microsoft YaHei"/>
               </a:rPr>
-              <a:t>快速区间 DP</a:t>
-            </a:r>
-          </a:p>
-        </p:txBody>
-      </p:sp>
-      <p:sp>
-        <p:nvSpPr>
-          <p:cNvPr id="19" name="O(nW log(W+1))：含所有者集合维护"/>
+              <a:t>程序总耗时（墙钟）</a:t>
+            </a:r>
+          </a:p>
+        </p:txBody>
+      </p:sp>
+      <p:sp>
+        <p:nvSpPr>
+          <p:cNvPr id="22" name="10.969s"/>
           <p:cNvSpPr txBox="1"/>
           <p:nvPr/>
         </p:nvSpPr>
         <p:spPr>
           <a:xfrm>
-            <a:off x="3009900" y="3181350"/>
-            <a:ext cx="4067175" cy="304800"/>
+            <a:off x="4019549" y="3352800"/>
+            <a:ext cx="1695450" cy="323850"/>
           </a:xfrm>
           <a:prstGeom prst="rect">
             <a:avLst/>
@@ -19616,28 +18395,28 @@
               </a:spcAft>
             </a:pPr>
             <a:r>
-              <a:rPr sz="1500" b="0" lang="zh-CN">
+              <a:rPr sz="1650" b="0" lang="zh-CN">
                 <a:solidFill>
                   <a:srgbClr val="1F2937"/>
                 </a:solidFill>
                 <a:latin typeface="Microsoft YaHei"/>
                 <a:ea typeface="Microsoft YaHei"/>
               </a:rPr>
-              <a:t>O(nW log(W+1))：含所有者集合维护</a:t>
-            </a:r>
-          </a:p>
-        </p:txBody>
-      </p:sp>
-      <p:sp>
-        <p:nvSpPr>
-          <p:cNvPr id="20" name="dp / prev / paths 为 O(n)"/>
+              <a:t>10.969s</a:t>
+            </a:r>
+          </a:p>
+        </p:txBody>
+      </p:sp>
+      <p:sp>
+        <p:nvSpPr>
+          <p:cNvPr id="23" name="9.393s"/>
           <p:cNvSpPr txBox="1"/>
           <p:nvPr/>
         </p:nvSpPr>
         <p:spPr>
           <a:xfrm>
-            <a:off x="7343775" y="3181350"/>
-            <a:ext cx="4105274" cy="304800"/>
+            <a:off x="5981700" y="3352800"/>
+            <a:ext cx="1790700" cy="323850"/>
           </a:xfrm>
           <a:prstGeom prst="rect">
             <a:avLst/>
@@ -19660,27 +18439,71 @@
               </a:spcAft>
             </a:pPr>
             <a:r>
-              <a:rPr sz="1500" b="0" lang="zh-CN">
+              <a:rPr sz="1650" b="1" lang="zh-CN">
+                <a:solidFill>
+                  <a:srgbClr val="285EA8"/>
+                </a:solidFill>
+                <a:latin typeface="Microsoft YaHei"/>
+                <a:ea typeface="Microsoft YaHei"/>
+              </a:rPr>
+              <a:t>9.393s</a:t>
+            </a:r>
+          </a:p>
+        </p:txBody>
+      </p:sp>
+      <p:sp>
+        <p:nvSpPr>
+          <p:cNvPr id="24" name="包含框架与读写，约 −14.4%"/>
+          <p:cNvSpPr txBox="1"/>
+          <p:nvPr/>
+        </p:nvSpPr>
+        <p:spPr>
+          <a:xfrm>
+            <a:off x="8039099" y="3352800"/>
+            <a:ext cx="3409950" cy="323850"/>
+          </a:xfrm>
+          <a:prstGeom prst="rect">
+            <a:avLst/>
+          </a:prstGeom>
+          <a:noFill/>
+          <a:effectLst/>
+        </p:spPr>
+        <p:txBody>
+          <a:bodyPr wrap="square" lIns="0" rIns="0" tIns="0" bIns="0">
+            <a:spAutoFit/>
+          </a:bodyPr>
+          <a:lstStyle/>
+          <a:p>
+            <a:pPr algn="l">
+              <a:lnSpc>
+                <a:spcPct val="112000"/>
+              </a:lnSpc>
+              <a:spcAft>
+                <a:spcPts val="500"/>
+              </a:spcAft>
+            </a:pPr>
+            <a:r>
+              <a:rPr sz="1650" b="0" lang="zh-CN">
                 <a:solidFill>
                   <a:srgbClr val="1F2937"/>
                 </a:solidFill>
                 <a:latin typeface="Microsoft YaHei"/>
                 <a:ea typeface="Microsoft YaHei"/>
               </a:rPr>
-              <a:t>dp / prev / paths 为 O(n)</a:t>
+              <a:t>包含框架与读写，约 −14.4%</a:t>
             </a:r>
           </a:p>
         </p:txBody>
       </p:sp>
       <p:cxnSp>
         <p:nvCxnSpPr>
-          <p:cNvPr id="21" name="Connector 20"/>
+          <p:cNvPr id="25" name="Connector 24"/>
           <p:cNvCxnSpPr/>
           <p:nvPr/>
         </p:nvCxnSpPr>
         <p:spPr>
           <a:xfrm>
-            <a:off x="609600" y="3524250"/>
+            <a:off x="609600" y="3762374"/>
             <a:ext cx="10972800" cy="0"/>
           </a:xfrm>
           <a:prstGeom prst="line">
@@ -19710,14 +18533,14 @@
       </p:cxnSp>
       <p:sp>
         <p:nvSpPr>
-          <p:cNvPr id="22" name="固定 cnt 的 DP"/>
+          <p:cNvPr id="26" name="策略堆峰值"/>
           <p:cNvSpPr txBox="1"/>
           <p:nvPr/>
         </p:nvSpPr>
         <p:spPr>
           <a:xfrm>
-            <a:off x="742950" y="3638550"/>
-            <a:ext cx="2000250" cy="304800"/>
+            <a:off x="742950" y="3905249"/>
+            <a:ext cx="3009900" cy="323850"/>
           </a:xfrm>
           <a:prstGeom prst="rect">
             <a:avLst/>
@@ -19740,28 +18563,28 @@
               </a:spcAft>
             </a:pPr>
             <a:r>
-              <a:rPr sz="1500" b="1" lang="zh-CN">
+              <a:rPr sz="1650" b="0" lang="zh-CN">
                 <a:solidFill>
                   <a:srgbClr val="1F2937"/>
                 </a:solidFill>
                 <a:latin typeface="Microsoft YaHei"/>
                 <a:ea typeface="Microsoft YaHei"/>
               </a:rPr>
-              <a:t>固定 cnt 的 DP</a:t>
-            </a:r>
-          </a:p>
-        </p:txBody>
-      </p:sp>
-      <p:sp>
-        <p:nvSpPr>
-          <p:cNvPr id="23" name="最坏 O(cnt × n × W)"/>
+              <a:t>策略堆峰值</a:t>
+            </a:r>
+          </a:p>
+        </p:txBody>
+      </p:sp>
+      <p:sp>
+        <p:nvSpPr>
+          <p:cNvPr id="27" name="12.90MiB"/>
           <p:cNvSpPr txBox="1"/>
           <p:nvPr/>
         </p:nvSpPr>
         <p:spPr>
           <a:xfrm>
-            <a:off x="3009900" y="3638550"/>
-            <a:ext cx="4067175" cy="304800"/>
+            <a:off x="4019549" y="3905249"/>
+            <a:ext cx="1695450" cy="323850"/>
           </a:xfrm>
           <a:prstGeom prst="rect">
             <a:avLst/>
@@ -19784,28 +18607,28 @@
               </a:spcAft>
             </a:pPr>
             <a:r>
-              <a:rPr sz="1500" b="0" lang="zh-CN">
+              <a:rPr sz="1650" b="0" lang="zh-CN">
                 <a:solidFill>
                   <a:srgbClr val="1F2937"/>
                 </a:solidFill>
                 <a:latin typeface="Microsoft YaHei"/>
                 <a:ea typeface="Microsoft YaHei"/>
               </a:rPr>
-              <a:t>最坏 O(cnt × n × W)</a:t>
-            </a:r>
-          </a:p>
-        </p:txBody>
-      </p:sp>
-      <p:sp>
-        <p:nvSpPr>
-          <p:cNvPr id="24" name="状态 O(cnt × n)，合法边 O(nW)"/>
+              <a:t>12.90MiB</a:t>
+            </a:r>
+          </a:p>
+        </p:txBody>
+      </p:sp>
+      <p:sp>
+        <p:nvSpPr>
+          <p:cNvPr id="28" name="12.34MiB"/>
           <p:cNvSpPr txBox="1"/>
           <p:nvPr/>
         </p:nvSpPr>
         <p:spPr>
           <a:xfrm>
-            <a:off x="7343775" y="3638550"/>
-            <a:ext cx="4105274" cy="304800"/>
+            <a:off x="5981700" y="3905249"/>
+            <a:ext cx="1790700" cy="323850"/>
           </a:xfrm>
           <a:prstGeom prst="rect">
             <a:avLst/>
@@ -19828,27 +18651,71 @@
               </a:spcAft>
             </a:pPr>
             <a:r>
-              <a:rPr sz="1500" b="0" lang="zh-CN">
+              <a:rPr sz="1650" b="1" lang="zh-CN">
+                <a:solidFill>
+                  <a:srgbClr val="285EA8"/>
+                </a:solidFill>
+                <a:latin typeface="Microsoft YaHei"/>
+                <a:ea typeface="Microsoft YaHei"/>
+              </a:rPr>
+              <a:t>12.34MiB</a:t>
+            </a:r>
+          </a:p>
+        </p:txBody>
+      </p:sp>
+      <p:sp>
+        <p:nvSpPr>
+          <p:cNvPr id="29" name="仅统计策略堆分配"/>
+          <p:cNvSpPr txBox="1"/>
+          <p:nvPr/>
+        </p:nvSpPr>
+        <p:spPr>
+          <a:xfrm>
+            <a:off x="8039099" y="3905249"/>
+            <a:ext cx="3409950" cy="323850"/>
+          </a:xfrm>
+          <a:prstGeom prst="rect">
+            <a:avLst/>
+          </a:prstGeom>
+          <a:noFill/>
+          <a:effectLst/>
+        </p:spPr>
+        <p:txBody>
+          <a:bodyPr wrap="square" lIns="0" rIns="0" tIns="0" bIns="0">
+            <a:spAutoFit/>
+          </a:bodyPr>
+          <a:lstStyle/>
+          <a:p>
+            <a:pPr algn="l">
+              <a:lnSpc>
+                <a:spcPct val="112000"/>
+              </a:lnSpc>
+              <a:spcAft>
+                <a:spcPts val="500"/>
+              </a:spcAft>
+            </a:pPr>
+            <a:r>
+              <a:rPr sz="1650" b="0" lang="zh-CN">
                 <a:solidFill>
                   <a:srgbClr val="1F2937"/>
                 </a:solidFill>
                 <a:latin typeface="Microsoft YaHei"/>
                 <a:ea typeface="Microsoft YaHei"/>
               </a:rPr>
-              <a:t>状态 O(cnt × n)，合法边 O(nW)</a:t>
+              <a:t>仅统计策略堆分配</a:t>
             </a:r>
           </a:p>
         </p:txBody>
       </p:sp>
       <p:cxnSp>
         <p:nvCxnSpPr>
-          <p:cNvPr id="25" name="Connector 24"/>
+          <p:cNvPr id="30" name="Connector 29"/>
           <p:cNvCxnSpPr/>
           <p:nvPr/>
         </p:nvCxnSpPr>
         <p:spPr>
           <a:xfrm>
-            <a:off x="609600" y="3981450"/>
+            <a:off x="609600" y="4314825"/>
             <a:ext cx="10972800" cy="0"/>
           </a:xfrm>
           <a:prstGeom prst="line">
@@ -19878,14 +18745,14 @@
       </p:cxnSp>
       <p:sp>
         <p:nvSpPr>
-          <p:cNvPr id="26" name="映射与输出"/>
+          <p:cNvPr id="31" name="进程峰值内存（RSS）"/>
           <p:cNvSpPr txBox="1"/>
           <p:nvPr/>
         </p:nvSpPr>
         <p:spPr>
           <a:xfrm>
-            <a:off x="742950" y="4095750"/>
-            <a:ext cx="2000250" cy="304800"/>
+            <a:off x="742950" y="4457700"/>
+            <a:ext cx="3009900" cy="323850"/>
           </a:xfrm>
           <a:prstGeom prst="rect">
             <a:avLst/>
@@ -19908,28 +18775,28 @@
               </a:spcAft>
             </a:pPr>
             <a:r>
-              <a:rPr sz="1500" b="1" lang="zh-CN">
+              <a:rPr sz="1650" b="0" lang="zh-CN">
                 <a:solidFill>
                   <a:srgbClr val="1F2937"/>
                 </a:solidFill>
                 <a:latin typeface="Microsoft YaHei"/>
                 <a:ea typeface="Microsoft YaHei"/>
               </a:rPr>
-              <a:t>映射与输出</a:t>
-            </a:r>
-          </a:p>
-        </p:txBody>
-      </p:sp>
-      <p:sp>
-        <p:nvSpPr>
-          <p:cNvPr id="27" name="约 O(n log Vmax + L)"/>
+              <a:t>进程峰值内存（RSS）</a:t>
+            </a:r>
+          </a:p>
+        </p:txBody>
+      </p:sp>
+      <p:sp>
+        <p:nvSpPr>
+          <p:cNvPr id="32" name="393.78MiB"/>
           <p:cNvSpPr txBox="1"/>
           <p:nvPr/>
         </p:nvSpPr>
         <p:spPr>
           <a:xfrm>
-            <a:off x="3009900" y="4095750"/>
-            <a:ext cx="4067175" cy="304800"/>
+            <a:off x="4019549" y="4457700"/>
+            <a:ext cx="1695450" cy="323850"/>
           </a:xfrm>
           <a:prstGeom prst="rect">
             <a:avLst/>
@@ -19952,28 +18819,28 @@
               </a:spcAft>
             </a:pPr>
             <a:r>
-              <a:rPr sz="1500" b="0" lang="zh-CN">
+              <a:rPr sz="1650" b="0" lang="zh-CN">
                 <a:solidFill>
                   <a:srgbClr val="1F2937"/>
                 </a:solidFill>
                 <a:latin typeface="Microsoft YaHei"/>
                 <a:ea typeface="Microsoft YaHei"/>
               </a:rPr>
-              <a:t>约 O(n log Vmax + L)</a:t>
-            </a:r>
-          </a:p>
-        </p:txBody>
-      </p:sp>
-      <p:sp>
-        <p:nvSpPr>
-          <p:cNvPr id="28" name="O(L)，L 为片段与目标 iov 的交集数"/>
+              <a:t>393.78MiB</a:t>
+            </a:r>
+          </a:p>
+        </p:txBody>
+      </p:sp>
+      <p:sp>
+        <p:nvSpPr>
+          <p:cNvPr id="33" name="262.53MiB"/>
           <p:cNvSpPr txBox="1"/>
           <p:nvPr/>
         </p:nvSpPr>
         <p:spPr>
           <a:xfrm>
-            <a:off x="7343775" y="4095750"/>
-            <a:ext cx="4105274" cy="304800"/>
+            <a:off x="5981700" y="4457700"/>
+            <a:ext cx="1790700" cy="323850"/>
           </a:xfrm>
           <a:prstGeom prst="rect">
             <a:avLst/>
@@ -19996,27 +18863,71 @@
               </a:spcAft>
             </a:pPr>
             <a:r>
-              <a:rPr sz="1500" b="0" lang="zh-CN">
+              <a:rPr sz="1650" b="1" lang="zh-CN">
+                <a:solidFill>
+                  <a:srgbClr val="285EA8"/>
+                </a:solidFill>
+                <a:latin typeface="Microsoft YaHei"/>
+                <a:ea typeface="Microsoft YaHei"/>
+              </a:rPr>
+              <a:t>262.53MiB</a:t>
+            </a:r>
+          </a:p>
+        </p:txBody>
+      </p:sp>
+      <p:sp>
+        <p:nvSpPr>
+          <p:cNvPr id="34" name="包含框架、输入输出等进程内存"/>
+          <p:cNvSpPr txBox="1"/>
+          <p:nvPr/>
+        </p:nvSpPr>
+        <p:spPr>
+          <a:xfrm>
+            <a:off x="8039099" y="4457700"/>
+            <a:ext cx="3409950" cy="323850"/>
+          </a:xfrm>
+          <a:prstGeom prst="rect">
+            <a:avLst/>
+          </a:prstGeom>
+          <a:noFill/>
+          <a:effectLst/>
+        </p:spPr>
+        <p:txBody>
+          <a:bodyPr wrap="square" lIns="0" rIns="0" tIns="0" bIns="0">
+            <a:spAutoFit/>
+          </a:bodyPr>
+          <a:lstStyle/>
+          <a:p>
+            <a:pPr algn="l">
+              <a:lnSpc>
+                <a:spcPct val="112000"/>
+              </a:lnSpc>
+              <a:spcAft>
+                <a:spcPts val="500"/>
+              </a:spcAft>
+            </a:pPr>
+            <a:r>
+              <a:rPr sz="1650" b="0" lang="zh-CN">
                 <a:solidFill>
                   <a:srgbClr val="1F2937"/>
                 </a:solidFill>
                 <a:latin typeface="Microsoft YaHei"/>
                 <a:ea typeface="Microsoft YaHei"/>
               </a:rPr>
-              <a:t>O(L)，L 为片段与目标 iov 的交集数</a:t>
+              <a:t>包含框架、输入输出等进程内存</a:t>
             </a:r>
           </a:p>
         </p:txBody>
       </p:sp>
       <p:cxnSp>
         <p:nvCxnSpPr>
-          <p:cNvPr id="29" name="Connector 28"/>
+          <p:cNvPr id="35" name="Connector 34"/>
           <p:cNvCxnSpPr/>
           <p:nvPr/>
         </p:nvCxnSpPr>
         <p:spPr>
           <a:xfrm>
-            <a:off x="609600" y="4438650"/>
+            <a:off x="609600" y="4867275"/>
             <a:ext cx="10972800" cy="0"/>
           </a:xfrm>
           <a:prstGeom prst="line">
@@ -20046,14 +18957,14 @@
       </p:cxnSp>
       <p:sp>
         <p:nvSpPr>
-          <p:cNvPr id="30" name="后台同步 / 扫描"/>
+          <p:cNvPr id="36" name="联合规划增加了策略计算开销；程序总耗时更短，并不代表调度计算本身更快。"/>
           <p:cNvSpPr txBox="1"/>
           <p:nvPr/>
         </p:nvSpPr>
         <p:spPr>
           <a:xfrm>
-            <a:off x="742950" y="4552950"/>
-            <a:ext cx="2000250" cy="304800"/>
+            <a:off x="609600" y="5133975"/>
+            <a:ext cx="10972800" cy="314325"/>
           </a:xfrm>
           <a:prstGeom prst="rect">
             <a:avLst/>
@@ -20076,28 +18987,28 @@
               </a:spcAft>
             </a:pPr>
             <a:r>
-              <a:rPr sz="1500" b="1" lang="zh-CN">
-                <a:solidFill>
-                  <a:srgbClr val="1F2937"/>
-                </a:solidFill>
-                <a:latin typeface="Microsoft YaHei"/>
-                <a:ea typeface="Microsoft YaHei"/>
-              </a:rPr>
-              <a:t>后台同步 / 扫描</a:t>
-            </a:r>
-          </a:p>
-        </p:txBody>
-      </p:sp>
-      <p:sp>
-        <p:nvSpPr>
-          <p:cNvPr id="31" name="O(R log(R+1)+A)，另有状态查表"/>
+              <a:rPr sz="1875" b="1" lang="zh-CN">
+                <a:solidFill>
+                  <a:srgbClr val="285EA8"/>
+                </a:solidFill>
+                <a:latin typeface="Microsoft YaHei"/>
+                <a:ea typeface="Microsoft YaHei"/>
+              </a:rPr>
+              <a:t>联合规划增加了策略计算开销；程序总耗时更短，并不代表调度计算本身更快。</a:t>
+            </a:r>
+          </a:p>
+        </p:txBody>
+      </p:sp>
+      <p:sp>
+        <p:nvSpPr>
+          <p:cNvPr id="37" name="本机秒数与 J 中的模拟搬运时间分开统计。内存取三轮中的峰值；程序总耗时不含编译、 预热与独立 validator。环境：AMD EPYC 9575F，固定 CPU 8，g++ 13.3 / -O2。"/>
           <p:cNvSpPr txBox="1"/>
           <p:nvPr/>
         </p:nvSpPr>
         <p:spPr>
           <a:xfrm>
-            <a:off x="3009900" y="4552950"/>
-            <a:ext cx="4067175" cy="304800"/>
+            <a:off x="609600" y="5610225"/>
+            <a:ext cx="10972800" cy="523874"/>
           </a:xfrm>
           <a:prstGeom prst="rect">
             <a:avLst/>
@@ -20120,40 +19031,16 @@
               </a:spcAft>
             </a:pPr>
             <a:r>
-              <a:rPr sz="1500" b="0" lang="zh-CN">
-                <a:solidFill>
-                  <a:srgbClr val="1F2937"/>
-                </a:solidFill>
-                <a:latin typeface="Microsoft YaHei"/>
-                <a:ea typeface="Microsoft YaHei"/>
-              </a:rPr>
-              <a:t>O(R log(R+1)+A)，另有状态查表</a:t>
-            </a:r>
-          </a:p>
-        </p:txBody>
-      </p:sp>
-      <p:sp>
-        <p:nvSpPr>
-          <p:cNvPr id="32" name="临时 O(R)，持久 O(H+U+R)"/>
-          <p:cNvSpPr txBox="1"/>
-          <p:nvPr/>
-        </p:nvSpPr>
-        <p:spPr>
-          <a:xfrm>
-            <a:off x="7343775" y="4552950"/>
-            <a:ext cx="4105274" cy="304800"/>
-          </a:xfrm>
-          <a:prstGeom prst="rect">
-            <a:avLst/>
-          </a:prstGeom>
-          <a:noFill/>
-          <a:effectLst/>
-        </p:spPr>
-        <p:txBody>
-          <a:bodyPr wrap="square" lIns="0" rIns="0" tIns="0" bIns="0">
-            <a:spAutoFit/>
-          </a:bodyPr>
-          <a:lstStyle/>
+              <a:rPr sz="1575" b="0" lang="zh-CN">
+                <a:solidFill>
+                  <a:srgbClr val="657184"/>
+                </a:solidFill>
+                <a:latin typeface="Microsoft YaHei"/>
+                <a:ea typeface="Microsoft YaHei"/>
+              </a:rPr>
+              <a:t>本机秒数与 J 中的模拟搬运时间分开统计。内存取三轮中的峰值；程序总耗时不含编译、</a:t>
+            </a:r>
+          </a:p>
           <a:p>
             <a:pPr algn="l">
               <a:lnSpc>
@@ -20164,130 +19051,6 @@
               </a:spcAft>
             </a:pPr>
             <a:r>
-              <a:rPr sz="1500" b="0" lang="zh-CN">
-                <a:solidFill>
-                  <a:srgbClr val="1F2937"/>
-                </a:solidFill>
-                <a:latin typeface="Microsoft YaHei"/>
-                <a:ea typeface="Microsoft YaHei"/>
-              </a:rPr>
-              <a:t>临时 O(R)，持久 O(H+U+R)</a:t>
-            </a:r>
-          </a:p>
-        </p:txBody>
-      </p:sp>
-      <p:cxnSp>
-        <p:nvCxnSpPr>
-          <p:cNvPr id="33" name="Connector 32"/>
-          <p:cNvCxnSpPr/>
-          <p:nvPr/>
-        </p:nvCxnSpPr>
-        <p:spPr>
-          <a:xfrm>
-            <a:off x="609600" y="4895850"/>
-            <a:ext cx="10972800" cy="0"/>
-          </a:xfrm>
-          <a:prstGeom prst="line">
-            <a:avLst/>
-          </a:prstGeom>
-          <a:ln w="12700">
-            <a:solidFill>
-              <a:srgbClr val="DCE2E9"/>
-            </a:solidFill>
-          </a:ln>
-          <a:effectLst/>
-        </p:spPr>
-        <p:style>
-          <a:lnRef idx="2">
-            <a:schemeClr val="accent1"/>
-          </a:lnRef>
-          <a:fillRef idx="0">
-            <a:schemeClr val="accent1"/>
-          </a:fillRef>
-          <a:effectRef idx="0">
-            <a:schemeClr val="accent1"/>
-          </a:effectRef>
-          <a:fontRef idx="minor">
-            <a:schemeClr val="tx1"/>
-          </a:fontRef>
-        </p:style>
-      </p:cxnSp>
-      <p:sp>
-        <p:nvSpPr>
-          <p:cNvPr id="34" name="计数搜索：单次至多 131072 个存储状态；每批共享 200 万次边估价 / 转移预算。"/>
-          <p:cNvSpPr txBox="1"/>
-          <p:nvPr/>
-        </p:nvSpPr>
-        <p:spPr>
-          <a:xfrm>
-            <a:off x="609600" y="5067300"/>
-            <a:ext cx="10972800" cy="295275"/>
-          </a:xfrm>
-          <a:prstGeom prst="rect">
-            <a:avLst/>
-          </a:prstGeom>
-          <a:noFill/>
-          <a:effectLst/>
-        </p:spPr>
-        <p:txBody>
-          <a:bodyPr wrap="square" lIns="0" rIns="0" tIns="0" bIns="0">
-            <a:spAutoFit/>
-          </a:bodyPr>
-          <a:lstStyle/>
-          <a:p>
-            <a:pPr algn="l">
-              <a:lnSpc>
-                <a:spcPct val="112000"/>
-              </a:lnSpc>
-              <a:spcAft>
-                <a:spcPts val="500"/>
-              </a:spcAft>
-            </a:pPr>
-            <a:r>
-              <a:rPr sz="1800" b="1" lang="zh-CN">
-                <a:solidFill>
-                  <a:srgbClr val="285EA8"/>
-                </a:solidFill>
-                <a:latin typeface="Microsoft YaHei"/>
-                <a:ea typeface="Microsoft YaHei"/>
-              </a:rPr>
-              <a:t>计数搜索：单次至多 131072 个存储状态；每批共享 200 万次边估价 / 转移预算。</a:t>
-            </a:r>
-          </a:p>
-        </p:txBody>
-      </p:sp>
-      <p:sp>
-        <p:nvSpPr>
-          <p:cNvPr id="35" name="R / A = 在途提升 / 活动传输数；H / U = 历史记录 / 未完成请求数（历史含更新队列）。 预算不覆盖全部预检查、输入与输出开销；输入索引和未完成请求增长时，总内存仍会增长。"/>
-          <p:cNvSpPr txBox="1"/>
-          <p:nvPr/>
-        </p:nvSpPr>
-        <p:spPr>
-          <a:xfrm>
-            <a:off x="609600" y="5534025"/>
-            <a:ext cx="10972800" cy="533400"/>
-          </a:xfrm>
-          <a:prstGeom prst="rect">
-            <a:avLst/>
-          </a:prstGeom>
-          <a:noFill/>
-          <a:effectLst/>
-        </p:spPr>
-        <p:txBody>
-          <a:bodyPr wrap="square" lIns="0" rIns="0" tIns="0" bIns="0">
-            <a:spAutoFit/>
-          </a:bodyPr>
-          <a:lstStyle/>
-          <a:p>
-            <a:pPr algn="l">
-              <a:lnSpc>
-                <a:spcPct val="112000"/>
-              </a:lnSpc>
-              <a:spcAft>
-                <a:spcPts val="500"/>
-              </a:spcAft>
-            </a:pPr>
-            <a:r>
               <a:rPr sz="1575" b="0" lang="zh-CN">
                 <a:solidFill>
                   <a:srgbClr val="657184"/>
@@ -20295,27 +19058,7 @@
                 <a:latin typeface="Microsoft YaHei"/>
                 <a:ea typeface="Microsoft YaHei"/>
               </a:rPr>
-              <a:t>R / A = 在途提升 / 活动传输数；H / U = 历史记录 / 未完成请求数（历史含更新队列）。</a:t>
-            </a:r>
-          </a:p>
-          <a:p>
-            <a:pPr algn="l">
-              <a:lnSpc>
-                <a:spcPct val="112000"/>
-              </a:lnSpc>
-              <a:spcAft>
-                <a:spcPts val="500"/>
-              </a:spcAft>
-            </a:pPr>
-            <a:r>
-              <a:rPr sz="1575" b="0" lang="zh-CN">
-                <a:solidFill>
-                  <a:srgbClr val="657184"/>
-                </a:solidFill>
-                <a:latin typeface="Microsoft YaHei"/>
-                <a:ea typeface="Microsoft YaHei"/>
-              </a:rPr>
-              <a:t>预算不覆盖全部预检查、输入与输出开销；输入索引和未完成请求增长时，总内存仍会增长。</a:t>
+              <a:t>预热与独立 validator。环境：AMD EPYC 9575F，固定 CPU 8，g++ 13.3 / -O2。</a:t>
             </a:r>
           </a:p>
         </p:txBody>

--- a/submissions/kaisennhu/07_答辩PPT/答辩介绍.pptx
+++ b/submissions/kaisennhu/07_答辩PPT/答辩介绍.pptx
@@ -652,7 +652,7 @@
           <a:lstStyle/>
           <a:p>
             <a:r>
-              <a:t>真实请求命中率=cache_hits/198542个请求，不使用engine的promote_hit_rate：该字段实际是promote_success/promote_count，只代表成功入池率。命中字节从未进入schedule_decisions的请求长度求和，和官方cache_hits计数交叉核验；它是缓存服务的逻辑字节，不能直接当成节省的物理SSD字节。提升搬运字节3.615GiB→0.305GiB，调用费722994→24676；命中复制仍付费81662→16806。缓存净收益对双方各自前台策略做关闭PROMOTE对照；保留其他参数及前台代码，计入缓存改变资源竞争、命中和后续选路的联动，是完整Trace净效应而非单次命中的价格。baseline关闭/启用总J3686550/3581641，净贡献104909；本方案2344079/2273874，净贡献70205。启用缓存相对关闭缓存：双方均6例正收益；贪心17例负收益，本方案2例负收益，其余持平。不能据绝对贡献较小声称缓存模块独立胜过贪心：更便宜的前台减少了可被缓存替代的成本。总J节省1307767可按官方计费恒等式拆为前台调用费408197、提升调用费698318、命中调用费64856、模拟时间费136396，费用拆分不是独立因果消融。39×双方×开关=156次运行均通过官方validator；单次测确定性成本，不产生新的墙钟速度结论。所有原启用版本输出哈希与已有三轮记录一致。扩展退化和极端碎片1.58GiB边界仍见验证报告。</a:t>
+              <a:t>本页两张主图都是正常启用缓存的两套完整方案直接比较，同组39条公开Trace，各自从零起算、组内共享同一比例，费用越低越好；不混入关闭缓存的消融。后台总调用费=提升CPU/NPU费+框架命中H2D调用费：贪心722994+81662=804656，本方案24676+16806=41482，下降94.8447535%。该值不含前台调用费，也不含模拟搬运时间费，不称为整个后台J。平均每次命中的调用费=整条Trace汇总后台调用费/真实命中请求数；804656/40831=19.7069873，本方案41482/8403=4.93657027，下降74.9501525%。这是把所有提升投入（含最终没有命中的提升）和命中调用费摊到总命中数上的比值，包含准入选择的效果，不是单次命中固有单价。官方单次命中调用收费两者均为2，算法没有降低这一收费。每次提升的平均命中数=40831/8817=4.63094与8403/301=27.91694，后者6.02835倍。两项均为完整Trace的汇总效率，不代表单个对象必命中27.92次，不是同尺寸、同缓存内容的受控模块对照。请求总数相同198542，命中率20.57%→4.23%；提升次数与命中数均在页脚公开。选更少的缓存对象、保留更集中复用，是对总计数的解释，不声称每道门槛的独立因果贡献。high_mixed可直接核验：贪心3566次提升、提升调用费292412、命中0；本方案均0。全Trace J530416→174066还有前台变化，不能全算缓存收益。提升调用费单项下降96.59%，提升搬运字节3881057800→327938527，下降91.55%。补充消融与主图分开：双方各自保留前台，仅关闭PROMOTE，贪心J3686550→3581641，缓存净贡献104909；本方案2344079→2273874，缓存净贡献70205。绝对命中量和缓存净贡献较小，不能声称缓存模块在同一前台下收益更大。消融双方各6例正收益，贪心17例负收益、本方案2例；这不表示相对baseline退化。06_reuse_hot：本方案开/关36356/36302，baseline41233；mid_reuse：88409/87179，baseline185453。完整方案分别优于baseline11.83%、52.33%。公开39条35胜4平0负；扩展292条96条退化，详见报告。所有数据由已提交CSV聚合，算法与原始性能记录不变。</a:t>
             </a:r>
           </a:p>
         </p:txBody>
@@ -932,7 +932,7 @@
           <a:lstStyle/>
           <a:p>
             <a:r>
-              <a:t>本页五次点击按执行顺序展开同一输入的代码和数值：1初始化，2联合枚举与组估价，3更新前缀和前驱，4细化 DP，5回溯与官方结果。代码为半开区间伪代码，源码把终点写成j+1。三个源区间[0,512)、[512,1024)、[1024,1536)，目标同卡且分别对齐，不必彼此连续。每条边表示一组片段加一条路径，两阶段均联合选边界和路径。快速DP先以3个片段/3个卡上请求估计qs=qc=3；本例time_cost_per_us=1、池空压力系数为1。读工作1536/(21504×2%×2^20)×10^6=3.40597970145μs；D2D按20×qc MiB/s估计，所以qc=3时复制24.4140625μs；H2D估计7.15255737305μs。三路径调用费分别2、5、12，故表中E是5.40597970145、32.8200422015、22.5585370745。显示值保留3位小数，不应当作实际J。dp[1]=3.135326567、dp[2]=4.270653134；两组的最优累计估价7.40597970145高于整组5.40597970145。细化 DP是同一分组问题增加组数维度：D[h][j]为前j段恰好h组的最低估价，固定cnt后重估带宽，最终看D[cnt][n]。其作用是控制搜索开销，同时缓解组数与并发互相依赖。系统保守空闲、规模及预算允许才运行；qs=active_ssd+cnt，复制并发按快速方案的卡号/类型比例估计，不等于统一取cnt。此例快速方案全DIRECT，细化阶段候选复制qc=1，所以整组AGGREGATE会重算为81.6481672015；不能继续使用快速表内32.820。本例按代码实际尝试顺序cnt=1、3、2，最低E分别5.40597970145、9.40597970145、7.40597970145，页面按组数升序展示。回溯后检验所有NDS请求槽位与两类缓冲池总量，按通过候选中的最低估价选计划，无通过候选则保留快速方案。条件、状态上限和200万预算详见算法文档及复杂度页。这不是精确全Trace最优，DP不规划未来、不决定PROMOTE，也不模拟执行中的队列和流水。最终一个DIRECT传输覆盖三个请求，官方实际Trace时间ceil(3.40597970145)=4μs、CPU=2、NPU=0、J=6；三个分别DIRECT则T=4μs、调用费6、J=10。该例已重新记录所有候选和细化DP终值，输出与原示例逐字节一致，并通过官方validator。</a:t>
+              <a:t>讲解顺序是同一前台规划的三个串行步骤，不是两个互相投票的独立算法。快速DP每批必运行：用片段数与卡上请求数作为初始负载代理，对合法的分组加路径候选求一维前缀最小值，输出完整基础方案。细化DP不是只给原方案打分，也不是只改变路径：它复用同一合法候选边集合，从基础方案读取组数与卡号/复制类型比例，在固定候选总组数cnt后重新求解D[h][j]，可同时改变分组和路径。cnt影响SSD估价并发；复制估价按基础方案的各卡/类型占比计算，并按对应上限处理。为何有两阶段：分组影响并发，而并发影响估价；基础方案提供复制分布，有限细化缓解该相互依赖，避免每批进行高维全量搜索。细化入口要求无活动传输、排队、在途提升、占槽或旧未完成请求；最多1024请求、2048 iov、16384片段，基础方案最多2048操作。合法边至多262144，单次存储状态至多131072，共享200万估价/转移预算；具体预检查与回溯另计。每个cnt回溯后检查总槽位和两类临时池容量。最终选通过检查且完成求解的细化候选中估价最低者；无可用候选则保留基础方案。代码不将快速E和细化E直接比较，也不保证细化后的真实J必降。DP只处理当前未命中的合法连续片段，每起点最多向后看128片段，不规划未来、不决定PROMOTE。五次点击依次显示基础规划、细化、输出选择、更新公式与数值示例、实际结果。三个源区间[0,512)、[512,1024)、[1024,1536)，目标同卡且分别对齐。快速阶段qs=qc=3，整组D/A/F的E为5.406/32.820/22.559；快速dp[1/2/3]=3.135/4.271/5.406。细化时基础方案全DIRECT，复制估价q=1，因此整组AGGREGATE E重算为81.648，不能沿用快速阶段数值。页面只展示同一细化阶段内可比的最终候选：1/2/3组最低E为5.406/7.406/9.406，均由DIRECT取得；代码实际尝试顺序1、3、2。最终读工作3.4059797微秒，Trace时间向上取整为4微秒，调用费2，官方J=6；分别读3次时T=4、调用费6、J=10。已核验输入、估价及官方输出；放映不运行C++。</a:t>
             </a:r>
           </a:p>
         </p:txBody>
@@ -5964,7 +5964,7 @@
       </p:sp>
       <p:sp>
         <p:nvSpPr>
-          <p:cNvPr id="3" name="后台：显著减少提升投入，保留正的缓存净收益"/>
+          <p:cNvPr id="3" name="后台：总调用费更少，每次命中分摊的投入更低"/>
           <p:cNvSpPr txBox="1"/>
           <p:nvPr/>
         </p:nvSpPr>
@@ -6001,14 +6001,14 @@
                 <a:latin typeface="Microsoft YaHei"/>
                 <a:ea typeface="Microsoft YaHei"/>
               </a:rPr>
-              <a:t>后台：显著减少提升投入，保留正的缓存净收益</a:t>
-            </a:r>
-          </a:p>
-        </p:txBody>
-      </p:sp>
-      <p:sp>
-        <p:nvSpPr>
-          <p:cNvPr id="4" name="缓存净收益 ΔJ = 各自关闭 PROMOTE 的 J − 启用时的 J；正值表示收益。39 条分别回放后求和。"/>
+              <a:t>后台：总调用费更少，每次命中分摊的投入更低</a:t>
+            </a:r>
+          </a:p>
+        </p:txBody>
+      </p:sp>
+      <p:sp>
+        <p:nvSpPr>
+          <p:cNvPr id="4" name="39 条公开 Trace，双方均启用缓存；后台调用费 = PROMOTE 调用费 + 命中复制调用费。"/>
           <p:cNvSpPr txBox="1"/>
           <p:nvPr/>
         </p:nvSpPr>
@@ -6045,7 +6045,7 @@
                 <a:latin typeface="Microsoft YaHei"/>
                 <a:ea typeface="Microsoft YaHei"/>
               </a:rPr>
-              <a:t>缓存净收益 ΔJ = 各自关闭 PROMOTE 的 J − 启用时的 J；正值表示收益。39 条分别回放后求和。</a:t>
+              <a:t>39 条公开 Trace，双方均启用缓存；后台调用费 = PROMOTE 调用费 + 命中复制调用费。</a:t>
             </a:r>
           </a:p>
         </p:txBody>
@@ -6176,14 +6176,58 @@
       </p:sp>
       <p:sp>
         <p:nvSpPr>
-          <p:cNvPr id="8" name="提升 CPU + NPU 调用费"/>
+          <p:cNvPr id="8" name="Rectangle 7"/>
+          <p:cNvSpPr/>
+          <p:nvPr/>
+        </p:nvSpPr>
+        <p:spPr>
+          <a:xfrm>
+            <a:off x="609600" y="2085975"/>
+            <a:ext cx="5238750" cy="2867025"/>
+          </a:xfrm>
+          <a:prstGeom prst="rect">
+            <a:avLst/>
+          </a:prstGeom>
+          <a:solidFill>
+            <a:srgbClr val="F3F8F6"/>
+          </a:solidFill>
+          <a:ln>
+            <a:noFill/>
+          </a:ln>
+          <a:effectLst/>
+        </p:spPr>
+        <p:style>
+          <a:lnRef idx="1">
+            <a:schemeClr val="accent1"/>
+          </a:lnRef>
+          <a:fillRef idx="3">
+            <a:schemeClr val="accent1"/>
+          </a:fillRef>
+          <a:effectRef idx="0">
+            <a:schemeClr val="accent1"/>
+          </a:effectRef>
+          <a:fontRef idx="minor">
+            <a:schemeClr val="lt1"/>
+          </a:fontRef>
+        </p:style>
+        <p:txBody>
+          <a:bodyPr rtlCol="0" anchor="ctr"/>
+          <a:lstStyle/>
+          <a:p>
+            <a:pPr algn="ctr"/>
+          </a:p>
+        </p:txBody>
+      </p:sp>
+      <p:sp>
+        <p:nvSpPr>
+          <p:cNvPr id="9" name="39 条累计后台调用费"/>
           <p:cNvSpPr txBox="1"/>
           <p:nvPr/>
         </p:nvSpPr>
         <p:spPr>
           <a:xfrm>
-            <a:off x="609600" y="2124075"/>
-            <a:ext cx="3352800" cy="314325"/>
+            <a:off x="800100" y="2219325"/>
+            <a:ext cx="4857750" cy="314325"/>
           </a:xfrm>
           <a:prstGeom prst="rect">
             <a:avLst/>
@@ -6206,28 +6250,28 @@
               </a:spcAft>
             </a:pPr>
             <a:r>
-              <a:rPr sz="1950" b="1" lang="zh-CN">
+              <a:rPr sz="2025" b="1" lang="zh-CN">
                 <a:solidFill>
                   <a:srgbClr val="24756D"/>
                 </a:solidFill>
                 <a:latin typeface="Microsoft YaHei"/>
                 <a:ea typeface="Microsoft YaHei"/>
               </a:rPr>
-              <a:t>提升 CPU + NPU 调用费</a:t>
-            </a:r>
-          </a:p>
-        </p:txBody>
-      </p:sp>
-      <p:sp>
-        <p:nvSpPr>
-          <p:cNvPr id="9" name="官方贪心  722,994"/>
+              <a:t>39 条累计后台调用费</a:t>
+            </a:r>
+          </a:p>
+        </p:txBody>
+      </p:sp>
+      <p:sp>
+        <p:nvSpPr>
+          <p:cNvPr id="10" name="包含未带来命中的提升投入"/>
           <p:cNvSpPr txBox="1"/>
           <p:nvPr/>
         </p:nvSpPr>
         <p:spPr>
           <a:xfrm>
-            <a:off x="609600" y="2571750"/>
-            <a:ext cx="3352800" cy="276225"/>
+            <a:off x="800100" y="2619375"/>
+            <a:ext cx="4857750" cy="219075"/>
           </a:xfrm>
           <a:prstGeom prst="rect">
             <a:avLst/>
@@ -6250,28 +6294,116 @@
               </a:spcAft>
             </a:pPr>
             <a:r>
-              <a:rPr sz="1575" b="0" lang="zh-CN">
+              <a:rPr sz="1350" b="0" lang="zh-CN">
                 <a:solidFill>
                   <a:srgbClr val="657184"/>
                 </a:solidFill>
                 <a:latin typeface="Microsoft YaHei"/>
                 <a:ea typeface="Microsoft YaHei"/>
               </a:rPr>
-              <a:t>官方贪心  722,994</a:t>
-            </a:r>
-          </a:p>
-        </p:txBody>
-      </p:sp>
-      <p:sp>
-        <p:nvSpPr>
-          <p:cNvPr id="10" name="Rectangle 9"/>
+              <a:t>包含未带来命中的提升投入</a:t>
+            </a:r>
+          </a:p>
+        </p:txBody>
+      </p:sp>
+      <p:sp>
+        <p:nvSpPr>
+          <p:cNvPr id="11" name="↓ 94.84%"/>
+          <p:cNvSpPr txBox="1"/>
+          <p:nvPr/>
+        </p:nvSpPr>
+        <p:spPr>
+          <a:xfrm>
+            <a:off x="800100" y="2924175"/>
+            <a:ext cx="4857750" cy="533400"/>
+          </a:xfrm>
+          <a:prstGeom prst="rect">
+            <a:avLst/>
+          </a:prstGeom>
+          <a:noFill/>
+          <a:effectLst/>
+        </p:spPr>
+        <p:txBody>
+          <a:bodyPr wrap="square" lIns="0" rIns="0" tIns="0" bIns="0">
+            <a:spAutoFit/>
+          </a:bodyPr>
+          <a:lstStyle/>
+          <a:p>
+            <a:pPr algn="l">
+              <a:lnSpc>
+                <a:spcPct val="112000"/>
+              </a:lnSpc>
+              <a:spcAft>
+                <a:spcPts val="500"/>
+              </a:spcAft>
+            </a:pPr>
+            <a:r>
+              <a:rPr sz="3600" b="1" lang="zh-CN">
+                <a:solidFill>
+                  <a:srgbClr val="24756D"/>
+                </a:solidFill>
+                <a:latin typeface="Microsoft YaHei"/>
+                <a:ea typeface="Microsoft YaHei"/>
+              </a:rPr>
+              <a:t>↓ 94.84%</a:t>
+            </a:r>
+          </a:p>
+        </p:txBody>
+      </p:sp>
+      <p:sp>
+        <p:nvSpPr>
+          <p:cNvPr id="12" name="官方贪心    804,656"/>
+          <p:cNvSpPr txBox="1"/>
+          <p:nvPr/>
+        </p:nvSpPr>
+        <p:spPr>
+          <a:xfrm>
+            <a:off x="800100" y="3524250"/>
+            <a:ext cx="4857750" cy="304800"/>
+          </a:xfrm>
+          <a:prstGeom prst="rect">
+            <a:avLst/>
+          </a:prstGeom>
+          <a:noFill/>
+          <a:effectLst/>
+        </p:spPr>
+        <p:txBody>
+          <a:bodyPr wrap="square" lIns="0" rIns="0" tIns="0" bIns="0">
+            <a:spAutoFit/>
+          </a:bodyPr>
+          <a:lstStyle/>
+          <a:p>
+            <a:pPr algn="l">
+              <a:lnSpc>
+                <a:spcPct val="112000"/>
+              </a:lnSpc>
+              <a:spcAft>
+                <a:spcPts val="500"/>
+              </a:spcAft>
+            </a:pPr>
+            <a:r>
+              <a:rPr sz="1950" b="0" lang="zh-CN">
+                <a:solidFill>
+                  <a:srgbClr val="657184"/>
+                </a:solidFill>
+                <a:latin typeface="Microsoft YaHei"/>
+                <a:ea typeface="Microsoft YaHei"/>
+              </a:rPr>
+              <a:t>官方贪心    804,656</a:t>
+            </a:r>
+          </a:p>
+        </p:txBody>
+      </p:sp>
+      <p:sp>
+        <p:nvSpPr>
+          <p:cNvPr id="13" name="Rectangle 12"/>
           <p:cNvSpPr/>
           <p:nvPr/>
         </p:nvSpPr>
         <p:spPr>
           <a:xfrm>
-            <a:off x="609600" y="2905125"/>
-            <a:ext cx="3238500" cy="180975"/>
+            <a:off x="800100" y="3895725"/>
+            <a:ext cx="4857750" cy="171450"/>
           </a:xfrm>
           <a:prstGeom prst="rect">
             <a:avLst/>
@@ -6308,14 +6440,14 @@
       </p:sp>
       <p:sp>
         <p:nvSpPr>
-          <p:cNvPr id="11" name="本方案  24,676"/>
+          <p:cNvPr id="14" name="本方案        41,482"/>
           <p:cNvSpPr txBox="1"/>
           <p:nvPr/>
         </p:nvSpPr>
         <p:spPr>
           <a:xfrm>
-            <a:off x="609600" y="3228975"/>
-            <a:ext cx="3352800" cy="276225"/>
+            <a:off x="800100" y="4248150"/>
+            <a:ext cx="4857750" cy="304800"/>
           </a:xfrm>
           <a:prstGeom prst="rect">
             <a:avLst/>
@@ -6338,28 +6470,28 @@
               </a:spcAft>
             </a:pPr>
             <a:r>
-              <a:rPr sz="1650" b="1" lang="zh-CN">
+              <a:rPr sz="2025" b="1" lang="zh-CN">
                 <a:solidFill>
                   <a:srgbClr val="24756D"/>
                 </a:solidFill>
                 <a:latin typeface="Microsoft YaHei"/>
                 <a:ea typeface="Microsoft YaHei"/>
               </a:rPr>
-              <a:t>本方案  24,676</a:t>
-            </a:r>
-          </a:p>
-        </p:txBody>
-      </p:sp>
-      <p:sp>
-        <p:nvSpPr>
-          <p:cNvPr id="12" name="Rectangle 11"/>
+              <a:t>本方案        41,482</a:t>
+            </a:r>
+          </a:p>
+        </p:txBody>
+      </p:sp>
+      <p:sp>
+        <p:nvSpPr>
+          <p:cNvPr id="15" name="Rectangle 14"/>
           <p:cNvSpPr/>
           <p:nvPr/>
         </p:nvSpPr>
         <p:spPr>
           <a:xfrm>
-            <a:off x="609600" y="3562350"/>
-            <a:ext cx="110530" cy="180975"/>
+            <a:off x="800100" y="4648200"/>
+            <a:ext cx="250428" cy="171450"/>
           </a:xfrm>
           <a:prstGeom prst="rect">
             <a:avLst/>
@@ -6396,14 +6528,58 @@
       </p:sp>
       <p:sp>
         <p:nvSpPr>
-          <p:cNvPr id="13" name="投入减少 96.59%"/>
+          <p:cNvPr id="16" name="Rectangle 15"/>
+          <p:cNvSpPr/>
+          <p:nvPr/>
+        </p:nvSpPr>
+        <p:spPr>
+          <a:xfrm>
+            <a:off x="6343650" y="2085975"/>
+            <a:ext cx="5238750" cy="2867025"/>
+          </a:xfrm>
+          <a:prstGeom prst="rect">
+            <a:avLst/>
+          </a:prstGeom>
+          <a:solidFill>
+            <a:srgbClr val="F3F8F6"/>
+          </a:solidFill>
+          <a:ln>
+            <a:noFill/>
+          </a:ln>
+          <a:effectLst/>
+        </p:spPr>
+        <p:style>
+          <a:lnRef idx="1">
+            <a:schemeClr val="accent1"/>
+          </a:lnRef>
+          <a:fillRef idx="3">
+            <a:schemeClr val="accent1"/>
+          </a:fillRef>
+          <a:effectRef idx="0">
+            <a:schemeClr val="accent1"/>
+          </a:effectRef>
+          <a:fontRef idx="minor">
+            <a:schemeClr val="lt1"/>
+          </a:fontRef>
+        </p:style>
+        <p:txBody>
+          <a:bodyPr rtlCol="0" anchor="ctr"/>
+          <a:lstStyle/>
+          <a:p>
+            <a:pPr algn="ctr"/>
+          </a:p>
+        </p:txBody>
+      </p:sp>
+      <p:sp>
+        <p:nvSpPr>
+          <p:cNvPr id="17" name="每次命中分摊的后台调用费"/>
           <p:cNvSpPr txBox="1"/>
           <p:nvPr/>
         </p:nvSpPr>
         <p:spPr>
           <a:xfrm>
-            <a:off x="609600" y="3905249"/>
-            <a:ext cx="3352800" cy="295275"/>
+            <a:off x="6534150" y="2219325"/>
+            <a:ext cx="4857750" cy="314325"/>
           </a:xfrm>
           <a:prstGeom prst="rect">
             <a:avLst/>
@@ -6426,28 +6602,28 @@
               </a:spcAft>
             </a:pPr>
             <a:r>
-              <a:rPr sz="1875" b="1" lang="zh-CN">
+              <a:rPr sz="2025" b="1" lang="zh-CN">
                 <a:solidFill>
                   <a:srgbClr val="24756D"/>
                 </a:solidFill>
                 <a:latin typeface="Microsoft YaHei"/>
                 <a:ea typeface="Microsoft YaHei"/>
               </a:rPr>
-              <a:t>投入减少 96.59%</a:t>
-            </a:r>
-          </a:p>
-        </p:txBody>
-      </p:sp>
-      <p:sp>
-        <p:nvSpPr>
-          <p:cNvPr id="14" name="真实命中请求数"/>
+              <a:t>每次命中分摊的后台调用费</a:t>
+            </a:r>
+          </a:p>
+        </p:txBody>
+      </p:sp>
+      <p:sp>
+        <p:nvSpPr>
+          <p:cNvPr id="18" name="总后台调用费 ÷ 命中请求数"/>
           <p:cNvSpPr txBox="1"/>
           <p:nvPr/>
         </p:nvSpPr>
         <p:spPr>
           <a:xfrm>
-            <a:off x="4343400" y="2124075"/>
-            <a:ext cx="3352800" cy="314325"/>
+            <a:off x="6534150" y="2619375"/>
+            <a:ext cx="4857750" cy="219075"/>
           </a:xfrm>
           <a:prstGeom prst="rect">
             <a:avLst/>
@@ -6470,28 +6646,28 @@
               </a:spcAft>
             </a:pPr>
             <a:r>
-              <a:rPr sz="1950" b="1" lang="zh-CN">
-                <a:solidFill>
-                  <a:srgbClr val="24756D"/>
-                </a:solidFill>
-                <a:latin typeface="Microsoft YaHei"/>
-                <a:ea typeface="Microsoft YaHei"/>
-              </a:rPr>
-              <a:t>真实命中请求数</a:t>
-            </a:r>
-          </a:p>
-        </p:txBody>
-      </p:sp>
-      <p:sp>
-        <p:nvSpPr>
-          <p:cNvPr id="15" name="官方贪心  40,831 次"/>
+              <a:rPr sz="1350" b="0" lang="zh-CN">
+                <a:solidFill>
+                  <a:srgbClr val="657184"/>
+                </a:solidFill>
+                <a:latin typeface="Microsoft YaHei"/>
+                <a:ea typeface="Microsoft YaHei"/>
+              </a:rPr>
+              <a:t>总后台调用费 ÷ 命中请求数</a:t>
+            </a:r>
+          </a:p>
+        </p:txBody>
+      </p:sp>
+      <p:sp>
+        <p:nvSpPr>
+          <p:cNvPr id="19" name="↓ 74.95%"/>
           <p:cNvSpPr txBox="1"/>
           <p:nvPr/>
         </p:nvSpPr>
         <p:spPr>
           <a:xfrm>
-            <a:off x="4343400" y="2571750"/>
-            <a:ext cx="3352800" cy="276225"/>
+            <a:off x="6534150" y="2924175"/>
+            <a:ext cx="4857750" cy="533400"/>
           </a:xfrm>
           <a:prstGeom prst="rect">
             <a:avLst/>
@@ -6514,28 +6690,72 @@
               </a:spcAft>
             </a:pPr>
             <a:r>
-              <a:rPr sz="1575" b="0" lang="zh-CN">
+              <a:rPr sz="3600" b="1" lang="zh-CN">
+                <a:solidFill>
+                  <a:srgbClr val="24756D"/>
+                </a:solidFill>
+                <a:latin typeface="Microsoft YaHei"/>
+                <a:ea typeface="Microsoft YaHei"/>
+              </a:rPr>
+              <a:t>↓ 74.95%</a:t>
+            </a:r>
+          </a:p>
+        </p:txBody>
+      </p:sp>
+      <p:sp>
+        <p:nvSpPr>
+          <p:cNvPr id="20" name="官方贪心    19.71"/>
+          <p:cNvSpPr txBox="1"/>
+          <p:nvPr/>
+        </p:nvSpPr>
+        <p:spPr>
+          <a:xfrm>
+            <a:off x="6534150" y="3524250"/>
+            <a:ext cx="4857750" cy="304800"/>
+          </a:xfrm>
+          <a:prstGeom prst="rect">
+            <a:avLst/>
+          </a:prstGeom>
+          <a:noFill/>
+          <a:effectLst/>
+        </p:spPr>
+        <p:txBody>
+          <a:bodyPr wrap="square" lIns="0" rIns="0" tIns="0" bIns="0">
+            <a:spAutoFit/>
+          </a:bodyPr>
+          <a:lstStyle/>
+          <a:p>
+            <a:pPr algn="l">
+              <a:lnSpc>
+                <a:spcPct val="112000"/>
+              </a:lnSpc>
+              <a:spcAft>
+                <a:spcPts val="500"/>
+              </a:spcAft>
+            </a:pPr>
+            <a:r>
+              <a:rPr sz="1950" b="0" lang="zh-CN">
                 <a:solidFill>
                   <a:srgbClr val="657184"/>
                 </a:solidFill>
                 <a:latin typeface="Microsoft YaHei"/>
                 <a:ea typeface="Microsoft YaHei"/>
               </a:rPr>
-              <a:t>官方贪心  40,831 次</a:t>
-            </a:r>
-          </a:p>
-        </p:txBody>
-      </p:sp>
-      <p:sp>
-        <p:nvSpPr>
-          <p:cNvPr id="16" name="Rectangle 15"/>
+              <a:t>官方贪心    19.71</a:t>
+            </a:r>
+          </a:p>
+        </p:txBody>
+      </p:sp>
+      <p:sp>
+        <p:nvSpPr>
+          <p:cNvPr id="21" name="Rectangle 20"/>
           <p:cNvSpPr/>
           <p:nvPr/>
         </p:nvSpPr>
         <p:spPr>
           <a:xfrm>
-            <a:off x="4343400" y="2905125"/>
-            <a:ext cx="3238500" cy="180975"/>
+            <a:off x="6534150" y="3895725"/>
+            <a:ext cx="4857750" cy="171450"/>
           </a:xfrm>
           <a:prstGeom prst="rect">
             <a:avLst/>
@@ -6572,14 +6792,14 @@
       </p:sp>
       <p:sp>
         <p:nvSpPr>
-          <p:cNvPr id="17" name="本方案  8,403 次"/>
+          <p:cNvPr id="22" name="本方案        4.94"/>
           <p:cNvSpPr txBox="1"/>
           <p:nvPr/>
         </p:nvSpPr>
         <p:spPr>
           <a:xfrm>
-            <a:off x="4343400" y="3228975"/>
-            <a:ext cx="3352800" cy="276225"/>
+            <a:off x="6534150" y="4248150"/>
+            <a:ext cx="4857750" cy="304800"/>
           </a:xfrm>
           <a:prstGeom prst="rect">
             <a:avLst/>
@@ -6602,28 +6822,28 @@
               </a:spcAft>
             </a:pPr>
             <a:r>
-              <a:rPr sz="1650" b="1" lang="zh-CN">
+              <a:rPr sz="2025" b="1" lang="zh-CN">
                 <a:solidFill>
                   <a:srgbClr val="24756D"/>
                 </a:solidFill>
                 <a:latin typeface="Microsoft YaHei"/>
                 <a:ea typeface="Microsoft YaHei"/>
               </a:rPr>
-              <a:t>本方案  8,403 次</a:t>
-            </a:r>
-          </a:p>
-        </p:txBody>
-      </p:sp>
-      <p:sp>
-        <p:nvSpPr>
-          <p:cNvPr id="18" name="Rectangle 17"/>
+              <a:t>本方案        4.94</a:t>
+            </a:r>
+          </a:p>
+        </p:txBody>
+      </p:sp>
+      <p:sp>
+        <p:nvSpPr>
+          <p:cNvPr id="23" name="Rectangle 22"/>
           <p:cNvSpPr/>
           <p:nvPr/>
         </p:nvSpPr>
         <p:spPr>
           <a:xfrm>
-            <a:off x="4343400" y="3562350"/>
-            <a:ext cx="666481" cy="180975"/>
+            <a:off x="6534150" y="4648200"/>
+            <a:ext cx="1216858" cy="171450"/>
           </a:xfrm>
           <a:prstGeom prst="rect">
             <a:avLst/>
@@ -6660,14 +6880,14 @@
       </p:sp>
       <p:sp>
         <p:nvSpPr>
-          <p:cNvPr id="19" name="命中次数减少 79.42%"/>
+          <p:cNvPr id="24" name="每次提升的平均命中数：4.63 → 27.92，达到贪心的 6.03 倍。"/>
           <p:cNvSpPr txBox="1"/>
           <p:nvPr/>
         </p:nvSpPr>
         <p:spPr>
           <a:xfrm>
-            <a:off x="4343400" y="3905249"/>
-            <a:ext cx="3352800" cy="295275"/>
+            <a:off x="609600" y="5143500"/>
+            <a:ext cx="10972800" cy="314325"/>
           </a:xfrm>
           <a:prstGeom prst="rect">
             <a:avLst/>
@@ -6690,122 +6910,34 @@
               </a:spcAft>
             </a:pPr>
             <a:r>
-              <a:rPr sz="1875" b="1" lang="zh-CN">
+              <a:rPr sz="2025" b="1" lang="zh-CN">
                 <a:solidFill>
                   <a:srgbClr val="24756D"/>
                 </a:solidFill>
                 <a:latin typeface="Microsoft YaHei"/>
                 <a:ea typeface="Microsoft YaHei"/>
               </a:rPr>
-              <a:t>命中次数减少 79.42%</a:t>
-            </a:r>
-          </a:p>
-        </p:txBody>
-      </p:sp>
-      <p:sp>
-        <p:nvSpPr>
-          <p:cNvPr id="20" name="缓存净收益 ΔJ"/>
-          <p:cNvSpPr txBox="1"/>
-          <p:nvPr/>
-        </p:nvSpPr>
-        <p:spPr>
-          <a:xfrm>
-            <a:off x="8077200" y="2124075"/>
-            <a:ext cx="3505200" cy="314325"/>
-          </a:xfrm>
-          <a:prstGeom prst="rect">
-            <a:avLst/>
-          </a:prstGeom>
-          <a:noFill/>
-          <a:effectLst/>
-        </p:spPr>
-        <p:txBody>
-          <a:bodyPr wrap="square" lIns="0" rIns="0" tIns="0" bIns="0">
-            <a:spAutoFit/>
-          </a:bodyPr>
-          <a:lstStyle/>
-          <a:p>
-            <a:pPr algn="l">
-              <a:lnSpc>
-                <a:spcPct val="112000"/>
-              </a:lnSpc>
-              <a:spcAft>
-                <a:spcPts val="500"/>
-              </a:spcAft>
-            </a:pPr>
-            <a:r>
-              <a:rPr sz="1950" b="1" lang="zh-CN">
-                <a:solidFill>
-                  <a:srgbClr val="24756D"/>
-                </a:solidFill>
-                <a:latin typeface="Microsoft YaHei"/>
-                <a:ea typeface="Microsoft YaHei"/>
-              </a:rPr>
-              <a:t>缓存净收益 ΔJ</a:t>
-            </a:r>
-          </a:p>
-        </p:txBody>
-      </p:sp>
-      <p:sp>
-        <p:nvSpPr>
-          <p:cNvPr id="21" name="官方贪心  +104,909"/>
-          <p:cNvSpPr txBox="1"/>
-          <p:nvPr/>
-        </p:nvSpPr>
-        <p:spPr>
-          <a:xfrm>
-            <a:off x="8077200" y="2571750"/>
-            <a:ext cx="3505200" cy="276225"/>
-          </a:xfrm>
-          <a:prstGeom prst="rect">
-            <a:avLst/>
-          </a:prstGeom>
-          <a:noFill/>
-          <a:effectLst/>
-        </p:spPr>
-        <p:txBody>
-          <a:bodyPr wrap="square" lIns="0" rIns="0" tIns="0" bIns="0">
-            <a:spAutoFit/>
-          </a:bodyPr>
-          <a:lstStyle/>
-          <a:p>
-            <a:pPr algn="l">
-              <a:lnSpc>
-                <a:spcPct val="112000"/>
-              </a:lnSpc>
-              <a:spcAft>
-                <a:spcPts val="500"/>
-              </a:spcAft>
-            </a:pPr>
-            <a:r>
-              <a:rPr sz="1575" b="0" lang="zh-CN">
-                <a:solidFill>
-                  <a:srgbClr val="657184"/>
-                </a:solidFill>
-                <a:latin typeface="Microsoft YaHei"/>
-                <a:ea typeface="Microsoft YaHei"/>
-              </a:rPr>
-              <a:t>官方贪心  +104,909</a:t>
-            </a:r>
-          </a:p>
-        </p:txBody>
-      </p:sp>
-      <p:sp>
-        <p:nvSpPr>
-          <p:cNvPr id="22" name="Rectangle 21"/>
+              <a:t>每次提升的平均命中数：4.63 → 27.92，达到贪心的 6.03 倍。</a:t>
+            </a:r>
+          </a:p>
+        </p:txBody>
+      </p:sp>
+      <p:sp>
+        <p:nvSpPr>
+          <p:cNvPr id="25" name="Rectangle 24"/>
           <p:cNvSpPr/>
           <p:nvPr/>
         </p:nvSpPr>
         <p:spPr>
           <a:xfrm>
-            <a:off x="8077200" y="2905125"/>
-            <a:ext cx="3390900" cy="180975"/>
+            <a:off x="609600" y="5600700"/>
+            <a:ext cx="10972800" cy="409575"/>
           </a:xfrm>
           <a:prstGeom prst="rect">
             <a:avLst/>
           </a:prstGeom>
           <a:solidFill>
-            <a:srgbClr val="C8D2DF"/>
+            <a:srgbClr val="F5F7FA"/>
           </a:solidFill>
           <a:ln>
             <a:noFill/>
@@ -6836,14 +6968,14 @@
       </p:sp>
       <p:sp>
         <p:nvSpPr>
-          <p:cNvPr id="23" name="本方案  +70,205"/>
+          <p:cNvPr id="26" name="原因实例 high_mixed：双方命中均为 0，提升 3,566 → 0，省去 292,412 调用费。"/>
           <p:cNvSpPr txBox="1"/>
           <p:nvPr/>
         </p:nvSpPr>
         <p:spPr>
           <a:xfrm>
-            <a:off x="8077200" y="3228975"/>
-            <a:ext cx="3505200" cy="276225"/>
+            <a:off x="762000" y="5686425"/>
+            <a:ext cx="10668000" cy="257175"/>
           </a:xfrm>
           <a:prstGeom prst="rect">
             <a:avLst/>
@@ -6868,70 +7000,26 @@
             <a:r>
               <a:rPr sz="1650" b="1" lang="zh-CN">
                 <a:solidFill>
-                  <a:srgbClr val="24756D"/>
-                </a:solidFill>
-                <a:latin typeface="Microsoft YaHei"/>
-                <a:ea typeface="Microsoft YaHei"/>
-              </a:rPr>
-              <a:t>本方案  +70,205</a:t>
-            </a:r>
-          </a:p>
-        </p:txBody>
-      </p:sp>
-      <p:sp>
-        <p:nvSpPr>
-          <p:cNvPr id="24" name="Rectangle 23"/>
-          <p:cNvSpPr/>
-          <p:nvPr/>
-        </p:nvSpPr>
-        <p:spPr>
-          <a:xfrm>
-            <a:off x="8077200" y="3562350"/>
-            <a:ext cx="2269186" cy="180975"/>
-          </a:xfrm>
-          <a:prstGeom prst="rect">
-            <a:avLst/>
-          </a:prstGeom>
-          <a:solidFill>
-            <a:srgbClr val="24756D"/>
-          </a:solidFill>
-          <a:ln>
-            <a:noFill/>
-          </a:ln>
-          <a:effectLst/>
-        </p:spPr>
-        <p:style>
-          <a:lnRef idx="1">
-            <a:schemeClr val="accent1"/>
-          </a:lnRef>
-          <a:fillRef idx="3">
-            <a:schemeClr val="accent1"/>
-          </a:fillRef>
-          <a:effectRef idx="0">
-            <a:schemeClr val="accent1"/>
-          </a:effectRef>
-          <a:fontRef idx="minor">
-            <a:schemeClr val="lt1"/>
-          </a:fontRef>
-        </p:style>
-        <p:txBody>
-          <a:bodyPr rtlCol="0" anchor="ctr"/>
-          <a:lstStyle/>
-          <a:p>
-            <a:pPr algn="ctr"/>
-          </a:p>
-        </p:txBody>
-      </p:sp>
-      <p:sp>
-        <p:nvSpPr>
-          <p:cNvPr id="25" name="仍有净收益，绝对值更小"/>
+                  <a:srgbClr val="1F2937"/>
+                </a:solidFill>
+                <a:latin typeface="Microsoft YaHei"/>
+                <a:ea typeface="Microsoft YaHei"/>
+              </a:rPr>
+              <a:t>原因实例 high_mixed：双方命中均为 0，提升 3,566 → 0，省去 292,412 调用费。</a:t>
+            </a:r>
+          </a:p>
+        </p:txBody>
+      </p:sp>
+      <p:sp>
+        <p:nvSpPr>
+          <p:cNvPr id="27" name="先汇总再相除：提升 8,817 → 301；命中 40,831 → 8,403。单次命中固定调用费仍为 2，降低的是提升投入的摊销。"/>
           <p:cNvSpPr txBox="1"/>
           <p:nvPr/>
         </p:nvSpPr>
         <p:spPr>
           <a:xfrm>
-            <a:off x="8077200" y="3905249"/>
-            <a:ext cx="3505200" cy="295275"/>
+            <a:off x="609600" y="6105525"/>
+            <a:ext cx="10972800" cy="161925"/>
           </a:xfrm>
           <a:prstGeom prst="rect">
             <a:avLst/>
@@ -6954,210 +7042,14 @@
               </a:spcAft>
             </a:pPr>
             <a:r>
-              <a:rPr sz="1875" b="1" lang="zh-CN">
-                <a:solidFill>
-                  <a:srgbClr val="24756D"/>
-                </a:solidFill>
-                <a:latin typeface="Microsoft YaHei"/>
-                <a:ea typeface="Microsoft YaHei"/>
-              </a:rPr>
-              <a:t>仍有净收益，绝对值更小</a:t>
-            </a:r>
-          </a:p>
-        </p:txBody>
-      </p:sp>
-      <p:sp>
-        <p:nvSpPr>
-          <p:cNvPr id="26" name="提升次数：8,817 → 301；请求命中率：20.57% → 4.23%；命中字节：19.40 → 8.21 GiB。"/>
-          <p:cNvSpPr txBox="1"/>
-          <p:nvPr/>
-        </p:nvSpPr>
-        <p:spPr>
-          <a:xfrm>
-            <a:off x="609600" y="4476750"/>
-            <a:ext cx="10972800" cy="304800"/>
-          </a:xfrm>
-          <a:prstGeom prst="rect">
-            <a:avLst/>
-          </a:prstGeom>
-          <a:noFill/>
-          <a:effectLst/>
-        </p:spPr>
-        <p:txBody>
-          <a:bodyPr wrap="square" lIns="0" rIns="0" tIns="0" bIns="0">
-            <a:spAutoFit/>
-          </a:bodyPr>
-          <a:lstStyle/>
-          <a:p>
-            <a:pPr algn="l">
-              <a:lnSpc>
-                <a:spcPct val="112000"/>
-              </a:lnSpc>
-              <a:spcAft>
-                <a:spcPts val="500"/>
-              </a:spcAft>
-            </a:pPr>
-            <a:r>
-              <a:rPr sz="1725" b="1" lang="zh-CN">
-                <a:solidFill>
-                  <a:srgbClr val="1F2937"/>
-                </a:solidFill>
-                <a:latin typeface="Microsoft YaHei"/>
-                <a:ea typeface="Microsoft YaHei"/>
-              </a:rPr>
-              <a:t>提升次数：8,817 → 301；请求命中率：20.57% → 4.23%；命中字节：19.40 → 8.21 GiB。</a:t>
-            </a:r>
-          </a:p>
-        </p:txBody>
-      </p:sp>
-      <p:sp>
-        <p:nvSpPr>
-          <p:cNvPr id="27" name="Rectangle 26"/>
-          <p:cNvSpPr/>
-          <p:nvPr/>
-        </p:nvSpPr>
-        <p:spPr>
-          <a:xfrm>
-            <a:off x="609600" y="4933950"/>
-            <a:ext cx="10972800" cy="771525"/>
-          </a:xfrm>
-          <a:prstGeom prst="rect">
-            <a:avLst/>
-          </a:prstGeom>
-          <a:solidFill>
-            <a:srgbClr val="EEF6F3"/>
-          </a:solidFill>
-          <a:ln>
-            <a:noFill/>
-          </a:ln>
-          <a:effectLst/>
-        </p:spPr>
-        <p:style>
-          <a:lnRef idx="1">
-            <a:schemeClr val="accent1"/>
-          </a:lnRef>
-          <a:fillRef idx="3">
-            <a:schemeClr val="accent1"/>
-          </a:fillRef>
-          <a:effectRef idx="0">
-            <a:schemeClr val="accent1"/>
-          </a:effectRef>
-          <a:fontRef idx="minor">
-            <a:schemeClr val="lt1"/>
-          </a:fontRef>
-        </p:style>
-        <p:txBody>
-          <a:bodyPr rtlCol="0" anchor="ctr"/>
-          <a:lstStyle/>
-          <a:p>
-            <a:pPr algn="ctr"/>
-          </a:p>
-        </p:txBody>
-      </p:sp>
-      <p:sp>
-        <p:nvSpPr>
-          <p:cNvPr id="28" name="原因：前台读取已更便宜，后台控制额外投入；提升调用费节省 69.83 万，命中调用费节省 6.49 万。 本方案没有追求更多命中，缓存净贡献也低于贪心；整体优势来自联合规划与更少的调用投入。"/>
-          <p:cNvSpPr txBox="1"/>
-          <p:nvPr/>
-        </p:nvSpPr>
-        <p:spPr>
-          <a:xfrm>
-            <a:off x="781050" y="5048250"/>
-            <a:ext cx="10629900" cy="552450"/>
-          </a:xfrm>
-          <a:prstGeom prst="rect">
-            <a:avLst/>
-          </a:prstGeom>
-          <a:noFill/>
-          <a:effectLst/>
-        </p:spPr>
-        <p:txBody>
-          <a:bodyPr wrap="square" lIns="0" rIns="0" tIns="0" bIns="0">
-            <a:spAutoFit/>
-          </a:bodyPr>
-          <a:lstStyle/>
-          <a:p>
-            <a:pPr algn="l">
-              <a:lnSpc>
-                <a:spcPct val="112000"/>
-              </a:lnSpc>
-              <a:spcAft>
-                <a:spcPts val="500"/>
-              </a:spcAft>
-            </a:pPr>
-            <a:r>
-              <a:rPr sz="1650" b="0" lang="zh-CN">
-                <a:solidFill>
-                  <a:srgbClr val="1F2937"/>
-                </a:solidFill>
-                <a:latin typeface="Microsoft YaHei"/>
-                <a:ea typeface="Microsoft YaHei"/>
-              </a:rPr>
-              <a:t>原因：前台读取已更便宜，后台控制额外投入；提升调用费节省 69.83 万，命中调用费节省 6.49 万。</a:t>
-            </a:r>
-          </a:p>
-          <a:p>
-            <a:pPr algn="l">
-              <a:lnSpc>
-                <a:spcPct val="112000"/>
-              </a:lnSpc>
-              <a:spcAft>
-                <a:spcPts val="500"/>
-              </a:spcAft>
-            </a:pPr>
-            <a:r>
-              <a:rPr sz="1650" b="0" lang="zh-CN">
-                <a:solidFill>
-                  <a:srgbClr val="1F2937"/>
-                </a:solidFill>
-                <a:latin typeface="Microsoft YaHei"/>
-                <a:ea typeface="Microsoft YaHei"/>
-              </a:rPr>
-              <a:t>本方案没有追求更多命中，缓存净贡献也低于贪心；整体优势来自联合规划与更少的调用投入。</a:t>
-            </a:r>
-          </a:p>
-        </p:txBody>
-      </p:sp>
-      <p:sp>
-        <p:nvSpPr>
-          <p:cNvPr id="29" name="边界：本方案缓存对照仍有 2 例负收益；扩展集 96/292 例较贪心退化，最大 J 增幅 94.27%。"/>
-          <p:cNvSpPr txBox="1"/>
-          <p:nvPr/>
-        </p:nvSpPr>
-        <p:spPr>
-          <a:xfrm>
-            <a:off x="609600" y="5857875"/>
-            <a:ext cx="10972800" cy="266700"/>
-          </a:xfrm>
-          <a:prstGeom prst="rect">
-            <a:avLst/>
-          </a:prstGeom>
-          <a:noFill/>
-          <a:effectLst/>
-        </p:spPr>
-        <p:txBody>
-          <a:bodyPr wrap="square" lIns="0" rIns="0" tIns="0" bIns="0">
-            <a:spAutoFit/>
-          </a:bodyPr>
-          <a:lstStyle/>
-          <a:p>
-            <a:pPr algn="l">
-              <a:lnSpc>
-                <a:spcPct val="112000"/>
-              </a:lnSpc>
-              <a:spcAft>
-                <a:spcPts val="500"/>
-              </a:spcAft>
-            </a:pPr>
-            <a:r>
-              <a:rPr sz="1500" b="0" lang="zh-CN">
+              <a:rPr sz="1125" b="0" lang="zh-CN">
                 <a:solidFill>
                   <a:srgbClr val="657184"/>
                 </a:solidFill>
                 <a:latin typeface="Microsoft YaHei"/>
                 <a:ea typeface="Microsoft YaHei"/>
               </a:rPr>
-              <a:t>边界：本方案缓存对照仍有 2 例负收益；扩展集 96/292 例较贪心退化，最大 J 增幅 94.27%。</a:t>
+              <a:t>先汇总再相除：提升 8,817 → 301；命中 40,831 → 8,403。单次命中固定调用费仍为 2，降低的是提升投入的摊销。</a:t>
             </a:r>
           </a:p>
         </p:txBody>
@@ -9860,7 +9752,7 @@
       </p:sp>
       <p:sp>
         <p:nvSpPr>
-          <p:cNvPr id="21" name="分块与联合 DP"/>
+          <p:cNvPr id="21" name="联合 DP：基础方案 → 按需细化"/>
           <p:cNvSpPr txBox="1"/>
           <p:nvPr/>
         </p:nvSpPr>
@@ -9897,7 +9789,7 @@
                 <a:latin typeface="Microsoft YaHei"/>
                 <a:ea typeface="Microsoft YaHei"/>
               </a:rPr>
-              <a:t>分块与联合 DP</a:t>
+              <a:t>联合 DP：基础方案 → 按需细化</a:t>
             </a:r>
           </a:p>
         </p:txBody>
@@ -10532,7 +10424,7 @@
       <p:grpSpPr/>
       <p:sp>
         <p:nvSpPr>
-          <p:cNvPr id="2" name="前台联合 DP · 代码可视化"/>
+          <p:cNvPr id="2" name="前台 · 分组与路径联合规划"/>
           <p:cNvSpPr txBox="1"/>
           <p:nvPr/>
         </p:nvSpPr>
@@ -10569,14 +10461,14 @@
                 <a:latin typeface="Microsoft YaHei"/>
                 <a:ea typeface="Microsoft YaHei"/>
               </a:rPr>
-              <a:t>前台联合 DP · 代码可视化</a:t>
-            </a:r>
-          </a:p>
-        </p:txBody>
-      </p:sp>
-      <p:sp>
-        <p:nvSpPr>
-          <p:cNvPr id="3" name="先用快速 DP 规划，满足条件再用细化 DP"/>
+              <a:t>前台 · 分组与路径联合规划</a:t>
+            </a:r>
+          </a:p>
+        </p:txBody>
+      </p:sp>
+      <p:sp>
+        <p:nvSpPr>
+          <p:cNvPr id="3" name="联合 DP：先出基础方案，再按需细化"/>
           <p:cNvSpPr txBox="1"/>
           <p:nvPr/>
         </p:nvSpPr>
@@ -10613,14 +10505,14 @@
                 <a:latin typeface="Microsoft YaHei"/>
                 <a:ea typeface="Microsoft YaHei"/>
               </a:rPr>
-              <a:t>先用快速 DP 规划，满足条件再用细化 DP</a:t>
-            </a:r>
-          </a:p>
-        </p:txBody>
-      </p:sp>
-      <p:sp>
-        <p:nvSpPr>
-          <p:cNvPr id="4" name="范围：仅本批未命中请求；每个起点最多向后看 128 片段，过滤同卡、相邻、对齐及资源约束。"/>
+              <a:t>联合 DP：先出基础方案，再按需细化</a:t>
+            </a:r>
+          </a:p>
+        </p:txBody>
+      </p:sp>
+      <p:sp>
+        <p:nvSpPr>
+          <p:cNvPr id="4" name="分组影响并发，并发又影响成本；基础方案提供复制分布，细化按候选组数重新求解。"/>
           <p:cNvSpPr txBox="1"/>
           <p:nvPr/>
         </p:nvSpPr>
@@ -10657,7 +10549,7 @@
                 <a:latin typeface="Microsoft YaHei"/>
                 <a:ea typeface="Microsoft YaHei"/>
               </a:rPr>
-              <a:t>范围：仅本批未命中请求；每个起点最多向后看 128 片段，过滤同卡、相邻、对齐及资源约束。</a:t>
+              <a:t>分组影响并发，并发又影响成本；基础方案提供复制分布，细化按候选组数重新求解。</a:t>
             </a:r>
           </a:p>
         </p:txBody>
@@ -10788,597 +10680,28 @@
       </p:sp>
       <p:grpSp>
         <p:nvGrpSpPr>
-          <p:cNvPr id="8" name="步骤1：三个对齐片段与初始状态"/>
+          <p:cNvPr id="8" name="步骤1：快速 DP 输出基础方案"/>
           <p:cNvGrpSpPr/>
           <p:nvPr/>
         </p:nvGrpSpPr>
         <p:grpSpPr>
           <a:xfrm>
-            <a:off x="609600" y="2009774"/>
-            <a:ext cx="10972799" cy="419100"/>
-            <a:chOff x="609600" y="2009774"/>
-            <a:chExt cx="10972799" cy="419100"/>
+            <a:off x="609600" y="2076450"/>
+            <a:ext cx="3143250" cy="1114425"/>
+            <a:chOff x="609600" y="2076450"/>
+            <a:chExt cx="3143250" cy="1114425"/>
           </a:xfrm>
         </p:grpSpPr>
         <p:sp>
           <p:nvSpPr>
-            <p:cNvPr id="9" name="同卡、相邻、对齐"/>
-            <p:cNvSpPr txBox="1"/>
+            <p:cNvPr id="9" name="Rectangle 8"/>
+            <p:cNvSpPr/>
             <p:nvPr/>
           </p:nvSpPr>
           <p:spPr>
             <a:xfrm>
               <a:off x="609600" y="2076450"/>
-              <a:ext cx="1743075" cy="295275"/>
-            </a:xfrm>
-            <a:prstGeom prst="rect">
-              <a:avLst/>
-            </a:prstGeom>
-            <a:noFill/>
-            <a:effectLst/>
-          </p:spPr>
-          <p:txBody>
-            <a:bodyPr wrap="square" lIns="0" rIns="0" tIns="0" bIns="0">
-              <a:spAutoFit/>
-            </a:bodyPr>
-            <a:lstStyle/>
-            <a:p>
-              <a:pPr algn="l">
-                <a:lnSpc>
-                  <a:spcPct val="112000"/>
-                </a:lnSpc>
-                <a:spcAft>
-                  <a:spcPts val="500"/>
-                </a:spcAft>
-              </a:pPr>
-              <a:r>
-                <a:rPr sz="1650" b="1" lang="zh-CN">
-                  <a:solidFill>
-                    <a:srgbClr val="1F2937"/>
-                  </a:solidFill>
-                  <a:latin typeface="Microsoft YaHei"/>
-                  <a:ea typeface="Microsoft YaHei"/>
-                </a:rPr>
-                <a:t>同卡、相邻、对齐</a:t>
-              </a:r>
-            </a:p>
-          </p:txBody>
-        </p:sp>
-        <p:sp>
-          <p:nvSpPr>
-            <p:cNvPr id="10" name="Rectangle 9"/>
-            <p:cNvSpPr/>
-            <p:nvPr/>
-          </p:nvSpPr>
-          <p:spPr>
-            <a:xfrm>
-              <a:off x="2438400" y="2009774"/>
-              <a:ext cx="1571625" cy="419100"/>
-            </a:xfrm>
-            <a:prstGeom prst="rect">
-              <a:avLst/>
-            </a:prstGeom>
-            <a:solidFill>
-              <a:srgbClr val="EDF3FA"/>
-            </a:solidFill>
-            <a:ln w="8890">
-              <a:solidFill>
-                <a:srgbClr val="DCE2E9"/>
-              </a:solidFill>
-            </a:ln>
-            <a:effectLst/>
-          </p:spPr>
-          <p:style>
-            <a:lnRef idx="1">
-              <a:schemeClr val="accent1"/>
-            </a:lnRef>
-            <a:fillRef idx="3">
-              <a:schemeClr val="accent1"/>
-            </a:fillRef>
-            <a:effectRef idx="0">
-              <a:schemeClr val="accent1"/>
-            </a:effectRef>
-            <a:fontRef idx="minor">
-              <a:schemeClr val="lt1"/>
-            </a:fontRef>
-          </p:style>
-          <p:txBody>
-            <a:bodyPr rtlCol="0" anchor="ctr"/>
-            <a:lstStyle/>
-            <a:p>
-              <a:pPr algn="ctr"/>
-            </a:p>
-          </p:txBody>
-        </p:sp>
-        <p:sp>
-          <p:nvSpPr>
-            <p:cNvPr id="11" name="P0 · 512B"/>
-            <p:cNvSpPr txBox="1"/>
-            <p:nvPr/>
-          </p:nvSpPr>
-          <p:spPr>
-            <a:xfrm>
-              <a:off x="2514600" y="2095499"/>
-              <a:ext cx="1419225" cy="276225"/>
-            </a:xfrm>
-            <a:prstGeom prst="rect">
-              <a:avLst/>
-            </a:prstGeom>
-            <a:noFill/>
-            <a:effectLst/>
-          </p:spPr>
-          <p:txBody>
-            <a:bodyPr wrap="square" lIns="0" rIns="0" tIns="0" bIns="0">
-              <a:spAutoFit/>
-            </a:bodyPr>
-            <a:lstStyle/>
-            <a:p>
-              <a:pPr algn="ctr">
-                <a:lnSpc>
-                  <a:spcPct val="112000"/>
-                </a:lnSpc>
-                <a:spcAft>
-                  <a:spcPts val="500"/>
-                </a:spcAft>
-              </a:pPr>
-              <a:r>
-                <a:rPr sz="1725" b="1" lang="zh-CN">
-                  <a:solidFill>
-                    <a:srgbClr val="285EA8"/>
-                  </a:solidFill>
-                  <a:latin typeface="Microsoft YaHei"/>
-                  <a:ea typeface="Microsoft YaHei"/>
-                </a:rPr>
-                <a:t>P0 · 512B</a:t>
-              </a:r>
-            </a:p>
-          </p:txBody>
-        </p:sp>
-        <p:sp>
-          <p:nvSpPr>
-            <p:cNvPr id="12" name="Rectangle 11"/>
-            <p:cNvSpPr/>
-            <p:nvPr/>
-          </p:nvSpPr>
-          <p:spPr>
-            <a:xfrm>
-              <a:off x="4162424" y="2009774"/>
-              <a:ext cx="1571625" cy="419100"/>
-            </a:xfrm>
-            <a:prstGeom prst="rect">
-              <a:avLst/>
-            </a:prstGeom>
-            <a:solidFill>
-              <a:srgbClr val="EDF3FA"/>
-            </a:solidFill>
-            <a:ln w="8890">
-              <a:solidFill>
-                <a:srgbClr val="DCE2E9"/>
-              </a:solidFill>
-            </a:ln>
-            <a:effectLst/>
-          </p:spPr>
-          <p:style>
-            <a:lnRef idx="1">
-              <a:schemeClr val="accent1"/>
-            </a:lnRef>
-            <a:fillRef idx="3">
-              <a:schemeClr val="accent1"/>
-            </a:fillRef>
-            <a:effectRef idx="0">
-              <a:schemeClr val="accent1"/>
-            </a:effectRef>
-            <a:fontRef idx="minor">
-              <a:schemeClr val="lt1"/>
-            </a:fontRef>
-          </p:style>
-          <p:txBody>
-            <a:bodyPr rtlCol="0" anchor="ctr"/>
-            <a:lstStyle/>
-            <a:p>
-              <a:pPr algn="ctr"/>
-            </a:p>
-          </p:txBody>
-        </p:sp>
-        <p:sp>
-          <p:nvSpPr>
-            <p:cNvPr id="13" name="P1 · 512B"/>
-            <p:cNvSpPr txBox="1"/>
-            <p:nvPr/>
-          </p:nvSpPr>
-          <p:spPr>
-            <a:xfrm>
-              <a:off x="4238625" y="2095499"/>
-              <a:ext cx="1419225" cy="276225"/>
-            </a:xfrm>
-            <a:prstGeom prst="rect">
-              <a:avLst/>
-            </a:prstGeom>
-            <a:noFill/>
-            <a:effectLst/>
-          </p:spPr>
-          <p:txBody>
-            <a:bodyPr wrap="square" lIns="0" rIns="0" tIns="0" bIns="0">
-              <a:spAutoFit/>
-            </a:bodyPr>
-            <a:lstStyle/>
-            <a:p>
-              <a:pPr algn="ctr">
-                <a:lnSpc>
-                  <a:spcPct val="112000"/>
-                </a:lnSpc>
-                <a:spcAft>
-                  <a:spcPts val="500"/>
-                </a:spcAft>
-              </a:pPr>
-              <a:r>
-                <a:rPr sz="1725" b="1" lang="zh-CN">
-                  <a:solidFill>
-                    <a:srgbClr val="285EA8"/>
-                  </a:solidFill>
-                  <a:latin typeface="Microsoft YaHei"/>
-                  <a:ea typeface="Microsoft YaHei"/>
-                </a:rPr>
-                <a:t>P1 · 512B</a:t>
-              </a:r>
-            </a:p>
-          </p:txBody>
-        </p:sp>
-        <p:sp>
-          <p:nvSpPr>
-            <p:cNvPr id="14" name="Rectangle 13"/>
-            <p:cNvSpPr/>
-            <p:nvPr/>
-          </p:nvSpPr>
-          <p:spPr>
-            <a:xfrm>
-              <a:off x="5886450" y="2009774"/>
-              <a:ext cx="1571625" cy="419100"/>
-            </a:xfrm>
-            <a:prstGeom prst="rect">
-              <a:avLst/>
-            </a:prstGeom>
-            <a:solidFill>
-              <a:srgbClr val="EDF3FA"/>
-            </a:solidFill>
-            <a:ln w="8890">
-              <a:solidFill>
-                <a:srgbClr val="DCE2E9"/>
-              </a:solidFill>
-            </a:ln>
-            <a:effectLst/>
-          </p:spPr>
-          <p:style>
-            <a:lnRef idx="1">
-              <a:schemeClr val="accent1"/>
-            </a:lnRef>
-            <a:fillRef idx="3">
-              <a:schemeClr val="accent1"/>
-            </a:fillRef>
-            <a:effectRef idx="0">
-              <a:schemeClr val="accent1"/>
-            </a:effectRef>
-            <a:fontRef idx="minor">
-              <a:schemeClr val="lt1"/>
-            </a:fontRef>
-          </p:style>
-          <p:txBody>
-            <a:bodyPr rtlCol="0" anchor="ctr"/>
-            <a:lstStyle/>
-            <a:p>
-              <a:pPr algn="ctr"/>
-            </a:p>
-          </p:txBody>
-        </p:sp>
-        <p:sp>
-          <p:nvSpPr>
-            <p:cNvPr id="15" name="P2 · 512B"/>
-            <p:cNvSpPr txBox="1"/>
-            <p:nvPr/>
-          </p:nvSpPr>
-          <p:spPr>
-            <a:xfrm>
-              <a:off x="5962650" y="2095499"/>
-              <a:ext cx="1419225" cy="276225"/>
-            </a:xfrm>
-            <a:prstGeom prst="rect">
-              <a:avLst/>
-            </a:prstGeom>
-            <a:noFill/>
-            <a:effectLst/>
-          </p:spPr>
-          <p:txBody>
-            <a:bodyPr wrap="square" lIns="0" rIns="0" tIns="0" bIns="0">
-              <a:spAutoFit/>
-            </a:bodyPr>
-            <a:lstStyle/>
-            <a:p>
-              <a:pPr algn="ctr">
-                <a:lnSpc>
-                  <a:spcPct val="112000"/>
-                </a:lnSpc>
-                <a:spcAft>
-                  <a:spcPts val="500"/>
-                </a:spcAft>
-              </a:pPr>
-              <a:r>
-                <a:rPr sz="1725" b="1" lang="zh-CN">
-                  <a:solidFill>
-                    <a:srgbClr val="285EA8"/>
-                  </a:solidFill>
-                  <a:latin typeface="Microsoft YaHei"/>
-                  <a:ea typeface="Microsoft YaHei"/>
-                </a:rPr>
-                <a:t>P2 · 512B</a:t>
-              </a:r>
-            </a:p>
-          </p:txBody>
-        </p:sp>
-        <p:sp>
-          <p:nvSpPr>
-            <p:cNvPr id="16" name="dp[0] = 0，其余初始不可达"/>
-            <p:cNvSpPr txBox="1"/>
-            <p:nvPr/>
-          </p:nvSpPr>
-          <p:spPr>
-            <a:xfrm>
-              <a:off x="7981949" y="2095499"/>
-              <a:ext cx="3600450" cy="285750"/>
-            </a:xfrm>
-            <a:prstGeom prst="rect">
-              <a:avLst/>
-            </a:prstGeom>
-            <a:noFill/>
-            <a:effectLst/>
-          </p:spPr>
-          <p:txBody>
-            <a:bodyPr wrap="square" lIns="0" rIns="0" tIns="0" bIns="0">
-              <a:spAutoFit/>
-            </a:bodyPr>
-            <a:lstStyle/>
-            <a:p>
-              <a:pPr algn="l">
-                <a:lnSpc>
-                  <a:spcPct val="112000"/>
-                </a:lnSpc>
-                <a:spcAft>
-                  <a:spcPts val="500"/>
-                </a:spcAft>
-              </a:pPr>
-              <a:r>
-                <a:rPr sz="1650" b="1" lang="zh-CN">
-                  <a:solidFill>
-                    <a:srgbClr val="1F2937"/>
-                  </a:solidFill>
-                  <a:latin typeface="Microsoft YaHei"/>
-                  <a:ea typeface="Microsoft YaHei"/>
-                </a:rPr>
-                <a:t>dp[0] = 0，其余初始不可达</a:t>
-              </a:r>
-            </a:p>
-          </p:txBody>
-        </p:sp>
-      </p:grpSp>
-      <p:sp>
-        <p:nvSpPr>
-          <p:cNvPr id="17" name="dp[j]：前 j 个片段的最低累计估价"/>
-          <p:cNvSpPr txBox="1"/>
-          <p:nvPr/>
-        </p:nvSpPr>
-        <p:spPr>
-          <a:xfrm>
-            <a:off x="609600" y="2581275"/>
-            <a:ext cx="4953000" cy="285750"/>
-          </a:xfrm>
-          <a:prstGeom prst="rect">
-            <a:avLst/>
-          </a:prstGeom>
-          <a:noFill/>
-          <a:effectLst/>
-        </p:spPr>
-        <p:txBody>
-          <a:bodyPr wrap="square" lIns="0" rIns="0" tIns="0" bIns="0">
-            <a:spAutoFit/>
-          </a:bodyPr>
-          <a:lstStyle/>
-          <a:p>
-            <a:pPr algn="l">
-              <a:lnSpc>
-                <a:spcPct val="112000"/>
-              </a:lnSpc>
-              <a:spcAft>
-                <a:spcPts val="500"/>
-              </a:spcAft>
-            </a:pPr>
-            <a:r>
-              <a:rPr sz="1650" b="1" lang="zh-CN">
-                <a:solidFill>
-                  <a:srgbClr val="657184"/>
-                </a:solidFill>
-                <a:latin typeface="Microsoft YaHei"/>
-                <a:ea typeface="Microsoft YaHei"/>
-              </a:rPr>
-              <a:t>dp[j]：前 j 个片段的最低累计估价</a:t>
-            </a:r>
-          </a:p>
-        </p:txBody>
-      </p:sp>
-      <p:sp>
-        <p:nvSpPr>
-          <p:cNvPr id="18" name="Rectangle 17"/>
-          <p:cNvSpPr/>
-          <p:nvPr/>
-        </p:nvSpPr>
-        <p:spPr>
-          <a:xfrm>
-            <a:off x="609600" y="2952750"/>
-            <a:ext cx="4953000" cy="1790700"/>
-          </a:xfrm>
-          <a:prstGeom prst="rect">
-            <a:avLst/>
-          </a:prstGeom>
-          <a:solidFill>
-            <a:srgbClr val="F5F7FA"/>
-          </a:solidFill>
-          <a:ln>
-            <a:noFill/>
-          </a:ln>
-          <a:effectLst/>
-        </p:spPr>
-        <p:style>
-          <a:lnRef idx="1">
-            <a:schemeClr val="accent1"/>
-          </a:lnRef>
-          <a:fillRef idx="3">
-            <a:schemeClr val="accent1"/>
-          </a:fillRef>
-          <a:effectRef idx="0">
-            <a:schemeClr val="accent1"/>
-          </a:effectRef>
-          <a:fontRef idx="minor">
-            <a:schemeClr val="lt1"/>
-          </a:fontRef>
-        </p:style>
-        <p:txBody>
-          <a:bodyPr rtlCol="0" anchor="ctr"/>
-          <a:lstStyle/>
-          <a:p>
-            <a:pPr algn="ctr"/>
-          </a:p>
-        </p:txBody>
-      </p:sp>
-      <p:grpSp>
-        <p:nvGrpSpPr>
-          <p:cNvPr id="19" name="步骤2：快速阶段枚举合法分组和路径"/>
-          <p:cNvGrpSpPr/>
-          <p:nvPr/>
-        </p:nvGrpSpPr>
-        <p:grpSpPr>
-          <a:xfrm>
-            <a:off x="781050" y="2581275"/>
-            <a:ext cx="10801350" cy="1600200"/>
-            <a:chOff x="781050" y="2581275"/>
-            <a:chExt cx="10801350" cy="1600200"/>
-          </a:xfrm>
-        </p:grpSpPr>
-        <p:sp>
-          <p:nvSpPr>
-            <p:cNvPr id="20" name="for (合法的 [i,j), path) {   v = dp[i] + estimate(...);"/>
-            <p:cNvSpPr txBox="1"/>
-            <p:nvPr/>
-          </p:nvSpPr>
-          <p:spPr>
-            <a:xfrm>
-              <a:off x="781050" y="3067050"/>
-              <a:ext cx="4686300" cy="619125"/>
-            </a:xfrm>
-            <a:prstGeom prst="rect">
-              <a:avLst/>
-            </a:prstGeom>
-            <a:noFill/>
-            <a:effectLst/>
-          </p:spPr>
-          <p:txBody>
-            <a:bodyPr wrap="square" lIns="0" rIns="0" tIns="0" bIns="0">
-              <a:spAutoFit/>
-            </a:bodyPr>
-            <a:lstStyle/>
-            <a:p>
-              <a:pPr algn="l">
-                <a:lnSpc>
-                  <a:spcPct val="112000"/>
-                </a:lnSpc>
-                <a:spcAft>
-                  <a:spcPts val="500"/>
-                </a:spcAft>
-              </a:pPr>
-              <a:r>
-                <a:rPr sz="1575" b="1" lang="zh-CN">
-                  <a:solidFill>
-                    <a:srgbClr val="285EA8"/>
-                  </a:solidFill>
-                  <a:latin typeface="Microsoft YaHei"/>
-                  <a:ea typeface="Microsoft YaHei"/>
-                </a:rPr>
-                <a:t>for (合法的 [i,j), path) {</a:t>
-              </a:r>
-            </a:p>
-            <a:p>
-              <a:pPr algn="l">
-                <a:lnSpc>
-                  <a:spcPct val="112000"/>
-                </a:lnSpc>
-                <a:spcAft>
-                  <a:spcPts val="500"/>
-                </a:spcAft>
-              </a:pPr>
-              <a:r>
-                <a:rPr sz="1575" b="1" lang="zh-CN">
-                  <a:solidFill>
-                    <a:srgbClr val="285EA8"/>
-                  </a:solidFill>
-                  <a:latin typeface="Microsoft YaHei"/>
-                  <a:ea typeface="Microsoft YaHei"/>
-                </a:rPr>
-                <a:t>  v = dp[i] + estimate(...);</a:t>
-              </a:r>
-            </a:p>
-          </p:txBody>
-        </p:sp>
-        <p:sp>
-          <p:nvSpPr>
-            <p:cNvPr id="21" name="快速阶段：SSD / 复制并发均估为 3，空池"/>
-            <p:cNvSpPr txBox="1"/>
-            <p:nvPr/>
-          </p:nvSpPr>
-          <p:spPr>
-            <a:xfrm>
-              <a:off x="5924550" y="2581275"/>
-              <a:ext cx="5657850" cy="285750"/>
-            </a:xfrm>
-            <a:prstGeom prst="rect">
-              <a:avLst/>
-            </a:prstGeom>
-            <a:noFill/>
-            <a:effectLst/>
-          </p:spPr>
-          <p:txBody>
-            <a:bodyPr wrap="square" lIns="0" rIns="0" tIns="0" bIns="0">
-              <a:spAutoFit/>
-            </a:bodyPr>
-            <a:lstStyle/>
-            <a:p>
-              <a:pPr algn="l">
-                <a:lnSpc>
-                  <a:spcPct val="112000"/>
-                </a:lnSpc>
-                <a:spcAft>
-                  <a:spcPts val="500"/>
-                </a:spcAft>
-              </a:pPr>
-              <a:r>
-                <a:rPr sz="1575" b="1" lang="zh-CN">
-                  <a:solidFill>
-                    <a:srgbClr val="1F2937"/>
-                  </a:solidFill>
-                  <a:latin typeface="Microsoft YaHei"/>
-                  <a:ea typeface="Microsoft YaHei"/>
-                </a:rPr>
-                <a:t>快速阶段：SSD / 复制并发均估为 3，空池</a:t>
-              </a:r>
-            </a:p>
-          </p:txBody>
-        </p:sp>
-        <p:sp>
-          <p:nvSpPr>
-            <p:cNvPr id="22" name="Rectangle 21"/>
-            <p:cNvSpPr/>
-            <p:nvPr/>
-          </p:nvSpPr>
-          <p:spPr>
-            <a:xfrm>
-              <a:off x="5924550" y="2952750"/>
-              <a:ext cx="5657850" cy="314325"/>
+              <a:ext cx="3143250" cy="1114425"/>
             </a:xfrm>
             <a:prstGeom prst="rect">
               <a:avLst/>
@@ -11415,14 +10738,14 @@
         </p:sp>
         <p:sp>
           <p:nvSpPr>
-            <p:cNvPr id="23" name="路径"/>
+            <p:cNvPr id="10" name="① 快速 DP：先有方案"/>
             <p:cNvSpPr txBox="1"/>
             <p:nvPr/>
           </p:nvSpPr>
           <p:spPr>
             <a:xfrm>
-              <a:off x="6038850" y="3000375"/>
-              <a:ext cx="1685925" cy="238125"/>
+              <a:off x="762000" y="2209800"/>
+              <a:ext cx="2838450" cy="285750"/>
             </a:xfrm>
             <a:prstGeom prst="rect">
               <a:avLst/>
@@ -11445,28 +10768,28 @@
                 </a:spcAft>
               </a:pPr>
               <a:r>
-                <a:rPr sz="1425" b="1" lang="zh-CN">
+                <a:rPr sz="1800" b="1" lang="zh-CN">
                   <a:solidFill>
                     <a:srgbClr val="285EA8"/>
                   </a:solidFill>
                   <a:latin typeface="Microsoft YaHei"/>
                   <a:ea typeface="Microsoft YaHei"/>
                 </a:rPr>
-                <a:t>路径</a:t>
+                <a:t>① 快速 DP：先有方案</a:t>
               </a:r>
             </a:p>
           </p:txBody>
         </p:sp>
         <p:sp>
           <p:nvSpPr>
-            <p:cNvPr id="24" name="读μs + 复制μs + 调用费 = E"/>
+            <p:cNvPr id="11" name="联合选分组和路径 同时得到各卡的复制路径占比"/>
             <p:cNvSpPr txBox="1"/>
             <p:nvPr/>
           </p:nvSpPr>
           <p:spPr>
             <a:xfrm>
-              <a:off x="7848600" y="3000375"/>
-              <a:ext cx="3609975" cy="238125"/>
+              <a:off x="762000" y="2619375"/>
+              <a:ext cx="2838450" cy="504825"/>
             </a:xfrm>
             <a:prstGeom prst="rect">
               <a:avLst/>
@@ -11489,337 +10812,14 @@
                 </a:spcAft>
               </a:pPr>
               <a:r>
-                <a:rPr sz="1425" b="1" lang="zh-CN">
-                  <a:solidFill>
-                    <a:srgbClr val="285EA8"/>
-                  </a:solidFill>
-                  <a:latin typeface="Microsoft YaHei"/>
-                  <a:ea typeface="Microsoft YaHei"/>
-                </a:rPr>
-                <a:t>读μs + 复制μs + 调用费 = E</a:t>
-              </a:r>
-            </a:p>
-          </p:txBody>
-        </p:sp>
-        <p:sp>
-          <p:nvSpPr>
-            <p:cNvPr id="25" name="DIRECT"/>
-            <p:cNvSpPr txBox="1"/>
-            <p:nvPr/>
-          </p:nvSpPr>
-          <p:spPr>
-            <a:xfrm>
-              <a:off x="6038850" y="3343275"/>
-              <a:ext cx="1714500" cy="266700"/>
-            </a:xfrm>
-            <a:prstGeom prst="rect">
-              <a:avLst/>
-            </a:prstGeom>
-            <a:noFill/>
-            <a:effectLst/>
-          </p:spPr>
-          <p:txBody>
-            <a:bodyPr wrap="square" lIns="0" rIns="0" tIns="0" bIns="0">
-              <a:spAutoFit/>
-            </a:bodyPr>
-            <a:lstStyle/>
-            <a:p>
-              <a:pPr algn="l">
-                <a:lnSpc>
-                  <a:spcPct val="112000"/>
-                </a:lnSpc>
-                <a:spcAft>
-                  <a:spcPts val="500"/>
-                </a:spcAft>
-              </a:pPr>
-              <a:r>
-                <a:rPr sz="1500" b="1" lang="zh-CN">
-                  <a:solidFill>
-                    <a:srgbClr val="285EA8"/>
-                  </a:solidFill>
-                  <a:latin typeface="Microsoft YaHei"/>
-                  <a:ea typeface="Microsoft YaHei"/>
-                </a:rPr>
-                <a:t>DIRECT</a:t>
-              </a:r>
-            </a:p>
-          </p:txBody>
-        </p:sp>
-        <p:sp>
-          <p:nvSpPr>
-            <p:cNvPr id="26" name="3.406 + 0 + 2 = 5.406"/>
-            <p:cNvSpPr txBox="1"/>
-            <p:nvPr/>
-          </p:nvSpPr>
-          <p:spPr>
-            <a:xfrm>
-              <a:off x="7848600" y="3343275"/>
-              <a:ext cx="3619500" cy="266700"/>
-            </a:xfrm>
-            <a:prstGeom prst="rect">
-              <a:avLst/>
-            </a:prstGeom>
-            <a:noFill/>
-            <a:effectLst/>
-          </p:spPr>
-          <p:txBody>
-            <a:bodyPr wrap="square" lIns="0" rIns="0" tIns="0" bIns="0">
-              <a:spAutoFit/>
-            </a:bodyPr>
-            <a:lstStyle/>
-            <a:p>
-              <a:pPr algn="l">
-                <a:lnSpc>
-                  <a:spcPct val="112000"/>
-                </a:lnSpc>
-                <a:spcAft>
-                  <a:spcPts val="500"/>
-                </a:spcAft>
-              </a:pPr>
-              <a:r>
-                <a:rPr sz="1500" b="1" lang="zh-CN">
-                  <a:solidFill>
-                    <a:srgbClr val="285EA8"/>
-                  </a:solidFill>
-                  <a:latin typeface="Microsoft YaHei"/>
-                  <a:ea typeface="Microsoft YaHei"/>
-                </a:rPr>
-                <a:t>3.406 + 0 + 2 = 5.406</a:t>
-              </a:r>
-            </a:p>
-          </p:txBody>
-        </p:sp>
-        <p:sp>
-          <p:nvSpPr>
-            <p:cNvPr id="27" name="AGGREGATE"/>
-            <p:cNvSpPr txBox="1"/>
-            <p:nvPr/>
-          </p:nvSpPr>
-          <p:spPr>
-            <a:xfrm>
-              <a:off x="6038850" y="3629025"/>
-              <a:ext cx="1714500" cy="266700"/>
-            </a:xfrm>
-            <a:prstGeom prst="rect">
-              <a:avLst/>
-            </a:prstGeom>
-            <a:noFill/>
-            <a:effectLst/>
-          </p:spPr>
-          <p:txBody>
-            <a:bodyPr wrap="square" lIns="0" rIns="0" tIns="0" bIns="0">
-              <a:spAutoFit/>
-            </a:bodyPr>
-            <a:lstStyle/>
-            <a:p>
-              <a:pPr algn="l">
-                <a:lnSpc>
-                  <a:spcPct val="112000"/>
-                </a:lnSpc>
-                <a:spcAft>
-                  <a:spcPts val="500"/>
-                </a:spcAft>
-              </a:pPr>
-              <a:r>
-                <a:rPr sz="1500" b="0" lang="zh-CN">
+                <a:rPr sz="1575" b="0" lang="zh-CN">
                   <a:solidFill>
                     <a:srgbClr val="1F2937"/>
                   </a:solidFill>
                   <a:latin typeface="Microsoft YaHei"/>
                   <a:ea typeface="Microsoft YaHei"/>
                 </a:rPr>
-                <a:t>AGGREGATE</a:t>
-              </a:r>
-            </a:p>
-          </p:txBody>
-        </p:sp>
-        <p:sp>
-          <p:nvSpPr>
-            <p:cNvPr id="28" name="3.406 + 24.414 + 5 = 32.820"/>
-            <p:cNvSpPr txBox="1"/>
-            <p:nvPr/>
-          </p:nvSpPr>
-          <p:spPr>
-            <a:xfrm>
-              <a:off x="7848600" y="3629025"/>
-              <a:ext cx="3619500" cy="266700"/>
-            </a:xfrm>
-            <a:prstGeom prst="rect">
-              <a:avLst/>
-            </a:prstGeom>
-            <a:noFill/>
-            <a:effectLst/>
-          </p:spPr>
-          <p:txBody>
-            <a:bodyPr wrap="square" lIns="0" rIns="0" tIns="0" bIns="0">
-              <a:spAutoFit/>
-            </a:bodyPr>
-            <a:lstStyle/>
-            <a:p>
-              <a:pPr algn="l">
-                <a:lnSpc>
-                  <a:spcPct val="112000"/>
-                </a:lnSpc>
-                <a:spcAft>
-                  <a:spcPts val="500"/>
-                </a:spcAft>
-              </a:pPr>
-              <a:r>
-                <a:rPr sz="1500" b="0" lang="zh-CN">
-                  <a:solidFill>
-                    <a:srgbClr val="1F2937"/>
-                  </a:solidFill>
-                  <a:latin typeface="Microsoft YaHei"/>
-                  <a:ea typeface="Microsoft YaHei"/>
-                </a:rPr>
-                <a:t>3.406 + 24.414 + 5 = 32.820</a:t>
-              </a:r>
-            </a:p>
-          </p:txBody>
-        </p:sp>
-        <p:sp>
-          <p:nvSpPr>
-            <p:cNvPr id="29" name="FALLBACK"/>
-            <p:cNvSpPr txBox="1"/>
-            <p:nvPr/>
-          </p:nvSpPr>
-          <p:spPr>
-            <a:xfrm>
-              <a:off x="6038850" y="3914775"/>
-              <a:ext cx="1714500" cy="266700"/>
-            </a:xfrm>
-            <a:prstGeom prst="rect">
-              <a:avLst/>
-            </a:prstGeom>
-            <a:noFill/>
-            <a:effectLst/>
-          </p:spPr>
-          <p:txBody>
-            <a:bodyPr wrap="square" lIns="0" rIns="0" tIns="0" bIns="0">
-              <a:spAutoFit/>
-            </a:bodyPr>
-            <a:lstStyle/>
-            <a:p>
-              <a:pPr algn="l">
-                <a:lnSpc>
-                  <a:spcPct val="112000"/>
-                </a:lnSpc>
-                <a:spcAft>
-                  <a:spcPts val="500"/>
-                </a:spcAft>
-              </a:pPr>
-              <a:r>
-                <a:rPr sz="1500" b="0" lang="zh-CN">
-                  <a:solidFill>
-                    <a:srgbClr val="1F2937"/>
-                  </a:solidFill>
-                  <a:latin typeface="Microsoft YaHei"/>
-                  <a:ea typeface="Microsoft YaHei"/>
-                </a:rPr>
-                <a:t>FALLBACK</a:t>
-              </a:r>
-            </a:p>
-          </p:txBody>
-        </p:sp>
-        <p:sp>
-          <p:nvSpPr>
-            <p:cNvPr id="30" name="3.406 + 7.153 + 12 = 22.559"/>
-            <p:cNvSpPr txBox="1"/>
-            <p:nvPr/>
-          </p:nvSpPr>
-          <p:spPr>
-            <a:xfrm>
-              <a:off x="7848600" y="3914775"/>
-              <a:ext cx="3619500" cy="266700"/>
-            </a:xfrm>
-            <a:prstGeom prst="rect">
-              <a:avLst/>
-            </a:prstGeom>
-            <a:noFill/>
-            <a:effectLst/>
-          </p:spPr>
-          <p:txBody>
-            <a:bodyPr wrap="square" lIns="0" rIns="0" tIns="0" bIns="0">
-              <a:spAutoFit/>
-            </a:bodyPr>
-            <a:lstStyle/>
-            <a:p>
-              <a:pPr algn="l">
-                <a:lnSpc>
-                  <a:spcPct val="112000"/>
-                </a:lnSpc>
-                <a:spcAft>
-                  <a:spcPts val="500"/>
-                </a:spcAft>
-              </a:pPr>
-              <a:r>
-                <a:rPr sz="1500" b="0" lang="zh-CN">
-                  <a:solidFill>
-                    <a:srgbClr val="1F2937"/>
-                  </a:solidFill>
-                  <a:latin typeface="Microsoft YaHei"/>
-                  <a:ea typeface="Microsoft YaHei"/>
-                </a:rPr>
-                <a:t>3.406 + 7.153 + 12 = 22.559</a:t>
-              </a:r>
-            </a:p>
-          </p:txBody>
-        </p:sp>
-      </p:grpSp>
-      <p:grpSp>
-        <p:nvGrpSpPr>
-          <p:cNvPr id="31" name="步骤3：更新累计估价并记录边界和路径"/>
-          <p:cNvGrpSpPr/>
-          <p:nvPr/>
-        </p:nvGrpSpPr>
-        <p:grpSpPr>
-          <a:xfrm>
-            <a:off x="781050" y="3648075"/>
-            <a:ext cx="10801350" cy="1152525"/>
-            <a:chOff x="781050" y="3648075"/>
-            <a:chExt cx="10801350" cy="1152525"/>
-          </a:xfrm>
-        </p:grpSpPr>
-        <p:sp>
-          <p:nvSpPr>
-            <p:cNvPr id="32" name="  if (v &lt; dp[j]) {     dp[j]=v; prev[j]=i; paths[j]=path;   } }"/>
-            <p:cNvSpPr txBox="1"/>
-            <p:nvPr/>
-          </p:nvSpPr>
-          <p:spPr>
-            <a:xfrm>
-              <a:off x="781050" y="3648075"/>
-              <a:ext cx="4686300" cy="1028700"/>
-            </a:xfrm>
-            <a:prstGeom prst="rect">
-              <a:avLst/>
-            </a:prstGeom>
-            <a:noFill/>
-            <a:effectLst/>
-          </p:spPr>
-          <p:txBody>
-            <a:bodyPr wrap="square" lIns="0" rIns="0" tIns="0" bIns="0">
-              <a:spAutoFit/>
-            </a:bodyPr>
-            <a:lstStyle/>
-            <a:p>
-              <a:pPr algn="l">
-                <a:lnSpc>
-                  <a:spcPct val="112000"/>
-                </a:lnSpc>
-                <a:spcAft>
-                  <a:spcPts val="500"/>
-                </a:spcAft>
-              </a:pPr>
-              <a:r>
-                <a:rPr sz="1425" b="1" lang="zh-CN">
-                  <a:solidFill>
-                    <a:srgbClr val="24756D"/>
-                  </a:solidFill>
-                  <a:latin typeface="Microsoft YaHei"/>
-                  <a:ea typeface="Microsoft YaHei"/>
-                </a:rPr>
-                <a:t>  if (v &lt; dp[j]) {</a:t>
+                <a:t>联合选分组和路径</a:t>
               </a:r>
             </a:p>
             <a:p>
@@ -11832,142 +10832,14 @@
                 </a:spcAft>
               </a:pPr>
               <a:r>
-                <a:rPr sz="1425" b="1" lang="zh-CN">
-                  <a:solidFill>
-                    <a:srgbClr val="24756D"/>
-                  </a:solidFill>
-                  <a:latin typeface="Microsoft YaHei"/>
-                  <a:ea typeface="Microsoft YaHei"/>
-                </a:rPr>
-                <a:t>    dp[j]=v; prev[j]=i; paths[j]=path;</a:t>
-              </a:r>
-            </a:p>
-            <a:p>
-              <a:pPr algn="l">
-                <a:lnSpc>
-                  <a:spcPct val="112000"/>
-                </a:lnSpc>
-                <a:spcAft>
-                  <a:spcPts val="500"/>
-                </a:spcAft>
-              </a:pPr>
-              <a:r>
-                <a:rPr sz="1425" b="1" lang="zh-CN">
-                  <a:solidFill>
-                    <a:srgbClr val="24756D"/>
-                  </a:solidFill>
-                  <a:latin typeface="Microsoft YaHei"/>
-                  <a:ea typeface="Microsoft YaHei"/>
-                </a:rPr>
-                <a:t>  }</a:t>
-              </a:r>
-            </a:p>
-            <a:p>
-              <a:pPr algn="l">
-                <a:lnSpc>
-                  <a:spcPct val="112000"/>
-                </a:lnSpc>
-                <a:spcAft>
-                  <a:spcPts val="500"/>
-                </a:spcAft>
-              </a:pPr>
-              <a:r>
-                <a:rPr sz="1425" b="1" lang="zh-CN">
-                  <a:solidFill>
-                    <a:srgbClr val="24756D"/>
-                  </a:solidFill>
-                  <a:latin typeface="Microsoft YaHei"/>
-                  <a:ea typeface="Microsoft YaHei"/>
-                </a:rPr>
-                <a:t>}</a:t>
-              </a:r>
-            </a:p>
-          </p:txBody>
-        </p:sp>
-        <p:sp>
-          <p:nvSpPr>
-            <p:cNvPr id="33" name="dp[1]=3.135；dp[2]=4.271；dp[3]=5.406"/>
-            <p:cNvSpPr txBox="1"/>
-            <p:nvPr/>
-          </p:nvSpPr>
-          <p:spPr>
-            <a:xfrm>
-              <a:off x="5924550" y="4286250"/>
-              <a:ext cx="5657850" cy="238125"/>
-            </a:xfrm>
-            <a:prstGeom prst="rect">
-              <a:avLst/>
-            </a:prstGeom>
-            <a:noFill/>
-            <a:effectLst/>
-          </p:spPr>
-          <p:txBody>
-            <a:bodyPr wrap="square" lIns="0" rIns="0" tIns="0" bIns="0">
-              <a:spAutoFit/>
-            </a:bodyPr>
-            <a:lstStyle/>
-            <a:p>
-              <a:pPr algn="l">
-                <a:lnSpc>
-                  <a:spcPct val="112000"/>
-                </a:lnSpc>
-                <a:spcAft>
-                  <a:spcPts val="500"/>
-                </a:spcAft>
-              </a:pPr>
-              <a:r>
-                <a:rPr sz="1575" b="1" lang="zh-CN">
-                  <a:solidFill>
-                    <a:srgbClr val="285EA8"/>
-                  </a:solidFill>
-                  <a:latin typeface="Microsoft YaHei"/>
-                  <a:ea typeface="Microsoft YaHei"/>
-                </a:rPr>
-                <a:t>dp[1]=3.135；dp[2]=4.271；dp[3]=5.406</a:t>
-              </a:r>
-            </a:p>
-          </p:txBody>
-        </p:sp>
-        <p:sp>
-          <p:nvSpPr>
-            <p:cNvPr id="34" name="快速 DP 输出：[P0,P1,P2] → DIRECT，E=5.406。"/>
-            <p:cNvSpPr txBox="1"/>
-            <p:nvPr/>
-          </p:nvSpPr>
-          <p:spPr>
-            <a:xfrm>
-              <a:off x="5924550" y="4572000"/>
-              <a:ext cx="5657850" cy="228600"/>
-            </a:xfrm>
-            <a:prstGeom prst="rect">
-              <a:avLst/>
-            </a:prstGeom>
-            <a:noFill/>
-            <a:effectLst/>
-          </p:spPr>
-          <p:txBody>
-            <a:bodyPr wrap="square" lIns="0" rIns="0" tIns="0" bIns="0">
-              <a:spAutoFit/>
-            </a:bodyPr>
-            <a:lstStyle/>
-            <a:p>
-              <a:pPr algn="l">
-                <a:lnSpc>
-                  <a:spcPct val="112000"/>
-                </a:lnSpc>
-                <a:spcAft>
-                  <a:spcPts val="500"/>
-                </a:spcAft>
-              </a:pPr>
-              <a:r>
-                <a:rPr sz="1500" b="0" lang="zh-CN">
+                <a:rPr sz="1575" b="0" lang="zh-CN">
                   <a:solidFill>
                     <a:srgbClr val="1F2937"/>
                   </a:solidFill>
                   <a:latin typeface="Microsoft YaHei"/>
                   <a:ea typeface="Microsoft YaHei"/>
                 </a:rPr>
-                <a:t>快速 DP 输出：[P0,P1,P2] → DIRECT，E=5.406。</a:t>
+                <a:t>同时得到各卡的复制路径占比</a:t>
               </a:r>
             </a:p>
           </p:txBody>
@@ -11975,28 +10847,65 @@
       </p:grpSp>
       <p:grpSp>
         <p:nvGrpSpPr>
-          <p:cNvPr id="35" name="步骤4：有条件地按细化 DP"/>
+          <p:cNvPr id="12" name="步骤2：沿用候选与基础方案统计，按需细化"/>
           <p:cNvGrpSpPr/>
           <p:nvPr/>
         </p:nvGrpSpPr>
         <p:grpSpPr>
           <a:xfrm>
-            <a:off x="609600" y="4943475"/>
-            <a:ext cx="10972800" cy="657225"/>
-            <a:chOff x="609600" y="4943475"/>
-            <a:chExt cx="10972800" cy="657225"/>
+            <a:off x="3829050" y="2076450"/>
+            <a:ext cx="3857624" cy="1114425"/>
+            <a:chOff x="3829050" y="2076450"/>
+            <a:chExt cx="3857624" cy="1114425"/>
           </a:xfrm>
         </p:grpSpPr>
+        <p:cxnSp>
+          <p:nvCxnSpPr>
+            <p:cNvPr id="13" name="Connector 12"/>
+            <p:cNvCxnSpPr/>
+            <p:nvPr/>
+          </p:nvCxnSpPr>
+          <p:spPr>
+            <a:xfrm>
+              <a:off x="3829050" y="2609850"/>
+              <a:ext cx="238125" cy="0"/>
+            </a:xfrm>
+            <a:prstGeom prst="line">
+              <a:avLst/>
+            </a:prstGeom>
+            <a:ln w="20320">
+              <a:solidFill>
+                <a:srgbClr val="285EA8"/>
+              </a:solidFill>
+              <a:tailEnd type="triangle"/>
+            </a:ln>
+            <a:effectLst/>
+          </p:spPr>
+          <p:style>
+            <a:lnRef idx="2">
+              <a:schemeClr val="accent1"/>
+            </a:lnRef>
+            <a:fillRef idx="0">
+              <a:schemeClr val="accent1"/>
+            </a:fillRef>
+            <a:effectRef idx="0">
+              <a:schemeClr val="accent1"/>
+            </a:effectRef>
+            <a:fontRef idx="minor">
+              <a:schemeClr val="tx1"/>
+            </a:fontRef>
+          </p:style>
+        </p:cxnSp>
         <p:sp>
           <p:nvSpPr>
-            <p:cNvPr id="36" name="Rectangle 35"/>
+            <p:cNvPr id="14" name="Rectangle 13"/>
             <p:cNvSpPr/>
             <p:nvPr/>
           </p:nvSpPr>
           <p:spPr>
             <a:xfrm>
-              <a:off x="609600" y="4943475"/>
-              <a:ext cx="10972800" cy="657225"/>
+              <a:off x="4190999" y="2076450"/>
+              <a:ext cx="3495675" cy="1114425"/>
             </a:xfrm>
             <a:prstGeom prst="rect">
               <a:avLst/>
@@ -12033,14 +10942,14 @@
         </p:sp>
         <p:sp>
           <p:nvSpPr>
-            <p:cNvPr id="37" name="细化 DP：空闲且规模、预算允许时，采样候选组数 cnt、重估并发，检查总槽位与池容量。"/>
+            <p:cNvPr id="15" name="② 细化 DP：按组数重估"/>
             <p:cNvSpPr txBox="1"/>
             <p:nvPr/>
           </p:nvSpPr>
           <p:spPr>
             <a:xfrm>
-              <a:off x="781050" y="5029200"/>
-              <a:ext cx="10629900" cy="276225"/>
+              <a:off x="4343400" y="2209800"/>
+              <a:ext cx="3190875" cy="285750"/>
             </a:xfrm>
             <a:prstGeom prst="rect">
               <a:avLst/>
@@ -12063,28 +10972,487 @@
                 </a:spcAft>
               </a:pPr>
               <a:r>
-                <a:rPr sz="1725" b="1" lang="zh-CN">
+                <a:rPr sz="1800" b="1" lang="zh-CN">
                   <a:solidFill>
                     <a:srgbClr val="24756D"/>
                   </a:solidFill>
                   <a:latin typeface="Microsoft YaHei"/>
                   <a:ea typeface="Microsoft YaHei"/>
                 </a:rPr>
-                <a:t>细化 DP：空闲且规模、预算允许时，采样候选组数 cnt、重估并发，检查总槽位与池容量。</a:t>
+                <a:t>② 细化 DP：按组数重估</a:t>
               </a:r>
             </a:p>
           </p:txBody>
         </p:sp>
         <p:sp>
           <p:nvSpPr>
-            <p:cNvPr id="38" name="1/2/3 组的最优 E=5.406/7.406/9.406 → 仍输出 1 组 DIRECT；AGG 重估 32.820 → 81.648。"/>
+            <p:cNvPr id="16" name="沿用候选，重估 SSD / 复制并发 重新选择分组和路径"/>
             <p:cNvSpPr txBox="1"/>
             <p:nvPr/>
           </p:nvSpPr>
           <p:spPr>
             <a:xfrm>
-              <a:off x="781050" y="5362575"/>
-              <a:ext cx="10629900" cy="228600"/>
+              <a:off x="4343400" y="2619375"/>
+              <a:ext cx="3190875" cy="504825"/>
+            </a:xfrm>
+            <a:prstGeom prst="rect">
+              <a:avLst/>
+            </a:prstGeom>
+            <a:noFill/>
+            <a:effectLst/>
+          </p:spPr>
+          <p:txBody>
+            <a:bodyPr wrap="square" lIns="0" rIns="0" tIns="0" bIns="0">
+              <a:spAutoFit/>
+            </a:bodyPr>
+            <a:lstStyle/>
+            <a:p>
+              <a:pPr algn="l">
+                <a:lnSpc>
+                  <a:spcPct val="112000"/>
+                </a:lnSpc>
+                <a:spcAft>
+                  <a:spcPts val="500"/>
+                </a:spcAft>
+              </a:pPr>
+              <a:r>
+                <a:rPr sz="1575" b="0" lang="zh-CN">
+                  <a:solidFill>
+                    <a:srgbClr val="1F2937"/>
+                  </a:solidFill>
+                  <a:latin typeface="Microsoft YaHei"/>
+                  <a:ea typeface="Microsoft YaHei"/>
+                </a:rPr>
+                <a:t>沿用候选，重估 SSD / 复制并发</a:t>
+              </a:r>
+            </a:p>
+            <a:p>
+              <a:pPr algn="l">
+                <a:lnSpc>
+                  <a:spcPct val="112000"/>
+                </a:lnSpc>
+                <a:spcAft>
+                  <a:spcPts val="500"/>
+                </a:spcAft>
+              </a:pPr>
+              <a:r>
+                <a:rPr sz="1575" b="0" lang="zh-CN">
+                  <a:solidFill>
+                    <a:srgbClr val="1F2937"/>
+                  </a:solidFill>
+                  <a:latin typeface="Microsoft YaHei"/>
+                  <a:ea typeface="Microsoft YaHei"/>
+                </a:rPr>
+                <a:t>重新选择分组和路径</a:t>
+              </a:r>
+            </a:p>
+          </p:txBody>
+        </p:sp>
+      </p:grpSp>
+      <p:grpSp>
+        <p:nvGrpSpPr>
+          <p:cNvPr id="17" name="步骤3：按条件选择唯一的提交方案"/>
+          <p:cNvGrpSpPr/>
+          <p:nvPr/>
+        </p:nvGrpSpPr>
+        <p:grpSpPr>
+          <a:xfrm>
+            <a:off x="609600" y="2076450"/>
+            <a:ext cx="10972800" cy="1524000"/>
+            <a:chOff x="609600" y="2076450"/>
+            <a:chExt cx="10972800" cy="1524000"/>
+          </a:xfrm>
+        </p:grpSpPr>
+        <p:cxnSp>
+          <p:nvCxnSpPr>
+            <p:cNvPr id="18" name="Connector 17"/>
+            <p:cNvCxnSpPr/>
+            <p:nvPr/>
+          </p:nvCxnSpPr>
+          <p:spPr>
+            <a:xfrm>
+              <a:off x="7762875" y="2609850"/>
+              <a:ext cx="238125" cy="0"/>
+            </a:xfrm>
+            <a:prstGeom prst="line">
+              <a:avLst/>
+            </a:prstGeom>
+            <a:ln w="20320">
+              <a:solidFill>
+                <a:srgbClr val="285EA8"/>
+              </a:solidFill>
+              <a:tailEnd type="triangle"/>
+            </a:ln>
+            <a:effectLst/>
+          </p:spPr>
+          <p:style>
+            <a:lnRef idx="2">
+              <a:schemeClr val="accent1"/>
+            </a:lnRef>
+            <a:fillRef idx="0">
+              <a:schemeClr val="accent1"/>
+            </a:fillRef>
+            <a:effectRef idx="0">
+              <a:schemeClr val="accent1"/>
+            </a:effectRef>
+            <a:fontRef idx="minor">
+              <a:schemeClr val="tx1"/>
+            </a:fontRef>
+          </p:style>
+        </p:cxnSp>
+        <p:sp>
+          <p:nvSpPr>
+            <p:cNvPr id="19" name="Rectangle 18"/>
+            <p:cNvSpPr/>
+            <p:nvPr/>
+          </p:nvSpPr>
+          <p:spPr>
+            <a:xfrm>
+              <a:off x="8124824" y="2076450"/>
+              <a:ext cx="3457575" cy="1114425"/>
+            </a:xfrm>
+            <a:prstGeom prst="rect">
+              <a:avLst/>
+            </a:prstGeom>
+            <a:solidFill>
+              <a:srgbClr val="EDF3FA"/>
+            </a:solidFill>
+            <a:ln>
+              <a:noFill/>
+            </a:ln>
+            <a:effectLst/>
+          </p:spPr>
+          <p:style>
+            <a:lnRef idx="1">
+              <a:schemeClr val="accent1"/>
+            </a:lnRef>
+            <a:fillRef idx="3">
+              <a:schemeClr val="accent1"/>
+            </a:fillRef>
+            <a:effectRef idx="0">
+              <a:schemeClr val="accent1"/>
+            </a:effectRef>
+            <a:fontRef idx="minor">
+              <a:schemeClr val="lt1"/>
+            </a:fontRef>
+          </p:style>
+          <p:txBody>
+            <a:bodyPr rtlCol="0" anchor="ctr"/>
+            <a:lstStyle/>
+            <a:p>
+              <a:pPr algn="ctr"/>
+            </a:p>
+          </p:txBody>
+        </p:sp>
+        <p:sp>
+          <p:nvSpPr>
+            <p:cNvPr id="20" name="③ 只提交一份最终方案"/>
+            <p:cNvSpPr txBox="1"/>
+            <p:nvPr/>
+          </p:nvSpPr>
+          <p:spPr>
+            <a:xfrm>
+              <a:off x="8277225" y="2209800"/>
+              <a:ext cx="3152775" cy="285750"/>
+            </a:xfrm>
+            <a:prstGeom prst="rect">
+              <a:avLst/>
+            </a:prstGeom>
+            <a:noFill/>
+            <a:effectLst/>
+          </p:spPr>
+          <p:txBody>
+            <a:bodyPr wrap="square" lIns="0" rIns="0" tIns="0" bIns="0">
+              <a:spAutoFit/>
+            </a:bodyPr>
+            <a:lstStyle/>
+            <a:p>
+              <a:pPr algn="l">
+                <a:lnSpc>
+                  <a:spcPct val="112000"/>
+                </a:lnSpc>
+                <a:spcAft>
+                  <a:spcPts val="500"/>
+                </a:spcAft>
+              </a:pPr>
+              <a:r>
+                <a:rPr sz="1800" b="1" lang="zh-CN">
+                  <a:solidFill>
+                    <a:srgbClr val="285EA8"/>
+                  </a:solidFill>
+                  <a:latin typeface="Microsoft YaHei"/>
+                  <a:ea typeface="Microsoft YaHei"/>
+                </a:rPr>
+                <a:t>③ 只提交一份最终方案</a:t>
+              </a:r>
+            </a:p>
+          </p:txBody>
+        </p:sp>
+        <p:sp>
+          <p:nvSpPr>
+            <p:cNvPr id="21" name="有可用细化候选：选其最低估价 否则：保留基础方案"/>
+            <p:cNvSpPr txBox="1"/>
+            <p:nvPr/>
+          </p:nvSpPr>
+          <p:spPr>
+            <a:xfrm>
+              <a:off x="8277225" y="2619375"/>
+              <a:ext cx="3152775" cy="504825"/>
+            </a:xfrm>
+            <a:prstGeom prst="rect">
+              <a:avLst/>
+            </a:prstGeom>
+            <a:noFill/>
+            <a:effectLst/>
+          </p:spPr>
+          <p:txBody>
+            <a:bodyPr wrap="square" lIns="0" rIns="0" tIns="0" bIns="0">
+              <a:spAutoFit/>
+            </a:bodyPr>
+            <a:lstStyle/>
+            <a:p>
+              <a:pPr algn="l">
+                <a:lnSpc>
+                  <a:spcPct val="112000"/>
+                </a:lnSpc>
+                <a:spcAft>
+                  <a:spcPts val="500"/>
+                </a:spcAft>
+              </a:pPr>
+              <a:r>
+                <a:rPr sz="1575" b="0" lang="zh-CN">
+                  <a:solidFill>
+                    <a:srgbClr val="1F2937"/>
+                  </a:solidFill>
+                  <a:latin typeface="Microsoft YaHei"/>
+                  <a:ea typeface="Microsoft YaHei"/>
+                </a:rPr>
+                <a:t>有可用细化候选：选其最低估价</a:t>
+              </a:r>
+            </a:p>
+            <a:p>
+              <a:pPr algn="l">
+                <a:lnSpc>
+                  <a:spcPct val="112000"/>
+                </a:lnSpc>
+                <a:spcAft>
+                  <a:spcPts val="500"/>
+                </a:spcAft>
+              </a:pPr>
+              <a:r>
+                <a:rPr sz="1575" b="0" lang="zh-CN">
+                  <a:solidFill>
+                    <a:srgbClr val="1F2937"/>
+                  </a:solidFill>
+                  <a:latin typeface="Microsoft YaHei"/>
+                  <a:ea typeface="Microsoft YaHei"/>
+                </a:rPr>
+                <a:t>否则：保留基础方案</a:t>
+              </a:r>
+            </a:p>
+          </p:txBody>
+        </p:sp>
+        <p:sp>
+          <p:nvSpPr>
+            <p:cNvPr id="22" name="细化入口：系统空闲，规模与预算允许；候选回溯后，还须通过总槽位与池容量检查。"/>
+            <p:cNvSpPr txBox="1"/>
+            <p:nvPr/>
+          </p:nvSpPr>
+          <p:spPr>
+            <a:xfrm>
+              <a:off x="609600" y="3324225"/>
+              <a:ext cx="10972800" cy="276225"/>
+            </a:xfrm>
+            <a:prstGeom prst="rect">
+              <a:avLst/>
+            </a:prstGeom>
+            <a:noFill/>
+            <a:effectLst/>
+          </p:spPr>
+          <p:txBody>
+            <a:bodyPr wrap="square" lIns="0" rIns="0" tIns="0" bIns="0">
+              <a:spAutoFit/>
+            </a:bodyPr>
+            <a:lstStyle/>
+            <a:p>
+              <a:pPr algn="l">
+                <a:lnSpc>
+                  <a:spcPct val="112000"/>
+                </a:lnSpc>
+                <a:spcAft>
+                  <a:spcPts val="500"/>
+                </a:spcAft>
+              </a:pPr>
+              <a:r>
+                <a:rPr sz="1650" b="1" lang="zh-CN">
+                  <a:solidFill>
+                    <a:srgbClr val="24756D"/>
+                  </a:solidFill>
+                  <a:latin typeface="Microsoft YaHei"/>
+                  <a:ea typeface="Microsoft YaHei"/>
+                </a:rPr>
+                <a:t>细化入口：系统空闲，规模与预算允许；候选回溯后，还须通过总槽位与池容量检查。</a:t>
+              </a:r>
+            </a:p>
+          </p:txBody>
+        </p:sp>
+      </p:grpSp>
+      <p:grpSp>
+        <p:nvGrpSpPr>
+          <p:cNvPr id="23" name="步骤4：同一个联合更新规则与三片段示例"/>
+          <p:cNvGrpSpPr/>
+          <p:nvPr/>
+        </p:nvGrpSpPr>
+        <p:grpSpPr>
+          <a:xfrm>
+            <a:off x="609600" y="3838575"/>
+            <a:ext cx="10972800" cy="1447800"/>
+            <a:chOff x="609600" y="3838575"/>
+            <a:chExt cx="10972800" cy="1447800"/>
+          </a:xfrm>
+        </p:grpSpPr>
+        <p:sp>
+          <p:nvSpPr>
+            <p:cNvPr id="24" name="Rectangle 23"/>
+            <p:cNvSpPr/>
+            <p:nvPr/>
+          </p:nvSpPr>
+          <p:spPr>
+            <a:xfrm>
+              <a:off x="609600" y="3838575"/>
+              <a:ext cx="5238750" cy="1447800"/>
+            </a:xfrm>
+            <a:prstGeom prst="rect">
+              <a:avLst/>
+            </a:prstGeom>
+            <a:solidFill>
+              <a:srgbClr val="F5F7FA"/>
+            </a:solidFill>
+            <a:ln>
+              <a:noFill/>
+            </a:ln>
+            <a:effectLst/>
+          </p:spPr>
+          <p:style>
+            <a:lnRef idx="1">
+              <a:schemeClr val="accent1"/>
+            </a:lnRef>
+            <a:fillRef idx="3">
+              <a:schemeClr val="accent1"/>
+            </a:fillRef>
+            <a:effectRef idx="0">
+              <a:schemeClr val="accent1"/>
+            </a:effectRef>
+            <a:fontRef idx="minor">
+              <a:schemeClr val="lt1"/>
+            </a:fontRef>
+          </p:style>
+          <p:txBody>
+            <a:bodyPr rtlCol="0" anchor="ctr"/>
+            <a:lstStyle/>
+            <a:p>
+              <a:pPr algn="ctr"/>
+            </a:p>
+          </p:txBody>
+        </p:sp>
+        <p:sp>
+          <p:nvSpPr>
+            <p:cNvPr id="25" name="核心更新：每次同时选择边界 i 与路径 path"/>
+            <p:cNvSpPr txBox="1"/>
+            <p:nvPr/>
+          </p:nvSpPr>
+          <p:spPr>
+            <a:xfrm>
+              <a:off x="781050" y="3962399"/>
+              <a:ext cx="4895850" cy="276225"/>
+            </a:xfrm>
+            <a:prstGeom prst="rect">
+              <a:avLst/>
+            </a:prstGeom>
+            <a:noFill/>
+            <a:effectLst/>
+          </p:spPr>
+          <p:txBody>
+            <a:bodyPr wrap="square" lIns="0" rIns="0" tIns="0" bIns="0">
+              <a:spAutoFit/>
+            </a:bodyPr>
+            <a:lstStyle/>
+            <a:p>
+              <a:pPr algn="l">
+                <a:lnSpc>
+                  <a:spcPct val="112000"/>
+                </a:lnSpc>
+                <a:spcAft>
+                  <a:spcPts val="500"/>
+                </a:spcAft>
+              </a:pPr>
+              <a:r>
+                <a:rPr sz="1650" b="1" lang="zh-CN">
+                  <a:solidFill>
+                    <a:srgbClr val="285EA8"/>
+                  </a:solidFill>
+                  <a:latin typeface="Microsoft YaHei"/>
+                  <a:ea typeface="Microsoft YaHei"/>
+                </a:rPr>
+                <a:t>核心更新：每次同时选择边界 i 与路径 path</a:t>
+              </a:r>
+            </a:p>
+          </p:txBody>
+        </p:sp>
+        <p:sp>
+          <p:nvSpPr>
+            <p:cNvPr id="26" name="dp[j] = min { dp[i] + E(i, j, path) }"/>
+            <p:cNvSpPr txBox="1"/>
+            <p:nvPr/>
+          </p:nvSpPr>
+          <p:spPr>
+            <a:xfrm>
+              <a:off x="781050" y="4343400"/>
+              <a:ext cx="4895850" cy="323850"/>
+            </a:xfrm>
+            <a:prstGeom prst="rect">
+              <a:avLst/>
+            </a:prstGeom>
+            <a:noFill/>
+            <a:effectLst/>
+          </p:spPr>
+          <p:txBody>
+            <a:bodyPr wrap="square" lIns="0" rIns="0" tIns="0" bIns="0">
+              <a:spAutoFit/>
+            </a:bodyPr>
+            <a:lstStyle/>
+            <a:p>
+              <a:pPr algn="l">
+                <a:lnSpc>
+                  <a:spcPct val="112000"/>
+                </a:lnSpc>
+                <a:spcAft>
+                  <a:spcPts val="500"/>
+                </a:spcAft>
+              </a:pPr>
+              <a:r>
+                <a:rPr sz="1875" b="1" lang="zh-CN">
+                  <a:solidFill>
+                    <a:srgbClr val="285EA8"/>
+                  </a:solidFill>
+                  <a:latin typeface="Microsoft YaHei"/>
+                  <a:ea typeface="Microsoft YaHei"/>
+                </a:rPr>
+                <a:t>dp[j] = min { dp[i] + E(i, j, path) }</a:t>
+              </a:r>
+            </a:p>
+          </p:txBody>
+        </p:sp>
+        <p:sp>
+          <p:nvSpPr>
+            <p:cNvPr id="27" name="记录前驱与路径；细化时增加已分组数 h， 用 D[h][j] 约束最终组数。"/>
+            <p:cNvSpPr txBox="1"/>
+            <p:nvPr/>
+          </p:nvSpPr>
+          <p:spPr>
+            <a:xfrm>
+              <a:off x="781050" y="4781550"/>
+              <a:ext cx="4895850" cy="409575"/>
             </a:xfrm>
             <a:prstGeom prst="rect">
               <a:avLst/>
@@ -12114,36 +11482,41 @@
                   <a:latin typeface="Microsoft YaHei"/>
                   <a:ea typeface="Microsoft YaHei"/>
                 </a:rPr>
-                <a:t>1/2/3 组的最优 E=5.406/7.406/9.406 → 仍输出 1 组 DIRECT；AGG 重估 32.820 → 81.648。</a:t>
+                <a:t>记录前驱与路径；细化时增加已分组数 h，</a:t>
+              </a:r>
+            </a:p>
+            <a:p>
+              <a:pPr algn="l">
+                <a:lnSpc>
+                  <a:spcPct val="112000"/>
+                </a:lnSpc>
+                <a:spcAft>
+                  <a:spcPts val="500"/>
+                </a:spcAft>
+              </a:pPr>
+              <a:r>
+                <a:rPr sz="1500" b="0" lang="zh-CN">
+                  <a:solidFill>
+                    <a:srgbClr val="1F2937"/>
+                  </a:solidFill>
+                  <a:latin typeface="Microsoft YaHei"/>
+                  <a:ea typeface="Microsoft YaHei"/>
+                </a:rPr>
+                <a:t>用 D[h][j] 约束最终组数。</a:t>
               </a:r>
             </a:p>
           </p:txBody>
         </p:sp>
-      </p:grpSp>
-      <p:grpSp>
-        <p:nvGrpSpPr>
-          <p:cNvPr id="39" name="步骤5：回溯输出与官方实际成本"/>
-          <p:cNvGrpSpPr/>
-          <p:nvPr/>
-        </p:nvGrpSpPr>
-        <p:grpSpPr>
-          <a:xfrm>
-            <a:off x="609600" y="5810250"/>
-            <a:ext cx="10972800" cy="295275"/>
-            <a:chOff x="609600" y="5810250"/>
-            <a:chExt cx="10972800" cy="295275"/>
-          </a:xfrm>
-        </p:grpSpPr>
         <p:sp>
           <p:nvSpPr>
-            <p:cNvPr id="40" name="最终：1 组 DIRECT 读 1536B；实际 T=4μs（向上取整），调用费=2，J=1×4+2=6。"/>
+            <p:cNvPr id="28" name="同卡相邻片段：512B + 512B + 512B"/>
             <p:cNvSpPr txBox="1"/>
             <p:nvPr/>
           </p:nvSpPr>
           <p:spPr>
             <a:xfrm>
-              <a:off x="609600" y="5810250"/>
-              <a:ext cx="10972800" cy="295275"/>
+              <a:off x="6191250" y="3848099"/>
+              <a:ext cx="5391150" cy="276225"/>
             </a:xfrm>
             <a:prstGeom prst="rect">
               <a:avLst/>
@@ -12166,19 +11539,298 @@
                 </a:spcAft>
               </a:pPr>
               <a:r>
-                <a:rPr sz="1800" b="1" lang="zh-CN">
+                <a:rPr sz="1650" b="1" lang="zh-CN">
+                  <a:solidFill>
+                    <a:srgbClr val="1F2937"/>
+                  </a:solidFill>
+                  <a:latin typeface="Microsoft YaHei"/>
+                  <a:ea typeface="Microsoft YaHei"/>
+                </a:rPr>
+                <a:t>同卡相邻片段：512B + 512B + 512B</a:t>
+              </a:r>
+            </a:p>
+          </p:txBody>
+        </p:sp>
+        <p:sp>
+          <p:nvSpPr>
+            <p:cNvPr id="29" name="细化候选组数       1          2          3"/>
+            <p:cNvSpPr txBox="1"/>
+            <p:nvPr/>
+          </p:nvSpPr>
+          <p:spPr>
+            <a:xfrm>
+              <a:off x="6191250" y="4267200"/>
+              <a:ext cx="5391150" cy="238125"/>
+            </a:xfrm>
+            <a:prstGeom prst="rect">
+              <a:avLst/>
+            </a:prstGeom>
+            <a:noFill/>
+            <a:effectLst/>
+          </p:spPr>
+          <p:txBody>
+            <a:bodyPr wrap="square" lIns="0" rIns="0" tIns="0" bIns="0">
+              <a:spAutoFit/>
+            </a:bodyPr>
+            <a:lstStyle/>
+            <a:p>
+              <a:pPr algn="l">
+                <a:lnSpc>
+                  <a:spcPct val="112000"/>
+                </a:lnSpc>
+                <a:spcAft>
+                  <a:spcPts val="500"/>
+                </a:spcAft>
+              </a:pPr>
+              <a:r>
+                <a:rPr sz="1575" b="1" lang="zh-CN">
+                  <a:solidFill>
+                    <a:srgbClr val="24756D"/>
+                  </a:solidFill>
+                  <a:latin typeface="Microsoft YaHei"/>
+                  <a:ea typeface="Microsoft YaHei"/>
+                </a:rPr>
+                <a:t>细化候选组数       1          2          3</a:t>
+              </a:r>
+            </a:p>
+          </p:txBody>
+        </p:sp>
+        <p:sp>
+          <p:nvSpPr>
+            <p:cNvPr id="30" name="最低估价 E       5.406     7.406     9.406"/>
+            <p:cNvSpPr txBox="1"/>
+            <p:nvPr/>
+          </p:nvSpPr>
+          <p:spPr>
+            <a:xfrm>
+              <a:off x="6191250" y="4581525"/>
+              <a:ext cx="5391150" cy="238125"/>
+            </a:xfrm>
+            <a:prstGeom prst="rect">
+              <a:avLst/>
+            </a:prstGeom>
+            <a:noFill/>
+            <a:effectLst/>
+          </p:spPr>
+          <p:txBody>
+            <a:bodyPr wrap="square" lIns="0" rIns="0" tIns="0" bIns="0">
+              <a:spAutoFit/>
+            </a:bodyPr>
+            <a:lstStyle/>
+            <a:p>
+              <a:pPr algn="l">
+                <a:lnSpc>
+                  <a:spcPct val="112000"/>
+                </a:lnSpc>
+                <a:spcAft>
+                  <a:spcPts val="500"/>
+                </a:spcAft>
+              </a:pPr>
+              <a:r>
+                <a:rPr sz="1575" b="0" lang="zh-CN">
+                  <a:solidFill>
+                    <a:srgbClr val="1F2937"/>
+                  </a:solidFill>
+                  <a:latin typeface="Microsoft YaHei"/>
+                  <a:ea typeface="Microsoft YaHei"/>
+                </a:rPr>
+                <a:t>最低估价 E       5.406     7.406     9.406</a:t>
+              </a:r>
+            </a:p>
+          </p:txBody>
+        </p:sp>
+        <p:sp>
+          <p:nvSpPr>
+            <p:cNvPr id="31" name="本例：快速、细化均选 1 组 DIRECT。"/>
+            <p:cNvSpPr txBox="1"/>
+            <p:nvPr/>
+          </p:nvSpPr>
+          <p:spPr>
+            <a:xfrm>
+              <a:off x="6191250" y="4981575"/>
+              <a:ext cx="5391150" cy="247649"/>
+            </a:xfrm>
+            <a:prstGeom prst="rect">
+              <a:avLst/>
+            </a:prstGeom>
+            <a:noFill/>
+            <a:effectLst/>
+          </p:spPr>
+          <p:txBody>
+            <a:bodyPr wrap="square" lIns="0" rIns="0" tIns="0" bIns="0">
+              <a:spAutoFit/>
+            </a:bodyPr>
+            <a:lstStyle/>
+            <a:p>
+              <a:pPr algn="l">
+                <a:lnSpc>
+                  <a:spcPct val="112000"/>
+                </a:lnSpc>
+                <a:spcAft>
+                  <a:spcPts val="500"/>
+                </a:spcAft>
+              </a:pPr>
+              <a:r>
+                <a:rPr sz="1575" b="1" lang="zh-CN">
                   <a:solidFill>
                     <a:srgbClr val="285EA8"/>
                   </a:solidFill>
                   <a:latin typeface="Microsoft YaHei"/>
                   <a:ea typeface="Microsoft YaHei"/>
                 </a:rPr>
-                <a:t>最终：1 组 DIRECT 读 1536B；实际 T=4μs（向上取整），调用费=2，J=1×4+2=6。</a:t>
+                <a:t>本例：快速、细化均选 1 组 DIRECT。</a:t>
               </a:r>
             </a:p>
           </p:txBody>
         </p:sp>
       </p:grpSp>
+      <p:grpSp>
+        <p:nvGrpSpPr>
+          <p:cNvPr id="32" name="步骤5：回溯映射并输出真实计划"/>
+          <p:cNvGrpSpPr/>
+          <p:nvPr/>
+        </p:nvGrpSpPr>
+        <p:grpSpPr>
+          <a:xfrm>
+            <a:off x="609600" y="5505450"/>
+            <a:ext cx="10972800" cy="504825"/>
+            <a:chOff x="609600" y="5505450"/>
+            <a:chExt cx="10972800" cy="504825"/>
+          </a:xfrm>
+        </p:grpSpPr>
+        <p:sp>
+          <p:nvSpPr>
+            <p:cNvPr id="33" name="Rectangle 32"/>
+            <p:cNvSpPr/>
+            <p:nvPr/>
+          </p:nvSpPr>
+          <p:spPr>
+            <a:xfrm>
+              <a:off x="609600" y="5505450"/>
+              <a:ext cx="10972800" cy="504825"/>
+            </a:xfrm>
+            <a:prstGeom prst="rect">
+              <a:avLst/>
+            </a:prstGeom>
+            <a:solidFill>
+              <a:srgbClr val="EDF3FA"/>
+            </a:solidFill>
+            <a:ln>
+              <a:noFill/>
+            </a:ln>
+            <a:effectLst/>
+          </p:spPr>
+          <p:style>
+            <a:lnRef idx="1">
+              <a:schemeClr val="accent1"/>
+            </a:lnRef>
+            <a:fillRef idx="3">
+              <a:schemeClr val="accent1"/>
+            </a:fillRef>
+            <a:effectRef idx="0">
+              <a:schemeClr val="accent1"/>
+            </a:effectRef>
+            <a:fontRef idx="minor">
+              <a:schemeClr val="lt1"/>
+            </a:fontRef>
+          </p:style>
+          <p:txBody>
+            <a:bodyPr rtlCol="0" anchor="ctr"/>
+            <a:lstStyle/>
+            <a:p>
+              <a:pPr algn="ctr"/>
+            </a:p>
+          </p:txBody>
+        </p:sp>
+        <p:sp>
+          <p:nvSpPr>
+            <p:cNvPr id="34" name="最终：1 组 DIRECT 读 1536B；官方 J = 6，分别读取 J = 10，成本降低 40%。"/>
+            <p:cNvSpPr txBox="1"/>
+            <p:nvPr/>
+          </p:nvSpPr>
+          <p:spPr>
+            <a:xfrm>
+              <a:off x="781050" y="5619750"/>
+              <a:ext cx="10629900" cy="295275"/>
+            </a:xfrm>
+            <a:prstGeom prst="rect">
+              <a:avLst/>
+            </a:prstGeom>
+            <a:noFill/>
+            <a:effectLst/>
+          </p:spPr>
+          <p:txBody>
+            <a:bodyPr wrap="square" lIns="0" rIns="0" tIns="0" bIns="0">
+              <a:spAutoFit/>
+            </a:bodyPr>
+            <a:lstStyle/>
+            <a:p>
+              <a:pPr algn="l">
+                <a:lnSpc>
+                  <a:spcPct val="112000"/>
+                </a:lnSpc>
+                <a:spcAft>
+                  <a:spcPts val="500"/>
+                </a:spcAft>
+              </a:pPr>
+              <a:r>
+                <a:rPr sz="1875" b="1" lang="zh-CN">
+                  <a:solidFill>
+                    <a:srgbClr val="285EA8"/>
+                  </a:solidFill>
+                  <a:latin typeface="Microsoft YaHei"/>
+                  <a:ea typeface="Microsoft YaHei"/>
+                </a:rPr>
+                <a:t>最终：1 组 DIRECT 读 1536B；官方 J = 6，分别读取 J = 10，成本降低 40%。</a:t>
+              </a:r>
+            </a:p>
+          </p:txBody>
+        </p:sp>
+      </p:grpSp>
+      <p:sp>
+        <p:nvSpPr>
+          <p:cNvPr id="35" name="E 是候选排序估价；全过程使用公开性能表，策略内部不执行模拟器。"/>
+          <p:cNvSpPr txBox="1"/>
+          <p:nvPr/>
+        </p:nvSpPr>
+        <p:spPr>
+          <a:xfrm>
+            <a:off x="609600" y="6076950"/>
+            <a:ext cx="10972800" cy="171450"/>
+          </a:xfrm>
+          <a:prstGeom prst="rect">
+            <a:avLst/>
+          </a:prstGeom>
+          <a:noFill/>
+          <a:effectLst/>
+        </p:spPr>
+        <p:txBody>
+          <a:bodyPr wrap="square" lIns="0" rIns="0" tIns="0" bIns="0">
+            <a:spAutoFit/>
+          </a:bodyPr>
+          <a:lstStyle/>
+          <a:p>
+            <a:pPr algn="l">
+              <a:lnSpc>
+                <a:spcPct val="112000"/>
+              </a:lnSpc>
+              <a:spcAft>
+                <a:spcPts val="500"/>
+              </a:spcAft>
+            </a:pPr>
+            <a:r>
+              <a:rPr sz="1200" b="0" lang="zh-CN">
+                <a:solidFill>
+                  <a:srgbClr val="657184"/>
+                </a:solidFill>
+                <a:latin typeface="Microsoft YaHei"/>
+                <a:ea typeface="Microsoft YaHei"/>
+              </a:rPr>
+              <a:t>E 是候选排序估价；全过程使用公开性能表，策略内部不执行模拟器。</a:t>
+            </a:r>
+          </a:p>
+        </p:txBody>
+      </p:sp>
     </p:spTree>
   </p:cSld>
   <p:clrMapOvr>
@@ -12271,7 +11923,7 @@
                                           </p:stCondLst>
                                         </p:cTn>
                                         <p:tgtEl>
-                                          <p:spTgt spid="19"/>
+                                          <p:spTgt spid="12"/>
                                         </p:tgtEl>
                                         <p:attrNameLst>
                                           <p:attrName>style.visibility</p:attrName>
@@ -12285,7 +11937,7 @@
                                       <p:cBhvr>
                                         <p:cTn id="12" dur="280"/>
                                         <p:tgtEl>
-                                          <p:spTgt spid="19"/>
+                                          <p:spTgt spid="12"/>
                                         </p:tgtEl>
                                       </p:cBhvr>
                                     </p:animEffect>
@@ -12324,7 +11976,7 @@
                                           </p:stCondLst>
                                         </p:cTn>
                                         <p:tgtEl>
-                                          <p:spTgt spid="31"/>
+                                          <p:spTgt spid="17"/>
                                         </p:tgtEl>
                                         <p:attrNameLst>
                                           <p:attrName>style.visibility</p:attrName>
@@ -12338,7 +11990,7 @@
                                       <p:cBhvr>
                                         <p:cTn id="17" dur="280"/>
                                         <p:tgtEl>
-                                          <p:spTgt spid="31"/>
+                                          <p:spTgt spid="17"/>
                                         </p:tgtEl>
                                       </p:cBhvr>
                                     </p:animEffect>
@@ -12377,7 +12029,7 @@
                                           </p:stCondLst>
                                         </p:cTn>
                                         <p:tgtEl>
-                                          <p:spTgt spid="35"/>
+                                          <p:spTgt spid="23"/>
                                         </p:tgtEl>
                                         <p:attrNameLst>
                                           <p:attrName>style.visibility</p:attrName>
@@ -12391,7 +12043,7 @@
                                       <p:cBhvr>
                                         <p:cTn id="22" dur="280"/>
                                         <p:tgtEl>
-                                          <p:spTgt spid="35"/>
+                                          <p:spTgt spid="23"/>
                                         </p:tgtEl>
                                       </p:cBhvr>
                                     </p:animEffect>
@@ -12430,7 +12082,7 @@
                                           </p:stCondLst>
                                         </p:cTn>
                                         <p:tgtEl>
-                                          <p:spTgt spid="39"/>
+                                          <p:spTgt spid="32"/>
                                         </p:tgtEl>
                                         <p:attrNameLst>
                                           <p:attrName>style.visibility</p:attrName>
@@ -12444,7 +12096,7 @@
                                       <p:cBhvr>
                                         <p:cTn id="27" dur="280"/>
                                         <p:tgtEl>
-                                          <p:spTgt spid="39"/>
+                                          <p:spTgt spid="32"/>
                                         </p:tgtEl>
                                       </p:cBhvr>
                                     </p:animEffect>
@@ -12546,7 +12198,7 @@
       </p:sp>
       <p:sp>
         <p:nvSpPr>
-          <p:cNvPr id="3" name="本次读取完成后，再决定是否为未来复用付费"/>
+          <p:cNvPr id="3" name="用复用证据与成本准入，筛掉不值得的提升"/>
           <p:cNvSpPr txBox="1"/>
           <p:nvPr/>
         </p:nvSpPr>
@@ -12583,14 +12235,14 @@
                 <a:latin typeface="Microsoft YaHei"/>
                 <a:ea typeface="Microsoft YaHei"/>
               </a:rPr>
-              <a:t>本次读取完成后，再决定是否为未来复用付费</a:t>
-            </a:r>
-          </a:p>
-        </p:txBody>
-      </p:sp>
-      <p:sp>
-        <p:nvSpPr>
-          <p:cNvPr id="4" name="依次检查四道条件；任一未通过就返回 nullopt，本次读取已成功完成。"/>
+              <a:t>用复用证据与成本准入，筛掉不值得的提升</a:t>
+            </a:r>
+          </a:p>
+        </p:txBody>
+      </p:sp>
+      <p:sp>
+        <p:nvSpPr>
+          <p:cNvPr id="4" name="读取完成后决定是否缓存；四道条件依次判断，让额外搬运与调用投入有据可依。"/>
           <p:cNvSpPr txBox="1"/>
           <p:nvPr/>
         </p:nvSpPr>
@@ -12627,7 +12279,7 @@
                 <a:latin typeface="Microsoft YaHei"/>
                 <a:ea typeface="Microsoft YaHei"/>
               </a:rPr>
-              <a:t>依次检查四道条件；任一未通过就返回 nullopt，本次读取已成功完成。</a:t>
+              <a:t>读取完成后决定是否缓存；四道条件依次判断，让额外搬运与调用投入有据可依。</a:t>
             </a:r>
           </a:p>
         </p:txBody>
@@ -14000,7 +13652,7 @@
       </p:grpSp>
       <p:sp>
         <p:nvSpPr>
-          <p:cNvPr id="35" name="满池可以替换；提升完成后才能命中。当前不主动延期，低优先级也可能竞争前台资源。"/>
+          <p:cNvPr id="35" name="读取已完成，PROMOTE 只服务未来复用；池满可替换，提升完成后才能命中。"/>
           <p:cNvSpPr txBox="1"/>
           <p:nvPr/>
         </p:nvSpPr>
@@ -14037,7 +13689,7 @@
                 <a:latin typeface="Microsoft YaHei"/>
                 <a:ea typeface="Microsoft YaHei"/>
               </a:rPr>
-              <a:t>满池可以替换；提升完成后才能命中。当前不主动延期，低优先级也可能竞争前台资源。</a:t>
+              <a:t>读取已完成，PROMOTE 只服务未来复用；池满可替换，提升完成后才能命中。</a:t>
             </a:r>
           </a:p>
         </p:txBody>
@@ -15265,7 +14917,7 @@
       </p:sp>
       <p:sp>
         <p:nvSpPr>
-          <p:cNvPr id="23" name="dp / prev / paths：估价、前驱、路径"/>
+          <p:cNvPr id="23" name="dp / prev / paths；细化追加组数维度 h"/>
           <p:cNvSpPr txBox="1"/>
           <p:nvPr/>
         </p:nvSpPr>
@@ -15302,14 +14954,14 @@
                 <a:latin typeface="Microsoft YaHei"/>
                 <a:ea typeface="Microsoft YaHei"/>
               </a:rPr>
-              <a:t>dp / prev / paths：估价、前驱、路径</a:t>
-            </a:r>
-          </a:p>
-        </p:txBody>
-      </p:sp>
-      <p:sp>
-        <p:nvSpPr>
-          <p:cNvPr id="24" name="更优时更新；回溯还原 operation"/>
+              <a:t>dp / prev / paths；细化追加组数维度 h</a:t>
+            </a:r>
+          </a:p>
+        </p:txBody>
+      </p:sp>
+      <p:sp>
+        <p:nvSpPr>
+          <p:cNvPr id="24" name="共用分组与路径候选；回溯生成 operation"/>
           <p:cNvSpPr txBox="1"/>
           <p:nvPr/>
         </p:nvSpPr>
@@ -15346,7 +14998,7 @@
                 <a:latin typeface="Microsoft YaHei"/>
                 <a:ea typeface="Microsoft YaHei"/>
               </a:rPr>
-              <a:t>更优时更新；回溯还原 operation</a:t>
+              <a:t>共用分组与路径候选；回溯生成 operation</a:t>
             </a:r>
           </a:p>
         </p:txBody>
@@ -16051,7 +15703,7 @@
       </p:sp>
       <p:sp>
         <p:nvSpPr>
-          <p:cNvPr id="3" name="用窗口、采样和预算控制搜索，输入输出开销仍随规模增长"/>
+          <p:cNvPr id="3" name="用有限窗口与搜索预算，控制在线调度开销"/>
           <p:cNvSpPr txBox="1"/>
           <p:nvPr/>
         </p:nvSpPr>
@@ -16088,7 +15740,7 @@
                 <a:latin typeface="Microsoft YaHei"/>
                 <a:ea typeface="Microsoft YaHei"/>
               </a:rPr>
-              <a:t>用窗口、采样和预算控制搜索，输入输出开销仍随规模增长</a:t>
+              <a:t>用有限窗口与搜索预算，控制在线调度开销</a:t>
             </a:r>
           </a:p>
         </p:txBody>
@@ -17545,7 +17197,7 @@
       </p:sp>
       <p:sp>
         <p:nvSpPr>
-          <p:cNvPr id="3" name="调度计算多花多少时间，整个程序占用多少资源"/>
+          <p:cNvPr id="3" name="多投入 0.322s 策略计算，进程总耗时下降 14.4%"/>
           <p:cNvSpPr txBox="1"/>
           <p:nvPr/>
         </p:nvSpPr>
@@ -17582,7 +17234,7 @@
                 <a:latin typeface="Microsoft YaHei"/>
                 <a:ea typeface="Microsoft YaHei"/>
               </a:rPr>
-              <a:t>调度计算多花多少时间，整个程序占用多少资源</a:t>
+              <a:t>多投入 0.322s 策略计算，进程总耗时下降 14.4%</a:t>
             </a:r>
           </a:p>
         </p:txBody>
@@ -18957,7 +18609,7 @@
       </p:cxnSp>
       <p:sp>
         <p:nvSpPr>
-          <p:cNvPr id="36" name="联合规划增加了策略计算开销；程序总耗时更短，并不代表调度计算本身更快。"/>
+          <p:cNvPr id="36" name="策略堆峰值 12.34MiB，进程 RSS 下降 33.3%；策略计算增加，整体执行仍更省时。"/>
           <p:cNvSpPr txBox="1"/>
           <p:nvPr/>
         </p:nvSpPr>
@@ -18994,7 +18646,7 @@
                 <a:latin typeface="Microsoft YaHei"/>
                 <a:ea typeface="Microsoft YaHei"/>
               </a:rPr>
-              <a:t>联合规划增加了策略计算开销；程序总耗时更短，并不代表调度计算本身更快。</a:t>
+              <a:t>策略堆峰值 12.34MiB，进程 RSS 下降 33.3%；策略计算增加，整体执行仍更省时。</a:t>
             </a:r>
           </a:p>
         </p:txBody>

--- a/submissions/kaisennhu/07_答辩PPT/答辩介绍.pptx
+++ b/submissions/kaisennhu/07_答辩PPT/答辩介绍.pptx
@@ -792,7 +792,7 @@
           <a:lstStyle/>
           <a:p>
             <a:r>
-              <a:t>合并的两个直接作用是减少重复调用和共享物理读取；对并发、传输大小、资源占用也有影响，故不能只按调用费决定合并。路径替代是同一个候选边的另一个维度，并非另设一个优化模块。官方贪心按逐iov的固定分支选路、同键第二次未命中后尝试HBM提升；本方案改为联合DP和成本准入。池压力权重0.5是启发式，没有最优性保证。</a:t>
+              <a:t>本页先讲事实观察，再讲设计选择。观察1只回答怎样合并：合并可能减少操作固定费，重叠请求还可共享物理读取，但组数和块大小会改变SSD并发、性能桶、缓冲占用，因此不能认为越合并越好。观察2只回答怎样选路：同一组数据在满足对齐、槽位和池容量条件时可能有多条合法路径；DIRECT没有中转复制，AGGREGATE和FALLBACK使用不同临时池、复制类型和调用结构。并非任意组都能走三条路径，低费用也不等于整条Trace更优。前两个观察共同推出一个设计：把分组边界与路径放在同一候选转移中，由联合DP选择，而不是先固定合并再按规则选路；两阶段实现见后续DP页。观察3回答是否值得缓存：PROMOTE先付搬运和调用费，成功入池后才可能被后续同键请求复用；缓存命中仍需KV到目标HBM的复制。复用不足、证据过时或资源竞争可能使投入无法回收，所以后台按复用证据、正的预计净收益、历史预算及容量压力准入；它不是预测必回本的保证。前台节省本次读取成本，后台限制为未来复用支付的额外成本，两者都服务于降低完整Trace的J。组估价E=时间单价×(读工作+复制工作)×池压力系数+调用费；读按物理字节、复制按有效字节，来自公开性能表。DIRECT系数1，中转为1+0.5×对应池已用比例。该启发式只用于估价，不是官方最终J公式。具体阈值与公式留到算法页和设计文档，本页不以公式覆盖观察逻辑。</a:t>
             </a:r>
           </a:p>
         </p:txBody>
@@ -8012,7 +8012,7 @@
       <p:grpSpPr/>
       <p:sp>
         <p:nvSpPr>
-          <p:cNvPr id="2" name="关键观察与设计依据"/>
+          <p:cNvPr id="2" name="设计依据 · 三条观察，两项设计"/>
           <p:cNvSpPr txBox="1"/>
           <p:nvPr/>
         </p:nvSpPr>
@@ -8049,14 +8049,14 @@
                 <a:latin typeface="Microsoft YaHei"/>
                 <a:ea typeface="Microsoft YaHei"/>
               </a:rPr>
-              <a:t>关键观察与设计依据</a:t>
-            </a:r>
-          </a:p>
-        </p:txBody>
-      </p:sp>
-      <p:sp>
-        <p:nvSpPr>
-          <p:cNvPr id="3" name="分组边界与路径互相影响，必须放进同一个 DP"/>
+              <a:t>设计依据 · 三条观察，两项设计</a:t>
+            </a:r>
+          </a:p>
+        </p:txBody>
+      </p:sp>
+      <p:sp>
+        <p:nvSpPr>
+          <p:cNvPr id="3" name="前台联合分组与选路，后台按收益准入"/>
           <p:cNvSpPr txBox="1"/>
           <p:nvPr/>
         </p:nvSpPr>
@@ -8093,14 +8093,14 @@
                 <a:latin typeface="Microsoft YaHei"/>
                 <a:ea typeface="Microsoft YaHei"/>
               </a:rPr>
-              <a:t>分组边界与路径互相影响，必须放进同一个 DP</a:t>
-            </a:r>
-          </a:p>
-        </p:txBody>
-      </p:sp>
-      <p:sp>
-        <p:nvSpPr>
-          <p:cNvPr id="4" name="前台选“哪些片段一起搬、走哪条路”；后台另行判断“是否为后续复用建立缓存”。"/>
+              <a:t>前台联合分组与选路，后台按收益准入</a:t>
+            </a:r>
+          </a:p>
+        </p:txBody>
+      </p:sp>
+      <p:sp>
+        <p:nvSpPr>
+          <p:cNvPr id="4" name="先看三个问题特性：合并的收益与代价、路径的成本差异，以及缓存的回本条件。"/>
           <p:cNvSpPr txBox="1"/>
           <p:nvPr/>
         </p:nvSpPr>
@@ -8137,7 +8137,7 @@
                 <a:latin typeface="Microsoft YaHei"/>
                 <a:ea typeface="Microsoft YaHei"/>
               </a:rPr>
-              <a:t>前台选“哪些片段一起搬、走哪条路”；后台另行判断“是否为后续复用建立缓存”。</a:t>
+              <a:t>先看三个问题特性：合并的收益与代价、路径的成本差异，以及缓存的回本条件。</a:t>
             </a:r>
           </a:p>
         </p:txBody>
@@ -8268,14 +8268,102 @@
       </p:sp>
       <p:sp>
         <p:nvSpPr>
-          <p:cNvPr id="8" name="Rectangle 7"/>
+          <p:cNvPr id="8" name="前台 · 本次读取"/>
+          <p:cNvSpPr txBox="1"/>
+          <p:nvPr/>
+        </p:nvSpPr>
+        <p:spPr>
+          <a:xfrm>
+            <a:off x="609600" y="2009774"/>
+            <a:ext cx="7086600" cy="285750"/>
+          </a:xfrm>
+          <a:prstGeom prst="rect">
+            <a:avLst/>
+          </a:prstGeom>
+          <a:noFill/>
+          <a:effectLst/>
+        </p:spPr>
+        <p:txBody>
+          <a:bodyPr wrap="square" lIns="0" rIns="0" tIns="0" bIns="0">
+            <a:spAutoFit/>
+          </a:bodyPr>
+          <a:lstStyle/>
+          <a:p>
+            <a:pPr algn="l">
+              <a:lnSpc>
+                <a:spcPct val="112000"/>
+              </a:lnSpc>
+              <a:spcAft>
+                <a:spcPts val="500"/>
+              </a:spcAft>
+            </a:pPr>
+            <a:r>
+              <a:rPr sz="1800" b="1" lang="zh-CN">
+                <a:solidFill>
+                  <a:srgbClr val="285EA8"/>
+                </a:solidFill>
+                <a:latin typeface="Microsoft YaHei"/>
+                <a:ea typeface="Microsoft YaHei"/>
+              </a:rPr>
+              <a:t>前台 · 本次读取</a:t>
+            </a:r>
+          </a:p>
+        </p:txBody>
+      </p:sp>
+      <p:sp>
+        <p:nvSpPr>
+          <p:cNvPr id="9" name="后台 · 后续复用"/>
+          <p:cNvSpPr txBox="1"/>
+          <p:nvPr/>
+        </p:nvSpPr>
+        <p:spPr>
+          <a:xfrm>
+            <a:off x="8077200" y="2009774"/>
+            <a:ext cx="3505200" cy="285750"/>
+          </a:xfrm>
+          <a:prstGeom prst="rect">
+            <a:avLst/>
+          </a:prstGeom>
+          <a:noFill/>
+          <a:effectLst/>
+        </p:spPr>
+        <p:txBody>
+          <a:bodyPr wrap="square" lIns="0" rIns="0" tIns="0" bIns="0">
+            <a:spAutoFit/>
+          </a:bodyPr>
+          <a:lstStyle/>
+          <a:p>
+            <a:pPr algn="l">
+              <a:lnSpc>
+                <a:spcPct val="112000"/>
+              </a:lnSpc>
+              <a:spcAft>
+                <a:spcPts val="500"/>
+              </a:spcAft>
+            </a:pPr>
+            <a:r>
+              <a:rPr sz="1800" b="1" lang="zh-CN">
+                <a:solidFill>
+                  <a:srgbClr val="24756D"/>
+                </a:solidFill>
+                <a:latin typeface="Microsoft YaHei"/>
+                <a:ea typeface="Microsoft YaHei"/>
+              </a:rPr>
+              <a:t>后台 · 后续复用</a:t>
+            </a:r>
+          </a:p>
+        </p:txBody>
+      </p:sp>
+      <p:sp>
+        <p:nvSpPr>
+          <p:cNvPr id="10" name="Rectangle 9"/>
           <p:cNvSpPr/>
           <p:nvPr/>
         </p:nvSpPr>
         <p:spPr>
           <a:xfrm>
-            <a:off x="609600" y="2152650"/>
-            <a:ext cx="7086600" cy="2638425"/>
+            <a:off x="609600" y="2409825"/>
+            <a:ext cx="3352800" cy="2495550"/>
           </a:xfrm>
           <a:prstGeom prst="rect">
             <a:avLst/>
@@ -8312,14 +8400,14 @@
       </p:sp>
       <p:sp>
         <p:nvSpPr>
-          <p:cNvPr id="9" name="Rectangle 8"/>
+          <p:cNvPr id="11" name="Rectangle 10"/>
           <p:cNvSpPr/>
           <p:nvPr/>
         </p:nvSpPr>
         <p:spPr>
           <a:xfrm>
-            <a:off x="609600" y="2152650"/>
-            <a:ext cx="38100" cy="2638425"/>
+            <a:off x="609600" y="2409825"/>
+            <a:ext cx="28575" cy="2495550"/>
           </a:xfrm>
           <a:prstGeom prst="rect">
             <a:avLst/>
@@ -8356,14 +8444,14 @@
       </p:sp>
       <p:sp>
         <p:nvSpPr>
-          <p:cNvPr id="10" name="前台观察 → 联合枚举（分组，路径）"/>
+          <p:cNvPr id="12" name="观察 1"/>
           <p:cNvSpPr txBox="1"/>
           <p:nvPr/>
         </p:nvSpPr>
         <p:spPr>
           <a:xfrm>
-            <a:off x="819150" y="2324100"/>
-            <a:ext cx="6667500" cy="342900"/>
+            <a:off x="781050" y="2524125"/>
+            <a:ext cx="3009900" cy="228600"/>
           </a:xfrm>
           <a:prstGeom prst="rect">
             <a:avLst/>
@@ -8386,28 +8474,28 @@
               </a:spcAft>
             </a:pPr>
             <a:r>
-              <a:rPr sz="2100" b="1" lang="zh-CN">
+              <a:rPr sz="1350" b="1" lang="zh-CN">
                 <a:solidFill>
                   <a:srgbClr val="285EA8"/>
                 </a:solidFill>
                 <a:latin typeface="Microsoft YaHei"/>
                 <a:ea typeface="Microsoft YaHei"/>
               </a:rPr>
-              <a:t>前台观察 → 联合枚举（分组，路径）</a:t>
-            </a:r>
-          </a:p>
-        </p:txBody>
-      </p:sp>
-      <p:sp>
-        <p:nvSpPr>
-          <p:cNvPr id="11" name="合并减少操作固定费，也可能减少重叠的物理读取； 但组数变少、块变大，会改变并发、带宽和池占用。"/>
+              <a:t>观察 1</a:t>
+            </a:r>
+          </a:p>
+        </p:txBody>
+      </p:sp>
+      <p:sp>
+        <p:nvSpPr>
+          <p:cNvPr id="13" name="合并有收益，也有代价"/>
           <p:cNvSpPr txBox="1"/>
           <p:nvPr/>
         </p:nvSpPr>
         <p:spPr>
           <a:xfrm>
-            <a:off x="819150" y="2847975"/>
-            <a:ext cx="6667500" cy="685800"/>
+            <a:off x="781050" y="2886075"/>
+            <a:ext cx="3009900" cy="342900"/>
           </a:xfrm>
           <a:prstGeom prst="rect">
             <a:avLst/>
@@ -8430,48 +8518,28 @@
               </a:spcAft>
             </a:pPr>
             <a:r>
-              <a:rPr sz="1800" b="0" lang="zh-CN">
-                <a:solidFill>
-                  <a:srgbClr val="1F2937"/>
-                </a:solidFill>
-                <a:latin typeface="Microsoft YaHei"/>
-                <a:ea typeface="Microsoft YaHei"/>
-              </a:rPr>
-              <a:t>合并减少操作固定费，也可能减少重叠的物理读取；</a:t>
-            </a:r>
-          </a:p>
-          <a:p>
-            <a:pPr algn="l">
-              <a:lnSpc>
-                <a:spcPct val="112000"/>
-              </a:lnSpc>
-              <a:spcAft>
-                <a:spcPts val="500"/>
-              </a:spcAft>
-            </a:pPr>
-            <a:r>
-              <a:rPr sz="1800" b="0" lang="zh-CN">
-                <a:solidFill>
-                  <a:srgbClr val="1F2937"/>
-                </a:solidFill>
-                <a:latin typeface="Microsoft YaHei"/>
-                <a:ea typeface="Microsoft YaHei"/>
-              </a:rPr>
-              <a:t>但组数变少、块变大，会改变并发、带宽和池占用。</a:t>
-            </a:r>
-          </a:p>
-        </p:txBody>
-      </p:sp>
-      <p:sp>
-        <p:nvSpPr>
-          <p:cNvPr id="12" name="同一组可走不同路径，调用费和复制资源随之改变。 因此每个合法分组都比较 DIRECT / AGGREGATE / FALLBACK， 由 DP 一起决定边界和路径。"/>
+              <a:rPr sz="1875" b="1" lang="zh-CN">
+                <a:solidFill>
+                  <a:srgbClr val="285EA8"/>
+                </a:solidFill>
+                <a:latin typeface="Microsoft YaHei"/>
+                <a:ea typeface="Microsoft YaHei"/>
+              </a:rPr>
+              <a:t>合并有收益，也有代价</a:t>
+            </a:r>
+          </a:p>
+        </p:txBody>
+      </p:sp>
+      <p:sp>
+        <p:nvSpPr>
+          <p:cNvPr id="14" name="合并可少付固定费， 重叠请求可共享物理读取； 组数与块大小改变， 并发和缓冲占用也会改变。"/>
           <p:cNvSpPr txBox="1"/>
           <p:nvPr/>
         </p:nvSpPr>
         <p:spPr>
           <a:xfrm>
-            <a:off x="819150" y="3695700"/>
-            <a:ext cx="6667500" cy="790575"/>
+            <a:off x="781050" y="3419475"/>
+            <a:ext cx="3009900" cy="1343025"/>
           </a:xfrm>
           <a:prstGeom prst="rect">
             <a:avLst/>
@@ -8494,14 +8562,14 @@
               </a:spcAft>
             </a:pPr>
             <a:r>
-              <a:rPr sz="1725" b="0" lang="zh-CN">
+              <a:rPr sz="1650" b="0" lang="zh-CN">
                 <a:solidFill>
                   <a:srgbClr val="1F2937"/>
                 </a:solidFill>
                 <a:latin typeface="Microsoft YaHei"/>
                 <a:ea typeface="Microsoft YaHei"/>
               </a:rPr>
-              <a:t>同一组可走不同路径，调用费和复制资源随之改变。</a:t>
+              <a:t>合并可少付固定费，</a:t>
             </a:r>
           </a:p>
           <a:p>
@@ -8514,14 +8582,14 @@
               </a:spcAft>
             </a:pPr>
             <a:r>
-              <a:rPr sz="1725" b="0" lang="zh-CN">
+              <a:rPr sz="1650" b="0" lang="zh-CN">
                 <a:solidFill>
                   <a:srgbClr val="1F2937"/>
                 </a:solidFill>
                 <a:latin typeface="Microsoft YaHei"/>
                 <a:ea typeface="Microsoft YaHei"/>
               </a:rPr>
-              <a:t>因此每个合法分组都比较 DIRECT / AGGREGATE / FALLBACK，</a:t>
+              <a:t>重叠请求可共享物理读取；</a:t>
             </a:r>
           </a:p>
           <a:p>
@@ -8534,28 +8602,328 @@
               </a:spcAft>
             </a:pPr>
             <a:r>
-              <a:rPr sz="1725" b="0" lang="zh-CN">
+              <a:rPr sz="1650" b="0" lang="zh-CN">
                 <a:solidFill>
                   <a:srgbClr val="1F2937"/>
                 </a:solidFill>
                 <a:latin typeface="Microsoft YaHei"/>
                 <a:ea typeface="Microsoft YaHei"/>
               </a:rPr>
-              <a:t>由 DP 一起决定边界和路径。</a:t>
-            </a:r>
-          </a:p>
-        </p:txBody>
-      </p:sp>
-      <p:sp>
-        <p:nvSpPr>
-          <p:cNvPr id="13" name="Rectangle 12"/>
+              <a:t>组数与块大小改变，</a:t>
+            </a:r>
+          </a:p>
+          <a:p>
+            <a:pPr algn="l">
+              <a:lnSpc>
+                <a:spcPct val="112000"/>
+              </a:lnSpc>
+              <a:spcAft>
+                <a:spcPts val="500"/>
+              </a:spcAft>
+            </a:pPr>
+            <a:r>
+              <a:rPr sz="1650" b="0" lang="zh-CN">
+                <a:solidFill>
+                  <a:srgbClr val="1F2937"/>
+                </a:solidFill>
+                <a:latin typeface="Microsoft YaHei"/>
+                <a:ea typeface="Microsoft YaHei"/>
+              </a:rPr>
+              <a:t>并发和缓冲占用也会改变。</a:t>
+            </a:r>
+          </a:p>
+        </p:txBody>
+      </p:sp>
+      <p:sp>
+        <p:nvSpPr>
+          <p:cNvPr id="15" name="Rectangle 14"/>
           <p:cNvSpPr/>
           <p:nvPr/>
         </p:nvSpPr>
         <p:spPr>
           <a:xfrm>
-            <a:off x="7924799" y="2152650"/>
-            <a:ext cx="3657600" cy="2638425"/>
+            <a:off x="4343400" y="2409825"/>
+            <a:ext cx="3352800" cy="2495550"/>
+          </a:xfrm>
+          <a:prstGeom prst="rect">
+            <a:avLst/>
+          </a:prstGeom>
+          <a:solidFill>
+            <a:srgbClr val="F5F7FA"/>
+          </a:solidFill>
+          <a:ln>
+            <a:noFill/>
+          </a:ln>
+          <a:effectLst/>
+        </p:spPr>
+        <p:style>
+          <a:lnRef idx="1">
+            <a:schemeClr val="accent1"/>
+          </a:lnRef>
+          <a:fillRef idx="3">
+            <a:schemeClr val="accent1"/>
+          </a:fillRef>
+          <a:effectRef idx="0">
+            <a:schemeClr val="accent1"/>
+          </a:effectRef>
+          <a:fontRef idx="minor">
+            <a:schemeClr val="lt1"/>
+          </a:fontRef>
+        </p:style>
+        <p:txBody>
+          <a:bodyPr rtlCol="0" anchor="ctr"/>
+          <a:lstStyle/>
+          <a:p>
+            <a:pPr algn="ctr"/>
+          </a:p>
+        </p:txBody>
+      </p:sp>
+      <p:sp>
+        <p:nvSpPr>
+          <p:cNvPr id="16" name="Rectangle 15"/>
+          <p:cNvSpPr/>
+          <p:nvPr/>
+        </p:nvSpPr>
+        <p:spPr>
+          <a:xfrm>
+            <a:off x="4343400" y="2409825"/>
+            <a:ext cx="28575" cy="2495550"/>
+          </a:xfrm>
+          <a:prstGeom prst="rect">
+            <a:avLst/>
+          </a:prstGeom>
+          <a:solidFill>
+            <a:srgbClr val="285EA8"/>
+          </a:solidFill>
+          <a:ln>
+            <a:noFill/>
+          </a:ln>
+          <a:effectLst/>
+        </p:spPr>
+        <p:style>
+          <a:lnRef idx="1">
+            <a:schemeClr val="accent1"/>
+          </a:lnRef>
+          <a:fillRef idx="3">
+            <a:schemeClr val="accent1"/>
+          </a:fillRef>
+          <a:effectRef idx="0">
+            <a:schemeClr val="accent1"/>
+          </a:effectRef>
+          <a:fontRef idx="minor">
+            <a:schemeClr val="lt1"/>
+          </a:fontRef>
+        </p:style>
+        <p:txBody>
+          <a:bodyPr rtlCol="0" anchor="ctr"/>
+          <a:lstStyle/>
+          <a:p>
+            <a:pPr algn="ctr"/>
+          </a:p>
+        </p:txBody>
+      </p:sp>
+      <p:sp>
+        <p:nvSpPr>
+          <p:cNvPr id="17" name="观察 2"/>
+          <p:cNvSpPr txBox="1"/>
+          <p:nvPr/>
+        </p:nvSpPr>
+        <p:spPr>
+          <a:xfrm>
+            <a:off x="4514850" y="2524125"/>
+            <a:ext cx="3009900" cy="228600"/>
+          </a:xfrm>
+          <a:prstGeom prst="rect">
+            <a:avLst/>
+          </a:prstGeom>
+          <a:noFill/>
+          <a:effectLst/>
+        </p:spPr>
+        <p:txBody>
+          <a:bodyPr wrap="square" lIns="0" rIns="0" tIns="0" bIns="0">
+            <a:spAutoFit/>
+          </a:bodyPr>
+          <a:lstStyle/>
+          <a:p>
+            <a:pPr algn="l">
+              <a:lnSpc>
+                <a:spcPct val="112000"/>
+              </a:lnSpc>
+              <a:spcAft>
+                <a:spcPts val="500"/>
+              </a:spcAft>
+            </a:pPr>
+            <a:r>
+              <a:rPr sz="1350" b="1" lang="zh-CN">
+                <a:solidFill>
+                  <a:srgbClr val="285EA8"/>
+                </a:solidFill>
+                <a:latin typeface="Microsoft YaHei"/>
+                <a:ea typeface="Microsoft YaHei"/>
+              </a:rPr>
+              <a:t>观察 2</a:t>
+            </a:r>
+          </a:p>
+        </p:txBody>
+      </p:sp>
+      <p:sp>
+        <p:nvSpPr>
+          <p:cNvPr id="18" name="路径可替代，成本不同"/>
+          <p:cNvSpPr txBox="1"/>
+          <p:nvPr/>
+        </p:nvSpPr>
+        <p:spPr>
+          <a:xfrm>
+            <a:off x="4514850" y="2886075"/>
+            <a:ext cx="3009900" cy="342900"/>
+          </a:xfrm>
+          <a:prstGeom prst="rect">
+            <a:avLst/>
+          </a:prstGeom>
+          <a:noFill/>
+          <a:effectLst/>
+        </p:spPr>
+        <p:txBody>
+          <a:bodyPr wrap="square" lIns="0" rIns="0" tIns="0" bIns="0">
+            <a:spAutoFit/>
+          </a:bodyPr>
+          <a:lstStyle/>
+          <a:p>
+            <a:pPr algn="l">
+              <a:lnSpc>
+                <a:spcPct val="112000"/>
+              </a:lnSpc>
+              <a:spcAft>
+                <a:spcPts val="500"/>
+              </a:spcAft>
+            </a:pPr>
+            <a:r>
+              <a:rPr sz="1875" b="1" lang="zh-CN">
+                <a:solidFill>
+                  <a:srgbClr val="285EA8"/>
+                </a:solidFill>
+                <a:latin typeface="Microsoft YaHei"/>
+                <a:ea typeface="Microsoft YaHei"/>
+              </a:rPr>
+              <a:t>路径可替代，成本不同</a:t>
+            </a:r>
+          </a:p>
+        </p:txBody>
+      </p:sp>
+      <p:sp>
+        <p:nvSpPr>
+          <p:cNvPr id="19" name="同组数据可有多条合法路径； 调用费、复制和池需求不同。 分组与资源改变时， 低成本路径也可能改变。"/>
+          <p:cNvSpPr txBox="1"/>
+          <p:nvPr/>
+        </p:nvSpPr>
+        <p:spPr>
+          <a:xfrm>
+            <a:off x="4514850" y="3419475"/>
+            <a:ext cx="3009900" cy="1343025"/>
+          </a:xfrm>
+          <a:prstGeom prst="rect">
+            <a:avLst/>
+          </a:prstGeom>
+          <a:noFill/>
+          <a:effectLst/>
+        </p:spPr>
+        <p:txBody>
+          <a:bodyPr wrap="square" lIns="0" rIns="0" tIns="0" bIns="0">
+            <a:spAutoFit/>
+          </a:bodyPr>
+          <a:lstStyle/>
+          <a:p>
+            <a:pPr algn="l">
+              <a:lnSpc>
+                <a:spcPct val="112000"/>
+              </a:lnSpc>
+              <a:spcAft>
+                <a:spcPts val="500"/>
+              </a:spcAft>
+            </a:pPr>
+            <a:r>
+              <a:rPr sz="1650" b="0" lang="zh-CN">
+                <a:solidFill>
+                  <a:srgbClr val="1F2937"/>
+                </a:solidFill>
+                <a:latin typeface="Microsoft YaHei"/>
+                <a:ea typeface="Microsoft YaHei"/>
+              </a:rPr>
+              <a:t>同组数据可有多条合法路径；</a:t>
+            </a:r>
+          </a:p>
+          <a:p>
+            <a:pPr algn="l">
+              <a:lnSpc>
+                <a:spcPct val="112000"/>
+              </a:lnSpc>
+              <a:spcAft>
+                <a:spcPts val="500"/>
+              </a:spcAft>
+            </a:pPr>
+            <a:r>
+              <a:rPr sz="1650" b="0" lang="zh-CN">
+                <a:solidFill>
+                  <a:srgbClr val="1F2937"/>
+                </a:solidFill>
+                <a:latin typeface="Microsoft YaHei"/>
+                <a:ea typeface="Microsoft YaHei"/>
+              </a:rPr>
+              <a:t>调用费、复制和池需求不同。</a:t>
+            </a:r>
+          </a:p>
+          <a:p>
+            <a:pPr algn="l">
+              <a:lnSpc>
+                <a:spcPct val="112000"/>
+              </a:lnSpc>
+              <a:spcAft>
+                <a:spcPts val="500"/>
+              </a:spcAft>
+            </a:pPr>
+            <a:r>
+              <a:rPr sz="1650" b="0" lang="zh-CN">
+                <a:solidFill>
+                  <a:srgbClr val="1F2937"/>
+                </a:solidFill>
+                <a:latin typeface="Microsoft YaHei"/>
+                <a:ea typeface="Microsoft YaHei"/>
+              </a:rPr>
+              <a:t>分组与资源改变时，</a:t>
+            </a:r>
+          </a:p>
+          <a:p>
+            <a:pPr algn="l">
+              <a:lnSpc>
+                <a:spcPct val="112000"/>
+              </a:lnSpc>
+              <a:spcAft>
+                <a:spcPts val="500"/>
+              </a:spcAft>
+            </a:pPr>
+            <a:r>
+              <a:rPr sz="1650" b="0" lang="zh-CN">
+                <a:solidFill>
+                  <a:srgbClr val="1F2937"/>
+                </a:solidFill>
+                <a:latin typeface="Microsoft YaHei"/>
+                <a:ea typeface="Microsoft YaHei"/>
+              </a:rPr>
+              <a:t>低成本路径也可能改变。</a:t>
+            </a:r>
+          </a:p>
+        </p:txBody>
+      </p:sp>
+      <p:sp>
+        <p:nvSpPr>
+          <p:cNvPr id="20" name="Rectangle 19"/>
+          <p:cNvSpPr/>
+          <p:nvPr/>
+        </p:nvSpPr>
+        <p:spPr>
+          <a:xfrm>
+            <a:off x="8077200" y="2409825"/>
+            <a:ext cx="3505200" cy="2495550"/>
           </a:xfrm>
           <a:prstGeom prst="rect">
             <a:avLst/>
@@ -8592,14 +8960,14 @@
       </p:sp>
       <p:sp>
         <p:nvSpPr>
-          <p:cNvPr id="14" name="Rectangle 13"/>
+          <p:cNvPr id="21" name="Rectangle 20"/>
           <p:cNvSpPr/>
           <p:nvPr/>
         </p:nvSpPr>
         <p:spPr>
           <a:xfrm>
-            <a:off x="7924799" y="2152650"/>
-            <a:ext cx="38100" cy="2638425"/>
+            <a:off x="8077200" y="2409825"/>
+            <a:ext cx="28575" cy="2495550"/>
           </a:xfrm>
           <a:prstGeom prst="rect">
             <a:avLst/>
@@ -8636,14 +9004,14 @@
       </p:sp>
       <p:sp>
         <p:nvSpPr>
-          <p:cNvPr id="15" name="后台观察 → 有条件地缓存"/>
+          <p:cNvPr id="22" name="观察 3"/>
           <p:cNvSpPr txBox="1"/>
           <p:nvPr/>
         </p:nvSpPr>
         <p:spPr>
           <a:xfrm>
-            <a:off x="8134350" y="2324100"/>
-            <a:ext cx="3238500" cy="342900"/>
+            <a:off x="8248650" y="2524125"/>
+            <a:ext cx="3162300" cy="228600"/>
           </a:xfrm>
           <a:prstGeom prst="rect">
             <a:avLst/>
@@ -8666,28 +9034,28 @@
               </a:spcAft>
             </a:pPr>
             <a:r>
-              <a:rPr sz="2025" b="1" lang="zh-CN">
+              <a:rPr sz="1350" b="1" lang="zh-CN">
                 <a:solidFill>
                   <a:srgbClr val="24756D"/>
                 </a:solidFill>
                 <a:latin typeface="Microsoft YaHei"/>
                 <a:ea typeface="Microsoft YaHei"/>
               </a:rPr>
-              <a:t>后台观察 → 有条件地缓存</a:t>
-            </a:r>
-          </a:p>
-        </p:txBody>
-      </p:sp>
-      <p:sp>
-        <p:nvSpPr>
-          <p:cNvPr id="16" name="PROMOTE 先付搬运和调用费， 未来命中仍需 KV → HBM。  只有复用证据有效、预计净收益 为正且历史预算够，才投入。"/>
+              <a:t>观察 3</a:t>
+            </a:r>
+          </a:p>
+        </p:txBody>
+      </p:sp>
+      <p:sp>
+        <p:nvSpPr>
+          <p:cNvPr id="23" name="缓存先投入，后回报"/>
           <p:cNvSpPr txBox="1"/>
           <p:nvPr/>
         </p:nvSpPr>
         <p:spPr>
           <a:xfrm>
-            <a:off x="8134350" y="2857500"/>
-            <a:ext cx="3238500" cy="1581150"/>
+            <a:off x="8248650" y="2886075"/>
+            <a:ext cx="3162300" cy="342900"/>
           </a:xfrm>
           <a:prstGeom prst="rect">
             <a:avLst/>
@@ -8710,108 +9078,28 @@
               </a:spcAft>
             </a:pPr>
             <a:r>
-              <a:rPr sz="1725" b="0" lang="zh-CN">
-                <a:solidFill>
-                  <a:srgbClr val="1F2937"/>
-                </a:solidFill>
-                <a:latin typeface="Microsoft YaHei"/>
-                <a:ea typeface="Microsoft YaHei"/>
-              </a:rPr>
-              <a:t>PROMOTE 先付搬运和调用费，</a:t>
-            </a:r>
-          </a:p>
-          <a:p>
-            <a:pPr algn="l">
-              <a:lnSpc>
-                <a:spcPct val="112000"/>
-              </a:lnSpc>
-              <a:spcAft>
-                <a:spcPts val="500"/>
-              </a:spcAft>
-            </a:pPr>
-            <a:r>
-              <a:rPr sz="1725" b="0" lang="zh-CN">
-                <a:solidFill>
-                  <a:srgbClr val="1F2937"/>
-                </a:solidFill>
-                <a:latin typeface="Microsoft YaHei"/>
-                <a:ea typeface="Microsoft YaHei"/>
-              </a:rPr>
-              <a:t>未来命中仍需 KV → HBM。</a:t>
-            </a:r>
-          </a:p>
-          <a:p>
-            <a:pPr algn="l">
-              <a:lnSpc>
-                <a:spcPct val="112000"/>
-              </a:lnSpc>
-              <a:spcAft>
-                <a:spcPts val="500"/>
-              </a:spcAft>
-            </a:pPr>
-            <a:r>
-              <a:rPr sz="1725" b="0" lang="zh-CN">
-                <a:solidFill>
-                  <a:srgbClr val="1F2937"/>
-                </a:solidFill>
-                <a:latin typeface="Microsoft YaHei"/>
-                <a:ea typeface="Microsoft YaHei"/>
-              </a:rPr>
-              <a:t/>
-            </a:r>
-          </a:p>
-          <a:p>
-            <a:pPr algn="l">
-              <a:lnSpc>
-                <a:spcPct val="112000"/>
-              </a:lnSpc>
-              <a:spcAft>
-                <a:spcPts val="500"/>
-              </a:spcAft>
-            </a:pPr>
-            <a:r>
-              <a:rPr sz="1725" b="0" lang="zh-CN">
-                <a:solidFill>
-                  <a:srgbClr val="1F2937"/>
-                </a:solidFill>
-                <a:latin typeface="Microsoft YaHei"/>
-                <a:ea typeface="Microsoft YaHei"/>
-              </a:rPr>
-              <a:t>只有复用证据有效、预计净收益</a:t>
-            </a:r>
-          </a:p>
-          <a:p>
-            <a:pPr algn="l">
-              <a:lnSpc>
-                <a:spcPct val="112000"/>
-              </a:lnSpc>
-              <a:spcAft>
-                <a:spcPts val="500"/>
-              </a:spcAft>
-            </a:pPr>
-            <a:r>
-              <a:rPr sz="1725" b="0" lang="zh-CN">
-                <a:solidFill>
-                  <a:srgbClr val="1F2937"/>
-                </a:solidFill>
-                <a:latin typeface="Microsoft YaHei"/>
-                <a:ea typeface="Microsoft YaHei"/>
-              </a:rPr>
-              <a:t>为正且历史预算够，才投入。</a:t>
-            </a:r>
-          </a:p>
-        </p:txBody>
-      </p:sp>
-      <p:sp>
-        <p:nvSpPr>
-          <p:cNvPr id="17" name="一组的估价 E = 时间单价 ×（读工作 + 复制工作）× 池压力系数 + 调用费"/>
+              <a:rPr sz="1875" b="1" lang="zh-CN">
+                <a:solidFill>
+                  <a:srgbClr val="24756D"/>
+                </a:solidFill>
+                <a:latin typeface="Microsoft YaHei"/>
+                <a:ea typeface="Microsoft YaHei"/>
+              </a:rPr>
+              <a:t>缓存先投入，后回报</a:t>
+            </a:r>
+          </a:p>
+        </p:txBody>
+      </p:sp>
+      <p:sp>
+        <p:nvSpPr>
+          <p:cNvPr id="24" name="提升先付搬运与调用费； 命中仍要复制到目标 HBM。 复用不够或证据过时， 就可能收不回这次投入。"/>
           <p:cNvSpPr txBox="1"/>
           <p:nvPr/>
         </p:nvSpPr>
         <p:spPr>
           <a:xfrm>
-            <a:off x="609600" y="5010150"/>
-            <a:ext cx="10972800" cy="314325"/>
+            <a:off x="8248650" y="3419475"/>
+            <a:ext cx="3162300" cy="1343025"/>
           </a:xfrm>
           <a:prstGeom prst="rect">
             <a:avLst/>
@@ -8834,28 +9122,314 @@
               </a:spcAft>
             </a:pPr>
             <a:r>
-              <a:rPr sz="1875" b="1" lang="zh-CN">
-                <a:solidFill>
-                  <a:srgbClr val="285EA8"/>
-                </a:solidFill>
-                <a:latin typeface="Microsoft YaHei"/>
-                <a:ea typeface="Microsoft YaHei"/>
-              </a:rPr>
-              <a:t>一组的估价 E = 时间单价 ×（读工作 + 复制工作）× 池压力系数 + 调用费</a:t>
-            </a:r>
-          </a:p>
-        </p:txBody>
-      </p:sp>
-      <p:sp>
-        <p:nvSpPr>
-          <p:cNvPr id="18" name="读按物理字节、复制按有效字节；工作量由公开性能表估计。DIRECT 系数为 1， 中转为 1 + 0.5 × 对应池已用比例；这是局部估价，不是官方最终 J。"/>
+              <a:rPr sz="1650" b="0" lang="zh-CN">
+                <a:solidFill>
+                  <a:srgbClr val="1F2937"/>
+                </a:solidFill>
+                <a:latin typeface="Microsoft YaHei"/>
+                <a:ea typeface="Microsoft YaHei"/>
+              </a:rPr>
+              <a:t>提升先付搬运与调用费；</a:t>
+            </a:r>
+          </a:p>
+          <a:p>
+            <a:pPr algn="l">
+              <a:lnSpc>
+                <a:spcPct val="112000"/>
+              </a:lnSpc>
+              <a:spcAft>
+                <a:spcPts val="500"/>
+              </a:spcAft>
+            </a:pPr>
+            <a:r>
+              <a:rPr sz="1650" b="0" lang="zh-CN">
+                <a:solidFill>
+                  <a:srgbClr val="1F2937"/>
+                </a:solidFill>
+                <a:latin typeface="Microsoft YaHei"/>
+                <a:ea typeface="Microsoft YaHei"/>
+              </a:rPr>
+              <a:t>命中仍要复制到目标 HBM。</a:t>
+            </a:r>
+          </a:p>
+          <a:p>
+            <a:pPr algn="l">
+              <a:lnSpc>
+                <a:spcPct val="112000"/>
+              </a:lnSpc>
+              <a:spcAft>
+                <a:spcPts val="500"/>
+              </a:spcAft>
+            </a:pPr>
+            <a:r>
+              <a:rPr sz="1650" b="0" lang="zh-CN">
+                <a:solidFill>
+                  <a:srgbClr val="1F2937"/>
+                </a:solidFill>
+                <a:latin typeface="Microsoft YaHei"/>
+                <a:ea typeface="Microsoft YaHei"/>
+              </a:rPr>
+              <a:t>复用不够或证据过时，</a:t>
+            </a:r>
+          </a:p>
+          <a:p>
+            <a:pPr algn="l">
+              <a:lnSpc>
+                <a:spcPct val="112000"/>
+              </a:lnSpc>
+              <a:spcAft>
+                <a:spcPts val="500"/>
+              </a:spcAft>
+            </a:pPr>
+            <a:r>
+              <a:rPr sz="1650" b="0" lang="zh-CN">
+                <a:solidFill>
+                  <a:srgbClr val="1F2937"/>
+                </a:solidFill>
+                <a:latin typeface="Microsoft YaHei"/>
+                <a:ea typeface="Microsoft YaHei"/>
+              </a:rPr>
+              <a:t>就可能收不回这次投入。</a:t>
+            </a:r>
+          </a:p>
+        </p:txBody>
+      </p:sp>
+      <p:cxnSp>
+        <p:nvCxnSpPr>
+          <p:cNvPr id="25" name="Connector 24"/>
+          <p:cNvCxnSpPr/>
+          <p:nvPr/>
+        </p:nvCxnSpPr>
+        <p:spPr>
+          <a:xfrm>
+            <a:off x="2286000" y="4905375"/>
+            <a:ext cx="0" cy="180975"/>
+          </a:xfrm>
+          <a:prstGeom prst="line">
+            <a:avLst/>
+          </a:prstGeom>
+          <a:ln w="17780">
+            <a:solidFill>
+              <a:srgbClr val="285EA8"/>
+            </a:solidFill>
+          </a:ln>
+          <a:effectLst/>
+        </p:spPr>
+        <p:style>
+          <a:lnRef idx="2">
+            <a:schemeClr val="accent1"/>
+          </a:lnRef>
+          <a:fillRef idx="0">
+            <a:schemeClr val="accent1"/>
+          </a:fillRef>
+          <a:effectRef idx="0">
+            <a:schemeClr val="accent1"/>
+          </a:effectRef>
+          <a:fontRef idx="minor">
+            <a:schemeClr val="tx1"/>
+          </a:fontRef>
+        </p:style>
+      </p:cxnSp>
+      <p:cxnSp>
+        <p:nvCxnSpPr>
+          <p:cNvPr id="26" name="Connector 25"/>
+          <p:cNvCxnSpPr/>
+          <p:nvPr/>
+        </p:nvCxnSpPr>
+        <p:spPr>
+          <a:xfrm>
+            <a:off x="6019800" y="4905375"/>
+            <a:ext cx="0" cy="180975"/>
+          </a:xfrm>
+          <a:prstGeom prst="line">
+            <a:avLst/>
+          </a:prstGeom>
+          <a:ln w="17780">
+            <a:solidFill>
+              <a:srgbClr val="285EA8"/>
+            </a:solidFill>
+          </a:ln>
+          <a:effectLst/>
+        </p:spPr>
+        <p:style>
+          <a:lnRef idx="2">
+            <a:schemeClr val="accent1"/>
+          </a:lnRef>
+          <a:fillRef idx="0">
+            <a:schemeClr val="accent1"/>
+          </a:fillRef>
+          <a:effectRef idx="0">
+            <a:schemeClr val="accent1"/>
+          </a:effectRef>
+          <a:fontRef idx="minor">
+            <a:schemeClr val="tx1"/>
+          </a:fontRef>
+        </p:style>
+      </p:cxnSp>
+      <p:cxnSp>
+        <p:nvCxnSpPr>
+          <p:cNvPr id="27" name="Connector 26"/>
+          <p:cNvCxnSpPr/>
+          <p:nvPr/>
+        </p:nvCxnSpPr>
+        <p:spPr>
+          <a:xfrm>
+            <a:off x="2286000" y="5086350"/>
+            <a:ext cx="3733800" cy="0"/>
+          </a:xfrm>
+          <a:prstGeom prst="line">
+            <a:avLst/>
+          </a:prstGeom>
+          <a:ln w="17780">
+            <a:solidFill>
+              <a:srgbClr val="285EA8"/>
+            </a:solidFill>
+          </a:ln>
+          <a:effectLst/>
+        </p:spPr>
+        <p:style>
+          <a:lnRef idx="2">
+            <a:schemeClr val="accent1"/>
+          </a:lnRef>
+          <a:fillRef idx="0">
+            <a:schemeClr val="accent1"/>
+          </a:fillRef>
+          <a:effectRef idx="0">
+            <a:schemeClr val="accent1"/>
+          </a:effectRef>
+          <a:fontRef idx="minor">
+            <a:schemeClr val="tx1"/>
+          </a:fontRef>
+        </p:style>
+      </p:cxnSp>
+      <p:cxnSp>
+        <p:nvCxnSpPr>
+          <p:cNvPr id="28" name="Connector 27"/>
+          <p:cNvCxnSpPr/>
+          <p:nvPr/>
+        </p:nvCxnSpPr>
+        <p:spPr>
+          <a:xfrm>
+            <a:off x="4152900" y="5086350"/>
+            <a:ext cx="0" cy="171450"/>
+          </a:xfrm>
+          <a:prstGeom prst="line">
+            <a:avLst/>
+          </a:prstGeom>
+          <a:ln w="17780">
+            <a:solidFill>
+              <a:srgbClr val="285EA8"/>
+            </a:solidFill>
+            <a:tailEnd type="triangle"/>
+          </a:ln>
+          <a:effectLst/>
+        </p:spPr>
+        <p:style>
+          <a:lnRef idx="2">
+            <a:schemeClr val="accent1"/>
+          </a:lnRef>
+          <a:fillRef idx="0">
+            <a:schemeClr val="accent1"/>
+          </a:fillRef>
+          <a:effectRef idx="0">
+            <a:schemeClr val="accent1"/>
+          </a:effectRef>
+          <a:fontRef idx="minor">
+            <a:schemeClr val="tx1"/>
+          </a:fontRef>
+        </p:style>
+      </p:cxnSp>
+      <p:cxnSp>
+        <p:nvCxnSpPr>
+          <p:cNvPr id="29" name="Connector 28"/>
+          <p:cNvCxnSpPr/>
+          <p:nvPr/>
+        </p:nvCxnSpPr>
+        <p:spPr>
+          <a:xfrm>
+            <a:off x="9829800" y="4905375"/>
+            <a:ext cx="0" cy="352425"/>
+          </a:xfrm>
+          <a:prstGeom prst="line">
+            <a:avLst/>
+          </a:prstGeom>
+          <a:ln w="17780">
+            <a:solidFill>
+              <a:srgbClr val="24756D"/>
+            </a:solidFill>
+            <a:tailEnd type="triangle"/>
+          </a:ln>
+          <a:effectLst/>
+        </p:spPr>
+        <p:style>
+          <a:lnRef idx="2">
+            <a:schemeClr val="accent1"/>
+          </a:lnRef>
+          <a:fillRef idx="0">
+            <a:schemeClr val="accent1"/>
+          </a:fillRef>
+          <a:effectRef idx="0">
+            <a:schemeClr val="accent1"/>
+          </a:effectRef>
+          <a:fontRef idx="minor">
+            <a:schemeClr val="tx1"/>
+          </a:fontRef>
+        </p:style>
+      </p:cxnSp>
+      <p:sp>
+        <p:nvSpPr>
+          <p:cNvPr id="30" name="Rectangle 29"/>
+          <p:cNvSpPr/>
+          <p:nvPr/>
+        </p:nvSpPr>
+        <p:spPr>
+          <a:xfrm>
+            <a:off x="609600" y="5286375"/>
+            <a:ext cx="7086600" cy="733425"/>
+          </a:xfrm>
+          <a:prstGeom prst="rect">
+            <a:avLst/>
+          </a:prstGeom>
+          <a:solidFill>
+            <a:srgbClr val="EDF3FA"/>
+          </a:solidFill>
+          <a:ln>
+            <a:noFill/>
+          </a:ln>
+          <a:effectLst/>
+        </p:spPr>
+        <p:style>
+          <a:lnRef idx="1">
+            <a:schemeClr val="accent1"/>
+          </a:lnRef>
+          <a:fillRef idx="3">
+            <a:schemeClr val="accent1"/>
+          </a:fillRef>
+          <a:effectRef idx="0">
+            <a:schemeClr val="accent1"/>
+          </a:effectRef>
+          <a:fontRef idx="minor">
+            <a:schemeClr val="lt1"/>
+          </a:fontRef>
+        </p:style>
+        <p:txBody>
+          <a:bodyPr rtlCol="0" anchor="ctr"/>
+          <a:lstStyle/>
+          <a:p>
+            <a:pPr algn="ctr"/>
+          </a:p>
+        </p:txBody>
+      </p:sp>
+      <p:sp>
+        <p:nvSpPr>
+          <p:cNvPr id="31" name="设计：用联合 DP 同时选择分组边界与路径"/>
           <p:cNvSpPr txBox="1"/>
           <p:nvPr/>
         </p:nvSpPr>
         <p:spPr>
           <a:xfrm>
-            <a:off x="609600" y="5448300"/>
-            <a:ext cx="10972800" cy="523874"/>
+            <a:off x="781050" y="5381625"/>
+            <a:ext cx="6743700" cy="295275"/>
           </a:xfrm>
           <a:prstGeom prst="rect">
             <a:avLst/>
@@ -8878,16 +9452,40 @@
               </a:spcAft>
             </a:pPr>
             <a:r>
-              <a:rPr sz="1650" b="0" lang="zh-CN">
-                <a:solidFill>
-                  <a:srgbClr val="657184"/>
-                </a:solidFill>
-                <a:latin typeface="Microsoft YaHei"/>
-                <a:ea typeface="Microsoft YaHei"/>
-              </a:rPr>
-              <a:t>读按物理字节、复制按有效字节；工作量由公开性能表估计。DIRECT 系数为 1，</a:t>
-            </a:r>
-          </a:p>
+              <a:rPr sz="1950" b="1" lang="zh-CN">
+                <a:solidFill>
+                  <a:srgbClr val="285EA8"/>
+                </a:solidFill>
+                <a:latin typeface="Microsoft YaHei"/>
+                <a:ea typeface="Microsoft YaHei"/>
+              </a:rPr>
+              <a:t>设计：用联合 DP 同时选择分组边界与路径</a:t>
+            </a:r>
+          </a:p>
+        </p:txBody>
+      </p:sp>
+      <p:sp>
+        <p:nvSpPr>
+          <p:cNvPr id="32" name="每个合法分组比较各条路径，用同一成本口径排序。"/>
+          <p:cNvSpPr txBox="1"/>
+          <p:nvPr/>
+        </p:nvSpPr>
+        <p:spPr>
+          <a:xfrm>
+            <a:off x="781050" y="5753100"/>
+            <a:ext cx="6743700" cy="228600"/>
+          </a:xfrm>
+          <a:prstGeom prst="rect">
+            <a:avLst/>
+          </a:prstGeom>
+          <a:noFill/>
+          <a:effectLst/>
+        </p:spPr>
+        <p:txBody>
+          <a:bodyPr wrap="square" lIns="0" rIns="0" tIns="0" bIns="0">
+            <a:spAutoFit/>
+          </a:bodyPr>
+          <a:lstStyle/>
           <a:p>
             <a:pPr algn="l">
               <a:lnSpc>
@@ -8898,14 +9496,146 @@
               </a:spcAft>
             </a:pPr>
             <a:r>
-              <a:rPr sz="1650" b="0" lang="zh-CN">
-                <a:solidFill>
-                  <a:srgbClr val="657184"/>
-                </a:solidFill>
-                <a:latin typeface="Microsoft YaHei"/>
-                <a:ea typeface="Microsoft YaHei"/>
-              </a:rPr>
-              <a:t>中转为 1 + 0.5 × 对应池已用比例；这是局部估价，不是官方最终 J。</a:t>
+              <a:rPr sz="1575" b="0" lang="zh-CN">
+                <a:solidFill>
+                  <a:srgbClr val="1F2937"/>
+                </a:solidFill>
+                <a:latin typeface="Microsoft YaHei"/>
+                <a:ea typeface="Microsoft YaHei"/>
+              </a:rPr>
+              <a:t>每个合法分组比较各条路径，用同一成本口径排序。</a:t>
+            </a:r>
+          </a:p>
+        </p:txBody>
+      </p:sp>
+      <p:sp>
+        <p:nvSpPr>
+          <p:cNvPr id="33" name="Rectangle 32"/>
+          <p:cNvSpPr/>
+          <p:nvPr/>
+        </p:nvSpPr>
+        <p:spPr>
+          <a:xfrm>
+            <a:off x="8077200" y="5286375"/>
+            <a:ext cx="3505200" cy="733425"/>
+          </a:xfrm>
+          <a:prstGeom prst="rect">
+            <a:avLst/>
+          </a:prstGeom>
+          <a:solidFill>
+            <a:srgbClr val="EEF6F3"/>
+          </a:solidFill>
+          <a:ln>
+            <a:noFill/>
+          </a:ln>
+          <a:effectLst/>
+        </p:spPr>
+        <p:style>
+          <a:lnRef idx="1">
+            <a:schemeClr val="accent1"/>
+          </a:lnRef>
+          <a:fillRef idx="3">
+            <a:schemeClr val="accent1"/>
+          </a:fillRef>
+          <a:effectRef idx="0">
+            <a:schemeClr val="accent1"/>
+          </a:effectRef>
+          <a:fontRef idx="minor">
+            <a:schemeClr val="lt1"/>
+          </a:fontRef>
+        </p:style>
+        <p:txBody>
+          <a:bodyPr rtlCol="0" anchor="ctr"/>
+          <a:lstStyle/>
+          <a:p>
+            <a:pPr algn="ctr"/>
+          </a:p>
+        </p:txBody>
+      </p:sp>
+      <p:sp>
+        <p:nvSpPr>
+          <p:cNvPr id="34" name="设计：按净收益与预算准入"/>
+          <p:cNvSpPr txBox="1"/>
+          <p:nvPr/>
+        </p:nvSpPr>
+        <p:spPr>
+          <a:xfrm>
+            <a:off x="8248650" y="5391150"/>
+            <a:ext cx="3162300" cy="276225"/>
+          </a:xfrm>
+          <a:prstGeom prst="rect">
+            <a:avLst/>
+          </a:prstGeom>
+          <a:noFill/>
+          <a:effectLst/>
+        </p:spPr>
+        <p:txBody>
+          <a:bodyPr wrap="square" lIns="0" rIns="0" tIns="0" bIns="0">
+            <a:spAutoFit/>
+          </a:bodyPr>
+          <a:lstStyle/>
+          <a:p>
+            <a:pPr algn="l">
+              <a:lnSpc>
+                <a:spcPct val="112000"/>
+              </a:lnSpc>
+              <a:spcAft>
+                <a:spcPts val="500"/>
+              </a:spcAft>
+            </a:pPr>
+            <a:r>
+              <a:rPr sz="1725" b="1" lang="zh-CN">
+                <a:solidFill>
+                  <a:srgbClr val="24756D"/>
+                </a:solidFill>
+                <a:latin typeface="Microsoft YaHei"/>
+                <a:ea typeface="Microsoft YaHei"/>
+              </a:rPr>
+              <a:t>设计：按净收益与预算准入</a:t>
+            </a:r>
+          </a:p>
+        </p:txBody>
+      </p:sp>
+      <p:sp>
+        <p:nvSpPr>
+          <p:cNvPr id="35" name="复用证据有效，再决定是否提升。"/>
+          <p:cNvSpPr txBox="1"/>
+          <p:nvPr/>
+        </p:nvSpPr>
+        <p:spPr>
+          <a:xfrm>
+            <a:off x="8248650" y="5762625"/>
+            <a:ext cx="3162300" cy="228600"/>
+          </a:xfrm>
+          <a:prstGeom prst="rect">
+            <a:avLst/>
+          </a:prstGeom>
+          <a:noFill/>
+          <a:effectLst/>
+        </p:spPr>
+        <p:txBody>
+          <a:bodyPr wrap="square" lIns="0" rIns="0" tIns="0" bIns="0">
+            <a:spAutoFit/>
+          </a:bodyPr>
+          <a:lstStyle/>
+          <a:p>
+            <a:pPr algn="l">
+              <a:lnSpc>
+                <a:spcPct val="112000"/>
+              </a:lnSpc>
+              <a:spcAft>
+                <a:spcPts val="500"/>
+              </a:spcAft>
+            </a:pPr>
+            <a:r>
+              <a:rPr sz="1500" b="0" lang="zh-CN">
+                <a:solidFill>
+                  <a:srgbClr val="1F2937"/>
+                </a:solidFill>
+                <a:latin typeface="Microsoft YaHei"/>
+                <a:ea typeface="Microsoft YaHei"/>
+              </a:rPr>
+              <a:t>复用证据有效，再决定是否提升。</a:t>
             </a:r>
           </a:p>
         </p:txBody>

--- a/submissions/kaisennhu/07_答辩PPT/答辩介绍.pptx
+++ b/submissions/kaisennhu/07_答辩PPT/答辩介绍.pptx
@@ -652,7 +652,7 @@
           <a:lstStyle/>
           <a:p>
             <a:r>
-              <a:t>本页两张主图都是正常启用缓存的两套完整方案直接比较，同组39条公开Trace，各自从零起算、组内共享同一比例，费用越低越好；不混入关闭缓存的消融。后台总调用费=提升CPU/NPU费+框架命中H2D调用费：贪心722994+81662=804656，本方案24676+16806=41482，下降94.8447535%。该值不含前台调用费，也不含模拟搬运时间费，不称为整个后台J。平均每次命中的调用费=整条Trace汇总后台调用费/真实命中请求数；804656/40831=19.7069873，本方案41482/8403=4.93657027，下降74.9501525%。这是把所有提升投入（含最终没有命中的提升）和命中调用费摊到总命中数上的比值，包含准入选择的效果，不是单次命中固有单价。官方单次命中调用收费两者均为2，算法没有降低这一收费。每次提升的平均命中数=40831/8817=4.63094与8403/301=27.91694，后者6.02835倍。两项均为完整Trace的汇总效率，不代表单个对象必命中27.92次，不是同尺寸、同缓存内容的受控模块对照。请求总数相同198542，命中率20.57%→4.23%；提升次数与命中数均在页脚公开。选更少的缓存对象、保留更集中复用，是对总计数的解释，不声称每道门槛的独立因果贡献。high_mixed可直接核验：贪心3566次提升、提升调用费292412、命中0；本方案均0。全Trace J530416→174066还有前台变化，不能全算缓存收益。提升调用费单项下降96.59%，提升搬运字节3881057800→327938527，下降91.55%。补充消融与主图分开：双方各自保留前台，仅关闭PROMOTE，贪心J3686550→3581641，缓存净贡献104909；本方案2344079→2273874，缓存净贡献70205。绝对命中量和缓存净贡献较小，不能声称缓存模块在同一前台下收益更大。消融双方各6例正收益，贪心17例负收益、本方案2例；这不表示相对baseline退化。06_reuse_hot：本方案开/关36356/36302，baseline41233；mid_reuse：88409/87179，baseline185453。完整方案分别优于baseline11.83%、52.33%。公开39条35胜4平0负；扩展292条96条退化，详见报告。所有数据由已提交CSV聚合，算法与原始性能记录不变。</a:t>
+              <a:t>本页两张主图都是正常启用缓存的两套完整方案直接比较，同组39条公开Trace，各自从零起算、组内共享同一比例，费用越低越好；不混入关闭缓存的消融。后台总调用费=提升CPU/NPU费+框架命中H2D调用费：贪心722994+81662=804656，本方案24676+16806=41482，下降94.8447535%。该值不含前台调用费，也不含模拟搬运时间费，不称为整个后台J。平均每次命中的调用费=整条Trace汇总后台调用费/真实命中请求数；804656/40831=19.7069873，本方案41482/8403=4.93657027，下降74.9501525%。这是把所有提升投入（含最终没有命中的提升）和命中调用费摊到总命中数上的比值，包含准入选择的效果，不是单次命中固有单价。官方单次命中调用收费两者均为2，算法没有降低这一收费。每次提升的平均命中数=40831/8817=4.63094与8403/301=27.91694，后者6.02835倍。两项均为完整Trace的汇总效率，不代表单个对象必命中27.92次，不是同尺寸、同缓存内容的受控模块对照。请求总数相同198542，命中率20.57%→4.23%；提升次数与命中数均在页脚公开。选更少的缓存对象、保留更集中复用，是对总计数的解释，不声称每道门槛的独立因果贡献。high_mixed可直接核验：贪心3566次提升、提升调用费292412、命中0；本方案均0。全Trace J530416→174066还有前台变化，不能全算缓存收益。提升调用费单项下降96.59%，提升搬运字节3881057800→327938527，下降91.55%。完整方案在39条公开Trace上35胜4平0负。逐例结果与复现方法见验证报告。所有数据由已提交CSV聚合，算法与原始性能记录不变。</a:t>
             </a:r>
           </a:p>
         </p:txBody>
@@ -932,7 +932,7 @@
           <a:lstStyle/>
           <a:p>
             <a:r>
-              <a:t>讲解顺序是同一前台规划的三个串行步骤，不是两个互相投票的独立算法。快速DP每批必运行：用片段数与卡上请求数作为初始负载代理，对合法的分组加路径候选求一维前缀最小值，输出完整基础方案。细化DP不是只给原方案打分，也不是只改变路径：它复用同一合法候选边集合，从基础方案读取组数与卡号/复制类型比例，在固定候选总组数cnt后重新求解D[h][j]，可同时改变分组和路径。cnt影响SSD估价并发；复制估价按基础方案的各卡/类型占比计算，并按对应上限处理。为何有两阶段：分组影响并发，而并发影响估价；基础方案提供复制分布，有限细化缓解该相互依赖，避免每批进行高维全量搜索。细化入口要求无活动传输、排队、在途提升、占槽或旧未完成请求；最多1024请求、2048 iov、16384片段，基础方案最多2048操作。合法边至多262144，单次存储状态至多131072，共享200万估价/转移预算；具体预检查与回溯另计。每个cnt回溯后检查总槽位和两类临时池容量。最终选通过检查且完成求解的细化候选中估价最低者；无可用候选则保留基础方案。代码不将快速E和细化E直接比较，也不保证细化后的真实J必降。DP只处理当前未命中的合法连续片段，每起点最多向后看128片段，不规划未来、不决定PROMOTE。五次点击依次显示基础规划、细化、输出选择、更新公式与数值示例、实际结果。三个源区间[0,512)、[512,1024)、[1024,1536)，目标同卡且分别对齐。快速阶段qs=qc=3，整组D/A/F的E为5.406/32.820/22.559；快速dp[1/2/3]=3.135/4.271/5.406。细化时基础方案全DIRECT，复制估价q=1，因此整组AGGREGATE E重算为81.648，不能沿用快速阶段数值。页面只展示同一细化阶段内可比的最终候选：1/2/3组最低E为5.406/7.406/9.406，均由DIRECT取得；代码实际尝试顺序1、3、2。最终读工作3.4059797微秒，Trace时间向上取整为4微秒，调用费2，官方J=6；分别读3次时T=4、调用费6、J=10。已核验输入、估价及官方输出；放映不运行C++。</a:t>
+              <a:t>本页区分三层概念。合法操作候选是“某段连续片段合为一组，走某条路径”；一份完整方案是若干操作覆盖本批全部片段。快速DP枚举许多候选操作，但最终只回溯输出一份完整基础方案，不输出多份完整方案。每个dp[j]也只保留一个最低估价前驱；并列时保留先遇到的选择。细化阶段从基础方案获得组数seed以及卡号/复制类型的组数比例，再从前面枚举的同一合法操作集合中重新求解。多个完整候选来自对多个总组数cnt分别求解；每个cnt只回溯一个最低估价方案，回溯后进行总槽位与池容量检查，不保留该cnt的次优方案。最终提交的仍是一份计划。快速更新dp[j]=min_i,path(dp[i]+E(i,j,path))，状态只表示前缀j，最终组数由回溯决定。细化更新D[h][j]=min_i,path(D[h-1][i]+E_cnt(i,j,path))；每固定一个cnt，边权用对应并发重算，取D[cnt][n]回溯。两阶段都联合选分组边界和路径，并非先分组后选路。快速SSD估价并发max(1,active_ssd+n)，复制为max(1,active_copy+per_card_requests)；细化SSD为max(1,active_ssd+cnt)，因入口保守空闲，active_ssd为0。复制为active_copy+max(1,ceil(cnt*seed_copy_groups/seed))，按卡号与D2D/H2D类型分别估计，估价内再应用对应性能表及并发限制；DIRECT不计入复制组数。cnt不是整个执行期不变的真实并发，E用于排序，实际J由官方完整Trace回放计算。每批先运行快速DP。细化仅在无活动传输、queued_iocbs、promote_inflight、foreground_iocb_inflight及旧未完成到达登记时尝试；≤1024请求、≤2048 iov、≤16384片段，快速方案≤2048操作。合法边上限262144；每cnt状态≤131072，估价/转移共享200万工作预算。预检查、可达性过滤、采样及回溯资源检查按代码执行；预算不足的cnt不求解。有合格细化方案则选细化候选中的最低估价者，没有则保留快速方案；不是把快速E与细化E直接比较。n≤24时尝试所有cnt，否则采样性能桶边界、几何序列及尺寸拐点，并局部细化；采样包含基础方案组数，但该cnt重新求出的方案可能与基础方案不同。三个同卡相邻对齐512B片段：快速阶段qs=qc=3，整组D/A/F E=5.406/32.820/22.559，输出一个DIRECT组。细化时全DIRECT基础方案使复制qc=1，AGGREGATE整组E重算为81.648；每cnt的最佳D[cnt][3]在1/2/3组时为5.406/7.406/9.406，均由DIRECT取得。代码尝试顺序1、3、2，最终仍选一个DIRECT。实际读工作3.4059797微秒，Trace时间向上取整4微秒，调用费2，J=6；分别读时调用费6、J=10。前台最多考察起点后128片段，不处理未来请求或PROMOTE。五次点击对应快速输出、细化候选、入口范围、最终选择、数值示例；放映展示已核验的执行过程，不调用模拟器。</a:t>
             </a:r>
           </a:p>
         </p:txBody>
@@ -1212,7 +1212,7 @@
           <a:lstStyle/>
           <a:p>
             <a:r>
-              <a:t>这页专门回答调度算法开销，不把优化后的模拟J当成本机加速。所有数字来自主线验证报告和资源开销CSV。回调覆盖两个策略函数，正式策略本身没有计时器，测试使用外层计时器。逐例三轮取中位数后求和得到1.153s与0.831s；进程总时间同时包含框架执行、数据结构和JSON输入输出，故回调更慢而总程序更快并不矛盾。峰值取所有公开例正式轮的最大值，策略堆与RSS是不同范围。预热、编译和独立validator另计；共享主机噪声与硬件会影响实测值。不从总程序时间独立推断某一算法模块加速。扩展655条策略堆峰值13.06MiB；极端碎片探针1.58GiB，和公开集口径分开。</a:t>
+              <a:t>这页专门回答调度算法开销，不把优化后的模拟J当成本机加速。所有数字来自主线验证报告和资源开销CSV。回调覆盖两个策略函数，正式策略本身没有计时器，测试使用外层计时器。逐例三轮取中位数后求和得到1.153s与0.831s；进程总时间同时包含框架执行、数据结构和JSON输入输出，故回调更慢而总程序更快并不矛盾。峰值取所有公开例正式轮的最大值，策略堆与RSS是不同范围。预热、编译和独立validator另计；共享主机噪声与硬件会影响实测值。不从总程序时间独立推断某一算法模块加速。本页统一使用39条公开输入的统计口径，逐例记录见资源开销CSV。</a:t>
             </a:r>
           </a:p>
         </p:txBody>
@@ -11154,7 +11154,7 @@
       <p:grpSpPr/>
       <p:sp>
         <p:nvSpPr>
-          <p:cNvPr id="2" name="前台 · 分组与路径联合规划"/>
+          <p:cNvPr id="2" name="前台 · 联合 DP 的两阶段实现"/>
           <p:cNvSpPr txBox="1"/>
           <p:nvPr/>
         </p:nvSpPr>
@@ -11191,14 +11191,14 @@
                 <a:latin typeface="Microsoft YaHei"/>
                 <a:ea typeface="Microsoft YaHei"/>
               </a:rPr>
-              <a:t>前台 · 分组与路径联合规划</a:t>
-            </a:r>
-          </a:p>
-        </p:txBody>
-      </p:sp>
-      <p:sp>
-        <p:nvSpPr>
-          <p:cNvPr id="3" name="联合 DP：先出基础方案，再按需细化"/>
+              <a:t>前台 · 联合 DP 的两阶段实现</a:t>
+            </a:r>
+          </a:p>
+        </p:txBody>
+      </p:sp>
+      <p:sp>
+        <p:nvSpPr>
+          <p:cNvPr id="3" name="快速 DP 产出一个方案，细化按组数生成候选"/>
           <p:cNvSpPr txBox="1"/>
           <p:nvPr/>
         </p:nvSpPr>
@@ -11235,14 +11235,14 @@
                 <a:latin typeface="Microsoft YaHei"/>
                 <a:ea typeface="Microsoft YaHei"/>
               </a:rPr>
-              <a:t>联合 DP：先出基础方案，再按需细化</a:t>
-            </a:r>
-          </a:p>
-        </p:txBody>
-      </p:sp>
-      <p:sp>
-        <p:nvSpPr>
-          <p:cNvPr id="4" name="分组影响并发，并发又影响成本；基础方案提供复制分布，细化按候选组数重新求解。"/>
+              <a:t>快速 DP 产出一个方案，细化按组数生成候选</a:t>
+            </a:r>
+          </a:p>
+        </p:txBody>
+      </p:sp>
+      <p:sp>
+        <p:nvSpPr>
+          <p:cNvPr id="4" name="两阶段共用合法操作集合，都同时选分组与路径；细化利用基础方案的复制分布估计并发。"/>
           <p:cNvSpPr txBox="1"/>
           <p:nvPr/>
         </p:nvSpPr>
@@ -11279,7 +11279,7 @@
                 <a:latin typeface="Microsoft YaHei"/>
                 <a:ea typeface="Microsoft YaHei"/>
               </a:rPr>
-              <a:t>分组影响并发，并发又影响成本；基础方案提供复制分布，细化按候选组数重新求解。</a:t>
+              <a:t>两阶段共用合法操作集合，都同时选分组与路径；细化利用基础方案的复制分布估计并发。</a:t>
             </a:r>
           </a:p>
         </p:txBody>
@@ -11408,74 +11408,358 @@
           </a:p>
         </p:txBody>
       </p:sp>
+      <p:sp>
+        <p:nvSpPr>
+          <p:cNvPr id="8" name="Rectangle 7"/>
+          <p:cNvSpPr/>
+          <p:nvPr/>
+        </p:nvSpPr>
+        <p:spPr>
+          <a:xfrm>
+            <a:off x="609600" y="2076450"/>
+            <a:ext cx="10972800" cy="381000"/>
+          </a:xfrm>
+          <a:prstGeom prst="rect">
+            <a:avLst/>
+          </a:prstGeom>
+          <a:solidFill>
+            <a:srgbClr val="EDF3FA"/>
+          </a:solidFill>
+          <a:ln>
+            <a:noFill/>
+          </a:ln>
+          <a:effectLst/>
+        </p:spPr>
+        <p:style>
+          <a:lnRef idx="1">
+            <a:schemeClr val="accent1"/>
+          </a:lnRef>
+          <a:fillRef idx="3">
+            <a:schemeClr val="accent1"/>
+          </a:fillRef>
+          <a:effectRef idx="0">
+            <a:schemeClr val="accent1"/>
+          </a:effectRef>
+          <a:fontRef idx="minor">
+            <a:schemeClr val="lt1"/>
+          </a:fontRef>
+        </p:style>
+        <p:txBody>
+          <a:bodyPr rtlCol="0" anchor="ctr"/>
+          <a:lstStyle/>
+          <a:p>
+            <a:pPr algn="ctr"/>
+          </a:p>
+        </p:txBody>
+      </p:sp>
+      <p:sp>
+        <p:nvSpPr>
+          <p:cNvPr id="9" name="比较项"/>
+          <p:cNvSpPr txBox="1"/>
+          <p:nvPr/>
+        </p:nvSpPr>
+        <p:spPr>
+          <a:xfrm>
+            <a:off x="762000" y="2152650"/>
+            <a:ext cx="1409700" cy="276225"/>
+          </a:xfrm>
+          <a:prstGeom prst="rect">
+            <a:avLst/>
+          </a:prstGeom>
+          <a:noFill/>
+          <a:effectLst/>
+        </p:spPr>
+        <p:txBody>
+          <a:bodyPr wrap="square" lIns="0" rIns="0" tIns="0" bIns="0">
+            <a:spAutoFit/>
+          </a:bodyPr>
+          <a:lstStyle/>
+          <a:p>
+            <a:pPr algn="l">
+              <a:lnSpc>
+                <a:spcPct val="112000"/>
+              </a:lnSpc>
+              <a:spcAft>
+                <a:spcPts val="500"/>
+              </a:spcAft>
+            </a:pPr>
+            <a:r>
+              <a:rPr sz="1725" b="1" lang="zh-CN">
+                <a:solidFill>
+                  <a:srgbClr val="285EA8"/>
+                </a:solidFill>
+                <a:latin typeface="Microsoft YaHei"/>
+                <a:ea typeface="Microsoft YaHei"/>
+              </a:rPr>
+              <a:t>比较项</a:t>
+            </a:r>
+          </a:p>
+        </p:txBody>
+      </p:sp>
+      <p:sp>
+        <p:nvSpPr>
+          <p:cNvPr id="10" name="状态与约束"/>
+          <p:cNvSpPr txBox="1"/>
+          <p:nvPr/>
+        </p:nvSpPr>
+        <p:spPr>
+          <a:xfrm>
+            <a:off x="762000" y="2628900"/>
+            <a:ext cx="1409700" cy="571500"/>
+          </a:xfrm>
+          <a:prstGeom prst="rect">
+            <a:avLst/>
+          </a:prstGeom>
+          <a:noFill/>
+          <a:effectLst/>
+        </p:spPr>
+        <p:txBody>
+          <a:bodyPr wrap="square" lIns="0" rIns="0" tIns="0" bIns="0">
+            <a:spAutoFit/>
+          </a:bodyPr>
+          <a:lstStyle/>
+          <a:p>
+            <a:pPr algn="l">
+              <a:lnSpc>
+                <a:spcPct val="112000"/>
+              </a:lnSpc>
+              <a:spcAft>
+                <a:spcPts val="500"/>
+              </a:spcAft>
+            </a:pPr>
+            <a:r>
+              <a:rPr sz="1650" b="1" lang="zh-CN">
+                <a:solidFill>
+                  <a:srgbClr val="657184"/>
+                </a:solidFill>
+                <a:latin typeface="Microsoft YaHei"/>
+                <a:ea typeface="Microsoft YaHei"/>
+              </a:rPr>
+              <a:t>状态与约束</a:t>
+            </a:r>
+          </a:p>
+        </p:txBody>
+      </p:sp>
+      <p:cxnSp>
+        <p:nvCxnSpPr>
+          <p:cNvPr id="11" name="Connector 10"/>
+          <p:cNvCxnSpPr/>
+          <p:nvPr/>
+        </p:nvCxnSpPr>
+        <p:spPr>
+          <a:xfrm>
+            <a:off x="609600" y="3276600"/>
+            <a:ext cx="10972800" cy="0"/>
+          </a:xfrm>
+          <a:prstGeom prst="line">
+            <a:avLst/>
+          </a:prstGeom>
+          <a:ln w="12700">
+            <a:solidFill>
+              <a:srgbClr val="DCE2E9"/>
+            </a:solidFill>
+          </a:ln>
+          <a:effectLst/>
+        </p:spPr>
+        <p:style>
+          <a:lnRef idx="2">
+            <a:schemeClr val="accent1"/>
+          </a:lnRef>
+          <a:fillRef idx="0">
+            <a:schemeClr val="accent1"/>
+          </a:fillRef>
+          <a:effectRef idx="0">
+            <a:schemeClr val="accent1"/>
+          </a:effectRef>
+          <a:fontRef idx="minor">
+            <a:schemeClr val="tx1"/>
+          </a:fontRef>
+        </p:style>
+      </p:cxnSp>
+      <p:sp>
+        <p:nvSpPr>
+          <p:cNvPr id="12" name="并发估计"/>
+          <p:cNvSpPr txBox="1"/>
+          <p:nvPr/>
+        </p:nvSpPr>
+        <p:spPr>
+          <a:xfrm>
+            <a:off x="762000" y="3295650"/>
+            <a:ext cx="1409700" cy="571500"/>
+          </a:xfrm>
+          <a:prstGeom prst="rect">
+            <a:avLst/>
+          </a:prstGeom>
+          <a:noFill/>
+          <a:effectLst/>
+        </p:spPr>
+        <p:txBody>
+          <a:bodyPr wrap="square" lIns="0" rIns="0" tIns="0" bIns="0">
+            <a:spAutoFit/>
+          </a:bodyPr>
+          <a:lstStyle/>
+          <a:p>
+            <a:pPr algn="l">
+              <a:lnSpc>
+                <a:spcPct val="112000"/>
+              </a:lnSpc>
+              <a:spcAft>
+                <a:spcPts val="500"/>
+              </a:spcAft>
+            </a:pPr>
+            <a:r>
+              <a:rPr sz="1650" b="1" lang="zh-CN">
+                <a:solidFill>
+                  <a:srgbClr val="657184"/>
+                </a:solidFill>
+                <a:latin typeface="Microsoft YaHei"/>
+                <a:ea typeface="Microsoft YaHei"/>
+              </a:rPr>
+              <a:t>并发估计</a:t>
+            </a:r>
+          </a:p>
+        </p:txBody>
+      </p:sp>
+      <p:cxnSp>
+        <p:nvCxnSpPr>
+          <p:cNvPr id="13" name="Connector 12"/>
+          <p:cNvCxnSpPr/>
+          <p:nvPr/>
+        </p:nvCxnSpPr>
+        <p:spPr>
+          <a:xfrm>
+            <a:off x="609600" y="3943350"/>
+            <a:ext cx="10972800" cy="0"/>
+          </a:xfrm>
+          <a:prstGeom prst="line">
+            <a:avLst/>
+          </a:prstGeom>
+          <a:ln w="12700">
+            <a:solidFill>
+              <a:srgbClr val="DCE2E9"/>
+            </a:solidFill>
+          </a:ln>
+          <a:effectLst/>
+        </p:spPr>
+        <p:style>
+          <a:lnRef idx="2">
+            <a:schemeClr val="accent1"/>
+          </a:lnRef>
+          <a:fillRef idx="0">
+            <a:schemeClr val="accent1"/>
+          </a:fillRef>
+          <a:effectRef idx="0">
+            <a:schemeClr val="accent1"/>
+          </a:effectRef>
+          <a:fontRef idx="minor">
+            <a:schemeClr val="tx1"/>
+          </a:fontRef>
+        </p:style>
+      </p:cxnSp>
+      <p:sp>
+        <p:nvSpPr>
+          <p:cNvPr id="14" name="输出"/>
+          <p:cNvSpPr txBox="1"/>
+          <p:nvPr/>
+        </p:nvSpPr>
+        <p:spPr>
+          <a:xfrm>
+            <a:off x="762000" y="3981450"/>
+            <a:ext cx="1409700" cy="504825"/>
+          </a:xfrm>
+          <a:prstGeom prst="rect">
+            <a:avLst/>
+          </a:prstGeom>
+          <a:noFill/>
+          <a:effectLst/>
+        </p:spPr>
+        <p:txBody>
+          <a:bodyPr wrap="square" lIns="0" rIns="0" tIns="0" bIns="0">
+            <a:spAutoFit/>
+          </a:bodyPr>
+          <a:lstStyle/>
+          <a:p>
+            <a:pPr algn="l">
+              <a:lnSpc>
+                <a:spcPct val="112000"/>
+              </a:lnSpc>
+              <a:spcAft>
+                <a:spcPts val="500"/>
+              </a:spcAft>
+            </a:pPr>
+            <a:r>
+              <a:rPr sz="1650" b="1" lang="zh-CN">
+                <a:solidFill>
+                  <a:srgbClr val="657184"/>
+                </a:solidFill>
+                <a:latin typeface="Microsoft YaHei"/>
+                <a:ea typeface="Microsoft YaHei"/>
+              </a:rPr>
+              <a:t>输出</a:t>
+            </a:r>
+          </a:p>
+        </p:txBody>
+      </p:sp>
+      <p:cxnSp>
+        <p:nvCxnSpPr>
+          <p:cNvPr id="15" name="Connector 14"/>
+          <p:cNvCxnSpPr/>
+          <p:nvPr/>
+        </p:nvCxnSpPr>
+        <p:spPr>
+          <a:xfrm>
+            <a:off x="609600" y="4562475"/>
+            <a:ext cx="10972800" cy="0"/>
+          </a:xfrm>
+          <a:prstGeom prst="line">
+            <a:avLst/>
+          </a:prstGeom>
+          <a:ln w="12700">
+            <a:solidFill>
+              <a:srgbClr val="DCE2E9"/>
+            </a:solidFill>
+          </a:ln>
+          <a:effectLst/>
+        </p:spPr>
+        <p:style>
+          <a:lnRef idx="2">
+            <a:schemeClr val="accent1"/>
+          </a:lnRef>
+          <a:fillRef idx="0">
+            <a:schemeClr val="accent1"/>
+          </a:fillRef>
+          <a:effectRef idx="0">
+            <a:schemeClr val="accent1"/>
+          </a:effectRef>
+          <a:fontRef idx="minor">
+            <a:schemeClr val="tx1"/>
+          </a:fontRef>
+        </p:style>
+      </p:cxnSp>
       <p:grpSp>
         <p:nvGrpSpPr>
-          <p:cNvPr id="8" name="步骤1：快速 DP 输出基础方案"/>
+          <p:cNvPr id="16" name="步骤1：快速 DP 每批输出一份基础方案"/>
           <p:cNvGrpSpPr/>
           <p:nvPr/>
         </p:nvGrpSpPr>
         <p:grpSpPr>
           <a:xfrm>
-            <a:off x="609600" y="2076450"/>
-            <a:ext cx="3143250" cy="1114425"/>
-            <a:chOff x="609600" y="2076450"/>
-            <a:chExt cx="3143250" cy="1114425"/>
+            <a:off x="2381250" y="2152650"/>
+            <a:ext cx="4171950" cy="2305050"/>
+            <a:chOff x="2381250" y="2152650"/>
+            <a:chExt cx="4171950" cy="2305050"/>
           </a:xfrm>
         </p:grpSpPr>
         <p:sp>
           <p:nvSpPr>
-            <p:cNvPr id="9" name="Rectangle 8"/>
-            <p:cNvSpPr/>
-            <p:nvPr/>
-          </p:nvSpPr>
-          <p:spPr>
-            <a:xfrm>
-              <a:off x="609600" y="2076450"/>
-              <a:ext cx="3143250" cy="1114425"/>
-            </a:xfrm>
-            <a:prstGeom prst="rect">
-              <a:avLst/>
-            </a:prstGeom>
-            <a:solidFill>
-              <a:srgbClr val="EDF3FA"/>
-            </a:solidFill>
-            <a:ln>
-              <a:noFill/>
-            </a:ln>
-            <a:effectLst/>
-          </p:spPr>
-          <p:style>
-            <a:lnRef idx="1">
-              <a:schemeClr val="accent1"/>
-            </a:lnRef>
-            <a:fillRef idx="3">
-              <a:schemeClr val="accent1"/>
-            </a:fillRef>
-            <a:effectRef idx="0">
-              <a:schemeClr val="accent1"/>
-            </a:effectRef>
-            <a:fontRef idx="minor">
-              <a:schemeClr val="lt1"/>
-            </a:fontRef>
-          </p:style>
-          <p:txBody>
-            <a:bodyPr rtlCol="0" anchor="ctr"/>
-            <a:lstStyle/>
-            <a:p>
-              <a:pPr algn="ctr"/>
-            </a:p>
-          </p:txBody>
-        </p:sp>
-        <p:sp>
-          <p:nvSpPr>
-            <p:cNvPr id="10" name="① 快速 DP：先有方案"/>
+            <p:cNvPr id="17" name="快速 DP · 每批执行"/>
             <p:cNvSpPr txBox="1"/>
             <p:nvPr/>
           </p:nvSpPr>
           <p:spPr>
             <a:xfrm>
-              <a:off x="762000" y="2209800"/>
-              <a:ext cx="2838450" cy="285750"/>
+              <a:off x="2381250" y="2152650"/>
+              <a:ext cx="4171950" cy="276225"/>
             </a:xfrm>
             <a:prstGeom prst="rect">
               <a:avLst/>
@@ -11498,28 +11782,343 @@
                 </a:spcAft>
               </a:pPr>
               <a:r>
-                <a:rPr sz="1800" b="1" lang="zh-CN">
+                <a:rPr sz="1725" b="1" lang="zh-CN">
                   <a:solidFill>
                     <a:srgbClr val="285EA8"/>
                   </a:solidFill>
                   <a:latin typeface="Microsoft YaHei"/>
                   <a:ea typeface="Microsoft YaHei"/>
                 </a:rPr>
-                <a:t>① 快速 DP：先有方案</a:t>
+                <a:t>快速 DP · 每批执行</a:t>
               </a:r>
             </a:p>
           </p:txBody>
         </p:sp>
         <p:sp>
           <p:nvSpPr>
-            <p:cNvPr id="11" name="联合选分组和路径 同时得到各卡的复制路径占比"/>
+            <p:cNvPr id="18" name="dp[j]：前 j 段的最低估价 最终组数不预先固定"/>
             <p:cNvSpPr txBox="1"/>
             <p:nvPr/>
           </p:nvSpPr>
           <p:spPr>
             <a:xfrm>
-              <a:off x="762000" y="2619375"/>
-              <a:ext cx="2838450" cy="504825"/>
+              <a:off x="2381250" y="2619375"/>
+              <a:ext cx="4171950" cy="533400"/>
+            </a:xfrm>
+            <a:prstGeom prst="rect">
+              <a:avLst/>
+            </a:prstGeom>
+            <a:noFill/>
+            <a:effectLst/>
+          </p:spPr>
+          <p:txBody>
+            <a:bodyPr wrap="square" lIns="0" rIns="0" tIns="0" bIns="0">
+              <a:spAutoFit/>
+            </a:bodyPr>
+            <a:lstStyle/>
+            <a:p>
+              <a:pPr algn="l">
+                <a:lnSpc>
+                  <a:spcPct val="112000"/>
+                </a:lnSpc>
+                <a:spcAft>
+                  <a:spcPts val="500"/>
+                </a:spcAft>
+              </a:pPr>
+              <a:r>
+                <a:rPr sz="1650" b="0" lang="zh-CN">
+                  <a:solidFill>
+                    <a:srgbClr val="1F2937"/>
+                  </a:solidFill>
+                  <a:latin typeface="Microsoft YaHei"/>
+                  <a:ea typeface="Microsoft YaHei"/>
+                </a:rPr>
+                <a:t>dp[j]：前 j 段的最低估价</a:t>
+              </a:r>
+            </a:p>
+            <a:p>
+              <a:pPr algn="l">
+                <a:lnSpc>
+                  <a:spcPct val="112000"/>
+                </a:lnSpc>
+                <a:spcAft>
+                  <a:spcPts val="500"/>
+                </a:spcAft>
+              </a:pPr>
+              <a:r>
+                <a:rPr sz="1650" b="0" lang="zh-CN">
+                  <a:solidFill>
+                    <a:srgbClr val="1F2937"/>
+                  </a:solidFill>
+                  <a:latin typeface="Microsoft YaHei"/>
+                  <a:ea typeface="Microsoft YaHei"/>
+                </a:rPr>
+                <a:t>最终组数不预先固定</a:t>
+              </a:r>
+            </a:p>
+          </p:txBody>
+        </p:sp>
+        <p:sp>
+          <p:nvSpPr>
+            <p:cNvPr id="19" name="SSD：在途数 + 片段数 n 复制：在途数 + 该卡请求数"/>
+            <p:cNvSpPr txBox="1"/>
+            <p:nvPr/>
+          </p:nvSpPr>
+          <p:spPr>
+            <a:xfrm>
+              <a:off x="2381250" y="3286125"/>
+              <a:ext cx="4171950" cy="533400"/>
+            </a:xfrm>
+            <a:prstGeom prst="rect">
+              <a:avLst/>
+            </a:prstGeom>
+            <a:noFill/>
+            <a:effectLst/>
+          </p:spPr>
+          <p:txBody>
+            <a:bodyPr wrap="square" lIns="0" rIns="0" tIns="0" bIns="0">
+              <a:spAutoFit/>
+            </a:bodyPr>
+            <a:lstStyle/>
+            <a:p>
+              <a:pPr algn="l">
+                <a:lnSpc>
+                  <a:spcPct val="112000"/>
+                </a:lnSpc>
+                <a:spcAft>
+                  <a:spcPts val="500"/>
+                </a:spcAft>
+              </a:pPr>
+              <a:r>
+                <a:rPr sz="1650" b="0" lang="zh-CN">
+                  <a:solidFill>
+                    <a:srgbClr val="1F2937"/>
+                  </a:solidFill>
+                  <a:latin typeface="Microsoft YaHei"/>
+                  <a:ea typeface="Microsoft YaHei"/>
+                </a:rPr>
+                <a:t>SSD：在途数 + 片段数 n</a:t>
+              </a:r>
+            </a:p>
+            <a:p>
+              <a:pPr algn="l">
+                <a:lnSpc>
+                  <a:spcPct val="112000"/>
+                </a:lnSpc>
+                <a:spcAft>
+                  <a:spcPts val="500"/>
+                </a:spcAft>
+              </a:pPr>
+              <a:r>
+                <a:rPr sz="1650" b="0" lang="zh-CN">
+                  <a:solidFill>
+                    <a:srgbClr val="1F2937"/>
+                  </a:solidFill>
+                  <a:latin typeface="Microsoft YaHei"/>
+                  <a:ea typeface="Microsoft YaHei"/>
+                </a:rPr>
+                <a:t>复制：在途数 + 该卡请求数</a:t>
+              </a:r>
+            </a:p>
+          </p:txBody>
+        </p:sp>
+        <p:sp>
+          <p:nvSpPr>
+            <p:cNvPr id="20" name="一份完整基础方案 提供各卡 / 复制类型的组数比例"/>
+            <p:cNvSpPr txBox="1"/>
+            <p:nvPr/>
+          </p:nvSpPr>
+          <p:spPr>
+            <a:xfrm>
+              <a:off x="2381250" y="3971925"/>
+              <a:ext cx="4171950" cy="485775"/>
+            </a:xfrm>
+            <a:prstGeom prst="rect">
+              <a:avLst/>
+            </a:prstGeom>
+            <a:noFill/>
+            <a:effectLst/>
+          </p:spPr>
+          <p:txBody>
+            <a:bodyPr wrap="square" lIns="0" rIns="0" tIns="0" bIns="0">
+              <a:spAutoFit/>
+            </a:bodyPr>
+            <a:lstStyle/>
+            <a:p>
+              <a:pPr algn="l">
+                <a:lnSpc>
+                  <a:spcPct val="112000"/>
+                </a:lnSpc>
+                <a:spcAft>
+                  <a:spcPts val="500"/>
+                </a:spcAft>
+              </a:pPr>
+              <a:r>
+                <a:rPr sz="1575" b="1" lang="zh-CN">
+                  <a:solidFill>
+                    <a:srgbClr val="285EA8"/>
+                  </a:solidFill>
+                  <a:latin typeface="Microsoft YaHei"/>
+                  <a:ea typeface="Microsoft YaHei"/>
+                </a:rPr>
+                <a:t>一份完整基础方案</a:t>
+              </a:r>
+            </a:p>
+            <a:p>
+              <a:pPr algn="l">
+                <a:lnSpc>
+                  <a:spcPct val="112000"/>
+                </a:lnSpc>
+                <a:spcAft>
+                  <a:spcPts val="500"/>
+                </a:spcAft>
+              </a:pPr>
+              <a:r>
+                <a:rPr sz="1575" b="1" lang="zh-CN">
+                  <a:solidFill>
+                    <a:srgbClr val="285EA8"/>
+                  </a:solidFill>
+                  <a:latin typeface="Microsoft YaHei"/>
+                  <a:ea typeface="Microsoft YaHei"/>
+                </a:rPr>
+                <a:t>提供各卡 / 复制类型的组数比例</a:t>
+              </a:r>
+            </a:p>
+          </p:txBody>
+        </p:sp>
+      </p:grpSp>
+      <p:grpSp>
+        <p:nvGrpSpPr>
+          <p:cNvPr id="21" name="步骤2：细化对多个 cnt 分别生成完整方案"/>
+          <p:cNvGrpSpPr/>
+          <p:nvPr/>
+        </p:nvGrpSpPr>
+        <p:grpSpPr>
+          <a:xfrm>
+            <a:off x="6896100" y="2152650"/>
+            <a:ext cx="4533900" cy="2305050"/>
+            <a:chOff x="6896100" y="2152650"/>
+            <a:chExt cx="4533900" cy="2305050"/>
+          </a:xfrm>
+        </p:grpSpPr>
+        <p:sp>
+          <p:nvSpPr>
+            <p:cNvPr id="22" name="细化 DP · 按条件执行"/>
+            <p:cNvSpPr txBox="1"/>
+            <p:nvPr/>
+          </p:nvSpPr>
+          <p:spPr>
+            <a:xfrm>
+              <a:off x="6896100" y="2152650"/>
+              <a:ext cx="4533900" cy="276225"/>
+            </a:xfrm>
+            <a:prstGeom prst="rect">
+              <a:avLst/>
+            </a:prstGeom>
+            <a:noFill/>
+            <a:effectLst/>
+          </p:spPr>
+          <p:txBody>
+            <a:bodyPr wrap="square" lIns="0" rIns="0" tIns="0" bIns="0">
+              <a:spAutoFit/>
+            </a:bodyPr>
+            <a:lstStyle/>
+            <a:p>
+              <a:pPr algn="l">
+                <a:lnSpc>
+                  <a:spcPct val="112000"/>
+                </a:lnSpc>
+                <a:spcAft>
+                  <a:spcPts val="500"/>
+                </a:spcAft>
+              </a:pPr>
+              <a:r>
+                <a:rPr sz="1725" b="1" lang="zh-CN">
+                  <a:solidFill>
+                    <a:srgbClr val="24756D"/>
+                  </a:solidFill>
+                  <a:latin typeface="Microsoft YaHei"/>
+                  <a:ea typeface="Microsoft YaHei"/>
+                </a:rPr>
+                <a:t>细化 DP · 按条件执行</a:t>
+              </a:r>
+            </a:p>
+          </p:txBody>
+        </p:sp>
+        <p:sp>
+          <p:nvSpPr>
+            <p:cNvPr id="23" name="D[h][j]：前 j 段恰好 h 组 对每个 cnt，要求最终 h = cnt"/>
+            <p:cNvSpPr txBox="1"/>
+            <p:nvPr/>
+          </p:nvSpPr>
+          <p:spPr>
+            <a:xfrm>
+              <a:off x="6896100" y="2619375"/>
+              <a:ext cx="4533900" cy="533400"/>
+            </a:xfrm>
+            <a:prstGeom prst="rect">
+              <a:avLst/>
+            </a:prstGeom>
+            <a:noFill/>
+            <a:effectLst/>
+          </p:spPr>
+          <p:txBody>
+            <a:bodyPr wrap="square" lIns="0" rIns="0" tIns="0" bIns="0">
+              <a:spAutoFit/>
+            </a:bodyPr>
+            <a:lstStyle/>
+            <a:p>
+              <a:pPr algn="l">
+                <a:lnSpc>
+                  <a:spcPct val="112000"/>
+                </a:lnSpc>
+                <a:spcAft>
+                  <a:spcPts val="500"/>
+                </a:spcAft>
+              </a:pPr>
+              <a:r>
+                <a:rPr sz="1650" b="0" lang="zh-CN">
+                  <a:solidFill>
+                    <a:srgbClr val="1F2937"/>
+                  </a:solidFill>
+                  <a:latin typeface="Microsoft YaHei"/>
+                  <a:ea typeface="Microsoft YaHei"/>
+                </a:rPr>
+                <a:t>D[h][j]：前 j 段恰好 h 组</a:t>
+              </a:r>
+            </a:p>
+            <a:p>
+              <a:pPr algn="l">
+                <a:lnSpc>
+                  <a:spcPct val="112000"/>
+                </a:lnSpc>
+                <a:spcAft>
+                  <a:spcPts val="500"/>
+                </a:spcAft>
+              </a:pPr>
+              <a:r>
+                <a:rPr sz="1650" b="0" lang="zh-CN">
+                  <a:solidFill>
+                    <a:srgbClr val="1F2937"/>
+                  </a:solidFill>
+                  <a:latin typeface="Microsoft YaHei"/>
+                  <a:ea typeface="Microsoft YaHei"/>
+                </a:rPr>
+                <a:t>对每个 cnt，要求最终 h = cnt</a:t>
+              </a:r>
+            </a:p>
+          </p:txBody>
+        </p:sp>
+        <p:sp>
+          <p:nvSpPr>
+            <p:cNvPr id="24" name="SSD：候选组数 cnt（入口空闲） 复制：按基础方案的卡 / 类型比例缩放"/>
+            <p:cNvSpPr txBox="1"/>
+            <p:nvPr/>
+          </p:nvSpPr>
+          <p:spPr>
+            <a:xfrm>
+              <a:off x="6896100" y="3286125"/>
+              <a:ext cx="4533900" cy="533400"/>
             </a:xfrm>
             <a:prstGeom prst="rect">
               <a:avLst/>
@@ -11549,7 +12148,7 @@
                   <a:latin typeface="Microsoft YaHei"/>
                   <a:ea typeface="Microsoft YaHei"/>
                 </a:rPr>
-                <a:t>联合选分组和路径</a:t>
+                <a:t>SSD：候选组数 cnt（入口空闲）</a:t>
               </a:r>
             </a:p>
             <a:p>
@@ -11569,7 +12168,71 @@
                   <a:latin typeface="Microsoft YaHei"/>
                   <a:ea typeface="Microsoft YaHei"/>
                 </a:rPr>
-                <a:t>同时得到各卡的复制路径占比</a:t>
+                <a:t>复制：按基础方案的卡 / 类型比例缩放</a:t>
+              </a:r>
+            </a:p>
+          </p:txBody>
+        </p:sp>
+        <p:sp>
+          <p:nvSpPr>
+            <p:cNvPr id="25" name="每个 cnt 至多一份合格方案 再从这些方案中选最低估价者"/>
+            <p:cNvSpPr txBox="1"/>
+            <p:nvPr/>
+          </p:nvSpPr>
+          <p:spPr>
+            <a:xfrm>
+              <a:off x="6896100" y="3971925"/>
+              <a:ext cx="4533900" cy="485775"/>
+            </a:xfrm>
+            <a:prstGeom prst="rect">
+              <a:avLst/>
+            </a:prstGeom>
+            <a:noFill/>
+            <a:effectLst/>
+          </p:spPr>
+          <p:txBody>
+            <a:bodyPr wrap="square" lIns="0" rIns="0" tIns="0" bIns="0">
+              <a:spAutoFit/>
+            </a:bodyPr>
+            <a:lstStyle/>
+            <a:p>
+              <a:pPr algn="l">
+                <a:lnSpc>
+                  <a:spcPct val="112000"/>
+                </a:lnSpc>
+                <a:spcAft>
+                  <a:spcPts val="500"/>
+                </a:spcAft>
+              </a:pPr>
+              <a:r>
+                <a:rPr sz="1575" b="1" lang="zh-CN">
+                  <a:solidFill>
+                    <a:srgbClr val="24756D"/>
+                  </a:solidFill>
+                  <a:latin typeface="Microsoft YaHei"/>
+                  <a:ea typeface="Microsoft YaHei"/>
+                </a:rPr>
+                <a:t>每个 cnt 至多一份合格方案</a:t>
+              </a:r>
+            </a:p>
+            <a:p>
+              <a:pPr algn="l">
+                <a:lnSpc>
+                  <a:spcPct val="112000"/>
+                </a:lnSpc>
+                <a:spcAft>
+                  <a:spcPts val="500"/>
+                </a:spcAft>
+              </a:pPr>
+              <a:r>
+                <a:rPr sz="1575" b="1" lang="zh-CN">
+                  <a:solidFill>
+                    <a:srgbClr val="24756D"/>
+                  </a:solidFill>
+                  <a:latin typeface="Microsoft YaHei"/>
+                  <a:ea typeface="Microsoft YaHei"/>
+                </a:rPr>
+                <a:t>再从这些方案中选最低估价者</a:t>
               </a:r>
             </a:p>
           </p:txBody>
@@ -11577,65 +12240,28 @@
       </p:grpSp>
       <p:grpSp>
         <p:nvGrpSpPr>
-          <p:cNvPr id="12" name="步骤2：沿用候选与基础方案统计，按需细化"/>
+          <p:cNvPr id="26" name="步骤3：明确细化入口和搜索规模边界"/>
           <p:cNvGrpSpPr/>
           <p:nvPr/>
         </p:nvGrpSpPr>
         <p:grpSpPr>
           <a:xfrm>
-            <a:off x="3829050" y="2076450"/>
-            <a:ext cx="3857624" cy="1114425"/>
-            <a:chOff x="3829050" y="2076450"/>
-            <a:chExt cx="3857624" cy="1114425"/>
+            <a:off x="609600" y="4619625"/>
+            <a:ext cx="10972800" cy="857250"/>
+            <a:chOff x="609600" y="4619625"/>
+            <a:chExt cx="10972800" cy="857250"/>
           </a:xfrm>
         </p:grpSpPr>
-        <p:cxnSp>
-          <p:nvCxnSpPr>
-            <p:cNvPr id="13" name="Connector 12"/>
-            <p:cNvCxnSpPr/>
-            <p:nvPr/>
-          </p:nvCxnSpPr>
-          <p:spPr>
-            <a:xfrm>
-              <a:off x="3829050" y="2609850"/>
-              <a:ext cx="238125" cy="0"/>
-            </a:xfrm>
-            <a:prstGeom prst="line">
-              <a:avLst/>
-            </a:prstGeom>
-            <a:ln w="20320">
-              <a:solidFill>
-                <a:srgbClr val="285EA8"/>
-              </a:solidFill>
-              <a:tailEnd type="triangle"/>
-            </a:ln>
-            <a:effectLst/>
-          </p:spPr>
-          <p:style>
-            <a:lnRef idx="2">
-              <a:schemeClr val="accent1"/>
-            </a:lnRef>
-            <a:fillRef idx="0">
-              <a:schemeClr val="accent1"/>
-            </a:fillRef>
-            <a:effectRef idx="0">
-              <a:schemeClr val="accent1"/>
-            </a:effectRef>
-            <a:fontRef idx="minor">
-              <a:schemeClr val="tx1"/>
-            </a:fontRef>
-          </p:style>
-        </p:cxnSp>
         <p:sp>
           <p:nvSpPr>
-            <p:cNvPr id="14" name="Rectangle 13"/>
+            <p:cNvPr id="27" name="Rectangle 26"/>
             <p:cNvSpPr/>
             <p:nvPr/>
           </p:nvSpPr>
           <p:spPr>
             <a:xfrm>
-              <a:off x="4190999" y="2076450"/>
-              <a:ext cx="3495675" cy="1114425"/>
+              <a:off x="609600" y="4619625"/>
+              <a:ext cx="10972800" cy="857250"/>
             </a:xfrm>
             <a:prstGeom prst="rect">
               <a:avLst/>
@@ -11672,14 +12298,14 @@
         </p:sp>
         <p:sp>
           <p:nvSpPr>
-            <p:cNvPr id="15" name="② 细化 DP：按组数重估"/>
+            <p:cNvPr id="28" name="空闲：无在途传输、排队、提升、占槽及旧未完成请求。"/>
             <p:cNvSpPr txBox="1"/>
             <p:nvPr/>
           </p:nvSpPr>
           <p:spPr>
             <a:xfrm>
-              <a:off x="4343400" y="2209800"/>
-              <a:ext cx="3190875" cy="285750"/>
+              <a:off x="762000" y="4695825"/>
+              <a:ext cx="10668000" cy="228600"/>
             </a:xfrm>
             <a:prstGeom prst="rect">
               <a:avLst/>
@@ -11702,28 +12328,28 @@
                 </a:spcAft>
               </a:pPr>
               <a:r>
-                <a:rPr sz="1800" b="1" lang="zh-CN">
+                <a:rPr sz="1500" b="1" lang="zh-CN">
                   <a:solidFill>
                     <a:srgbClr val="24756D"/>
                   </a:solidFill>
                   <a:latin typeface="Microsoft YaHei"/>
                   <a:ea typeface="Microsoft YaHei"/>
                 </a:rPr>
-                <a:t>② 细化 DP：按组数重估</a:t>
+                <a:t>空闲：无在途传输、排队、提升、占槽及旧未完成请求。</a:t>
               </a:r>
             </a:p>
           </p:txBody>
         </p:sp>
         <p:sp>
           <p:nvSpPr>
-            <p:cNvPr id="16" name="沿用候选，重估 SSD / 复制并发 重新选择分组和路径"/>
+            <p:cNvPr id="29" name="规模：请求 ≤1024，iov ≤2048，片段 ≤16384，基础方案操作 ≤2048。"/>
             <p:cNvSpPr txBox="1"/>
             <p:nvPr/>
           </p:nvSpPr>
           <p:spPr>
             <a:xfrm>
-              <a:off x="4343400" y="2619375"/>
-              <a:ext cx="3190875" cy="504825"/>
+              <a:off x="762000" y="4962525"/>
+              <a:ext cx="10668000" cy="228600"/>
             </a:xfrm>
             <a:prstGeom prst="rect">
               <a:avLst/>
@@ -11746,144 +12372,28 @@
                 </a:spcAft>
               </a:pPr>
               <a:r>
-                <a:rPr sz="1575" b="0" lang="zh-CN">
+                <a:rPr sz="1500" b="0" lang="zh-CN">
                   <a:solidFill>
                     <a:srgbClr val="1F2937"/>
                   </a:solidFill>
                   <a:latin typeface="Microsoft YaHei"/>
                   <a:ea typeface="Microsoft YaHei"/>
                 </a:rPr>
-                <a:t>沿用候选，重估 SSD / 复制并发</a:t>
+                <a:t>规模：请求 ≤1024，iov ≤2048，片段 ≤16384，基础方案操作 ≤2048。</a:t>
               </a:r>
-            </a:p>
-            <a:p>
-              <a:pPr algn="l">
-                <a:lnSpc>
-                  <a:spcPct val="112000"/>
-                </a:lnSpc>
-                <a:spcAft>
-                  <a:spcPts val="500"/>
-                </a:spcAft>
-              </a:pPr>
-              <a:r>
-                <a:rPr sz="1575" b="0" lang="zh-CN">
-                  <a:solidFill>
-                    <a:srgbClr val="1F2937"/>
-                  </a:solidFill>
-                  <a:latin typeface="Microsoft YaHei"/>
-                  <a:ea typeface="Microsoft YaHei"/>
-                </a:rPr>
-                <a:t>重新选择分组和路径</a:t>
-              </a:r>
-            </a:p>
-          </p:txBody>
-        </p:sp>
-      </p:grpSp>
-      <p:grpSp>
-        <p:nvGrpSpPr>
-          <p:cNvPr id="17" name="步骤3：按条件选择唯一的提交方案"/>
-          <p:cNvGrpSpPr/>
-          <p:nvPr/>
-        </p:nvGrpSpPr>
-        <p:grpSpPr>
-          <a:xfrm>
-            <a:off x="609600" y="2076450"/>
-            <a:ext cx="10972800" cy="1524000"/>
-            <a:chOff x="609600" y="2076450"/>
-            <a:chExt cx="10972800" cy="1524000"/>
-          </a:xfrm>
-        </p:grpSpPr>
-        <p:cxnSp>
-          <p:nvCxnSpPr>
-            <p:cNvPr id="18" name="Connector 17"/>
-            <p:cNvCxnSpPr/>
-            <p:nvPr/>
-          </p:nvCxnSpPr>
-          <p:spPr>
-            <a:xfrm>
-              <a:off x="7762875" y="2609850"/>
-              <a:ext cx="238125" cy="0"/>
-            </a:xfrm>
-            <a:prstGeom prst="line">
-              <a:avLst/>
-            </a:prstGeom>
-            <a:ln w="20320">
-              <a:solidFill>
-                <a:srgbClr val="285EA8"/>
-              </a:solidFill>
-              <a:tailEnd type="triangle"/>
-            </a:ln>
-            <a:effectLst/>
-          </p:spPr>
-          <p:style>
-            <a:lnRef idx="2">
-              <a:schemeClr val="accent1"/>
-            </a:lnRef>
-            <a:fillRef idx="0">
-              <a:schemeClr val="accent1"/>
-            </a:fillRef>
-            <a:effectRef idx="0">
-              <a:schemeClr val="accent1"/>
-            </a:effectRef>
-            <a:fontRef idx="minor">
-              <a:schemeClr val="tx1"/>
-            </a:fontRef>
-          </p:style>
-        </p:cxnSp>
-        <p:sp>
-          <p:nvSpPr>
-            <p:cNvPr id="19" name="Rectangle 18"/>
-            <p:cNvSpPr/>
-            <p:nvPr/>
-          </p:nvSpPr>
-          <p:spPr>
-            <a:xfrm>
-              <a:off x="8124824" y="2076450"/>
-              <a:ext cx="3457575" cy="1114425"/>
-            </a:xfrm>
-            <a:prstGeom prst="rect">
-              <a:avLst/>
-            </a:prstGeom>
-            <a:solidFill>
-              <a:srgbClr val="EDF3FA"/>
-            </a:solidFill>
-            <a:ln>
-              <a:noFill/>
-            </a:ln>
-            <a:effectLst/>
-          </p:spPr>
-          <p:style>
-            <a:lnRef idx="1">
-              <a:schemeClr val="accent1"/>
-            </a:lnRef>
-            <a:fillRef idx="3">
-              <a:schemeClr val="accent1"/>
-            </a:fillRef>
-            <a:effectRef idx="0">
-              <a:schemeClr val="accent1"/>
-            </a:effectRef>
-            <a:fontRef idx="minor">
-              <a:schemeClr val="lt1"/>
-            </a:fontRef>
-          </p:style>
-          <p:txBody>
-            <a:bodyPr rtlCol="0" anchor="ctr"/>
-            <a:lstStyle/>
-            <a:p>
-              <a:pPr algn="ctr"/>
             </a:p>
           </p:txBody>
         </p:sp>
         <p:sp>
           <p:nvSpPr>
-            <p:cNvPr id="20" name="③ 只提交一份最终方案"/>
+            <p:cNvPr id="30" name="搜索：每批 200 万估价 / 转移；合法边 ≤262144，单次存储状态 ≤131072。"/>
             <p:cNvSpPr txBox="1"/>
             <p:nvPr/>
           </p:nvSpPr>
           <p:spPr>
             <a:xfrm>
-              <a:off x="8277225" y="2209800"/>
-              <a:ext cx="3152775" cy="285750"/>
+              <a:off x="762000" y="5229225"/>
+              <a:ext cx="10668000" cy="219075"/>
             </a:xfrm>
             <a:prstGeom prst="rect">
               <a:avLst/>
@@ -11906,91 +12416,42 @@
                 </a:spcAft>
               </a:pPr>
               <a:r>
-                <a:rPr sz="1800" b="1" lang="zh-CN">
-                  <a:solidFill>
-                    <a:srgbClr val="285EA8"/>
-                  </a:solidFill>
-                  <a:latin typeface="Microsoft YaHei"/>
-                  <a:ea typeface="Microsoft YaHei"/>
-                </a:rPr>
-                <a:t>③ 只提交一份最终方案</a:t>
-              </a:r>
-            </a:p>
-          </p:txBody>
-        </p:sp>
-        <p:sp>
-          <p:nvSpPr>
-            <p:cNvPr id="21" name="有可用细化候选：选其最低估价 否则：保留基础方案"/>
-            <p:cNvSpPr txBox="1"/>
-            <p:nvPr/>
-          </p:nvSpPr>
-          <p:spPr>
-            <a:xfrm>
-              <a:off x="8277225" y="2619375"/>
-              <a:ext cx="3152775" cy="504825"/>
-            </a:xfrm>
-            <a:prstGeom prst="rect">
-              <a:avLst/>
-            </a:prstGeom>
-            <a:noFill/>
-            <a:effectLst/>
-          </p:spPr>
-          <p:txBody>
-            <a:bodyPr wrap="square" lIns="0" rIns="0" tIns="0" bIns="0">
-              <a:spAutoFit/>
-            </a:bodyPr>
-            <a:lstStyle/>
-            <a:p>
-              <a:pPr algn="l">
-                <a:lnSpc>
-                  <a:spcPct val="112000"/>
-                </a:lnSpc>
-                <a:spcAft>
-                  <a:spcPts val="500"/>
-                </a:spcAft>
-              </a:pPr>
-              <a:r>
-                <a:rPr sz="1575" b="0" lang="zh-CN">
+                <a:rPr sz="1425" b="0" lang="zh-CN">
                   <a:solidFill>
                     <a:srgbClr val="1F2937"/>
                   </a:solidFill>
                   <a:latin typeface="Microsoft YaHei"/>
                   <a:ea typeface="Microsoft YaHei"/>
                 </a:rPr>
-                <a:t>有可用细化候选：选其最低估价</a:t>
-              </a:r>
-            </a:p>
-            <a:p>
-              <a:pPr algn="l">
-                <a:lnSpc>
-                  <a:spcPct val="112000"/>
-                </a:lnSpc>
-                <a:spcAft>
-                  <a:spcPts val="500"/>
-                </a:spcAft>
-              </a:pPr>
-              <a:r>
-                <a:rPr sz="1575" b="0" lang="zh-CN">
-                  <a:solidFill>
-                    <a:srgbClr val="1F2937"/>
-                  </a:solidFill>
-                  <a:latin typeface="Microsoft YaHei"/>
-                  <a:ea typeface="Microsoft YaHei"/>
-                </a:rPr>
-                <a:t>否则：保留基础方案</a:t>
+                <a:t>搜索：每批 200 万估价 / 转移；合法边 ≤262144，单次存储状态 ≤131072。</a:t>
               </a:r>
             </a:p>
           </p:txBody>
         </p:sp>
+      </p:grpSp>
+      <p:grpSp>
+        <p:nvGrpSpPr>
+          <p:cNvPr id="31" name="步骤4：从合格候选中选择最终方案或保留基础方案"/>
+          <p:cNvGrpSpPr/>
+          <p:nvPr/>
+        </p:nvGrpSpPr>
+        <p:grpSpPr>
+          <a:xfrm>
+            <a:off x="609600" y="5610225"/>
+            <a:ext cx="10972800" cy="276225"/>
+            <a:chOff x="609600" y="5610225"/>
+            <a:chExt cx="10972800" cy="276225"/>
+          </a:xfrm>
+        </p:grpSpPr>
         <p:sp>
           <p:nvSpPr>
-            <p:cNvPr id="22" name="细化入口：系统空闲，规模与预算允许；候选回溯后，还须通过总槽位与池容量检查。"/>
+            <p:cNvPr id="32" name="选择：细化候选须通过总槽位与池容量检查；无可用候选，则提交快速 DP 的基础方案。"/>
             <p:cNvSpPr txBox="1"/>
             <p:nvPr/>
           </p:nvSpPr>
           <p:spPr>
             <a:xfrm>
-              <a:off x="609600" y="3324225"/>
+              <a:off x="609600" y="5610225"/>
               <a:ext cx="10972800" cy="276225"/>
             </a:xfrm>
             <a:prstGeom prst="rect">
@@ -12021,7 +12482,7 @@
                   <a:latin typeface="Microsoft YaHei"/>
                   <a:ea typeface="Microsoft YaHei"/>
                 </a:rPr>
-                <a:t>细化入口：系统空闲，规模与预算允许；候选回溯后，还须通过总槽位与池容量检查。</a:t>
+                <a:t>选择：细化候选须通过总槽位与池容量检查；无可用候选，则提交快速 DP 的基础方案。</a:t>
               </a:r>
             </a:p>
           </p:txBody>
@@ -12029,356 +12490,28 @@
       </p:grpSp>
       <p:grpSp>
         <p:nvGrpSpPr>
-          <p:cNvPr id="23" name="步骤4：同一个联合更新规则与三片段示例"/>
+          <p:cNvPr id="33" name="步骤5：同一输入在两阶段的输出示例"/>
           <p:cNvGrpSpPr/>
           <p:nvPr/>
         </p:nvGrpSpPr>
         <p:grpSpPr>
           <a:xfrm>
-            <a:off x="609600" y="3838575"/>
-            <a:ext cx="10972800" cy="1447800"/>
-            <a:chOff x="609600" y="3838575"/>
-            <a:chExt cx="10972800" cy="1447800"/>
+            <a:off x="609600" y="6000750"/>
+            <a:ext cx="10972800" cy="238125"/>
+            <a:chOff x="609600" y="6000750"/>
+            <a:chExt cx="10972800" cy="238125"/>
           </a:xfrm>
         </p:grpSpPr>
         <p:sp>
           <p:nvSpPr>
-            <p:cNvPr id="24" name="Rectangle 23"/>
-            <p:cNvSpPr/>
-            <p:nvPr/>
-          </p:nvSpPr>
-          <p:spPr>
-            <a:xfrm>
-              <a:off x="609600" y="3838575"/>
-              <a:ext cx="5238750" cy="1447800"/>
-            </a:xfrm>
-            <a:prstGeom prst="rect">
-              <a:avLst/>
-            </a:prstGeom>
-            <a:solidFill>
-              <a:srgbClr val="F5F7FA"/>
-            </a:solidFill>
-            <a:ln>
-              <a:noFill/>
-            </a:ln>
-            <a:effectLst/>
-          </p:spPr>
-          <p:style>
-            <a:lnRef idx="1">
-              <a:schemeClr val="accent1"/>
-            </a:lnRef>
-            <a:fillRef idx="3">
-              <a:schemeClr val="accent1"/>
-            </a:fillRef>
-            <a:effectRef idx="0">
-              <a:schemeClr val="accent1"/>
-            </a:effectRef>
-            <a:fontRef idx="minor">
-              <a:schemeClr val="lt1"/>
-            </a:fontRef>
-          </p:style>
-          <p:txBody>
-            <a:bodyPr rtlCol="0" anchor="ctr"/>
-            <a:lstStyle/>
-            <a:p>
-              <a:pPr algn="ctr"/>
-            </a:p>
-          </p:txBody>
-        </p:sp>
-        <p:sp>
-          <p:nvSpPr>
-            <p:cNvPr id="25" name="核心更新：每次同时选择边界 i 与路径 path"/>
+            <p:cNvPr id="34" name="例：3 × 512B，快速选 1 组 DIRECT；细化比较 1 / 2 / 3 组后仍选 1 组。官方 J = 6。"/>
             <p:cNvSpPr txBox="1"/>
             <p:nvPr/>
           </p:nvSpPr>
           <p:spPr>
             <a:xfrm>
-              <a:off x="781050" y="3962399"/>
-              <a:ext cx="4895850" cy="276225"/>
-            </a:xfrm>
-            <a:prstGeom prst="rect">
-              <a:avLst/>
-            </a:prstGeom>
-            <a:noFill/>
-            <a:effectLst/>
-          </p:spPr>
-          <p:txBody>
-            <a:bodyPr wrap="square" lIns="0" rIns="0" tIns="0" bIns="0">
-              <a:spAutoFit/>
-            </a:bodyPr>
-            <a:lstStyle/>
-            <a:p>
-              <a:pPr algn="l">
-                <a:lnSpc>
-                  <a:spcPct val="112000"/>
-                </a:lnSpc>
-                <a:spcAft>
-                  <a:spcPts val="500"/>
-                </a:spcAft>
-              </a:pPr>
-              <a:r>
-                <a:rPr sz="1650" b="1" lang="zh-CN">
-                  <a:solidFill>
-                    <a:srgbClr val="285EA8"/>
-                  </a:solidFill>
-                  <a:latin typeface="Microsoft YaHei"/>
-                  <a:ea typeface="Microsoft YaHei"/>
-                </a:rPr>
-                <a:t>核心更新：每次同时选择边界 i 与路径 path</a:t>
-              </a:r>
-            </a:p>
-          </p:txBody>
-        </p:sp>
-        <p:sp>
-          <p:nvSpPr>
-            <p:cNvPr id="26" name="dp[j] = min { dp[i] + E(i, j, path) }"/>
-            <p:cNvSpPr txBox="1"/>
-            <p:nvPr/>
-          </p:nvSpPr>
-          <p:spPr>
-            <a:xfrm>
-              <a:off x="781050" y="4343400"/>
-              <a:ext cx="4895850" cy="323850"/>
-            </a:xfrm>
-            <a:prstGeom prst="rect">
-              <a:avLst/>
-            </a:prstGeom>
-            <a:noFill/>
-            <a:effectLst/>
-          </p:spPr>
-          <p:txBody>
-            <a:bodyPr wrap="square" lIns="0" rIns="0" tIns="0" bIns="0">
-              <a:spAutoFit/>
-            </a:bodyPr>
-            <a:lstStyle/>
-            <a:p>
-              <a:pPr algn="l">
-                <a:lnSpc>
-                  <a:spcPct val="112000"/>
-                </a:lnSpc>
-                <a:spcAft>
-                  <a:spcPts val="500"/>
-                </a:spcAft>
-              </a:pPr>
-              <a:r>
-                <a:rPr sz="1875" b="1" lang="zh-CN">
-                  <a:solidFill>
-                    <a:srgbClr val="285EA8"/>
-                  </a:solidFill>
-                  <a:latin typeface="Microsoft YaHei"/>
-                  <a:ea typeface="Microsoft YaHei"/>
-                </a:rPr>
-                <a:t>dp[j] = min { dp[i] + E(i, j, path) }</a:t>
-              </a:r>
-            </a:p>
-          </p:txBody>
-        </p:sp>
-        <p:sp>
-          <p:nvSpPr>
-            <p:cNvPr id="27" name="记录前驱与路径；细化时增加已分组数 h， 用 D[h][j] 约束最终组数。"/>
-            <p:cNvSpPr txBox="1"/>
-            <p:nvPr/>
-          </p:nvSpPr>
-          <p:spPr>
-            <a:xfrm>
-              <a:off x="781050" y="4781550"/>
-              <a:ext cx="4895850" cy="409575"/>
-            </a:xfrm>
-            <a:prstGeom prst="rect">
-              <a:avLst/>
-            </a:prstGeom>
-            <a:noFill/>
-            <a:effectLst/>
-          </p:spPr>
-          <p:txBody>
-            <a:bodyPr wrap="square" lIns="0" rIns="0" tIns="0" bIns="0">
-              <a:spAutoFit/>
-            </a:bodyPr>
-            <a:lstStyle/>
-            <a:p>
-              <a:pPr algn="l">
-                <a:lnSpc>
-                  <a:spcPct val="112000"/>
-                </a:lnSpc>
-                <a:spcAft>
-                  <a:spcPts val="500"/>
-                </a:spcAft>
-              </a:pPr>
-              <a:r>
-                <a:rPr sz="1500" b="0" lang="zh-CN">
-                  <a:solidFill>
-                    <a:srgbClr val="1F2937"/>
-                  </a:solidFill>
-                  <a:latin typeface="Microsoft YaHei"/>
-                  <a:ea typeface="Microsoft YaHei"/>
-                </a:rPr>
-                <a:t>记录前驱与路径；细化时增加已分组数 h，</a:t>
-              </a:r>
-            </a:p>
-            <a:p>
-              <a:pPr algn="l">
-                <a:lnSpc>
-                  <a:spcPct val="112000"/>
-                </a:lnSpc>
-                <a:spcAft>
-                  <a:spcPts val="500"/>
-                </a:spcAft>
-              </a:pPr>
-              <a:r>
-                <a:rPr sz="1500" b="0" lang="zh-CN">
-                  <a:solidFill>
-                    <a:srgbClr val="1F2937"/>
-                  </a:solidFill>
-                  <a:latin typeface="Microsoft YaHei"/>
-                  <a:ea typeface="Microsoft YaHei"/>
-                </a:rPr>
-                <a:t>用 D[h][j] 约束最终组数。</a:t>
-              </a:r>
-            </a:p>
-          </p:txBody>
-        </p:sp>
-        <p:sp>
-          <p:nvSpPr>
-            <p:cNvPr id="28" name="同卡相邻片段：512B + 512B + 512B"/>
-            <p:cNvSpPr txBox="1"/>
-            <p:nvPr/>
-          </p:nvSpPr>
-          <p:spPr>
-            <a:xfrm>
-              <a:off x="6191250" y="3848099"/>
-              <a:ext cx="5391150" cy="276225"/>
-            </a:xfrm>
-            <a:prstGeom prst="rect">
-              <a:avLst/>
-            </a:prstGeom>
-            <a:noFill/>
-            <a:effectLst/>
-          </p:spPr>
-          <p:txBody>
-            <a:bodyPr wrap="square" lIns="0" rIns="0" tIns="0" bIns="0">
-              <a:spAutoFit/>
-            </a:bodyPr>
-            <a:lstStyle/>
-            <a:p>
-              <a:pPr algn="l">
-                <a:lnSpc>
-                  <a:spcPct val="112000"/>
-                </a:lnSpc>
-                <a:spcAft>
-                  <a:spcPts val="500"/>
-                </a:spcAft>
-              </a:pPr>
-              <a:r>
-                <a:rPr sz="1650" b="1" lang="zh-CN">
-                  <a:solidFill>
-                    <a:srgbClr val="1F2937"/>
-                  </a:solidFill>
-                  <a:latin typeface="Microsoft YaHei"/>
-                  <a:ea typeface="Microsoft YaHei"/>
-                </a:rPr>
-                <a:t>同卡相邻片段：512B + 512B + 512B</a:t>
-              </a:r>
-            </a:p>
-          </p:txBody>
-        </p:sp>
-        <p:sp>
-          <p:nvSpPr>
-            <p:cNvPr id="29" name="细化候选组数       1          2          3"/>
-            <p:cNvSpPr txBox="1"/>
-            <p:nvPr/>
-          </p:nvSpPr>
-          <p:spPr>
-            <a:xfrm>
-              <a:off x="6191250" y="4267200"/>
-              <a:ext cx="5391150" cy="238125"/>
-            </a:xfrm>
-            <a:prstGeom prst="rect">
-              <a:avLst/>
-            </a:prstGeom>
-            <a:noFill/>
-            <a:effectLst/>
-          </p:spPr>
-          <p:txBody>
-            <a:bodyPr wrap="square" lIns="0" rIns="0" tIns="0" bIns="0">
-              <a:spAutoFit/>
-            </a:bodyPr>
-            <a:lstStyle/>
-            <a:p>
-              <a:pPr algn="l">
-                <a:lnSpc>
-                  <a:spcPct val="112000"/>
-                </a:lnSpc>
-                <a:spcAft>
-                  <a:spcPts val="500"/>
-                </a:spcAft>
-              </a:pPr>
-              <a:r>
-                <a:rPr sz="1575" b="1" lang="zh-CN">
-                  <a:solidFill>
-                    <a:srgbClr val="24756D"/>
-                  </a:solidFill>
-                  <a:latin typeface="Microsoft YaHei"/>
-                  <a:ea typeface="Microsoft YaHei"/>
-                </a:rPr>
-                <a:t>细化候选组数       1          2          3</a:t>
-              </a:r>
-            </a:p>
-          </p:txBody>
-        </p:sp>
-        <p:sp>
-          <p:nvSpPr>
-            <p:cNvPr id="30" name="最低估价 E       5.406     7.406     9.406"/>
-            <p:cNvSpPr txBox="1"/>
-            <p:nvPr/>
-          </p:nvSpPr>
-          <p:spPr>
-            <a:xfrm>
-              <a:off x="6191250" y="4581525"/>
-              <a:ext cx="5391150" cy="238125"/>
-            </a:xfrm>
-            <a:prstGeom prst="rect">
-              <a:avLst/>
-            </a:prstGeom>
-            <a:noFill/>
-            <a:effectLst/>
-          </p:spPr>
-          <p:txBody>
-            <a:bodyPr wrap="square" lIns="0" rIns="0" tIns="0" bIns="0">
-              <a:spAutoFit/>
-            </a:bodyPr>
-            <a:lstStyle/>
-            <a:p>
-              <a:pPr algn="l">
-                <a:lnSpc>
-                  <a:spcPct val="112000"/>
-                </a:lnSpc>
-                <a:spcAft>
-                  <a:spcPts val="500"/>
-                </a:spcAft>
-              </a:pPr>
-              <a:r>
-                <a:rPr sz="1575" b="0" lang="zh-CN">
-                  <a:solidFill>
-                    <a:srgbClr val="1F2937"/>
-                  </a:solidFill>
-                  <a:latin typeface="Microsoft YaHei"/>
-                  <a:ea typeface="Microsoft YaHei"/>
-                </a:rPr>
-                <a:t>最低估价 E       5.406     7.406     9.406</a:t>
-              </a:r>
-            </a:p>
-          </p:txBody>
-        </p:sp>
-        <p:sp>
-          <p:nvSpPr>
-            <p:cNvPr id="31" name="本例：快速、细化均选 1 组 DIRECT。"/>
-            <p:cNvSpPr txBox="1"/>
-            <p:nvPr/>
-          </p:nvSpPr>
-          <p:spPr>
-            <a:xfrm>
-              <a:off x="6191250" y="4981575"/>
-              <a:ext cx="5391150" cy="247649"/>
+              <a:off x="609600" y="6000750"/>
+              <a:ext cx="10972800" cy="238125"/>
             </a:xfrm>
             <a:prstGeom prst="rect">
               <a:avLst/>
@@ -12408,159 +12541,12 @@
                   <a:latin typeface="Microsoft YaHei"/>
                   <a:ea typeface="Microsoft YaHei"/>
                 </a:rPr>
-                <a:t>本例：快速、细化均选 1 组 DIRECT。</a:t>
+                <a:t>例：3 × 512B，快速选 1 组 DIRECT；细化比较 1 / 2 / 3 组后仍选 1 组。官方 J = 6。</a:t>
               </a:r>
             </a:p>
           </p:txBody>
         </p:sp>
       </p:grpSp>
-      <p:grpSp>
-        <p:nvGrpSpPr>
-          <p:cNvPr id="32" name="步骤5：回溯映射并输出真实计划"/>
-          <p:cNvGrpSpPr/>
-          <p:nvPr/>
-        </p:nvGrpSpPr>
-        <p:grpSpPr>
-          <a:xfrm>
-            <a:off x="609600" y="5505450"/>
-            <a:ext cx="10972800" cy="504825"/>
-            <a:chOff x="609600" y="5505450"/>
-            <a:chExt cx="10972800" cy="504825"/>
-          </a:xfrm>
-        </p:grpSpPr>
-        <p:sp>
-          <p:nvSpPr>
-            <p:cNvPr id="33" name="Rectangle 32"/>
-            <p:cNvSpPr/>
-            <p:nvPr/>
-          </p:nvSpPr>
-          <p:spPr>
-            <a:xfrm>
-              <a:off x="609600" y="5505450"/>
-              <a:ext cx="10972800" cy="504825"/>
-            </a:xfrm>
-            <a:prstGeom prst="rect">
-              <a:avLst/>
-            </a:prstGeom>
-            <a:solidFill>
-              <a:srgbClr val="EDF3FA"/>
-            </a:solidFill>
-            <a:ln>
-              <a:noFill/>
-            </a:ln>
-            <a:effectLst/>
-          </p:spPr>
-          <p:style>
-            <a:lnRef idx="1">
-              <a:schemeClr val="accent1"/>
-            </a:lnRef>
-            <a:fillRef idx="3">
-              <a:schemeClr val="accent1"/>
-            </a:fillRef>
-            <a:effectRef idx="0">
-              <a:schemeClr val="accent1"/>
-            </a:effectRef>
-            <a:fontRef idx="minor">
-              <a:schemeClr val="lt1"/>
-            </a:fontRef>
-          </p:style>
-          <p:txBody>
-            <a:bodyPr rtlCol="0" anchor="ctr"/>
-            <a:lstStyle/>
-            <a:p>
-              <a:pPr algn="ctr"/>
-            </a:p>
-          </p:txBody>
-        </p:sp>
-        <p:sp>
-          <p:nvSpPr>
-            <p:cNvPr id="34" name="最终：1 组 DIRECT 读 1536B；官方 J = 6，分别读取 J = 10，成本降低 40%。"/>
-            <p:cNvSpPr txBox="1"/>
-            <p:nvPr/>
-          </p:nvSpPr>
-          <p:spPr>
-            <a:xfrm>
-              <a:off x="781050" y="5619750"/>
-              <a:ext cx="10629900" cy="295275"/>
-            </a:xfrm>
-            <a:prstGeom prst="rect">
-              <a:avLst/>
-            </a:prstGeom>
-            <a:noFill/>
-            <a:effectLst/>
-          </p:spPr>
-          <p:txBody>
-            <a:bodyPr wrap="square" lIns="0" rIns="0" tIns="0" bIns="0">
-              <a:spAutoFit/>
-            </a:bodyPr>
-            <a:lstStyle/>
-            <a:p>
-              <a:pPr algn="l">
-                <a:lnSpc>
-                  <a:spcPct val="112000"/>
-                </a:lnSpc>
-                <a:spcAft>
-                  <a:spcPts val="500"/>
-                </a:spcAft>
-              </a:pPr>
-              <a:r>
-                <a:rPr sz="1875" b="1" lang="zh-CN">
-                  <a:solidFill>
-                    <a:srgbClr val="285EA8"/>
-                  </a:solidFill>
-                  <a:latin typeface="Microsoft YaHei"/>
-                  <a:ea typeface="Microsoft YaHei"/>
-                </a:rPr>
-                <a:t>最终：1 组 DIRECT 读 1536B；官方 J = 6，分别读取 J = 10，成本降低 40%。</a:t>
-              </a:r>
-            </a:p>
-          </p:txBody>
-        </p:sp>
-      </p:grpSp>
-      <p:sp>
-        <p:nvSpPr>
-          <p:cNvPr id="35" name="E 是候选排序估价；全过程使用公开性能表，策略内部不执行模拟器。"/>
-          <p:cNvSpPr txBox="1"/>
-          <p:nvPr/>
-        </p:nvSpPr>
-        <p:spPr>
-          <a:xfrm>
-            <a:off x="609600" y="6076950"/>
-            <a:ext cx="10972800" cy="171450"/>
-          </a:xfrm>
-          <a:prstGeom prst="rect">
-            <a:avLst/>
-          </a:prstGeom>
-          <a:noFill/>
-          <a:effectLst/>
-        </p:spPr>
-        <p:txBody>
-          <a:bodyPr wrap="square" lIns="0" rIns="0" tIns="0" bIns="0">
-            <a:spAutoFit/>
-          </a:bodyPr>
-          <a:lstStyle/>
-          <a:p>
-            <a:pPr algn="l">
-              <a:lnSpc>
-                <a:spcPct val="112000"/>
-              </a:lnSpc>
-              <a:spcAft>
-                <a:spcPts val="500"/>
-              </a:spcAft>
-            </a:pPr>
-            <a:r>
-              <a:rPr sz="1200" b="0" lang="zh-CN">
-                <a:solidFill>
-                  <a:srgbClr val="657184"/>
-                </a:solidFill>
-                <a:latin typeface="Microsoft YaHei"/>
-                <a:ea typeface="Microsoft YaHei"/>
-              </a:rPr>
-              <a:t>E 是候选排序估价；全过程使用公开性能表，策略内部不执行模拟器。</a:t>
-            </a:r>
-          </a:p>
-        </p:txBody>
-      </p:sp>
     </p:spTree>
   </p:cSld>
   <p:clrMapOvr>
@@ -12600,7 +12586,7 @@
                                           </p:stCondLst>
                                         </p:cTn>
                                         <p:tgtEl>
-                                          <p:spTgt spid="8"/>
+                                          <p:spTgt spid="16"/>
                                         </p:tgtEl>
                                         <p:attrNameLst>
                                           <p:attrName>style.visibility</p:attrName>
@@ -12614,7 +12600,7 @@
                                       <p:cBhvr>
                                         <p:cTn id="7" dur="280"/>
                                         <p:tgtEl>
-                                          <p:spTgt spid="8"/>
+                                          <p:spTgt spid="16"/>
                                         </p:tgtEl>
                                       </p:cBhvr>
                                     </p:animEffect>
@@ -12653,7 +12639,7 @@
                                           </p:stCondLst>
                                         </p:cTn>
                                         <p:tgtEl>
-                                          <p:spTgt spid="12"/>
+                                          <p:spTgt spid="21"/>
                                         </p:tgtEl>
                                         <p:attrNameLst>
                                           <p:attrName>style.visibility</p:attrName>
@@ -12667,7 +12653,7 @@
                                       <p:cBhvr>
                                         <p:cTn id="12" dur="280"/>
                                         <p:tgtEl>
-                                          <p:spTgt spid="12"/>
+                                          <p:spTgt spid="21"/>
                                         </p:tgtEl>
                                       </p:cBhvr>
                                     </p:animEffect>
@@ -12706,7 +12692,7 @@
                                           </p:stCondLst>
                                         </p:cTn>
                                         <p:tgtEl>
-                                          <p:spTgt spid="17"/>
+                                          <p:spTgt spid="26"/>
                                         </p:tgtEl>
                                         <p:attrNameLst>
                                           <p:attrName>style.visibility</p:attrName>
@@ -12720,7 +12706,7 @@
                                       <p:cBhvr>
                                         <p:cTn id="17" dur="280"/>
                                         <p:tgtEl>
-                                          <p:spTgt spid="17"/>
+                                          <p:spTgt spid="26"/>
                                         </p:tgtEl>
                                       </p:cBhvr>
                                     </p:animEffect>
@@ -12759,7 +12745,7 @@
                                           </p:stCondLst>
                                         </p:cTn>
                                         <p:tgtEl>
-                                          <p:spTgt spid="23"/>
+                                          <p:spTgt spid="31"/>
                                         </p:tgtEl>
                                         <p:attrNameLst>
                                           <p:attrName>style.visibility</p:attrName>
@@ -12773,7 +12759,7 @@
                                       <p:cBhvr>
                                         <p:cTn id="22" dur="280"/>
                                         <p:tgtEl>
-                                          <p:spTgt spid="23"/>
+                                          <p:spTgt spid="31"/>
                                         </p:tgtEl>
                                       </p:cBhvr>
                                     </p:animEffect>
@@ -12812,7 +12798,7 @@
                                           </p:stCondLst>
                                         </p:cTn>
                                         <p:tgtEl>
-                                          <p:spTgt spid="32"/>
+                                          <p:spTgt spid="33"/>
                                         </p:tgtEl>
                                         <p:attrNameLst>
                                           <p:attrName>style.visibility</p:attrName>
@@ -12826,7 +12812,7 @@
                                       <p:cBhvr>
                                         <p:cTn id="27" dur="280"/>
                                         <p:tgtEl>
-                                          <p:spTgt spid="32"/>
+                                          <p:spTgt spid="33"/>
                                         </p:tgtEl>
                                       </p:cBhvr>
                                     </p:animEffect>
@@ -17793,7 +17779,7 @@
       </p:sp>
       <p:sp>
         <p:nvSpPr>
-          <p:cNvPr id="35" name="R / A = 在途提升 / 活动传输数；H / U = 历史记录 / 未完成请求数（历史含更新队列）。 预算不覆盖全部预检查、输入与输出开销；输入索引和未完成请求增长时，总内存仍会增长。"/>
+          <p:cNvPr id="35" name="R / A = 在途提升 / 活动传输数；H / U = 历史记录 / 未完成请求数（历史含更新队列）。 总空间计入输入索引、活动请求和输出映射；搜索预算约束细化 DP 的估价与转移。"/>
           <p:cNvSpPr txBox="1"/>
           <p:nvPr/>
         </p:nvSpPr>
@@ -17850,7 +17836,7 @@
                 <a:latin typeface="Microsoft YaHei"/>
                 <a:ea typeface="Microsoft YaHei"/>
               </a:rPr>
-              <a:t>预算不覆盖全部预检查、输入与输出开销；输入索引和未完成请求增长时，总内存仍会增长。</a:t>
+              <a:t>总空间计入输入索引、活动请求和输出映射；搜索预算约束细化 DP 的估价与转移。</a:t>
             </a:r>
           </a:p>
         </p:txBody>
@@ -17927,7 +17913,7 @@
       </p:sp>
       <p:sp>
         <p:nvSpPr>
-          <p:cNvPr id="3" name="多投入 0.322s 策略计算，进程总耗时下降 14.4%"/>
+          <p:cNvPr id="3" name="进程总耗时下降 14.4%，RSS 峰值下降 33.3%"/>
           <p:cNvSpPr txBox="1"/>
           <p:nvPr/>
         </p:nvSpPr>
@@ -17964,7 +17950,7 @@
                 <a:latin typeface="Microsoft YaHei"/>
                 <a:ea typeface="Microsoft YaHei"/>
               </a:rPr>
-              <a:t>多投入 0.322s 策略计算，进程总耗时下降 14.4%</a:t>
+              <a:t>进程总耗时下降 14.4%，RSS 峰值下降 33.3%</a:t>
             </a:r>
           </a:p>
         </p:txBody>
@@ -18623,7 +18609,7 @@
       </p:sp>
       <p:sp>
         <p:nvSpPr>
-          <p:cNvPr id="19" name="增加 0.322s，约 +38.7%"/>
+          <p:cNvPr id="19" name="单独计量两个策略回调"/>
           <p:cNvSpPr txBox="1"/>
           <p:nvPr/>
         </p:nvSpPr>
@@ -18660,7 +18646,7 @@
                 <a:latin typeface="Microsoft YaHei"/>
                 <a:ea typeface="Microsoft YaHei"/>
               </a:rPr>
-              <a:t>增加 0.322s，约 +38.7%</a:t>
+              <a:t>单独计量两个策略回调</a:t>
             </a:r>
           </a:p>
         </p:txBody>
@@ -19339,7 +19325,7 @@
       </p:cxnSp>
       <p:sp>
         <p:nvSpPr>
-          <p:cNvPr id="36" name="策略堆峰值 12.34MiB，进程 RSS 下降 33.3%；策略计算增加，整体执行仍更省时。"/>
+          <p:cNvPr id="36" name="策略堆峰值 12.34MiB；策略决策、框架执行和输入输出分别计量，便于复现。"/>
           <p:cNvSpPr txBox="1"/>
           <p:nvPr/>
         </p:nvSpPr>
@@ -19376,7 +19362,7 @@
                 <a:latin typeface="Microsoft YaHei"/>
                 <a:ea typeface="Microsoft YaHei"/>
               </a:rPr>
-              <a:t>策略堆峰值 12.34MiB，进程 RSS 下降 33.3%；策略计算增加，整体执行仍更省时。</a:t>
+              <a:t>策略堆峰值 12.34MiB；策略决策、框架执行和输入输出分别计量，便于复现。</a:t>
             </a:r>
           </a:p>
         </p:txBody>

--- a/submissions/kaisennhu/07_答辩PPT/答辩介绍.pptx
+++ b/submissions/kaisennhu/07_答辩PPT/答辩介绍.pptx
@@ -1142,7 +1142,7 @@
           <a:lstStyle/>
           <a:p>
             <a:r>
-              <a:t>Vmax为单个请求最多iov数，L为最终片段与目标iov的有效交集数。快速DP每个起点至多扩展W个片段，每组比较三条路径；维护std::set的所有者集合带log W因子，因此仅这一核心的保守界为O(nW log(W+1))。固定cnt时DP状态至多cnt*n，每状态看至多3W条边；若无采样和预算约束，全枚举cnt=1..n的核心转移上界可达O(n^3 W)。实现使用采样，单次状态上限131072、合法边上限262144，估价和转移每批共享2000000预算。状态/边预检查以及回溯后的所有者和缓冲检查另计。复制估价按卡维护映射，也有集合访问成本。后台若有R个在途提升和A个活动传输，同步约O(R log(R+1))，还扫描A项、查history和未完成请求map；不逐次扫描全部缓存。history_queue最多131072条更新记录，未完成Work及输入输出不受这一常数限制。这里按模块分析，没有把整个策略概括为O(nW)。</a:t>
+              <a:t>Vmax为单个请求最多iov数，L为最终片段与目标iov的有效交集数。候选组枚举与快速DP状态更新在同一段循环中交织执行，这里按开销来源分列，并非代码先枚举完整候选表再做快速DP。每个起点至多扩展W个片段，每组比较三条路径，每条边的DP更新为常数时间，因此快速DP核心转移为O(nW)。候选组每扩展一个片段，要把请求编号插入std::set owners；集合大小最多min(W,请求数)，单次插入最坏O(log(W+1))，故候选维护为O(nW log(W+1))。两项相加，含集合维护的枚举和快速规划为O(nW log(W+1))，不是DP转移本身有额外一层循环。W固定128时，这两项都随n线性增长，排序O(n log n)另计；按卡状态map查询另计。固定cnt时DP状态至多cnt*n，每状态看至多3W条边；若无采样和预算约束，全枚举cnt=1..n的核心转移上界可达O(n^3 W)。实现使用采样，单次状态上限131072、合法边上限262144，估价和转移每批共享2000000预算。状态/边预检查以及回溯后的所有者和缓冲检查另计。复制估价按卡维护映射，也有集合访问成本。后台若有R个在途提升和A个活动传输，同步约O(R log(R+1))，还扫描A项、查history和未完成请求map；不逐次扫描全部缓存。history_queue最多131072条更新记录，未完成Work及输入输出不受这一常数限制。这里按模块分析，没有把整个策略概括为O(nW)。</a:t>
             </a:r>
           </a:p>
         </p:txBody>
@@ -16675,7 +16675,7 @@
       </p:sp>
       <p:sp>
         <p:nvSpPr>
-          <p:cNvPr id="9" name="阶段"/>
+          <p:cNvPr id="9" name="开销项"/>
           <p:cNvSpPr txBox="1"/>
           <p:nvPr/>
         </p:nvSpPr>
@@ -16712,7 +16712,7 @@
                 <a:latin typeface="Microsoft YaHei"/>
                 <a:ea typeface="Microsoft YaHei"/>
               </a:rPr>
-              <a:t>阶段</a:t>
+              <a:t>开销项</a:t>
             </a:r>
           </a:p>
         </p:txBody>
@@ -16901,8 +16901,8 @@
         </p:nvSpPr>
         <p:spPr>
           <a:xfrm>
-            <a:off x="742950" y="2724150"/>
-            <a:ext cx="2000250" cy="304800"/>
+            <a:off x="742950" y="2676525"/>
+            <a:ext cx="2000250" cy="276225"/>
           </a:xfrm>
           <a:prstGeom prst="rect">
             <a:avLst/>
@@ -16925,7 +16925,7 @@
               </a:spcAft>
             </a:pPr>
             <a:r>
-              <a:rPr sz="1500" b="1" lang="zh-CN">
+              <a:rPr sz="1425" b="1" lang="zh-CN">
                 <a:solidFill>
                   <a:srgbClr val="1F2937"/>
                 </a:solidFill>
@@ -16945,8 +16945,8 @@
         </p:nvSpPr>
         <p:spPr>
           <a:xfrm>
-            <a:off x="3009900" y="2724150"/>
-            <a:ext cx="4067175" cy="304800"/>
+            <a:off x="3009900" y="2676525"/>
+            <a:ext cx="4067175" cy="276225"/>
           </a:xfrm>
           <a:prstGeom prst="rect">
             <a:avLst/>
@@ -16969,7 +16969,7 @@
               </a:spcAft>
             </a:pPr>
             <a:r>
-              <a:rPr sz="1500" b="0" lang="zh-CN">
+              <a:rPr sz="1425" b="0" lang="zh-CN">
                 <a:solidFill>
                   <a:srgbClr val="1F2937"/>
                 </a:solidFill>
@@ -16989,8 +16989,8 @@
         </p:nvSpPr>
         <p:spPr>
           <a:xfrm>
-            <a:off x="7343775" y="2724150"/>
-            <a:ext cx="4105274" cy="304800"/>
+            <a:off x="7343775" y="2676525"/>
+            <a:ext cx="4105274" cy="276225"/>
           </a:xfrm>
           <a:prstGeom prst="rect">
             <a:avLst/>
@@ -17013,7 +17013,7 @@
               </a:spcAft>
             </a:pPr>
             <a:r>
-              <a:rPr sz="1500" b="0" lang="zh-CN">
+              <a:rPr sz="1425" b="0" lang="zh-CN">
                 <a:solidFill>
                   <a:srgbClr val="1F2937"/>
                 </a:solidFill>
@@ -17033,7 +17033,7 @@
         </p:nvCxnSpPr>
         <p:spPr>
           <a:xfrm>
-            <a:off x="609600" y="3067050"/>
+            <a:off x="609600" y="2981325"/>
             <a:ext cx="10972800" cy="0"/>
           </a:xfrm>
           <a:prstGeom prst="line">
@@ -17063,14 +17063,14 @@
       </p:cxnSp>
       <p:sp>
         <p:nvSpPr>
-          <p:cNvPr id="18" name="快速区间 DP"/>
+          <p:cNvPr id="18" name="候选组枚举"/>
           <p:cNvSpPr txBox="1"/>
           <p:nvPr/>
         </p:nvSpPr>
         <p:spPr>
           <a:xfrm>
-            <a:off x="742950" y="3181350"/>
-            <a:ext cx="2000250" cy="304800"/>
+            <a:off x="742950" y="3076575"/>
+            <a:ext cx="2000250" cy="276225"/>
           </a:xfrm>
           <a:prstGeom prst="rect">
             <a:avLst/>
@@ -17093,28 +17093,28 @@
               </a:spcAft>
             </a:pPr>
             <a:r>
-              <a:rPr sz="1500" b="1" lang="zh-CN">
+              <a:rPr sz="1425" b="1" lang="zh-CN">
                 <a:solidFill>
                   <a:srgbClr val="1F2937"/>
                 </a:solidFill>
                 <a:latin typeface="Microsoft YaHei"/>
                 <a:ea typeface="Microsoft YaHei"/>
               </a:rPr>
-              <a:t>快速区间 DP</a:t>
-            </a:r>
-          </a:p>
-        </p:txBody>
-      </p:sp>
-      <p:sp>
-        <p:nvSpPr>
-          <p:cNvPr id="19" name="O(nW log(W+1))：含所有者集合维护"/>
+              <a:t>候选组枚举</a:t>
+            </a:r>
+          </a:p>
+        </p:txBody>
+      </p:sp>
+      <p:sp>
+        <p:nvSpPr>
+          <p:cNvPr id="19" name="O(nW log(W+1))：含 owners 集合插入"/>
           <p:cNvSpPr txBox="1"/>
           <p:nvPr/>
         </p:nvSpPr>
         <p:spPr>
           <a:xfrm>
-            <a:off x="3009900" y="3181350"/>
-            <a:ext cx="4067175" cy="304800"/>
+            <a:off x="3009900" y="3076575"/>
+            <a:ext cx="4067175" cy="276225"/>
           </a:xfrm>
           <a:prstGeom prst="rect">
             <a:avLst/>
@@ -17137,28 +17137,28 @@
               </a:spcAft>
             </a:pPr>
             <a:r>
-              <a:rPr sz="1500" b="0" lang="zh-CN">
+              <a:rPr sz="1425" b="0" lang="zh-CN">
                 <a:solidFill>
                   <a:srgbClr val="1F2937"/>
                 </a:solidFill>
                 <a:latin typeface="Microsoft YaHei"/>
                 <a:ea typeface="Microsoft YaHei"/>
               </a:rPr>
-              <a:t>O(nW log(W+1))：含所有者集合维护</a:t>
-            </a:r>
-          </a:p>
-        </p:txBody>
-      </p:sp>
-      <p:sp>
-        <p:nvSpPr>
-          <p:cNvPr id="20" name="dp / prev / paths 为 O(n)"/>
+              <a:t>O(nW log(W+1))：含 owners 集合插入</a:t>
+            </a:r>
+          </a:p>
+        </p:txBody>
+      </p:sp>
+      <p:sp>
+        <p:nvSpPr>
+          <p:cNvPr id="20" name="owners 临时空间 O(W)"/>
           <p:cNvSpPr txBox="1"/>
           <p:nvPr/>
         </p:nvSpPr>
         <p:spPr>
           <a:xfrm>
-            <a:off x="7343775" y="3181350"/>
-            <a:ext cx="4105274" cy="304800"/>
+            <a:off x="7343775" y="3076575"/>
+            <a:ext cx="4105274" cy="276225"/>
           </a:xfrm>
           <a:prstGeom prst="rect">
             <a:avLst/>
@@ -17181,14 +17181,14 @@
               </a:spcAft>
             </a:pPr>
             <a:r>
-              <a:rPr sz="1500" b="0" lang="zh-CN">
+              <a:rPr sz="1425" b="0" lang="zh-CN">
                 <a:solidFill>
                   <a:srgbClr val="1F2937"/>
                 </a:solidFill>
                 <a:latin typeface="Microsoft YaHei"/>
                 <a:ea typeface="Microsoft YaHei"/>
               </a:rPr>
-              <a:t>dp / prev / paths 为 O(n)</a:t>
+              <a:t>owners 临时空间 O(W)</a:t>
             </a:r>
           </a:p>
         </p:txBody>
@@ -17201,7 +17201,7 @@
         </p:nvCxnSpPr>
         <p:spPr>
           <a:xfrm>
-            <a:off x="609600" y="3524250"/>
+            <a:off x="609600" y="3381375"/>
             <a:ext cx="10972800" cy="0"/>
           </a:xfrm>
           <a:prstGeom prst="line">
@@ -17231,14 +17231,14 @@
       </p:cxnSp>
       <p:sp>
         <p:nvSpPr>
-          <p:cNvPr id="22" name="细化 DP（固定 cnt）"/>
+          <p:cNvPr id="22" name="快速 DP 转移"/>
           <p:cNvSpPr txBox="1"/>
           <p:nvPr/>
         </p:nvSpPr>
         <p:spPr>
           <a:xfrm>
-            <a:off x="742950" y="3638550"/>
-            <a:ext cx="2000250" cy="304800"/>
+            <a:off x="742950" y="3476625"/>
+            <a:ext cx="2000250" cy="276225"/>
           </a:xfrm>
           <a:prstGeom prst="rect">
             <a:avLst/>
@@ -17261,28 +17261,28 @@
               </a:spcAft>
             </a:pPr>
             <a:r>
-              <a:rPr sz="1500" b="1" lang="zh-CN">
+              <a:rPr sz="1425" b="1" lang="zh-CN">
                 <a:solidFill>
                   <a:srgbClr val="1F2937"/>
                 </a:solidFill>
                 <a:latin typeface="Microsoft YaHei"/>
                 <a:ea typeface="Microsoft YaHei"/>
               </a:rPr>
-              <a:t>细化 DP（固定 cnt）</a:t>
-            </a:r>
-          </a:p>
-        </p:txBody>
-      </p:sp>
-      <p:sp>
-        <p:nvSpPr>
-          <p:cNvPr id="23" name="最坏 O(cnt × n × W)"/>
+              <a:t>快速 DP 转移</a:t>
+            </a:r>
+          </a:p>
+        </p:txBody>
+      </p:sp>
+      <p:sp>
+        <p:nvSpPr>
+          <p:cNvPr id="23" name="O(nW)：每组比较 3 条路径"/>
           <p:cNvSpPr txBox="1"/>
           <p:nvPr/>
         </p:nvSpPr>
         <p:spPr>
           <a:xfrm>
-            <a:off x="3009900" y="3638550"/>
-            <a:ext cx="4067175" cy="304800"/>
+            <a:off x="3009900" y="3476625"/>
+            <a:ext cx="4067175" cy="276225"/>
           </a:xfrm>
           <a:prstGeom prst="rect">
             <a:avLst/>
@@ -17305,28 +17305,28 @@
               </a:spcAft>
             </a:pPr>
             <a:r>
-              <a:rPr sz="1500" b="0" lang="zh-CN">
+              <a:rPr sz="1425" b="0" lang="zh-CN">
                 <a:solidFill>
                   <a:srgbClr val="1F2937"/>
                 </a:solidFill>
                 <a:latin typeface="Microsoft YaHei"/>
                 <a:ea typeface="Microsoft YaHei"/>
               </a:rPr>
-              <a:t>最坏 O(cnt × n × W)</a:t>
-            </a:r>
-          </a:p>
-        </p:txBody>
-      </p:sp>
-      <p:sp>
-        <p:nvSpPr>
-          <p:cNvPr id="24" name="状态 O(cnt × n)，合法边 O(nW)"/>
+              <a:t>O(nW)：每组比较 3 条路径</a:t>
+            </a:r>
+          </a:p>
+        </p:txBody>
+      </p:sp>
+      <p:sp>
+        <p:nvSpPr>
+          <p:cNvPr id="24" name="dp / prev / paths 为 O(n)"/>
           <p:cNvSpPr txBox="1"/>
           <p:nvPr/>
         </p:nvSpPr>
         <p:spPr>
           <a:xfrm>
-            <a:off x="7343775" y="3638550"/>
-            <a:ext cx="4105274" cy="304800"/>
+            <a:off x="7343775" y="3476625"/>
+            <a:ext cx="4105274" cy="276225"/>
           </a:xfrm>
           <a:prstGeom prst="rect">
             <a:avLst/>
@@ -17349,14 +17349,14 @@
               </a:spcAft>
             </a:pPr>
             <a:r>
-              <a:rPr sz="1500" b="0" lang="zh-CN">
+              <a:rPr sz="1425" b="0" lang="zh-CN">
                 <a:solidFill>
                   <a:srgbClr val="1F2937"/>
                 </a:solidFill>
                 <a:latin typeface="Microsoft YaHei"/>
                 <a:ea typeface="Microsoft YaHei"/>
               </a:rPr>
-              <a:t>状态 O(cnt × n)，合法边 O(nW)</a:t>
+              <a:t>dp / prev / paths 为 O(n)</a:t>
             </a:r>
           </a:p>
         </p:txBody>
@@ -17369,7 +17369,7 @@
         </p:nvCxnSpPr>
         <p:spPr>
           <a:xfrm>
-            <a:off x="609600" y="3981450"/>
+            <a:off x="609600" y="3781425"/>
             <a:ext cx="10972800" cy="0"/>
           </a:xfrm>
           <a:prstGeom prst="line">
@@ -17399,14 +17399,14 @@
       </p:cxnSp>
       <p:sp>
         <p:nvSpPr>
-          <p:cNvPr id="26" name="映射与输出"/>
+          <p:cNvPr id="26" name="细化 DP（固定 cnt）"/>
           <p:cNvSpPr txBox="1"/>
           <p:nvPr/>
         </p:nvSpPr>
         <p:spPr>
           <a:xfrm>
-            <a:off x="742950" y="4095750"/>
-            <a:ext cx="2000250" cy="304800"/>
+            <a:off x="742950" y="3876674"/>
+            <a:ext cx="2000250" cy="276225"/>
           </a:xfrm>
           <a:prstGeom prst="rect">
             <a:avLst/>
@@ -17429,28 +17429,28 @@
               </a:spcAft>
             </a:pPr>
             <a:r>
-              <a:rPr sz="1500" b="1" lang="zh-CN">
+              <a:rPr sz="1425" b="1" lang="zh-CN">
                 <a:solidFill>
                   <a:srgbClr val="1F2937"/>
                 </a:solidFill>
                 <a:latin typeface="Microsoft YaHei"/>
                 <a:ea typeface="Microsoft YaHei"/>
               </a:rPr>
-              <a:t>映射与输出</a:t>
-            </a:r>
-          </a:p>
-        </p:txBody>
-      </p:sp>
-      <p:sp>
-        <p:nvSpPr>
-          <p:cNvPr id="27" name="约 O(n log Vmax + L)"/>
+              <a:t>细化 DP（固定 cnt）</a:t>
+            </a:r>
+          </a:p>
+        </p:txBody>
+      </p:sp>
+      <p:sp>
+        <p:nvSpPr>
+          <p:cNvPr id="27" name="最坏 O(cnt × n × W)"/>
           <p:cNvSpPr txBox="1"/>
           <p:nvPr/>
         </p:nvSpPr>
         <p:spPr>
           <a:xfrm>
-            <a:off x="3009900" y="4095750"/>
-            <a:ext cx="4067175" cy="304800"/>
+            <a:off x="3009900" y="3876674"/>
+            <a:ext cx="4067175" cy="276225"/>
           </a:xfrm>
           <a:prstGeom prst="rect">
             <a:avLst/>
@@ -17473,28 +17473,28 @@
               </a:spcAft>
             </a:pPr>
             <a:r>
-              <a:rPr sz="1500" b="0" lang="zh-CN">
+              <a:rPr sz="1425" b="0" lang="zh-CN">
                 <a:solidFill>
                   <a:srgbClr val="1F2937"/>
                 </a:solidFill>
                 <a:latin typeface="Microsoft YaHei"/>
                 <a:ea typeface="Microsoft YaHei"/>
               </a:rPr>
-              <a:t>约 O(n log Vmax + L)</a:t>
-            </a:r>
-          </a:p>
-        </p:txBody>
-      </p:sp>
-      <p:sp>
-        <p:nvSpPr>
-          <p:cNvPr id="28" name="O(L)，L 为片段与目标 iov 的交集数"/>
+              <a:t>最坏 O(cnt × n × W)</a:t>
+            </a:r>
+          </a:p>
+        </p:txBody>
+      </p:sp>
+      <p:sp>
+        <p:nvSpPr>
+          <p:cNvPr id="28" name="状态 O(cnt × n)，合法边 O(nW)"/>
           <p:cNvSpPr txBox="1"/>
           <p:nvPr/>
         </p:nvSpPr>
         <p:spPr>
           <a:xfrm>
-            <a:off x="7343775" y="4095750"/>
-            <a:ext cx="4105274" cy="304800"/>
+            <a:off x="7343775" y="3876674"/>
+            <a:ext cx="4105274" cy="276225"/>
           </a:xfrm>
           <a:prstGeom prst="rect">
             <a:avLst/>
@@ -17517,14 +17517,14 @@
               </a:spcAft>
             </a:pPr>
             <a:r>
-              <a:rPr sz="1500" b="0" lang="zh-CN">
+              <a:rPr sz="1425" b="0" lang="zh-CN">
                 <a:solidFill>
                   <a:srgbClr val="1F2937"/>
                 </a:solidFill>
                 <a:latin typeface="Microsoft YaHei"/>
                 <a:ea typeface="Microsoft YaHei"/>
               </a:rPr>
-              <a:t>O(L)，L 为片段与目标 iov 的交集数</a:t>
+              <a:t>状态 O(cnt × n)，合法边 O(nW)</a:t>
             </a:r>
           </a:p>
         </p:txBody>
@@ -17537,7 +17537,7 @@
         </p:nvCxnSpPr>
         <p:spPr>
           <a:xfrm>
-            <a:off x="609600" y="4438650"/>
+            <a:off x="609600" y="4181475"/>
             <a:ext cx="10972800" cy="0"/>
           </a:xfrm>
           <a:prstGeom prst="line">
@@ -17567,14 +17567,14 @@
       </p:cxnSp>
       <p:sp>
         <p:nvSpPr>
-          <p:cNvPr id="30" name="后台同步 / 扫描"/>
+          <p:cNvPr id="30" name="映射与输出"/>
           <p:cNvSpPr txBox="1"/>
           <p:nvPr/>
         </p:nvSpPr>
         <p:spPr>
           <a:xfrm>
-            <a:off x="742950" y="4552950"/>
-            <a:ext cx="2000250" cy="304800"/>
+            <a:off x="742950" y="4276725"/>
+            <a:ext cx="2000250" cy="276225"/>
           </a:xfrm>
           <a:prstGeom prst="rect">
             <a:avLst/>
@@ -17597,28 +17597,28 @@
               </a:spcAft>
             </a:pPr>
             <a:r>
-              <a:rPr sz="1500" b="1" lang="zh-CN">
+              <a:rPr sz="1425" b="1" lang="zh-CN">
                 <a:solidFill>
                   <a:srgbClr val="1F2937"/>
                 </a:solidFill>
                 <a:latin typeface="Microsoft YaHei"/>
                 <a:ea typeface="Microsoft YaHei"/>
               </a:rPr>
-              <a:t>后台同步 / 扫描</a:t>
-            </a:r>
-          </a:p>
-        </p:txBody>
-      </p:sp>
-      <p:sp>
-        <p:nvSpPr>
-          <p:cNvPr id="31" name="O(R log(R+1)+A)，另有状态查表"/>
+              <a:t>映射与输出</a:t>
+            </a:r>
+          </a:p>
+        </p:txBody>
+      </p:sp>
+      <p:sp>
+        <p:nvSpPr>
+          <p:cNvPr id="31" name="约 O(n log Vmax + L)"/>
           <p:cNvSpPr txBox="1"/>
           <p:nvPr/>
         </p:nvSpPr>
         <p:spPr>
           <a:xfrm>
-            <a:off x="3009900" y="4552950"/>
-            <a:ext cx="4067175" cy="304800"/>
+            <a:off x="3009900" y="4276725"/>
+            <a:ext cx="4067175" cy="276225"/>
           </a:xfrm>
           <a:prstGeom prst="rect">
             <a:avLst/>
@@ -17641,28 +17641,28 @@
               </a:spcAft>
             </a:pPr>
             <a:r>
-              <a:rPr sz="1500" b="0" lang="zh-CN">
+              <a:rPr sz="1425" b="0" lang="zh-CN">
                 <a:solidFill>
                   <a:srgbClr val="1F2937"/>
                 </a:solidFill>
                 <a:latin typeface="Microsoft YaHei"/>
                 <a:ea typeface="Microsoft YaHei"/>
               </a:rPr>
-              <a:t>O(R log(R+1)+A)，另有状态查表</a:t>
-            </a:r>
-          </a:p>
-        </p:txBody>
-      </p:sp>
-      <p:sp>
-        <p:nvSpPr>
-          <p:cNvPr id="32" name="临时 O(R)，持久 O(H+U+R)"/>
+              <a:t>约 O(n log Vmax + L)</a:t>
+            </a:r>
+          </a:p>
+        </p:txBody>
+      </p:sp>
+      <p:sp>
+        <p:nvSpPr>
+          <p:cNvPr id="32" name="O(L)，L 为片段与目标 iov 的交集数"/>
           <p:cNvSpPr txBox="1"/>
           <p:nvPr/>
         </p:nvSpPr>
         <p:spPr>
           <a:xfrm>
-            <a:off x="7343775" y="4552950"/>
-            <a:ext cx="4105274" cy="304800"/>
+            <a:off x="7343775" y="4276725"/>
+            <a:ext cx="4105274" cy="276225"/>
           </a:xfrm>
           <a:prstGeom prst="rect">
             <a:avLst/>
@@ -17685,14 +17685,14 @@
               </a:spcAft>
             </a:pPr>
             <a:r>
-              <a:rPr sz="1500" b="0" lang="zh-CN">
+              <a:rPr sz="1425" b="0" lang="zh-CN">
                 <a:solidFill>
                   <a:srgbClr val="1F2937"/>
                 </a:solidFill>
                 <a:latin typeface="Microsoft YaHei"/>
                 <a:ea typeface="Microsoft YaHei"/>
               </a:rPr>
-              <a:t>临时 O(R)，持久 O(H+U+R)</a:t>
+              <a:t>O(L)，L 为片段与目标 iov 的交集数</a:t>
             </a:r>
           </a:p>
         </p:txBody>
@@ -17705,7 +17705,7 @@
         </p:nvCxnSpPr>
         <p:spPr>
           <a:xfrm>
-            <a:off x="609600" y="4895850"/>
+            <a:off x="609600" y="4581525"/>
             <a:ext cx="10972800" cy="0"/>
           </a:xfrm>
           <a:prstGeom prst="line">
@@ -17735,14 +17735,14 @@
       </p:cxnSp>
       <p:sp>
         <p:nvSpPr>
-          <p:cNvPr id="34" name="细化搜索：单次至多 131072 个存储状态；每批共享 200 万次边估价 / 转移预算。"/>
+          <p:cNvPr id="34" name="后台同步 / 扫描"/>
           <p:cNvSpPr txBox="1"/>
           <p:nvPr/>
         </p:nvSpPr>
         <p:spPr>
           <a:xfrm>
-            <a:off x="609600" y="5067300"/>
-            <a:ext cx="10972800" cy="295275"/>
+            <a:off x="742950" y="4676775"/>
+            <a:ext cx="2000250" cy="276225"/>
           </a:xfrm>
           <a:prstGeom prst="rect">
             <a:avLst/>
@@ -17765,6 +17765,174 @@
               </a:spcAft>
             </a:pPr>
             <a:r>
+              <a:rPr sz="1425" b="1" lang="zh-CN">
+                <a:solidFill>
+                  <a:srgbClr val="1F2937"/>
+                </a:solidFill>
+                <a:latin typeface="Microsoft YaHei"/>
+                <a:ea typeface="Microsoft YaHei"/>
+              </a:rPr>
+              <a:t>后台同步 / 扫描</a:t>
+            </a:r>
+          </a:p>
+        </p:txBody>
+      </p:sp>
+      <p:sp>
+        <p:nvSpPr>
+          <p:cNvPr id="35" name="O(R log(R+1)+A)，另有状态查表"/>
+          <p:cNvSpPr txBox="1"/>
+          <p:nvPr/>
+        </p:nvSpPr>
+        <p:spPr>
+          <a:xfrm>
+            <a:off x="3009900" y="4676775"/>
+            <a:ext cx="4067175" cy="276225"/>
+          </a:xfrm>
+          <a:prstGeom prst="rect">
+            <a:avLst/>
+          </a:prstGeom>
+          <a:noFill/>
+          <a:effectLst/>
+        </p:spPr>
+        <p:txBody>
+          <a:bodyPr wrap="square" lIns="0" rIns="0" tIns="0" bIns="0">
+            <a:spAutoFit/>
+          </a:bodyPr>
+          <a:lstStyle/>
+          <a:p>
+            <a:pPr algn="l">
+              <a:lnSpc>
+                <a:spcPct val="112000"/>
+              </a:lnSpc>
+              <a:spcAft>
+                <a:spcPts val="500"/>
+              </a:spcAft>
+            </a:pPr>
+            <a:r>
+              <a:rPr sz="1425" b="0" lang="zh-CN">
+                <a:solidFill>
+                  <a:srgbClr val="1F2937"/>
+                </a:solidFill>
+                <a:latin typeface="Microsoft YaHei"/>
+                <a:ea typeface="Microsoft YaHei"/>
+              </a:rPr>
+              <a:t>O(R log(R+1)+A)，另有状态查表</a:t>
+            </a:r>
+          </a:p>
+        </p:txBody>
+      </p:sp>
+      <p:sp>
+        <p:nvSpPr>
+          <p:cNvPr id="36" name="临时 O(R)，持久 O(H+U+R)"/>
+          <p:cNvSpPr txBox="1"/>
+          <p:nvPr/>
+        </p:nvSpPr>
+        <p:spPr>
+          <a:xfrm>
+            <a:off x="7343775" y="4676775"/>
+            <a:ext cx="4105274" cy="276225"/>
+          </a:xfrm>
+          <a:prstGeom prst="rect">
+            <a:avLst/>
+          </a:prstGeom>
+          <a:noFill/>
+          <a:effectLst/>
+        </p:spPr>
+        <p:txBody>
+          <a:bodyPr wrap="square" lIns="0" rIns="0" tIns="0" bIns="0">
+            <a:spAutoFit/>
+          </a:bodyPr>
+          <a:lstStyle/>
+          <a:p>
+            <a:pPr algn="l">
+              <a:lnSpc>
+                <a:spcPct val="112000"/>
+              </a:lnSpc>
+              <a:spcAft>
+                <a:spcPts val="500"/>
+              </a:spcAft>
+            </a:pPr>
+            <a:r>
+              <a:rPr sz="1425" b="0" lang="zh-CN">
+                <a:solidFill>
+                  <a:srgbClr val="1F2937"/>
+                </a:solidFill>
+                <a:latin typeface="Microsoft YaHei"/>
+                <a:ea typeface="Microsoft YaHei"/>
+              </a:rPr>
+              <a:t>临时 O(R)，持久 O(H+U+R)</a:t>
+            </a:r>
+          </a:p>
+        </p:txBody>
+      </p:sp>
+      <p:cxnSp>
+        <p:nvCxnSpPr>
+          <p:cNvPr id="37" name="Connector 36"/>
+          <p:cNvCxnSpPr/>
+          <p:nvPr/>
+        </p:nvCxnSpPr>
+        <p:spPr>
+          <a:xfrm>
+            <a:off x="609600" y="4981575"/>
+            <a:ext cx="10972800" cy="0"/>
+          </a:xfrm>
+          <a:prstGeom prst="line">
+            <a:avLst/>
+          </a:prstGeom>
+          <a:ln w="12700">
+            <a:solidFill>
+              <a:srgbClr val="DCE2E9"/>
+            </a:solidFill>
+          </a:ln>
+          <a:effectLst/>
+        </p:spPr>
+        <p:style>
+          <a:lnRef idx="2">
+            <a:schemeClr val="accent1"/>
+          </a:lnRef>
+          <a:fillRef idx="0">
+            <a:schemeClr val="accent1"/>
+          </a:fillRef>
+          <a:effectRef idx="0">
+            <a:schemeClr val="accent1"/>
+          </a:effectRef>
+          <a:fontRef idx="minor">
+            <a:schemeClr val="tx1"/>
+          </a:fontRef>
+        </p:style>
+      </p:cxnSp>
+      <p:sp>
+        <p:nvSpPr>
+          <p:cNvPr id="38" name="细化搜索：单次至多 131072 个存储状态；每批共享 200 万次边估价 / 转移预算。"/>
+          <p:cNvSpPr txBox="1"/>
+          <p:nvPr/>
+        </p:nvSpPr>
+        <p:spPr>
+          <a:xfrm>
+            <a:off x="609600" y="5067300"/>
+            <a:ext cx="10972800" cy="295275"/>
+          </a:xfrm>
+          <a:prstGeom prst="rect">
+            <a:avLst/>
+          </a:prstGeom>
+          <a:noFill/>
+          <a:effectLst/>
+        </p:spPr>
+        <p:txBody>
+          <a:bodyPr wrap="square" lIns="0" rIns="0" tIns="0" bIns="0">
+            <a:spAutoFit/>
+          </a:bodyPr>
+          <a:lstStyle/>
+          <a:p>
+            <a:pPr algn="l">
+              <a:lnSpc>
+                <a:spcPct val="112000"/>
+              </a:lnSpc>
+              <a:spcAft>
+                <a:spcPts val="500"/>
+              </a:spcAft>
+            </a:pPr>
+            <a:r>
               <a:rPr sz="1800" b="1" lang="zh-CN">
                 <a:solidFill>
                   <a:srgbClr val="285EA8"/>
@@ -17779,7 +17947,7 @@
       </p:sp>
       <p:sp>
         <p:nvSpPr>
-          <p:cNvPr id="35" name="R / A = 在途提升 / 活动传输数；H / U = 历史记录 / 未完成请求数（历史含更新队列）。 总空间计入输入索引、活动请求和输出映射；搜索预算约束细化 DP 的估价与转移。"/>
+          <p:cNvPr id="39" name="R / A = 在途提升 / 活动传输数；H / U = 历史记录 / 未完成请求数（历史含更新队列）。 总空间计入输入索引、活动请求和输出映射；搜索预算约束细化 DP 的估价与转移。"/>
           <p:cNvSpPr txBox="1"/>
           <p:nvPr/>
         </p:nvSpPr>

--- a/submissions/kaisennhu/07_答辩PPT/答辩介绍.pptx
+++ b/submissions/kaisennhu/07_答辩PPT/答辩介绍.pptx
@@ -932,7 +932,7 @@
           <a:lstStyle/>
           <a:p>
             <a:r>
-              <a:t>本页区分三层概念。合法操作候选是“某段连续片段合为一组，走某条路径”；一份完整方案是若干操作覆盖本批全部片段。快速DP枚举许多候选操作，但最终只回溯输出一份完整基础方案，不输出多份完整方案。每个dp[j]也只保留一个最低估价前驱；并列时保留先遇到的选择。细化阶段从基础方案获得组数seed以及卡号/复制类型的组数比例，再从前面枚举的同一合法操作集合中重新求解。多个完整候选来自对多个总组数cnt分别求解；每个cnt只回溯一个最低估价方案，回溯后进行总槽位与池容量检查，不保留该cnt的次优方案。最终提交的仍是一份计划。快速更新dp[j]=min_i,path(dp[i]+E(i,j,path))，状态只表示前缀j，最终组数由回溯决定。细化更新D[h][j]=min_i,path(D[h-1][i]+E_cnt(i,j,path))；每固定一个cnt，边权用对应并发重算，取D[cnt][n]回溯。两阶段都联合选分组边界和路径，并非先分组后选路。快速SSD估价并发max(1,active_ssd+n)，复制为max(1,active_copy+per_card_requests)；细化SSD为max(1,active_ssd+cnt)，因入口保守空闲，active_ssd为0。复制为active_copy+max(1,ceil(cnt*seed_copy_groups/seed))，按卡号与D2D/H2D类型分别估计，估价内再应用对应性能表及并发限制；DIRECT不计入复制组数。cnt不是整个执行期不变的真实并发，E用于排序，实际J由官方完整Trace回放计算。每批先运行快速DP。细化仅在无活动传输、queued_iocbs、promote_inflight、foreground_iocb_inflight及旧未完成到达登记时尝试；≤1024请求、≤2048 iov、≤16384片段，快速方案≤2048操作。合法边上限262144；每cnt状态≤131072，估价/转移共享200万工作预算。预检查、可达性过滤、采样及回溯资源检查按代码执行；预算不足的cnt不求解。有合格细化方案则选细化候选中的最低估价者，没有则保留快速方案；不是把快速E与细化E直接比较。n≤24时尝试所有cnt，否则采样性能桶边界、几何序列及尺寸拐点，并局部细化；采样包含基础方案组数，但该cnt重新求出的方案可能与基础方案不同。三个同卡相邻对齐512B片段：快速阶段qs=qc=3，整组D/A/F E=5.406/32.820/22.559，输出一个DIRECT组。细化时全DIRECT基础方案使复制qc=1，AGGREGATE整组E重算为81.648；每cnt的最佳D[cnt][3]在1/2/3组时为5.406/7.406/9.406，均由DIRECT取得。代码尝试顺序1、3、2，最终仍选一个DIRECT。实际读工作3.4059797微秒，Trace时间向上取整4微秒，调用费2，J=6；分别读时调用费6、J=10。前台最多考察起点后128片段，不处理未来请求或PROMOTE。五次点击对应快速输出、细化候选、入口范围、最终选择、数值示例；放映展示已核验的执行过程，不调用模拟器。</a:t>
+              <a:t>本页区分三层概念。合法操作候选是“某段连续片段合为一组，走某条路径”；一份完整方案是若干操作覆盖本批全部片段。快速DP枚举许多候选操作，但最终只回溯输出一份完整基础方案，不输出多份完整方案。每个dp[j]也只保留一个最低估价前驱；并列时保留先遇到的选择。细化阶段从基础方案获得组数seed以及卡号/复制类型的组数比例，再从前面枚举的同一合法操作集合中重新求解。多个完整候选来自对多个总组数cnt分别求解；每个cnt只回溯一个最低估价方案，回溯后进行总槽位与池容量检查，不保留该cnt的次优方案。最终提交的仍是一份计划。快速更新dp[j]=min_i,path(dp[i]+E(i,j,path))，状态只表示前缀j，最终组数由回溯决定。细化更新D[h][j]=min_i,path(D[h-1][i]+E_cnt(i,j,path))；每固定一个cnt，边权用对应并发重算，取D[cnt][n]回溯。两阶段都联合选分组边界和路径，并非先分组后选路。先快速的目的是取得估价依据和可用方案；单独假设cnt不能推知各卡的复制类型分布。例如基础4组、某卡AGGREGATE占1组，尝试cnt=8时该卡D2D新增并发估为2。当前细化依赖这项统计和基础组数采样；直接细化需要另行设计复制估价和超限处理。快速SSD估价并发max(1,active_ssd+n)，复制为max(1,active_copy+per_card_requests)；细化SSD为max(1,active_ssd+cnt)，因入口保守空闲，active_ssd为0。复制为active_copy+max(1,ceil(cnt*seed_copy_groups/seed))，按卡号与D2D/H2D类型分别估计，估价内再应用对应性能表及并发限制；DIRECT不计入复制组数。cnt不是整个执行期不变的真实并发，E用于排序，实际J由官方完整Trace回放计算。每批先运行快速DP。细化仅在无活动传输、queued_iocbs、promote_inflight、foreground_iocb_inflight及旧未完成到达登记时尝试；≤1024请求、≤2048 iov、≤16384片段，快速方案≤2048操作。合法边上限262144；每cnt状态≤131072，估价/转移共享200万工作预算。预检查、可达性过滤、采样及回溯资源检查按代码执行；预算不足的cnt不求解。有合格细化方案则选细化候选中的最低估价者，没有则保留快速方案；不是把快速E与细化E直接比较。n≤24时尝试所有cnt，否则采样性能桶边界、几何序列及尺寸拐点，并局部细化；采样包含基础方案组数，但该cnt重新求出的方案可能与基础方案不同。三个同卡相邻对齐512B片段：快速阶段qs=qc=3，整组D/A/F E=5.406/32.820/22.559，输出一个DIRECT组。细化时全DIRECT基础方案使复制qc=1，AGGREGATE整组E重算为81.648；每cnt的最佳D[cnt][3]在1/2/3组时为5.406/7.406/9.406，均由DIRECT取得。代码尝试顺序1、3、2，最终仍选一个DIRECT。实际读工作3.4059797微秒，Trace时间向上取整4微秒，调用费2，J=6；分别读时调用费6、J=10。前台最多考察起点后128片段，不处理未来请求或PROMOTE。五次点击对应快速输出、细化候选、入口范围、最终选择、数值示例；放映展示已核验的执行过程，不调用模拟器。</a:t>
             </a:r>
           </a:p>
         </p:txBody>
@@ -11242,7 +11242,7 @@
       </p:sp>
       <p:sp>
         <p:nvSpPr>
-          <p:cNvPr id="4" name="两阶段共用合法操作集合，都同时选分组与路径；细化利用基础方案的复制分布估计并发。"/>
+          <p:cNvPr id="4" name="快速DP先低成本取得可提交方案与复制分布；细化据此估价，在预算内按组数搜索。"/>
           <p:cNvSpPr txBox="1"/>
           <p:nvPr/>
         </p:nvSpPr>
@@ -11279,7 +11279,7 @@
                 <a:latin typeface="Microsoft YaHei"/>
                 <a:ea typeface="Microsoft YaHei"/>
               </a:rPr>
-              <a:t>两阶段共用合法操作集合，都同时选分组与路径；细化利用基础方案的复制分布估计并发。</a:t>
+              <a:t>快速DP先低成本取得可提交方案与复制分布；细化据此估价，在预算内按组数搜索。</a:t>
             </a:r>
           </a:p>
         </p:txBody>
@@ -19493,7 +19493,7 @@
       </p:cxnSp>
       <p:sp>
         <p:nvSpPr>
-          <p:cNvPr id="36" name="策略堆峰值 12.34MiB；策略决策、框架执行和输入输出分别计量，便于复现。"/>
+          <p:cNvPr id="36" name="策略堆峰值 12.34MiB；策略回调单独计时，进程总耗时包含框架执行与输入输出。"/>
           <p:cNvSpPr txBox="1"/>
           <p:nvPr/>
         </p:nvSpPr>
@@ -19530,7 +19530,7 @@
                 <a:latin typeface="Microsoft YaHei"/>
                 <a:ea typeface="Microsoft YaHei"/>
               </a:rPr>
-              <a:t>策略堆峰值 12.34MiB；策略决策、框架执行和输入输出分别计量，便于复现。</a:t>
+              <a:t>策略堆峰值 12.34MiB；策略回调单独计时，进程总耗时包含框架执行与输入输出。</a:t>
             </a:r>
           </a:p>
         </p:txBody>

--- a/submissions/kaisennhu/07_答辩PPT/答辩介绍.pptx
+++ b/submissions/kaisennhu/07_答辩PPT/答辩介绍.pptx
@@ -932,7 +932,7 @@
           <a:lstStyle/>
           <a:p>
             <a:r>
-              <a:t>本页区分三层概念。合法操作候选是“某段连续片段合为一组，走某条路径”；一份完整方案是若干操作覆盖本批全部片段。快速DP枚举许多候选操作，但最终只回溯输出一份完整基础方案，不输出多份完整方案。每个dp[j]也只保留一个最低估价前驱；并列时保留先遇到的选择。细化阶段从基础方案获得组数seed以及卡号/复制类型的组数比例，再从前面枚举的同一合法操作集合中重新求解。多个完整候选来自对多个总组数cnt分别求解；每个cnt只回溯一个最低估价方案，回溯后进行总槽位与池容量检查，不保留该cnt的次优方案。最终提交的仍是一份计划。快速更新dp[j]=min_i,path(dp[i]+E(i,j,path))，状态只表示前缀j，最终组数由回溯决定。细化更新D[h][j]=min_i,path(D[h-1][i]+E_cnt(i,j,path))；每固定一个cnt，边权用对应并发重算，取D[cnt][n]回溯。两阶段都联合选分组边界和路径，并非先分组后选路。先快速的目的是取得估价依据和可用方案；单独假设cnt不能推知各卡的复制类型分布。例如基础4组、某卡AGGREGATE占1组，尝试cnt=8时该卡D2D新增并发估为2。当前细化依赖这项统计和基础组数采样；直接细化需要另行设计复制估价和超限处理。快速SSD估价并发max(1,active_ssd+n)，复制为max(1,active_copy+per_card_requests)；细化SSD为max(1,active_ssd+cnt)，因入口保守空闲，active_ssd为0。复制为active_copy+max(1,ceil(cnt*seed_copy_groups/seed))，按卡号与D2D/H2D类型分别估计，估价内再应用对应性能表及并发限制；DIRECT不计入复制组数。cnt不是整个执行期不变的真实并发，E用于排序，实际J由官方完整Trace回放计算。每批先运行快速DP。细化仅在无活动传输、queued_iocbs、promote_inflight、foreground_iocb_inflight及旧未完成到达登记时尝试；≤1024请求、≤2048 iov、≤16384片段，快速方案≤2048操作。合法边上限262144；每cnt状态≤131072，估价/转移共享200万工作预算。预检查、可达性过滤、采样及回溯资源检查按代码执行；预算不足的cnt不求解。有合格细化方案则选细化候选中的最低估价者，没有则保留快速方案；不是把快速E与细化E直接比较。n≤24时尝试所有cnt，否则采样性能桶边界、几何序列及尺寸拐点，并局部细化；采样包含基础方案组数，但该cnt重新求出的方案可能与基础方案不同。三个同卡相邻对齐512B片段：快速阶段qs=qc=3，整组D/A/F E=5.406/32.820/22.559，输出一个DIRECT组。细化时全DIRECT基础方案使复制qc=1，AGGREGATE整组E重算为81.648；每cnt的最佳D[cnt][3]在1/2/3组时为5.406/7.406/9.406，均由DIRECT取得。代码尝试顺序1、3、2，最终仍选一个DIRECT。实际读工作3.4059797微秒，Trace时间向上取整4微秒，调用费2，J=6；分别读时调用费6、J=10。前台最多考察起点后128片段，不处理未来请求或PROMOTE。五次点击对应快速输出、细化候选、入口范围、最终选择、数值示例；放映展示已核验的执行过程，不调用模拟器。</a:t>
+              <a:t>本页区分三层概念。合法操作候选是“某段连续片段合为一组，走某条路径”；一份完整方案是若干操作覆盖本批全部片段。快速DP枚举许多候选操作，但最终只回溯输出一份完整基础方案，不输出多份完整方案。每个dp[j]也只保留一个最低估价前驱；并列时保留先遇到的选择。细化阶段从基础方案获得组数seed以及卡号/复制类型的组数比例，再从前面枚举的同一合法操作集合中重新求解。多个完整候选来自对多个总组数cnt分别求解；每个cnt只回溯一个最低估价方案，回溯后进行总槽位与池容量检查，不保留该cnt的次优方案。最终提交的仍是一份计划。快速更新dp[j]=min_i,path(dp[i]+E(i,j,path))，状态只表示前缀j，最终组数由回溯决定。细化更新D[h][j]=min_i,path(D[h-1][i]+E_cnt(i,j,path))；每固定一个cnt，边权用对应并发重算，取D[cnt][n]回溯。两阶段都联合选分组边界和路径，并非先分组后选路。先快速的目的是取得估价依据和可用方案；单独假设cnt不能推知各卡的复制类型分布。例如基础4组、某卡AGGREGATE占1组，尝试cnt=8时该卡D2D新增并发估为2。当前细化依赖这项统计和基础组数采样；直接细化需要另行设计复制估价和超限处理。快速SSD估价并发max(1,active_ssd+n)，复制为max(1,active_copy+per_card_requests)；细化SSD为max(1,active_ssd+cnt)，因入口保守空闲，active_ssd为0。复制为active_copy+max(1,ceil(cnt*seed_copy_groups/seed))，按卡号与D2D/H2D类型分别估计，估价内再应用对应性能表及并发限制；DIRECT不计入复制组数。cnt不是整个执行期不变的真实并发，E用于排序，实际J由官方完整Trace回放计算。每批先运行快速DP。细化只在系统空闲且输入规模适合时尝试，候选规模、存储状态和搜索工作量均受限制；具体实现阈值见算法与复杂度文档。预检查、可达性过滤、采样及回溯资源检查按代码执行；预算不足的cnt不求解。有合格细化方案则选细化候选中的最低估价者，没有则保留快速方案；不是把快速E与细化E直接比较。候选总组数按输入规模枚举或采样，采样覆盖性能桶边界、几何序列及尺寸拐点，并局部细化；采样包含基础方案组数，但该cnt重新求出的方案可能与基础方案不同。三个同卡相邻对齐512B片段：快速阶段qs=qc=3，整组D/A/F E=5.406/32.820/22.559，输出一个DIRECT组。细化时全DIRECT基础方案使复制qc=1，AGGREGATE整组E重算为81.648；每cnt的最佳D[cnt][3]在1/2/3组时为5.406/7.406/9.406，均由DIRECT取得。代码尝试顺序1、3、2，最终仍选一个DIRECT。实际读工作3.4059797微秒，Trace时间向上取整4微秒，调用费2，J=6；分别读时调用费6、J=10。前台用有限窗口考察连续片段，不处理未来请求或PROMOTE。五次点击对应快速输出、细化候选、入口范围、最终选择、数值示例；放映展示已核验的执行过程，不调用模拟器。</a:t>
             </a:r>
           </a:p>
         </p:txBody>
@@ -1002,7 +1002,7 @@
           <a:lstStyle/>
           <a:p>
             <a:r>
-              <a:t>四道条件与末尾数值例子各一次点击。缓存键按卡号、SSD起点、完整长度。命中通过缺少arrivals_登记辨认；已准入且无新的真实miss也不重复提升。复用还有字节距离不能超过池容量的检查。频率0&lt;gap&lt;TTL；新鲜度age&lt;TTL且age≤max(1微秒,gap+2jitter)，1微秒下限与TTL严格小于关系均按代码保留。gain扣除命中H2D费用，并按本卡份额、是否能被到达空隙吸收调整时间项。提升投入包含80固定费、来源传输和调用费，选较便宜来源。教学例取R=30、D=10、H=12、C=12、a=1、时间权重w=0、c_t=1，所以gain=10；每次可记预算52，第二次104不够112.5、第三次156足够。已有及在途占用计入需替换字节。这是算式假设不是实测Trace。credit是投入节制，不等于预测未来必命中的次数。</a:t>
+              <a:t>四道条件与末尾数值例子各一次点击。缓存键按卡号、SSD起点、完整长度。命中通过缺少arrivals_登记辨认；已准入且无新的真实miss也不重复提升。复用还有字节距离不能超过池容量的检查。复用间隔与证据年龄都严格小于TTL，并按已观察的复用节奏检查新鲜度；具体条件见算法设计。gain扣除命中H2D费用，并按本卡份额、是否能被到达空隙吸收调整时间项。提升投入包含80固定费、来源传输和调用费，选较便宜来源。教学例取R=30、D=10、H=12、C=12、a=1、时间权重w=0、c_t=1，所以gain=10；每次可记预算52，第二次104不够112.5、第三次156足够。已有及在途占用计入需替换字节。这是算式假设不是实测Trace。credit是投入节制，不等于预测未来必命中的次数。</a:t>
             </a:r>
           </a:p>
         </p:txBody>
@@ -1142,7 +1142,7 @@
           <a:lstStyle/>
           <a:p>
             <a:r>
-              <a:t>Vmax为单个请求最多iov数，L为最终片段与目标iov的有效交集数。候选组枚举与快速DP状态更新在同一段循环中交织执行，这里按开销来源分列，并非代码先枚举完整候选表再做快速DP。每个起点至多扩展W个片段，每组比较三条路径，每条边的DP更新为常数时间，因此快速DP核心转移为O(nW)。候选组每扩展一个片段，要把请求编号插入std::set owners；集合大小最多min(W,请求数)，单次插入最坏O(log(W+1))，故候选维护为O(nW log(W+1))。两项相加，含集合维护的枚举和快速规划为O(nW log(W+1))，不是DP转移本身有额外一层循环。W固定128时，这两项都随n线性增长，排序O(n log n)另计；按卡状态map查询另计。固定cnt时DP状态至多cnt*n，每状态看至多3W条边；若无采样和预算约束，全枚举cnt=1..n的核心转移上界可达O(n^3 W)。实现使用采样，单次状态上限131072、合法边上限262144，估价和转移每批共享2000000预算。状态/边预检查以及回溯后的所有者和缓冲检查另计。复制估价按卡维护映射，也有集合访问成本。后台若有R个在途提升和A个活动传输，同步约O(R log(R+1))，还扫描A项、查history和未完成请求map；不逐次扫描全部缓存。history_queue最多131072条更新记录，未完成Work及输入输出不受这一常数限制。这里按模块分析，没有把整个策略概括为O(nW)。</a:t>
+              <a:t>Vmax为单个请求最多iov数，L为最终片段与目标iov的有效交集数。候选组枚举与快速DP状态更新在同一段循环中交织执行，这里按开销来源分列，并非代码先枚举完整候选表再做快速DP。每个起点至多扩展W个片段，每组比较三条路径，每条边的DP更新为常数时间，因此快速DP核心转移为O(nW)。候选组每扩展一个片段，要把请求编号插入std::set owners；集合大小最多min(W,请求数)，单次插入最坏O(log(W+1))，故候选维护为O(nW log(W+1))。两项相加，含集合维护的枚举和快速规划为O(nW log(W+1))，不是DP转移本身有额外一层循环。W固定时，这两项都随n线性增长，排序O(n log n)另计；按卡状态map查询另计。固定cnt时DP状态至多cnt*n，每状态看至多3W条边；若无采样和预算约束，全枚举cnt=1..n的核心转移上界可达O(n^3 W)。实现使用采样和工作量限制，控制候选状态、合法边与估价/转移规模；具体上限保存在算法与复杂度文档。状态/边预检查以及回溯后的所有者和缓冲检查另计。复制估价按卡维护映射，也有集合访问成本。后台若有R个在途提升和A个活动传输，同步约O(R log(R+1))，还扫描A项、查history和未完成请求map；不逐次扫描全部缓存。history_queue限制长期历史规模，未完成Work及输入输出另行统计。这里按模块分析，没有把整个策略概括为O(nW)。</a:t>
             </a:r>
           </a:p>
         </p:txBody>
@@ -11198,7 +11198,7 @@
       </p:sp>
       <p:sp>
         <p:nvSpPr>
-          <p:cNvPr id="3" name="快速 DP 产出一个方案，细化按组数生成候选"/>
+          <p:cNvPr id="3" name="先用快速 DP 得到方案，再利用其统计进行细化"/>
           <p:cNvSpPr txBox="1"/>
           <p:nvPr/>
         </p:nvSpPr>
@@ -11235,14 +11235,14 @@
                 <a:latin typeface="Microsoft YaHei"/>
                 <a:ea typeface="Microsoft YaHei"/>
               </a:rPr>
-              <a:t>快速 DP 产出一个方案，细化按组数生成候选</a:t>
-            </a:r>
-          </a:p>
-        </p:txBody>
-      </p:sp>
-      <p:sp>
-        <p:nvSpPr>
-          <p:cNvPr id="4" name="快速DP先低成本取得可提交方案与复制分布；细化据此估价，在预算内按组数搜索。"/>
+              <a:t>先用快速 DP 得到方案，再利用其统计进行细化</a:t>
+            </a:r>
+          </a:p>
+        </p:txBody>
+      </p:sp>
+      <p:sp>
+        <p:nvSpPr>
+          <p:cNvPr id="4" name="前后衔接，最终只提交一份计划；基础方案提供复制分布，也在未采用细化时直接使用。"/>
           <p:cNvSpPr txBox="1"/>
           <p:nvPr/>
         </p:nvSpPr>
@@ -11279,7 +11279,7 @@
                 <a:latin typeface="Microsoft YaHei"/>
                 <a:ea typeface="Microsoft YaHei"/>
               </a:rPr>
-              <a:t>快速DP先低成本取得可提交方案与复制分布；细化据此估价，在预算内按组数搜索。</a:t>
+              <a:t>前后衔接，最终只提交一份计划；基础方案提供复制分布，也在未采用细化时直接使用。</a:t>
             </a:r>
           </a:p>
         </p:txBody>
@@ -12298,7 +12298,7 @@
         </p:sp>
         <p:sp>
           <p:nvSpPr>
-            <p:cNvPr id="28" name="空闲：无在途传输、排队、提升、占槽及旧未完成请求。"/>
+            <p:cNvPr id="28" name="依赖关系：基础方案的复制分布 → 细化的并发估计 → 重新选择分组与路径。"/>
             <p:cNvSpPr txBox="1"/>
             <p:nvPr/>
           </p:nvSpPr>
@@ -12335,14 +12335,14 @@
                   <a:latin typeface="Microsoft YaHei"/>
                   <a:ea typeface="Microsoft YaHei"/>
                 </a:rPr>
-                <a:t>空闲：无在途传输、排队、提升、占槽及旧未完成请求。</a:t>
+                <a:t>依赖关系：基础方案的复制分布 → 细化的并发估计 → 重新选择分组与路径。</a:t>
               </a:r>
             </a:p>
           </p:txBody>
         </p:sp>
         <p:sp>
           <p:nvSpPr>
-            <p:cNvPr id="29" name="规模：请求 ≤1024，iov ≤2048，片段 ≤16384，基础方案操作 ≤2048。"/>
+            <p:cNvPr id="29" name="启动条件：系统空闲，输入规模适合进一步搜索。"/>
             <p:cNvSpPr txBox="1"/>
             <p:nvPr/>
           </p:nvSpPr>
@@ -12379,14 +12379,14 @@
                   <a:latin typeface="Microsoft YaHei"/>
                   <a:ea typeface="Microsoft YaHei"/>
                 </a:rPr>
-                <a:t>规模：请求 ≤1024，iov ≤2048，片段 ≤16384，基础方案操作 ≤2048。</a:t>
+                <a:t>启动条件：系统空闲，输入规模适合进一步搜索。</a:t>
               </a:r>
             </a:p>
           </p:txBody>
         </p:sp>
         <p:sp>
           <p:nvSpPr>
-            <p:cNvPr id="30" name="搜索：每批 200 万估价 / 转移；合法边 ≤262144，单次存储状态 ≤131072。"/>
+            <p:cNvPr id="30" name="开销控制：限制候选规模和搜索工作量，保留已经完成的合格方案。"/>
             <p:cNvSpPr txBox="1"/>
             <p:nvPr/>
           </p:nvSpPr>
@@ -12423,7 +12423,7 @@
                   <a:latin typeface="Microsoft YaHei"/>
                   <a:ea typeface="Microsoft YaHei"/>
                 </a:rPr>
-                <a:t>搜索：每批 200 万估价 / 转移；合法边 ≤262144，单次存储状态 ≤131072。</a:t>
+                <a:t>开销控制：限制候选规模和搜索工作量，保留已经完成的合格方案。</a:t>
               </a:r>
             </a:p>
           </p:txBody>
@@ -13503,7 +13503,7 @@
         </p:sp>
         <p:sp>
           <p:nvSpPr>
-            <p:cNvPr id="17" name="跨时刻未命中至少两次 0 &lt; gap &lt; TTL age &lt; TTL，且不超过 max(1μs,gap+2×抖动)"/>
+            <p:cNvPr id="17" name="跨时刻有重复访问 复用间隔短于 TTL 最近访问证据仍新鲜 符合已观察的复用节奏"/>
             <p:cNvSpPr txBox="1"/>
             <p:nvPr/>
           </p:nvSpPr>
@@ -13540,7 +13540,7 @@
                   <a:latin typeface="Microsoft YaHei"/>
                   <a:ea typeface="Microsoft YaHei"/>
                 </a:rPr>
-                <a:t>跨时刻未命中至少两次</a:t>
+                <a:t>跨时刻有重复访问</a:t>
               </a:r>
             </a:p>
             <a:p>
@@ -13560,7 +13560,7 @@
                   <a:latin typeface="Microsoft YaHei"/>
                   <a:ea typeface="Microsoft YaHei"/>
                 </a:rPr>
-                <a:t>0 &lt; gap &lt; TTL</a:t>
+                <a:t>复用间隔短于 TTL</a:t>
               </a:r>
             </a:p>
             <a:p>
@@ -13580,7 +13580,7 @@
                   <a:latin typeface="Microsoft YaHei"/>
                   <a:ea typeface="Microsoft YaHei"/>
                 </a:rPr>
-                <a:t>age &lt; TTL，且不超过</a:t>
+                <a:t>最近访问证据仍新鲜</a:t>
               </a:r>
             </a:p>
             <a:p>
@@ -13600,7 +13600,7 @@
                   <a:latin typeface="Microsoft YaHei"/>
                   <a:ea typeface="Microsoft YaHei"/>
                 </a:rPr>
-                <a:t>max(1μs,gap+2×抖动)</a:t>
+                <a:t>符合已观察的复用节奏</a:t>
               </a:r>
             </a:p>
           </p:txBody>
@@ -16463,7 +16463,7 @@
       </p:sp>
       <p:sp>
         <p:nvSpPr>
-          <p:cNvPr id="4" name="n = 片段数，W = 窗口（最多128），cnt = 组数；V / Vmax = 总 / 单请求最多 iov 数。"/>
+          <p:cNvPr id="4" name="n = 片段数，W = 候选窗口大小，cnt = 组数；V / Vmax = 总 / 单请求最多 iov 数。"/>
           <p:cNvSpPr txBox="1"/>
           <p:nvPr/>
         </p:nvSpPr>
@@ -16500,7 +16500,7 @@
                 <a:latin typeface="Microsoft YaHei"/>
                 <a:ea typeface="Microsoft YaHei"/>
               </a:rPr>
-              <a:t>n = 片段数，W = 窗口（最多128），cnt = 组数；V / Vmax = 总 / 单请求最多 iov 数。</a:t>
+              <a:t>n = 片段数，W = 候选窗口大小，cnt = 组数；V / Vmax = 总 / 单请求最多 iov 数。</a:t>
             </a:r>
           </a:p>
         </p:txBody>
@@ -17903,7 +17903,7 @@
       </p:cxnSp>
       <p:sp>
         <p:nvSpPr>
-          <p:cNvPr id="38" name="细化搜索：单次至多 131072 个存储状态；每批共享 200 万次边估价 / 转移预算。"/>
+          <p:cNvPr id="38" name="细化按需启用；限制候选规模与搜索开销，保留已完成的合格方案。"/>
           <p:cNvSpPr txBox="1"/>
           <p:nvPr/>
         </p:nvSpPr>
@@ -17940,7 +17940,7 @@
                 <a:latin typeface="Microsoft YaHei"/>
                 <a:ea typeface="Microsoft YaHei"/>
               </a:rPr>
-              <a:t>细化搜索：单次至多 131072 个存储状态；每批共享 200 万次边估价 / 转移预算。</a:t>
+              <a:t>细化按需启用；限制候选规模与搜索开销，保留已完成的合格方案。</a:t>
             </a:r>
           </a:p>
         </p:txBody>

--- a/submissions/kaisennhu/07_答辩PPT/答辩介绍.pptx
+++ b/submissions/kaisennhu/07_答辩PPT/答辩介绍.pptx
@@ -6665,7 +6665,7 @@
         </p:nvSpPr>
         <p:spPr>
           <a:xfrm>
-            <a:off x="381000" y="6858000"/>
+            <a:off x="381000" y="6829425"/>
             <a:ext cx="11430000" cy="228600"/>
           </a:xfrm>
           <a:prstGeom prst="rect">

--- a/submissions/kaisennhu/07_答辩PPT/答辩介绍.pptx
+++ b/submissions/kaisennhu/07_答辩PPT/答辩介绍.pptx
@@ -7,7 +7,7 @@
   <p:sldIdLst>
     <p:sldId id="256" r:id="rId7"/>
   </p:sldIdLst>
-  <p:sldSz cx="12192000" cy="7620000" type="screen4x3"/>
+  <p:sldSz cx="15240000" cy="9525000" type="screen4x3"/>
   <p:notesSz cx="6858000" cy="9144000"/>
   <p:defaultTextStyle>
     <a:defPPr>
@@ -3534,7 +3534,7 @@
     <p:bg>
       <p:bgPr>
         <a:solidFill>
-          <a:srgbClr val="FFFFFF"/>
+          <a:srgbClr val="F3F5F8"/>
         </a:solidFill>
         <a:effectLst/>
       </p:bgPr>
@@ -3554,8 +3554,8 @@
         </p:nvSpPr>
         <p:spPr>
           <a:xfrm>
-            <a:off x="381000" y="200025"/>
-            <a:ext cx="11430000" cy="457200"/>
+            <a:off x="457200" y="238125"/>
+            <a:ext cx="14325600" cy="514350"/>
           </a:xfrm>
           <a:prstGeom prst="rect">
             <a:avLst/>
@@ -3578,7 +3578,7 @@
               </a:spcAft>
             </a:pPr>
             <a:r>
-              <a:rPr sz="2700" b="1" lang="zh-CN">
+              <a:rPr sz="3150" b="1" lang="zh-CN">
                 <a:solidFill>
                   <a:srgbClr val="1F2937"/>
                 </a:solidFill>
@@ -3592,14 +3592,14 @@
       </p:sp>
       <p:sp>
         <p:nvSpPr>
-          <p:cNvPr id="3" name="风花雪月战队  ·  刁鹏杰 / 胡海川 / 杜杰贵"/>
+          <p:cNvPr id="3" name="风花雪月战队   ·   刁鹏杰 / 胡海川 / 杜杰贵"/>
           <p:cNvSpPr txBox="1"/>
           <p:nvPr/>
         </p:nvSpPr>
         <p:spPr>
           <a:xfrm>
-            <a:off x="400050" y="714375"/>
-            <a:ext cx="11410950" cy="266700"/>
+            <a:off x="476250" y="809625"/>
+            <a:ext cx="14287500" cy="276225"/>
           </a:xfrm>
           <a:prstGeom prst="rect">
             <a:avLst/>
@@ -3622,14 +3622,14 @@
               </a:spcAft>
             </a:pPr>
             <a:r>
-              <a:rPr sz="1575" b="1" lang="zh-CN">
-                <a:solidFill>
-                  <a:srgbClr val="285EA8"/>
+              <a:rPr sz="1725" b="0" lang="zh-CN">
+                <a:solidFill>
+                  <a:srgbClr val="627286"/>
                 </a:solidFill>
                 <a:latin typeface="Microsoft YaHei"/>
                 <a:ea typeface="Microsoft YaHei"/>
               </a:rPr>
-              <a:t>风花雪月战队  ·  刁鹏杰 / 胡海川 / 杜杰贵</a:t>
+              <a:t>风花雪月战队   ·   刁鹏杰 / 胡海川 / 杜杰贵</a:t>
             </a:r>
           </a:p>
         </p:txBody>
@@ -3642,17 +3642,19 @@
         </p:nvSpPr>
         <p:spPr>
           <a:xfrm>
-            <a:off x="381000" y="1076325"/>
-            <a:ext cx="11430000" cy="590550"/>
+            <a:off x="457200" y="1257300"/>
+            <a:ext cx="14325600" cy="952500"/>
           </a:xfrm>
           <a:prstGeom prst="rect">
             <a:avLst/>
           </a:prstGeom>
           <a:solidFill>
-            <a:srgbClr val="EDF3FA"/>
+            <a:srgbClr val="EDF3FB"/>
           </a:solidFill>
-          <a:ln>
-            <a:noFill/>
+          <a:ln w="8890">
+            <a:solidFill>
+              <a:srgbClr val="DDE5EE"/>
+            </a:solidFill>
           </a:ln>
           <a:effectLst/>
         </p:spPr>
@@ -3680,14 +3682,102 @@
       </p:sp>
       <p:sp>
         <p:nvSpPr>
-          <p:cNvPr id="5" name="目标：正确覆盖请求，降低 J = 时间单价 × 完整 Trace 历时 + CPU / NPU 调用费。"/>
+          <p:cNvPr id="5" name="Rectangle 4"/>
+          <p:cNvSpPr/>
+          <p:nvPr/>
+        </p:nvSpPr>
+        <p:spPr>
+          <a:xfrm>
+            <a:off x="647700" y="1447800"/>
+            <a:ext cx="323850" cy="266700"/>
+          </a:xfrm>
+          <a:prstGeom prst="rect">
+            <a:avLst/>
+          </a:prstGeom>
+          <a:solidFill>
+            <a:srgbClr val="245DA0"/>
+          </a:solidFill>
+          <a:ln>
+            <a:noFill/>
+          </a:ln>
+          <a:effectLst/>
+        </p:spPr>
+        <p:style>
+          <a:lnRef idx="1">
+            <a:schemeClr val="accent1"/>
+          </a:lnRef>
+          <a:fillRef idx="3">
+            <a:schemeClr val="accent1"/>
+          </a:fillRef>
+          <a:effectRef idx="0">
+            <a:schemeClr val="accent1"/>
+          </a:effectRef>
+          <a:fontRef idx="minor">
+            <a:schemeClr val="lt1"/>
+          </a:fontRef>
+        </p:style>
+        <p:txBody>
+          <a:bodyPr rtlCol="0" anchor="ctr"/>
+          <a:lstStyle/>
+          <a:p>
+            <a:pPr algn="ctr"/>
+          </a:p>
+        </p:txBody>
+      </p:sp>
+      <p:sp>
+        <p:nvSpPr>
+          <p:cNvPr id="6" name="01"/>
           <p:cNvSpPr txBox="1"/>
           <p:nvPr/>
         </p:nvSpPr>
         <p:spPr>
           <a:xfrm>
-            <a:off x="523874" y="1143000"/>
-            <a:ext cx="11144250" cy="257175"/>
+            <a:off x="647700" y="1476375"/>
+            <a:ext cx="323850" cy="228600"/>
+          </a:xfrm>
+          <a:prstGeom prst="rect">
+            <a:avLst/>
+          </a:prstGeom>
+          <a:noFill/>
+          <a:effectLst/>
+        </p:spPr>
+        <p:txBody>
+          <a:bodyPr wrap="square" lIns="0" rIns="0" tIns="0" bIns="0">
+            <a:spAutoFit/>
+          </a:bodyPr>
+          <a:lstStyle/>
+          <a:p>
+            <a:pPr algn="ctr">
+              <a:lnSpc>
+                <a:spcPct val="112000"/>
+              </a:lnSpc>
+              <a:spcAft>
+                <a:spcPts val="300"/>
+              </a:spcAft>
+            </a:pPr>
+            <a:r>
+              <a:rPr sz="1350" b="1" lang="zh-CN">
+                <a:solidFill>
+                  <a:srgbClr val="FFFFFF"/>
+                </a:solidFill>
+                <a:latin typeface="Microsoft YaHei"/>
+                <a:ea typeface="Microsoft YaHei"/>
+              </a:rPr>
+              <a:t>01</a:t>
+            </a:r>
+          </a:p>
+        </p:txBody>
+      </p:sp>
+      <p:sp>
+        <p:nvSpPr>
+          <p:cNvPr id="7" name="目标与边界"/>
+          <p:cNvSpPr txBox="1"/>
+          <p:nvPr/>
+        </p:nvSpPr>
+        <p:spPr>
+          <a:xfrm>
+            <a:off x="1085850" y="1428750"/>
+            <a:ext cx="13506450" cy="342900"/>
           </a:xfrm>
           <a:prstGeom prst="rect">
             <a:avLst/>
@@ -3710,28 +3800,28 @@
               </a:spcAft>
             </a:pPr>
             <a:r>
-              <a:rPr sz="1650" b="1" lang="zh-CN">
-                <a:solidFill>
-                  <a:srgbClr val="285EA8"/>
+              <a:rPr sz="1800" b="1" lang="zh-CN">
+                <a:solidFill>
+                  <a:srgbClr val="245DA0"/>
                 </a:solidFill>
                 <a:latin typeface="Microsoft YaHei"/>
                 <a:ea typeface="Microsoft YaHei"/>
               </a:rPr>
-              <a:t>目标：正确覆盖请求，降低 J = 时间单价 × 完整 Trace 历时 + CPU / NPU 调用费。</a:t>
-            </a:r>
-          </a:p>
-        </p:txBody>
-      </p:sp>
-      <p:sp>
-        <p:nvSpPr>
-          <p:cNvPr id="6" name="边界：策略在线决定切块、分组、路径与提升；框架负责查缓存、执行、共享带宽及计分。目标卡由请求指定。"/>
+              <a:t>目标与边界</a:t>
+            </a:r>
+          </a:p>
+        </p:txBody>
+      </p:sp>
+      <p:sp>
+        <p:nvSpPr>
+          <p:cNvPr id="8" name="正确覆盖 · 全程降本"/>
           <p:cNvSpPr txBox="1"/>
           <p:nvPr/>
         </p:nvSpPr>
         <p:spPr>
           <a:xfrm>
-            <a:off x="523874" y="1438275"/>
-            <a:ext cx="11144250" cy="209550"/>
+            <a:off x="647700" y="1809750"/>
+            <a:ext cx="2286000" cy="238125"/>
           </a:xfrm>
           <a:prstGeom prst="rect">
             <a:avLst/>
@@ -3754,28 +3844,28 @@
               </a:spcAft>
             </a:pPr>
             <a:r>
-              <a:rPr sz="1425" b="0" lang="zh-CN">
-                <a:solidFill>
-                  <a:srgbClr val="1F2937"/>
+              <a:rPr sz="1575" b="1" lang="zh-CN">
+                <a:solidFill>
+                  <a:srgbClr val="245DA0"/>
                 </a:solidFill>
                 <a:latin typeface="Microsoft YaHei"/>
                 <a:ea typeface="Microsoft YaHei"/>
               </a:rPr>
-              <a:t>边界：策略在线决定切块、分组、路径与提升；框架负责查缓存、执行、共享带宽及计分。目标卡由请求指定。</a:t>
-            </a:r>
-          </a:p>
-        </p:txBody>
-      </p:sp>
-      <p:sp>
-        <p:nvSpPr>
-          <p:cNvPr id="7" name="关键观察与设计依据"/>
+              <a:t>正确覆盖 · 全程降本</a:t>
+            </a:r>
+          </a:p>
+        </p:txBody>
+      </p:sp>
+      <p:sp>
+        <p:nvSpPr>
+          <p:cNvPr id="9" name="J = 时间单价 × 完整 Trace 历时 + CPU / NPU 调用费"/>
           <p:cNvSpPr txBox="1"/>
           <p:nvPr/>
         </p:nvSpPr>
         <p:spPr>
           <a:xfrm>
-            <a:off x="381000" y="1828800"/>
-            <a:ext cx="7086600" cy="285750"/>
+            <a:off x="3314700" y="1419225"/>
+            <a:ext cx="11277600" cy="304800"/>
           </a:xfrm>
           <a:prstGeom prst="rect">
             <a:avLst/>
@@ -3798,72 +3888,28 @@
               </a:spcAft>
             </a:pPr>
             <a:r>
-              <a:rPr sz="1800" b="1" lang="zh-CN">
-                <a:solidFill>
-                  <a:srgbClr val="285EA8"/>
+              <a:rPr sz="2025" b="1" lang="zh-CN">
+                <a:solidFill>
+                  <a:srgbClr val="245DA0"/>
                 </a:solidFill>
                 <a:latin typeface="Microsoft YaHei"/>
                 <a:ea typeface="Microsoft YaHei"/>
               </a:rPr>
-              <a:t>关键观察与设计依据</a:t>
-            </a:r>
-          </a:p>
-        </p:txBody>
-      </p:sp>
-      <p:sp>
-        <p:nvSpPr>
-          <p:cNvPr id="8" name="Rectangle 7"/>
-          <p:cNvSpPr/>
-          <p:nvPr/>
-        </p:nvSpPr>
-        <p:spPr>
-          <a:xfrm>
-            <a:off x="381000" y="2190750"/>
-            <a:ext cx="2247900" cy="895350"/>
-          </a:xfrm>
-          <a:prstGeom prst="rect">
-            <a:avLst/>
-          </a:prstGeom>
-          <a:solidFill>
-            <a:srgbClr val="F5F7FA"/>
-          </a:solidFill>
-          <a:ln>
-            <a:noFill/>
-          </a:ln>
-          <a:effectLst/>
-        </p:spPr>
-        <p:style>
-          <a:lnRef idx="1">
-            <a:schemeClr val="accent1"/>
-          </a:lnRef>
-          <a:fillRef idx="3">
-            <a:schemeClr val="accent1"/>
-          </a:fillRef>
-          <a:effectRef idx="0">
-            <a:schemeClr val="accent1"/>
-          </a:effectRef>
-          <a:fontRef idx="minor">
-            <a:schemeClr val="lt1"/>
-          </a:fontRef>
-        </p:style>
-        <p:txBody>
-          <a:bodyPr rtlCol="0" anchor="ctr"/>
-          <a:lstStyle/>
-          <a:p>
-            <a:pPr algn="ctr"/>
-          </a:p>
-        </p:txBody>
-      </p:sp>
-      <p:sp>
-        <p:nvSpPr>
-          <p:cNvPr id="9" name="合并有双重作用"/>
+              <a:t>J = 时间单价 × 完整 Trace 历时 + CPU / NPU 调用费</a:t>
+            </a:r>
+          </a:p>
+        </p:txBody>
+      </p:sp>
+      <p:sp>
+        <p:nvSpPr>
+          <p:cNvPr id="10" name="策略在线决定切块、分组、路径及提升；框架负责查缓存、执行、带宽共享与计分，目标卡由请求指定。"/>
           <p:cNvSpPr txBox="1"/>
           <p:nvPr/>
         </p:nvSpPr>
         <p:spPr>
           <a:xfrm>
-            <a:off x="495299" y="2276475"/>
-            <a:ext cx="2019300" cy="266700"/>
+            <a:off x="3314700" y="1847850"/>
+            <a:ext cx="11277600" cy="238125"/>
           </a:xfrm>
           <a:prstGeom prst="rect">
             <a:avLst/>
@@ -3886,28 +3932,162 @@
               </a:spcAft>
             </a:pPr>
             <a:r>
-              <a:rPr sz="1575" b="1" lang="zh-CN">
-                <a:solidFill>
-                  <a:srgbClr val="285EA8"/>
+              <a:rPr sz="1575" b="0" lang="zh-CN">
+                <a:solidFill>
+                  <a:srgbClr val="1F2937"/>
                 </a:solidFill>
                 <a:latin typeface="Microsoft YaHei"/>
                 <a:ea typeface="Microsoft YaHei"/>
               </a:rPr>
-              <a:t>合并有双重作用</a:t>
-            </a:r>
-          </a:p>
-        </p:txBody>
-      </p:sp>
-      <p:sp>
-        <p:nvSpPr>
-          <p:cNvPr id="10" name="少调用、共享重叠读取； 也会改变并发与缓冲占用。"/>
+              <a:t>策略在线决定切块、分组、路径及提升；框架负责查缓存、执行、带宽共享与计分，目标卡由请求指定。</a:t>
+            </a:r>
+          </a:p>
+        </p:txBody>
+      </p:sp>
+      <p:sp>
+        <p:nvSpPr>
+          <p:cNvPr id="11" name="Rectangle 10"/>
+          <p:cNvSpPr/>
+          <p:nvPr/>
+        </p:nvSpPr>
+        <p:spPr>
+          <a:xfrm>
+            <a:off x="457200" y="2400300"/>
+            <a:ext cx="9334500" cy="1524000"/>
+          </a:xfrm>
+          <a:prstGeom prst="rect">
+            <a:avLst/>
+          </a:prstGeom>
+          <a:solidFill>
+            <a:srgbClr val="FFFFFF"/>
+          </a:solidFill>
+          <a:ln w="8890">
+            <a:solidFill>
+              <a:srgbClr val="DDE5EE"/>
+            </a:solidFill>
+          </a:ln>
+          <a:effectLst/>
+        </p:spPr>
+        <p:style>
+          <a:lnRef idx="1">
+            <a:schemeClr val="accent1"/>
+          </a:lnRef>
+          <a:fillRef idx="3">
+            <a:schemeClr val="accent1"/>
+          </a:fillRef>
+          <a:effectRef idx="0">
+            <a:schemeClr val="accent1"/>
+          </a:effectRef>
+          <a:fontRef idx="minor">
+            <a:schemeClr val="lt1"/>
+          </a:fontRef>
+        </p:style>
+        <p:txBody>
+          <a:bodyPr rtlCol="0" anchor="ctr"/>
+          <a:lstStyle/>
+          <a:p>
+            <a:pPr algn="ctr"/>
+          </a:p>
+        </p:txBody>
+      </p:sp>
+      <p:sp>
+        <p:nvSpPr>
+          <p:cNvPr id="12" name="Rectangle 11"/>
+          <p:cNvSpPr/>
+          <p:nvPr/>
+        </p:nvSpPr>
+        <p:spPr>
+          <a:xfrm>
+            <a:off x="647700" y="2590800"/>
+            <a:ext cx="323850" cy="266700"/>
+          </a:xfrm>
+          <a:prstGeom prst="rect">
+            <a:avLst/>
+          </a:prstGeom>
+          <a:solidFill>
+            <a:srgbClr val="245DA0"/>
+          </a:solidFill>
+          <a:ln>
+            <a:noFill/>
+          </a:ln>
+          <a:effectLst/>
+        </p:spPr>
+        <p:style>
+          <a:lnRef idx="1">
+            <a:schemeClr val="accent1"/>
+          </a:lnRef>
+          <a:fillRef idx="3">
+            <a:schemeClr val="accent1"/>
+          </a:fillRef>
+          <a:effectRef idx="0">
+            <a:schemeClr val="accent1"/>
+          </a:effectRef>
+          <a:fontRef idx="minor">
+            <a:schemeClr val="lt1"/>
+          </a:fontRef>
+        </p:style>
+        <p:txBody>
+          <a:bodyPr rtlCol="0" anchor="ctr"/>
+          <a:lstStyle/>
+          <a:p>
+            <a:pPr algn="ctr"/>
+          </a:p>
+        </p:txBody>
+      </p:sp>
+      <p:sp>
+        <p:nvSpPr>
+          <p:cNvPr id="13" name="02"/>
           <p:cNvSpPr txBox="1"/>
           <p:nvPr/>
         </p:nvSpPr>
         <p:spPr>
           <a:xfrm>
-            <a:off x="495299" y="2590800"/>
-            <a:ext cx="2019300" cy="419100"/>
+            <a:off x="647700" y="2619375"/>
+            <a:ext cx="323850" cy="228600"/>
+          </a:xfrm>
+          <a:prstGeom prst="rect">
+            <a:avLst/>
+          </a:prstGeom>
+          <a:noFill/>
+          <a:effectLst/>
+        </p:spPr>
+        <p:txBody>
+          <a:bodyPr wrap="square" lIns="0" rIns="0" tIns="0" bIns="0">
+            <a:spAutoFit/>
+          </a:bodyPr>
+          <a:lstStyle/>
+          <a:p>
+            <a:pPr algn="ctr">
+              <a:lnSpc>
+                <a:spcPct val="112000"/>
+              </a:lnSpc>
+              <a:spcAft>
+                <a:spcPts val="300"/>
+              </a:spcAft>
+            </a:pPr>
+            <a:r>
+              <a:rPr sz="1350" b="1" lang="zh-CN">
+                <a:solidFill>
+                  <a:srgbClr val="FFFFFF"/>
+                </a:solidFill>
+                <a:latin typeface="Microsoft YaHei"/>
+                <a:ea typeface="Microsoft YaHei"/>
+              </a:rPr>
+              <a:t>02</a:t>
+            </a:r>
+          </a:p>
+        </p:txBody>
+      </p:sp>
+      <p:sp>
+        <p:nvSpPr>
+          <p:cNvPr id="14" name="关键观察与设计依据"/>
+          <p:cNvSpPr txBox="1"/>
+          <p:nvPr/>
+        </p:nvSpPr>
+        <p:spPr>
+          <a:xfrm>
+            <a:off x="1085850" y="2571750"/>
+            <a:ext cx="8515350" cy="342900"/>
           </a:xfrm>
           <a:prstGeom prst="rect">
             <a:avLst/>
@@ -3930,16 +4110,40 @@
               </a:spcAft>
             </a:pPr>
             <a:r>
-              <a:rPr sz="1350" b="0" lang="zh-CN">
-                <a:solidFill>
-                  <a:srgbClr val="1F2937"/>
+              <a:rPr sz="1800" b="1" lang="zh-CN">
+                <a:solidFill>
+                  <a:srgbClr val="245DA0"/>
                 </a:solidFill>
                 <a:latin typeface="Microsoft YaHei"/>
                 <a:ea typeface="Microsoft YaHei"/>
               </a:rPr>
-              <a:t>少调用、共享重叠读取；</a:t>
-            </a:r>
-          </a:p>
+              <a:t>关键观察与设计依据</a:t>
+            </a:r>
+          </a:p>
+        </p:txBody>
+      </p:sp>
+      <p:sp>
+        <p:nvSpPr>
+          <p:cNvPr id="15" name="合并的收益与代价"/>
+          <p:cNvSpPr txBox="1"/>
+          <p:nvPr/>
+        </p:nvSpPr>
+        <p:spPr>
+          <a:xfrm>
+            <a:off x="647700" y="2952750"/>
+            <a:ext cx="2857500" cy="257175"/>
+          </a:xfrm>
+          <a:prstGeom prst="rect">
+            <a:avLst/>
+          </a:prstGeom>
+          <a:noFill/>
+          <a:effectLst/>
+        </p:spPr>
+        <p:txBody>
+          <a:bodyPr wrap="square" lIns="0" rIns="0" tIns="0" bIns="0">
+            <a:spAutoFit/>
+          </a:bodyPr>
+          <a:lstStyle/>
           <a:p>
             <a:pPr algn="l">
               <a:lnSpc>
@@ -3950,72 +4154,28 @@
               </a:spcAft>
             </a:pPr>
             <a:r>
-              <a:rPr sz="1350" b="0" lang="zh-CN">
-                <a:solidFill>
-                  <a:srgbClr val="1F2937"/>
+              <a:rPr sz="1575" b="1" lang="zh-CN">
+                <a:solidFill>
+                  <a:srgbClr val="245DA0"/>
                 </a:solidFill>
                 <a:latin typeface="Microsoft YaHei"/>
                 <a:ea typeface="Microsoft YaHei"/>
               </a:rPr>
-              <a:t>也会改变并发与缓冲占用。</a:t>
-            </a:r>
-          </a:p>
-        </p:txBody>
-      </p:sp>
-      <p:sp>
-        <p:nvSpPr>
-          <p:cNvPr id="11" name="Rectangle 10"/>
-          <p:cNvSpPr/>
-          <p:nvPr/>
-        </p:nvSpPr>
-        <p:spPr>
-          <a:xfrm>
-            <a:off x="2800350" y="2190750"/>
-            <a:ext cx="2247900" cy="895350"/>
-          </a:xfrm>
-          <a:prstGeom prst="rect">
-            <a:avLst/>
-          </a:prstGeom>
-          <a:solidFill>
-            <a:srgbClr val="F5F7FA"/>
-          </a:solidFill>
-          <a:ln>
-            <a:noFill/>
-          </a:ln>
-          <a:effectLst/>
-        </p:spPr>
-        <p:style>
-          <a:lnRef idx="1">
-            <a:schemeClr val="accent1"/>
-          </a:lnRef>
-          <a:fillRef idx="3">
-            <a:schemeClr val="accent1"/>
-          </a:fillRef>
-          <a:effectRef idx="0">
-            <a:schemeClr val="accent1"/>
-          </a:effectRef>
-          <a:fontRef idx="minor">
-            <a:schemeClr val="lt1"/>
-          </a:fontRef>
-        </p:style>
-        <p:txBody>
-          <a:bodyPr rtlCol="0" anchor="ctr"/>
-          <a:lstStyle/>
-          <a:p>
-            <a:pPr algn="ctr"/>
-          </a:p>
-        </p:txBody>
-      </p:sp>
-      <p:sp>
-        <p:nvSpPr>
-          <p:cNvPr id="12" name="路径选择依赖分组"/>
+              <a:t>合并的收益与代价</a:t>
+            </a:r>
+          </a:p>
+        </p:txBody>
+      </p:sp>
+      <p:sp>
+        <p:nvSpPr>
+          <p:cNvPr id="16" name="少调用、共享重叠读取； 也改变并发与缓冲占用。"/>
           <p:cNvSpPr txBox="1"/>
           <p:nvPr/>
         </p:nvSpPr>
         <p:spPr>
           <a:xfrm>
-            <a:off x="2914650" y="2276475"/>
-            <a:ext cx="2019300" cy="266700"/>
+            <a:off x="647700" y="3257550"/>
+            <a:ext cx="2857500" cy="457200"/>
           </a:xfrm>
           <a:prstGeom prst="rect">
             <a:avLst/>
@@ -4038,40 +4198,16 @@
               </a:spcAft>
             </a:pPr>
             <a:r>
-              <a:rPr sz="1575" b="1" lang="zh-CN">
-                <a:solidFill>
-                  <a:srgbClr val="285EA8"/>
+              <a:rPr sz="1500" b="0" lang="zh-CN">
+                <a:solidFill>
+                  <a:srgbClr val="1F2937"/>
                 </a:solidFill>
                 <a:latin typeface="Microsoft YaHei"/>
                 <a:ea typeface="Microsoft YaHei"/>
               </a:rPr>
-              <a:t>路径选择依赖分组</a:t>
-            </a:r>
-          </a:p>
-        </p:txBody>
-      </p:sp>
-      <p:sp>
-        <p:nvSpPr>
-          <p:cNvPr id="13" name="同组可有多条合法路径； 调用、复制和池需求不同。"/>
-          <p:cNvSpPr txBox="1"/>
-          <p:nvPr/>
-        </p:nvSpPr>
-        <p:spPr>
-          <a:xfrm>
-            <a:off x="2914650" y="2590800"/>
-            <a:ext cx="2019300" cy="419100"/>
-          </a:xfrm>
-          <a:prstGeom prst="rect">
-            <a:avLst/>
-          </a:prstGeom>
-          <a:noFill/>
-          <a:effectLst/>
-        </p:spPr>
-        <p:txBody>
-          <a:bodyPr wrap="square" lIns="0" rIns="0" tIns="0" bIns="0">
-            <a:spAutoFit/>
-          </a:bodyPr>
-          <a:lstStyle/>
+              <a:t>少调用、共享重叠读取；</a:t>
+            </a:r>
+          </a:p>
           <a:p>
             <a:pPr algn="l">
               <a:lnSpc>
@@ -4082,16 +4218,40 @@
               </a:spcAft>
             </a:pPr>
             <a:r>
-              <a:rPr sz="1350" b="0" lang="zh-CN">
+              <a:rPr sz="1500" b="0" lang="zh-CN">
                 <a:solidFill>
                   <a:srgbClr val="1F2937"/>
                 </a:solidFill>
                 <a:latin typeface="Microsoft YaHei"/>
                 <a:ea typeface="Microsoft YaHei"/>
               </a:rPr>
-              <a:t>同组可有多条合法路径；</a:t>
-            </a:r>
-          </a:p>
+              <a:t>也改变并发与缓冲占用。</a:t>
+            </a:r>
+          </a:p>
+        </p:txBody>
+      </p:sp>
+      <p:sp>
+        <p:nvSpPr>
+          <p:cNvPr id="17" name="路径与分组相互影响"/>
+          <p:cNvSpPr txBox="1"/>
+          <p:nvPr/>
+        </p:nvSpPr>
+        <p:spPr>
+          <a:xfrm>
+            <a:off x="3695700" y="2952750"/>
+            <a:ext cx="2857500" cy="257175"/>
+          </a:xfrm>
+          <a:prstGeom prst="rect">
+            <a:avLst/>
+          </a:prstGeom>
+          <a:noFill/>
+          <a:effectLst/>
+        </p:spPr>
+        <p:txBody>
+          <a:bodyPr wrap="square" lIns="0" rIns="0" tIns="0" bIns="0">
+            <a:spAutoFit/>
+          </a:bodyPr>
+          <a:lstStyle/>
           <a:p>
             <a:pPr algn="l">
               <a:lnSpc>
@@ -4102,72 +4262,28 @@
               </a:spcAft>
             </a:pPr>
             <a:r>
-              <a:rPr sz="1350" b="0" lang="zh-CN">
-                <a:solidFill>
-                  <a:srgbClr val="1F2937"/>
+              <a:rPr sz="1575" b="1" lang="zh-CN">
+                <a:solidFill>
+                  <a:srgbClr val="245DA0"/>
                 </a:solidFill>
                 <a:latin typeface="Microsoft YaHei"/>
                 <a:ea typeface="Microsoft YaHei"/>
               </a:rPr>
-              <a:t>调用、复制和池需求不同。</a:t>
-            </a:r>
-          </a:p>
-        </p:txBody>
-      </p:sp>
-      <p:sp>
-        <p:nvSpPr>
-          <p:cNvPr id="14" name="Rectangle 13"/>
-          <p:cNvSpPr/>
-          <p:nvPr/>
-        </p:nvSpPr>
-        <p:spPr>
-          <a:xfrm>
-            <a:off x="5219700" y="2190750"/>
-            <a:ext cx="2247900" cy="895350"/>
-          </a:xfrm>
-          <a:prstGeom prst="rect">
-            <a:avLst/>
-          </a:prstGeom>
-          <a:solidFill>
-            <a:srgbClr val="EEF6F3"/>
-          </a:solidFill>
-          <a:ln>
-            <a:noFill/>
-          </a:ln>
-          <a:effectLst/>
-        </p:spPr>
-        <p:style>
-          <a:lnRef idx="1">
-            <a:schemeClr val="accent1"/>
-          </a:lnRef>
-          <a:fillRef idx="3">
-            <a:schemeClr val="accent1"/>
-          </a:fillRef>
-          <a:effectRef idx="0">
-            <a:schemeClr val="accent1"/>
-          </a:effectRef>
-          <a:fontRef idx="minor">
-            <a:schemeClr val="lt1"/>
-          </a:fontRef>
-        </p:style>
-        <p:txBody>
-          <a:bodyPr rtlCol="0" anchor="ctr"/>
-          <a:lstStyle/>
-          <a:p>
-            <a:pPr algn="ctr"/>
-          </a:p>
-        </p:txBody>
-      </p:sp>
-      <p:sp>
-        <p:nvSpPr>
-          <p:cNvPr id="15" name="缓存需要收回投入"/>
+              <a:t>路径与分组相互影响</a:t>
+            </a:r>
+          </a:p>
+        </p:txBody>
+      </p:sp>
+      <p:sp>
+        <p:nvSpPr>
+          <p:cNvPr id="18" name="同组可有多条合法路径； 调用、复制和池需求不同。"/>
           <p:cNvSpPr txBox="1"/>
           <p:nvPr/>
         </p:nvSpPr>
         <p:spPr>
           <a:xfrm>
-            <a:off x="5334000" y="2276475"/>
-            <a:ext cx="2019300" cy="266700"/>
+            <a:off x="3695700" y="3257550"/>
+            <a:ext cx="2857500" cy="457200"/>
           </a:xfrm>
           <a:prstGeom prst="rect">
             <a:avLst/>
@@ -4190,40 +4306,16 @@
               </a:spcAft>
             </a:pPr>
             <a:r>
-              <a:rPr sz="1575" b="1" lang="zh-CN">
-                <a:solidFill>
-                  <a:srgbClr val="24756D"/>
+              <a:rPr sz="1500" b="0" lang="zh-CN">
+                <a:solidFill>
+                  <a:srgbClr val="1F2937"/>
                 </a:solidFill>
                 <a:latin typeface="Microsoft YaHei"/>
                 <a:ea typeface="Microsoft YaHei"/>
               </a:rPr>
-              <a:t>缓存需要收回投入</a:t>
-            </a:r>
-          </a:p>
-        </p:txBody>
-      </p:sp>
-      <p:sp>
-        <p:nvSpPr>
-          <p:cNvPr id="16" name="提升和命中均有搬运成本； 投入依靠后续复用收回。"/>
-          <p:cNvSpPr txBox="1"/>
-          <p:nvPr/>
-        </p:nvSpPr>
-        <p:spPr>
-          <a:xfrm>
-            <a:off x="5334000" y="2590800"/>
-            <a:ext cx="2019300" cy="419100"/>
-          </a:xfrm>
-          <a:prstGeom prst="rect">
-            <a:avLst/>
-          </a:prstGeom>
-          <a:noFill/>
-          <a:effectLst/>
-        </p:spPr>
-        <p:txBody>
-          <a:bodyPr wrap="square" lIns="0" rIns="0" tIns="0" bIns="0">
-            <a:spAutoFit/>
-          </a:bodyPr>
-          <a:lstStyle/>
+              <a:t>同组可有多条合法路径；</a:t>
+            </a:r>
+          </a:p>
           <a:p>
             <a:pPr algn="l">
               <a:lnSpc>
@@ -4234,16 +4326,40 @@
               </a:spcAft>
             </a:pPr>
             <a:r>
-              <a:rPr sz="1350" b="0" lang="zh-CN">
+              <a:rPr sz="1500" b="0" lang="zh-CN">
                 <a:solidFill>
                   <a:srgbClr val="1F2937"/>
                 </a:solidFill>
                 <a:latin typeface="Microsoft YaHei"/>
                 <a:ea typeface="Microsoft YaHei"/>
               </a:rPr>
-              <a:t>提升和命中均有搬运成本；</a:t>
-            </a:r>
-          </a:p>
+              <a:t>调用、复制和池需求不同。</a:t>
+            </a:r>
+          </a:p>
+        </p:txBody>
+      </p:sp>
+      <p:sp>
+        <p:nvSpPr>
+          <p:cNvPr id="19" name="缓存需要收回投入"/>
+          <p:cNvSpPr txBox="1"/>
+          <p:nvPr/>
+        </p:nvSpPr>
+        <p:spPr>
+          <a:xfrm>
+            <a:off x="6743700" y="2952750"/>
+            <a:ext cx="2857500" cy="257175"/>
+          </a:xfrm>
+          <a:prstGeom prst="rect">
+            <a:avLst/>
+          </a:prstGeom>
+          <a:noFill/>
+          <a:effectLst/>
+        </p:spPr>
+        <p:txBody>
+          <a:bodyPr wrap="square" lIns="0" rIns="0" tIns="0" bIns="0">
+            <a:spAutoFit/>
+          </a:bodyPr>
+          <a:lstStyle/>
           <a:p>
             <a:pPr algn="l">
               <a:lnSpc>
@@ -4254,28 +4370,28 @@
               </a:spcAft>
             </a:pPr>
             <a:r>
-              <a:rPr sz="1350" b="0" lang="zh-CN">
-                <a:solidFill>
-                  <a:srgbClr val="1F2937"/>
+              <a:rPr sz="1575" b="1" lang="zh-CN">
+                <a:solidFill>
+                  <a:srgbClr val="176F68"/>
                 </a:solidFill>
                 <a:latin typeface="Microsoft YaHei"/>
                 <a:ea typeface="Microsoft YaHei"/>
               </a:rPr>
-              <a:t>投入依靠后续复用收回。</a:t>
-            </a:r>
-          </a:p>
-        </p:txBody>
-      </p:sp>
-      <p:sp>
-        <p:nvSpPr>
-          <p:cNvPr id="17" name="前台：同一转移联合选择分组边界与路径"/>
+              <a:t>缓存需要收回投入</a:t>
+            </a:r>
+          </a:p>
+        </p:txBody>
+      </p:sp>
+      <p:sp>
+        <p:nvSpPr>
+          <p:cNvPr id="20" name="提升和命中均有搬运成本； 投入依靠后续复用收回。"/>
           <p:cNvSpPr txBox="1"/>
           <p:nvPr/>
         </p:nvSpPr>
         <p:spPr>
           <a:xfrm>
-            <a:off x="381000" y="3190875"/>
-            <a:ext cx="7086600" cy="295275"/>
+            <a:off x="6743700" y="3257550"/>
+            <a:ext cx="2857500" cy="457200"/>
           </a:xfrm>
           <a:prstGeom prst="rect">
             <a:avLst/>
@@ -4298,84 +4414,16 @@
               </a:spcAft>
             </a:pPr>
             <a:r>
-              <a:rPr sz="1800" b="1" lang="zh-CN">
-                <a:solidFill>
-                  <a:srgbClr val="285EA8"/>
+              <a:rPr sz="1500" b="0" lang="zh-CN">
+                <a:solidFill>
+                  <a:srgbClr val="1F2937"/>
                 </a:solidFill>
                 <a:latin typeface="Microsoft YaHei"/>
                 <a:ea typeface="Microsoft YaHei"/>
               </a:rPr>
-              <a:t>前台：同一转移联合选择分组边界与路径</a:t>
-            </a:r>
-          </a:p>
-        </p:txBody>
-      </p:sp>
-      <p:sp>
-        <p:nvSpPr>
-          <p:cNvPr id="18" name="Rectangle 17"/>
-          <p:cNvSpPr/>
-          <p:nvPr/>
-        </p:nvSpPr>
-        <p:spPr>
-          <a:xfrm>
-            <a:off x="381000" y="3562350"/>
-            <a:ext cx="1657350" cy="523874"/>
-          </a:xfrm>
-          <a:prstGeom prst="rect">
-            <a:avLst/>
-          </a:prstGeom>
-          <a:solidFill>
-            <a:srgbClr val="EDF3FA"/>
-          </a:solidFill>
-          <a:ln>
-            <a:noFill/>
-          </a:ln>
-          <a:effectLst/>
-        </p:spPr>
-        <p:style>
-          <a:lnRef idx="1">
-            <a:schemeClr val="accent1"/>
-          </a:lnRef>
-          <a:fillRef idx="3">
-            <a:schemeClr val="accent1"/>
-          </a:fillRef>
-          <a:effectRef idx="0">
-            <a:schemeClr val="accent1"/>
-          </a:effectRef>
-          <a:fontRef idx="minor">
-            <a:schemeClr val="lt1"/>
-          </a:fontRef>
-        </p:style>
-        <p:txBody>
-          <a:bodyPr rtlCol="0" anchor="ctr"/>
-          <a:lstStyle/>
-          <a:p>
-            <a:pPr algn="ctr"/>
-          </a:p>
-        </p:txBody>
-      </p:sp>
-      <p:sp>
-        <p:nvSpPr>
-          <p:cNvPr id="19" name="索引与合法切块"/>
-          <p:cNvSpPr txBox="1"/>
-          <p:nvPr/>
-        </p:nvSpPr>
-        <p:spPr>
-          <a:xfrm>
-            <a:off x="466724" y="3638550"/>
-            <a:ext cx="1485900" cy="219075"/>
-          </a:xfrm>
-          <a:prstGeom prst="rect">
-            <a:avLst/>
-          </a:prstGeom>
-          <a:noFill/>
-          <a:effectLst/>
-        </p:spPr>
-        <p:txBody>
-          <a:bodyPr wrap="square" lIns="0" rIns="0" tIns="0" bIns="0">
-            <a:spAutoFit/>
-          </a:bodyPr>
-          <a:lstStyle/>
+              <a:t>提升和命中均有搬运成本；</a:t>
+            </a:r>
+          </a:p>
           <a:p>
             <a:pPr algn="l">
               <a:lnSpc>
@@ -4386,28 +4434,234 @@
               </a:spcAft>
             </a:pPr>
             <a:r>
-              <a:rPr sz="1350" b="1" lang="zh-CN">
-                <a:solidFill>
-                  <a:srgbClr val="285EA8"/>
+              <a:rPr sz="1500" b="0" lang="zh-CN">
+                <a:solidFill>
+                  <a:srgbClr val="1F2937"/>
                 </a:solidFill>
                 <a:latin typeface="Microsoft YaHei"/>
                 <a:ea typeface="Microsoft YaHei"/>
               </a:rPr>
-              <a:t>索引与合法切块</a:t>
-            </a:r>
-          </a:p>
-        </p:txBody>
-      </p:sp>
-      <p:sp>
-        <p:nvSpPr>
-          <p:cNvPr id="20" name="IovIndex / Piece"/>
+              <a:t>投入依靠后续复用收回。</a:t>
+            </a:r>
+          </a:p>
+        </p:txBody>
+      </p:sp>
+      <p:cxnSp>
+        <p:nvCxnSpPr>
+          <p:cNvPr id="21" name="Connector 20"/>
+          <p:cNvCxnSpPr/>
+          <p:nvPr/>
+        </p:nvCxnSpPr>
+        <p:spPr>
+          <a:xfrm>
+            <a:off x="3505200" y="3000375"/>
+            <a:ext cx="0" cy="657225"/>
+          </a:xfrm>
+          <a:prstGeom prst="line">
+            <a:avLst/>
+          </a:prstGeom>
+          <a:ln w="12700">
+            <a:solidFill>
+              <a:srgbClr val="DCE2E9"/>
+            </a:solidFill>
+          </a:ln>
+          <a:effectLst/>
+        </p:spPr>
+        <p:style>
+          <a:lnRef idx="2">
+            <a:schemeClr val="accent1"/>
+          </a:lnRef>
+          <a:fillRef idx="0">
+            <a:schemeClr val="accent1"/>
+          </a:fillRef>
+          <a:effectRef idx="0">
+            <a:schemeClr val="accent1"/>
+          </a:effectRef>
+          <a:fontRef idx="minor">
+            <a:schemeClr val="tx1"/>
+          </a:fontRef>
+        </p:style>
+      </p:cxnSp>
+      <p:cxnSp>
+        <p:nvCxnSpPr>
+          <p:cNvPr id="22" name="Connector 21"/>
+          <p:cNvCxnSpPr/>
+          <p:nvPr/>
+        </p:nvCxnSpPr>
+        <p:spPr>
+          <a:xfrm>
+            <a:off x="6553200" y="3000375"/>
+            <a:ext cx="0" cy="657225"/>
+          </a:xfrm>
+          <a:prstGeom prst="line">
+            <a:avLst/>
+          </a:prstGeom>
+          <a:ln w="12700">
+            <a:solidFill>
+              <a:srgbClr val="DCE2E9"/>
+            </a:solidFill>
+          </a:ln>
+          <a:effectLst/>
+        </p:spPr>
+        <p:style>
+          <a:lnRef idx="2">
+            <a:schemeClr val="accent1"/>
+          </a:lnRef>
+          <a:fillRef idx="0">
+            <a:schemeClr val="accent1"/>
+          </a:fillRef>
+          <a:effectRef idx="0">
+            <a:schemeClr val="accent1"/>
+          </a:effectRef>
+          <a:fontRef idx="minor">
+            <a:schemeClr val="tx1"/>
+          </a:fontRef>
+        </p:style>
+      </p:cxnSp>
+      <p:sp>
+        <p:nvSpPr>
+          <p:cNvPr id="23" name="Rectangle 22"/>
+          <p:cNvSpPr/>
+          <p:nvPr/>
+        </p:nvSpPr>
+        <p:spPr>
+          <a:xfrm>
+            <a:off x="457200" y="4019549"/>
+            <a:ext cx="9334500" cy="3219450"/>
+          </a:xfrm>
+          <a:prstGeom prst="rect">
+            <a:avLst/>
+          </a:prstGeom>
+          <a:solidFill>
+            <a:srgbClr val="FFFFFF"/>
+          </a:solidFill>
+          <a:ln w="8890">
+            <a:solidFill>
+              <a:srgbClr val="DDE5EE"/>
+            </a:solidFill>
+          </a:ln>
+          <a:effectLst/>
+        </p:spPr>
+        <p:style>
+          <a:lnRef idx="1">
+            <a:schemeClr val="accent1"/>
+          </a:lnRef>
+          <a:fillRef idx="3">
+            <a:schemeClr val="accent1"/>
+          </a:fillRef>
+          <a:effectRef idx="0">
+            <a:schemeClr val="accent1"/>
+          </a:effectRef>
+          <a:fontRef idx="minor">
+            <a:schemeClr val="lt1"/>
+          </a:fontRef>
+        </p:style>
+        <p:txBody>
+          <a:bodyPr rtlCol="0" anchor="ctr"/>
+          <a:lstStyle/>
+          <a:p>
+            <a:pPr algn="ctr"/>
+          </a:p>
+        </p:txBody>
+      </p:sp>
+      <p:sp>
+        <p:nvSpPr>
+          <p:cNvPr id="24" name="Rectangle 23"/>
+          <p:cNvSpPr/>
+          <p:nvPr/>
+        </p:nvSpPr>
+        <p:spPr>
+          <a:xfrm>
+            <a:off x="647700" y="4210050"/>
+            <a:ext cx="323850" cy="266700"/>
+          </a:xfrm>
+          <a:prstGeom prst="rect">
+            <a:avLst/>
+          </a:prstGeom>
+          <a:solidFill>
+            <a:srgbClr val="245DA0"/>
+          </a:solidFill>
+          <a:ln>
+            <a:noFill/>
+          </a:ln>
+          <a:effectLst/>
+        </p:spPr>
+        <p:style>
+          <a:lnRef idx="1">
+            <a:schemeClr val="accent1"/>
+          </a:lnRef>
+          <a:fillRef idx="3">
+            <a:schemeClr val="accent1"/>
+          </a:fillRef>
+          <a:effectRef idx="0">
+            <a:schemeClr val="accent1"/>
+          </a:effectRef>
+          <a:fontRef idx="minor">
+            <a:schemeClr val="lt1"/>
+          </a:fontRef>
+        </p:style>
+        <p:txBody>
+          <a:bodyPr rtlCol="0" anchor="ctr"/>
+          <a:lstStyle/>
+          <a:p>
+            <a:pPr algn="ctr"/>
+          </a:p>
+        </p:txBody>
+      </p:sp>
+      <p:sp>
+        <p:nvSpPr>
+          <p:cNvPr id="25" name="03"/>
           <p:cNvSpPr txBox="1"/>
           <p:nvPr/>
         </p:nvSpPr>
         <p:spPr>
           <a:xfrm>
-            <a:off x="466724" y="3895725"/>
-            <a:ext cx="1485900" cy="200025"/>
+            <a:off x="647700" y="4238625"/>
+            <a:ext cx="323850" cy="228600"/>
+          </a:xfrm>
+          <a:prstGeom prst="rect">
+            <a:avLst/>
+          </a:prstGeom>
+          <a:noFill/>
+          <a:effectLst/>
+        </p:spPr>
+        <p:txBody>
+          <a:bodyPr wrap="square" lIns="0" rIns="0" tIns="0" bIns="0">
+            <a:spAutoFit/>
+          </a:bodyPr>
+          <a:lstStyle/>
+          <a:p>
+            <a:pPr algn="ctr">
+              <a:lnSpc>
+                <a:spcPct val="112000"/>
+              </a:lnSpc>
+              <a:spcAft>
+                <a:spcPts val="300"/>
+              </a:spcAft>
+            </a:pPr>
+            <a:r>
+              <a:rPr sz="1350" b="1" lang="zh-CN">
+                <a:solidFill>
+                  <a:srgbClr val="FFFFFF"/>
+                </a:solidFill>
+                <a:latin typeface="Microsoft YaHei"/>
+                <a:ea typeface="Microsoft YaHei"/>
+              </a:rPr>
+              <a:t>03</a:t>
+            </a:r>
+          </a:p>
+        </p:txBody>
+      </p:sp>
+      <p:sp>
+        <p:nvSpPr>
+          <p:cNvPr id="26" name="前台：联合选择分组边界与路径"/>
+          <p:cNvSpPr txBox="1"/>
+          <p:nvPr/>
+        </p:nvSpPr>
+        <p:spPr>
+          <a:xfrm>
+            <a:off x="1085850" y="4190999"/>
+            <a:ext cx="8515350" cy="342900"/>
           </a:xfrm>
           <a:prstGeom prst="rect">
             <a:avLst/>
@@ -4430,71 +4684,78 @@
               </a:spcAft>
             </a:pPr>
             <a:r>
-              <a:rPr sz="1200" b="0" lang="zh-CN">
-                <a:solidFill>
-                  <a:srgbClr val="1F2937"/>
+              <a:rPr sz="1800" b="1" lang="zh-CN">
+                <a:solidFill>
+                  <a:srgbClr val="245DA0"/>
                 </a:solidFill>
                 <a:latin typeface="Microsoft YaHei"/>
                 <a:ea typeface="Microsoft YaHei"/>
               </a:rPr>
-              <a:t>IovIndex / Piece</a:t>
-            </a:r>
-          </a:p>
-        </p:txBody>
-      </p:sp>
-      <p:cxnSp>
-        <p:nvCxnSpPr>
-          <p:cNvPr id="21" name="Connector 20"/>
-          <p:cNvCxnSpPr/>
-          <p:nvPr/>
-        </p:nvCxnSpPr>
-        <p:spPr>
-          <a:xfrm>
-            <a:off x="2047875" y="3819524"/>
-            <a:ext cx="123825" cy="0"/>
-          </a:xfrm>
-          <a:prstGeom prst="line">
-            <a:avLst/>
-          </a:prstGeom>
-          <a:ln w="16510">
-            <a:solidFill>
-              <a:srgbClr val="285EA8"/>
-            </a:solidFill>
-            <a:tailEnd type="triangle"/>
-          </a:ln>
-          <a:effectLst/>
-        </p:spPr>
-        <p:style>
-          <a:lnRef idx="2">
-            <a:schemeClr val="accent1"/>
-          </a:lnRef>
-          <a:fillRef idx="0">
-            <a:schemeClr val="accent1"/>
-          </a:fillRef>
-          <a:effectRef idx="0">
-            <a:schemeClr val="accent1"/>
-          </a:effectRef>
-          <a:fontRef idx="minor">
-            <a:schemeClr val="tx1"/>
-          </a:fontRef>
-        </p:style>
-      </p:cxnSp>
-      <p:sp>
-        <p:nvSpPr>
-          <p:cNvPr id="22" name="Rectangle 21"/>
+              <a:t>前台：联合选择分组边界与路径</a:t>
+            </a:r>
+          </a:p>
+        </p:txBody>
+      </p:sp>
+      <p:sp>
+        <p:nvSpPr>
+          <p:cNvPr id="27" name="on_submit()"/>
+          <p:cNvSpPr txBox="1"/>
+          <p:nvPr/>
+        </p:nvSpPr>
+        <p:spPr>
+          <a:xfrm>
+            <a:off x="7924799" y="4257675"/>
+            <a:ext cx="1676400" cy="228600"/>
+          </a:xfrm>
+          <a:prstGeom prst="rect">
+            <a:avLst/>
+          </a:prstGeom>
+          <a:noFill/>
+          <a:effectLst/>
+        </p:spPr>
+        <p:txBody>
+          <a:bodyPr wrap="square" lIns="0" rIns="0" tIns="0" bIns="0">
+            <a:spAutoFit/>
+          </a:bodyPr>
+          <a:lstStyle/>
+          <a:p>
+            <a:pPr algn="r">
+              <a:lnSpc>
+                <a:spcPct val="112000"/>
+              </a:lnSpc>
+              <a:spcAft>
+                <a:spcPts val="300"/>
+              </a:spcAft>
+            </a:pPr>
+            <a:r>
+              <a:rPr sz="1425" b="0" lang="zh-CN">
+                <a:solidFill>
+                  <a:srgbClr val="627286"/>
+                </a:solidFill>
+                <a:latin typeface="Microsoft YaHei"/>
+                <a:ea typeface="Microsoft YaHei"/>
+              </a:rPr>
+              <a:t>on_submit()</a:t>
+            </a:r>
+          </a:p>
+        </p:txBody>
+      </p:sp>
+      <p:sp>
+        <p:nvSpPr>
+          <p:cNvPr id="28" name="Rectangle 27"/>
           <p:cNvSpPr/>
           <p:nvPr/>
         </p:nvSpPr>
         <p:spPr>
           <a:xfrm>
-            <a:off x="2190750" y="3562350"/>
-            <a:ext cx="1657350" cy="523874"/>
+            <a:off x="647700" y="4619625"/>
+            <a:ext cx="2076450" cy="609600"/>
           </a:xfrm>
           <a:prstGeom prst="rect">
             <a:avLst/>
           </a:prstGeom>
           <a:solidFill>
-            <a:srgbClr val="EDF3FA"/>
+            <a:srgbClr val="EDF3FB"/>
           </a:solidFill>
           <a:ln>
             <a:noFill/>
@@ -4525,14 +4786,14 @@
       </p:sp>
       <p:sp>
         <p:nvSpPr>
-          <p:cNvPr id="23" name="按卡、SSD 排序"/>
+          <p:cNvPr id="29" name="索引与合法切块"/>
           <p:cNvSpPr txBox="1"/>
           <p:nvPr/>
         </p:nvSpPr>
         <p:spPr>
           <a:xfrm>
-            <a:off x="2276475" y="3638550"/>
-            <a:ext cx="1485900" cy="219075"/>
+            <a:off x="752475" y="4695825"/>
+            <a:ext cx="1866899" cy="238125"/>
           </a:xfrm>
           <a:prstGeom prst="rect">
             <a:avLst/>
@@ -4555,28 +4816,28 @@
               </a:spcAft>
             </a:pPr>
             <a:r>
-              <a:rPr sz="1350" b="1" lang="zh-CN">
-                <a:solidFill>
-                  <a:srgbClr val="285EA8"/>
+              <a:rPr sz="1500" b="1" lang="zh-CN">
+                <a:solidFill>
+                  <a:srgbClr val="245DA0"/>
                 </a:solidFill>
                 <a:latin typeface="Microsoft YaHei"/>
                 <a:ea typeface="Microsoft YaHei"/>
               </a:rPr>
-              <a:t>按卡、SSD 排序</a:t>
-            </a:r>
-          </a:p>
-        </p:txBody>
-      </p:sp>
-      <p:sp>
-        <p:nvSpPr>
-          <p:cNvPr id="24" name="枚举同卡相连候选"/>
+              <a:t>索引与合法切块</a:t>
+            </a:r>
+          </a:p>
+        </p:txBody>
+      </p:sp>
+      <p:sp>
+        <p:nvSpPr>
+          <p:cNvPr id="30" name="IovIndex / Piece"/>
           <p:cNvSpPr txBox="1"/>
           <p:nvPr/>
         </p:nvSpPr>
         <p:spPr>
           <a:xfrm>
-            <a:off x="2276475" y="3895725"/>
-            <a:ext cx="1485900" cy="200025"/>
+            <a:off x="752475" y="4972050"/>
+            <a:ext cx="1866899" cy="200025"/>
           </a:xfrm>
           <a:prstGeom prst="rect">
             <a:avLst/>
@@ -4599,35 +4860,35 @@
               </a:spcAft>
             </a:pPr>
             <a:r>
-              <a:rPr sz="1200" b="0" lang="zh-CN">
+              <a:rPr sz="1350" b="0" lang="zh-CN">
                 <a:solidFill>
                   <a:srgbClr val="1F2937"/>
                 </a:solidFill>
                 <a:latin typeface="Microsoft YaHei"/>
                 <a:ea typeface="Microsoft YaHei"/>
               </a:rPr>
-              <a:t>枚举同卡相连候选</a:t>
+              <a:t>IovIndex / Piece</a:t>
             </a:r>
           </a:p>
         </p:txBody>
       </p:sp>
       <p:cxnSp>
         <p:nvCxnSpPr>
-          <p:cNvPr id="25" name="Connector 24"/>
+          <p:cNvPr id="31" name="Connector 30"/>
           <p:cNvCxnSpPr/>
           <p:nvPr/>
         </p:nvCxnSpPr>
         <p:spPr>
           <a:xfrm>
-            <a:off x="3857625" y="3819524"/>
-            <a:ext cx="123825" cy="0"/>
+            <a:off x="2752725" y="4886325"/>
+            <a:ext cx="152400" cy="0"/>
           </a:xfrm>
           <a:prstGeom prst="line">
             <a:avLst/>
           </a:prstGeom>
           <a:ln w="16510">
             <a:solidFill>
-              <a:srgbClr val="285EA8"/>
+              <a:srgbClr val="245DA0"/>
             </a:solidFill>
             <a:tailEnd type="triangle"/>
           </a:ln>
@@ -4650,20 +4911,20 @@
       </p:cxnSp>
       <p:sp>
         <p:nvSpPr>
-          <p:cNvPr id="26" name="Rectangle 25"/>
+          <p:cNvPr id="32" name="Rectangle 31"/>
           <p:cNvSpPr/>
           <p:nvPr/>
         </p:nvSpPr>
         <p:spPr>
           <a:xfrm>
-            <a:off x="4000500" y="3562350"/>
-            <a:ext cx="1657350" cy="523874"/>
+            <a:off x="2933700" y="4619625"/>
+            <a:ext cx="2076450" cy="609600"/>
           </a:xfrm>
           <a:prstGeom prst="rect">
             <a:avLst/>
           </a:prstGeom>
           <a:solidFill>
-            <a:srgbClr val="EDF3FA"/>
+            <a:srgbClr val="EDF3FB"/>
           </a:solidFill>
           <a:ln>
             <a:noFill/>
@@ -4694,14 +4955,14 @@
       </p:sp>
       <p:sp>
         <p:nvSpPr>
-          <p:cNvPr id="27" name="联合 DP 估价"/>
+          <p:cNvPr id="33" name="按卡与地址排序"/>
           <p:cNvSpPr txBox="1"/>
           <p:nvPr/>
         </p:nvSpPr>
         <p:spPr>
           <a:xfrm>
-            <a:off x="4086225" y="3638550"/>
-            <a:ext cx="1485900" cy="219075"/>
+            <a:off x="3038475" y="4695825"/>
+            <a:ext cx="1866899" cy="238125"/>
           </a:xfrm>
           <a:prstGeom prst="rect">
             <a:avLst/>
@@ -4724,28 +4985,28 @@
               </a:spcAft>
             </a:pPr>
             <a:r>
-              <a:rPr sz="1350" b="1" lang="zh-CN">
-                <a:solidFill>
-                  <a:srgbClr val="285EA8"/>
+              <a:rPr sz="1500" b="1" lang="zh-CN">
+                <a:solidFill>
+                  <a:srgbClr val="245DA0"/>
                 </a:solidFill>
                 <a:latin typeface="Microsoft YaHei"/>
                 <a:ea typeface="Microsoft YaHei"/>
               </a:rPr>
-              <a:t>联合 DP 估价</a:t>
-            </a:r>
-          </a:p>
-        </p:txBody>
-      </p:sp>
-      <p:sp>
-        <p:nvSpPr>
-          <p:cNvPr id="28" name="分组边界 + 路径"/>
+              <a:t>按卡与地址排序</a:t>
+            </a:r>
+          </a:p>
+        </p:txBody>
+      </p:sp>
+      <p:sp>
+        <p:nvSpPr>
+          <p:cNvPr id="34" name="枚举同卡相连候选"/>
           <p:cNvSpPr txBox="1"/>
           <p:nvPr/>
         </p:nvSpPr>
         <p:spPr>
           <a:xfrm>
-            <a:off x="4086225" y="3895725"/>
-            <a:ext cx="1485900" cy="200025"/>
+            <a:off x="3038475" y="4972050"/>
+            <a:ext cx="1866899" cy="200025"/>
           </a:xfrm>
           <a:prstGeom prst="rect">
             <a:avLst/>
@@ -4768,35 +5029,35 @@
               </a:spcAft>
             </a:pPr>
             <a:r>
-              <a:rPr sz="1200" b="0" lang="zh-CN">
+              <a:rPr sz="1350" b="0" lang="zh-CN">
                 <a:solidFill>
                   <a:srgbClr val="1F2937"/>
                 </a:solidFill>
                 <a:latin typeface="Microsoft YaHei"/>
                 <a:ea typeface="Microsoft YaHei"/>
               </a:rPr>
-              <a:t>分组边界 + 路径</a:t>
+              <a:t>枚举同卡相连候选</a:t>
             </a:r>
           </a:p>
         </p:txBody>
       </p:sp>
       <p:cxnSp>
         <p:nvCxnSpPr>
-          <p:cNvPr id="29" name="Connector 28"/>
+          <p:cNvPr id="35" name="Connector 34"/>
           <p:cNvCxnSpPr/>
           <p:nvPr/>
         </p:nvCxnSpPr>
         <p:spPr>
           <a:xfrm>
-            <a:off x="5667375" y="3819524"/>
-            <a:ext cx="123825" cy="0"/>
+            <a:off x="5038725" y="4886325"/>
+            <a:ext cx="152400" cy="0"/>
           </a:xfrm>
           <a:prstGeom prst="line">
             <a:avLst/>
           </a:prstGeom>
           <a:ln w="16510">
             <a:solidFill>
-              <a:srgbClr val="285EA8"/>
+              <a:srgbClr val="245DA0"/>
             </a:solidFill>
             <a:tailEnd type="triangle"/>
           </a:ln>
@@ -4819,20 +5080,20 @@
       </p:cxnSp>
       <p:sp>
         <p:nvSpPr>
-          <p:cNvPr id="30" name="Rectangle 29"/>
+          <p:cNvPr id="36" name="Rectangle 35"/>
           <p:cNvSpPr/>
           <p:nvPr/>
         </p:nvSpPr>
         <p:spPr>
           <a:xfrm>
-            <a:off x="5810250" y="3562350"/>
-            <a:ext cx="1657350" cy="523874"/>
+            <a:off x="5219700" y="4619625"/>
+            <a:ext cx="2076450" cy="609600"/>
           </a:xfrm>
           <a:prstGeom prst="rect">
             <a:avLst/>
           </a:prstGeom>
           <a:solidFill>
-            <a:srgbClr val="EDF3FA"/>
+            <a:srgbClr val="EDF3FB"/>
           </a:solidFill>
           <a:ln>
             <a:noFill/>
@@ -4863,14 +5124,14 @@
       </p:sp>
       <p:sp>
         <p:nvSpPr>
-          <p:cNvPr id="31" name="回溯生成最终计划"/>
+          <p:cNvPr id="37" name="分组与路径估价"/>
           <p:cNvSpPr txBox="1"/>
           <p:nvPr/>
         </p:nvSpPr>
         <p:spPr>
           <a:xfrm>
-            <a:off x="5895975" y="3638550"/>
-            <a:ext cx="1485900" cy="219075"/>
+            <a:off x="5324475" y="4695825"/>
+            <a:ext cx="1866899" cy="238125"/>
           </a:xfrm>
           <a:prstGeom prst="rect">
             <a:avLst/>
@@ -4893,28 +5154,28 @@
               </a:spcAft>
             </a:pPr>
             <a:r>
-              <a:rPr sz="1350" b="1" lang="zh-CN">
-                <a:solidFill>
-                  <a:srgbClr val="285EA8"/>
+              <a:rPr sz="1500" b="1" lang="zh-CN">
+                <a:solidFill>
+                  <a:srgbClr val="245DA0"/>
                 </a:solidFill>
                 <a:latin typeface="Microsoft YaHei"/>
                 <a:ea typeface="Microsoft YaHei"/>
               </a:rPr>
-              <a:t>回溯生成最终计划</a:t>
-            </a:r>
-          </a:p>
-        </p:txBody>
-      </p:sp>
-      <p:sp>
-        <p:nvSpPr>
-          <p:cNvPr id="32" name="operation → Work"/>
+              <a:t>分组与路径估价</a:t>
+            </a:r>
+          </a:p>
+        </p:txBody>
+      </p:sp>
+      <p:sp>
+        <p:nvSpPr>
+          <p:cNvPr id="38" name="比较合法搬运路径"/>
           <p:cNvSpPr txBox="1"/>
           <p:nvPr/>
         </p:nvSpPr>
         <p:spPr>
           <a:xfrm>
-            <a:off x="5895975" y="3895725"/>
-            <a:ext cx="1485900" cy="200025"/>
+            <a:off x="5324475" y="4972050"/>
+            <a:ext cx="1866899" cy="200025"/>
           </a:xfrm>
           <a:prstGeom prst="rect">
             <a:avLst/>
@@ -4937,28 +5198,109 @@
               </a:spcAft>
             </a:pPr>
             <a:r>
-              <a:rPr sz="1200" b="0" lang="zh-CN">
+              <a:rPr sz="1350" b="0" lang="zh-CN">
                 <a:solidFill>
                   <a:srgbClr val="1F2937"/>
                 </a:solidFill>
                 <a:latin typeface="Microsoft YaHei"/>
                 <a:ea typeface="Microsoft YaHei"/>
               </a:rPr>
-              <a:t>operation → Work</a:t>
-            </a:r>
-          </a:p>
-        </p:txBody>
-      </p:sp>
-      <p:sp>
-        <p:nvSpPr>
-          <p:cNvPr id="33" name="切块保留目标映射、内部切点对齐；候选路径须满足对齐、容量与槽位约束。"/>
+              <a:t>比较合法搬运路径</a:t>
+            </a:r>
+          </a:p>
+        </p:txBody>
+      </p:sp>
+      <p:cxnSp>
+        <p:nvCxnSpPr>
+          <p:cNvPr id="39" name="Connector 38"/>
+          <p:cNvCxnSpPr/>
+          <p:nvPr/>
+        </p:nvCxnSpPr>
+        <p:spPr>
+          <a:xfrm>
+            <a:off x="7324724" y="4886325"/>
+            <a:ext cx="152401" cy="0"/>
+          </a:xfrm>
+          <a:prstGeom prst="line">
+            <a:avLst/>
+          </a:prstGeom>
+          <a:ln w="16510">
+            <a:solidFill>
+              <a:srgbClr val="245DA0"/>
+            </a:solidFill>
+            <a:tailEnd type="triangle"/>
+          </a:ln>
+          <a:effectLst/>
+        </p:spPr>
+        <p:style>
+          <a:lnRef idx="2">
+            <a:schemeClr val="accent1"/>
+          </a:lnRef>
+          <a:fillRef idx="0">
+            <a:schemeClr val="accent1"/>
+          </a:fillRef>
+          <a:effectRef idx="0">
+            <a:schemeClr val="accent1"/>
+          </a:effectRef>
+          <a:fontRef idx="minor">
+            <a:schemeClr val="tx1"/>
+          </a:fontRef>
+        </p:style>
+      </p:cxnSp>
+      <p:sp>
+        <p:nvSpPr>
+          <p:cNvPr id="40" name="Rectangle 39"/>
+          <p:cNvSpPr/>
+          <p:nvPr/>
+        </p:nvSpPr>
+        <p:spPr>
+          <a:xfrm>
+            <a:off x="7505700" y="4619625"/>
+            <a:ext cx="2076450" cy="609600"/>
+          </a:xfrm>
+          <a:prstGeom prst="rect">
+            <a:avLst/>
+          </a:prstGeom>
+          <a:solidFill>
+            <a:srgbClr val="EDF3FB"/>
+          </a:solidFill>
+          <a:ln>
+            <a:noFill/>
+          </a:ln>
+          <a:effectLst/>
+        </p:spPr>
+        <p:style>
+          <a:lnRef idx="1">
+            <a:schemeClr val="accent1"/>
+          </a:lnRef>
+          <a:fillRef idx="3">
+            <a:schemeClr val="accent1"/>
+          </a:fillRef>
+          <a:effectRef idx="0">
+            <a:schemeClr val="accent1"/>
+          </a:effectRef>
+          <a:fontRef idx="minor">
+            <a:schemeClr val="lt1"/>
+          </a:fontRef>
+        </p:style>
+        <p:txBody>
+          <a:bodyPr rtlCol="0" anchor="ctr"/>
+          <a:lstStyle/>
+          <a:p>
+            <a:pPr algn="ctr"/>
+          </a:p>
+        </p:txBody>
+      </p:sp>
+      <p:sp>
+        <p:nvSpPr>
+          <p:cNvPr id="41" name="回溯、提交一份计划"/>
           <p:cNvSpPr txBox="1"/>
           <p:nvPr/>
         </p:nvSpPr>
         <p:spPr>
           <a:xfrm>
-            <a:off x="381000" y="4181475"/>
-            <a:ext cx="7086600" cy="219075"/>
+            <a:off x="7610474" y="4695825"/>
+            <a:ext cx="1866899" cy="238125"/>
           </a:xfrm>
           <a:prstGeom prst="rect">
             <a:avLst/>
@@ -4981,28 +5323,28 @@
               </a:spcAft>
             </a:pPr>
             <a:r>
-              <a:rPr sz="1350" b="0" lang="zh-CN">
-                <a:solidFill>
-                  <a:srgbClr val="1F2937"/>
+              <a:rPr sz="1500" b="1" lang="zh-CN">
+                <a:solidFill>
+                  <a:srgbClr val="245DA0"/>
                 </a:solidFill>
                 <a:latin typeface="Microsoft YaHei"/>
                 <a:ea typeface="Microsoft YaHei"/>
               </a:rPr>
-              <a:t>切块保留目标映射、内部切点对齐；候选路径须满足对齐、容量与槽位约束。</a:t>
-            </a:r>
-          </a:p>
-        </p:txBody>
-      </p:sp>
-      <p:sp>
-        <p:nvSpPr>
-          <p:cNvPr id="34" name="估价 E = 时间单价 ×（SSD 读工作 + 复制工作）× 池压力 + 调用费"/>
+              <a:t>回溯、提交一份计划</a:t>
+            </a:r>
+          </a:p>
+        </p:txBody>
+      </p:sp>
+      <p:sp>
+        <p:nvSpPr>
+          <p:cNvPr id="42" name="operation → Work"/>
           <p:cNvSpPr txBox="1"/>
           <p:nvPr/>
         </p:nvSpPr>
         <p:spPr>
           <a:xfrm>
-            <a:off x="381000" y="4467225"/>
-            <a:ext cx="7086600" cy="228600"/>
+            <a:off x="7610474" y="4972050"/>
+            <a:ext cx="1866899" cy="200025"/>
           </a:xfrm>
           <a:prstGeom prst="rect">
             <a:avLst/>
@@ -5025,72 +5367,28 @@
               </a:spcAft>
             </a:pPr>
             <a:r>
-              <a:rPr sz="1425" b="1" lang="zh-CN">
-                <a:solidFill>
-                  <a:srgbClr val="285EA8"/>
+              <a:rPr sz="1350" b="0" lang="zh-CN">
+                <a:solidFill>
+                  <a:srgbClr val="1F2937"/>
                 </a:solidFill>
                 <a:latin typeface="Microsoft YaHei"/>
                 <a:ea typeface="Microsoft YaHei"/>
               </a:rPr>
-              <a:t>估价 E = 时间单价 ×（SSD 读工作 + 复制工作）× 池压力 + 调用费</a:t>
-            </a:r>
-          </a:p>
-        </p:txBody>
-      </p:sp>
-      <p:sp>
-        <p:nvSpPr>
-          <p:cNvPr id="35" name="Rectangle 34"/>
-          <p:cNvSpPr/>
-          <p:nvPr/>
-        </p:nvSpPr>
-        <p:spPr>
-          <a:xfrm>
-            <a:off x="381000" y="4781550"/>
-            <a:ext cx="3467100" cy="571500"/>
-          </a:xfrm>
-          <a:prstGeom prst="rect">
-            <a:avLst/>
-          </a:prstGeom>
-          <a:solidFill>
-            <a:srgbClr val="F5F7FA"/>
-          </a:solidFill>
-          <a:ln>
-            <a:noFill/>
-          </a:ln>
-          <a:effectLst/>
-        </p:spPr>
-        <p:style>
-          <a:lnRef idx="1">
-            <a:schemeClr val="accent1"/>
-          </a:lnRef>
-          <a:fillRef idx="3">
-            <a:schemeClr val="accent1"/>
-          </a:fillRef>
-          <a:effectRef idx="0">
-            <a:schemeClr val="accent1"/>
-          </a:effectRef>
-          <a:fontRef idx="minor">
-            <a:schemeClr val="lt1"/>
-          </a:fontRef>
-        </p:style>
-        <p:txBody>
-          <a:bodyPr rtlCol="0" anchor="ctr"/>
-          <a:lstStyle/>
-          <a:p>
-            <a:pPr algn="ctr"/>
-          </a:p>
-        </p:txBody>
-      </p:sp>
-      <p:sp>
-        <p:nvSpPr>
-          <p:cNvPr id="36" name="快速 DP · 每批执行"/>
+              <a:t>operation → Work</a:t>
+            </a:r>
+          </a:p>
+        </p:txBody>
+      </p:sp>
+      <p:sp>
+        <p:nvSpPr>
+          <p:cNvPr id="43" name="先切合法片段，再由 DP 分组；保留目标映射，检查对齐、容量与槽位，内部切点对齐。"/>
           <p:cNvSpPr txBox="1"/>
           <p:nvPr/>
         </p:nvSpPr>
         <p:spPr>
           <a:xfrm>
-            <a:off x="476250" y="4848225"/>
-            <a:ext cx="3276600" cy="238125"/>
+            <a:off x="647700" y="5257800"/>
+            <a:ext cx="8953500" cy="238125"/>
           </a:xfrm>
           <a:prstGeom prst="rect">
             <a:avLst/>
@@ -5113,28 +5411,72 @@
               </a:spcAft>
             </a:pPr>
             <a:r>
-              <a:rPr sz="1500" b="1" lang="zh-CN">
-                <a:solidFill>
-                  <a:srgbClr val="285EA8"/>
+              <a:rPr sz="1575" b="0" lang="zh-CN">
+                <a:solidFill>
+                  <a:srgbClr val="1F2937"/>
                 </a:solidFill>
                 <a:latin typeface="Microsoft YaHei"/>
                 <a:ea typeface="Microsoft YaHei"/>
               </a:rPr>
-              <a:t>快速 DP · 每批执行</a:t>
-            </a:r>
-          </a:p>
-        </p:txBody>
-      </p:sp>
-      <p:sp>
-        <p:nvSpPr>
-          <p:cNvPr id="37" name="dp[j]：前 j 段最低估价；得到一份基础方案。"/>
+              <a:t>先切合法片段，再由 DP 分组；保留目标映射，检查对齐、容量与槽位，内部切点对齐。</a:t>
+            </a:r>
+          </a:p>
+        </p:txBody>
+      </p:sp>
+      <p:sp>
+        <p:nvSpPr>
+          <p:cNvPr id="44" name="Rectangle 43"/>
+          <p:cNvSpPr/>
+          <p:nvPr/>
+        </p:nvSpPr>
+        <p:spPr>
+          <a:xfrm>
+            <a:off x="647700" y="5610225"/>
+            <a:ext cx="8953500" cy="409575"/>
+          </a:xfrm>
+          <a:prstGeom prst="rect">
+            <a:avLst/>
+          </a:prstGeom>
+          <a:solidFill>
+            <a:srgbClr val="F4F7FB"/>
+          </a:solidFill>
+          <a:ln>
+            <a:noFill/>
+          </a:ln>
+          <a:effectLst/>
+        </p:spPr>
+        <p:style>
+          <a:lnRef idx="1">
+            <a:schemeClr val="accent1"/>
+          </a:lnRef>
+          <a:fillRef idx="3">
+            <a:schemeClr val="accent1"/>
+          </a:fillRef>
+          <a:effectRef idx="0">
+            <a:schemeClr val="accent1"/>
+          </a:effectRef>
+          <a:fontRef idx="minor">
+            <a:schemeClr val="lt1"/>
+          </a:fontRef>
+        </p:style>
+        <p:txBody>
+          <a:bodyPr rtlCol="0" anchor="ctr"/>
+          <a:lstStyle/>
+          <a:p>
+            <a:pPr algn="ctr"/>
+          </a:p>
+        </p:txBody>
+      </p:sp>
+      <p:sp>
+        <p:nvSpPr>
+          <p:cNvPr id="45" name="E = 时间单价 ×（SSD 读工作 + 复制工作）× 池压力 + 调用费"/>
           <p:cNvSpPr txBox="1"/>
           <p:nvPr/>
         </p:nvSpPr>
         <p:spPr>
           <a:xfrm>
-            <a:off x="476250" y="5124450"/>
-            <a:ext cx="3276600" cy="200025"/>
+            <a:off x="781050" y="5686425"/>
+            <a:ext cx="8686800" cy="257175"/>
           </a:xfrm>
           <a:prstGeom prst="rect">
             <a:avLst/>
@@ -5157,72 +5499,28 @@
               </a:spcAft>
             </a:pPr>
             <a:r>
-              <a:rPr sz="1125" b="0" lang="zh-CN">
-                <a:solidFill>
-                  <a:srgbClr val="1F2937"/>
+              <a:rPr sz="1725" b="1" lang="zh-CN">
+                <a:solidFill>
+                  <a:srgbClr val="245DA0"/>
                 </a:solidFill>
                 <a:latin typeface="Microsoft YaHei"/>
                 <a:ea typeface="Microsoft YaHei"/>
               </a:rPr>
-              <a:t>dp[j]：前 j 段最低估价；得到一份基础方案。</a:t>
-            </a:r>
-          </a:p>
-        </p:txBody>
-      </p:sp>
-      <p:sp>
-        <p:nvSpPr>
-          <p:cNvPr id="38" name="Rectangle 37"/>
-          <p:cNvSpPr/>
-          <p:nvPr/>
-        </p:nvSpPr>
-        <p:spPr>
-          <a:xfrm>
-            <a:off x="4000500" y="4781550"/>
-            <a:ext cx="3467100" cy="571500"/>
-          </a:xfrm>
-          <a:prstGeom prst="rect">
-            <a:avLst/>
-          </a:prstGeom>
-          <a:solidFill>
-            <a:srgbClr val="F5F7FA"/>
-          </a:solidFill>
-          <a:ln>
-            <a:noFill/>
-          </a:ln>
-          <a:effectLst/>
-        </p:spPr>
-        <p:style>
-          <a:lnRef idx="1">
-            <a:schemeClr val="accent1"/>
-          </a:lnRef>
-          <a:fillRef idx="3">
-            <a:schemeClr val="accent1"/>
-          </a:fillRef>
-          <a:effectRef idx="0">
-            <a:schemeClr val="accent1"/>
-          </a:effectRef>
-          <a:fontRef idx="minor">
-            <a:schemeClr val="lt1"/>
-          </a:fontRef>
-        </p:style>
-        <p:txBody>
-          <a:bodyPr rtlCol="0" anchor="ctr"/>
-          <a:lstStyle/>
-          <a:p>
-            <a:pPr algn="ctr"/>
-          </a:p>
-        </p:txBody>
-      </p:sp>
-      <p:sp>
-        <p:nvSpPr>
-          <p:cNvPr id="39" name="细化 DP · 空闲且规模可控"/>
+              <a:t>E = 时间单价 ×（SSD 读工作 + 复制工作）× 池压力 + 调用费</a:t>
+            </a:r>
+          </a:p>
+        </p:txBody>
+      </p:sp>
+      <p:sp>
+        <p:nvSpPr>
+          <p:cNvPr id="46" name="快速 DP · 每批执行"/>
           <p:cNvSpPr txBox="1"/>
           <p:nvPr/>
         </p:nvSpPr>
         <p:spPr>
           <a:xfrm>
-            <a:off x="4095750" y="4848225"/>
-            <a:ext cx="3276600" cy="238125"/>
+            <a:off x="647700" y="6115050"/>
+            <a:ext cx="4381500" cy="285750"/>
           </a:xfrm>
           <a:prstGeom prst="rect">
             <a:avLst/>
@@ -5245,28 +5543,28 @@
               </a:spcAft>
             </a:pPr>
             <a:r>
-              <a:rPr sz="1500" b="1" lang="zh-CN">
-                <a:solidFill>
-                  <a:srgbClr val="285EA8"/>
+              <a:rPr sz="1725" b="1" lang="zh-CN">
+                <a:solidFill>
+                  <a:srgbClr val="245DA0"/>
                 </a:solidFill>
                 <a:latin typeface="Microsoft YaHei"/>
                 <a:ea typeface="Microsoft YaHei"/>
               </a:rPr>
-              <a:t>细化 DP · 空闲且规模可控</a:t>
-            </a:r>
-          </a:p>
-        </p:txBody>
-      </p:sp>
-      <p:sp>
-        <p:nvSpPr>
-          <p:cNvPr id="40" name="D[h][j]：前 j 段恰好 h 组；重估并发、重新划分。"/>
+              <a:t>快速 DP · 每批执行</a:t>
+            </a:r>
+          </a:p>
+        </p:txBody>
+      </p:sp>
+      <p:sp>
+        <p:nvSpPr>
+          <p:cNvPr id="47" name="dp[j]：前 j 段最低估价，输出一份基础方案。"/>
           <p:cNvSpPr txBox="1"/>
           <p:nvPr/>
         </p:nvSpPr>
         <p:spPr>
           <a:xfrm>
-            <a:off x="4095750" y="5124450"/>
-            <a:ext cx="3276600" cy="200025"/>
+            <a:off x="647700" y="6457950"/>
+            <a:ext cx="4381500" cy="247649"/>
           </a:xfrm>
           <a:prstGeom prst="rect">
             <a:avLst/>
@@ -5289,28 +5587,28 @@
               </a:spcAft>
             </a:pPr>
             <a:r>
-              <a:rPr sz="1125" b="0" lang="zh-CN">
+              <a:rPr sz="1500" b="0" lang="zh-CN">
                 <a:solidFill>
                   <a:srgbClr val="1F2937"/>
                 </a:solidFill>
                 <a:latin typeface="Microsoft YaHei"/>
                 <a:ea typeface="Microsoft YaHei"/>
               </a:rPr>
-              <a:t>D[h][j]：前 j 段恰好 h 组；重估并发、重新划分。</a:t>
-            </a:r>
-          </a:p>
-        </p:txBody>
-      </p:sp>
-      <p:sp>
-        <p:nvSpPr>
-          <p:cNvPr id="41" name="细化从原片段重算，引用基础复制分布；资源检查后只提交一份，无合格结果则保留快速方案。"/>
+              <a:t>dp[j]：前 j 段最低估价，输出一份基础方案。</a:t>
+            </a:r>
+          </a:p>
+        </p:txBody>
+      </p:sp>
+      <p:sp>
+        <p:nvSpPr>
+          <p:cNvPr id="48" name="细化 DP · 空闲且规模可控"/>
           <p:cNvSpPr txBox="1"/>
           <p:nvPr/>
         </p:nvSpPr>
         <p:spPr>
           <a:xfrm>
-            <a:off x="381000" y="5448300"/>
-            <a:ext cx="7086600" cy="228600"/>
+            <a:off x="5219700" y="6115050"/>
+            <a:ext cx="4381500" cy="285750"/>
           </a:xfrm>
           <a:prstGeom prst="rect">
             <a:avLst/>
@@ -5333,28 +5631,28 @@
               </a:spcAft>
             </a:pPr>
             <a:r>
-              <a:rPr sz="1200" b="0" lang="zh-CN">
-                <a:solidFill>
-                  <a:srgbClr val="1F2937"/>
+              <a:rPr sz="1725" b="1" lang="zh-CN">
+                <a:solidFill>
+                  <a:srgbClr val="245DA0"/>
                 </a:solidFill>
                 <a:latin typeface="Microsoft YaHei"/>
                 <a:ea typeface="Microsoft YaHei"/>
               </a:rPr>
-              <a:t>细化从原片段重算，引用基础复制分布；资源检查后只提交一份，无合格结果则保留快速方案。</a:t>
-            </a:r>
-          </a:p>
-        </p:txBody>
-      </p:sp>
-      <p:sp>
-        <p:nvSpPr>
-          <p:cNvPr id="42" name="后台：完成 → 去重 → 复用证据 → 正净收益 → 预算 → PROMOTE"/>
+              <a:t>细化 DP · 空闲且规模可控</a:t>
+            </a:r>
+          </a:p>
+        </p:txBody>
+      </p:sp>
+      <p:sp>
+        <p:nvSpPr>
+          <p:cNvPr id="49" name="D[h][j]：前 j 段恰好 h 组，重估并发。"/>
           <p:cNvSpPr txBox="1"/>
           <p:nvPr/>
         </p:nvSpPr>
         <p:spPr>
           <a:xfrm>
-            <a:off x="381000" y="5810250"/>
-            <a:ext cx="7086600" cy="276225"/>
+            <a:off x="5219700" y="6457950"/>
+            <a:ext cx="4381500" cy="247649"/>
           </a:xfrm>
           <a:prstGeom prst="rect">
             <a:avLst/>
@@ -5377,28 +5675,64 @@
               </a:spcAft>
             </a:pPr>
             <a:r>
-              <a:rPr sz="1650" b="1" lang="zh-CN">
-                <a:solidFill>
-                  <a:srgbClr val="24756D"/>
+              <a:rPr sz="1500" b="0" lang="zh-CN">
+                <a:solidFill>
+                  <a:srgbClr val="1F2937"/>
                 </a:solidFill>
                 <a:latin typeface="Microsoft YaHei"/>
                 <a:ea typeface="Microsoft YaHei"/>
               </a:rPr>
-              <a:t>后台：完成 → 去重 → 复用证据 → 正净收益 → 预算 → PROMOTE</a:t>
-            </a:r>
-          </a:p>
-        </p:txBody>
-      </p:sp>
-      <p:sp>
-        <p:nvSpPr>
-          <p:cNvPr id="43" name="History 管间隔、时效与预算；Work 提供可替代成本；在途键集合去重。"/>
+              <a:t>D[h][j]：前 j 段恰好 h 组，重估并发。</a:t>
+            </a:r>
+          </a:p>
+        </p:txBody>
+      </p:sp>
+      <p:cxnSp>
+        <p:nvCxnSpPr>
+          <p:cNvPr id="50" name="Connector 49"/>
+          <p:cNvCxnSpPr/>
+          <p:nvPr/>
+        </p:nvCxnSpPr>
+        <p:spPr>
+          <a:xfrm>
+            <a:off x="5029200" y="6115050"/>
+            <a:ext cx="0" cy="571500"/>
+          </a:xfrm>
+          <a:prstGeom prst="line">
+            <a:avLst/>
+          </a:prstGeom>
+          <a:ln w="12700">
+            <a:solidFill>
+              <a:srgbClr val="DCE2E9"/>
+            </a:solidFill>
+          </a:ln>
+          <a:effectLst/>
+        </p:spPr>
+        <p:style>
+          <a:lnRef idx="2">
+            <a:schemeClr val="accent1"/>
+          </a:lnRef>
+          <a:fillRef idx="0">
+            <a:schemeClr val="accent1"/>
+          </a:fillRef>
+          <a:effectRef idx="0">
+            <a:schemeClr val="accent1"/>
+          </a:effectRef>
+          <a:fontRef idx="minor">
+            <a:schemeClr val="tx1"/>
+          </a:fontRef>
+        </p:style>
+      </p:cxnSp>
+      <p:sp>
+        <p:nvSpPr>
+          <p:cNvPr id="51" name="细化从原片段重划分，参考基础复制分布；资源检查后只提交一份，无合格结果则保留快速方案。"/>
           <p:cNvSpPr txBox="1"/>
           <p:nvPr/>
         </p:nvSpPr>
         <p:spPr>
           <a:xfrm>
-            <a:off x="381000" y="6153150"/>
-            <a:ext cx="7086600" cy="219075"/>
+            <a:off x="647700" y="6800850"/>
+            <a:ext cx="8953500" cy="219075"/>
           </a:xfrm>
           <a:prstGeom prst="rect">
             <a:avLst/>
@@ -5421,28 +5755,162 @@
               </a:spcAft>
             </a:pPr>
             <a:r>
-              <a:rPr sz="1350" b="0" lang="zh-CN">
-                <a:solidFill>
-                  <a:srgbClr val="1F2937"/>
+              <a:rPr sz="1425" b="0" lang="zh-CN">
+                <a:solidFill>
+                  <a:srgbClr val="627286"/>
                 </a:solidFill>
                 <a:latin typeface="Microsoft YaHei"/>
                 <a:ea typeface="Microsoft YaHei"/>
               </a:rPr>
-              <a:t>History 管间隔、时效与预算；Work 提供可替代成本；在途键集合去重。</a:t>
-            </a:r>
-          </a:p>
-        </p:txBody>
-      </p:sp>
-      <p:sp>
-        <p:nvSpPr>
-          <p:cNvPr id="44" name="复用间隔与证据年龄均须在 TTL 内；池满可替换，压力越大门槛越高。"/>
+              <a:t>细化从原片段重划分，参考基础复制分布；资源检查后只提交一份，无合格结果则保留快速方案。</a:t>
+            </a:r>
+          </a:p>
+        </p:txBody>
+      </p:sp>
+      <p:sp>
+        <p:nvSpPr>
+          <p:cNvPr id="52" name="Rectangle 51"/>
+          <p:cNvSpPr/>
+          <p:nvPr/>
+        </p:nvSpPr>
+        <p:spPr>
+          <a:xfrm>
+            <a:off x="457200" y="7334250"/>
+            <a:ext cx="9334500" cy="1733550"/>
+          </a:xfrm>
+          <a:prstGeom prst="rect">
+            <a:avLst/>
+          </a:prstGeom>
+          <a:solidFill>
+            <a:srgbClr val="FFFFFF"/>
+          </a:solidFill>
+          <a:ln w="8890">
+            <a:solidFill>
+              <a:srgbClr val="DDE5EE"/>
+            </a:solidFill>
+          </a:ln>
+          <a:effectLst/>
+        </p:spPr>
+        <p:style>
+          <a:lnRef idx="1">
+            <a:schemeClr val="accent1"/>
+          </a:lnRef>
+          <a:fillRef idx="3">
+            <a:schemeClr val="accent1"/>
+          </a:fillRef>
+          <a:effectRef idx="0">
+            <a:schemeClr val="accent1"/>
+          </a:effectRef>
+          <a:fontRef idx="minor">
+            <a:schemeClr val="lt1"/>
+          </a:fontRef>
+        </p:style>
+        <p:txBody>
+          <a:bodyPr rtlCol="0" anchor="ctr"/>
+          <a:lstStyle/>
+          <a:p>
+            <a:pPr algn="ctr"/>
+          </a:p>
+        </p:txBody>
+      </p:sp>
+      <p:sp>
+        <p:nvSpPr>
+          <p:cNvPr id="53" name="Rectangle 52"/>
+          <p:cNvSpPr/>
+          <p:nvPr/>
+        </p:nvSpPr>
+        <p:spPr>
+          <a:xfrm>
+            <a:off x="647700" y="7524749"/>
+            <a:ext cx="323850" cy="266700"/>
+          </a:xfrm>
+          <a:prstGeom prst="rect">
+            <a:avLst/>
+          </a:prstGeom>
+          <a:solidFill>
+            <a:srgbClr val="176F68"/>
+          </a:solidFill>
+          <a:ln>
+            <a:noFill/>
+          </a:ln>
+          <a:effectLst/>
+        </p:spPr>
+        <p:style>
+          <a:lnRef idx="1">
+            <a:schemeClr val="accent1"/>
+          </a:lnRef>
+          <a:fillRef idx="3">
+            <a:schemeClr val="accent1"/>
+          </a:fillRef>
+          <a:effectRef idx="0">
+            <a:schemeClr val="accent1"/>
+          </a:effectRef>
+          <a:fontRef idx="minor">
+            <a:schemeClr val="lt1"/>
+          </a:fontRef>
+        </p:style>
+        <p:txBody>
+          <a:bodyPr rtlCol="0" anchor="ctr"/>
+          <a:lstStyle/>
+          <a:p>
+            <a:pPr algn="ctr"/>
+          </a:p>
+        </p:txBody>
+      </p:sp>
+      <p:sp>
+        <p:nvSpPr>
+          <p:cNvPr id="54" name="04"/>
           <p:cNvSpPr txBox="1"/>
           <p:nvPr/>
         </p:nvSpPr>
         <p:spPr>
           <a:xfrm>
-            <a:off x="381000" y="6448425"/>
-            <a:ext cx="7086600" cy="219075"/>
+            <a:off x="647700" y="7553324"/>
+            <a:ext cx="323850" cy="228600"/>
+          </a:xfrm>
+          <a:prstGeom prst="rect">
+            <a:avLst/>
+          </a:prstGeom>
+          <a:noFill/>
+          <a:effectLst/>
+        </p:spPr>
+        <p:txBody>
+          <a:bodyPr wrap="square" lIns="0" rIns="0" tIns="0" bIns="0">
+            <a:spAutoFit/>
+          </a:bodyPr>
+          <a:lstStyle/>
+          <a:p>
+            <a:pPr algn="ctr">
+              <a:lnSpc>
+                <a:spcPct val="112000"/>
+              </a:lnSpc>
+              <a:spcAft>
+                <a:spcPts val="300"/>
+              </a:spcAft>
+            </a:pPr>
+            <a:r>
+              <a:rPr sz="1350" b="1" lang="zh-CN">
+                <a:solidFill>
+                  <a:srgbClr val="FFFFFF"/>
+                </a:solidFill>
+                <a:latin typeface="Microsoft YaHei"/>
+                <a:ea typeface="Microsoft YaHei"/>
+              </a:rPr>
+              <a:t>04</a:t>
+            </a:r>
+          </a:p>
+        </p:txBody>
+      </p:sp>
+      <p:sp>
+        <p:nvSpPr>
+          <p:cNvPr id="55" name="后台：有条件地投入未来复用"/>
+          <p:cNvSpPr txBox="1"/>
+          <p:nvPr/>
+        </p:nvSpPr>
+        <p:spPr>
+          <a:xfrm>
+            <a:off x="1085850" y="7505700"/>
+            <a:ext cx="8515350" cy="342900"/>
           </a:xfrm>
           <a:prstGeom prst="rect">
             <a:avLst/>
@@ -5465,28 +5933,116 @@
               </a:spcAft>
             </a:pPr>
             <a:r>
-              <a:rPr sz="1350" b="0" lang="zh-CN">
-                <a:solidFill>
-                  <a:srgbClr val="1F2937"/>
+              <a:rPr sz="1800" b="1" lang="zh-CN">
+                <a:solidFill>
+                  <a:srgbClr val="176F68"/>
                 </a:solidFill>
                 <a:latin typeface="Microsoft YaHei"/>
                 <a:ea typeface="Microsoft YaHei"/>
               </a:rPr>
-              <a:t>复用间隔与证据年龄均须在 TTL 内；池满可替换，压力越大门槛越高。</a:t>
-            </a:r>
-          </a:p>
-        </p:txBody>
-      </p:sp>
-      <p:sp>
-        <p:nvSpPr>
-          <p:cNvPr id="45" name="性能对比 · 官方贪心 → 本方案"/>
+              <a:t>后台：有条件地投入未来复用</a:t>
+            </a:r>
+          </a:p>
+        </p:txBody>
+      </p:sp>
+      <p:sp>
+        <p:nvSpPr>
+          <p:cNvPr id="56" name="on_iocb_complete()"/>
           <p:cNvSpPr txBox="1"/>
           <p:nvPr/>
         </p:nvSpPr>
         <p:spPr>
           <a:xfrm>
-            <a:off x="7772400" y="1828800"/>
-            <a:ext cx="4038600" cy="285750"/>
+            <a:off x="6915150" y="7572375"/>
+            <a:ext cx="2686050" cy="238125"/>
+          </a:xfrm>
+          <a:prstGeom prst="rect">
+            <a:avLst/>
+          </a:prstGeom>
+          <a:noFill/>
+          <a:effectLst/>
+        </p:spPr>
+        <p:txBody>
+          <a:bodyPr wrap="square" lIns="0" rIns="0" tIns="0" bIns="0">
+            <a:spAutoFit/>
+          </a:bodyPr>
+          <a:lstStyle/>
+          <a:p>
+            <a:pPr algn="r">
+              <a:lnSpc>
+                <a:spcPct val="112000"/>
+              </a:lnSpc>
+              <a:spcAft>
+                <a:spcPts val="300"/>
+              </a:spcAft>
+            </a:pPr>
+            <a:r>
+              <a:rPr sz="1425" b="0" lang="zh-CN">
+                <a:solidFill>
+                  <a:srgbClr val="627286"/>
+                </a:solidFill>
+                <a:latin typeface="Microsoft YaHei"/>
+                <a:ea typeface="Microsoft YaHei"/>
+              </a:rPr>
+              <a:t>on_iocb_complete()</a:t>
+            </a:r>
+          </a:p>
+        </p:txBody>
+      </p:sp>
+      <p:sp>
+        <p:nvSpPr>
+          <p:cNvPr id="57" name="Rectangle 56"/>
+          <p:cNvSpPr/>
+          <p:nvPr/>
+        </p:nvSpPr>
+        <p:spPr>
+          <a:xfrm>
+            <a:off x="647700" y="7934325"/>
+            <a:ext cx="8953500" cy="409575"/>
+          </a:xfrm>
+          <a:prstGeom prst="rect">
+            <a:avLst/>
+          </a:prstGeom>
+          <a:solidFill>
+            <a:srgbClr val="EEF6F3"/>
+          </a:solidFill>
+          <a:ln>
+            <a:noFill/>
+          </a:ln>
+          <a:effectLst/>
+        </p:spPr>
+        <p:style>
+          <a:lnRef idx="1">
+            <a:schemeClr val="accent1"/>
+          </a:lnRef>
+          <a:fillRef idx="3">
+            <a:schemeClr val="accent1"/>
+          </a:fillRef>
+          <a:effectRef idx="0">
+            <a:schemeClr val="accent1"/>
+          </a:effectRef>
+          <a:fontRef idx="minor">
+            <a:schemeClr val="lt1"/>
+          </a:fontRef>
+        </p:style>
+        <p:txBody>
+          <a:bodyPr rtlCol="0" anchor="ctr"/>
+          <a:lstStyle/>
+          <a:p>
+            <a:pPr algn="ctr"/>
+          </a:p>
+        </p:txBody>
+      </p:sp>
+      <p:sp>
+        <p:nvSpPr>
+          <p:cNvPr id="58" name="完成 → 去重 → 复用证据 → 正净收益 → 预算覆盖 → PROMOTE"/>
+          <p:cNvSpPr txBox="1"/>
+          <p:nvPr/>
+        </p:nvSpPr>
+        <p:spPr>
+          <a:xfrm>
+            <a:off x="781050" y="8001000"/>
+            <a:ext cx="8686800" cy="276225"/>
           </a:xfrm>
           <a:prstGeom prst="rect">
             <a:avLst/>
@@ -5511,26 +6067,26 @@
             <a:r>
               <a:rPr sz="1800" b="1" lang="zh-CN">
                 <a:solidFill>
-                  <a:srgbClr val="24756D"/>
+                  <a:srgbClr val="176F68"/>
                 </a:solidFill>
                 <a:latin typeface="Microsoft YaHei"/>
                 <a:ea typeface="Microsoft YaHei"/>
               </a:rPr>
-              <a:t>性能对比 · 官方贪心 → 本方案</a:t>
-            </a:r>
-          </a:p>
-        </p:txBody>
-      </p:sp>
-      <p:sp>
-        <p:nvSpPr>
-          <p:cNvPr id="46" name="39 条公开 Trace 累计；降幅按总量计算"/>
+              <a:t>完成 → 去重 → 复用证据 → 正净收益 → 预算覆盖 → PROMOTE</a:t>
+            </a:r>
+          </a:p>
+        </p:txBody>
+      </p:sp>
+      <p:sp>
+        <p:nvSpPr>
+          <p:cNvPr id="59" name="History：间隔 / 时效 / 预算    Work：可替代成本    在途键集合：去重"/>
           <p:cNvSpPr txBox="1"/>
           <p:nvPr/>
         </p:nvSpPr>
         <p:spPr>
           <a:xfrm>
-            <a:off x="7772400" y="2200275"/>
-            <a:ext cx="4038600" cy="219075"/>
+            <a:off x="647700" y="8410575"/>
+            <a:ext cx="8953500" cy="238125"/>
           </a:xfrm>
           <a:prstGeom prst="rect">
             <a:avLst/>
@@ -5555,26 +6111,26 @@
             <a:r>
               <a:rPr sz="1425" b="0" lang="zh-CN">
                 <a:solidFill>
-                  <a:srgbClr val="657184"/>
+                  <a:srgbClr val="1F2937"/>
                 </a:solidFill>
                 <a:latin typeface="Microsoft YaHei"/>
                 <a:ea typeface="Microsoft YaHei"/>
               </a:rPr>
-              <a:t>39 条公开 Trace 累计；降幅按总量计算</a:t>
-            </a:r>
-          </a:p>
-        </p:txBody>
-      </p:sp>
-      <p:sp>
-        <p:nvSpPr>
-          <p:cNvPr id="47" name="总成本 J  ↓ 36.51%"/>
+              <a:t>History：间隔 / 时效 / 预算    Work：可替代成本    在途键集合：去重</a:t>
+            </a:r>
+          </a:p>
+        </p:txBody>
+      </p:sp>
+      <p:sp>
+        <p:nvSpPr>
+          <p:cNvPr id="60" name="复用间隔与证据年龄均 &lt; TTL；池满可替换，压力越大门槛越高。"/>
           <p:cNvSpPr txBox="1"/>
           <p:nvPr/>
         </p:nvSpPr>
         <p:spPr>
           <a:xfrm>
-            <a:off x="7772400" y="2590800"/>
-            <a:ext cx="4038600" cy="285750"/>
+            <a:off x="647700" y="8724900"/>
+            <a:ext cx="8953500" cy="228600"/>
           </a:xfrm>
           <a:prstGeom prst="rect">
             <a:avLst/>
@@ -5597,28 +6153,162 @@
               </a:spcAft>
             </a:pPr>
             <a:r>
-              <a:rPr sz="1725" b="1" lang="zh-CN">
-                <a:solidFill>
-                  <a:srgbClr val="24756D"/>
+              <a:rPr sz="1350" b="0" lang="zh-CN">
+                <a:solidFill>
+                  <a:srgbClr val="1F2937"/>
                 </a:solidFill>
                 <a:latin typeface="Microsoft YaHei"/>
                 <a:ea typeface="Microsoft YaHei"/>
               </a:rPr>
-              <a:t>总成本 J  ↓ 36.51%</a:t>
-            </a:r>
-          </a:p>
-        </p:txBody>
-      </p:sp>
-      <p:sp>
-        <p:nvSpPr>
-          <p:cNvPr id="48" name="贪心"/>
+              <a:t>复用间隔与证据年龄均 &lt; TTL；池满可替换，压力越大门槛越高。</a:t>
+            </a:r>
+          </a:p>
+        </p:txBody>
+      </p:sp>
+      <p:sp>
+        <p:nvSpPr>
+          <p:cNvPr id="61" name="Rectangle 60"/>
+          <p:cNvSpPr/>
+          <p:nvPr/>
+        </p:nvSpPr>
+        <p:spPr>
+          <a:xfrm>
+            <a:off x="10020300" y="2400300"/>
+            <a:ext cx="4762500" cy="4838700"/>
+          </a:xfrm>
+          <a:prstGeom prst="rect">
+            <a:avLst/>
+          </a:prstGeom>
+          <a:solidFill>
+            <a:srgbClr val="FFFFFF"/>
+          </a:solidFill>
+          <a:ln w="8890">
+            <a:solidFill>
+              <a:srgbClr val="DDE5EE"/>
+            </a:solidFill>
+          </a:ln>
+          <a:effectLst/>
+        </p:spPr>
+        <p:style>
+          <a:lnRef idx="1">
+            <a:schemeClr val="accent1"/>
+          </a:lnRef>
+          <a:fillRef idx="3">
+            <a:schemeClr val="accent1"/>
+          </a:fillRef>
+          <a:effectRef idx="0">
+            <a:schemeClr val="accent1"/>
+          </a:effectRef>
+          <a:fontRef idx="minor">
+            <a:schemeClr val="lt1"/>
+          </a:fontRef>
+        </p:style>
+        <p:txBody>
+          <a:bodyPr rtlCol="0" anchor="ctr"/>
+          <a:lstStyle/>
+          <a:p>
+            <a:pPr algn="ctr"/>
+          </a:p>
+        </p:txBody>
+      </p:sp>
+      <p:sp>
+        <p:nvSpPr>
+          <p:cNvPr id="62" name="Rectangle 61"/>
+          <p:cNvSpPr/>
+          <p:nvPr/>
+        </p:nvSpPr>
+        <p:spPr>
+          <a:xfrm>
+            <a:off x="10210800" y="2590800"/>
+            <a:ext cx="323850" cy="266700"/>
+          </a:xfrm>
+          <a:prstGeom prst="rect">
+            <a:avLst/>
+          </a:prstGeom>
+          <a:solidFill>
+            <a:srgbClr val="176F68"/>
+          </a:solidFill>
+          <a:ln>
+            <a:noFill/>
+          </a:ln>
+          <a:effectLst/>
+        </p:spPr>
+        <p:style>
+          <a:lnRef idx="1">
+            <a:schemeClr val="accent1"/>
+          </a:lnRef>
+          <a:fillRef idx="3">
+            <a:schemeClr val="accent1"/>
+          </a:fillRef>
+          <a:effectRef idx="0">
+            <a:schemeClr val="accent1"/>
+          </a:effectRef>
+          <a:fontRef idx="minor">
+            <a:schemeClr val="lt1"/>
+          </a:fontRef>
+        </p:style>
+        <p:txBody>
+          <a:bodyPr rtlCol="0" anchor="ctr"/>
+          <a:lstStyle/>
+          <a:p>
+            <a:pPr algn="ctr"/>
+          </a:p>
+        </p:txBody>
+      </p:sp>
+      <p:sp>
+        <p:nvSpPr>
+          <p:cNvPr id="63" name="05"/>
           <p:cNvSpPr txBox="1"/>
           <p:nvPr/>
         </p:nvSpPr>
         <p:spPr>
           <a:xfrm>
-            <a:off x="7772400" y="2952750"/>
-            <a:ext cx="647700" cy="228600"/>
+            <a:off x="10210800" y="2619375"/>
+            <a:ext cx="323850" cy="228600"/>
+          </a:xfrm>
+          <a:prstGeom prst="rect">
+            <a:avLst/>
+          </a:prstGeom>
+          <a:noFill/>
+          <a:effectLst/>
+        </p:spPr>
+        <p:txBody>
+          <a:bodyPr wrap="square" lIns="0" rIns="0" tIns="0" bIns="0">
+            <a:spAutoFit/>
+          </a:bodyPr>
+          <a:lstStyle/>
+          <a:p>
+            <a:pPr algn="ctr">
+              <a:lnSpc>
+                <a:spcPct val="112000"/>
+              </a:lnSpc>
+              <a:spcAft>
+                <a:spcPts val="300"/>
+              </a:spcAft>
+            </a:pPr>
+            <a:r>
+              <a:rPr sz="1350" b="1" lang="zh-CN">
+                <a:solidFill>
+                  <a:srgbClr val="FFFFFF"/>
+                </a:solidFill>
+                <a:latin typeface="Microsoft YaHei"/>
+                <a:ea typeface="Microsoft YaHei"/>
+              </a:rPr>
+              <a:t>05</a:t>
+            </a:r>
+          </a:p>
+        </p:txBody>
+      </p:sp>
+      <p:sp>
+        <p:nvSpPr>
+          <p:cNvPr id="64" name="性能结果"/>
+          <p:cNvSpPr txBox="1"/>
+          <p:nvPr/>
+        </p:nvSpPr>
+        <p:spPr>
+          <a:xfrm>
+            <a:off x="10648950" y="2571750"/>
+            <a:ext cx="3943350" cy="342900"/>
           </a:xfrm>
           <a:prstGeom prst="rect">
             <a:avLst/>
@@ -5641,72 +6331,116 @@
               </a:spcAft>
             </a:pPr>
             <a:r>
-              <a:rPr sz="1350" b="0" lang="zh-CN">
-                <a:solidFill>
-                  <a:srgbClr val="657184"/>
+              <a:rPr sz="1800" b="1" lang="zh-CN">
+                <a:solidFill>
+                  <a:srgbClr val="176F68"/>
                 </a:solidFill>
                 <a:latin typeface="Microsoft YaHei"/>
                 <a:ea typeface="Microsoft YaHei"/>
               </a:rPr>
-              <a:t>贪心</a:t>
-            </a:r>
-          </a:p>
-        </p:txBody>
-      </p:sp>
-      <p:sp>
-        <p:nvSpPr>
-          <p:cNvPr id="49" name="Rectangle 48"/>
-          <p:cNvSpPr/>
-          <p:nvPr/>
-        </p:nvSpPr>
-        <p:spPr>
-          <a:xfrm>
-            <a:off x="8486775" y="3000375"/>
-            <a:ext cx="1809750" cy="123824"/>
-          </a:xfrm>
-          <a:prstGeom prst="rect">
-            <a:avLst/>
-          </a:prstGeom>
-          <a:solidFill>
-            <a:srgbClr val="C8D2DF"/>
-          </a:solidFill>
-          <a:ln>
-            <a:noFill/>
-          </a:ln>
-          <a:effectLst/>
-        </p:spPr>
-        <p:style>
-          <a:lnRef idx="1">
-            <a:schemeClr val="accent1"/>
-          </a:lnRef>
-          <a:fillRef idx="3">
-            <a:schemeClr val="accent1"/>
-          </a:fillRef>
-          <a:effectRef idx="0">
-            <a:schemeClr val="accent1"/>
-          </a:effectRef>
-          <a:fontRef idx="minor">
-            <a:schemeClr val="lt1"/>
-          </a:fontRef>
-        </p:style>
-        <p:txBody>
-          <a:bodyPr rtlCol="0" anchor="ctr"/>
-          <a:lstStyle/>
-          <a:p>
-            <a:pPr algn="ctr"/>
-          </a:p>
-        </p:txBody>
-      </p:sp>
-      <p:sp>
-        <p:nvSpPr>
-          <p:cNvPr id="50" name="3,581,641"/>
+              <a:t>性能结果</a:t>
+            </a:r>
+          </a:p>
+        </p:txBody>
+      </p:sp>
+      <p:sp>
+        <p:nvSpPr>
+          <p:cNvPr id="65" name="39 条公开 Trace 累计 · 官方贪心 → 本方案"/>
           <p:cNvSpPr txBox="1"/>
           <p:nvPr/>
         </p:nvSpPr>
         <p:spPr>
           <a:xfrm>
-            <a:off x="10420350" y="2943225"/>
-            <a:ext cx="1390650" cy="238125"/>
+            <a:off x="10210800" y="2933700"/>
+            <a:ext cx="4381500" cy="228600"/>
+          </a:xfrm>
+          <a:prstGeom prst="rect">
+            <a:avLst/>
+          </a:prstGeom>
+          <a:noFill/>
+          <a:effectLst/>
+        </p:spPr>
+        <p:txBody>
+          <a:bodyPr wrap="square" lIns="0" rIns="0" tIns="0" bIns="0">
+            <a:spAutoFit/>
+          </a:bodyPr>
+          <a:lstStyle/>
+          <a:p>
+            <a:pPr algn="l">
+              <a:lnSpc>
+                <a:spcPct val="112000"/>
+              </a:lnSpc>
+              <a:spcAft>
+                <a:spcPts val="300"/>
+              </a:spcAft>
+            </a:pPr>
+            <a:r>
+              <a:rPr sz="1500" b="0" lang="zh-CN">
+                <a:solidFill>
+                  <a:srgbClr val="627286"/>
+                </a:solidFill>
+                <a:latin typeface="Microsoft YaHei"/>
+                <a:ea typeface="Microsoft YaHei"/>
+              </a:rPr>
+              <a:t>39 条公开 Trace 累计 · 官方贪心 → 本方案</a:t>
+            </a:r>
+          </a:p>
+        </p:txBody>
+      </p:sp>
+      <p:sp>
+        <p:nvSpPr>
+          <p:cNvPr id="66" name="总成本 J"/>
+          <p:cNvSpPr txBox="1"/>
+          <p:nvPr/>
+        </p:nvSpPr>
+        <p:spPr>
+          <a:xfrm>
+            <a:off x="10210800" y="3267075"/>
+            <a:ext cx="2324100" cy="285750"/>
+          </a:xfrm>
+          <a:prstGeom prst="rect">
+            <a:avLst/>
+          </a:prstGeom>
+          <a:noFill/>
+          <a:effectLst/>
+        </p:spPr>
+        <p:txBody>
+          <a:bodyPr wrap="square" lIns="0" rIns="0" tIns="0" bIns="0">
+            <a:spAutoFit/>
+          </a:bodyPr>
+          <a:lstStyle/>
+          <a:p>
+            <a:pPr algn="l">
+              <a:lnSpc>
+                <a:spcPct val="112000"/>
+              </a:lnSpc>
+              <a:spcAft>
+                <a:spcPts val="300"/>
+              </a:spcAft>
+            </a:pPr>
+            <a:r>
+              <a:rPr sz="1800" b="1" lang="zh-CN">
+                <a:solidFill>
+                  <a:srgbClr val="1F2937"/>
+                </a:solidFill>
+                <a:latin typeface="Microsoft YaHei"/>
+                <a:ea typeface="Microsoft YaHei"/>
+              </a:rPr>
+              <a:t>总成本 J</a:t>
+            </a:r>
+          </a:p>
+        </p:txBody>
+      </p:sp>
+      <p:sp>
+        <p:nvSpPr>
+          <p:cNvPr id="67" name="↓ 36.51%"/>
+          <p:cNvSpPr txBox="1"/>
+          <p:nvPr/>
+        </p:nvSpPr>
+        <p:spPr>
+          <a:xfrm>
+            <a:off x="12573000" y="3267075"/>
+            <a:ext cx="2019300" cy="295275"/>
           </a:xfrm>
           <a:prstGeom prst="rect">
             <a:avLst/>
@@ -5729,28 +6463,28 @@
               </a:spcAft>
             </a:pPr>
             <a:r>
-              <a:rPr sz="1575" b="1" lang="zh-CN">
-                <a:solidFill>
-                  <a:srgbClr val="657184"/>
+              <a:rPr sz="1950" b="1" lang="zh-CN">
+                <a:solidFill>
+                  <a:srgbClr val="176F68"/>
                 </a:solidFill>
                 <a:latin typeface="Microsoft YaHei"/>
                 <a:ea typeface="Microsoft YaHei"/>
               </a:rPr>
-              <a:t>3,581,641</a:t>
-            </a:r>
-          </a:p>
-        </p:txBody>
-      </p:sp>
-      <p:sp>
-        <p:nvSpPr>
-          <p:cNvPr id="51" name="本方案"/>
+              <a:t>↓ 36.51%</a:t>
+            </a:r>
+          </a:p>
+        </p:txBody>
+      </p:sp>
+      <p:sp>
+        <p:nvSpPr>
+          <p:cNvPr id="68" name="贪心"/>
           <p:cNvSpPr txBox="1"/>
           <p:nvPr/>
         </p:nvSpPr>
         <p:spPr>
           <a:xfrm>
-            <a:off x="7772400" y="3248025"/>
-            <a:ext cx="647700" cy="228600"/>
+            <a:off x="10210800" y="3638550"/>
+            <a:ext cx="666750" cy="238125"/>
           </a:xfrm>
           <a:prstGeom prst="rect">
             <a:avLst/>
@@ -5773,34 +6507,34 @@
               </a:spcAft>
             </a:pPr>
             <a:r>
-              <a:rPr sz="1350" b="0" lang="zh-CN">
-                <a:solidFill>
-                  <a:srgbClr val="24756D"/>
+              <a:rPr sz="1425" b="0" lang="zh-CN">
+                <a:solidFill>
+                  <a:srgbClr val="627286"/>
                 </a:solidFill>
                 <a:latin typeface="Microsoft YaHei"/>
                 <a:ea typeface="Microsoft YaHei"/>
               </a:rPr>
-              <a:t>本方案</a:t>
-            </a:r>
-          </a:p>
-        </p:txBody>
-      </p:sp>
-      <p:sp>
-        <p:nvSpPr>
-          <p:cNvPr id="52" name="Rectangle 51"/>
+              <a:t>贪心</a:t>
+            </a:r>
+          </a:p>
+        </p:txBody>
+      </p:sp>
+      <p:sp>
+        <p:nvSpPr>
+          <p:cNvPr id="69" name="Rectangle 68"/>
           <p:cNvSpPr/>
           <p:nvPr/>
         </p:nvSpPr>
         <p:spPr>
           <a:xfrm>
-            <a:off x="8486775" y="3295650"/>
-            <a:ext cx="1148954" cy="123824"/>
+            <a:off x="10963275" y="3695700"/>
+            <a:ext cx="2190750" cy="123824"/>
           </a:xfrm>
           <a:prstGeom prst="rect">
             <a:avLst/>
           </a:prstGeom>
           <a:solidFill>
-            <a:srgbClr val="24756D"/>
+            <a:srgbClr val="C8D2DF"/>
           </a:solidFill>
           <a:ln>
             <a:noFill/>
@@ -5831,14 +6565,14 @@
       </p:sp>
       <p:sp>
         <p:nvSpPr>
-          <p:cNvPr id="53" name="2,273,874"/>
+          <p:cNvPr id="70" name="3,581,641"/>
           <p:cNvSpPr txBox="1"/>
           <p:nvPr/>
         </p:nvSpPr>
         <p:spPr>
           <a:xfrm>
-            <a:off x="10420350" y="3238500"/>
-            <a:ext cx="1390650" cy="238125"/>
+            <a:off x="13287375" y="3629025"/>
+            <a:ext cx="1304925" cy="257175"/>
           </a:xfrm>
           <a:prstGeom prst="rect">
             <a:avLst/>
@@ -5861,28 +6595,28 @@
               </a:spcAft>
             </a:pPr>
             <a:r>
-              <a:rPr sz="1575" b="1" lang="zh-CN">
-                <a:solidFill>
-                  <a:srgbClr val="24756D"/>
+              <a:rPr sz="1725" b="1" lang="zh-CN">
+                <a:solidFill>
+                  <a:srgbClr val="627286"/>
                 </a:solidFill>
                 <a:latin typeface="Microsoft YaHei"/>
                 <a:ea typeface="Microsoft YaHei"/>
               </a:rPr>
-              <a:t>2,273,874</a:t>
-            </a:r>
-          </a:p>
-        </p:txBody>
-      </p:sp>
-      <p:sp>
-        <p:nvSpPr>
-          <p:cNvPr id="54" name="前台调用费  ↓ 66.82%"/>
+              <a:t>3,581,641</a:t>
+            </a:r>
+          </a:p>
+        </p:txBody>
+      </p:sp>
+      <p:sp>
+        <p:nvSpPr>
+          <p:cNvPr id="71" name="本方案"/>
           <p:cNvSpPr txBox="1"/>
           <p:nvPr/>
         </p:nvSpPr>
         <p:spPr>
           <a:xfrm>
-            <a:off x="7772400" y="3648075"/>
-            <a:ext cx="4038600" cy="285750"/>
+            <a:off x="10210800" y="3924300"/>
+            <a:ext cx="666750" cy="238125"/>
           </a:xfrm>
           <a:prstGeom prst="rect">
             <a:avLst/>
@@ -5905,28 +6639,152 @@
               </a:spcAft>
             </a:pPr>
             <a:r>
-              <a:rPr sz="1725" b="1" lang="zh-CN">
-                <a:solidFill>
-                  <a:srgbClr val="24756D"/>
+              <a:rPr sz="1425" b="0" lang="zh-CN">
+                <a:solidFill>
+                  <a:srgbClr val="176F68"/>
                 </a:solidFill>
                 <a:latin typeface="Microsoft YaHei"/>
                 <a:ea typeface="Microsoft YaHei"/>
               </a:rPr>
-              <a:t>前台调用费  ↓ 66.82%</a:t>
-            </a:r>
-          </a:p>
-        </p:txBody>
-      </p:sp>
-      <p:sp>
-        <p:nvSpPr>
-          <p:cNvPr id="55" name="贪心"/>
+              <a:t>本方案</a:t>
+            </a:r>
+          </a:p>
+        </p:txBody>
+      </p:sp>
+      <p:sp>
+        <p:nvSpPr>
+          <p:cNvPr id="72" name="Rectangle 71"/>
+          <p:cNvSpPr/>
+          <p:nvPr/>
+        </p:nvSpPr>
+        <p:spPr>
+          <a:xfrm>
+            <a:off x="10963275" y="3981450"/>
+            <a:ext cx="1390839" cy="123824"/>
+          </a:xfrm>
+          <a:prstGeom prst="rect">
+            <a:avLst/>
+          </a:prstGeom>
+          <a:solidFill>
+            <a:srgbClr val="176F68"/>
+          </a:solidFill>
+          <a:ln>
+            <a:noFill/>
+          </a:ln>
+          <a:effectLst/>
+        </p:spPr>
+        <p:style>
+          <a:lnRef idx="1">
+            <a:schemeClr val="accent1"/>
+          </a:lnRef>
+          <a:fillRef idx="3">
+            <a:schemeClr val="accent1"/>
+          </a:fillRef>
+          <a:effectRef idx="0">
+            <a:schemeClr val="accent1"/>
+          </a:effectRef>
+          <a:fontRef idx="minor">
+            <a:schemeClr val="lt1"/>
+          </a:fontRef>
+        </p:style>
+        <p:txBody>
+          <a:bodyPr rtlCol="0" anchor="ctr"/>
+          <a:lstStyle/>
+          <a:p>
+            <a:pPr algn="ctr"/>
+          </a:p>
+        </p:txBody>
+      </p:sp>
+      <p:sp>
+        <p:nvSpPr>
+          <p:cNvPr id="73" name="2,273,874"/>
           <p:cNvSpPr txBox="1"/>
           <p:nvPr/>
         </p:nvSpPr>
         <p:spPr>
           <a:xfrm>
-            <a:off x="7772400" y="4010025"/>
-            <a:ext cx="647700" cy="228600"/>
+            <a:off x="13287375" y="3914775"/>
+            <a:ext cx="1304925" cy="257175"/>
+          </a:xfrm>
+          <a:prstGeom prst="rect">
+            <a:avLst/>
+          </a:prstGeom>
+          <a:noFill/>
+          <a:effectLst/>
+        </p:spPr>
+        <p:txBody>
+          <a:bodyPr wrap="square" lIns="0" rIns="0" tIns="0" bIns="0">
+            <a:spAutoFit/>
+          </a:bodyPr>
+          <a:lstStyle/>
+          <a:p>
+            <a:pPr algn="r">
+              <a:lnSpc>
+                <a:spcPct val="112000"/>
+              </a:lnSpc>
+              <a:spcAft>
+                <a:spcPts val="300"/>
+              </a:spcAft>
+            </a:pPr>
+            <a:r>
+              <a:rPr sz="1725" b="1" lang="zh-CN">
+                <a:solidFill>
+                  <a:srgbClr val="176F68"/>
+                </a:solidFill>
+                <a:latin typeface="Microsoft YaHei"/>
+                <a:ea typeface="Microsoft YaHei"/>
+              </a:rPr>
+              <a:t>2,273,874</a:t>
+            </a:r>
+          </a:p>
+        </p:txBody>
+      </p:sp>
+      <p:cxnSp>
+        <p:nvCxnSpPr>
+          <p:cNvPr id="74" name="Connector 73"/>
+          <p:cNvCxnSpPr/>
+          <p:nvPr/>
+        </p:nvCxnSpPr>
+        <p:spPr>
+          <a:xfrm>
+            <a:off x="10210800" y="4324350"/>
+            <a:ext cx="4381500" cy="0"/>
+          </a:xfrm>
+          <a:prstGeom prst="line">
+            <a:avLst/>
+          </a:prstGeom>
+          <a:ln w="12700">
+            <a:solidFill>
+              <a:srgbClr val="DCE2E9"/>
+            </a:solidFill>
+          </a:ln>
+          <a:effectLst/>
+        </p:spPr>
+        <p:style>
+          <a:lnRef idx="2">
+            <a:schemeClr val="accent1"/>
+          </a:lnRef>
+          <a:fillRef idx="0">
+            <a:schemeClr val="accent1"/>
+          </a:fillRef>
+          <a:effectRef idx="0">
+            <a:schemeClr val="accent1"/>
+          </a:effectRef>
+          <a:fontRef idx="minor">
+            <a:schemeClr val="tx1"/>
+          </a:fontRef>
+        </p:style>
+      </p:cxnSp>
+      <p:sp>
+        <p:nvSpPr>
+          <p:cNvPr id="75" name="前台调用费"/>
+          <p:cNvSpPr txBox="1"/>
+          <p:nvPr/>
+        </p:nvSpPr>
+        <p:spPr>
+          <a:xfrm>
+            <a:off x="10210800" y="4400550"/>
+            <a:ext cx="2324100" cy="285750"/>
           </a:xfrm>
           <a:prstGeom prst="rect">
             <a:avLst/>
@@ -5949,72 +6807,28 @@
               </a:spcAft>
             </a:pPr>
             <a:r>
-              <a:rPr sz="1350" b="0" lang="zh-CN">
-                <a:solidFill>
-                  <a:srgbClr val="657184"/>
+              <a:rPr sz="1800" b="1" lang="zh-CN">
+                <a:solidFill>
+                  <a:srgbClr val="1F2937"/>
                 </a:solidFill>
                 <a:latin typeface="Microsoft YaHei"/>
                 <a:ea typeface="Microsoft YaHei"/>
               </a:rPr>
-              <a:t>贪心</a:t>
-            </a:r>
-          </a:p>
-        </p:txBody>
-      </p:sp>
-      <p:sp>
-        <p:nvSpPr>
-          <p:cNvPr id="56" name="Rectangle 55"/>
-          <p:cNvSpPr/>
-          <p:nvPr/>
-        </p:nvSpPr>
-        <p:spPr>
-          <a:xfrm>
-            <a:off x="8486775" y="4057650"/>
-            <a:ext cx="1809750" cy="123824"/>
-          </a:xfrm>
-          <a:prstGeom prst="rect">
-            <a:avLst/>
-          </a:prstGeom>
-          <a:solidFill>
-            <a:srgbClr val="C8D2DF"/>
-          </a:solidFill>
-          <a:ln>
-            <a:noFill/>
-          </a:ln>
-          <a:effectLst/>
-        </p:spPr>
-        <p:style>
-          <a:lnRef idx="1">
-            <a:schemeClr val="accent1"/>
-          </a:lnRef>
-          <a:fillRef idx="3">
-            <a:schemeClr val="accent1"/>
-          </a:fillRef>
-          <a:effectRef idx="0">
-            <a:schemeClr val="accent1"/>
-          </a:effectRef>
-          <a:fontRef idx="minor">
-            <a:schemeClr val="lt1"/>
-          </a:fontRef>
-        </p:style>
-        <p:txBody>
-          <a:bodyPr rtlCol="0" anchor="ctr"/>
-          <a:lstStyle/>
-          <a:p>
-            <a:pPr algn="ctr"/>
-          </a:p>
-        </p:txBody>
-      </p:sp>
-      <p:sp>
-        <p:nvSpPr>
-          <p:cNvPr id="57" name="610,928"/>
+              <a:t>前台调用费</a:t>
+            </a:r>
+          </a:p>
+        </p:txBody>
+      </p:sp>
+      <p:sp>
+        <p:nvSpPr>
+          <p:cNvPr id="76" name="↓ 66.82%"/>
           <p:cNvSpPr txBox="1"/>
           <p:nvPr/>
         </p:nvSpPr>
         <p:spPr>
           <a:xfrm>
-            <a:off x="10420350" y="4000500"/>
-            <a:ext cx="1390650" cy="238125"/>
+            <a:off x="12573000" y="4400550"/>
+            <a:ext cx="2019300" cy="295275"/>
           </a:xfrm>
           <a:prstGeom prst="rect">
             <a:avLst/>
@@ -6037,28 +6851,28 @@
               </a:spcAft>
             </a:pPr>
             <a:r>
-              <a:rPr sz="1575" b="1" lang="zh-CN">
-                <a:solidFill>
-                  <a:srgbClr val="657184"/>
+              <a:rPr sz="1950" b="1" lang="zh-CN">
+                <a:solidFill>
+                  <a:srgbClr val="176F68"/>
                 </a:solidFill>
                 <a:latin typeface="Microsoft YaHei"/>
                 <a:ea typeface="Microsoft YaHei"/>
               </a:rPr>
-              <a:t>610,928</a:t>
-            </a:r>
-          </a:p>
-        </p:txBody>
-      </p:sp>
-      <p:sp>
-        <p:nvSpPr>
-          <p:cNvPr id="58" name="本方案"/>
+              <a:t>↓ 66.82%</a:t>
+            </a:r>
+          </a:p>
+        </p:txBody>
+      </p:sp>
+      <p:sp>
+        <p:nvSpPr>
+          <p:cNvPr id="77" name="贪心"/>
           <p:cNvSpPr txBox="1"/>
           <p:nvPr/>
         </p:nvSpPr>
         <p:spPr>
           <a:xfrm>
-            <a:off x="7772400" y="4305300"/>
-            <a:ext cx="647700" cy="228600"/>
+            <a:off x="10210800" y="4772025"/>
+            <a:ext cx="666750" cy="238125"/>
           </a:xfrm>
           <a:prstGeom prst="rect">
             <a:avLst/>
@@ -6081,34 +6895,34 @@
               </a:spcAft>
             </a:pPr>
             <a:r>
-              <a:rPr sz="1350" b="0" lang="zh-CN">
-                <a:solidFill>
-                  <a:srgbClr val="24756D"/>
+              <a:rPr sz="1425" b="0" lang="zh-CN">
+                <a:solidFill>
+                  <a:srgbClr val="627286"/>
                 </a:solidFill>
                 <a:latin typeface="Microsoft YaHei"/>
                 <a:ea typeface="Microsoft YaHei"/>
               </a:rPr>
-              <a:t>本方案</a:t>
-            </a:r>
-          </a:p>
-        </p:txBody>
-      </p:sp>
-      <p:sp>
-        <p:nvSpPr>
-          <p:cNvPr id="59" name="Rectangle 58"/>
+              <a:t>贪心</a:t>
+            </a:r>
+          </a:p>
+        </p:txBody>
+      </p:sp>
+      <p:sp>
+        <p:nvSpPr>
+          <p:cNvPr id="78" name="Rectangle 77"/>
           <p:cNvSpPr/>
           <p:nvPr/>
         </p:nvSpPr>
         <p:spPr>
           <a:xfrm>
-            <a:off x="8486775" y="4352925"/>
-            <a:ext cx="600549" cy="123824"/>
+            <a:off x="10963275" y="4829175"/>
+            <a:ext cx="2190750" cy="123824"/>
           </a:xfrm>
           <a:prstGeom prst="rect">
             <a:avLst/>
           </a:prstGeom>
           <a:solidFill>
-            <a:srgbClr val="24756D"/>
+            <a:srgbClr val="C8D2DF"/>
           </a:solidFill>
           <a:ln>
             <a:noFill/>
@@ -6139,14 +6953,14 @@
       </p:sp>
       <p:sp>
         <p:nvSpPr>
-          <p:cNvPr id="60" name="202,731"/>
+          <p:cNvPr id="79" name="610,928"/>
           <p:cNvSpPr txBox="1"/>
           <p:nvPr/>
         </p:nvSpPr>
         <p:spPr>
           <a:xfrm>
-            <a:off x="10420350" y="4295775"/>
-            <a:ext cx="1390650" cy="238125"/>
+            <a:off x="13287375" y="4762500"/>
+            <a:ext cx="1304925" cy="257175"/>
           </a:xfrm>
           <a:prstGeom prst="rect">
             <a:avLst/>
@@ -6169,28 +6983,28 @@
               </a:spcAft>
             </a:pPr>
             <a:r>
-              <a:rPr sz="1575" b="1" lang="zh-CN">
-                <a:solidFill>
-                  <a:srgbClr val="24756D"/>
+              <a:rPr sz="1725" b="1" lang="zh-CN">
+                <a:solidFill>
+                  <a:srgbClr val="627286"/>
                 </a:solidFill>
                 <a:latin typeface="Microsoft YaHei"/>
                 <a:ea typeface="Microsoft YaHei"/>
               </a:rPr>
-              <a:t>202,731</a:t>
-            </a:r>
-          </a:p>
-        </p:txBody>
-      </p:sp>
-      <p:sp>
-        <p:nvSpPr>
-          <p:cNvPr id="61" name="后台调用费  ↓ 94.84%"/>
+              <a:t>610,928</a:t>
+            </a:r>
+          </a:p>
+        </p:txBody>
+      </p:sp>
+      <p:sp>
+        <p:nvSpPr>
+          <p:cNvPr id="80" name="本方案"/>
           <p:cNvSpPr txBox="1"/>
           <p:nvPr/>
         </p:nvSpPr>
         <p:spPr>
           <a:xfrm>
-            <a:off x="7772400" y="4705350"/>
-            <a:ext cx="4038600" cy="285750"/>
+            <a:off x="10210800" y="5057775"/>
+            <a:ext cx="666750" cy="238125"/>
           </a:xfrm>
           <a:prstGeom prst="rect">
             <a:avLst/>
@@ -6213,28 +7027,152 @@
               </a:spcAft>
             </a:pPr>
             <a:r>
-              <a:rPr sz="1725" b="1" lang="zh-CN">
-                <a:solidFill>
-                  <a:srgbClr val="24756D"/>
+              <a:rPr sz="1425" b="0" lang="zh-CN">
+                <a:solidFill>
+                  <a:srgbClr val="176F68"/>
                 </a:solidFill>
                 <a:latin typeface="Microsoft YaHei"/>
                 <a:ea typeface="Microsoft YaHei"/>
               </a:rPr>
-              <a:t>后台调用费  ↓ 94.84%</a:t>
-            </a:r>
-          </a:p>
-        </p:txBody>
-      </p:sp>
-      <p:sp>
-        <p:nvSpPr>
-          <p:cNvPr id="62" name="贪心"/>
+              <a:t>本方案</a:t>
+            </a:r>
+          </a:p>
+        </p:txBody>
+      </p:sp>
+      <p:sp>
+        <p:nvSpPr>
+          <p:cNvPr id="81" name="Rectangle 80"/>
+          <p:cNvSpPr/>
+          <p:nvPr/>
+        </p:nvSpPr>
+        <p:spPr>
+          <a:xfrm>
+            <a:off x="10963275" y="5114925"/>
+            <a:ext cx="726980" cy="123824"/>
+          </a:xfrm>
+          <a:prstGeom prst="rect">
+            <a:avLst/>
+          </a:prstGeom>
+          <a:solidFill>
+            <a:srgbClr val="176F68"/>
+          </a:solidFill>
+          <a:ln>
+            <a:noFill/>
+          </a:ln>
+          <a:effectLst/>
+        </p:spPr>
+        <p:style>
+          <a:lnRef idx="1">
+            <a:schemeClr val="accent1"/>
+          </a:lnRef>
+          <a:fillRef idx="3">
+            <a:schemeClr val="accent1"/>
+          </a:fillRef>
+          <a:effectRef idx="0">
+            <a:schemeClr val="accent1"/>
+          </a:effectRef>
+          <a:fontRef idx="minor">
+            <a:schemeClr val="lt1"/>
+          </a:fontRef>
+        </p:style>
+        <p:txBody>
+          <a:bodyPr rtlCol="0" anchor="ctr"/>
+          <a:lstStyle/>
+          <a:p>
+            <a:pPr algn="ctr"/>
+          </a:p>
+        </p:txBody>
+      </p:sp>
+      <p:sp>
+        <p:nvSpPr>
+          <p:cNvPr id="82" name="202,731"/>
           <p:cNvSpPr txBox="1"/>
           <p:nvPr/>
         </p:nvSpPr>
         <p:spPr>
           <a:xfrm>
-            <a:off x="7772400" y="5067300"/>
-            <a:ext cx="647700" cy="228600"/>
+            <a:off x="13287375" y="5048250"/>
+            <a:ext cx="1304925" cy="257175"/>
+          </a:xfrm>
+          <a:prstGeom prst="rect">
+            <a:avLst/>
+          </a:prstGeom>
+          <a:noFill/>
+          <a:effectLst/>
+        </p:spPr>
+        <p:txBody>
+          <a:bodyPr wrap="square" lIns="0" rIns="0" tIns="0" bIns="0">
+            <a:spAutoFit/>
+          </a:bodyPr>
+          <a:lstStyle/>
+          <a:p>
+            <a:pPr algn="r">
+              <a:lnSpc>
+                <a:spcPct val="112000"/>
+              </a:lnSpc>
+              <a:spcAft>
+                <a:spcPts val="300"/>
+              </a:spcAft>
+            </a:pPr>
+            <a:r>
+              <a:rPr sz="1725" b="1" lang="zh-CN">
+                <a:solidFill>
+                  <a:srgbClr val="176F68"/>
+                </a:solidFill>
+                <a:latin typeface="Microsoft YaHei"/>
+                <a:ea typeface="Microsoft YaHei"/>
+              </a:rPr>
+              <a:t>202,731</a:t>
+            </a:r>
+          </a:p>
+        </p:txBody>
+      </p:sp>
+      <p:cxnSp>
+        <p:nvCxnSpPr>
+          <p:cNvPr id="83" name="Connector 82"/>
+          <p:cNvCxnSpPr/>
+          <p:nvPr/>
+        </p:nvCxnSpPr>
+        <p:spPr>
+          <a:xfrm>
+            <a:off x="10210800" y="5457825"/>
+            <a:ext cx="4381500" cy="0"/>
+          </a:xfrm>
+          <a:prstGeom prst="line">
+            <a:avLst/>
+          </a:prstGeom>
+          <a:ln w="12700">
+            <a:solidFill>
+              <a:srgbClr val="DCE2E9"/>
+            </a:solidFill>
+          </a:ln>
+          <a:effectLst/>
+        </p:spPr>
+        <p:style>
+          <a:lnRef idx="2">
+            <a:schemeClr val="accent1"/>
+          </a:lnRef>
+          <a:fillRef idx="0">
+            <a:schemeClr val="accent1"/>
+          </a:fillRef>
+          <a:effectRef idx="0">
+            <a:schemeClr val="accent1"/>
+          </a:effectRef>
+          <a:fontRef idx="minor">
+            <a:schemeClr val="tx1"/>
+          </a:fontRef>
+        </p:style>
+      </p:cxnSp>
+      <p:sp>
+        <p:nvSpPr>
+          <p:cNvPr id="84" name="后台调用费"/>
+          <p:cNvSpPr txBox="1"/>
+          <p:nvPr/>
+        </p:nvSpPr>
+        <p:spPr>
+          <a:xfrm>
+            <a:off x="10210800" y="5534025"/>
+            <a:ext cx="2324100" cy="285750"/>
           </a:xfrm>
           <a:prstGeom prst="rect">
             <a:avLst/>
@@ -6257,72 +7195,28 @@
               </a:spcAft>
             </a:pPr>
             <a:r>
-              <a:rPr sz="1350" b="0" lang="zh-CN">
-                <a:solidFill>
-                  <a:srgbClr val="657184"/>
+              <a:rPr sz="1800" b="1" lang="zh-CN">
+                <a:solidFill>
+                  <a:srgbClr val="1F2937"/>
                 </a:solidFill>
                 <a:latin typeface="Microsoft YaHei"/>
                 <a:ea typeface="Microsoft YaHei"/>
               </a:rPr>
-              <a:t>贪心</a:t>
-            </a:r>
-          </a:p>
-        </p:txBody>
-      </p:sp>
-      <p:sp>
-        <p:nvSpPr>
-          <p:cNvPr id="63" name="Rectangle 62"/>
-          <p:cNvSpPr/>
-          <p:nvPr/>
-        </p:nvSpPr>
-        <p:spPr>
-          <a:xfrm>
-            <a:off x="8486775" y="5114925"/>
-            <a:ext cx="1809750" cy="123824"/>
-          </a:xfrm>
-          <a:prstGeom prst="rect">
-            <a:avLst/>
-          </a:prstGeom>
-          <a:solidFill>
-            <a:srgbClr val="C8D2DF"/>
-          </a:solidFill>
-          <a:ln>
-            <a:noFill/>
-          </a:ln>
-          <a:effectLst/>
-        </p:spPr>
-        <p:style>
-          <a:lnRef idx="1">
-            <a:schemeClr val="accent1"/>
-          </a:lnRef>
-          <a:fillRef idx="3">
-            <a:schemeClr val="accent1"/>
-          </a:fillRef>
-          <a:effectRef idx="0">
-            <a:schemeClr val="accent1"/>
-          </a:effectRef>
-          <a:fontRef idx="minor">
-            <a:schemeClr val="lt1"/>
-          </a:fontRef>
-        </p:style>
-        <p:txBody>
-          <a:bodyPr rtlCol="0" anchor="ctr"/>
-          <a:lstStyle/>
-          <a:p>
-            <a:pPr algn="ctr"/>
-          </a:p>
-        </p:txBody>
-      </p:sp>
-      <p:sp>
-        <p:nvSpPr>
-          <p:cNvPr id="64" name="804,656"/>
+              <a:t>后台调用费</a:t>
+            </a:r>
+          </a:p>
+        </p:txBody>
+      </p:sp>
+      <p:sp>
+        <p:nvSpPr>
+          <p:cNvPr id="85" name="↓ 94.84%"/>
           <p:cNvSpPr txBox="1"/>
           <p:nvPr/>
         </p:nvSpPr>
         <p:spPr>
           <a:xfrm>
-            <a:off x="10420350" y="5057775"/>
-            <a:ext cx="1390650" cy="238125"/>
+            <a:off x="12573000" y="5534025"/>
+            <a:ext cx="2019300" cy="295275"/>
           </a:xfrm>
           <a:prstGeom prst="rect">
             <a:avLst/>
@@ -6345,28 +7239,28 @@
               </a:spcAft>
             </a:pPr>
             <a:r>
-              <a:rPr sz="1575" b="1" lang="zh-CN">
-                <a:solidFill>
-                  <a:srgbClr val="657184"/>
+              <a:rPr sz="1950" b="1" lang="zh-CN">
+                <a:solidFill>
+                  <a:srgbClr val="176F68"/>
                 </a:solidFill>
                 <a:latin typeface="Microsoft YaHei"/>
                 <a:ea typeface="Microsoft YaHei"/>
               </a:rPr>
-              <a:t>804,656</a:t>
-            </a:r>
-          </a:p>
-        </p:txBody>
-      </p:sp>
-      <p:sp>
-        <p:nvSpPr>
-          <p:cNvPr id="65" name="本方案"/>
+              <a:t>↓ 94.84%</a:t>
+            </a:r>
+          </a:p>
+        </p:txBody>
+      </p:sp>
+      <p:sp>
+        <p:nvSpPr>
+          <p:cNvPr id="86" name="贪心"/>
           <p:cNvSpPr txBox="1"/>
           <p:nvPr/>
         </p:nvSpPr>
         <p:spPr>
           <a:xfrm>
-            <a:off x="7772400" y="5362575"/>
-            <a:ext cx="647700" cy="228600"/>
+            <a:off x="10210800" y="5905500"/>
+            <a:ext cx="666750" cy="238125"/>
           </a:xfrm>
           <a:prstGeom prst="rect">
             <a:avLst/>
@@ -6389,34 +7283,34 @@
               </a:spcAft>
             </a:pPr>
             <a:r>
-              <a:rPr sz="1350" b="0" lang="zh-CN">
-                <a:solidFill>
-                  <a:srgbClr val="24756D"/>
+              <a:rPr sz="1425" b="0" lang="zh-CN">
+                <a:solidFill>
+                  <a:srgbClr val="627286"/>
                 </a:solidFill>
                 <a:latin typeface="Microsoft YaHei"/>
                 <a:ea typeface="Microsoft YaHei"/>
               </a:rPr>
-              <a:t>本方案</a:t>
-            </a:r>
-          </a:p>
-        </p:txBody>
-      </p:sp>
-      <p:sp>
-        <p:nvSpPr>
-          <p:cNvPr id="66" name="Rectangle 65"/>
+              <a:t>贪心</a:t>
+            </a:r>
+          </a:p>
+        </p:txBody>
+      </p:sp>
+      <p:sp>
+        <p:nvSpPr>
+          <p:cNvPr id="87" name="Rectangle 86"/>
           <p:cNvSpPr/>
           <p:nvPr/>
         </p:nvSpPr>
         <p:spPr>
           <a:xfrm>
-            <a:off x="8486775" y="5410200"/>
-            <a:ext cx="93297" cy="123824"/>
+            <a:off x="10963275" y="5962650"/>
+            <a:ext cx="2190750" cy="123824"/>
           </a:xfrm>
           <a:prstGeom prst="rect">
             <a:avLst/>
           </a:prstGeom>
           <a:solidFill>
-            <a:srgbClr val="24756D"/>
+            <a:srgbClr val="C8D2DF"/>
           </a:solidFill>
           <a:ln>
             <a:noFill/>
@@ -6447,14 +7341,14 @@
       </p:sp>
       <p:sp>
         <p:nvSpPr>
-          <p:cNvPr id="67" name="41,482"/>
+          <p:cNvPr id="88" name="804,656"/>
           <p:cNvSpPr txBox="1"/>
           <p:nvPr/>
         </p:nvSpPr>
         <p:spPr>
           <a:xfrm>
-            <a:off x="10420350" y="5353050"/>
-            <a:ext cx="1390650" cy="238125"/>
+            <a:off x="13287375" y="5895975"/>
+            <a:ext cx="1304925" cy="257175"/>
           </a:xfrm>
           <a:prstGeom prst="rect">
             <a:avLst/>
@@ -6477,28 +7371,28 @@
               </a:spcAft>
             </a:pPr>
             <a:r>
-              <a:rPr sz="1575" b="1" lang="zh-CN">
-                <a:solidFill>
-                  <a:srgbClr val="24756D"/>
+              <a:rPr sz="1725" b="1" lang="zh-CN">
+                <a:solidFill>
+                  <a:srgbClr val="627286"/>
                 </a:solidFill>
                 <a:latin typeface="Microsoft YaHei"/>
                 <a:ea typeface="Microsoft YaHei"/>
               </a:rPr>
-              <a:t>41,482</a:t>
-            </a:r>
-          </a:p>
-        </p:txBody>
-      </p:sp>
-      <p:sp>
-        <p:nvSpPr>
-          <p:cNvPr id="68" name="命中均摊后台费：19.71 → 4.94"/>
+              <a:t>804,656</a:t>
+            </a:r>
+          </a:p>
+        </p:txBody>
+      </p:sp>
+      <p:sp>
+        <p:nvSpPr>
+          <p:cNvPr id="89" name="本方案"/>
           <p:cNvSpPr txBox="1"/>
           <p:nvPr/>
         </p:nvSpPr>
         <p:spPr>
           <a:xfrm>
-            <a:off x="7772400" y="5772150"/>
-            <a:ext cx="4038600" cy="247649"/>
+            <a:off x="10210800" y="6191250"/>
+            <a:ext cx="666750" cy="238125"/>
           </a:xfrm>
           <a:prstGeom prst="rect">
             <a:avLst/>
@@ -6521,28 +7415,116 @@
               </a:spcAft>
             </a:pPr>
             <a:r>
-              <a:rPr sz="1725" b="1" lang="zh-CN">
-                <a:solidFill>
-                  <a:srgbClr val="24756D"/>
+              <a:rPr sz="1425" b="0" lang="zh-CN">
+                <a:solidFill>
+                  <a:srgbClr val="176F68"/>
                 </a:solidFill>
                 <a:latin typeface="Microsoft YaHei"/>
                 <a:ea typeface="Microsoft YaHei"/>
               </a:rPr>
-              <a:t>命中均摊后台费：19.71 → 4.94</a:t>
-            </a:r>
-          </a:p>
-        </p:txBody>
-      </p:sp>
-      <p:sp>
-        <p:nvSpPr>
-          <p:cNvPr id="69" name="总后台调用费 ÷ 总命中数；包含提升投入"/>
+              <a:t>本方案</a:t>
+            </a:r>
+          </a:p>
+        </p:txBody>
+      </p:sp>
+      <p:sp>
+        <p:nvSpPr>
+          <p:cNvPr id="90" name="Rectangle 89"/>
+          <p:cNvSpPr/>
+          <p:nvPr/>
+        </p:nvSpPr>
+        <p:spPr>
+          <a:xfrm>
+            <a:off x="10963275" y="6248400"/>
+            <a:ext cx="112938" cy="123824"/>
+          </a:xfrm>
+          <a:prstGeom prst="rect">
+            <a:avLst/>
+          </a:prstGeom>
+          <a:solidFill>
+            <a:srgbClr val="176F68"/>
+          </a:solidFill>
+          <a:ln>
+            <a:noFill/>
+          </a:ln>
+          <a:effectLst/>
+        </p:spPr>
+        <p:style>
+          <a:lnRef idx="1">
+            <a:schemeClr val="accent1"/>
+          </a:lnRef>
+          <a:fillRef idx="3">
+            <a:schemeClr val="accent1"/>
+          </a:fillRef>
+          <a:effectRef idx="0">
+            <a:schemeClr val="accent1"/>
+          </a:effectRef>
+          <a:fontRef idx="minor">
+            <a:schemeClr val="lt1"/>
+          </a:fontRef>
+        </p:style>
+        <p:txBody>
+          <a:bodyPr rtlCol="0" anchor="ctr"/>
+          <a:lstStyle/>
+          <a:p>
+            <a:pPr algn="ctr"/>
+          </a:p>
+        </p:txBody>
+      </p:sp>
+      <p:sp>
+        <p:nvSpPr>
+          <p:cNvPr id="91" name="41,482"/>
           <p:cNvSpPr txBox="1"/>
           <p:nvPr/>
         </p:nvSpPr>
         <p:spPr>
           <a:xfrm>
-            <a:off x="7772400" y="6067425"/>
-            <a:ext cx="4038600" cy="209550"/>
+            <a:off x="13287375" y="6181725"/>
+            <a:ext cx="1304925" cy="257175"/>
+          </a:xfrm>
+          <a:prstGeom prst="rect">
+            <a:avLst/>
+          </a:prstGeom>
+          <a:noFill/>
+          <a:effectLst/>
+        </p:spPr>
+        <p:txBody>
+          <a:bodyPr wrap="square" lIns="0" rIns="0" tIns="0" bIns="0">
+            <a:spAutoFit/>
+          </a:bodyPr>
+          <a:lstStyle/>
+          <a:p>
+            <a:pPr algn="r">
+              <a:lnSpc>
+                <a:spcPct val="112000"/>
+              </a:lnSpc>
+              <a:spcAft>
+                <a:spcPts val="300"/>
+              </a:spcAft>
+            </a:pPr>
+            <a:r>
+              <a:rPr sz="1725" b="1" lang="zh-CN">
+                <a:solidFill>
+                  <a:srgbClr val="176F68"/>
+                </a:solidFill>
+                <a:latin typeface="Microsoft YaHei"/>
+                <a:ea typeface="Microsoft YaHei"/>
+              </a:rPr>
+              <a:t>41,482</a:t>
+            </a:r>
+          </a:p>
+        </p:txBody>
+      </p:sp>
+      <p:sp>
+        <p:nvSpPr>
+          <p:cNvPr id="92" name="命中均摊费  19.71 → 4.94"/>
+          <p:cNvSpPr txBox="1"/>
+          <p:nvPr/>
+        </p:nvSpPr>
+        <p:spPr>
+          <a:xfrm>
+            <a:off x="10210800" y="6572250"/>
+            <a:ext cx="4381500" cy="257175"/>
           </a:xfrm>
           <a:prstGeom prst="rect">
             <a:avLst/>
@@ -6565,28 +7547,28 @@
               </a:spcAft>
             </a:pPr>
             <a:r>
-              <a:rPr sz="1350" b="0" lang="zh-CN">
-                <a:solidFill>
-                  <a:srgbClr val="657184"/>
+              <a:rPr sz="1650" b="1" lang="zh-CN">
+                <a:solidFill>
+                  <a:srgbClr val="176F68"/>
                 </a:solidFill>
                 <a:latin typeface="Microsoft YaHei"/>
                 <a:ea typeface="Microsoft YaHei"/>
               </a:rPr>
-              <a:t>总后台调用费 ÷ 总命中数；包含提升投入</a:t>
-            </a:r>
-          </a:p>
-        </p:txBody>
-      </p:sp>
-      <p:sp>
-        <p:nvSpPr>
-          <p:cNvPr id="70" name="自动评分：67.1981 → 88.4555 / 90"/>
+              <a:t>命中均摊费  19.71 → 4.94</a:t>
+            </a:r>
+          </a:p>
+        </p:txBody>
+      </p:sp>
+      <p:sp>
+        <p:nvSpPr>
+          <p:cNvPr id="93" name="总后台调用费 ÷ 总命中数，含提升投入"/>
           <p:cNvSpPr txBox="1"/>
           <p:nvPr/>
         </p:nvSpPr>
         <p:spPr>
           <a:xfrm>
-            <a:off x="7772400" y="6400800"/>
-            <a:ext cx="4038600" cy="238125"/>
+            <a:off x="10210800" y="6896100"/>
+            <a:ext cx="4381500" cy="190500"/>
           </a:xfrm>
           <a:prstGeom prst="rect">
             <a:avLst/>
@@ -6609,64 +7591,162 @@
               </a:spcAft>
             </a:pPr>
             <a:r>
-              <a:rPr sz="1650" b="1" lang="zh-CN">
-                <a:solidFill>
-                  <a:srgbClr val="24756D"/>
+              <a:rPr sz="1200" b="0" lang="zh-CN">
+                <a:solidFill>
+                  <a:srgbClr val="627286"/>
                 </a:solidFill>
                 <a:latin typeface="Microsoft YaHei"/>
                 <a:ea typeface="Microsoft YaHei"/>
               </a:rPr>
-              <a:t>自动评分：67.1981 → 88.4555 / 90</a:t>
-            </a:r>
-          </a:p>
-        </p:txBody>
-      </p:sp>
-      <p:cxnSp>
-        <p:nvCxnSpPr>
-          <p:cNvPr id="71" name="Connector 70"/>
-          <p:cNvCxnSpPr/>
-          <p:nvPr/>
-        </p:nvCxnSpPr>
-        <p:spPr>
-          <a:xfrm>
-            <a:off x="381000" y="6800850"/>
-            <a:ext cx="11430000" cy="0"/>
-          </a:xfrm>
-          <a:prstGeom prst="line">
-            <a:avLst/>
-          </a:prstGeom>
-          <a:ln w="12700">
+              <a:t>总后台调用费 ÷ 总命中数，含提升投入</a:t>
+            </a:r>
+          </a:p>
+        </p:txBody>
+      </p:sp>
+      <p:sp>
+        <p:nvSpPr>
+          <p:cNvPr id="94" name="Rectangle 93"/>
+          <p:cNvSpPr/>
+          <p:nvPr/>
+        </p:nvSpPr>
+        <p:spPr>
+          <a:xfrm>
+            <a:off x="10020300" y="7334250"/>
+            <a:ext cx="4762500" cy="1733550"/>
+          </a:xfrm>
+          <a:prstGeom prst="rect">
+            <a:avLst/>
+          </a:prstGeom>
+          <a:solidFill>
+            <a:srgbClr val="FFFFFF"/>
+          </a:solidFill>
+          <a:ln w="8890">
             <a:solidFill>
-              <a:srgbClr val="DCE2E9"/>
+              <a:srgbClr val="DDE5EE"/>
             </a:solidFill>
           </a:ln>
           <a:effectLst/>
         </p:spPr>
         <p:style>
-          <a:lnRef idx="2">
+          <a:lnRef idx="1">
             <a:schemeClr val="accent1"/>
           </a:lnRef>
-          <a:fillRef idx="0">
+          <a:fillRef idx="3">
             <a:schemeClr val="accent1"/>
           </a:fillRef>
           <a:effectRef idx="0">
             <a:schemeClr val="accent1"/>
           </a:effectRef>
           <a:fontRef idx="minor">
-            <a:schemeClr val="tx1"/>
+            <a:schemeClr val="lt1"/>
           </a:fontRef>
         </p:style>
-      </p:cxnSp>
-      <p:sp>
-        <p:nvSpPr>
-          <p:cNvPr id="72" name="复杂度：快速 DP 转移 O(nW)、空间 O(n)；细化固定 cnt 为 O(cnt·n·W)、O(cnt·n+nW)。"/>
+        <p:txBody>
+          <a:bodyPr rtlCol="0" anchor="ctr"/>
+          <a:lstStyle/>
+          <a:p>
+            <a:pPr algn="ctr"/>
+          </a:p>
+        </p:txBody>
+      </p:sp>
+      <p:sp>
+        <p:nvSpPr>
+          <p:cNvPr id="95" name="Rectangle 94"/>
+          <p:cNvSpPr/>
+          <p:nvPr/>
+        </p:nvSpPr>
+        <p:spPr>
+          <a:xfrm>
+            <a:off x="10210800" y="7524749"/>
+            <a:ext cx="323850" cy="266700"/>
+          </a:xfrm>
+          <a:prstGeom prst="rect">
+            <a:avLst/>
+          </a:prstGeom>
+          <a:solidFill>
+            <a:srgbClr val="245DA0"/>
+          </a:solidFill>
+          <a:ln>
+            <a:noFill/>
+          </a:ln>
+          <a:effectLst/>
+        </p:spPr>
+        <p:style>
+          <a:lnRef idx="1">
+            <a:schemeClr val="accent1"/>
+          </a:lnRef>
+          <a:fillRef idx="3">
+            <a:schemeClr val="accent1"/>
+          </a:fillRef>
+          <a:effectRef idx="0">
+            <a:schemeClr val="accent1"/>
+          </a:effectRef>
+          <a:fontRef idx="minor">
+            <a:schemeClr val="lt1"/>
+          </a:fontRef>
+        </p:style>
+        <p:txBody>
+          <a:bodyPr rtlCol="0" anchor="ctr"/>
+          <a:lstStyle/>
+          <a:p>
+            <a:pPr algn="ctr"/>
+          </a:p>
+        </p:txBody>
+      </p:sp>
+      <p:sp>
+        <p:nvSpPr>
+          <p:cNvPr id="96" name="06"/>
           <p:cNvSpPr txBox="1"/>
           <p:nvPr/>
         </p:nvSpPr>
         <p:spPr>
           <a:xfrm>
-            <a:off x="381000" y="6829425"/>
-            <a:ext cx="11430000" cy="228600"/>
+            <a:off x="10210800" y="7553324"/>
+            <a:ext cx="323850" cy="228600"/>
+          </a:xfrm>
+          <a:prstGeom prst="rect">
+            <a:avLst/>
+          </a:prstGeom>
+          <a:noFill/>
+          <a:effectLst/>
+        </p:spPr>
+        <p:txBody>
+          <a:bodyPr wrap="square" lIns="0" rIns="0" tIns="0" bIns="0">
+            <a:spAutoFit/>
+          </a:bodyPr>
+          <a:lstStyle/>
+          <a:p>
+            <a:pPr algn="ctr">
+              <a:lnSpc>
+                <a:spcPct val="112000"/>
+              </a:lnSpc>
+              <a:spcAft>
+                <a:spcPts val="300"/>
+              </a:spcAft>
+            </a:pPr>
+            <a:r>
+              <a:rPr sz="1350" b="1" lang="zh-CN">
+                <a:solidFill>
+                  <a:srgbClr val="FFFFFF"/>
+                </a:solidFill>
+                <a:latin typeface="Microsoft YaHei"/>
+                <a:ea typeface="Microsoft YaHei"/>
+              </a:rPr>
+              <a:t>06</a:t>
+            </a:r>
+          </a:p>
+        </p:txBody>
+      </p:sp>
+      <p:sp>
+        <p:nvSpPr>
+          <p:cNvPr id="97" name="复杂度与资源开销"/>
+          <p:cNvSpPr txBox="1"/>
+          <p:nvPr/>
+        </p:nvSpPr>
+        <p:spPr>
+          <a:xfrm>
+            <a:off x="10648950" y="7505700"/>
+            <a:ext cx="3943350" cy="342900"/>
           </a:xfrm>
           <a:prstGeom prst="rect">
             <a:avLst/>
@@ -6689,28 +7769,28 @@
               </a:spcAft>
             </a:pPr>
             <a:r>
-              <a:rPr sz="1425" b="1" lang="zh-CN">
-                <a:solidFill>
-                  <a:srgbClr val="285EA8"/>
+              <a:rPr sz="1800" b="1" lang="zh-CN">
+                <a:solidFill>
+                  <a:srgbClr val="245DA0"/>
                 </a:solidFill>
                 <a:latin typeface="Microsoft YaHei"/>
                 <a:ea typeface="Microsoft YaHei"/>
               </a:rPr>
-              <a:t>复杂度：快速 DP 转移 O(nW)、空间 O(n)；细化固定 cnt 为 O(cnt·n·W)、O(cnt·n+nW)。</a:t>
-            </a:r>
-          </a:p>
-        </p:txBody>
-      </p:sp>
-      <p:sp>
-        <p:nvSpPr>
-          <p:cNvPr id="73" name="n = 片段数，W = 候选窗口，cnt = 组数；候选维护另计 O(nW log(W+1))。"/>
+              <a:t>复杂度与资源开销</a:t>
+            </a:r>
+          </a:p>
+        </p:txBody>
+      </p:sp>
+      <p:sp>
+        <p:nvSpPr>
+          <p:cNvPr id="98" name="快速：时间 O(nW) / 空间 O(n)"/>
           <p:cNvSpPr txBox="1"/>
           <p:nvPr/>
         </p:nvSpPr>
         <p:spPr>
           <a:xfrm>
-            <a:off x="381000" y="7115175"/>
-            <a:ext cx="11430000" cy="200025"/>
+            <a:off x="10210800" y="7877175"/>
+            <a:ext cx="4381500" cy="238125"/>
           </a:xfrm>
           <a:prstGeom prst="rect">
             <a:avLst/>
@@ -6733,28 +7813,28 @@
               </a:spcAft>
             </a:pPr>
             <a:r>
-              <a:rPr sz="1200" b="0" lang="zh-CN">
+              <a:rPr sz="1425" b="0" lang="zh-CN">
                 <a:solidFill>
                   <a:srgbClr val="1F2937"/>
                 </a:solidFill>
                 <a:latin typeface="Microsoft YaHei"/>
                 <a:ea typeface="Microsoft YaHei"/>
               </a:rPr>
-              <a:t>n = 片段数，W = 候选窗口，cnt = 组数；候选维护另计 O(nW log(W+1))。</a:t>
-            </a:r>
-          </a:p>
-        </p:txBody>
-      </p:sp>
-      <p:sp>
-        <p:nvSpPr>
-          <p:cNvPr id="74" name="进程耗时 10.969 → 9.393s；RSS 峰值 393.78 → 262.53MiB。时间为逐例三轮中位数之和，内存取峰值。"/>
+              <a:t>快速：时间 O(nW) / 空间 O(n)</a:t>
+            </a:r>
+          </a:p>
+        </p:txBody>
+      </p:sp>
+      <p:sp>
+        <p:nvSpPr>
+          <p:cNvPr id="99" name="细化：O(cnt·n·W) / O(cnt·n+nW)"/>
           <p:cNvSpPr txBox="1"/>
           <p:nvPr/>
         </p:nvSpPr>
         <p:spPr>
           <a:xfrm>
-            <a:off x="381000" y="7343775"/>
-            <a:ext cx="11430000" cy="200025"/>
+            <a:off x="10210800" y="8153399"/>
+            <a:ext cx="4381500" cy="238125"/>
           </a:xfrm>
           <a:prstGeom prst="rect">
             <a:avLst/>
@@ -6777,14 +7857,190 @@
               </a:spcAft>
             </a:pPr>
             <a:r>
-              <a:rPr sz="1200" b="0" lang="zh-CN">
+              <a:rPr sz="1425" b="0" lang="zh-CN">
                 <a:solidFill>
                   <a:srgbClr val="1F2937"/>
                 </a:solidFill>
                 <a:latin typeface="Microsoft YaHei"/>
                 <a:ea typeface="Microsoft YaHei"/>
               </a:rPr>
-              <a:t>进程耗时 10.969 → 9.393s；RSS 峰值 393.78 → 262.53MiB。时间为逐例三轮中位数之和，内存取峰值。</a:t>
+              <a:t>细化：O(cnt·n·W) / O(cnt·n+nW)</a:t>
+            </a:r>
+          </a:p>
+        </p:txBody>
+      </p:sp>
+      <p:sp>
+        <p:nvSpPr>
+          <p:cNvPr id="100" name="进程耗时 10.969 → 9.393s"/>
+          <p:cNvSpPr txBox="1"/>
+          <p:nvPr/>
+        </p:nvSpPr>
+        <p:spPr>
+          <a:xfrm>
+            <a:off x="10210800" y="8458200"/>
+            <a:ext cx="4381500" cy="219075"/>
+          </a:xfrm>
+          <a:prstGeom prst="rect">
+            <a:avLst/>
+          </a:prstGeom>
+          <a:noFill/>
+          <a:effectLst/>
+        </p:spPr>
+        <p:txBody>
+          <a:bodyPr wrap="square" lIns="0" rIns="0" tIns="0" bIns="0">
+            <a:spAutoFit/>
+          </a:bodyPr>
+          <a:lstStyle/>
+          <a:p>
+            <a:pPr algn="l">
+              <a:lnSpc>
+                <a:spcPct val="112000"/>
+              </a:lnSpc>
+              <a:spcAft>
+                <a:spcPts val="300"/>
+              </a:spcAft>
+            </a:pPr>
+            <a:r>
+              <a:rPr sz="1425" b="1" lang="zh-CN">
+                <a:solidFill>
+                  <a:srgbClr val="245DA0"/>
+                </a:solidFill>
+                <a:latin typeface="Microsoft YaHei"/>
+                <a:ea typeface="Microsoft YaHei"/>
+              </a:rPr>
+              <a:t>进程耗时 10.969 → 9.393s</a:t>
+            </a:r>
+          </a:p>
+        </p:txBody>
+      </p:sp>
+      <p:sp>
+        <p:nvSpPr>
+          <p:cNvPr id="101" name="RSS 峰值 393.78 → 262.53MiB"/>
+          <p:cNvSpPr txBox="1"/>
+          <p:nvPr/>
+        </p:nvSpPr>
+        <p:spPr>
+          <a:xfrm>
+            <a:off x="10210800" y="8743950"/>
+            <a:ext cx="4381500" cy="219075"/>
+          </a:xfrm>
+          <a:prstGeom prst="rect">
+            <a:avLst/>
+          </a:prstGeom>
+          <a:noFill/>
+          <a:effectLst/>
+        </p:spPr>
+        <p:txBody>
+          <a:bodyPr wrap="square" lIns="0" rIns="0" tIns="0" bIns="0">
+            <a:spAutoFit/>
+          </a:bodyPr>
+          <a:lstStyle/>
+          <a:p>
+            <a:pPr algn="l">
+              <a:lnSpc>
+                <a:spcPct val="112000"/>
+              </a:lnSpc>
+              <a:spcAft>
+                <a:spcPts val="300"/>
+              </a:spcAft>
+            </a:pPr>
+            <a:r>
+              <a:rPr sz="1425" b="1" lang="zh-CN">
+                <a:solidFill>
+                  <a:srgbClr val="245DA0"/>
+                </a:solidFill>
+                <a:latin typeface="Microsoft YaHei"/>
+                <a:ea typeface="Microsoft YaHei"/>
+              </a:rPr>
+              <a:t>RSS 峰值 393.78 → 262.53MiB</a:t>
+            </a:r>
+          </a:p>
+        </p:txBody>
+      </p:sp>
+      <p:sp>
+        <p:nvSpPr>
+          <p:cNvPr id="102" name="n：片段数 · W：窗口 · cnt：固定候选组数；候选维护另计 O(nW log(W+1))。"/>
+          <p:cNvSpPr txBox="1"/>
+          <p:nvPr/>
+        </p:nvSpPr>
+        <p:spPr>
+          <a:xfrm>
+            <a:off x="457200" y="9201150"/>
+            <a:ext cx="9525000" cy="200025"/>
+          </a:xfrm>
+          <a:prstGeom prst="rect">
+            <a:avLst/>
+          </a:prstGeom>
+          <a:noFill/>
+          <a:effectLst/>
+        </p:spPr>
+        <p:txBody>
+          <a:bodyPr wrap="square" lIns="0" rIns="0" tIns="0" bIns="0">
+            <a:spAutoFit/>
+          </a:bodyPr>
+          <a:lstStyle/>
+          <a:p>
+            <a:pPr algn="l">
+              <a:lnSpc>
+                <a:spcPct val="112000"/>
+              </a:lnSpc>
+              <a:spcAft>
+                <a:spcPts val="300"/>
+              </a:spcAft>
+            </a:pPr>
+            <a:r>
+              <a:rPr sz="1275" b="0" lang="zh-CN">
+                <a:solidFill>
+                  <a:srgbClr val="627286"/>
+                </a:solidFill>
+                <a:latin typeface="Microsoft YaHei"/>
+                <a:ea typeface="Microsoft YaHei"/>
+              </a:rPr>
+              <a:t>n：片段数 · W：窗口 · cnt：固定候选组数；候选维护另计 O(nW log(W+1))。</a:t>
+            </a:r>
+          </a:p>
+        </p:txBody>
+      </p:sp>
+      <p:sp>
+        <p:nvSpPr>
+          <p:cNvPr id="103" name="自动评分 67.1981 → 88.4555 / 90"/>
+          <p:cNvSpPr txBox="1"/>
+          <p:nvPr/>
+        </p:nvSpPr>
+        <p:spPr>
+          <a:xfrm>
+            <a:off x="10210800" y="9201150"/>
+            <a:ext cx="4381500" cy="219075"/>
+          </a:xfrm>
+          <a:prstGeom prst="rect">
+            <a:avLst/>
+          </a:prstGeom>
+          <a:noFill/>
+          <a:effectLst/>
+        </p:spPr>
+        <p:txBody>
+          <a:bodyPr wrap="square" lIns="0" rIns="0" tIns="0" bIns="0">
+            <a:spAutoFit/>
+          </a:bodyPr>
+          <a:lstStyle/>
+          <a:p>
+            <a:pPr algn="l">
+              <a:lnSpc>
+                <a:spcPct val="112000"/>
+              </a:lnSpc>
+              <a:spcAft>
+                <a:spcPts val="300"/>
+              </a:spcAft>
+            </a:pPr>
+            <a:r>
+              <a:rPr sz="1575" b="1" lang="zh-CN">
+                <a:solidFill>
+                  <a:srgbClr val="176F68"/>
+                </a:solidFill>
+                <a:latin typeface="Microsoft YaHei"/>
+                <a:ea typeface="Microsoft YaHei"/>
+              </a:rPr>
+              <a:t>自动评分 67.1981 → 88.4555 / 90</a:t>
             </a:r>
           </a:p>
         </p:txBody>
